--- a/nvc-pitch-deck.pptx
+++ b/nvc-pitch-deck.pptx
@@ -3174,7 +3174,7 @@
           <a:p>
             <a:pPr algn="l">
               <a:lnSpc>
-                <a:spcPct val="115000"/>
+                <a:spcPct val="112000"/>
               </a:lnSpc>
               <a:spcBef>
                 <a:spcPts val="0"/>
@@ -3182,7 +3182,7 @@
               <a:spcAft>
                 <a:spcPts val="0"/>
               </a:spcAft>
-              <a:defRPr sz="4400" b="0">
+              <a:defRPr sz="4800" b="0">
                 <a:solidFill>
                   <a:srgbClr val="2C2A26"/>
                 </a:solidFill>
@@ -3190,19 +3190,15 @@
               </a:defRPr>
             </a:pPr>
             <a:r>
-              <a:t>I want to hike up a mountain,</a:t>
+              <a:t>Technology should help us</a:t>
             </a:r>
             <a:br/>
             <a:r>
-              <a:t>share my ideas as I walk,</a:t>
+              <a:t>live fully — not demand</a:t>
             </a:r>
             <a:br/>
             <a:r>
-              <a:t>and come back down</a:t>
-            </a:r>
-            <a:br/>
-            <a:r>
-              <a:t>to a working app.</a:t>
+              <a:t>we stop living to use it.</a:t>
             </a:r>
           </a:p>
         </p:txBody>
@@ -3215,8 +3211,8 @@
         </p:nvSpPr>
         <p:spPr>
           <a:xfrm>
-            <a:off x="1097280" y="4754880"/>
-            <a:ext cx="7315200" cy="914400"/>
+            <a:off x="1097280" y="4572000"/>
+            <a:ext cx="7315200" cy="1097280"/>
           </a:xfrm>
           <a:prstGeom prst="rect">
             <a:avLst/>
@@ -3247,15 +3243,19 @@
               </a:defRPr>
             </a:pPr>
             <a:r>
-              <a:t>That dream is closer to real than it's ever been.</a:t>
+              <a:t>I want to hike up a mountain, share my ideas as I walk,</a:t>
             </a:r>
             <a:br/>
             <a:r>
+              <a:t>and come back down to a working app.</a:t>
+            </a:r>
+            <a:br/>
+            <a:r>
               <a:t>But I also want to hold my nephew. Be outside. Live a full life.</a:t>
             </a:r>
             <a:br/>
             <a:r>
-              <a:t>Parachute exists because we shouldn't have to choose.</a:t>
+              <a:t>We shouldn't have to choose.</a:t>
             </a:r>
           </a:p>
         </p:txBody>
@@ -4035,11 +4035,11 @@
               </a:defRPr>
             </a:pPr>
             <a:r>
-              <a:t>OpenClaw — 300K+ GitHub stars in 3 months. Claude Cowork — recurring agents, messaging via Telegram.</a:t>
+              <a:t>Hundreds of millions of people already pay $20-200/month for AI tools.</a:t>
             </a:r>
             <a:br/>
             <a:r>
-              <a:t>ZoComputer. Perplexity Computer. Manus. The race is on.</a:t>
+              <a:t>OpenClaw — 300K+ stars in 3 months. Claude Cowork. ZoComputer. Perplexity Computer. Manus.</a:t>
             </a:r>
           </a:p>
         </p:txBody>
@@ -4084,7 +4084,7 @@
               </a:defRPr>
             </a:pPr>
             <a:r>
-              <a:t>$16B</a:t>
+              <a:t>$50B+</a:t>
             </a:r>
           </a:p>
         </p:txBody>
@@ -4097,8 +4097,8 @@
         </p:nvSpPr>
         <p:spPr>
           <a:xfrm>
-            <a:off x="3840480" y="4983480"/>
-            <a:ext cx="2743200" cy="731520"/>
+            <a:off x="4114800" y="4983480"/>
+            <a:ext cx="4572000" cy="731520"/>
           </a:xfrm>
           <a:prstGeom prst="rect">
             <a:avLst/>
@@ -4129,11 +4129,11 @@
               </a:defRPr>
             </a:pPr>
             <a:r>
-              <a:t>market today</a:t>
+              <a:t>agentic AI market by 2030 · 44% CAGR</a:t>
             </a:r>
             <a:br/>
             <a:r>
-              <a:t>$268B by 2035 · 41% CAGR</a:t>
+              <a:t>OpenAI alone projects $200B revenue by 2030</a:t>
             </a:r>
           </a:p>
         </p:txBody>
@@ -4178,7 +4178,7 @@
               </a:defRPr>
             </a:pPr>
             <a:r>
-              <a:t>But they're all building for the 5% who are already bought in.</a:t>
+              <a:t>The question isn't whether this market exists — it's who they'll trust.</a:t>
             </a:r>
           </a:p>
         </p:txBody>
@@ -4534,7 +4534,7 @@
         <p:spPr>
           <a:xfrm>
             <a:off x="1097280" y="3200400"/>
-            <a:ext cx="5029200" cy="3200400"/>
+            <a:ext cx="5029200" cy="2560320"/>
           </a:xfrm>
           <a:prstGeom prst="rect">
             <a:avLst/>
@@ -4549,7 +4549,7 @@
           <a:p>
             <a:pPr algn="l">
               <a:lnSpc>
-                <a:spcPct val="155000"/>
+                <a:spcPct val="150000"/>
               </a:lnSpc>
               <a:spcBef>
                 <a:spcPts val="0"/>
@@ -4593,8 +4593,48 @@
             <a:r>
               <a:t>  ·  Weekly synthesis of your thinking</a:t>
             </a:r>
-            <a:br/>
-            <a:br/>
+          </a:p>
+        </p:txBody>
+      </p:sp>
+      <p:sp>
+        <p:nvSpPr>
+          <p:cNvPr id="5" name="TextBox 4"/>
+          <p:cNvSpPr txBox="1"/>
+          <p:nvPr/>
+        </p:nvSpPr>
+        <p:spPr>
+          <a:xfrm>
+            <a:off x="1097280" y="5943600"/>
+            <a:ext cx="5029200" cy="457200"/>
+          </a:xfrm>
+          <a:prstGeom prst="rect">
+            <a:avLst/>
+          </a:prstGeom>
+          <a:noFill/>
+        </p:spPr>
+        <p:txBody>
+          <a:bodyPr wrap="square">
+            <a:spAutoFit/>
+          </a:bodyPr>
+          <a:lstStyle/>
+          <a:p>
+            <a:pPr algn="l">
+              <a:lnSpc>
+                <a:spcPct val="120000"/>
+              </a:lnSpc>
+              <a:spcBef>
+                <a:spcPts val="0"/>
+              </a:spcBef>
+              <a:spcAft>
+                <a:spcPts val="0"/>
+              </a:spcAft>
+              <a:defRPr sz="1800" b="0">
+                <a:solidFill>
+                  <a:srgbClr val="2C2A26"/>
+                </a:solidFill>
+                <a:latin typeface="Calibri"/>
+              </a:defRPr>
+            </a:pPr>
             <a:r>
               <a:t>No learning curve. No technical sophistication required.</a:t>
             </a:r>
@@ -4603,14 +4643,14 @@
       </p:sp>
       <p:sp>
         <p:nvSpPr>
-          <p:cNvPr id="5" name="Rounded Rectangle 4"/>
+          <p:cNvPr id="6" name="Rounded Rectangle 5"/>
           <p:cNvSpPr/>
           <p:nvPr/>
         </p:nvSpPr>
         <p:spPr>
           <a:xfrm>
-            <a:off x="7132320" y="2743200"/>
-            <a:ext cx="4114800" cy="3474720"/>
+            <a:off x="7132320" y="3200400"/>
+            <a:ext cx="4114800" cy="2743200"/>
           </a:xfrm>
           <a:prstGeom prst="roundRect">
             <a:avLst/>
@@ -4648,13 +4688,13 @@
       </p:sp>
       <p:sp>
         <p:nvSpPr>
-          <p:cNvPr id="6" name="TextBox 5"/>
+          <p:cNvPr id="7" name="TextBox 6"/>
           <p:cNvSpPr txBox="1"/>
           <p:nvPr/>
         </p:nvSpPr>
         <p:spPr>
           <a:xfrm>
-            <a:off x="7498079" y="3108960"/>
+            <a:off x="7498079" y="3474720"/>
             <a:ext cx="3383280" cy="365760"/>
           </a:xfrm>
           <a:prstGeom prst="rect">
@@ -4693,14 +4733,14 @@
       </p:sp>
       <p:sp>
         <p:nvSpPr>
-          <p:cNvPr id="7" name="TextBox 6"/>
+          <p:cNvPr id="8" name="TextBox 7"/>
           <p:cNvSpPr txBox="1"/>
           <p:nvPr/>
         </p:nvSpPr>
         <p:spPr>
           <a:xfrm>
-            <a:off x="7498079" y="3566160"/>
-            <a:ext cx="3383280" cy="2286000"/>
+            <a:off x="7498079" y="3931920"/>
+            <a:ext cx="3383280" cy="1828800"/>
           </a:xfrm>
           <a:prstGeom prst="rect">
             <a:avLst/>
@@ -4715,7 +4755,7 @@
           <a:p>
             <a:pPr algn="l">
               <a:lnSpc>
-                <a:spcPct val="150000"/>
+                <a:spcPct val="145000"/>
               </a:lnSpc>
               <a:spcBef>
                 <a:spcPts val="0"/>
@@ -6144,7 +6184,7 @@
               </a:defRPr>
             </a:pPr>
             <a:r>
-              <a:t>Offline journal, local transcription, no sync</a:t>
+              <a:t>Offline journal + on-device transcription. Zero hosting cost.</a:t>
             </a:r>
           </a:p>
         </p:txBody>
@@ -6234,7 +6274,7 @@
               </a:defRPr>
             </a:pPr>
             <a:r>
-              <a:t>Cloud sync + transcription. AI starts here.</a:t>
+              <a:t>Cloud sync across devices. Your notes everywhere.</a:t>
             </a:r>
           </a:p>
         </p:txBody>
@@ -6367,7 +6407,7 @@
               </a:defRPr>
             </a:pPr>
             <a:r>
-              <a:t>Daily reflections, synthesis, pattern surfacing — the sweet spot</a:t>
+              <a:t>Cloud transcription + AI reflections, synthesis, pattern surfacing</a:t>
             </a:r>
           </a:p>
         </p:txBody>
@@ -6506,7 +6546,7 @@
             </a:r>
             <a:br/>
             <a:r>
-              <a:t>AI inference at $2-5 tiers uses cost-efficient models (Nvidia Nemotron). Margins are real.</a:t>
+              <a:t>AI at $5/mo uses cost-efficient models. Margins are real and improve as model costs drop.</a:t>
             </a:r>
           </a:p>
         </p:txBody>
@@ -6622,7 +6662,11 @@
               </a:defRPr>
             </a:pPr>
             <a:r>
-              <a:t>Small, capable, committed.</a:t>
+              <a:t>Built from zero.</a:t>
+            </a:r>
+            <a:br/>
+            <a:r>
+              <a:t>Solo. No funding.</a:t>
             </a:r>
           </a:p>
         </p:txBody>
@@ -6635,8 +6679,82 @@
         </p:nvSpPr>
         <p:spPr>
           <a:xfrm>
-            <a:off x="1097280" y="3017520"/>
-            <a:ext cx="2743200" cy="320040"/>
+            <a:off x="1097280" y="3200400"/>
+            <a:ext cx="5029200" cy="2743200"/>
+          </a:xfrm>
+          <a:prstGeom prst="rect">
+            <a:avLst/>
+          </a:prstGeom>
+          <a:noFill/>
+        </p:spPr>
+        <p:txBody>
+          <a:bodyPr wrap="square">
+            <a:spAutoFit/>
+          </a:bodyPr>
+          <a:lstStyle/>
+          <a:p>
+            <a:pPr algn="l">
+              <a:lnSpc>
+                <a:spcPct val="155000"/>
+              </a:lnSpc>
+              <a:spcBef>
+                <a:spcPts val="0"/>
+              </a:spcBef>
+              <a:spcAft>
+                <a:spcPts val="0"/>
+              </a:spcAft>
+              <a:defRPr sz="1600" b="0">
+                <a:solidFill>
+                  <a:srgbClr val="6B6860"/>
+                </a:solidFill>
+                <a:latin typeface="Calibri"/>
+              </a:defRPr>
+            </a:pPr>
+            <a:r>
+              <a:t>What exists today:</a:t>
+            </a:r>
+            <a:br/>
+            <a:br/>
+            <a:r>
+              <a:t>  ·  Working server, app, and graph-native memory</a:t>
+            </a:r>
+            <a:br/>
+            <a:r>
+              <a:t>  ·  Local voice transcription (fully offline)</a:t>
+            </a:r>
+            <a:br/>
+            <a:r>
+              <a:t>  ·  Multi-agent system with trust tiers</a:t>
+            </a:r>
+            <a:br/>
+            <a:r>
+              <a:t>  ·  Telegram, Discord, Matrix connectors</a:t>
+            </a:r>
+            <a:br/>
+            <a:r>
+              <a:t>  ·  Functional pendant prototype</a:t>
+            </a:r>
+            <a:br/>
+            <a:r>
+              <a:t>  ·  Beta launching next month</a:t>
+            </a:r>
+            <a:br/>
+            <a:r>
+              <a:t>  ·  PBC incorporated in Colorado</a:t>
+            </a:r>
+          </a:p>
+        </p:txBody>
+      </p:sp>
+      <p:sp>
+        <p:nvSpPr>
+          <p:cNvPr id="5" name="TextBox 4"/>
+          <p:cNvSpPr txBox="1"/>
+          <p:nvPr/>
+        </p:nvSpPr>
+        <p:spPr>
+          <a:xfrm>
+            <a:off x="7132320" y="3017520"/>
+            <a:ext cx="3657600" cy="320040"/>
           </a:xfrm>
           <a:prstGeom prst="rect">
             <a:avLst/>
@@ -6659,29 +6777,29 @@
               <a:spcAft>
                 <a:spcPts val="0"/>
               </a:spcAft>
-              <a:defRPr sz="1600" b="1">
-                <a:solidFill>
-                  <a:srgbClr val="2C2A26"/>
+              <a:defRPr sz="1100" b="1">
+                <a:solidFill>
+                  <a:srgbClr val="4A7C59"/>
                 </a:solidFill>
                 <a:latin typeface="Calibri"/>
               </a:defRPr>
             </a:pPr>
             <a:r>
-              <a:t>Aaron Gabriel Neyer</a:t>
-            </a:r>
-          </a:p>
-        </p:txBody>
-      </p:sp>
-      <p:sp>
-        <p:nvSpPr>
-          <p:cNvPr id="5" name="TextBox 4"/>
+              <a:t>THE TEAM</a:t>
+            </a:r>
+          </a:p>
+        </p:txBody>
+      </p:sp>
+      <p:sp>
+        <p:nvSpPr>
+          <p:cNvPr id="6" name="TextBox 5"/>
           <p:cNvSpPr txBox="1"/>
           <p:nvPr/>
         </p:nvSpPr>
         <p:spPr>
           <a:xfrm>
-            <a:off x="3840480" y="3017520"/>
-            <a:ext cx="4572000" cy="320040"/>
+            <a:off x="7132320" y="3566160"/>
+            <a:ext cx="4114800" cy="274320"/>
           </a:xfrm>
           <a:prstGeom prst="rect">
             <a:avLst/>
@@ -6704,29 +6822,29 @@
               <a:spcAft>
                 <a:spcPts val="0"/>
               </a:spcAft>
-              <a:defRPr sz="1400" b="0">
-                <a:solidFill>
-                  <a:srgbClr val="6B6860"/>
+              <a:defRPr sz="1400" b="1">
+                <a:solidFill>
+                  <a:srgbClr val="2C2A26"/>
                 </a:solidFill>
                 <a:latin typeface="Calibri"/>
               </a:defRPr>
             </a:pPr>
             <a:r>
-              <a:t>Founder · Product &amp; architecture · CU ATLAS</a:t>
-            </a:r>
-          </a:p>
-        </p:txBody>
-      </p:sp>
-      <p:sp>
-        <p:nvSpPr>
-          <p:cNvPr id="6" name="TextBox 5"/>
+              <a:t>Aaron Gabriel Neyer</a:t>
+            </a:r>
+          </a:p>
+        </p:txBody>
+      </p:sp>
+      <p:sp>
+        <p:nvSpPr>
+          <p:cNvPr id="7" name="TextBox 6"/>
           <p:cNvSpPr txBox="1"/>
           <p:nvPr/>
         </p:nvSpPr>
         <p:spPr>
           <a:xfrm>
-            <a:off x="1097280" y="3429000"/>
-            <a:ext cx="2743200" cy="320040"/>
+            <a:off x="7132320" y="3822192"/>
+            <a:ext cx="4114800" cy="274320"/>
           </a:xfrm>
           <a:prstGeom prst="rect">
             <a:avLst/>
@@ -6749,29 +6867,29 @@
               <a:spcAft>
                 <a:spcPts val="0"/>
               </a:spcAft>
-              <a:defRPr sz="1600" b="1">
-                <a:solidFill>
-                  <a:srgbClr val="2C2A26"/>
+              <a:defRPr sz="1200" b="0">
+                <a:solidFill>
+                  <a:srgbClr val="6B6860"/>
                 </a:solidFill>
                 <a:latin typeface="Calibri"/>
               </a:defRPr>
             </a:pPr>
             <a:r>
-              <a:t>Jon Bo</a:t>
-            </a:r>
-          </a:p>
-        </p:txBody>
-      </p:sp>
-      <p:sp>
-        <p:nvSpPr>
-          <p:cNvPr id="7" name="TextBox 6"/>
+              <a:t>Founder · Product &amp; architecture</a:t>
+            </a:r>
+          </a:p>
+        </p:txBody>
+      </p:sp>
+      <p:sp>
+        <p:nvSpPr>
+          <p:cNvPr id="8" name="TextBox 7"/>
           <p:cNvSpPr txBox="1"/>
           <p:nvPr/>
         </p:nvSpPr>
         <p:spPr>
           <a:xfrm>
-            <a:off x="3840480" y="3429000"/>
-            <a:ext cx="4572000" cy="320040"/>
+            <a:off x="7132320" y="4114800"/>
+            <a:ext cx="4114800" cy="274320"/>
           </a:xfrm>
           <a:prstGeom prst="rect">
             <a:avLst/>
@@ -6794,29 +6912,29 @@
               <a:spcAft>
                 <a:spcPts val="0"/>
               </a:spcAft>
-              <a:defRPr sz="1400" b="0">
-                <a:solidFill>
-                  <a:srgbClr val="6B6860"/>
+              <a:defRPr sz="1400" b="1">
+                <a:solidFill>
+                  <a:srgbClr val="2C2A26"/>
                 </a:solidFill>
                 <a:latin typeface="Calibri"/>
               </a:defRPr>
             </a:pPr>
             <a:r>
-              <a:t>Daily co-lead · Founding engineer, multiple startups</a:t>
-            </a:r>
-          </a:p>
-        </p:txBody>
-      </p:sp>
-      <p:sp>
-        <p:nvSpPr>
-          <p:cNvPr id="8" name="TextBox 7"/>
+              <a:t>Jon Bo</a:t>
+            </a:r>
+          </a:p>
+        </p:txBody>
+      </p:sp>
+      <p:sp>
+        <p:nvSpPr>
+          <p:cNvPr id="9" name="TextBox 8"/>
           <p:cNvSpPr txBox="1"/>
           <p:nvPr/>
         </p:nvSpPr>
         <p:spPr>
           <a:xfrm>
-            <a:off x="1097280" y="3840480"/>
-            <a:ext cx="2743200" cy="320040"/>
+            <a:off x="7132320" y="4370832"/>
+            <a:ext cx="4114800" cy="274320"/>
           </a:xfrm>
           <a:prstGeom prst="rect">
             <a:avLst/>
@@ -6839,29 +6957,29 @@
               <a:spcAft>
                 <a:spcPts val="0"/>
               </a:spcAft>
-              <a:defRPr sz="1600" b="1">
-                <a:solidFill>
-                  <a:srgbClr val="2C2A26"/>
+              <a:defRPr sz="1200" b="0">
+                <a:solidFill>
+                  <a:srgbClr val="6B6860"/>
                 </a:solidFill>
                 <a:latin typeface="Calibri"/>
               </a:defRPr>
             </a:pPr>
             <a:r>
-              <a:t>Lucian Hymer</a:t>
-            </a:r>
-          </a:p>
-        </p:txBody>
-      </p:sp>
-      <p:sp>
-        <p:nvSpPr>
-          <p:cNvPr id="9" name="TextBox 8"/>
+              <a:t>Daily co-lead · Founding engineer</a:t>
+            </a:r>
+          </a:p>
+        </p:txBody>
+      </p:sp>
+      <p:sp>
+        <p:nvSpPr>
+          <p:cNvPr id="10" name="TextBox 9"/>
           <p:cNvSpPr txBox="1"/>
           <p:nvPr/>
         </p:nvSpPr>
         <p:spPr>
           <a:xfrm>
-            <a:off x="3840480" y="3840480"/>
-            <a:ext cx="4572000" cy="320040"/>
+            <a:off x="7132320" y="4663440"/>
+            <a:ext cx="4114800" cy="274320"/>
           </a:xfrm>
           <a:prstGeom prst="rect">
             <a:avLst/>
@@ -6884,29 +7002,29 @@
               <a:spcAft>
                 <a:spcPts val="0"/>
               </a:spcAft>
-              <a:defRPr sz="1400" b="0">
-                <a:solidFill>
-                  <a:srgbClr val="6B6860"/>
+              <a:defRPr sz="1400" b="1">
+                <a:solidFill>
+                  <a:srgbClr val="2C2A26"/>
                 </a:solidFill>
                 <a:latin typeface="Calibri"/>
               </a:defRPr>
             </a:pPr>
             <a:r>
-              <a:t>Computer co-lead · Founding engineer, multiple startups</a:t>
-            </a:r>
-          </a:p>
-        </p:txBody>
-      </p:sp>
-      <p:sp>
-        <p:nvSpPr>
-          <p:cNvPr id="10" name="TextBox 9"/>
+              <a:t>Lucian Hymer</a:t>
+            </a:r>
+          </a:p>
+        </p:txBody>
+      </p:sp>
+      <p:sp>
+        <p:nvSpPr>
+          <p:cNvPr id="11" name="TextBox 10"/>
           <p:cNvSpPr txBox="1"/>
           <p:nvPr/>
         </p:nvSpPr>
         <p:spPr>
           <a:xfrm>
-            <a:off x="1097280" y="4251960"/>
-            <a:ext cx="2743200" cy="320040"/>
+            <a:off x="7132320" y="4919472"/>
+            <a:ext cx="4114800" cy="274320"/>
           </a:xfrm>
           <a:prstGeom prst="rect">
             <a:avLst/>
@@ -6929,29 +7047,29 @@
               <a:spcAft>
                 <a:spcPts val="0"/>
               </a:spcAft>
-              <a:defRPr sz="1600" b="1">
-                <a:solidFill>
-                  <a:srgbClr val="2C2A26"/>
+              <a:defRPr sz="1200" b="0">
+                <a:solidFill>
+                  <a:srgbClr val="6B6860"/>
                 </a:solidFill>
                 <a:latin typeface="Calibri"/>
               </a:defRPr>
             </a:pPr>
             <a:r>
-              <a:t>Marvin Melzer</a:t>
-            </a:r>
-          </a:p>
-        </p:txBody>
-      </p:sp>
-      <p:sp>
-        <p:nvSpPr>
-          <p:cNvPr id="11" name="TextBox 10"/>
+              <a:t>Computer co-lead · Founding engineer</a:t>
+            </a:r>
+          </a:p>
+        </p:txBody>
+      </p:sp>
+      <p:sp>
+        <p:nvSpPr>
+          <p:cNvPr id="12" name="TextBox 11"/>
           <p:cNvSpPr txBox="1"/>
           <p:nvPr/>
         </p:nvSpPr>
         <p:spPr>
           <a:xfrm>
-            <a:off x="3840480" y="4251960"/>
-            <a:ext cx="4572000" cy="320040"/>
+            <a:off x="7132320" y="5212080"/>
+            <a:ext cx="4114800" cy="274320"/>
           </a:xfrm>
           <a:prstGeom prst="rect">
             <a:avLst/>
@@ -6974,29 +7092,29 @@
               <a:spcAft>
                 <a:spcPts val="0"/>
               </a:spcAft>
-              <a:defRPr sz="1400" b="0">
-                <a:solidFill>
-                  <a:srgbClr val="6B6860"/>
+              <a:defRPr sz="1400" b="1">
+                <a:solidFill>
+                  <a:srgbClr val="2C2A26"/>
                 </a:solidFill>
                 <a:latin typeface="Calibri"/>
               </a:defRPr>
             </a:pPr>
             <a:r>
-              <a:t>Hardware · Pendant prototype · ATLAS</a:t>
-            </a:r>
-          </a:p>
-        </p:txBody>
-      </p:sp>
-      <p:sp>
-        <p:nvSpPr>
-          <p:cNvPr id="12" name="TextBox 11"/>
+              <a:t>Marvin Melzer</a:t>
+            </a:r>
+          </a:p>
+        </p:txBody>
+      </p:sp>
+      <p:sp>
+        <p:nvSpPr>
+          <p:cNvPr id="13" name="TextBox 12"/>
           <p:cNvSpPr txBox="1"/>
           <p:nvPr/>
         </p:nvSpPr>
         <p:spPr>
           <a:xfrm>
-            <a:off x="1097280" y="4663440"/>
-            <a:ext cx="2743200" cy="320040"/>
+            <a:off x="7132320" y="5468112"/>
+            <a:ext cx="4114800" cy="274320"/>
           </a:xfrm>
           <a:prstGeom prst="rect">
             <a:avLst/>
@@ -7019,29 +7137,29 @@
               <a:spcAft>
                 <a:spcPts val="0"/>
               </a:spcAft>
-              <a:defRPr sz="1600" b="1">
-                <a:solidFill>
-                  <a:srgbClr val="2C2A26"/>
+              <a:defRPr sz="1200" b="0">
+                <a:solidFill>
+                  <a:srgbClr val="6B6860"/>
                 </a:solidFill>
                 <a:latin typeface="Calibri"/>
               </a:defRPr>
             </a:pPr>
             <a:r>
-              <a:t>Neil Yarnal</a:t>
-            </a:r>
-          </a:p>
-        </p:txBody>
-      </p:sp>
-      <p:sp>
-        <p:nvSpPr>
-          <p:cNvPr id="13" name="TextBox 12"/>
+              <a:t>Hardware · Pendant prototype</a:t>
+            </a:r>
+          </a:p>
+        </p:txBody>
+      </p:sp>
+      <p:sp>
+        <p:nvSpPr>
+          <p:cNvPr id="14" name="TextBox 13"/>
           <p:cNvSpPr txBox="1"/>
           <p:nvPr/>
         </p:nvSpPr>
         <p:spPr>
           <a:xfrm>
-            <a:off x="3840480" y="4663440"/>
-            <a:ext cx="4572000" cy="320040"/>
+            <a:off x="7132320" y="5760720"/>
+            <a:ext cx="4114800" cy="274320"/>
           </a:xfrm>
           <a:prstGeom prst="rect">
             <a:avLst/>
@@ -7064,29 +7182,29 @@
               <a:spcAft>
                 <a:spcPts val="0"/>
               </a:spcAft>
-              <a:defRPr sz="1400" b="0">
-                <a:solidFill>
-                  <a:srgbClr val="6B6860"/>
+              <a:defRPr sz="1400" b="1">
+                <a:solidFill>
+                  <a:srgbClr val="2C2A26"/>
                 </a:solidFill>
                 <a:latin typeface="Calibri"/>
               </a:defRPr>
             </a:pPr>
             <a:r>
-              <a:t>Brand &amp; design</a:t>
-            </a:r>
-          </a:p>
-        </p:txBody>
-      </p:sp>
-      <p:sp>
-        <p:nvSpPr>
-          <p:cNvPr id="14" name="TextBox 13"/>
+              <a:t>Neil Yarnal</a:t>
+            </a:r>
+          </a:p>
+        </p:txBody>
+      </p:sp>
+      <p:sp>
+        <p:nvSpPr>
+          <p:cNvPr id="15" name="TextBox 14"/>
           <p:cNvSpPr txBox="1"/>
           <p:nvPr/>
         </p:nvSpPr>
         <p:spPr>
           <a:xfrm>
-            <a:off x="7772400" y="3017520"/>
-            <a:ext cx="1371600" cy="640080"/>
+            <a:off x="7132320" y="6016752"/>
+            <a:ext cx="4114800" cy="274320"/>
           </a:xfrm>
           <a:prstGeom prst="rect">
             <a:avLst/>
@@ -7099,7 +7217,7 @@
           </a:bodyPr>
           <a:lstStyle/>
           <a:p>
-            <a:pPr algn="ctr">
+            <a:pPr algn="l">
               <a:lnSpc>
                 <a:spcPct val="120000"/>
               </a:lnSpc>
@@ -7109,252 +7227,15 @@
               <a:spcAft>
                 <a:spcPts val="0"/>
               </a:spcAft>
-              <a:defRPr sz="3600" b="0">
-                <a:solidFill>
-                  <a:srgbClr val="4A7C59"/>
-                </a:solidFill>
-                <a:latin typeface="Georgia"/>
+              <a:defRPr sz="1200" b="0">
+                <a:solidFill>
+                  <a:srgbClr val="6B6860"/>
+                </a:solidFill>
+                <a:latin typeface="Calibri"/>
               </a:defRPr>
             </a:pPr>
             <a:r>
-              <a:t>200+</a:t>
-            </a:r>
-          </a:p>
-        </p:txBody>
-      </p:sp>
-      <p:sp>
-        <p:nvSpPr>
-          <p:cNvPr id="15" name="TextBox 14"/>
-          <p:cNvSpPr txBox="1"/>
-          <p:nvPr/>
-        </p:nvSpPr>
-        <p:spPr>
-          <a:xfrm>
-            <a:off x="7772400" y="3657600"/>
-            <a:ext cx="1371600" cy="640080"/>
-          </a:xfrm>
-          <a:prstGeom prst="rect">
-            <a:avLst/>
-          </a:prstGeom>
-          <a:noFill/>
-        </p:spPr>
-        <p:txBody>
-          <a:bodyPr wrap="square">
-            <a:spAutoFit/>
-          </a:bodyPr>
-          <a:lstStyle/>
-          <a:p>
-            <a:pPr algn="ctr">
-              <a:lnSpc>
-                <a:spcPct val="130000"/>
-              </a:lnSpc>
-              <a:spcBef>
-                <a:spcPts val="0"/>
-              </a:spcBef>
-              <a:spcAft>
-                <a:spcPts val="0"/>
-              </a:spcAft>
-              <a:defRPr sz="1100" b="0">
-                <a:solidFill>
-                  <a:srgbClr val="9A9690"/>
-                </a:solidFill>
-                <a:latin typeface="Calibri"/>
-              </a:defRPr>
-            </a:pPr>
-            <a:r>
-              <a:t>PRs merged</a:t>
-            </a:r>
-            <a:br/>
-            <a:r>
-              <a:t>since January</a:t>
-            </a:r>
-          </a:p>
-        </p:txBody>
-      </p:sp>
-      <p:sp>
-        <p:nvSpPr>
-          <p:cNvPr id="16" name="TextBox 15"/>
-          <p:cNvSpPr txBox="1"/>
-          <p:nvPr/>
-        </p:nvSpPr>
-        <p:spPr>
-          <a:xfrm>
-            <a:off x="9235440" y="3017520"/>
-            <a:ext cx="1371600" cy="640080"/>
-          </a:xfrm>
-          <a:prstGeom prst="rect">
-            <a:avLst/>
-          </a:prstGeom>
-          <a:noFill/>
-        </p:spPr>
-        <p:txBody>
-          <a:bodyPr wrap="square">
-            <a:spAutoFit/>
-          </a:bodyPr>
-          <a:lstStyle/>
-          <a:p>
-            <a:pPr algn="ctr">
-              <a:lnSpc>
-                <a:spcPct val="120000"/>
-              </a:lnSpc>
-              <a:spcBef>
-                <a:spcPts val="0"/>
-              </a:spcBef>
-              <a:spcAft>
-                <a:spcPts val="0"/>
-              </a:spcAft>
-              <a:defRPr sz="3600" b="0">
-                <a:solidFill>
-                  <a:srgbClr val="4A7C59"/>
-                </a:solidFill>
-                <a:latin typeface="Georgia"/>
-              </a:defRPr>
-            </a:pPr>
-            <a:r>
-              <a:t>300+</a:t>
-            </a:r>
-          </a:p>
-        </p:txBody>
-      </p:sp>
-      <p:sp>
-        <p:nvSpPr>
-          <p:cNvPr id="17" name="TextBox 16"/>
-          <p:cNvSpPr txBox="1"/>
-          <p:nvPr/>
-        </p:nvSpPr>
-        <p:spPr>
-          <a:xfrm>
-            <a:off x="9235440" y="3657600"/>
-            <a:ext cx="1371600" cy="640080"/>
-          </a:xfrm>
-          <a:prstGeom prst="rect">
-            <a:avLst/>
-          </a:prstGeom>
-          <a:noFill/>
-        </p:spPr>
-        <p:txBody>
-          <a:bodyPr wrap="square">
-            <a:spAutoFit/>
-          </a:bodyPr>
-          <a:lstStyle/>
-          <a:p>
-            <a:pPr algn="ctr">
-              <a:lnSpc>
-                <a:spcPct val="130000"/>
-              </a:lnSpc>
-              <a:spcBef>
-                <a:spcPts val="0"/>
-              </a:spcBef>
-              <a:spcAft>
-                <a:spcPts val="0"/>
-              </a:spcAft>
-              <a:defRPr sz="1100" b="0">
-                <a:solidFill>
-                  <a:srgbClr val="9A9690"/>
-                </a:solidFill>
-                <a:latin typeface="Calibri"/>
-              </a:defRPr>
-            </a:pPr>
-            <a:r>
-              <a:t>Community</a:t>
-            </a:r>
-            <a:br/>
-            <a:r>
-              <a:t>members</a:t>
-            </a:r>
-          </a:p>
-        </p:txBody>
-      </p:sp>
-      <p:sp>
-        <p:nvSpPr>
-          <p:cNvPr id="18" name="TextBox 17"/>
-          <p:cNvSpPr txBox="1"/>
-          <p:nvPr/>
-        </p:nvSpPr>
-        <p:spPr>
-          <a:xfrm>
-            <a:off x="10698480" y="3017520"/>
-            <a:ext cx="1371600" cy="640080"/>
-          </a:xfrm>
-          <a:prstGeom prst="rect">
-            <a:avLst/>
-          </a:prstGeom>
-          <a:noFill/>
-        </p:spPr>
-        <p:txBody>
-          <a:bodyPr wrap="square">
-            <a:spAutoFit/>
-          </a:bodyPr>
-          <a:lstStyle/>
-          <a:p>
-            <a:pPr algn="ctr">
-              <a:lnSpc>
-                <a:spcPct val="120000"/>
-              </a:lnSpc>
-              <a:spcBef>
-                <a:spcPts val="0"/>
-              </a:spcBef>
-              <a:spcAft>
-                <a:spcPts val="0"/>
-              </a:spcAft>
-              <a:defRPr sz="3600" b="0">
-                <a:solidFill>
-                  <a:srgbClr val="4A7C59"/>
-                </a:solidFill>
-                <a:latin typeface="Georgia"/>
-              </a:defRPr>
-            </a:pPr>
-            <a:r>
-              <a:t>13</a:t>
-            </a:r>
-          </a:p>
-        </p:txBody>
-      </p:sp>
-      <p:sp>
-        <p:nvSpPr>
-          <p:cNvPr id="19" name="TextBox 18"/>
-          <p:cNvSpPr txBox="1"/>
-          <p:nvPr/>
-        </p:nvSpPr>
-        <p:spPr>
-          <a:xfrm>
-            <a:off x="10698480" y="3657600"/>
-            <a:ext cx="1371600" cy="640080"/>
-          </a:xfrm>
-          <a:prstGeom prst="rect">
-            <a:avLst/>
-          </a:prstGeom>
-          <a:noFill/>
-        </p:spPr>
-        <p:txBody>
-          <a:bodyPr wrap="square">
-            <a:spAutoFit/>
-          </a:bodyPr>
-          <a:lstStyle/>
-          <a:p>
-            <a:pPr algn="ctr">
-              <a:lnSpc>
-                <a:spcPct val="130000"/>
-              </a:lnSpc>
-              <a:spcBef>
-                <a:spcPts val="0"/>
-              </a:spcBef>
-              <a:spcAft>
-                <a:spcPts val="0"/>
-              </a:spcAft>
-              <a:defRPr sz="1100" b="0">
-                <a:solidFill>
-                  <a:srgbClr val="9A9690"/>
-                </a:solidFill>
-                <a:latin typeface="Calibri"/>
-              </a:defRPr>
-            </a:pPr>
-            <a:r>
-              <a:t>LVB cohort</a:t>
-            </a:r>
-            <a:br/>
-            <a:r>
-              <a:t>builders</a:t>
+              <a:t>Brand &amp; design</a:t>
             </a:r>
           </a:p>
         </p:txBody>

--- a/nvc-pitch-deck.pptx
+++ b/nvc-pitch-deck.pptx
@@ -3211,8 +3211,8 @@
         </p:nvSpPr>
         <p:spPr>
           <a:xfrm>
-            <a:off x="1097280" y="4572000"/>
-            <a:ext cx="7315200" cy="1097280"/>
+            <a:off x="1097280" y="4389120"/>
+            <a:ext cx="7315200" cy="914400"/>
           </a:xfrm>
           <a:prstGeom prst="rect">
             <a:avLst/>
@@ -3268,7 +3268,52 @@
         </p:nvSpPr>
         <p:spPr>
           <a:xfrm>
-            <a:off x="1097280" y="6035040"/>
+            <a:off x="1097280" y="5669280"/>
+            <a:ext cx="9144000" cy="457200"/>
+          </a:xfrm>
+          <a:prstGeom prst="rect">
+            <a:avLst/>
+          </a:prstGeom>
+          <a:noFill/>
+        </p:spPr>
+        <p:txBody>
+          <a:bodyPr wrap="square">
+            <a:spAutoFit/>
+          </a:bodyPr>
+          <a:lstStyle/>
+          <a:p>
+            <a:pPr algn="l">
+              <a:lnSpc>
+                <a:spcPct val="120000"/>
+              </a:lnSpc>
+              <a:spcBef>
+                <a:spcPts val="0"/>
+              </a:spcBef>
+              <a:spcAft>
+                <a:spcPts val="0"/>
+              </a:spcAft>
+              <a:defRPr sz="1300" b="0">
+                <a:solidFill>
+                  <a:srgbClr val="9A9690"/>
+                </a:solidFill>
+                <a:latin typeface="Calibri"/>
+              </a:defRPr>
+            </a:pPr>
+            <a:r>
+              <a:t>MA Ecopsychology · MS Creative Technology &amp; Design (CU ATLAS) · Founding engineer ×2 · Ex-Google · 10+ years full stack</a:t>
+            </a:r>
+          </a:p>
+        </p:txBody>
+      </p:sp>
+      <p:sp>
+        <p:nvSpPr>
+          <p:cNvPr id="6" name="TextBox 5"/>
+          <p:cNvSpPr txBox="1"/>
+          <p:nvPr/>
+        </p:nvSpPr>
+        <p:spPr>
+          <a:xfrm>
+            <a:off x="1097280" y="6126480"/>
             <a:ext cx="5486400" cy="365760"/>
           </a:xfrm>
           <a:prstGeom prst="rect">
@@ -4388,19 +4433,19 @@
               <a:spcAft>
                 <a:spcPts val="0"/>
               </a:spcAft>
-              <a:defRPr sz="2000" b="0">
+              <a:defRPr sz="2200" b="0">
                 <a:solidFill>
                   <a:srgbClr val="2C2A26"/>
                 </a:solidFill>
-                <a:latin typeface="Calibri"/>
+                <a:latin typeface="Georgia"/>
               </a:defRPr>
             </a:pPr>
             <a:r>
-              <a:t>They're not going to adopt a full agentic computer cold.</a:t>
+              <a:t>They need a system that learns them —</a:t>
             </a:r>
             <a:br/>
             <a:r>
-              <a:t>They need a bridge.</a:t>
+              <a:t>not one that demands they learn it.</a:t>
             </a:r>
           </a:p>
         </p:txBody>

--- a/nvc-pitch-deck.pptx
+++ b/nvc-pitch-deck.pptx
@@ -15,6 +15,7 @@
     <p:sldId id="263" r:id="rId14"/>
     <p:sldId id="264" r:id="rId15"/>
     <p:sldId id="265" r:id="rId16"/>
+    <p:sldId id="266" r:id="rId17"/>
   </p:sldIdLst>
   <p:sldSz cx="12191695" cy="6858000" type="screen4x3"/>
   <p:notesSz cx="6858000" cy="9144000"/>
@@ -3359,3941 +3360,6 @@
 </file>
 
 <file path=ppt/slides/slide10.xml><?xml version="1.0" encoding="utf-8"?>
-<p:sld xmlns:a="http://schemas.openxmlformats.org/drawingml/2006/main" xmlns:p="http://schemas.openxmlformats.org/presentationml/2006/main" xmlns:r="http://schemas.openxmlformats.org/officeDocument/2006/relationships">
-  <p:cSld>
-    <p:bg>
-      <p:bgPr>
-        <a:solidFill>
-          <a:srgbClr val="FAF8F4"/>
-        </a:solidFill>
-        <a:effectLst/>
-      </p:bgPr>
-    </p:bg>
-    <p:spTree>
-      <p:nvGrpSpPr>
-        <p:cNvPr id="1" name=""/>
-        <p:cNvGrpSpPr/>
-        <p:nvPr/>
-      </p:nvGrpSpPr>
-      <p:grpSpPr/>
-      <p:sp>
-        <p:nvSpPr>
-          <p:cNvPr id="2" name="TextBox 1"/>
-          <p:cNvSpPr txBox="1"/>
-          <p:nvPr/>
-        </p:nvSpPr>
-        <p:spPr>
-          <a:xfrm>
-            <a:off x="1097280" y="1097280"/>
-            <a:ext cx="3657600" cy="365760"/>
-          </a:xfrm>
-          <a:prstGeom prst="rect">
-            <a:avLst/>
-          </a:prstGeom>
-          <a:noFill/>
-        </p:spPr>
-        <p:txBody>
-          <a:bodyPr wrap="square">
-            <a:spAutoFit/>
-          </a:bodyPr>
-          <a:lstStyle/>
-          <a:p>
-            <a:pPr algn="l">
-              <a:lnSpc>
-                <a:spcPct val="120000"/>
-              </a:lnSpc>
-              <a:spcBef>
-                <a:spcPts val="0"/>
-              </a:spcBef>
-              <a:spcAft>
-                <a:spcPts val="0"/>
-              </a:spcAft>
-              <a:defRPr sz="1100" b="1">
-                <a:solidFill>
-                  <a:srgbClr val="4A7C59"/>
-                </a:solidFill>
-                <a:latin typeface="Calibri"/>
-              </a:defRPr>
-            </a:pPr>
-            <a:r>
-              <a:t>THE ASK</a:t>
-            </a:r>
-          </a:p>
-        </p:txBody>
-      </p:sp>
-      <p:sp>
-        <p:nvSpPr>
-          <p:cNvPr id="3" name="TextBox 2"/>
-          <p:cNvSpPr txBox="1"/>
-          <p:nvPr/>
-        </p:nvSpPr>
-        <p:spPr>
-          <a:xfrm>
-            <a:off x="1097280" y="1554480"/>
-            <a:ext cx="9144000" cy="1371600"/>
-          </a:xfrm>
-          <a:prstGeom prst="rect">
-            <a:avLst/>
-          </a:prstGeom>
-          <a:noFill/>
-        </p:spPr>
-        <p:txBody>
-          <a:bodyPr wrap="square">
-            <a:spAutoFit/>
-          </a:bodyPr>
-          <a:lstStyle/>
-          <a:p>
-            <a:pPr algn="l">
-              <a:lnSpc>
-                <a:spcPct val="105000"/>
-              </a:lnSpc>
-              <a:spcBef>
-                <a:spcPts val="0"/>
-              </a:spcBef>
-              <a:spcAft>
-                <a:spcPts val="0"/>
-              </a:spcAft>
-              <a:defRPr sz="4000" b="0">
-                <a:solidFill>
-                  <a:srgbClr val="2C2A26"/>
-                </a:solidFill>
-                <a:latin typeface="Georgia"/>
-              </a:defRPr>
-            </a:pPr>
-            <a:r>
-              <a:t>$300K to reach revenue.</a:t>
-            </a:r>
-            <a:br/>
-            <a:r>
-              <a:t>Then scale.</a:t>
-            </a:r>
-          </a:p>
-        </p:txBody>
-      </p:sp>
-      <p:sp>
-        <p:nvSpPr>
-          <p:cNvPr id="4" name="TextBox 3"/>
-          <p:cNvSpPr txBox="1"/>
-          <p:nvPr/>
-        </p:nvSpPr>
-        <p:spPr>
-          <a:xfrm>
-            <a:off x="1097280" y="3200400"/>
-            <a:ext cx="2286000" cy="365760"/>
-          </a:xfrm>
-          <a:prstGeom prst="rect">
-            <a:avLst/>
-          </a:prstGeom>
-          <a:noFill/>
-        </p:spPr>
-        <p:txBody>
-          <a:bodyPr wrap="square">
-            <a:spAutoFit/>
-          </a:bodyPr>
-          <a:lstStyle/>
-          <a:p>
-            <a:pPr algn="l">
-              <a:lnSpc>
-                <a:spcPct val="120000"/>
-              </a:lnSpc>
-              <a:spcBef>
-                <a:spcPts val="0"/>
-              </a:spcBef>
-              <a:spcAft>
-                <a:spcPts val="0"/>
-              </a:spcAft>
-              <a:defRPr sz="1400" b="0">
-                <a:solidFill>
-                  <a:srgbClr val="9A9690"/>
-                </a:solidFill>
-                <a:latin typeface="Calibri"/>
-              </a:defRPr>
-            </a:pPr>
-            <a:r>
-              <a:t>Instrument</a:t>
-            </a:r>
-          </a:p>
-        </p:txBody>
-      </p:sp>
-      <p:sp>
-        <p:nvSpPr>
-          <p:cNvPr id="5" name="TextBox 4"/>
-          <p:cNvSpPr txBox="1"/>
-          <p:nvPr/>
-        </p:nvSpPr>
-        <p:spPr>
-          <a:xfrm>
-            <a:off x="3474720" y="3200400"/>
-            <a:ext cx="4572000" cy="365760"/>
-          </a:xfrm>
-          <a:prstGeom prst="rect">
-            <a:avLst/>
-          </a:prstGeom>
-          <a:noFill/>
-        </p:spPr>
-        <p:txBody>
-          <a:bodyPr wrap="square">
-            <a:spAutoFit/>
-          </a:bodyPr>
-          <a:lstStyle/>
-          <a:p>
-            <a:pPr algn="l">
-              <a:lnSpc>
-                <a:spcPct val="120000"/>
-              </a:lnSpc>
-              <a:spcBef>
-                <a:spcPts val="0"/>
-              </a:spcBef>
-              <a:spcAft>
-                <a:spcPts val="0"/>
-              </a:spcAft>
-              <a:defRPr sz="2000" b="0">
-                <a:solidFill>
-                  <a:srgbClr val="2C2A26"/>
-                </a:solidFill>
-                <a:latin typeface="Georgia"/>
-              </a:defRPr>
-            </a:pPr>
-            <a:r>
-              <a:t>SAFE (YC standard)</a:t>
-            </a:r>
-          </a:p>
-        </p:txBody>
-      </p:sp>
-      <p:sp>
-        <p:nvSpPr>
-          <p:cNvPr id="6" name="TextBox 5"/>
-          <p:cNvSpPr txBox="1"/>
-          <p:nvPr/>
-        </p:nvSpPr>
-        <p:spPr>
-          <a:xfrm>
-            <a:off x="1097280" y="3703320"/>
-            <a:ext cx="2286000" cy="365760"/>
-          </a:xfrm>
-          <a:prstGeom prst="rect">
-            <a:avLst/>
-          </a:prstGeom>
-          <a:noFill/>
-        </p:spPr>
-        <p:txBody>
-          <a:bodyPr wrap="square">
-            <a:spAutoFit/>
-          </a:bodyPr>
-          <a:lstStyle/>
-          <a:p>
-            <a:pPr algn="l">
-              <a:lnSpc>
-                <a:spcPct val="120000"/>
-              </a:lnSpc>
-              <a:spcBef>
-                <a:spcPts val="0"/>
-              </a:spcBef>
-              <a:spcAft>
-                <a:spcPts val="0"/>
-              </a:spcAft>
-              <a:defRPr sz="1400" b="0">
-                <a:solidFill>
-                  <a:srgbClr val="9A9690"/>
-                </a:solidFill>
-                <a:latin typeface="Calibri"/>
-              </a:defRPr>
-            </a:pPr>
-            <a:r>
-              <a:t>Valuation cap</a:t>
-            </a:r>
-          </a:p>
-        </p:txBody>
-      </p:sp>
-      <p:sp>
-        <p:nvSpPr>
-          <p:cNvPr id="7" name="TextBox 6"/>
-          <p:cNvSpPr txBox="1"/>
-          <p:nvPr/>
-        </p:nvSpPr>
-        <p:spPr>
-          <a:xfrm>
-            <a:off x="3474720" y="3703320"/>
-            <a:ext cx="4572000" cy="365760"/>
-          </a:xfrm>
-          <a:prstGeom prst="rect">
-            <a:avLst/>
-          </a:prstGeom>
-          <a:noFill/>
-        </p:spPr>
-        <p:txBody>
-          <a:bodyPr wrap="square">
-            <a:spAutoFit/>
-          </a:bodyPr>
-          <a:lstStyle/>
-          <a:p>
-            <a:pPr algn="l">
-              <a:lnSpc>
-                <a:spcPct val="120000"/>
-              </a:lnSpc>
-              <a:spcBef>
-                <a:spcPts val="0"/>
-              </a:spcBef>
-              <a:spcAft>
-                <a:spcPts val="0"/>
-              </a:spcAft>
-              <a:defRPr sz="2000" b="0">
-                <a:solidFill>
-                  <a:srgbClr val="2C2A26"/>
-                </a:solidFill>
-                <a:latin typeface="Georgia"/>
-              </a:defRPr>
-            </a:pPr>
-            <a:r>
-              <a:t>$5,000,000</a:t>
-            </a:r>
-          </a:p>
-        </p:txBody>
-      </p:sp>
-      <p:sp>
-        <p:nvSpPr>
-          <p:cNvPr id="8" name="TextBox 7"/>
-          <p:cNvSpPr txBox="1"/>
-          <p:nvPr/>
-        </p:nvSpPr>
-        <p:spPr>
-          <a:xfrm>
-            <a:off x="1097280" y="4206240"/>
-            <a:ext cx="2286000" cy="365760"/>
-          </a:xfrm>
-          <a:prstGeom prst="rect">
-            <a:avLst/>
-          </a:prstGeom>
-          <a:noFill/>
-        </p:spPr>
-        <p:txBody>
-          <a:bodyPr wrap="square">
-            <a:spAutoFit/>
-          </a:bodyPr>
-          <a:lstStyle/>
-          <a:p>
-            <a:pPr algn="l">
-              <a:lnSpc>
-                <a:spcPct val="120000"/>
-              </a:lnSpc>
-              <a:spcBef>
-                <a:spcPts val="0"/>
-              </a:spcBef>
-              <a:spcAft>
-                <a:spcPts val="0"/>
-              </a:spcAft>
-              <a:defRPr sz="1400" b="0">
-                <a:solidFill>
-                  <a:srgbClr val="9A9690"/>
-                </a:solidFill>
-                <a:latin typeface="Calibri"/>
-              </a:defRPr>
-            </a:pPr>
-            <a:r>
-              <a:t>Giving away</a:t>
-            </a:r>
-          </a:p>
-        </p:txBody>
-      </p:sp>
-      <p:sp>
-        <p:nvSpPr>
-          <p:cNvPr id="9" name="TextBox 8"/>
-          <p:cNvSpPr txBox="1"/>
-          <p:nvPr/>
-        </p:nvSpPr>
-        <p:spPr>
-          <a:xfrm>
-            <a:off x="3474720" y="4206240"/>
-            <a:ext cx="4572000" cy="365760"/>
-          </a:xfrm>
-          <a:prstGeom prst="rect">
-            <a:avLst/>
-          </a:prstGeom>
-          <a:noFill/>
-        </p:spPr>
-        <p:txBody>
-          <a:bodyPr wrap="square">
-            <a:spAutoFit/>
-          </a:bodyPr>
-          <a:lstStyle/>
-          <a:p>
-            <a:pPr algn="l">
-              <a:lnSpc>
-                <a:spcPct val="120000"/>
-              </a:lnSpc>
-              <a:spcBef>
-                <a:spcPts val="0"/>
-              </a:spcBef>
-              <a:spcAft>
-                <a:spcPts val="0"/>
-              </a:spcAft>
-              <a:defRPr sz="2000" b="0">
-                <a:solidFill>
-                  <a:srgbClr val="2C2A26"/>
-                </a:solidFill>
-                <a:latin typeface="Georgia"/>
-              </a:defRPr>
-            </a:pPr>
-            <a:r>
-              <a:t>&lt; 10%</a:t>
-            </a:r>
-          </a:p>
-        </p:txBody>
-      </p:sp>
-      <p:sp>
-        <p:nvSpPr>
-          <p:cNvPr id="10" name="TextBox 9"/>
-          <p:cNvSpPr txBox="1"/>
-          <p:nvPr/>
-        </p:nvSpPr>
-        <p:spPr>
-          <a:xfrm>
-            <a:off x="1097280" y="4709160"/>
-            <a:ext cx="2286000" cy="365760"/>
-          </a:xfrm>
-          <a:prstGeom prst="rect">
-            <a:avLst/>
-          </a:prstGeom>
-          <a:noFill/>
-        </p:spPr>
-        <p:txBody>
-          <a:bodyPr wrap="square">
-            <a:spAutoFit/>
-          </a:bodyPr>
-          <a:lstStyle/>
-          <a:p>
-            <a:pPr algn="l">
-              <a:lnSpc>
-                <a:spcPct val="120000"/>
-              </a:lnSpc>
-              <a:spcBef>
-                <a:spcPts val="0"/>
-              </a:spcBef>
-              <a:spcAft>
-                <a:spcPts val="0"/>
-              </a:spcAft>
-              <a:defRPr sz="1400" b="0">
-                <a:solidFill>
-                  <a:srgbClr val="9A9690"/>
-                </a:solidFill>
-                <a:latin typeface="Calibri"/>
-              </a:defRPr>
-            </a:pPr>
-            <a:r>
-              <a:t>Use of funds</a:t>
-            </a:r>
-          </a:p>
-        </p:txBody>
-      </p:sp>
-      <p:sp>
-        <p:nvSpPr>
-          <p:cNvPr id="11" name="TextBox 10"/>
-          <p:cNvSpPr txBox="1"/>
-          <p:nvPr/>
-        </p:nvSpPr>
-        <p:spPr>
-          <a:xfrm>
-            <a:off x="3474720" y="4709160"/>
-            <a:ext cx="4572000" cy="365760"/>
-          </a:xfrm>
-          <a:prstGeom prst="rect">
-            <a:avLst/>
-          </a:prstGeom>
-          <a:noFill/>
-        </p:spPr>
-        <p:txBody>
-          <a:bodyPr wrap="square">
-            <a:spAutoFit/>
-          </a:bodyPr>
-          <a:lstStyle/>
-          <a:p>
-            <a:pPr algn="l">
-              <a:lnSpc>
-                <a:spcPct val="120000"/>
-              </a:lnSpc>
-              <a:spcBef>
-                <a:spcPts val="0"/>
-              </a:spcBef>
-              <a:spcAft>
-                <a:spcPts val="0"/>
-              </a:spcAft>
-              <a:defRPr sz="2000" b="0">
-                <a:solidFill>
-                  <a:srgbClr val="2C2A26"/>
-                </a:solidFill>
-                <a:latin typeface="Georgia"/>
-              </a:defRPr>
-            </a:pPr>
-            <a:r>
-              <a:t>Core team full-time through 2026 → production launch June</a:t>
-            </a:r>
-          </a:p>
-        </p:txBody>
-      </p:sp>
-      <p:sp>
-        <p:nvSpPr>
-          <p:cNvPr id="12" name="TextBox 11"/>
-          <p:cNvSpPr txBox="1"/>
-          <p:nvPr/>
-        </p:nvSpPr>
-        <p:spPr>
-          <a:xfrm>
-            <a:off x="1097280" y="5303520"/>
-            <a:ext cx="9144000" cy="1097280"/>
-          </a:xfrm>
-          <a:prstGeom prst="rect">
-            <a:avLst/>
-          </a:prstGeom>
-          <a:noFill/>
-        </p:spPr>
-        <p:txBody>
-          <a:bodyPr wrap="square">
-            <a:spAutoFit/>
-          </a:bodyPr>
-          <a:lstStyle/>
-          <a:p>
-            <a:pPr algn="l">
-              <a:lnSpc>
-                <a:spcPct val="120000"/>
-              </a:lnSpc>
-              <a:spcBef>
-                <a:spcPts val="0"/>
-              </a:spcBef>
-              <a:spcAft>
-                <a:spcPts val="0"/>
-              </a:spcAft>
-              <a:defRPr sz="2800" b="0">
-                <a:solidFill>
-                  <a:srgbClr val="2C2A26"/>
-                </a:solidFill>
-                <a:latin typeface="Georgia"/>
-              </a:defRPr>
-            </a:pPr>
-            <a:r>
-              <a:t>I want everyone to be able to hike up that mountain.</a:t>
-            </a:r>
-          </a:p>
-        </p:txBody>
-      </p:sp>
-      <p:sp>
-        <p:nvSpPr>
-          <p:cNvPr id="13" name="TextBox 12"/>
-          <p:cNvSpPr txBox="1"/>
-          <p:nvPr/>
-        </p:nvSpPr>
-        <p:spPr>
-          <a:xfrm>
-            <a:off x="1097280" y="6035040"/>
-            <a:ext cx="9144000" cy="457200"/>
-          </a:xfrm>
-          <a:prstGeom prst="rect">
-            <a:avLst/>
-          </a:prstGeom>
-          <a:noFill/>
-        </p:spPr>
-        <p:txBody>
-          <a:bodyPr wrap="square">
-            <a:spAutoFit/>
-          </a:bodyPr>
-          <a:lstStyle/>
-          <a:p>
-            <a:pPr algn="l">
-              <a:lnSpc>
-                <a:spcPct val="120000"/>
-              </a:lnSpc>
-              <a:spcBef>
-                <a:spcPts val="0"/>
-              </a:spcBef>
-              <a:spcAft>
-                <a:spcPts val="0"/>
-              </a:spcAft>
-              <a:defRPr sz="1300" b="0">
-                <a:solidFill>
-                  <a:srgbClr val="9A9690"/>
-                </a:solidFill>
-                <a:latin typeface="Calibri"/>
-              </a:defRPr>
-            </a:pPr>
-            <a:r>
-              <a:t>parachute.computer  ·  github.com/OpenParachutePBC  ·  aaron@parachute.computer</a:t>
-            </a:r>
-          </a:p>
-        </p:txBody>
-      </p:sp>
-    </p:spTree>
-  </p:cSld>
-  <p:clrMapOvr>
-    <a:masterClrMapping/>
-  </p:clrMapOvr>
-</p:sld>
-</file>
-
-<file path=ppt/slides/slide2.xml><?xml version="1.0" encoding="utf-8"?>
-<p:sld xmlns:a="http://schemas.openxmlformats.org/drawingml/2006/main" xmlns:p="http://schemas.openxmlformats.org/presentationml/2006/main" xmlns:r="http://schemas.openxmlformats.org/officeDocument/2006/relationships">
-  <p:cSld>
-    <p:bg>
-      <p:bgPr>
-        <a:solidFill>
-          <a:srgbClr val="FAF8F4"/>
-        </a:solidFill>
-        <a:effectLst/>
-      </p:bgPr>
-    </p:bg>
-    <p:spTree>
-      <p:nvGrpSpPr>
-        <p:cNvPr id="1" name=""/>
-        <p:cNvGrpSpPr/>
-        <p:nvPr/>
-      </p:nvGrpSpPr>
-      <p:grpSpPr/>
-      <p:sp>
-        <p:nvSpPr>
-          <p:cNvPr id="2" name="TextBox 1"/>
-          <p:cNvSpPr txBox="1"/>
-          <p:nvPr/>
-        </p:nvSpPr>
-        <p:spPr>
-          <a:xfrm>
-            <a:off x="1097280" y="1097280"/>
-            <a:ext cx="3657600" cy="365760"/>
-          </a:xfrm>
-          <a:prstGeom prst="rect">
-            <a:avLst/>
-          </a:prstGeom>
-          <a:noFill/>
-        </p:spPr>
-        <p:txBody>
-          <a:bodyPr wrap="square">
-            <a:spAutoFit/>
-          </a:bodyPr>
-          <a:lstStyle/>
-          <a:p>
-            <a:pPr algn="l">
-              <a:lnSpc>
-                <a:spcPct val="120000"/>
-              </a:lnSpc>
-              <a:spcBef>
-                <a:spcPts val="0"/>
-              </a:spcBef>
-              <a:spcAft>
-                <a:spcPts val="0"/>
-              </a:spcAft>
-              <a:defRPr sz="1100" b="1">
-                <a:solidFill>
-                  <a:srgbClr val="4A7C59"/>
-                </a:solidFill>
-                <a:latin typeface="Calibri"/>
-              </a:defRPr>
-            </a:pPr>
-            <a:r>
-              <a:t>THE LANDSCAPE</a:t>
-            </a:r>
-          </a:p>
-        </p:txBody>
-      </p:sp>
-      <p:sp>
-        <p:nvSpPr>
-          <p:cNvPr id="3" name="TextBox 2"/>
-          <p:cNvSpPr txBox="1"/>
-          <p:nvPr/>
-        </p:nvSpPr>
-        <p:spPr>
-          <a:xfrm>
-            <a:off x="1097280" y="1554480"/>
-            <a:ext cx="9144000" cy="1371600"/>
-          </a:xfrm>
-          <a:prstGeom prst="rect">
-            <a:avLst/>
-          </a:prstGeom>
-          <a:noFill/>
-        </p:spPr>
-        <p:txBody>
-          <a:bodyPr wrap="square">
-            <a:spAutoFit/>
-          </a:bodyPr>
-          <a:lstStyle/>
-          <a:p>
-            <a:pPr algn="l">
-              <a:lnSpc>
-                <a:spcPct val="105000"/>
-              </a:lnSpc>
-              <a:spcBef>
-                <a:spcPts val="0"/>
-              </a:spcBef>
-              <a:spcAft>
-                <a:spcPts val="0"/>
-              </a:spcAft>
-              <a:defRPr sz="4000" b="0">
-                <a:solidFill>
-                  <a:srgbClr val="2C2A26"/>
-                </a:solidFill>
-                <a:latin typeface="Georgia"/>
-              </a:defRPr>
-            </a:pPr>
-            <a:r>
-              <a:t>Everyone is building</a:t>
-            </a:r>
-            <a:br/>
-            <a:r>
-              <a:t>personal AI computers.</a:t>
-            </a:r>
-          </a:p>
-        </p:txBody>
-      </p:sp>
-      <p:sp>
-        <p:nvSpPr>
-          <p:cNvPr id="4" name="TextBox 3"/>
-          <p:cNvSpPr txBox="1"/>
-          <p:nvPr/>
-        </p:nvSpPr>
-        <p:spPr>
-          <a:xfrm>
-            <a:off x="1097280" y="3200400"/>
-            <a:ext cx="9144000" cy="914400"/>
-          </a:xfrm>
-          <a:prstGeom prst="rect">
-            <a:avLst/>
-          </a:prstGeom>
-          <a:noFill/>
-        </p:spPr>
-        <p:txBody>
-          <a:bodyPr wrap="square">
-            <a:spAutoFit/>
-          </a:bodyPr>
-          <a:lstStyle/>
-          <a:p>
-            <a:pPr algn="l">
-              <a:lnSpc>
-                <a:spcPct val="150000"/>
-              </a:lnSpc>
-              <a:spcBef>
-                <a:spcPts val="0"/>
-              </a:spcBef>
-              <a:spcAft>
-                <a:spcPts val="0"/>
-              </a:spcAft>
-              <a:defRPr sz="1800" b="0">
-                <a:solidFill>
-                  <a:srgbClr val="6B6860"/>
-                </a:solidFill>
-                <a:latin typeface="Calibri"/>
-              </a:defRPr>
-            </a:pPr>
-            <a:r>
-              <a:t>Hundreds of millions of people already pay $20-200/month for AI tools.</a:t>
-            </a:r>
-            <a:br/>
-            <a:r>
-              <a:t>OpenClaw — 300K+ stars in 3 months. Claude Cowork. ZoComputer. Perplexity Computer. Manus.</a:t>
-            </a:r>
-          </a:p>
-        </p:txBody>
-      </p:sp>
-      <p:sp>
-        <p:nvSpPr>
-          <p:cNvPr id="5" name="TextBox 4"/>
-          <p:cNvSpPr txBox="1"/>
-          <p:nvPr/>
-        </p:nvSpPr>
-        <p:spPr>
-          <a:xfrm>
-            <a:off x="1097280" y="4754880"/>
-            <a:ext cx="2743200" cy="1097280"/>
-          </a:xfrm>
-          <a:prstGeom prst="rect">
-            <a:avLst/>
-          </a:prstGeom>
-          <a:noFill/>
-        </p:spPr>
-        <p:txBody>
-          <a:bodyPr wrap="square">
-            <a:spAutoFit/>
-          </a:bodyPr>
-          <a:lstStyle/>
-          <a:p>
-            <a:pPr algn="l">
-              <a:lnSpc>
-                <a:spcPct val="120000"/>
-              </a:lnSpc>
-              <a:spcBef>
-                <a:spcPts val="0"/>
-              </a:spcBef>
-              <a:spcAft>
-                <a:spcPts val="0"/>
-              </a:spcAft>
-              <a:defRPr sz="6400" b="0">
-                <a:solidFill>
-                  <a:srgbClr val="4A7C59"/>
-                </a:solidFill>
-                <a:latin typeface="Georgia"/>
-              </a:defRPr>
-            </a:pPr>
-            <a:r>
-              <a:t>$50B+</a:t>
-            </a:r>
-          </a:p>
-        </p:txBody>
-      </p:sp>
-      <p:sp>
-        <p:nvSpPr>
-          <p:cNvPr id="6" name="TextBox 5"/>
-          <p:cNvSpPr txBox="1"/>
-          <p:nvPr/>
-        </p:nvSpPr>
-        <p:spPr>
-          <a:xfrm>
-            <a:off x="4114800" y="4983480"/>
-            <a:ext cx="4572000" cy="731520"/>
-          </a:xfrm>
-          <a:prstGeom prst="rect">
-            <a:avLst/>
-          </a:prstGeom>
-          <a:noFill/>
-        </p:spPr>
-        <p:txBody>
-          <a:bodyPr wrap="square">
-            <a:spAutoFit/>
-          </a:bodyPr>
-          <a:lstStyle/>
-          <a:p>
-            <a:pPr algn="l">
-              <a:lnSpc>
-                <a:spcPct val="140000"/>
-              </a:lnSpc>
-              <a:spcBef>
-                <a:spcPts val="0"/>
-              </a:spcBef>
-              <a:spcAft>
-                <a:spcPts val="0"/>
-              </a:spcAft>
-              <a:defRPr sz="1600" b="0">
-                <a:solidFill>
-                  <a:srgbClr val="6B6860"/>
-                </a:solidFill>
-                <a:latin typeface="Calibri"/>
-              </a:defRPr>
-            </a:pPr>
-            <a:r>
-              <a:t>agentic AI market by 2030 · 44% CAGR</a:t>
-            </a:r>
-            <a:br/>
-            <a:r>
-              <a:t>OpenAI alone projects $200B revenue by 2030</a:t>
-            </a:r>
-          </a:p>
-        </p:txBody>
-      </p:sp>
-      <p:sp>
-        <p:nvSpPr>
-          <p:cNvPr id="7" name="TextBox 6"/>
-          <p:cNvSpPr txBox="1"/>
-          <p:nvPr/>
-        </p:nvSpPr>
-        <p:spPr>
-          <a:xfrm>
-            <a:off x="1097280" y="5943600"/>
-            <a:ext cx="9144000" cy="548640"/>
-          </a:xfrm>
-          <a:prstGeom prst="rect">
-            <a:avLst/>
-          </a:prstGeom>
-          <a:noFill/>
-        </p:spPr>
-        <p:txBody>
-          <a:bodyPr wrap="square">
-            <a:spAutoFit/>
-          </a:bodyPr>
-          <a:lstStyle/>
-          <a:p>
-            <a:pPr algn="l">
-              <a:lnSpc>
-                <a:spcPct val="120000"/>
-              </a:lnSpc>
-              <a:spcBef>
-                <a:spcPts val="0"/>
-              </a:spcBef>
-              <a:spcAft>
-                <a:spcPts val="0"/>
-              </a:spcAft>
-              <a:defRPr sz="2200" b="0">
-                <a:solidFill>
-                  <a:srgbClr val="2C2A26"/>
-                </a:solidFill>
-                <a:latin typeface="Georgia"/>
-              </a:defRPr>
-            </a:pPr>
-            <a:r>
-              <a:t>The question isn't whether this market exists — it's who they'll trust.</a:t>
-            </a:r>
-          </a:p>
-        </p:txBody>
-      </p:sp>
-    </p:spTree>
-  </p:cSld>
-  <p:clrMapOvr>
-    <a:masterClrMapping/>
-  </p:clrMapOvr>
-</p:sld>
-</file>
-
-<file path=ppt/slides/slide3.xml><?xml version="1.0" encoding="utf-8"?>
-<p:sld xmlns:a="http://schemas.openxmlformats.org/drawingml/2006/main" xmlns:p="http://schemas.openxmlformats.org/presentationml/2006/main" xmlns:r="http://schemas.openxmlformats.org/officeDocument/2006/relationships">
-  <p:cSld>
-    <p:bg>
-      <p:bgPr>
-        <a:solidFill>
-          <a:srgbClr val="FAF8F4"/>
-        </a:solidFill>
-        <a:effectLst/>
-      </p:bgPr>
-    </p:bg>
-    <p:spTree>
-      <p:nvGrpSpPr>
-        <p:cNvPr id="1" name=""/>
-        <p:cNvGrpSpPr/>
-        <p:nvPr/>
-      </p:nvGrpSpPr>
-      <p:grpSpPr/>
-      <p:sp>
-        <p:nvSpPr>
-          <p:cNvPr id="2" name="TextBox 1"/>
-          <p:cNvSpPr txBox="1"/>
-          <p:nvPr/>
-        </p:nvSpPr>
-        <p:spPr>
-          <a:xfrm>
-            <a:off x="1097280" y="1097280"/>
-            <a:ext cx="3657600" cy="365760"/>
-          </a:xfrm>
-          <a:prstGeom prst="rect">
-            <a:avLst/>
-          </a:prstGeom>
-          <a:noFill/>
-        </p:spPr>
-        <p:txBody>
-          <a:bodyPr wrap="square">
-            <a:spAutoFit/>
-          </a:bodyPr>
-          <a:lstStyle/>
-          <a:p>
-            <a:pPr algn="l">
-              <a:lnSpc>
-                <a:spcPct val="120000"/>
-              </a:lnSpc>
-              <a:spcBef>
-                <a:spcPts val="0"/>
-              </a:spcBef>
-              <a:spcAft>
-                <a:spcPts val="0"/>
-              </a:spcAft>
-              <a:defRPr sz="1100" b="1">
-                <a:solidFill>
-                  <a:srgbClr val="4A7C59"/>
-                </a:solidFill>
-                <a:latin typeface="Calibri"/>
-              </a:defRPr>
-            </a:pPr>
-            <a:r>
-              <a:t>THE PROBLEM</a:t>
-            </a:r>
-          </a:p>
-        </p:txBody>
-      </p:sp>
-      <p:sp>
-        <p:nvSpPr>
-          <p:cNvPr id="3" name="TextBox 2"/>
-          <p:cNvSpPr txBox="1"/>
-          <p:nvPr/>
-        </p:nvSpPr>
-        <p:spPr>
-          <a:xfrm>
-            <a:off x="1097280" y="1554480"/>
-            <a:ext cx="9144000" cy="1371600"/>
-          </a:xfrm>
-          <a:prstGeom prst="rect">
-            <a:avLst/>
-          </a:prstGeom>
-          <a:noFill/>
-        </p:spPr>
-        <p:txBody>
-          <a:bodyPr wrap="square">
-            <a:spAutoFit/>
-          </a:bodyPr>
-          <a:lstStyle/>
-          <a:p>
-            <a:pPr algn="l">
-              <a:lnSpc>
-                <a:spcPct val="105000"/>
-              </a:lnSpc>
-              <a:spcBef>
-                <a:spcPts val="0"/>
-              </a:spcBef>
-              <a:spcAft>
-                <a:spcPts val="0"/>
-              </a:spcAft>
-              <a:defRPr sz="4000" b="0">
-                <a:solidFill>
-                  <a:srgbClr val="2C2A26"/>
-                </a:solidFill>
-                <a:latin typeface="Georgia"/>
-              </a:defRPr>
-            </a:pPr>
-            <a:r>
-              <a:t>The other 95% have</a:t>
-            </a:r>
-            <a:br/>
-            <a:r>
-              <a:t>no way in.</a:t>
-            </a:r>
-          </a:p>
-        </p:txBody>
-      </p:sp>
-      <p:sp>
-        <p:nvSpPr>
-          <p:cNvPr id="4" name="TextBox 3"/>
-          <p:cNvSpPr txBox="1"/>
-          <p:nvPr/>
-        </p:nvSpPr>
-        <p:spPr>
-          <a:xfrm>
-            <a:off x="1097280" y="3200400"/>
-            <a:ext cx="9144000" cy="1371600"/>
-          </a:xfrm>
-          <a:prstGeom prst="rect">
-            <a:avLst/>
-          </a:prstGeom>
-          <a:noFill/>
-        </p:spPr>
-        <p:txBody>
-          <a:bodyPr wrap="square">
-            <a:spAutoFit/>
-          </a:bodyPr>
-          <a:lstStyle/>
-          <a:p>
-            <a:pPr algn="l">
-              <a:lnSpc>
-                <a:spcPct val="160000"/>
-              </a:lnSpc>
-              <a:spcBef>
-                <a:spcPts val="0"/>
-              </a:spcBef>
-              <a:spcAft>
-                <a:spcPts val="0"/>
-              </a:spcAft>
-              <a:defRPr sz="2200" b="0">
-                <a:solidFill>
-                  <a:srgbClr val="6B6860"/>
-                </a:solidFill>
-                <a:latin typeface="Georgia"/>
-              </a:defRPr>
-            </a:pPr>
-            <a:r>
-              <a:t>The artist who wants to organize creative ideas.</a:t>
-            </a:r>
-            <a:br/>
-            <a:r>
-              <a:t>The small business owner tracking their days.</a:t>
-            </a:r>
-            <a:br/>
-            <a:r>
-              <a:t>The parent who wants a better way to remember and reflect.</a:t>
-            </a:r>
-          </a:p>
-        </p:txBody>
-      </p:sp>
-      <p:sp>
-        <p:nvSpPr>
-          <p:cNvPr id="5" name="TextBox 4"/>
-          <p:cNvSpPr txBox="1"/>
-          <p:nvPr/>
-        </p:nvSpPr>
-        <p:spPr>
-          <a:xfrm>
-            <a:off x="1097280" y="5212080"/>
-            <a:ext cx="9144000" cy="914400"/>
-          </a:xfrm>
-          <a:prstGeom prst="rect">
-            <a:avLst/>
-          </a:prstGeom>
-          <a:noFill/>
-        </p:spPr>
-        <p:txBody>
-          <a:bodyPr wrap="square">
-            <a:spAutoFit/>
-          </a:bodyPr>
-          <a:lstStyle/>
-          <a:p>
-            <a:pPr algn="l">
-              <a:lnSpc>
-                <a:spcPct val="150000"/>
-              </a:lnSpc>
-              <a:spcBef>
-                <a:spcPts val="0"/>
-              </a:spcBef>
-              <a:spcAft>
-                <a:spcPts val="0"/>
-              </a:spcAft>
-              <a:defRPr sz="2200" b="0">
-                <a:solidFill>
-                  <a:srgbClr val="2C2A26"/>
-                </a:solidFill>
-                <a:latin typeface="Georgia"/>
-              </a:defRPr>
-            </a:pPr>
-            <a:r>
-              <a:t>They need a system that learns them —</a:t>
-            </a:r>
-            <a:br/>
-            <a:r>
-              <a:t>not one that demands they learn it.</a:t>
-            </a:r>
-          </a:p>
-        </p:txBody>
-      </p:sp>
-    </p:spTree>
-  </p:cSld>
-  <p:clrMapOvr>
-    <a:masterClrMapping/>
-  </p:clrMapOvr>
-</p:sld>
-</file>
-
-<file path=ppt/slides/slide4.xml><?xml version="1.0" encoding="utf-8"?>
-<p:sld xmlns:a="http://schemas.openxmlformats.org/drawingml/2006/main" xmlns:p="http://schemas.openxmlformats.org/presentationml/2006/main" xmlns:r="http://schemas.openxmlformats.org/officeDocument/2006/relationships">
-  <p:cSld>
-    <p:bg>
-      <p:bgPr>
-        <a:solidFill>
-          <a:srgbClr val="FAF8F4"/>
-        </a:solidFill>
-        <a:effectLst/>
-      </p:bgPr>
-    </p:bg>
-    <p:spTree>
-      <p:nvGrpSpPr>
-        <p:cNvPr id="1" name=""/>
-        <p:cNvGrpSpPr/>
-        <p:nvPr/>
-      </p:nvGrpSpPr>
-      <p:grpSpPr/>
-      <p:sp>
-        <p:nvSpPr>
-          <p:cNvPr id="2" name="TextBox 1"/>
-          <p:cNvSpPr txBox="1"/>
-          <p:nvPr/>
-        </p:nvSpPr>
-        <p:spPr>
-          <a:xfrm>
-            <a:off x="1097280" y="1097280"/>
-            <a:ext cx="3657600" cy="365760"/>
-          </a:xfrm>
-          <a:prstGeom prst="rect">
-            <a:avLst/>
-          </a:prstGeom>
-          <a:noFill/>
-        </p:spPr>
-        <p:txBody>
-          <a:bodyPr wrap="square">
-            <a:spAutoFit/>
-          </a:bodyPr>
-          <a:lstStyle/>
-          <a:p>
-            <a:pPr algn="l">
-              <a:lnSpc>
-                <a:spcPct val="120000"/>
-              </a:lnSpc>
-              <a:spcBef>
-                <a:spcPts val="0"/>
-              </a:spcBef>
-              <a:spcAft>
-                <a:spcPts val="0"/>
-              </a:spcAft>
-              <a:defRPr sz="1100" b="1">
-                <a:solidFill>
-                  <a:srgbClr val="4A7C59"/>
-                </a:solidFill>
-                <a:latin typeface="Calibri"/>
-              </a:defRPr>
-            </a:pPr>
-            <a:r>
-              <a:t>THE SOLUTION</a:t>
-            </a:r>
-          </a:p>
-        </p:txBody>
-      </p:sp>
-      <p:sp>
-        <p:nvSpPr>
-          <p:cNvPr id="3" name="TextBox 2"/>
-          <p:cNvSpPr txBox="1"/>
-          <p:nvPr/>
-        </p:nvSpPr>
-        <p:spPr>
-          <a:xfrm>
-            <a:off x="1097280" y="1554480"/>
-            <a:ext cx="9144000" cy="1371600"/>
-          </a:xfrm>
-          <a:prstGeom prst="rect">
-            <a:avLst/>
-          </a:prstGeom>
-          <a:noFill/>
-        </p:spPr>
-        <p:txBody>
-          <a:bodyPr wrap="square">
-            <a:spAutoFit/>
-          </a:bodyPr>
-          <a:lstStyle/>
-          <a:p>
-            <a:pPr algn="l">
-              <a:lnSpc>
-                <a:spcPct val="105000"/>
-              </a:lnSpc>
-              <a:spcBef>
-                <a:spcPts val="0"/>
-              </a:spcBef>
-              <a:spcAft>
-                <a:spcPts val="0"/>
-              </a:spcAft>
-              <a:defRPr sz="4000" b="0">
-                <a:solidFill>
-                  <a:srgbClr val="2C2A26"/>
-                </a:solidFill>
-                <a:latin typeface="Georgia"/>
-              </a:defRPr>
-            </a:pPr>
-            <a:r>
-              <a:t>Parachute Daily.</a:t>
-            </a:r>
-            <a:br/>
-            <a:r>
-              <a:t>Just talk.</a:t>
-            </a:r>
-          </a:p>
-        </p:txBody>
-      </p:sp>
-      <p:sp>
-        <p:nvSpPr>
-          <p:cNvPr id="4" name="TextBox 3"/>
-          <p:cNvSpPr txBox="1"/>
-          <p:nvPr/>
-        </p:nvSpPr>
-        <p:spPr>
-          <a:xfrm>
-            <a:off x="1097280" y="3200400"/>
-            <a:ext cx="5029200" cy="2560320"/>
-          </a:xfrm>
-          <a:prstGeom prst="rect">
-            <a:avLst/>
-          </a:prstGeom>
-          <a:noFill/>
-        </p:spPr>
-        <p:txBody>
-          <a:bodyPr wrap="square">
-            <a:spAutoFit/>
-          </a:bodyPr>
-          <a:lstStyle/>
-          <a:p>
-            <a:pPr algn="l">
-              <a:lnSpc>
-                <a:spcPct val="150000"/>
-              </a:lnSpc>
-              <a:spcBef>
-                <a:spcPts val="0"/>
-              </a:spcBef>
-              <a:spcAft>
-                <a:spcPts val="0"/>
-              </a:spcAft>
-              <a:defRPr sz="1800" b="0">
-                <a:solidFill>
-                  <a:srgbClr val="6B6860"/>
-                </a:solidFill>
-                <a:latin typeface="Calibri"/>
-              </a:defRPr>
-            </a:pPr>
-            <a:r>
-              <a:t>A voice-first journal.</a:t>
-            </a:r>
-            <a:br/>
-            <a:br/>
-            <a:r>
-              <a:t>Speak into a wearable pendant or your phone —</a:t>
-            </a:r>
-            <a:br/>
-            <a:r>
-              <a:t>on a walk, in the car, wherever thinking happens.</a:t>
-            </a:r>
-            <a:br/>
-            <a:br/>
-            <a:r>
-              <a:t>AI weaves through gently:</a:t>
-            </a:r>
-            <a:br/>
-            <a:r>
-              <a:t>  ·  Daily reflections on your entries</a:t>
-            </a:r>
-            <a:br/>
-            <a:r>
-              <a:t>  ·  Pattern recognition over time</a:t>
-            </a:r>
-            <a:br/>
-            <a:r>
-              <a:t>  ·  Weekly synthesis of your thinking</a:t>
-            </a:r>
-          </a:p>
-        </p:txBody>
-      </p:sp>
-      <p:sp>
-        <p:nvSpPr>
-          <p:cNvPr id="5" name="TextBox 4"/>
-          <p:cNvSpPr txBox="1"/>
-          <p:nvPr/>
-        </p:nvSpPr>
-        <p:spPr>
-          <a:xfrm>
-            <a:off x="1097280" y="5943600"/>
-            <a:ext cx="5029200" cy="457200"/>
-          </a:xfrm>
-          <a:prstGeom prst="rect">
-            <a:avLst/>
-          </a:prstGeom>
-          <a:noFill/>
-        </p:spPr>
-        <p:txBody>
-          <a:bodyPr wrap="square">
-            <a:spAutoFit/>
-          </a:bodyPr>
-          <a:lstStyle/>
-          <a:p>
-            <a:pPr algn="l">
-              <a:lnSpc>
-                <a:spcPct val="120000"/>
-              </a:lnSpc>
-              <a:spcBef>
-                <a:spcPts val="0"/>
-              </a:spcBef>
-              <a:spcAft>
-                <a:spcPts val="0"/>
-              </a:spcAft>
-              <a:defRPr sz="1800" b="0">
-                <a:solidFill>
-                  <a:srgbClr val="2C2A26"/>
-                </a:solidFill>
-                <a:latin typeface="Calibri"/>
-              </a:defRPr>
-            </a:pPr>
-            <a:r>
-              <a:t>No learning curve. No technical sophistication required.</a:t>
-            </a:r>
-          </a:p>
-        </p:txBody>
-      </p:sp>
-      <p:sp>
-        <p:nvSpPr>
-          <p:cNvPr id="6" name="Rounded Rectangle 5"/>
-          <p:cNvSpPr/>
-          <p:nvPr/>
-        </p:nvSpPr>
-        <p:spPr>
-          <a:xfrm>
-            <a:off x="7132320" y="3200400"/>
-            <a:ext cx="4114800" cy="2743200"/>
-          </a:xfrm>
-          <a:prstGeom prst="roundRect">
-            <a:avLst/>
-          </a:prstGeom>
-          <a:solidFill>
-            <a:srgbClr val="F3F0EA"/>
-          </a:solidFill>
-          <a:ln w="12700">
-            <a:solidFill>
-              <a:srgbClr val="E4E0D8"/>
-            </a:solidFill>
-          </a:ln>
-        </p:spPr>
-        <p:style>
-          <a:lnRef idx="1">
-            <a:schemeClr val="accent1"/>
-          </a:lnRef>
-          <a:fillRef idx="3">
-            <a:schemeClr val="accent1"/>
-          </a:fillRef>
-          <a:effectRef idx="2">
-            <a:schemeClr val="accent1"/>
-          </a:effectRef>
-          <a:fontRef idx="minor">
-            <a:schemeClr val="lt1"/>
-          </a:fontRef>
-        </p:style>
-        <p:txBody>
-          <a:bodyPr rtlCol="0" anchor="ctr"/>
-          <a:lstStyle/>
-          <a:p>
-            <a:pPr algn="ctr"/>
-          </a:p>
-        </p:txBody>
-      </p:sp>
-      <p:sp>
-        <p:nvSpPr>
-          <p:cNvPr id="7" name="TextBox 6"/>
-          <p:cNvSpPr txBox="1"/>
-          <p:nvPr/>
-        </p:nvSpPr>
-        <p:spPr>
-          <a:xfrm>
-            <a:off x="7498079" y="3474720"/>
-            <a:ext cx="3383280" cy="365760"/>
-          </a:xfrm>
-          <a:prstGeom prst="rect">
-            <a:avLst/>
-          </a:prstGeom>
-          <a:noFill/>
-        </p:spPr>
-        <p:txBody>
-          <a:bodyPr wrap="square">
-            <a:spAutoFit/>
-          </a:bodyPr>
-          <a:lstStyle/>
-          <a:p>
-            <a:pPr algn="l">
-              <a:lnSpc>
-                <a:spcPct val="120000"/>
-              </a:lnSpc>
-              <a:spcBef>
-                <a:spcPts val="0"/>
-              </a:spcBef>
-              <a:spcAft>
-                <a:spcPts val="0"/>
-              </a:spcAft>
-              <a:defRPr sz="1100" b="1">
-                <a:solidFill>
-                  <a:srgbClr val="4A7C59"/>
-                </a:solidFill>
-                <a:latin typeface="Calibri"/>
-              </a:defRPr>
-            </a:pPr>
-            <a:r>
-              <a:t>THE PENDANT</a:t>
-            </a:r>
-          </a:p>
-        </p:txBody>
-      </p:sp>
-      <p:sp>
-        <p:nvSpPr>
-          <p:cNvPr id="8" name="TextBox 7"/>
-          <p:cNvSpPr txBox="1"/>
-          <p:nvPr/>
-        </p:nvSpPr>
-        <p:spPr>
-          <a:xfrm>
-            <a:off x="7498079" y="3931920"/>
-            <a:ext cx="3383280" cy="1828800"/>
-          </a:xfrm>
-          <a:prstGeom prst="rect">
-            <a:avLst/>
-          </a:prstGeom>
-          <a:noFill/>
-        </p:spPr>
-        <p:txBody>
-          <a:bodyPr wrap="square">
-            <a:spAutoFit/>
-          </a:bodyPr>
-          <a:lstStyle/>
-          <a:p>
-            <a:pPr algn="l">
-              <a:lnSpc>
-                <a:spcPct val="145000"/>
-              </a:lnSpc>
-              <a:spcBef>
-                <a:spcPts val="0"/>
-              </a:spcBef>
-              <a:spcAft>
-                <a:spcPts val="0"/>
-              </a:spcAft>
-              <a:defRPr sz="1600" b="0">
-                <a:solidFill>
-                  <a:srgbClr val="6B6860"/>
-                </a:solidFill>
-                <a:latin typeface="Calibri"/>
-              </a:defRPr>
-            </a:pPr>
-            <a:r>
-              <a:t>Wearable voice capture device.</a:t>
-            </a:r>
-            <a:br/>
-            <a:br/>
-            <a:r>
-              <a:t>Go for a walk. Talk.</a:t>
-            </a:r>
-            <a:br/>
-            <a:r>
-              <a:t>Your thoughts become structured</a:t>
-            </a:r>
-            <a:br/>
-            <a:r>
-              <a:t>knowledge by the time you're home.</a:t>
-            </a:r>
-            <a:br/>
-            <a:br/>
-            <a:r>
-              <a:t>Working prototype on stage today.</a:t>
-            </a:r>
-          </a:p>
-        </p:txBody>
-      </p:sp>
-    </p:spTree>
-  </p:cSld>
-  <p:clrMapOvr>
-    <a:masterClrMapping/>
-  </p:clrMapOvr>
-</p:sld>
-</file>
-
-<file path=ppt/slides/slide5.xml><?xml version="1.0" encoding="utf-8"?>
-<p:sld xmlns:a="http://schemas.openxmlformats.org/drawingml/2006/main" xmlns:p="http://schemas.openxmlformats.org/presentationml/2006/main" xmlns:r="http://schemas.openxmlformats.org/officeDocument/2006/relationships">
-  <p:cSld>
-    <p:bg>
-      <p:bgPr>
-        <a:solidFill>
-          <a:srgbClr val="FAF8F4"/>
-        </a:solidFill>
-        <a:effectLst/>
-      </p:bgPr>
-    </p:bg>
-    <p:spTree>
-      <p:nvGrpSpPr>
-        <p:cNvPr id="1" name=""/>
-        <p:cNvGrpSpPr/>
-        <p:nvPr/>
-      </p:nvGrpSpPr>
-      <p:grpSpPr/>
-      <p:sp>
-        <p:nvSpPr>
-          <p:cNvPr id="2" name="TextBox 1"/>
-          <p:cNvSpPr txBox="1"/>
-          <p:nvPr/>
-        </p:nvSpPr>
-        <p:spPr>
-          <a:xfrm>
-            <a:off x="1097280" y="1097280"/>
-            <a:ext cx="3657600" cy="365760"/>
-          </a:xfrm>
-          <a:prstGeom prst="rect">
-            <a:avLst/>
-          </a:prstGeom>
-          <a:noFill/>
-        </p:spPr>
-        <p:txBody>
-          <a:bodyPr wrap="square">
-            <a:spAutoFit/>
-          </a:bodyPr>
-          <a:lstStyle/>
-          <a:p>
-            <a:pPr algn="l">
-              <a:lnSpc>
-                <a:spcPct val="120000"/>
-              </a:lnSpc>
-              <a:spcBef>
-                <a:spcPts val="0"/>
-              </a:spcBef>
-              <a:spcAft>
-                <a:spcPts val="0"/>
-              </a:spcAft>
-              <a:defRPr sz="1100" b="1">
-                <a:solidFill>
-                  <a:srgbClr val="4A7C59"/>
-                </a:solidFill>
-                <a:latin typeface="Calibri"/>
-              </a:defRPr>
-            </a:pPr>
-            <a:r>
-              <a:t>THE INSIGHT</a:t>
-            </a:r>
-          </a:p>
-        </p:txBody>
-      </p:sp>
-      <p:sp>
-        <p:nvSpPr>
-          <p:cNvPr id="3" name="TextBox 2"/>
-          <p:cNvSpPr txBox="1"/>
-          <p:nvPr/>
-        </p:nvSpPr>
-        <p:spPr>
-          <a:xfrm>
-            <a:off x="1097280" y="1554480"/>
-            <a:ext cx="9144000" cy="1371600"/>
-          </a:xfrm>
-          <a:prstGeom prst="rect">
-            <a:avLst/>
-          </a:prstGeom>
-          <a:noFill/>
-        </p:spPr>
-        <p:txBody>
-          <a:bodyPr wrap="square">
-            <a:spAutoFit/>
-          </a:bodyPr>
-          <a:lstStyle/>
-          <a:p>
-            <a:pPr algn="l">
-              <a:lnSpc>
-                <a:spcPct val="105000"/>
-              </a:lnSpc>
-              <a:spcBef>
-                <a:spcPts val="0"/>
-              </a:spcBef>
-              <a:spcAft>
-                <a:spcPts val="0"/>
-              </a:spcAft>
-              <a:defRPr sz="4000" b="0">
-                <a:solidFill>
-                  <a:srgbClr val="2C2A26"/>
-                </a:solidFill>
-                <a:latin typeface="Georgia"/>
-              </a:defRPr>
-            </a:pPr>
-            <a:r>
-              <a:t>Context compounds.</a:t>
-            </a:r>
-          </a:p>
-        </p:txBody>
-      </p:sp>
-      <p:sp>
-        <p:nvSpPr>
-          <p:cNvPr id="4" name="TextBox 3"/>
-          <p:cNvSpPr txBox="1"/>
-          <p:nvPr/>
-        </p:nvSpPr>
-        <p:spPr>
-          <a:xfrm>
-            <a:off x="1097280" y="3017520"/>
-            <a:ext cx="9144000" cy="731520"/>
-          </a:xfrm>
-          <a:prstGeom prst="rect">
-            <a:avLst/>
-          </a:prstGeom>
-          <a:noFill/>
-        </p:spPr>
-        <p:txBody>
-          <a:bodyPr wrap="square">
-            <a:spAutoFit/>
-          </a:bodyPr>
-          <a:lstStyle/>
-          <a:p>
-            <a:pPr algn="l">
-              <a:lnSpc>
-                <a:spcPct val="150000"/>
-              </a:lnSpc>
-              <a:spcBef>
-                <a:spcPts val="0"/>
-              </a:spcBef>
-              <a:spcAft>
-                <a:spcPts val="0"/>
-              </a:spcAft>
-              <a:defRPr sz="2000" b="0">
-                <a:solidFill>
-                  <a:srgbClr val="6B6860"/>
-                </a:solidFill>
-                <a:latin typeface="Calibri"/>
-              </a:defRPr>
-            </a:pPr>
-            <a:r>
-              <a:t>Every day you use Parachute, your AI gets meaningfully better.</a:t>
-            </a:r>
-            <a:br/>
-            <a:r>
-              <a:t>No competitor can shortcut months of accumulated personal context.</a:t>
-            </a:r>
-          </a:p>
-        </p:txBody>
-      </p:sp>
-      <p:sp>
-        <p:nvSpPr>
-          <p:cNvPr id="5" name="TextBox 4"/>
-          <p:cNvSpPr txBox="1"/>
-          <p:nvPr/>
-        </p:nvSpPr>
-        <p:spPr>
-          <a:xfrm>
-            <a:off x="1371600" y="4206240"/>
-            <a:ext cx="548640" cy="411480"/>
-          </a:xfrm>
-          <a:prstGeom prst="rect">
-            <a:avLst/>
-          </a:prstGeom>
-          <a:noFill/>
-        </p:spPr>
-        <p:txBody>
-          <a:bodyPr wrap="square">
-            <a:spAutoFit/>
-          </a:bodyPr>
-          <a:lstStyle/>
-          <a:p>
-            <a:pPr algn="l">
-              <a:lnSpc>
-                <a:spcPct val="120000"/>
-              </a:lnSpc>
-              <a:spcBef>
-                <a:spcPts val="0"/>
-              </a:spcBef>
-              <a:spcAft>
-                <a:spcPts val="0"/>
-              </a:spcAft>
-              <a:defRPr sz="1400" b="0">
-                <a:solidFill>
-                  <a:srgbClr val="9A9690"/>
-                </a:solidFill>
-                <a:latin typeface="Courier New"/>
-              </a:defRPr>
-            </a:pPr>
-            <a:r>
-              <a:t>01</a:t>
-            </a:r>
-          </a:p>
-        </p:txBody>
-      </p:sp>
-      <p:sp>
-        <p:nvSpPr>
-          <p:cNvPr id="6" name="TextBox 5"/>
-          <p:cNvSpPr txBox="1"/>
-          <p:nvPr/>
-        </p:nvSpPr>
-        <p:spPr>
-          <a:xfrm>
-            <a:off x="2011680" y="4206240"/>
-            <a:ext cx="5486400" cy="411480"/>
-          </a:xfrm>
-          <a:prstGeom prst="rect">
-            <a:avLst/>
-          </a:prstGeom>
-          <a:noFill/>
-        </p:spPr>
-        <p:txBody>
-          <a:bodyPr wrap="square">
-            <a:spAutoFit/>
-          </a:bodyPr>
-          <a:lstStyle/>
-          <a:p>
-            <a:pPr algn="l">
-              <a:lnSpc>
-                <a:spcPct val="120000"/>
-              </a:lnSpc>
-              <a:spcBef>
-                <a:spcPts val="0"/>
-              </a:spcBef>
-              <a:spcAft>
-                <a:spcPts val="0"/>
-              </a:spcAft>
-              <a:defRPr sz="2000" b="0">
-                <a:solidFill>
-                  <a:srgbClr val="2C2A26"/>
-                </a:solidFill>
-                <a:latin typeface="Georgia"/>
-              </a:defRPr>
-            </a:pPr>
-            <a:r>
-              <a:t>Start journaling in Daily</a:t>
-            </a:r>
-          </a:p>
-        </p:txBody>
-      </p:sp>
-      <p:sp>
-        <p:nvSpPr>
-          <p:cNvPr id="7" name="TextBox 6"/>
-          <p:cNvSpPr txBox="1"/>
-          <p:nvPr/>
-        </p:nvSpPr>
-        <p:spPr>
-          <a:xfrm>
-            <a:off x="1371600" y="4663440"/>
-            <a:ext cx="548640" cy="411480"/>
-          </a:xfrm>
-          <a:prstGeom prst="rect">
-            <a:avLst/>
-          </a:prstGeom>
-          <a:noFill/>
-        </p:spPr>
-        <p:txBody>
-          <a:bodyPr wrap="square">
-            <a:spAutoFit/>
-          </a:bodyPr>
-          <a:lstStyle/>
-          <a:p>
-            <a:pPr algn="l">
-              <a:lnSpc>
-                <a:spcPct val="120000"/>
-              </a:lnSpc>
-              <a:spcBef>
-                <a:spcPts val="0"/>
-              </a:spcBef>
-              <a:spcAft>
-                <a:spcPts val="0"/>
-              </a:spcAft>
-              <a:defRPr sz="1400" b="0">
-                <a:solidFill>
-                  <a:srgbClr val="9A9690"/>
-                </a:solidFill>
-                <a:latin typeface="Courier New"/>
-              </a:defRPr>
-            </a:pPr>
-            <a:r>
-              <a:t>02</a:t>
-            </a:r>
-          </a:p>
-        </p:txBody>
-      </p:sp>
-      <p:sp>
-        <p:nvSpPr>
-          <p:cNvPr id="8" name="TextBox 7"/>
-          <p:cNvSpPr txBox="1"/>
-          <p:nvPr/>
-        </p:nvSpPr>
-        <p:spPr>
-          <a:xfrm>
-            <a:off x="2011680" y="4663440"/>
-            <a:ext cx="5486400" cy="411480"/>
-          </a:xfrm>
-          <a:prstGeom prst="rect">
-            <a:avLst/>
-          </a:prstGeom>
-          <a:noFill/>
-        </p:spPr>
-        <p:txBody>
-          <a:bodyPr wrap="square">
-            <a:spAutoFit/>
-          </a:bodyPr>
-          <a:lstStyle/>
-          <a:p>
-            <a:pPr algn="l">
-              <a:lnSpc>
-                <a:spcPct val="120000"/>
-              </a:lnSpc>
-              <a:spcBef>
-                <a:spcPts val="0"/>
-              </a:spcBef>
-              <a:spcAft>
-                <a:spcPts val="0"/>
-              </a:spcAft>
-              <a:defRPr sz="2000" b="0">
-                <a:solidFill>
-                  <a:srgbClr val="2C2A26"/>
-                </a:solidFill>
-                <a:latin typeface="Georgia"/>
-              </a:defRPr>
-            </a:pPr>
-            <a:r>
-              <a:t>Build months of personal context</a:t>
-            </a:r>
-          </a:p>
-        </p:txBody>
-      </p:sp>
-      <p:sp>
-        <p:nvSpPr>
-          <p:cNvPr id="9" name="TextBox 8"/>
-          <p:cNvSpPr txBox="1"/>
-          <p:nvPr/>
-        </p:nvSpPr>
-        <p:spPr>
-          <a:xfrm>
-            <a:off x="1371600" y="5120640"/>
-            <a:ext cx="548640" cy="411480"/>
-          </a:xfrm>
-          <a:prstGeom prst="rect">
-            <a:avLst/>
-          </a:prstGeom>
-          <a:noFill/>
-        </p:spPr>
-        <p:txBody>
-          <a:bodyPr wrap="square">
-            <a:spAutoFit/>
-          </a:bodyPr>
-          <a:lstStyle/>
-          <a:p>
-            <a:pPr algn="l">
-              <a:lnSpc>
-                <a:spcPct val="120000"/>
-              </a:lnSpc>
-              <a:spcBef>
-                <a:spcPts val="0"/>
-              </a:spcBef>
-              <a:spcAft>
-                <a:spcPts val="0"/>
-              </a:spcAft>
-              <a:defRPr sz="1400" b="0">
-                <a:solidFill>
-                  <a:srgbClr val="9A9690"/>
-                </a:solidFill>
-                <a:latin typeface="Courier New"/>
-              </a:defRPr>
-            </a:pPr>
-            <a:r>
-              <a:t>03</a:t>
-            </a:r>
-          </a:p>
-        </p:txBody>
-      </p:sp>
-      <p:sp>
-        <p:nvSpPr>
-          <p:cNvPr id="10" name="TextBox 9"/>
-          <p:cNvSpPr txBox="1"/>
-          <p:nvPr/>
-        </p:nvSpPr>
-        <p:spPr>
-          <a:xfrm>
-            <a:off x="2011680" y="5120640"/>
-            <a:ext cx="5486400" cy="411480"/>
-          </a:xfrm>
-          <a:prstGeom prst="rect">
-            <a:avLst/>
-          </a:prstGeom>
-          <a:noFill/>
-        </p:spPr>
-        <p:txBody>
-          <a:bodyPr wrap="square">
-            <a:spAutoFit/>
-          </a:bodyPr>
-          <a:lstStyle/>
-          <a:p>
-            <a:pPr algn="l">
-              <a:lnSpc>
-                <a:spcPct val="120000"/>
-              </a:lnSpc>
-              <a:spcBef>
-                <a:spcPts val="0"/>
-              </a:spcBef>
-              <a:spcAft>
-                <a:spcPts val="0"/>
-              </a:spcAft>
-              <a:defRPr sz="2000" b="0">
-                <a:solidFill>
-                  <a:srgbClr val="2C2A26"/>
-                </a:solidFill>
-                <a:latin typeface="Georgia"/>
-              </a:defRPr>
-            </a:pPr>
-            <a:r>
-              <a:t>Upgrade to Parachute Computer</a:t>
-            </a:r>
-          </a:p>
-        </p:txBody>
-      </p:sp>
-      <p:sp>
-        <p:nvSpPr>
-          <p:cNvPr id="11" name="TextBox 10"/>
-          <p:cNvSpPr txBox="1"/>
-          <p:nvPr/>
-        </p:nvSpPr>
-        <p:spPr>
-          <a:xfrm>
-            <a:off x="1371600" y="5577840"/>
-            <a:ext cx="548640" cy="411480"/>
-          </a:xfrm>
-          <a:prstGeom prst="rect">
-            <a:avLst/>
-          </a:prstGeom>
-          <a:noFill/>
-        </p:spPr>
-        <p:txBody>
-          <a:bodyPr wrap="square">
-            <a:spAutoFit/>
-          </a:bodyPr>
-          <a:lstStyle/>
-          <a:p>
-            <a:pPr algn="l">
-              <a:lnSpc>
-                <a:spcPct val="120000"/>
-              </a:lnSpc>
-              <a:spcBef>
-                <a:spcPts val="0"/>
-              </a:spcBef>
-              <a:spcAft>
-                <a:spcPts val="0"/>
-              </a:spcAft>
-              <a:defRPr sz="1400" b="0">
-                <a:solidFill>
-                  <a:srgbClr val="9A9690"/>
-                </a:solidFill>
-                <a:latin typeface="Courier New"/>
-              </a:defRPr>
-            </a:pPr>
-            <a:r>
-              <a:t>04</a:t>
-            </a:r>
-          </a:p>
-        </p:txBody>
-      </p:sp>
-      <p:sp>
-        <p:nvSpPr>
-          <p:cNvPr id="12" name="TextBox 11"/>
-          <p:cNvSpPr txBox="1"/>
-          <p:nvPr/>
-        </p:nvSpPr>
-        <p:spPr>
-          <a:xfrm>
-            <a:off x="2011680" y="5577840"/>
-            <a:ext cx="5486400" cy="411480"/>
-          </a:xfrm>
-          <a:prstGeom prst="rect">
-            <a:avLst/>
-          </a:prstGeom>
-          <a:noFill/>
-        </p:spPr>
-        <p:txBody>
-          <a:bodyPr wrap="square">
-            <a:spAutoFit/>
-          </a:bodyPr>
-          <a:lstStyle/>
-          <a:p>
-            <a:pPr algn="l">
-              <a:lnSpc>
-                <a:spcPct val="120000"/>
-              </a:lnSpc>
-              <a:spcBef>
-                <a:spcPts val="0"/>
-              </a:spcBef>
-              <a:spcAft>
-                <a:spcPts val="0"/>
-              </a:spcAft>
-              <a:defRPr sz="2000" b="0">
-                <a:solidFill>
-                  <a:srgbClr val="2C2A26"/>
-                </a:solidFill>
-                <a:latin typeface="Georgia"/>
-              </a:defRPr>
-            </a:pPr>
-            <a:r>
-              <a:t>Brain ingests your history instantly</a:t>
-            </a:r>
-          </a:p>
-        </p:txBody>
-      </p:sp>
-      <p:sp>
-        <p:nvSpPr>
-          <p:cNvPr id="13" name="TextBox 12"/>
-          <p:cNvSpPr txBox="1"/>
-          <p:nvPr/>
-        </p:nvSpPr>
-        <p:spPr>
-          <a:xfrm>
-            <a:off x="1371600" y="6035040"/>
-            <a:ext cx="548640" cy="411480"/>
-          </a:xfrm>
-          <a:prstGeom prst="rect">
-            <a:avLst/>
-          </a:prstGeom>
-          <a:noFill/>
-        </p:spPr>
-        <p:txBody>
-          <a:bodyPr wrap="square">
-            <a:spAutoFit/>
-          </a:bodyPr>
-          <a:lstStyle/>
-          <a:p>
-            <a:pPr algn="l">
-              <a:lnSpc>
-                <a:spcPct val="120000"/>
-              </a:lnSpc>
-              <a:spcBef>
-                <a:spcPts val="0"/>
-              </a:spcBef>
-              <a:spcAft>
-                <a:spcPts val="0"/>
-              </a:spcAft>
-              <a:defRPr sz="1400" b="0">
-                <a:solidFill>
-                  <a:srgbClr val="4A7C59"/>
-                </a:solidFill>
-                <a:latin typeface="Courier New"/>
-              </a:defRPr>
-            </a:pPr>
-            <a:r>
-              <a:t>→</a:t>
-            </a:r>
-          </a:p>
-        </p:txBody>
-      </p:sp>
-      <p:sp>
-        <p:nvSpPr>
-          <p:cNvPr id="14" name="TextBox 13"/>
-          <p:cNvSpPr txBox="1"/>
-          <p:nvPr/>
-        </p:nvSpPr>
-        <p:spPr>
-          <a:xfrm>
-            <a:off x="2011680" y="6035040"/>
-            <a:ext cx="5486400" cy="411480"/>
-          </a:xfrm>
-          <a:prstGeom prst="rect">
-            <a:avLst/>
-          </a:prstGeom>
-          <a:noFill/>
-        </p:spPr>
-        <p:txBody>
-          <a:bodyPr wrap="square">
-            <a:spAutoFit/>
-          </a:bodyPr>
-          <a:lstStyle/>
-          <a:p>
-            <a:pPr algn="l">
-              <a:lnSpc>
-                <a:spcPct val="120000"/>
-              </a:lnSpc>
-              <a:spcBef>
-                <a:spcPts val="0"/>
-              </a:spcBef>
-              <a:spcAft>
-                <a:spcPts val="0"/>
-              </a:spcAft>
-              <a:defRPr sz="2000" b="1">
-                <a:solidFill>
-                  <a:srgbClr val="4A7C59"/>
-                </a:solidFill>
-                <a:latin typeface="Georgia"/>
-              </a:defRPr>
-            </a:pPr>
-            <a:r>
-              <a:t>System already knows you</a:t>
-            </a:r>
-          </a:p>
-        </p:txBody>
-      </p:sp>
-    </p:spTree>
-  </p:cSld>
-  <p:clrMapOvr>
-    <a:masterClrMapping/>
-  </p:clrMapOvr>
-</p:sld>
-</file>
-
-<file path=ppt/slides/slide6.xml><?xml version="1.0" encoding="utf-8"?>
-<p:sld xmlns:a="http://schemas.openxmlformats.org/drawingml/2006/main" xmlns:p="http://schemas.openxmlformats.org/presentationml/2006/main" xmlns:r="http://schemas.openxmlformats.org/officeDocument/2006/relationships">
-  <p:cSld>
-    <p:bg>
-      <p:bgPr>
-        <a:solidFill>
-          <a:srgbClr val="FAF8F4"/>
-        </a:solidFill>
-        <a:effectLst/>
-      </p:bgPr>
-    </p:bg>
-    <p:spTree>
-      <p:nvGrpSpPr>
-        <p:cNvPr id="1" name=""/>
-        <p:cNvGrpSpPr/>
-        <p:nvPr/>
-      </p:nvGrpSpPr>
-      <p:grpSpPr/>
-      <p:sp>
-        <p:nvSpPr>
-          <p:cNvPr id="2" name="TextBox 1"/>
-          <p:cNvSpPr txBox="1"/>
-          <p:nvPr/>
-        </p:nvSpPr>
-        <p:spPr>
-          <a:xfrm>
-            <a:off x="1097280" y="1097280"/>
-            <a:ext cx="3657600" cy="365760"/>
-          </a:xfrm>
-          <a:prstGeom prst="rect">
-            <a:avLst/>
-          </a:prstGeom>
-          <a:noFill/>
-        </p:spPr>
-        <p:txBody>
-          <a:bodyPr wrap="square">
-            <a:spAutoFit/>
-          </a:bodyPr>
-          <a:lstStyle/>
-          <a:p>
-            <a:pPr algn="l">
-              <a:lnSpc>
-                <a:spcPct val="120000"/>
-              </a:lnSpc>
-              <a:spcBef>
-                <a:spcPts val="0"/>
-              </a:spcBef>
-              <a:spcAft>
-                <a:spcPts val="0"/>
-              </a:spcAft>
-              <a:defRPr sz="1100" b="1">
-                <a:solidFill>
-                  <a:srgbClr val="4A7C59"/>
-                </a:solidFill>
-                <a:latin typeface="Calibri"/>
-              </a:defRPr>
-            </a:pPr>
-            <a:r>
-              <a:t>WHY US</a:t>
-            </a:r>
-          </a:p>
-        </p:txBody>
-      </p:sp>
-      <p:sp>
-        <p:nvSpPr>
-          <p:cNvPr id="3" name="TextBox 2"/>
-          <p:cNvSpPr txBox="1"/>
-          <p:nvPr/>
-        </p:nvSpPr>
-        <p:spPr>
-          <a:xfrm>
-            <a:off x="1097280" y="1554480"/>
-            <a:ext cx="9144000" cy="1371600"/>
-          </a:xfrm>
-          <a:prstGeom prst="rect">
-            <a:avLst/>
-          </a:prstGeom>
-          <a:noFill/>
-        </p:spPr>
-        <p:txBody>
-          <a:bodyPr wrap="square">
-            <a:spAutoFit/>
-          </a:bodyPr>
-          <a:lstStyle/>
-          <a:p>
-            <a:pPr algn="l">
-              <a:lnSpc>
-                <a:spcPct val="105000"/>
-              </a:lnSpc>
-              <a:spcBef>
-                <a:spcPts val="0"/>
-              </a:spcBef>
-              <a:spcAft>
-                <a:spcPts val="0"/>
-              </a:spcAft>
-              <a:defRPr sz="4000" b="0">
-                <a:solidFill>
-                  <a:srgbClr val="2C2A26"/>
-                </a:solidFill>
-                <a:latin typeface="Georgia"/>
-              </a:defRPr>
-            </a:pPr>
-            <a:r>
-              <a:t>Open source is</a:t>
-            </a:r>
-            <a:br/>
-            <a:r>
-              <a:t>the trust foundation.</a:t>
-            </a:r>
-          </a:p>
-        </p:txBody>
-      </p:sp>
-      <p:sp>
-        <p:nvSpPr>
-          <p:cNvPr id="4" name="TextBox 3"/>
-          <p:cNvSpPr txBox="1"/>
-          <p:nvPr/>
-        </p:nvSpPr>
-        <p:spPr>
-          <a:xfrm>
-            <a:off x="1097280" y="3200400"/>
-            <a:ext cx="3200400" cy="320040"/>
-          </a:xfrm>
-          <a:prstGeom prst="rect">
-            <a:avLst/>
-          </a:prstGeom>
-          <a:noFill/>
-        </p:spPr>
-        <p:txBody>
-          <a:bodyPr wrap="square">
-            <a:spAutoFit/>
-          </a:bodyPr>
-          <a:lstStyle/>
-          <a:p>
-            <a:pPr algn="l">
-              <a:lnSpc>
-                <a:spcPct val="120000"/>
-              </a:lnSpc>
-              <a:spcBef>
-                <a:spcPts val="0"/>
-              </a:spcBef>
-              <a:spcAft>
-                <a:spcPts val="0"/>
-              </a:spcAft>
-              <a:defRPr sz="1800" b="1">
-                <a:solidFill>
-                  <a:srgbClr val="2C2A26"/>
-                </a:solidFill>
-                <a:latin typeface="Calibri"/>
-              </a:defRPr>
-            </a:pPr>
-            <a:r>
-              <a:t>AGPL-3.0 licensed</a:t>
-            </a:r>
-          </a:p>
-        </p:txBody>
-      </p:sp>
-      <p:sp>
-        <p:nvSpPr>
-          <p:cNvPr id="5" name="TextBox 4"/>
-          <p:cNvSpPr txBox="1"/>
-          <p:nvPr/>
-        </p:nvSpPr>
-        <p:spPr>
-          <a:xfrm>
-            <a:off x="4572000" y="3200400"/>
-            <a:ext cx="6400800" cy="320040"/>
-          </a:xfrm>
-          <a:prstGeom prst="rect">
-            <a:avLst/>
-          </a:prstGeom>
-          <a:noFill/>
-        </p:spPr>
-        <p:txBody>
-          <a:bodyPr wrap="square">
-            <a:spAutoFit/>
-          </a:bodyPr>
-          <a:lstStyle/>
-          <a:p>
-            <a:pPr algn="l">
-              <a:lnSpc>
-                <a:spcPct val="120000"/>
-              </a:lnSpc>
-              <a:spcBef>
-                <a:spcPts val="0"/>
-              </a:spcBef>
-              <a:spcAft>
-                <a:spcPts val="0"/>
-              </a:spcAft>
-              <a:defRPr sz="1600" b="0">
-                <a:solidFill>
-                  <a:srgbClr val="6B6860"/>
-                </a:solidFill>
-                <a:latin typeface="Calibri"/>
-              </a:defRPr>
-            </a:pPr>
-            <a:r>
-              <a:t>Fully transparent. Proprietary forks must share changes.</a:t>
-            </a:r>
-          </a:p>
-        </p:txBody>
-      </p:sp>
-      <p:sp>
-        <p:nvSpPr>
-          <p:cNvPr id="6" name="TextBox 5"/>
-          <p:cNvSpPr txBox="1"/>
-          <p:nvPr/>
-        </p:nvSpPr>
-        <p:spPr>
-          <a:xfrm>
-            <a:off x="1097280" y="3794760"/>
-            <a:ext cx="3200400" cy="320040"/>
-          </a:xfrm>
-          <a:prstGeom prst="rect">
-            <a:avLst/>
-          </a:prstGeom>
-          <a:noFill/>
-        </p:spPr>
-        <p:txBody>
-          <a:bodyPr wrap="square">
-            <a:spAutoFit/>
-          </a:bodyPr>
-          <a:lstStyle/>
-          <a:p>
-            <a:pPr algn="l">
-              <a:lnSpc>
-                <a:spcPct val="120000"/>
-              </a:lnSpc>
-              <a:spcBef>
-                <a:spcPts val="0"/>
-              </a:spcBef>
-              <a:spcAft>
-                <a:spcPts val="0"/>
-              </a:spcAft>
-              <a:defRPr sz="1800" b="1">
-                <a:solidFill>
-                  <a:srgbClr val="2C2A26"/>
-                </a:solidFill>
-                <a:latin typeface="Calibri"/>
-              </a:defRPr>
-            </a:pPr>
-            <a:r>
-              <a:t>Local-first</a:t>
-            </a:r>
-          </a:p>
-        </p:txBody>
-      </p:sp>
-      <p:sp>
-        <p:nvSpPr>
-          <p:cNvPr id="7" name="TextBox 6"/>
-          <p:cNvSpPr txBox="1"/>
-          <p:nvPr/>
-        </p:nvSpPr>
-        <p:spPr>
-          <a:xfrm>
-            <a:off x="4572000" y="3794760"/>
-            <a:ext cx="6400800" cy="320040"/>
-          </a:xfrm>
-          <a:prstGeom prst="rect">
-            <a:avLst/>
-          </a:prstGeom>
-          <a:noFill/>
-        </p:spPr>
-        <p:txBody>
-          <a:bodyPr wrap="square">
-            <a:spAutoFit/>
-          </a:bodyPr>
-          <a:lstStyle/>
-          <a:p>
-            <a:pPr algn="l">
-              <a:lnSpc>
-                <a:spcPct val="120000"/>
-              </a:lnSpc>
-              <a:spcBef>
-                <a:spcPts val="0"/>
-              </a:spcBef>
-              <a:spcAft>
-                <a:spcPts val="0"/>
-              </a:spcAft>
-              <a:defRPr sz="1600" b="0">
-                <a:solidFill>
-                  <a:srgbClr val="6B6860"/>
-                </a:solidFill>
-                <a:latin typeface="Calibri"/>
-              </a:defRPr>
-            </a:pPr>
-            <a:r>
-              <a:t>Your data on your device. Portable. Exportable. Yours.</a:t>
-            </a:r>
-          </a:p>
-        </p:txBody>
-      </p:sp>
-      <p:sp>
-        <p:nvSpPr>
-          <p:cNvPr id="8" name="TextBox 7"/>
-          <p:cNvSpPr txBox="1"/>
-          <p:nvPr/>
-        </p:nvSpPr>
-        <p:spPr>
-          <a:xfrm>
-            <a:off x="1097280" y="4389120"/>
-            <a:ext cx="3200400" cy="320040"/>
-          </a:xfrm>
-          <a:prstGeom prst="rect">
-            <a:avLst/>
-          </a:prstGeom>
-          <a:noFill/>
-        </p:spPr>
-        <p:txBody>
-          <a:bodyPr wrap="square">
-            <a:spAutoFit/>
-          </a:bodyPr>
-          <a:lstStyle/>
-          <a:p>
-            <a:pPr algn="l">
-              <a:lnSpc>
-                <a:spcPct val="120000"/>
-              </a:lnSpc>
-              <a:spcBef>
-                <a:spcPts val="0"/>
-              </a:spcBef>
-              <a:spcAft>
-                <a:spcPts val="0"/>
-              </a:spcAft>
-              <a:defRPr sz="1800" b="1">
-                <a:solidFill>
-                  <a:srgbClr val="2C2A26"/>
-                </a:solidFill>
-                <a:latin typeface="Calibri"/>
-              </a:defRPr>
-            </a:pPr>
-            <a:r>
-              <a:t>Public Benefit Corporation</a:t>
-            </a:r>
-          </a:p>
-        </p:txBody>
-      </p:sp>
-      <p:sp>
-        <p:nvSpPr>
-          <p:cNvPr id="9" name="TextBox 8"/>
-          <p:cNvSpPr txBox="1"/>
-          <p:nvPr/>
-        </p:nvSpPr>
-        <p:spPr>
-          <a:xfrm>
-            <a:off x="4572000" y="4389120"/>
-            <a:ext cx="6400800" cy="320040"/>
-          </a:xfrm>
-          <a:prstGeom prst="rect">
-            <a:avLst/>
-          </a:prstGeom>
-          <a:noFill/>
-        </p:spPr>
-        <p:txBody>
-          <a:bodyPr wrap="square">
-            <a:spAutoFit/>
-          </a:bodyPr>
-          <a:lstStyle/>
-          <a:p>
-            <a:pPr algn="l">
-              <a:lnSpc>
-                <a:spcPct val="120000"/>
-              </a:lnSpc>
-              <a:spcBef>
-                <a:spcPts val="0"/>
-              </a:spcBef>
-              <a:spcAft>
-                <a:spcPts val="0"/>
-              </a:spcAft>
-              <a:defRPr sz="1600" b="0">
-                <a:solidFill>
-                  <a:srgbClr val="6B6860"/>
-                </a:solidFill>
-                <a:latin typeface="Calibri"/>
-              </a:defRPr>
-            </a:pPr>
-            <a:r>
-              <a:t>Legal mandate to serve users, not just shareholders.</a:t>
-            </a:r>
-          </a:p>
-        </p:txBody>
-      </p:sp>
-      <p:sp>
-        <p:nvSpPr>
-          <p:cNvPr id="10" name="TextBox 9"/>
-          <p:cNvSpPr txBox="1"/>
-          <p:nvPr/>
-        </p:nvSpPr>
-        <p:spPr>
-          <a:xfrm>
-            <a:off x="1097280" y="4983480"/>
-            <a:ext cx="3200400" cy="320040"/>
-          </a:xfrm>
-          <a:prstGeom prst="rect">
-            <a:avLst/>
-          </a:prstGeom>
-          <a:noFill/>
-        </p:spPr>
-        <p:txBody>
-          <a:bodyPr wrap="square">
-            <a:spAutoFit/>
-          </a:bodyPr>
-          <a:lstStyle/>
-          <a:p>
-            <a:pPr algn="l">
-              <a:lnSpc>
-                <a:spcPct val="120000"/>
-              </a:lnSpc>
-              <a:spcBef>
-                <a:spcPts val="0"/>
-              </a:spcBef>
-              <a:spcAft>
-                <a:spcPts val="0"/>
-              </a:spcAft>
-              <a:defRPr sz="1800" b="1">
-                <a:solidFill>
-                  <a:srgbClr val="2C2A26"/>
-                </a:solidFill>
-                <a:latin typeface="Calibri"/>
-              </a:defRPr>
-            </a:pPr>
-            <a:r>
-              <a:t>Software is no longer a moat</a:t>
-            </a:r>
-          </a:p>
-        </p:txBody>
-      </p:sp>
-      <p:sp>
-        <p:nvSpPr>
-          <p:cNvPr id="11" name="TextBox 10"/>
-          <p:cNvSpPr txBox="1"/>
-          <p:nvPr/>
-        </p:nvSpPr>
-        <p:spPr>
-          <a:xfrm>
-            <a:off x="4572000" y="4983480"/>
-            <a:ext cx="6400800" cy="320040"/>
-          </a:xfrm>
-          <a:prstGeom prst="rect">
-            <a:avLst/>
-          </a:prstGeom>
-          <a:noFill/>
-        </p:spPr>
-        <p:txBody>
-          <a:bodyPr wrap="square">
-            <a:spAutoFit/>
-          </a:bodyPr>
-          <a:lstStyle/>
-          <a:p>
-            <a:pPr algn="l">
-              <a:lnSpc>
-                <a:spcPct val="120000"/>
-              </a:lnSpc>
-              <a:spcBef>
-                <a:spcPts val="0"/>
-              </a:spcBef>
-              <a:spcAft>
-                <a:spcPts val="0"/>
-              </a:spcAft>
-              <a:defRPr sz="1600" b="0">
-                <a:solidFill>
-                  <a:srgbClr val="6B6860"/>
-                </a:solidFill>
-                <a:latin typeface="Calibri"/>
-              </a:defRPr>
-            </a:pPr>
-            <a:r>
-              <a:t>Ideas get cloned in a day. Trust and context cannot.</a:t>
-            </a:r>
-          </a:p>
-        </p:txBody>
-      </p:sp>
-      <p:sp>
-        <p:nvSpPr>
-          <p:cNvPr id="12" name="TextBox 11"/>
-          <p:cNvSpPr txBox="1"/>
-          <p:nvPr/>
-        </p:nvSpPr>
-        <p:spPr>
-          <a:xfrm>
-            <a:off x="1097280" y="5577840"/>
-            <a:ext cx="3200400" cy="320040"/>
-          </a:xfrm>
-          <a:prstGeom prst="rect">
-            <a:avLst/>
-          </a:prstGeom>
-          <a:noFill/>
-        </p:spPr>
-        <p:txBody>
-          <a:bodyPr wrap="square">
-            <a:spAutoFit/>
-          </a:bodyPr>
-          <a:lstStyle/>
-          <a:p>
-            <a:pPr algn="l">
-              <a:lnSpc>
-                <a:spcPct val="120000"/>
-              </a:lnSpc>
-              <a:spcBef>
-                <a:spcPts val="0"/>
-              </a:spcBef>
-              <a:spcAft>
-                <a:spcPts val="0"/>
-              </a:spcAft>
-              <a:defRPr sz="1800" b="1">
-                <a:solidFill>
-                  <a:srgbClr val="2C2A26"/>
-                </a:solidFill>
-                <a:latin typeface="Calibri"/>
-              </a:defRPr>
-            </a:pPr>
-            <a:r>
-              <a:t>Community as growth engine</a:t>
-            </a:r>
-          </a:p>
-        </p:txBody>
-      </p:sp>
-      <p:sp>
-        <p:nvSpPr>
-          <p:cNvPr id="13" name="TextBox 12"/>
-          <p:cNvSpPr txBox="1"/>
-          <p:nvPr/>
-        </p:nvSpPr>
-        <p:spPr>
-          <a:xfrm>
-            <a:off x="4572000" y="5577840"/>
-            <a:ext cx="6400800" cy="320040"/>
-          </a:xfrm>
-          <a:prstGeom prst="rect">
-            <a:avLst/>
-          </a:prstGeom>
-          <a:noFill/>
-        </p:spPr>
-        <p:txBody>
-          <a:bodyPr wrap="square">
-            <a:spAutoFit/>
-          </a:bodyPr>
-          <a:lstStyle/>
-          <a:p>
-            <a:pPr algn="l">
-              <a:lnSpc>
-                <a:spcPct val="120000"/>
-              </a:lnSpc>
-              <a:spcBef>
-                <a:spcPts val="0"/>
-              </a:spcBef>
-              <a:spcAft>
-                <a:spcPts val="0"/>
-              </a:spcAft>
-              <a:defRPr sz="1600" b="0">
-                <a:solidFill>
-                  <a:srgbClr val="6B6860"/>
-                </a:solidFill>
-                <a:latin typeface="Calibri"/>
-              </a:defRPr>
-            </a:pPr>
-            <a:r>
-              <a:t>We're building a learning community around AI tools — users who learn together become power users who build for others.</a:t>
-            </a:r>
-          </a:p>
-        </p:txBody>
-      </p:sp>
-    </p:spTree>
-  </p:cSld>
-  <p:clrMapOvr>
-    <a:masterClrMapping/>
-  </p:clrMapOvr>
-</p:sld>
-</file>
-
-<file path=ppt/slides/slide7.xml><?xml version="1.0" encoding="utf-8"?>
-<p:sld xmlns:a="http://schemas.openxmlformats.org/drawingml/2006/main" xmlns:p="http://schemas.openxmlformats.org/presentationml/2006/main" xmlns:r="http://schemas.openxmlformats.org/officeDocument/2006/relationships">
-  <p:cSld>
-    <p:bg>
-      <p:bgPr>
-        <a:solidFill>
-          <a:srgbClr val="FAF8F4"/>
-        </a:solidFill>
-        <a:effectLst/>
-      </p:bgPr>
-    </p:bg>
-    <p:spTree>
-      <p:nvGrpSpPr>
-        <p:cNvPr id="1" name=""/>
-        <p:cNvGrpSpPr/>
-        <p:nvPr/>
-      </p:nvGrpSpPr>
-      <p:grpSpPr/>
-      <p:sp>
-        <p:nvSpPr>
-          <p:cNvPr id="2" name="TextBox 1"/>
-          <p:cNvSpPr txBox="1"/>
-          <p:nvPr/>
-        </p:nvSpPr>
-        <p:spPr>
-          <a:xfrm>
-            <a:off x="1097280" y="1097280"/>
-            <a:ext cx="3657600" cy="365760"/>
-          </a:xfrm>
-          <a:prstGeom prst="rect">
-            <a:avLst/>
-          </a:prstGeom>
-          <a:noFill/>
-        </p:spPr>
-        <p:txBody>
-          <a:bodyPr wrap="square">
-            <a:spAutoFit/>
-          </a:bodyPr>
-          <a:lstStyle/>
-          <a:p>
-            <a:pPr algn="l">
-              <a:lnSpc>
-                <a:spcPct val="120000"/>
-              </a:lnSpc>
-              <a:spcBef>
-                <a:spcPts val="0"/>
-              </a:spcBef>
-              <a:spcAft>
-                <a:spcPts val="0"/>
-              </a:spcAft>
-              <a:defRPr sz="1100" b="1">
-                <a:solidFill>
-                  <a:srgbClr val="4A7C59"/>
-                </a:solidFill>
-                <a:latin typeface="Calibri"/>
-              </a:defRPr>
-            </a:pPr>
-            <a:r>
-              <a:t>BUSINESS MODEL</a:t>
-            </a:r>
-          </a:p>
-        </p:txBody>
-      </p:sp>
-      <p:sp>
-        <p:nvSpPr>
-          <p:cNvPr id="3" name="TextBox 2"/>
-          <p:cNvSpPr txBox="1"/>
-          <p:nvPr/>
-        </p:nvSpPr>
-        <p:spPr>
-          <a:xfrm>
-            <a:off x="1097280" y="1554480"/>
-            <a:ext cx="9144000" cy="1371600"/>
-          </a:xfrm>
-          <a:prstGeom prst="rect">
-            <a:avLst/>
-          </a:prstGeom>
-          <a:noFill/>
-        </p:spPr>
-        <p:txBody>
-          <a:bodyPr wrap="square">
-            <a:spAutoFit/>
-          </a:bodyPr>
-          <a:lstStyle/>
-          <a:p>
-            <a:pPr algn="l">
-              <a:lnSpc>
-                <a:spcPct val="105000"/>
-              </a:lnSpc>
-              <a:spcBef>
-                <a:spcPts val="0"/>
-              </a:spcBef>
-              <a:spcAft>
-                <a:spcPts val="0"/>
-              </a:spcAft>
-              <a:defRPr sz="4000" b="0">
-                <a:solidFill>
-                  <a:srgbClr val="2C2A26"/>
-                </a:solidFill>
-                <a:latin typeface="Georgia"/>
-              </a:defRPr>
-            </a:pPr>
-            <a:r>
-              <a:t>Start free.</a:t>
-            </a:r>
-            <a:br/>
-            <a:r>
-              <a:t>Grow with every user.</a:t>
-            </a:r>
-          </a:p>
-        </p:txBody>
-      </p:sp>
-      <p:sp>
-        <p:nvSpPr>
-          <p:cNvPr id="4" name="TextBox 3"/>
-          <p:cNvSpPr txBox="1"/>
-          <p:nvPr/>
-        </p:nvSpPr>
-        <p:spPr>
-          <a:xfrm>
-            <a:off x="1097280" y="3200400"/>
-            <a:ext cx="1645920" cy="365760"/>
-          </a:xfrm>
-          <a:prstGeom prst="rect">
-            <a:avLst/>
-          </a:prstGeom>
-          <a:noFill/>
-        </p:spPr>
-        <p:txBody>
-          <a:bodyPr wrap="square">
-            <a:spAutoFit/>
-          </a:bodyPr>
-          <a:lstStyle/>
-          <a:p>
-            <a:pPr algn="l">
-              <a:lnSpc>
-                <a:spcPct val="120000"/>
-              </a:lnSpc>
-              <a:spcBef>
-                <a:spcPts val="0"/>
-              </a:spcBef>
-              <a:spcAft>
-                <a:spcPts val="0"/>
-              </a:spcAft>
-              <a:defRPr sz="2400" b="0">
-                <a:solidFill>
-                  <a:srgbClr val="9A9690"/>
-                </a:solidFill>
-                <a:latin typeface="Georgia"/>
-              </a:defRPr>
-            </a:pPr>
-            <a:r>
-              <a:t>Free</a:t>
-            </a:r>
-          </a:p>
-        </p:txBody>
-      </p:sp>
-      <p:sp>
-        <p:nvSpPr>
-          <p:cNvPr id="5" name="TextBox 4"/>
-          <p:cNvSpPr txBox="1"/>
-          <p:nvPr/>
-        </p:nvSpPr>
-        <p:spPr>
-          <a:xfrm>
-            <a:off x="2926080" y="3246120"/>
-            <a:ext cx="7315200" cy="365760"/>
-          </a:xfrm>
-          <a:prstGeom prst="rect">
-            <a:avLst/>
-          </a:prstGeom>
-          <a:noFill/>
-        </p:spPr>
-        <p:txBody>
-          <a:bodyPr wrap="square">
-            <a:spAutoFit/>
-          </a:bodyPr>
-          <a:lstStyle/>
-          <a:p>
-            <a:pPr algn="l">
-              <a:lnSpc>
-                <a:spcPct val="120000"/>
-              </a:lnSpc>
-              <a:spcBef>
-                <a:spcPts val="0"/>
-              </a:spcBef>
-              <a:spcAft>
-                <a:spcPts val="0"/>
-              </a:spcAft>
-              <a:defRPr sz="1600" b="0">
-                <a:solidFill>
-                  <a:srgbClr val="6B6860"/>
-                </a:solidFill>
-                <a:latin typeface="Calibri"/>
-              </a:defRPr>
-            </a:pPr>
-            <a:r>
-              <a:t>Offline journal + on-device transcription. Zero hosting cost.</a:t>
-            </a:r>
-          </a:p>
-        </p:txBody>
-      </p:sp>
-      <p:sp>
-        <p:nvSpPr>
-          <p:cNvPr id="6" name="TextBox 5"/>
-          <p:cNvSpPr txBox="1"/>
-          <p:nvPr/>
-        </p:nvSpPr>
-        <p:spPr>
-          <a:xfrm>
-            <a:off x="1097280" y="3840480"/>
-            <a:ext cx="1645920" cy="365760"/>
-          </a:xfrm>
-          <a:prstGeom prst="rect">
-            <a:avLst/>
-          </a:prstGeom>
-          <a:noFill/>
-        </p:spPr>
-        <p:txBody>
-          <a:bodyPr wrap="square">
-            <a:spAutoFit/>
-          </a:bodyPr>
-          <a:lstStyle/>
-          <a:p>
-            <a:pPr algn="l">
-              <a:lnSpc>
-                <a:spcPct val="120000"/>
-              </a:lnSpc>
-              <a:spcBef>
-                <a:spcPts val="0"/>
-              </a:spcBef>
-              <a:spcAft>
-                <a:spcPts val="0"/>
-              </a:spcAft>
-              <a:defRPr sz="2400" b="0">
-                <a:solidFill>
-                  <a:srgbClr val="6B6860"/>
-                </a:solidFill>
-                <a:latin typeface="Georgia"/>
-              </a:defRPr>
-            </a:pPr>
-            <a:r>
-              <a:t>$1-2/mo</a:t>
-            </a:r>
-          </a:p>
-        </p:txBody>
-      </p:sp>
-      <p:sp>
-        <p:nvSpPr>
-          <p:cNvPr id="7" name="TextBox 6"/>
-          <p:cNvSpPr txBox="1"/>
-          <p:nvPr/>
-        </p:nvSpPr>
-        <p:spPr>
-          <a:xfrm>
-            <a:off x="2926080" y="3886200"/>
-            <a:ext cx="7315200" cy="365760"/>
-          </a:xfrm>
-          <a:prstGeom prst="rect">
-            <a:avLst/>
-          </a:prstGeom>
-          <a:noFill/>
-        </p:spPr>
-        <p:txBody>
-          <a:bodyPr wrap="square">
-            <a:spAutoFit/>
-          </a:bodyPr>
-          <a:lstStyle/>
-          <a:p>
-            <a:pPr algn="l">
-              <a:lnSpc>
-                <a:spcPct val="120000"/>
-              </a:lnSpc>
-              <a:spcBef>
-                <a:spcPts val="0"/>
-              </a:spcBef>
-              <a:spcAft>
-                <a:spcPts val="0"/>
-              </a:spcAft>
-              <a:defRPr sz="1600" b="0">
-                <a:solidFill>
-                  <a:srgbClr val="6B6860"/>
-                </a:solidFill>
-                <a:latin typeface="Calibri"/>
-              </a:defRPr>
-            </a:pPr>
-            <a:r>
-              <a:t>Cloud sync across devices. Your notes everywhere.</a:t>
-            </a:r>
-          </a:p>
-        </p:txBody>
-      </p:sp>
-      <p:sp>
-        <p:nvSpPr>
-          <p:cNvPr id="8" name="Rounded Rectangle 7"/>
-          <p:cNvSpPr/>
-          <p:nvPr/>
-        </p:nvSpPr>
-        <p:spPr>
-          <a:xfrm>
-            <a:off x="914400" y="4343400"/>
-            <a:ext cx="9601200" cy="594360"/>
-          </a:xfrm>
-          <a:prstGeom prst="roundRect">
-            <a:avLst/>
-          </a:prstGeom>
-          <a:solidFill>
-            <a:srgbClr val="E8F5EC"/>
-          </a:solidFill>
-          <a:ln>
-            <a:noFill/>
-          </a:ln>
-        </p:spPr>
-        <p:style>
-          <a:lnRef idx="1">
-            <a:schemeClr val="accent1"/>
-          </a:lnRef>
-          <a:fillRef idx="3">
-            <a:schemeClr val="accent1"/>
-          </a:fillRef>
-          <a:effectRef idx="2">
-            <a:schemeClr val="accent1"/>
-          </a:effectRef>
-          <a:fontRef idx="minor">
-            <a:schemeClr val="lt1"/>
-          </a:fontRef>
-        </p:style>
-        <p:txBody>
-          <a:bodyPr rtlCol="0" anchor="ctr"/>
-          <a:lstStyle/>
-          <a:p>
-            <a:pPr algn="ctr"/>
-          </a:p>
-        </p:txBody>
-      </p:sp>
-      <p:sp>
-        <p:nvSpPr>
-          <p:cNvPr id="9" name="TextBox 8"/>
-          <p:cNvSpPr txBox="1"/>
-          <p:nvPr/>
-        </p:nvSpPr>
-        <p:spPr>
-          <a:xfrm>
-            <a:off x="1097280" y="4480560"/>
-            <a:ext cx="1645920" cy="365760"/>
-          </a:xfrm>
-          <a:prstGeom prst="rect">
-            <a:avLst/>
-          </a:prstGeom>
-          <a:noFill/>
-        </p:spPr>
-        <p:txBody>
-          <a:bodyPr wrap="square">
-            <a:spAutoFit/>
-          </a:bodyPr>
-          <a:lstStyle/>
-          <a:p>
-            <a:pPr algn="l">
-              <a:lnSpc>
-                <a:spcPct val="120000"/>
-              </a:lnSpc>
-              <a:spcBef>
-                <a:spcPts val="0"/>
-              </a:spcBef>
-              <a:spcAft>
-                <a:spcPts val="0"/>
-              </a:spcAft>
-              <a:defRPr sz="2400" b="0">
-                <a:solidFill>
-                  <a:srgbClr val="4A7C59"/>
-                </a:solidFill>
-                <a:latin typeface="Georgia"/>
-              </a:defRPr>
-            </a:pPr>
-            <a:r>
-              <a:t>$5/mo</a:t>
-            </a:r>
-          </a:p>
-        </p:txBody>
-      </p:sp>
-      <p:sp>
-        <p:nvSpPr>
-          <p:cNvPr id="10" name="TextBox 9"/>
-          <p:cNvSpPr txBox="1"/>
-          <p:nvPr/>
-        </p:nvSpPr>
-        <p:spPr>
-          <a:xfrm>
-            <a:off x="2926080" y="4526280"/>
-            <a:ext cx="7315200" cy="365760"/>
-          </a:xfrm>
-          <a:prstGeom prst="rect">
-            <a:avLst/>
-          </a:prstGeom>
-          <a:noFill/>
-        </p:spPr>
-        <p:txBody>
-          <a:bodyPr wrap="square">
-            <a:spAutoFit/>
-          </a:bodyPr>
-          <a:lstStyle/>
-          <a:p>
-            <a:pPr algn="l">
-              <a:lnSpc>
-                <a:spcPct val="120000"/>
-              </a:lnSpc>
-              <a:spcBef>
-                <a:spcPts val="0"/>
-              </a:spcBef>
-              <a:spcAft>
-                <a:spcPts val="0"/>
-              </a:spcAft>
-              <a:defRPr sz="1600" b="0">
-                <a:solidFill>
-                  <a:srgbClr val="6B6860"/>
-                </a:solidFill>
-                <a:latin typeface="Calibri"/>
-              </a:defRPr>
-            </a:pPr>
-            <a:r>
-              <a:t>Cloud transcription + AI reflections, synthesis, pattern surfacing</a:t>
-            </a:r>
-          </a:p>
-        </p:txBody>
-      </p:sp>
-      <p:sp>
-        <p:nvSpPr>
-          <p:cNvPr id="11" name="TextBox 10"/>
-          <p:cNvSpPr txBox="1"/>
-          <p:nvPr/>
-        </p:nvSpPr>
-        <p:spPr>
-          <a:xfrm>
-            <a:off x="1097280" y="5120640"/>
-            <a:ext cx="1645920" cy="365760"/>
-          </a:xfrm>
-          <a:prstGeom prst="rect">
-            <a:avLst/>
-          </a:prstGeom>
-          <a:noFill/>
-        </p:spPr>
-        <p:txBody>
-          <a:bodyPr wrap="square">
-            <a:spAutoFit/>
-          </a:bodyPr>
-          <a:lstStyle/>
-          <a:p>
-            <a:pPr algn="l">
-              <a:lnSpc>
-                <a:spcPct val="120000"/>
-              </a:lnSpc>
-              <a:spcBef>
-                <a:spcPts val="0"/>
-              </a:spcBef>
-              <a:spcAft>
-                <a:spcPts val="0"/>
-              </a:spcAft>
-              <a:defRPr sz="2400" b="0">
-                <a:solidFill>
-                  <a:srgbClr val="2C2A26"/>
-                </a:solidFill>
-                <a:latin typeface="Georgia"/>
-              </a:defRPr>
-            </a:pPr>
-            <a:r>
-              <a:t>$20/mo</a:t>
-            </a:r>
-          </a:p>
-        </p:txBody>
-      </p:sp>
-      <p:sp>
-        <p:nvSpPr>
-          <p:cNvPr id="12" name="TextBox 11"/>
-          <p:cNvSpPr txBox="1"/>
-          <p:nvPr/>
-        </p:nvSpPr>
-        <p:spPr>
-          <a:xfrm>
-            <a:off x="2926080" y="5166360"/>
-            <a:ext cx="7315200" cy="365760"/>
-          </a:xfrm>
-          <a:prstGeom prst="rect">
-            <a:avLst/>
-          </a:prstGeom>
-          <a:noFill/>
-        </p:spPr>
-        <p:txBody>
-          <a:bodyPr wrap="square">
-            <a:spAutoFit/>
-          </a:bodyPr>
-          <a:lstStyle/>
-          <a:p>
-            <a:pPr algn="l">
-              <a:lnSpc>
-                <a:spcPct val="120000"/>
-              </a:lnSpc>
-              <a:spcBef>
-                <a:spcPts val="0"/>
-              </a:spcBef>
-              <a:spcAft>
-                <a:spcPts val="0"/>
-              </a:spcAft>
-              <a:defRPr sz="1600" b="0">
-                <a:solidFill>
-                  <a:srgbClr val="6B6860"/>
-                </a:solidFill>
-                <a:latin typeface="Calibri"/>
-              </a:defRPr>
-            </a:pPr>
-            <a:r>
-              <a:t>Hosted Parachute Computer — full agentic platform</a:t>
-            </a:r>
-          </a:p>
-        </p:txBody>
-      </p:sp>
-      <p:sp>
-        <p:nvSpPr>
-          <p:cNvPr id="13" name="TextBox 12"/>
-          <p:cNvSpPr txBox="1"/>
-          <p:nvPr/>
-        </p:nvSpPr>
-        <p:spPr>
-          <a:xfrm>
-            <a:off x="1097280" y="5760720"/>
-            <a:ext cx="9144000" cy="731520"/>
-          </a:xfrm>
-          <a:prstGeom prst="rect">
-            <a:avLst/>
-          </a:prstGeom>
-          <a:noFill/>
-        </p:spPr>
-        <p:txBody>
-          <a:bodyPr wrap="square">
-            <a:spAutoFit/>
-          </a:bodyPr>
-          <a:lstStyle/>
-          <a:p>
-            <a:pPr algn="l">
-              <a:lnSpc>
-                <a:spcPct val="150000"/>
-              </a:lnSpc>
-              <a:spcBef>
-                <a:spcPts val="0"/>
-              </a:spcBef>
-              <a:spcAft>
-                <a:spcPts val="0"/>
-              </a:spcAft>
-              <a:defRPr sz="1500" b="0">
-                <a:solidFill>
-                  <a:srgbClr val="9A9690"/>
-                </a:solidFill>
-                <a:latin typeface="Calibri"/>
-              </a:defRPr>
-            </a:pPr>
-            <a:r>
-              <a:t>Free tier has zero hosting cost — no subsidizing free users.</a:t>
-            </a:r>
-            <a:br/>
-            <a:r>
-              <a:t>AI at $5/mo uses cost-efficient models. Margins are real and improve as model costs drop.</a:t>
-            </a:r>
-          </a:p>
-        </p:txBody>
-      </p:sp>
-    </p:spTree>
-  </p:cSld>
-  <p:clrMapOvr>
-    <a:masterClrMapping/>
-  </p:clrMapOvr>
-</p:sld>
-</file>
-
-<file path=ppt/slides/slide8.xml><?xml version="1.0" encoding="utf-8"?>
-<p:sld xmlns:a="http://schemas.openxmlformats.org/drawingml/2006/main" xmlns:p="http://schemas.openxmlformats.org/presentationml/2006/main" xmlns:r="http://schemas.openxmlformats.org/officeDocument/2006/relationships">
-  <p:cSld>
-    <p:bg>
-      <p:bgPr>
-        <a:solidFill>
-          <a:srgbClr val="FAF8F4"/>
-        </a:solidFill>
-        <a:effectLst/>
-      </p:bgPr>
-    </p:bg>
-    <p:spTree>
-      <p:nvGrpSpPr>
-        <p:cNvPr id="1" name=""/>
-        <p:cNvGrpSpPr/>
-        <p:nvPr/>
-      </p:nvGrpSpPr>
-      <p:grpSpPr/>
-      <p:sp>
-        <p:nvSpPr>
-          <p:cNvPr id="2" name="TextBox 1"/>
-          <p:cNvSpPr txBox="1"/>
-          <p:nvPr/>
-        </p:nvSpPr>
-        <p:spPr>
-          <a:xfrm>
-            <a:off x="1097280" y="1097280"/>
-            <a:ext cx="3657600" cy="365760"/>
-          </a:xfrm>
-          <a:prstGeom prst="rect">
-            <a:avLst/>
-          </a:prstGeom>
-          <a:noFill/>
-        </p:spPr>
-        <p:txBody>
-          <a:bodyPr wrap="square">
-            <a:spAutoFit/>
-          </a:bodyPr>
-          <a:lstStyle/>
-          <a:p>
-            <a:pPr algn="l">
-              <a:lnSpc>
-                <a:spcPct val="120000"/>
-              </a:lnSpc>
-              <a:spcBef>
-                <a:spcPts val="0"/>
-              </a:spcBef>
-              <a:spcAft>
-                <a:spcPts val="0"/>
-              </a:spcAft>
-              <a:defRPr sz="1100" b="1">
-                <a:solidFill>
-                  <a:srgbClr val="4A7C59"/>
-                </a:solidFill>
-                <a:latin typeface="Calibri"/>
-              </a:defRPr>
-            </a:pPr>
-            <a:r>
-              <a:t>TEAM &amp; TRACTION</a:t>
-            </a:r>
-          </a:p>
-        </p:txBody>
-      </p:sp>
-      <p:sp>
-        <p:nvSpPr>
-          <p:cNvPr id="3" name="TextBox 2"/>
-          <p:cNvSpPr txBox="1"/>
-          <p:nvPr/>
-        </p:nvSpPr>
-        <p:spPr>
-          <a:xfrm>
-            <a:off x="1097280" y="1554480"/>
-            <a:ext cx="9144000" cy="1371600"/>
-          </a:xfrm>
-          <a:prstGeom prst="rect">
-            <a:avLst/>
-          </a:prstGeom>
-          <a:noFill/>
-        </p:spPr>
-        <p:txBody>
-          <a:bodyPr wrap="square">
-            <a:spAutoFit/>
-          </a:bodyPr>
-          <a:lstStyle/>
-          <a:p>
-            <a:pPr algn="l">
-              <a:lnSpc>
-                <a:spcPct val="105000"/>
-              </a:lnSpc>
-              <a:spcBef>
-                <a:spcPts val="0"/>
-              </a:spcBef>
-              <a:spcAft>
-                <a:spcPts val="0"/>
-              </a:spcAft>
-              <a:defRPr sz="4000" b="0">
-                <a:solidFill>
-                  <a:srgbClr val="2C2A26"/>
-                </a:solidFill>
-                <a:latin typeface="Georgia"/>
-              </a:defRPr>
-            </a:pPr>
-            <a:r>
-              <a:t>Built from zero.</a:t>
-            </a:r>
-            <a:br/>
-            <a:r>
-              <a:t>Solo. No funding.</a:t>
-            </a:r>
-          </a:p>
-        </p:txBody>
-      </p:sp>
-      <p:sp>
-        <p:nvSpPr>
-          <p:cNvPr id="4" name="TextBox 3"/>
-          <p:cNvSpPr txBox="1"/>
-          <p:nvPr/>
-        </p:nvSpPr>
-        <p:spPr>
-          <a:xfrm>
-            <a:off x="1097280" y="3200400"/>
-            <a:ext cx="5029200" cy="2743200"/>
-          </a:xfrm>
-          <a:prstGeom prst="rect">
-            <a:avLst/>
-          </a:prstGeom>
-          <a:noFill/>
-        </p:spPr>
-        <p:txBody>
-          <a:bodyPr wrap="square">
-            <a:spAutoFit/>
-          </a:bodyPr>
-          <a:lstStyle/>
-          <a:p>
-            <a:pPr algn="l">
-              <a:lnSpc>
-                <a:spcPct val="155000"/>
-              </a:lnSpc>
-              <a:spcBef>
-                <a:spcPts val="0"/>
-              </a:spcBef>
-              <a:spcAft>
-                <a:spcPts val="0"/>
-              </a:spcAft>
-              <a:defRPr sz="1600" b="0">
-                <a:solidFill>
-                  <a:srgbClr val="6B6860"/>
-                </a:solidFill>
-                <a:latin typeface="Calibri"/>
-              </a:defRPr>
-            </a:pPr>
-            <a:r>
-              <a:t>What exists today:</a:t>
-            </a:r>
-            <a:br/>
-            <a:br/>
-            <a:r>
-              <a:t>  ·  Working server, app, and graph-native memory</a:t>
-            </a:r>
-            <a:br/>
-            <a:r>
-              <a:t>  ·  Local voice transcription (fully offline)</a:t>
-            </a:r>
-            <a:br/>
-            <a:r>
-              <a:t>  ·  Multi-agent system with trust tiers</a:t>
-            </a:r>
-            <a:br/>
-            <a:r>
-              <a:t>  ·  Telegram, Discord, Matrix connectors</a:t>
-            </a:r>
-            <a:br/>
-            <a:r>
-              <a:t>  ·  Functional pendant prototype</a:t>
-            </a:r>
-            <a:br/>
-            <a:r>
-              <a:t>  ·  Beta launching next month</a:t>
-            </a:r>
-            <a:br/>
-            <a:r>
-              <a:t>  ·  PBC incorporated in Colorado</a:t>
-            </a:r>
-          </a:p>
-        </p:txBody>
-      </p:sp>
-      <p:sp>
-        <p:nvSpPr>
-          <p:cNvPr id="5" name="TextBox 4"/>
-          <p:cNvSpPr txBox="1"/>
-          <p:nvPr/>
-        </p:nvSpPr>
-        <p:spPr>
-          <a:xfrm>
-            <a:off x="7132320" y="3017520"/>
-            <a:ext cx="3657600" cy="320040"/>
-          </a:xfrm>
-          <a:prstGeom prst="rect">
-            <a:avLst/>
-          </a:prstGeom>
-          <a:noFill/>
-        </p:spPr>
-        <p:txBody>
-          <a:bodyPr wrap="square">
-            <a:spAutoFit/>
-          </a:bodyPr>
-          <a:lstStyle/>
-          <a:p>
-            <a:pPr algn="l">
-              <a:lnSpc>
-                <a:spcPct val="120000"/>
-              </a:lnSpc>
-              <a:spcBef>
-                <a:spcPts val="0"/>
-              </a:spcBef>
-              <a:spcAft>
-                <a:spcPts val="0"/>
-              </a:spcAft>
-              <a:defRPr sz="1100" b="1">
-                <a:solidFill>
-                  <a:srgbClr val="4A7C59"/>
-                </a:solidFill>
-                <a:latin typeface="Calibri"/>
-              </a:defRPr>
-            </a:pPr>
-            <a:r>
-              <a:t>THE TEAM</a:t>
-            </a:r>
-          </a:p>
-        </p:txBody>
-      </p:sp>
-      <p:sp>
-        <p:nvSpPr>
-          <p:cNvPr id="6" name="TextBox 5"/>
-          <p:cNvSpPr txBox="1"/>
-          <p:nvPr/>
-        </p:nvSpPr>
-        <p:spPr>
-          <a:xfrm>
-            <a:off x="7132320" y="3566160"/>
-            <a:ext cx="4114800" cy="274320"/>
-          </a:xfrm>
-          <a:prstGeom prst="rect">
-            <a:avLst/>
-          </a:prstGeom>
-          <a:noFill/>
-        </p:spPr>
-        <p:txBody>
-          <a:bodyPr wrap="square">
-            <a:spAutoFit/>
-          </a:bodyPr>
-          <a:lstStyle/>
-          <a:p>
-            <a:pPr algn="l">
-              <a:lnSpc>
-                <a:spcPct val="120000"/>
-              </a:lnSpc>
-              <a:spcBef>
-                <a:spcPts val="0"/>
-              </a:spcBef>
-              <a:spcAft>
-                <a:spcPts val="0"/>
-              </a:spcAft>
-              <a:defRPr sz="1400" b="1">
-                <a:solidFill>
-                  <a:srgbClr val="2C2A26"/>
-                </a:solidFill>
-                <a:latin typeface="Calibri"/>
-              </a:defRPr>
-            </a:pPr>
-            <a:r>
-              <a:t>Aaron Gabriel Neyer</a:t>
-            </a:r>
-          </a:p>
-        </p:txBody>
-      </p:sp>
-      <p:sp>
-        <p:nvSpPr>
-          <p:cNvPr id="7" name="TextBox 6"/>
-          <p:cNvSpPr txBox="1"/>
-          <p:nvPr/>
-        </p:nvSpPr>
-        <p:spPr>
-          <a:xfrm>
-            <a:off x="7132320" y="3822192"/>
-            <a:ext cx="4114800" cy="274320"/>
-          </a:xfrm>
-          <a:prstGeom prst="rect">
-            <a:avLst/>
-          </a:prstGeom>
-          <a:noFill/>
-        </p:spPr>
-        <p:txBody>
-          <a:bodyPr wrap="square">
-            <a:spAutoFit/>
-          </a:bodyPr>
-          <a:lstStyle/>
-          <a:p>
-            <a:pPr algn="l">
-              <a:lnSpc>
-                <a:spcPct val="120000"/>
-              </a:lnSpc>
-              <a:spcBef>
-                <a:spcPts val="0"/>
-              </a:spcBef>
-              <a:spcAft>
-                <a:spcPts val="0"/>
-              </a:spcAft>
-              <a:defRPr sz="1200" b="0">
-                <a:solidFill>
-                  <a:srgbClr val="6B6860"/>
-                </a:solidFill>
-                <a:latin typeface="Calibri"/>
-              </a:defRPr>
-            </a:pPr>
-            <a:r>
-              <a:t>Founder · Product &amp; architecture</a:t>
-            </a:r>
-          </a:p>
-        </p:txBody>
-      </p:sp>
-      <p:sp>
-        <p:nvSpPr>
-          <p:cNvPr id="8" name="TextBox 7"/>
-          <p:cNvSpPr txBox="1"/>
-          <p:nvPr/>
-        </p:nvSpPr>
-        <p:spPr>
-          <a:xfrm>
-            <a:off x="7132320" y="4114800"/>
-            <a:ext cx="4114800" cy="274320"/>
-          </a:xfrm>
-          <a:prstGeom prst="rect">
-            <a:avLst/>
-          </a:prstGeom>
-          <a:noFill/>
-        </p:spPr>
-        <p:txBody>
-          <a:bodyPr wrap="square">
-            <a:spAutoFit/>
-          </a:bodyPr>
-          <a:lstStyle/>
-          <a:p>
-            <a:pPr algn="l">
-              <a:lnSpc>
-                <a:spcPct val="120000"/>
-              </a:lnSpc>
-              <a:spcBef>
-                <a:spcPts val="0"/>
-              </a:spcBef>
-              <a:spcAft>
-                <a:spcPts val="0"/>
-              </a:spcAft>
-              <a:defRPr sz="1400" b="1">
-                <a:solidFill>
-                  <a:srgbClr val="2C2A26"/>
-                </a:solidFill>
-                <a:latin typeface="Calibri"/>
-              </a:defRPr>
-            </a:pPr>
-            <a:r>
-              <a:t>Jon Bo</a:t>
-            </a:r>
-          </a:p>
-        </p:txBody>
-      </p:sp>
-      <p:sp>
-        <p:nvSpPr>
-          <p:cNvPr id="9" name="TextBox 8"/>
-          <p:cNvSpPr txBox="1"/>
-          <p:nvPr/>
-        </p:nvSpPr>
-        <p:spPr>
-          <a:xfrm>
-            <a:off x="7132320" y="4370832"/>
-            <a:ext cx="4114800" cy="274320"/>
-          </a:xfrm>
-          <a:prstGeom prst="rect">
-            <a:avLst/>
-          </a:prstGeom>
-          <a:noFill/>
-        </p:spPr>
-        <p:txBody>
-          <a:bodyPr wrap="square">
-            <a:spAutoFit/>
-          </a:bodyPr>
-          <a:lstStyle/>
-          <a:p>
-            <a:pPr algn="l">
-              <a:lnSpc>
-                <a:spcPct val="120000"/>
-              </a:lnSpc>
-              <a:spcBef>
-                <a:spcPts val="0"/>
-              </a:spcBef>
-              <a:spcAft>
-                <a:spcPts val="0"/>
-              </a:spcAft>
-              <a:defRPr sz="1200" b="0">
-                <a:solidFill>
-                  <a:srgbClr val="6B6860"/>
-                </a:solidFill>
-                <a:latin typeface="Calibri"/>
-              </a:defRPr>
-            </a:pPr>
-            <a:r>
-              <a:t>Daily co-lead · Founding engineer</a:t>
-            </a:r>
-          </a:p>
-        </p:txBody>
-      </p:sp>
-      <p:sp>
-        <p:nvSpPr>
-          <p:cNvPr id="10" name="TextBox 9"/>
-          <p:cNvSpPr txBox="1"/>
-          <p:nvPr/>
-        </p:nvSpPr>
-        <p:spPr>
-          <a:xfrm>
-            <a:off x="7132320" y="4663440"/>
-            <a:ext cx="4114800" cy="274320"/>
-          </a:xfrm>
-          <a:prstGeom prst="rect">
-            <a:avLst/>
-          </a:prstGeom>
-          <a:noFill/>
-        </p:spPr>
-        <p:txBody>
-          <a:bodyPr wrap="square">
-            <a:spAutoFit/>
-          </a:bodyPr>
-          <a:lstStyle/>
-          <a:p>
-            <a:pPr algn="l">
-              <a:lnSpc>
-                <a:spcPct val="120000"/>
-              </a:lnSpc>
-              <a:spcBef>
-                <a:spcPts val="0"/>
-              </a:spcBef>
-              <a:spcAft>
-                <a:spcPts val="0"/>
-              </a:spcAft>
-              <a:defRPr sz="1400" b="1">
-                <a:solidFill>
-                  <a:srgbClr val="2C2A26"/>
-                </a:solidFill>
-                <a:latin typeface="Calibri"/>
-              </a:defRPr>
-            </a:pPr>
-            <a:r>
-              <a:t>Lucian Hymer</a:t>
-            </a:r>
-          </a:p>
-        </p:txBody>
-      </p:sp>
-      <p:sp>
-        <p:nvSpPr>
-          <p:cNvPr id="11" name="TextBox 10"/>
-          <p:cNvSpPr txBox="1"/>
-          <p:nvPr/>
-        </p:nvSpPr>
-        <p:spPr>
-          <a:xfrm>
-            <a:off x="7132320" y="4919472"/>
-            <a:ext cx="4114800" cy="274320"/>
-          </a:xfrm>
-          <a:prstGeom prst="rect">
-            <a:avLst/>
-          </a:prstGeom>
-          <a:noFill/>
-        </p:spPr>
-        <p:txBody>
-          <a:bodyPr wrap="square">
-            <a:spAutoFit/>
-          </a:bodyPr>
-          <a:lstStyle/>
-          <a:p>
-            <a:pPr algn="l">
-              <a:lnSpc>
-                <a:spcPct val="120000"/>
-              </a:lnSpc>
-              <a:spcBef>
-                <a:spcPts val="0"/>
-              </a:spcBef>
-              <a:spcAft>
-                <a:spcPts val="0"/>
-              </a:spcAft>
-              <a:defRPr sz="1200" b="0">
-                <a:solidFill>
-                  <a:srgbClr val="6B6860"/>
-                </a:solidFill>
-                <a:latin typeface="Calibri"/>
-              </a:defRPr>
-            </a:pPr>
-            <a:r>
-              <a:t>Computer co-lead · Founding engineer</a:t>
-            </a:r>
-          </a:p>
-        </p:txBody>
-      </p:sp>
-      <p:sp>
-        <p:nvSpPr>
-          <p:cNvPr id="12" name="TextBox 11"/>
-          <p:cNvSpPr txBox="1"/>
-          <p:nvPr/>
-        </p:nvSpPr>
-        <p:spPr>
-          <a:xfrm>
-            <a:off x="7132320" y="5212080"/>
-            <a:ext cx="4114800" cy="274320"/>
-          </a:xfrm>
-          <a:prstGeom prst="rect">
-            <a:avLst/>
-          </a:prstGeom>
-          <a:noFill/>
-        </p:spPr>
-        <p:txBody>
-          <a:bodyPr wrap="square">
-            <a:spAutoFit/>
-          </a:bodyPr>
-          <a:lstStyle/>
-          <a:p>
-            <a:pPr algn="l">
-              <a:lnSpc>
-                <a:spcPct val="120000"/>
-              </a:lnSpc>
-              <a:spcBef>
-                <a:spcPts val="0"/>
-              </a:spcBef>
-              <a:spcAft>
-                <a:spcPts val="0"/>
-              </a:spcAft>
-              <a:defRPr sz="1400" b="1">
-                <a:solidFill>
-                  <a:srgbClr val="2C2A26"/>
-                </a:solidFill>
-                <a:latin typeface="Calibri"/>
-              </a:defRPr>
-            </a:pPr>
-            <a:r>
-              <a:t>Marvin Melzer</a:t>
-            </a:r>
-          </a:p>
-        </p:txBody>
-      </p:sp>
-      <p:sp>
-        <p:nvSpPr>
-          <p:cNvPr id="13" name="TextBox 12"/>
-          <p:cNvSpPr txBox="1"/>
-          <p:nvPr/>
-        </p:nvSpPr>
-        <p:spPr>
-          <a:xfrm>
-            <a:off x="7132320" y="5468112"/>
-            <a:ext cx="4114800" cy="274320"/>
-          </a:xfrm>
-          <a:prstGeom prst="rect">
-            <a:avLst/>
-          </a:prstGeom>
-          <a:noFill/>
-        </p:spPr>
-        <p:txBody>
-          <a:bodyPr wrap="square">
-            <a:spAutoFit/>
-          </a:bodyPr>
-          <a:lstStyle/>
-          <a:p>
-            <a:pPr algn="l">
-              <a:lnSpc>
-                <a:spcPct val="120000"/>
-              </a:lnSpc>
-              <a:spcBef>
-                <a:spcPts val="0"/>
-              </a:spcBef>
-              <a:spcAft>
-                <a:spcPts val="0"/>
-              </a:spcAft>
-              <a:defRPr sz="1200" b="0">
-                <a:solidFill>
-                  <a:srgbClr val="6B6860"/>
-                </a:solidFill>
-                <a:latin typeface="Calibri"/>
-              </a:defRPr>
-            </a:pPr>
-            <a:r>
-              <a:t>Hardware · Pendant prototype</a:t>
-            </a:r>
-          </a:p>
-        </p:txBody>
-      </p:sp>
-      <p:sp>
-        <p:nvSpPr>
-          <p:cNvPr id="14" name="TextBox 13"/>
-          <p:cNvSpPr txBox="1"/>
-          <p:nvPr/>
-        </p:nvSpPr>
-        <p:spPr>
-          <a:xfrm>
-            <a:off x="7132320" y="5760720"/>
-            <a:ext cx="4114800" cy="274320"/>
-          </a:xfrm>
-          <a:prstGeom prst="rect">
-            <a:avLst/>
-          </a:prstGeom>
-          <a:noFill/>
-        </p:spPr>
-        <p:txBody>
-          <a:bodyPr wrap="square">
-            <a:spAutoFit/>
-          </a:bodyPr>
-          <a:lstStyle/>
-          <a:p>
-            <a:pPr algn="l">
-              <a:lnSpc>
-                <a:spcPct val="120000"/>
-              </a:lnSpc>
-              <a:spcBef>
-                <a:spcPts val="0"/>
-              </a:spcBef>
-              <a:spcAft>
-                <a:spcPts val="0"/>
-              </a:spcAft>
-              <a:defRPr sz="1400" b="1">
-                <a:solidFill>
-                  <a:srgbClr val="2C2A26"/>
-                </a:solidFill>
-                <a:latin typeface="Calibri"/>
-              </a:defRPr>
-            </a:pPr>
-            <a:r>
-              <a:t>Neil Yarnal</a:t>
-            </a:r>
-          </a:p>
-        </p:txBody>
-      </p:sp>
-      <p:sp>
-        <p:nvSpPr>
-          <p:cNvPr id="15" name="TextBox 14"/>
-          <p:cNvSpPr txBox="1"/>
-          <p:nvPr/>
-        </p:nvSpPr>
-        <p:spPr>
-          <a:xfrm>
-            <a:off x="7132320" y="6016752"/>
-            <a:ext cx="4114800" cy="274320"/>
-          </a:xfrm>
-          <a:prstGeom prst="rect">
-            <a:avLst/>
-          </a:prstGeom>
-          <a:noFill/>
-        </p:spPr>
-        <p:txBody>
-          <a:bodyPr wrap="square">
-            <a:spAutoFit/>
-          </a:bodyPr>
-          <a:lstStyle/>
-          <a:p>
-            <a:pPr algn="l">
-              <a:lnSpc>
-                <a:spcPct val="120000"/>
-              </a:lnSpc>
-              <a:spcBef>
-                <a:spcPts val="0"/>
-              </a:spcBef>
-              <a:spcAft>
-                <a:spcPts val="0"/>
-              </a:spcAft>
-              <a:defRPr sz="1200" b="0">
-                <a:solidFill>
-                  <a:srgbClr val="6B6860"/>
-                </a:solidFill>
-                <a:latin typeface="Calibri"/>
-              </a:defRPr>
-            </a:pPr>
-            <a:r>
-              <a:t>Brand &amp; design</a:t>
-            </a:r>
-          </a:p>
-        </p:txBody>
-      </p:sp>
-    </p:spTree>
-  </p:cSld>
-  <p:clrMapOvr>
-    <a:masterClrMapping/>
-  </p:clrMapOvr>
-</p:sld>
-</file>
-
-<file path=ppt/slides/slide9.xml><?xml version="1.0" encoding="utf-8"?>
 <p:sld xmlns:a="http://schemas.openxmlformats.org/drawingml/2006/main" xmlns:p="http://schemas.openxmlformats.org/presentationml/2006/main" xmlns:r="http://schemas.openxmlformats.org/officeDocument/2006/relationships">
   <p:cSld>
     <p:bg>
@@ -8263,6 +4329,4208 @@
 </p:sld>
 </file>
 
+<file path=ppt/slides/slide11.xml><?xml version="1.0" encoding="utf-8"?>
+<p:sld xmlns:a="http://schemas.openxmlformats.org/drawingml/2006/main" xmlns:p="http://schemas.openxmlformats.org/presentationml/2006/main" xmlns:r="http://schemas.openxmlformats.org/officeDocument/2006/relationships">
+  <p:cSld>
+    <p:bg>
+      <p:bgPr>
+        <a:solidFill>
+          <a:srgbClr val="FAF8F4"/>
+        </a:solidFill>
+        <a:effectLst/>
+      </p:bgPr>
+    </p:bg>
+    <p:spTree>
+      <p:nvGrpSpPr>
+        <p:cNvPr id="1" name=""/>
+        <p:cNvGrpSpPr/>
+        <p:nvPr/>
+      </p:nvGrpSpPr>
+      <p:grpSpPr/>
+      <p:sp>
+        <p:nvSpPr>
+          <p:cNvPr id="2" name="TextBox 1"/>
+          <p:cNvSpPr txBox="1"/>
+          <p:nvPr/>
+        </p:nvSpPr>
+        <p:spPr>
+          <a:xfrm>
+            <a:off x="1097280" y="1097280"/>
+            <a:ext cx="3657600" cy="365760"/>
+          </a:xfrm>
+          <a:prstGeom prst="rect">
+            <a:avLst/>
+          </a:prstGeom>
+          <a:noFill/>
+        </p:spPr>
+        <p:txBody>
+          <a:bodyPr wrap="square">
+            <a:spAutoFit/>
+          </a:bodyPr>
+          <a:lstStyle/>
+          <a:p>
+            <a:pPr algn="l">
+              <a:lnSpc>
+                <a:spcPct val="120000"/>
+              </a:lnSpc>
+              <a:spcBef>
+                <a:spcPts val="0"/>
+              </a:spcBef>
+              <a:spcAft>
+                <a:spcPts val="0"/>
+              </a:spcAft>
+              <a:defRPr sz="1100" b="1">
+                <a:solidFill>
+                  <a:srgbClr val="4A7C59"/>
+                </a:solidFill>
+                <a:latin typeface="Calibri"/>
+              </a:defRPr>
+            </a:pPr>
+            <a:r>
+              <a:t>THE ASK</a:t>
+            </a:r>
+          </a:p>
+        </p:txBody>
+      </p:sp>
+      <p:sp>
+        <p:nvSpPr>
+          <p:cNvPr id="3" name="TextBox 2"/>
+          <p:cNvSpPr txBox="1"/>
+          <p:nvPr/>
+        </p:nvSpPr>
+        <p:spPr>
+          <a:xfrm>
+            <a:off x="1097280" y="1554480"/>
+            <a:ext cx="9144000" cy="1371600"/>
+          </a:xfrm>
+          <a:prstGeom prst="rect">
+            <a:avLst/>
+          </a:prstGeom>
+          <a:noFill/>
+        </p:spPr>
+        <p:txBody>
+          <a:bodyPr wrap="square">
+            <a:spAutoFit/>
+          </a:bodyPr>
+          <a:lstStyle/>
+          <a:p>
+            <a:pPr algn="l">
+              <a:lnSpc>
+                <a:spcPct val="105000"/>
+              </a:lnSpc>
+              <a:spcBef>
+                <a:spcPts val="0"/>
+              </a:spcBef>
+              <a:spcAft>
+                <a:spcPts val="0"/>
+              </a:spcAft>
+              <a:defRPr sz="4000" b="0">
+                <a:solidFill>
+                  <a:srgbClr val="2C2A26"/>
+                </a:solidFill>
+                <a:latin typeface="Georgia"/>
+              </a:defRPr>
+            </a:pPr>
+            <a:r>
+              <a:t>$300K to reach revenue.</a:t>
+            </a:r>
+            <a:br/>
+            <a:r>
+              <a:t>Then scale.</a:t>
+            </a:r>
+          </a:p>
+        </p:txBody>
+      </p:sp>
+      <p:sp>
+        <p:nvSpPr>
+          <p:cNvPr id="4" name="TextBox 3"/>
+          <p:cNvSpPr txBox="1"/>
+          <p:nvPr/>
+        </p:nvSpPr>
+        <p:spPr>
+          <a:xfrm>
+            <a:off x="1097280" y="3200400"/>
+            <a:ext cx="2286000" cy="365760"/>
+          </a:xfrm>
+          <a:prstGeom prst="rect">
+            <a:avLst/>
+          </a:prstGeom>
+          <a:noFill/>
+        </p:spPr>
+        <p:txBody>
+          <a:bodyPr wrap="square">
+            <a:spAutoFit/>
+          </a:bodyPr>
+          <a:lstStyle/>
+          <a:p>
+            <a:pPr algn="l">
+              <a:lnSpc>
+                <a:spcPct val="120000"/>
+              </a:lnSpc>
+              <a:spcBef>
+                <a:spcPts val="0"/>
+              </a:spcBef>
+              <a:spcAft>
+                <a:spcPts val="0"/>
+              </a:spcAft>
+              <a:defRPr sz="1400" b="0">
+                <a:solidFill>
+                  <a:srgbClr val="9A9690"/>
+                </a:solidFill>
+                <a:latin typeface="Calibri"/>
+              </a:defRPr>
+            </a:pPr>
+            <a:r>
+              <a:t>Instrument</a:t>
+            </a:r>
+          </a:p>
+        </p:txBody>
+      </p:sp>
+      <p:sp>
+        <p:nvSpPr>
+          <p:cNvPr id="5" name="TextBox 4"/>
+          <p:cNvSpPr txBox="1"/>
+          <p:nvPr/>
+        </p:nvSpPr>
+        <p:spPr>
+          <a:xfrm>
+            <a:off x="3474720" y="3200400"/>
+            <a:ext cx="4572000" cy="365760"/>
+          </a:xfrm>
+          <a:prstGeom prst="rect">
+            <a:avLst/>
+          </a:prstGeom>
+          <a:noFill/>
+        </p:spPr>
+        <p:txBody>
+          <a:bodyPr wrap="square">
+            <a:spAutoFit/>
+          </a:bodyPr>
+          <a:lstStyle/>
+          <a:p>
+            <a:pPr algn="l">
+              <a:lnSpc>
+                <a:spcPct val="120000"/>
+              </a:lnSpc>
+              <a:spcBef>
+                <a:spcPts val="0"/>
+              </a:spcBef>
+              <a:spcAft>
+                <a:spcPts val="0"/>
+              </a:spcAft>
+              <a:defRPr sz="2000" b="0">
+                <a:solidFill>
+                  <a:srgbClr val="2C2A26"/>
+                </a:solidFill>
+                <a:latin typeface="Georgia"/>
+              </a:defRPr>
+            </a:pPr>
+            <a:r>
+              <a:t>SAFE (YC standard)</a:t>
+            </a:r>
+          </a:p>
+        </p:txBody>
+      </p:sp>
+      <p:sp>
+        <p:nvSpPr>
+          <p:cNvPr id="6" name="TextBox 5"/>
+          <p:cNvSpPr txBox="1"/>
+          <p:nvPr/>
+        </p:nvSpPr>
+        <p:spPr>
+          <a:xfrm>
+            <a:off x="1097280" y="3703320"/>
+            <a:ext cx="2286000" cy="365760"/>
+          </a:xfrm>
+          <a:prstGeom prst="rect">
+            <a:avLst/>
+          </a:prstGeom>
+          <a:noFill/>
+        </p:spPr>
+        <p:txBody>
+          <a:bodyPr wrap="square">
+            <a:spAutoFit/>
+          </a:bodyPr>
+          <a:lstStyle/>
+          <a:p>
+            <a:pPr algn="l">
+              <a:lnSpc>
+                <a:spcPct val="120000"/>
+              </a:lnSpc>
+              <a:spcBef>
+                <a:spcPts val="0"/>
+              </a:spcBef>
+              <a:spcAft>
+                <a:spcPts val="0"/>
+              </a:spcAft>
+              <a:defRPr sz="1400" b="0">
+                <a:solidFill>
+                  <a:srgbClr val="9A9690"/>
+                </a:solidFill>
+                <a:latin typeface="Calibri"/>
+              </a:defRPr>
+            </a:pPr>
+            <a:r>
+              <a:t>Valuation cap</a:t>
+            </a:r>
+          </a:p>
+        </p:txBody>
+      </p:sp>
+      <p:sp>
+        <p:nvSpPr>
+          <p:cNvPr id="7" name="TextBox 6"/>
+          <p:cNvSpPr txBox="1"/>
+          <p:nvPr/>
+        </p:nvSpPr>
+        <p:spPr>
+          <a:xfrm>
+            <a:off x="3474720" y="3703320"/>
+            <a:ext cx="4572000" cy="365760"/>
+          </a:xfrm>
+          <a:prstGeom prst="rect">
+            <a:avLst/>
+          </a:prstGeom>
+          <a:noFill/>
+        </p:spPr>
+        <p:txBody>
+          <a:bodyPr wrap="square">
+            <a:spAutoFit/>
+          </a:bodyPr>
+          <a:lstStyle/>
+          <a:p>
+            <a:pPr algn="l">
+              <a:lnSpc>
+                <a:spcPct val="120000"/>
+              </a:lnSpc>
+              <a:spcBef>
+                <a:spcPts val="0"/>
+              </a:spcBef>
+              <a:spcAft>
+                <a:spcPts val="0"/>
+              </a:spcAft>
+              <a:defRPr sz="2000" b="0">
+                <a:solidFill>
+                  <a:srgbClr val="2C2A26"/>
+                </a:solidFill>
+                <a:latin typeface="Georgia"/>
+              </a:defRPr>
+            </a:pPr>
+            <a:r>
+              <a:t>$5,000,000</a:t>
+            </a:r>
+          </a:p>
+        </p:txBody>
+      </p:sp>
+      <p:sp>
+        <p:nvSpPr>
+          <p:cNvPr id="8" name="TextBox 7"/>
+          <p:cNvSpPr txBox="1"/>
+          <p:nvPr/>
+        </p:nvSpPr>
+        <p:spPr>
+          <a:xfrm>
+            <a:off x="1097280" y="4206240"/>
+            <a:ext cx="2286000" cy="365760"/>
+          </a:xfrm>
+          <a:prstGeom prst="rect">
+            <a:avLst/>
+          </a:prstGeom>
+          <a:noFill/>
+        </p:spPr>
+        <p:txBody>
+          <a:bodyPr wrap="square">
+            <a:spAutoFit/>
+          </a:bodyPr>
+          <a:lstStyle/>
+          <a:p>
+            <a:pPr algn="l">
+              <a:lnSpc>
+                <a:spcPct val="120000"/>
+              </a:lnSpc>
+              <a:spcBef>
+                <a:spcPts val="0"/>
+              </a:spcBef>
+              <a:spcAft>
+                <a:spcPts val="0"/>
+              </a:spcAft>
+              <a:defRPr sz="1400" b="0">
+                <a:solidFill>
+                  <a:srgbClr val="9A9690"/>
+                </a:solidFill>
+                <a:latin typeface="Calibri"/>
+              </a:defRPr>
+            </a:pPr>
+            <a:r>
+              <a:t>Giving away</a:t>
+            </a:r>
+          </a:p>
+        </p:txBody>
+      </p:sp>
+      <p:sp>
+        <p:nvSpPr>
+          <p:cNvPr id="9" name="TextBox 8"/>
+          <p:cNvSpPr txBox="1"/>
+          <p:nvPr/>
+        </p:nvSpPr>
+        <p:spPr>
+          <a:xfrm>
+            <a:off x="3474720" y="4206240"/>
+            <a:ext cx="4572000" cy="365760"/>
+          </a:xfrm>
+          <a:prstGeom prst="rect">
+            <a:avLst/>
+          </a:prstGeom>
+          <a:noFill/>
+        </p:spPr>
+        <p:txBody>
+          <a:bodyPr wrap="square">
+            <a:spAutoFit/>
+          </a:bodyPr>
+          <a:lstStyle/>
+          <a:p>
+            <a:pPr algn="l">
+              <a:lnSpc>
+                <a:spcPct val="120000"/>
+              </a:lnSpc>
+              <a:spcBef>
+                <a:spcPts val="0"/>
+              </a:spcBef>
+              <a:spcAft>
+                <a:spcPts val="0"/>
+              </a:spcAft>
+              <a:defRPr sz="2000" b="0">
+                <a:solidFill>
+                  <a:srgbClr val="2C2A26"/>
+                </a:solidFill>
+                <a:latin typeface="Georgia"/>
+              </a:defRPr>
+            </a:pPr>
+            <a:r>
+              <a:t>&lt; 10%</a:t>
+            </a:r>
+          </a:p>
+        </p:txBody>
+      </p:sp>
+      <p:sp>
+        <p:nvSpPr>
+          <p:cNvPr id="10" name="TextBox 9"/>
+          <p:cNvSpPr txBox="1"/>
+          <p:nvPr/>
+        </p:nvSpPr>
+        <p:spPr>
+          <a:xfrm>
+            <a:off x="1097280" y="4709160"/>
+            <a:ext cx="2286000" cy="365760"/>
+          </a:xfrm>
+          <a:prstGeom prst="rect">
+            <a:avLst/>
+          </a:prstGeom>
+          <a:noFill/>
+        </p:spPr>
+        <p:txBody>
+          <a:bodyPr wrap="square">
+            <a:spAutoFit/>
+          </a:bodyPr>
+          <a:lstStyle/>
+          <a:p>
+            <a:pPr algn="l">
+              <a:lnSpc>
+                <a:spcPct val="120000"/>
+              </a:lnSpc>
+              <a:spcBef>
+                <a:spcPts val="0"/>
+              </a:spcBef>
+              <a:spcAft>
+                <a:spcPts val="0"/>
+              </a:spcAft>
+              <a:defRPr sz="1400" b="0">
+                <a:solidFill>
+                  <a:srgbClr val="9A9690"/>
+                </a:solidFill>
+                <a:latin typeface="Calibri"/>
+              </a:defRPr>
+            </a:pPr>
+            <a:r>
+              <a:t>Use of funds</a:t>
+            </a:r>
+          </a:p>
+        </p:txBody>
+      </p:sp>
+      <p:sp>
+        <p:nvSpPr>
+          <p:cNvPr id="11" name="TextBox 10"/>
+          <p:cNvSpPr txBox="1"/>
+          <p:nvPr/>
+        </p:nvSpPr>
+        <p:spPr>
+          <a:xfrm>
+            <a:off x="3474720" y="4709160"/>
+            <a:ext cx="4572000" cy="365760"/>
+          </a:xfrm>
+          <a:prstGeom prst="rect">
+            <a:avLst/>
+          </a:prstGeom>
+          <a:noFill/>
+        </p:spPr>
+        <p:txBody>
+          <a:bodyPr wrap="square">
+            <a:spAutoFit/>
+          </a:bodyPr>
+          <a:lstStyle/>
+          <a:p>
+            <a:pPr algn="l">
+              <a:lnSpc>
+                <a:spcPct val="120000"/>
+              </a:lnSpc>
+              <a:spcBef>
+                <a:spcPts val="0"/>
+              </a:spcBef>
+              <a:spcAft>
+                <a:spcPts val="0"/>
+              </a:spcAft>
+              <a:defRPr sz="2000" b="0">
+                <a:solidFill>
+                  <a:srgbClr val="2C2A26"/>
+                </a:solidFill>
+                <a:latin typeface="Georgia"/>
+              </a:defRPr>
+            </a:pPr>
+            <a:r>
+              <a:t>Core team full-time through 2026 → production launch June</a:t>
+            </a:r>
+          </a:p>
+        </p:txBody>
+      </p:sp>
+      <p:sp>
+        <p:nvSpPr>
+          <p:cNvPr id="12" name="TextBox 11"/>
+          <p:cNvSpPr txBox="1"/>
+          <p:nvPr/>
+        </p:nvSpPr>
+        <p:spPr>
+          <a:xfrm>
+            <a:off x="1097280" y="5303520"/>
+            <a:ext cx="9144000" cy="1097280"/>
+          </a:xfrm>
+          <a:prstGeom prst="rect">
+            <a:avLst/>
+          </a:prstGeom>
+          <a:noFill/>
+        </p:spPr>
+        <p:txBody>
+          <a:bodyPr wrap="square">
+            <a:spAutoFit/>
+          </a:bodyPr>
+          <a:lstStyle/>
+          <a:p>
+            <a:pPr algn="l">
+              <a:lnSpc>
+                <a:spcPct val="120000"/>
+              </a:lnSpc>
+              <a:spcBef>
+                <a:spcPts val="0"/>
+              </a:spcBef>
+              <a:spcAft>
+                <a:spcPts val="0"/>
+              </a:spcAft>
+              <a:defRPr sz="2800" b="0">
+                <a:solidFill>
+                  <a:srgbClr val="2C2A26"/>
+                </a:solidFill>
+                <a:latin typeface="Georgia"/>
+              </a:defRPr>
+            </a:pPr>
+            <a:r>
+              <a:t>I want everyone to be able to hike up that mountain.</a:t>
+            </a:r>
+          </a:p>
+        </p:txBody>
+      </p:sp>
+      <p:sp>
+        <p:nvSpPr>
+          <p:cNvPr id="13" name="TextBox 12"/>
+          <p:cNvSpPr txBox="1"/>
+          <p:nvPr/>
+        </p:nvSpPr>
+        <p:spPr>
+          <a:xfrm>
+            <a:off x="1097280" y="6035040"/>
+            <a:ext cx="9144000" cy="457200"/>
+          </a:xfrm>
+          <a:prstGeom prst="rect">
+            <a:avLst/>
+          </a:prstGeom>
+          <a:noFill/>
+        </p:spPr>
+        <p:txBody>
+          <a:bodyPr wrap="square">
+            <a:spAutoFit/>
+          </a:bodyPr>
+          <a:lstStyle/>
+          <a:p>
+            <a:pPr algn="l">
+              <a:lnSpc>
+                <a:spcPct val="120000"/>
+              </a:lnSpc>
+              <a:spcBef>
+                <a:spcPts val="0"/>
+              </a:spcBef>
+              <a:spcAft>
+                <a:spcPts val="0"/>
+              </a:spcAft>
+              <a:defRPr sz="1300" b="0">
+                <a:solidFill>
+                  <a:srgbClr val="9A9690"/>
+                </a:solidFill>
+                <a:latin typeface="Calibri"/>
+              </a:defRPr>
+            </a:pPr>
+            <a:r>
+              <a:t>parachute.computer  ·  github.com/OpenParachutePBC  ·  aaron@parachute.computer</a:t>
+            </a:r>
+          </a:p>
+        </p:txBody>
+      </p:sp>
+    </p:spTree>
+  </p:cSld>
+  <p:clrMapOvr>
+    <a:masterClrMapping/>
+  </p:clrMapOvr>
+</p:sld>
+</file>
+
+<file path=ppt/slides/slide2.xml><?xml version="1.0" encoding="utf-8"?>
+<p:sld xmlns:a="http://schemas.openxmlformats.org/drawingml/2006/main" xmlns:p="http://schemas.openxmlformats.org/presentationml/2006/main" xmlns:r="http://schemas.openxmlformats.org/officeDocument/2006/relationships">
+  <p:cSld>
+    <p:bg>
+      <p:bgPr>
+        <a:solidFill>
+          <a:srgbClr val="FAF8F4"/>
+        </a:solidFill>
+        <a:effectLst/>
+      </p:bgPr>
+    </p:bg>
+    <p:spTree>
+      <p:nvGrpSpPr>
+        <p:cNvPr id="1" name=""/>
+        <p:cNvGrpSpPr/>
+        <p:nvPr/>
+      </p:nvGrpSpPr>
+      <p:grpSpPr/>
+      <p:sp>
+        <p:nvSpPr>
+          <p:cNvPr id="2" name="TextBox 1"/>
+          <p:cNvSpPr txBox="1"/>
+          <p:nvPr/>
+        </p:nvSpPr>
+        <p:spPr>
+          <a:xfrm>
+            <a:off x="1097280" y="1097280"/>
+            <a:ext cx="3657600" cy="365760"/>
+          </a:xfrm>
+          <a:prstGeom prst="rect">
+            <a:avLst/>
+          </a:prstGeom>
+          <a:noFill/>
+        </p:spPr>
+        <p:txBody>
+          <a:bodyPr wrap="square">
+            <a:spAutoFit/>
+          </a:bodyPr>
+          <a:lstStyle/>
+          <a:p>
+            <a:pPr algn="l">
+              <a:lnSpc>
+                <a:spcPct val="120000"/>
+              </a:lnSpc>
+              <a:spcBef>
+                <a:spcPts val="0"/>
+              </a:spcBef>
+              <a:spcAft>
+                <a:spcPts val="0"/>
+              </a:spcAft>
+              <a:defRPr sz="1100" b="1">
+                <a:solidFill>
+                  <a:srgbClr val="4A7C59"/>
+                </a:solidFill>
+                <a:latin typeface="Calibri"/>
+              </a:defRPr>
+            </a:pPr>
+            <a:r>
+              <a:t>THE LANDSCAPE</a:t>
+            </a:r>
+          </a:p>
+        </p:txBody>
+      </p:sp>
+      <p:sp>
+        <p:nvSpPr>
+          <p:cNvPr id="3" name="TextBox 2"/>
+          <p:cNvSpPr txBox="1"/>
+          <p:nvPr/>
+        </p:nvSpPr>
+        <p:spPr>
+          <a:xfrm>
+            <a:off x="1097280" y="1554480"/>
+            <a:ext cx="9144000" cy="1371600"/>
+          </a:xfrm>
+          <a:prstGeom prst="rect">
+            <a:avLst/>
+          </a:prstGeom>
+          <a:noFill/>
+        </p:spPr>
+        <p:txBody>
+          <a:bodyPr wrap="square">
+            <a:spAutoFit/>
+          </a:bodyPr>
+          <a:lstStyle/>
+          <a:p>
+            <a:pPr algn="l">
+              <a:lnSpc>
+                <a:spcPct val="105000"/>
+              </a:lnSpc>
+              <a:spcBef>
+                <a:spcPts val="0"/>
+              </a:spcBef>
+              <a:spcAft>
+                <a:spcPts val="0"/>
+              </a:spcAft>
+              <a:defRPr sz="4000" b="0">
+                <a:solidFill>
+                  <a:srgbClr val="2C2A26"/>
+                </a:solidFill>
+                <a:latin typeface="Georgia"/>
+              </a:defRPr>
+            </a:pPr>
+            <a:r>
+              <a:t>Everyone is building</a:t>
+            </a:r>
+            <a:br/>
+            <a:r>
+              <a:t>personal AI computers.</a:t>
+            </a:r>
+          </a:p>
+        </p:txBody>
+      </p:sp>
+      <p:sp>
+        <p:nvSpPr>
+          <p:cNvPr id="4" name="TextBox 3"/>
+          <p:cNvSpPr txBox="1"/>
+          <p:nvPr/>
+        </p:nvSpPr>
+        <p:spPr>
+          <a:xfrm>
+            <a:off x="1097280" y="3200400"/>
+            <a:ext cx="9144000" cy="914400"/>
+          </a:xfrm>
+          <a:prstGeom prst="rect">
+            <a:avLst/>
+          </a:prstGeom>
+          <a:noFill/>
+        </p:spPr>
+        <p:txBody>
+          <a:bodyPr wrap="square">
+            <a:spAutoFit/>
+          </a:bodyPr>
+          <a:lstStyle/>
+          <a:p>
+            <a:pPr algn="l">
+              <a:lnSpc>
+                <a:spcPct val="150000"/>
+              </a:lnSpc>
+              <a:spcBef>
+                <a:spcPts val="0"/>
+              </a:spcBef>
+              <a:spcAft>
+                <a:spcPts val="0"/>
+              </a:spcAft>
+              <a:defRPr sz="1800" b="0">
+                <a:solidFill>
+                  <a:srgbClr val="6B6860"/>
+                </a:solidFill>
+                <a:latin typeface="Calibri"/>
+              </a:defRPr>
+            </a:pPr>
+            <a:r>
+              <a:t>Hundreds of millions of people already pay $20-200/month for AI tools.</a:t>
+            </a:r>
+            <a:br/>
+            <a:r>
+              <a:t>OpenClaw — 300K+ stars in 3 months. Claude Cowork. ZoComputer. Perplexity Computer. Manus.</a:t>
+            </a:r>
+          </a:p>
+        </p:txBody>
+      </p:sp>
+      <p:sp>
+        <p:nvSpPr>
+          <p:cNvPr id="5" name="TextBox 4"/>
+          <p:cNvSpPr txBox="1"/>
+          <p:nvPr/>
+        </p:nvSpPr>
+        <p:spPr>
+          <a:xfrm>
+            <a:off x="1097280" y="4754880"/>
+            <a:ext cx="2743200" cy="1097280"/>
+          </a:xfrm>
+          <a:prstGeom prst="rect">
+            <a:avLst/>
+          </a:prstGeom>
+          <a:noFill/>
+        </p:spPr>
+        <p:txBody>
+          <a:bodyPr wrap="square">
+            <a:spAutoFit/>
+          </a:bodyPr>
+          <a:lstStyle/>
+          <a:p>
+            <a:pPr algn="l">
+              <a:lnSpc>
+                <a:spcPct val="120000"/>
+              </a:lnSpc>
+              <a:spcBef>
+                <a:spcPts val="0"/>
+              </a:spcBef>
+              <a:spcAft>
+                <a:spcPts val="0"/>
+              </a:spcAft>
+              <a:defRPr sz="6400" b="0">
+                <a:solidFill>
+                  <a:srgbClr val="4A7C59"/>
+                </a:solidFill>
+                <a:latin typeface="Georgia"/>
+              </a:defRPr>
+            </a:pPr>
+            <a:r>
+              <a:t>$50B+</a:t>
+            </a:r>
+          </a:p>
+        </p:txBody>
+      </p:sp>
+      <p:sp>
+        <p:nvSpPr>
+          <p:cNvPr id="6" name="TextBox 5"/>
+          <p:cNvSpPr txBox="1"/>
+          <p:nvPr/>
+        </p:nvSpPr>
+        <p:spPr>
+          <a:xfrm>
+            <a:off x="4114800" y="4983480"/>
+            <a:ext cx="4572000" cy="731520"/>
+          </a:xfrm>
+          <a:prstGeom prst="rect">
+            <a:avLst/>
+          </a:prstGeom>
+          <a:noFill/>
+        </p:spPr>
+        <p:txBody>
+          <a:bodyPr wrap="square">
+            <a:spAutoFit/>
+          </a:bodyPr>
+          <a:lstStyle/>
+          <a:p>
+            <a:pPr algn="l">
+              <a:lnSpc>
+                <a:spcPct val="140000"/>
+              </a:lnSpc>
+              <a:spcBef>
+                <a:spcPts val="0"/>
+              </a:spcBef>
+              <a:spcAft>
+                <a:spcPts val="0"/>
+              </a:spcAft>
+              <a:defRPr sz="1600" b="0">
+                <a:solidFill>
+                  <a:srgbClr val="6B6860"/>
+                </a:solidFill>
+                <a:latin typeface="Calibri"/>
+              </a:defRPr>
+            </a:pPr>
+            <a:r>
+              <a:t>agentic AI market by 2030 · 44% CAGR</a:t>
+            </a:r>
+            <a:br/>
+            <a:r>
+              <a:t>OpenAI alone projects $200B revenue by 2030</a:t>
+            </a:r>
+          </a:p>
+        </p:txBody>
+      </p:sp>
+      <p:sp>
+        <p:nvSpPr>
+          <p:cNvPr id="7" name="TextBox 6"/>
+          <p:cNvSpPr txBox="1"/>
+          <p:nvPr/>
+        </p:nvSpPr>
+        <p:spPr>
+          <a:xfrm>
+            <a:off x="1097280" y="5943600"/>
+            <a:ext cx="9144000" cy="548640"/>
+          </a:xfrm>
+          <a:prstGeom prst="rect">
+            <a:avLst/>
+          </a:prstGeom>
+          <a:noFill/>
+        </p:spPr>
+        <p:txBody>
+          <a:bodyPr wrap="square">
+            <a:spAutoFit/>
+          </a:bodyPr>
+          <a:lstStyle/>
+          <a:p>
+            <a:pPr algn="l">
+              <a:lnSpc>
+                <a:spcPct val="120000"/>
+              </a:lnSpc>
+              <a:spcBef>
+                <a:spcPts val="0"/>
+              </a:spcBef>
+              <a:spcAft>
+                <a:spcPts val="0"/>
+              </a:spcAft>
+              <a:defRPr sz="2200" b="0">
+                <a:solidFill>
+                  <a:srgbClr val="2C2A26"/>
+                </a:solidFill>
+                <a:latin typeface="Georgia"/>
+              </a:defRPr>
+            </a:pPr>
+            <a:r>
+              <a:t>The question isn't whether this market exists — it's who they'll trust.</a:t>
+            </a:r>
+          </a:p>
+        </p:txBody>
+      </p:sp>
+    </p:spTree>
+  </p:cSld>
+  <p:clrMapOvr>
+    <a:masterClrMapping/>
+  </p:clrMapOvr>
+</p:sld>
+</file>
+
+<file path=ppt/slides/slide3.xml><?xml version="1.0" encoding="utf-8"?>
+<p:sld xmlns:a="http://schemas.openxmlformats.org/drawingml/2006/main" xmlns:p="http://schemas.openxmlformats.org/presentationml/2006/main" xmlns:r="http://schemas.openxmlformats.org/officeDocument/2006/relationships">
+  <p:cSld>
+    <p:bg>
+      <p:bgPr>
+        <a:solidFill>
+          <a:srgbClr val="FAF8F4"/>
+        </a:solidFill>
+        <a:effectLst/>
+      </p:bgPr>
+    </p:bg>
+    <p:spTree>
+      <p:nvGrpSpPr>
+        <p:cNvPr id="1" name=""/>
+        <p:cNvGrpSpPr/>
+        <p:nvPr/>
+      </p:nvGrpSpPr>
+      <p:grpSpPr/>
+      <p:sp>
+        <p:nvSpPr>
+          <p:cNvPr id="2" name="TextBox 1"/>
+          <p:cNvSpPr txBox="1"/>
+          <p:nvPr/>
+        </p:nvSpPr>
+        <p:spPr>
+          <a:xfrm>
+            <a:off x="1097280" y="1097280"/>
+            <a:ext cx="3657600" cy="365760"/>
+          </a:xfrm>
+          <a:prstGeom prst="rect">
+            <a:avLst/>
+          </a:prstGeom>
+          <a:noFill/>
+        </p:spPr>
+        <p:txBody>
+          <a:bodyPr wrap="square">
+            <a:spAutoFit/>
+          </a:bodyPr>
+          <a:lstStyle/>
+          <a:p>
+            <a:pPr algn="l">
+              <a:lnSpc>
+                <a:spcPct val="120000"/>
+              </a:lnSpc>
+              <a:spcBef>
+                <a:spcPts val="0"/>
+              </a:spcBef>
+              <a:spcAft>
+                <a:spcPts val="0"/>
+              </a:spcAft>
+              <a:defRPr sz="1100" b="1">
+                <a:solidFill>
+                  <a:srgbClr val="4A7C59"/>
+                </a:solidFill>
+                <a:latin typeface="Calibri"/>
+              </a:defRPr>
+            </a:pPr>
+            <a:r>
+              <a:t>OUR ANSWER</a:t>
+            </a:r>
+          </a:p>
+        </p:txBody>
+      </p:sp>
+      <p:sp>
+        <p:nvSpPr>
+          <p:cNvPr id="3" name="TextBox 2"/>
+          <p:cNvSpPr txBox="1"/>
+          <p:nvPr/>
+        </p:nvSpPr>
+        <p:spPr>
+          <a:xfrm>
+            <a:off x="1097280" y="1554480"/>
+            <a:ext cx="9144000" cy="1371600"/>
+          </a:xfrm>
+          <a:prstGeom prst="rect">
+            <a:avLst/>
+          </a:prstGeom>
+          <a:noFill/>
+        </p:spPr>
+        <p:txBody>
+          <a:bodyPr wrap="square">
+            <a:spAutoFit/>
+          </a:bodyPr>
+          <a:lstStyle/>
+          <a:p>
+            <a:pPr algn="l">
+              <a:lnSpc>
+                <a:spcPct val="105000"/>
+              </a:lnSpc>
+              <a:spcBef>
+                <a:spcPts val="0"/>
+              </a:spcBef>
+              <a:spcAft>
+                <a:spcPts val="0"/>
+              </a:spcAft>
+              <a:defRPr sz="4000" b="0">
+                <a:solidFill>
+                  <a:srgbClr val="2C2A26"/>
+                </a:solidFill>
+                <a:latin typeface="Georgia"/>
+              </a:defRPr>
+            </a:pPr>
+            <a:r>
+              <a:t>Parachute Computer.</a:t>
+            </a:r>
+            <a:br/>
+            <a:r>
+              <a:t>The personal AI you can trust.</a:t>
+            </a:r>
+          </a:p>
+        </p:txBody>
+      </p:sp>
+      <p:sp>
+        <p:nvSpPr>
+          <p:cNvPr id="4" name="TextBox 3"/>
+          <p:cNvSpPr txBox="1"/>
+          <p:nvPr/>
+        </p:nvSpPr>
+        <p:spPr>
+          <a:xfrm>
+            <a:off x="1097280" y="3200400"/>
+            <a:ext cx="9144000" cy="1371600"/>
+          </a:xfrm>
+          <a:prstGeom prst="rect">
+            <a:avLst/>
+          </a:prstGeom>
+          <a:noFill/>
+        </p:spPr>
+        <p:txBody>
+          <a:bodyPr wrap="square">
+            <a:spAutoFit/>
+          </a:bodyPr>
+          <a:lstStyle/>
+          <a:p>
+            <a:pPr algn="l">
+              <a:lnSpc>
+                <a:spcPct val="160000"/>
+              </a:lnSpc>
+              <a:spcBef>
+                <a:spcPts val="0"/>
+              </a:spcBef>
+              <a:spcAft>
+                <a:spcPts val="0"/>
+              </a:spcAft>
+              <a:defRPr sz="2000" b="0">
+                <a:solidFill>
+                  <a:srgbClr val="6B6860"/>
+                </a:solidFill>
+                <a:latin typeface="Calibri"/>
+              </a:defRPr>
+            </a:pPr>
+            <a:r>
+              <a:t>A full agentic computing platform — open source, local-first, self-hostable.</a:t>
+            </a:r>
+            <a:br/>
+            <a:r>
+              <a:t>Your data stays on your device. Use your own AI models.</a:t>
+            </a:r>
+            <a:br/>
+            <a:r>
+              <a:t>Knowledge graph that connects your journals, conversations, and thinking.</a:t>
+            </a:r>
+          </a:p>
+        </p:txBody>
+      </p:sp>
+      <p:sp>
+        <p:nvSpPr>
+          <p:cNvPr id="5" name="TextBox 4"/>
+          <p:cNvSpPr txBox="1"/>
+          <p:nvPr/>
+        </p:nvSpPr>
+        <p:spPr>
+          <a:xfrm>
+            <a:off x="1097280" y="5029200"/>
+            <a:ext cx="9144000" cy="1371600"/>
+          </a:xfrm>
+          <a:prstGeom prst="rect">
+            <a:avLst/>
+          </a:prstGeom>
+          <a:noFill/>
+        </p:spPr>
+        <p:txBody>
+          <a:bodyPr wrap="square">
+            <a:spAutoFit/>
+          </a:bodyPr>
+          <a:lstStyle/>
+          <a:p>
+            <a:pPr algn="l">
+              <a:lnSpc>
+                <a:spcPct val="150000"/>
+              </a:lnSpc>
+              <a:spcBef>
+                <a:spcPts val="0"/>
+              </a:spcBef>
+              <a:spcAft>
+                <a:spcPts val="0"/>
+              </a:spcAft>
+              <a:defRPr sz="1800" b="0">
+                <a:solidFill>
+                  <a:srgbClr val="6B6860"/>
+                </a:solidFill>
+                <a:latin typeface="Calibri"/>
+              </a:defRPr>
+            </a:pPr>
+            <a:r>
+              <a:t>A lot of people don't want to trust big corporations with their most personal data.</a:t>
+            </a:r>
+            <a:br/>
+            <a:r>
+              <a:t>Open source gives them a choice. AGPL-3.0 licensed. Fully transparent.</a:t>
+            </a:r>
+          </a:p>
+        </p:txBody>
+      </p:sp>
+      <p:sp>
+        <p:nvSpPr>
+          <p:cNvPr id="6" name="TextBox 5"/>
+          <p:cNvSpPr txBox="1"/>
+          <p:nvPr/>
+        </p:nvSpPr>
+        <p:spPr>
+          <a:xfrm>
+            <a:off x="1097280" y="5943600"/>
+            <a:ext cx="9144000" cy="548640"/>
+          </a:xfrm>
+          <a:prstGeom prst="rect">
+            <a:avLst/>
+          </a:prstGeom>
+          <a:noFill/>
+        </p:spPr>
+        <p:txBody>
+          <a:bodyPr wrap="square">
+            <a:spAutoFit/>
+          </a:bodyPr>
+          <a:lstStyle/>
+          <a:p>
+            <a:pPr algn="l">
+              <a:lnSpc>
+                <a:spcPct val="120000"/>
+              </a:lnSpc>
+              <a:spcBef>
+                <a:spcPts val="0"/>
+              </a:spcBef>
+              <a:spcAft>
+                <a:spcPts val="0"/>
+              </a:spcAft>
+              <a:defRPr sz="2200" b="0">
+                <a:solidFill>
+                  <a:srgbClr val="2C2A26"/>
+                </a:solidFill>
+                <a:latin typeface="Georgia"/>
+              </a:defRPr>
+            </a:pPr>
+            <a:r>
+              <a:t>But most people don't want to self-host a server.</a:t>
+            </a:r>
+          </a:p>
+        </p:txBody>
+      </p:sp>
+    </p:spTree>
+  </p:cSld>
+  <p:clrMapOvr>
+    <a:masterClrMapping/>
+  </p:clrMapOvr>
+</p:sld>
+</file>
+
+<file path=ppt/slides/slide4.xml><?xml version="1.0" encoding="utf-8"?>
+<p:sld xmlns:a="http://schemas.openxmlformats.org/drawingml/2006/main" xmlns:p="http://schemas.openxmlformats.org/presentationml/2006/main" xmlns:r="http://schemas.openxmlformats.org/officeDocument/2006/relationships">
+  <p:cSld>
+    <p:bg>
+      <p:bgPr>
+        <a:solidFill>
+          <a:srgbClr val="FAF8F4"/>
+        </a:solidFill>
+        <a:effectLst/>
+      </p:bgPr>
+    </p:bg>
+    <p:spTree>
+      <p:nvGrpSpPr>
+        <p:cNvPr id="1" name=""/>
+        <p:cNvGrpSpPr/>
+        <p:nvPr/>
+      </p:nvGrpSpPr>
+      <p:grpSpPr/>
+      <p:sp>
+        <p:nvSpPr>
+          <p:cNvPr id="2" name="TextBox 1"/>
+          <p:cNvSpPr txBox="1"/>
+          <p:nvPr/>
+        </p:nvSpPr>
+        <p:spPr>
+          <a:xfrm>
+            <a:off x="1097280" y="1097280"/>
+            <a:ext cx="3657600" cy="365760"/>
+          </a:xfrm>
+          <a:prstGeom prst="rect">
+            <a:avLst/>
+          </a:prstGeom>
+          <a:noFill/>
+        </p:spPr>
+        <p:txBody>
+          <a:bodyPr wrap="square">
+            <a:spAutoFit/>
+          </a:bodyPr>
+          <a:lstStyle/>
+          <a:p>
+            <a:pPr algn="l">
+              <a:lnSpc>
+                <a:spcPct val="120000"/>
+              </a:lnSpc>
+              <a:spcBef>
+                <a:spcPts val="0"/>
+              </a:spcBef>
+              <a:spcAft>
+                <a:spcPts val="0"/>
+              </a:spcAft>
+              <a:defRPr sz="1100" b="1">
+                <a:solidFill>
+                  <a:srgbClr val="4A7C59"/>
+                </a:solidFill>
+                <a:latin typeface="Calibri"/>
+              </a:defRPr>
+            </a:pPr>
+            <a:r>
+              <a:t>THE OPPORTUNITY</a:t>
+            </a:r>
+          </a:p>
+        </p:txBody>
+      </p:sp>
+      <p:sp>
+        <p:nvSpPr>
+          <p:cNvPr id="3" name="TextBox 2"/>
+          <p:cNvSpPr txBox="1"/>
+          <p:nvPr/>
+        </p:nvSpPr>
+        <p:spPr>
+          <a:xfrm>
+            <a:off x="1097280" y="1554480"/>
+            <a:ext cx="9144000" cy="1371600"/>
+          </a:xfrm>
+          <a:prstGeom prst="rect">
+            <a:avLst/>
+          </a:prstGeom>
+          <a:noFill/>
+        </p:spPr>
+        <p:txBody>
+          <a:bodyPr wrap="square">
+            <a:spAutoFit/>
+          </a:bodyPr>
+          <a:lstStyle/>
+          <a:p>
+            <a:pPr algn="l">
+              <a:lnSpc>
+                <a:spcPct val="105000"/>
+              </a:lnSpc>
+              <a:spcBef>
+                <a:spcPts val="0"/>
+              </a:spcBef>
+              <a:spcAft>
+                <a:spcPts val="0"/>
+              </a:spcAft>
+              <a:defRPr sz="4000" b="0">
+                <a:solidFill>
+                  <a:srgbClr val="2C2A26"/>
+                </a:solidFill>
+                <a:latin typeface="Georgia"/>
+              </a:defRPr>
+            </a:pPr>
+            <a:r>
+              <a:t>The other 95% just want</a:t>
+            </a:r>
+            <a:br/>
+            <a:r>
+              <a:t>something that works.</a:t>
+            </a:r>
+          </a:p>
+        </p:txBody>
+      </p:sp>
+      <p:sp>
+        <p:nvSpPr>
+          <p:cNvPr id="4" name="TextBox 3"/>
+          <p:cNvSpPr txBox="1"/>
+          <p:nvPr/>
+        </p:nvSpPr>
+        <p:spPr>
+          <a:xfrm>
+            <a:off x="1097280" y="3200400"/>
+            <a:ext cx="9144000" cy="1371600"/>
+          </a:xfrm>
+          <a:prstGeom prst="rect">
+            <a:avLst/>
+          </a:prstGeom>
+          <a:noFill/>
+        </p:spPr>
+        <p:txBody>
+          <a:bodyPr wrap="square">
+            <a:spAutoFit/>
+          </a:bodyPr>
+          <a:lstStyle/>
+          <a:p>
+            <a:pPr algn="l">
+              <a:lnSpc>
+                <a:spcPct val="160000"/>
+              </a:lnSpc>
+              <a:spcBef>
+                <a:spcPts val="0"/>
+              </a:spcBef>
+              <a:spcAft>
+                <a:spcPts val="0"/>
+              </a:spcAft>
+              <a:defRPr sz="2200" b="0">
+                <a:solidFill>
+                  <a:srgbClr val="6B6860"/>
+                </a:solidFill>
+                <a:latin typeface="Georgia"/>
+              </a:defRPr>
+            </a:pPr>
+            <a:r>
+              <a:t>The artist who wants to organize creative ideas.</a:t>
+            </a:r>
+            <a:br/>
+            <a:r>
+              <a:t>The small business owner tracking their days.</a:t>
+            </a:r>
+            <a:br/>
+            <a:r>
+              <a:t>The parent who wants a better way to remember and reflect.</a:t>
+            </a:r>
+          </a:p>
+        </p:txBody>
+      </p:sp>
+      <p:sp>
+        <p:nvSpPr>
+          <p:cNvPr id="5" name="TextBox 4"/>
+          <p:cNvSpPr txBox="1"/>
+          <p:nvPr/>
+        </p:nvSpPr>
+        <p:spPr>
+          <a:xfrm>
+            <a:off x="1097280" y="5212080"/>
+            <a:ext cx="9144000" cy="914400"/>
+          </a:xfrm>
+          <a:prstGeom prst="rect">
+            <a:avLst/>
+          </a:prstGeom>
+          <a:noFill/>
+        </p:spPr>
+        <p:txBody>
+          <a:bodyPr wrap="square">
+            <a:spAutoFit/>
+          </a:bodyPr>
+          <a:lstStyle/>
+          <a:p>
+            <a:pPr algn="l">
+              <a:lnSpc>
+                <a:spcPct val="150000"/>
+              </a:lnSpc>
+              <a:spcBef>
+                <a:spcPts val="0"/>
+              </a:spcBef>
+              <a:spcAft>
+                <a:spcPts val="0"/>
+              </a:spcAft>
+              <a:defRPr sz="2200" b="0">
+                <a:solidFill>
+                  <a:srgbClr val="2C2A26"/>
+                </a:solidFill>
+                <a:latin typeface="Georgia"/>
+              </a:defRPr>
+            </a:pPr>
+            <a:r>
+              <a:t>They need a system that learns them —</a:t>
+            </a:r>
+            <a:br/>
+            <a:r>
+              <a:t>not one that demands they learn it.</a:t>
+            </a:r>
+          </a:p>
+        </p:txBody>
+      </p:sp>
+    </p:spTree>
+  </p:cSld>
+  <p:clrMapOvr>
+    <a:masterClrMapping/>
+  </p:clrMapOvr>
+</p:sld>
+</file>
+
+<file path=ppt/slides/slide5.xml><?xml version="1.0" encoding="utf-8"?>
+<p:sld xmlns:a="http://schemas.openxmlformats.org/drawingml/2006/main" xmlns:p="http://schemas.openxmlformats.org/presentationml/2006/main" xmlns:r="http://schemas.openxmlformats.org/officeDocument/2006/relationships">
+  <p:cSld>
+    <p:bg>
+      <p:bgPr>
+        <a:solidFill>
+          <a:srgbClr val="FAF8F4"/>
+        </a:solidFill>
+        <a:effectLst/>
+      </p:bgPr>
+    </p:bg>
+    <p:spTree>
+      <p:nvGrpSpPr>
+        <p:cNvPr id="1" name=""/>
+        <p:cNvGrpSpPr/>
+        <p:nvPr/>
+      </p:nvGrpSpPr>
+      <p:grpSpPr/>
+      <p:sp>
+        <p:nvSpPr>
+          <p:cNvPr id="2" name="TextBox 1"/>
+          <p:cNvSpPr txBox="1"/>
+          <p:nvPr/>
+        </p:nvSpPr>
+        <p:spPr>
+          <a:xfrm>
+            <a:off x="1097280" y="1097280"/>
+            <a:ext cx="3657600" cy="365760"/>
+          </a:xfrm>
+          <a:prstGeom prst="rect">
+            <a:avLst/>
+          </a:prstGeom>
+          <a:noFill/>
+        </p:spPr>
+        <p:txBody>
+          <a:bodyPr wrap="square">
+            <a:spAutoFit/>
+          </a:bodyPr>
+          <a:lstStyle/>
+          <a:p>
+            <a:pPr algn="l">
+              <a:lnSpc>
+                <a:spcPct val="120000"/>
+              </a:lnSpc>
+              <a:spcBef>
+                <a:spcPts val="0"/>
+              </a:spcBef>
+              <a:spcAft>
+                <a:spcPts val="0"/>
+              </a:spcAft>
+              <a:defRPr sz="1100" b="1">
+                <a:solidFill>
+                  <a:srgbClr val="4A7C59"/>
+                </a:solidFill>
+                <a:latin typeface="Calibri"/>
+              </a:defRPr>
+            </a:pPr>
+            <a:r>
+              <a:t>THE SOLUTION</a:t>
+            </a:r>
+          </a:p>
+        </p:txBody>
+      </p:sp>
+      <p:sp>
+        <p:nvSpPr>
+          <p:cNvPr id="3" name="TextBox 2"/>
+          <p:cNvSpPr txBox="1"/>
+          <p:nvPr/>
+        </p:nvSpPr>
+        <p:spPr>
+          <a:xfrm>
+            <a:off x="1097280" y="1554480"/>
+            <a:ext cx="9144000" cy="1371600"/>
+          </a:xfrm>
+          <a:prstGeom prst="rect">
+            <a:avLst/>
+          </a:prstGeom>
+          <a:noFill/>
+        </p:spPr>
+        <p:txBody>
+          <a:bodyPr wrap="square">
+            <a:spAutoFit/>
+          </a:bodyPr>
+          <a:lstStyle/>
+          <a:p>
+            <a:pPr algn="l">
+              <a:lnSpc>
+                <a:spcPct val="105000"/>
+              </a:lnSpc>
+              <a:spcBef>
+                <a:spcPts val="0"/>
+              </a:spcBef>
+              <a:spcAft>
+                <a:spcPts val="0"/>
+              </a:spcAft>
+              <a:defRPr sz="4000" b="0">
+                <a:solidFill>
+                  <a:srgbClr val="2C2A26"/>
+                </a:solidFill>
+                <a:latin typeface="Georgia"/>
+              </a:defRPr>
+            </a:pPr>
+            <a:r>
+              <a:t>Parachute Daily.</a:t>
+            </a:r>
+            <a:br/>
+            <a:r>
+              <a:t>Just talk.</a:t>
+            </a:r>
+          </a:p>
+        </p:txBody>
+      </p:sp>
+      <p:sp>
+        <p:nvSpPr>
+          <p:cNvPr id="4" name="TextBox 3"/>
+          <p:cNvSpPr txBox="1"/>
+          <p:nvPr/>
+        </p:nvSpPr>
+        <p:spPr>
+          <a:xfrm>
+            <a:off x="1097280" y="3200400"/>
+            <a:ext cx="5029200" cy="2560320"/>
+          </a:xfrm>
+          <a:prstGeom prst="rect">
+            <a:avLst/>
+          </a:prstGeom>
+          <a:noFill/>
+        </p:spPr>
+        <p:txBody>
+          <a:bodyPr wrap="square">
+            <a:spAutoFit/>
+          </a:bodyPr>
+          <a:lstStyle/>
+          <a:p>
+            <a:pPr algn="l">
+              <a:lnSpc>
+                <a:spcPct val="150000"/>
+              </a:lnSpc>
+              <a:spcBef>
+                <a:spcPts val="0"/>
+              </a:spcBef>
+              <a:spcAft>
+                <a:spcPts val="0"/>
+              </a:spcAft>
+              <a:defRPr sz="1800" b="0">
+                <a:solidFill>
+                  <a:srgbClr val="6B6860"/>
+                </a:solidFill>
+                <a:latin typeface="Calibri"/>
+              </a:defRPr>
+            </a:pPr>
+            <a:r>
+              <a:t>A voice-first journal.</a:t>
+            </a:r>
+            <a:br/>
+            <a:br/>
+            <a:r>
+              <a:t>Speak into a wearable pendant or your phone —</a:t>
+            </a:r>
+            <a:br/>
+            <a:r>
+              <a:t>on a walk, in the car, wherever thinking happens.</a:t>
+            </a:r>
+            <a:br/>
+            <a:br/>
+            <a:r>
+              <a:t>AI weaves through gently:</a:t>
+            </a:r>
+            <a:br/>
+            <a:r>
+              <a:t>  ·  Daily reflections on your entries</a:t>
+            </a:r>
+            <a:br/>
+            <a:r>
+              <a:t>  ·  Pattern recognition over time</a:t>
+            </a:r>
+            <a:br/>
+            <a:r>
+              <a:t>  ·  Weekly synthesis of your thinking</a:t>
+            </a:r>
+          </a:p>
+        </p:txBody>
+      </p:sp>
+      <p:sp>
+        <p:nvSpPr>
+          <p:cNvPr id="5" name="TextBox 4"/>
+          <p:cNvSpPr txBox="1"/>
+          <p:nvPr/>
+        </p:nvSpPr>
+        <p:spPr>
+          <a:xfrm>
+            <a:off x="1097280" y="5943600"/>
+            <a:ext cx="5029200" cy="457200"/>
+          </a:xfrm>
+          <a:prstGeom prst="rect">
+            <a:avLst/>
+          </a:prstGeom>
+          <a:noFill/>
+        </p:spPr>
+        <p:txBody>
+          <a:bodyPr wrap="square">
+            <a:spAutoFit/>
+          </a:bodyPr>
+          <a:lstStyle/>
+          <a:p>
+            <a:pPr algn="l">
+              <a:lnSpc>
+                <a:spcPct val="120000"/>
+              </a:lnSpc>
+              <a:spcBef>
+                <a:spcPts val="0"/>
+              </a:spcBef>
+              <a:spcAft>
+                <a:spcPts val="0"/>
+              </a:spcAft>
+              <a:defRPr sz="1800" b="0">
+                <a:solidFill>
+                  <a:srgbClr val="2C2A26"/>
+                </a:solidFill>
+                <a:latin typeface="Calibri"/>
+              </a:defRPr>
+            </a:pPr>
+            <a:r>
+              <a:t>No learning curve. No technical sophistication required.</a:t>
+            </a:r>
+          </a:p>
+        </p:txBody>
+      </p:sp>
+      <p:sp>
+        <p:nvSpPr>
+          <p:cNvPr id="6" name="Rounded Rectangle 5"/>
+          <p:cNvSpPr/>
+          <p:nvPr/>
+        </p:nvSpPr>
+        <p:spPr>
+          <a:xfrm>
+            <a:off x="7132320" y="3200400"/>
+            <a:ext cx="4114800" cy="2743200"/>
+          </a:xfrm>
+          <a:prstGeom prst="roundRect">
+            <a:avLst/>
+          </a:prstGeom>
+          <a:solidFill>
+            <a:srgbClr val="F3F0EA"/>
+          </a:solidFill>
+          <a:ln w="12700">
+            <a:solidFill>
+              <a:srgbClr val="E4E0D8"/>
+            </a:solidFill>
+          </a:ln>
+        </p:spPr>
+        <p:style>
+          <a:lnRef idx="1">
+            <a:schemeClr val="accent1"/>
+          </a:lnRef>
+          <a:fillRef idx="3">
+            <a:schemeClr val="accent1"/>
+          </a:fillRef>
+          <a:effectRef idx="2">
+            <a:schemeClr val="accent1"/>
+          </a:effectRef>
+          <a:fontRef idx="minor">
+            <a:schemeClr val="lt1"/>
+          </a:fontRef>
+        </p:style>
+        <p:txBody>
+          <a:bodyPr rtlCol="0" anchor="ctr"/>
+          <a:lstStyle/>
+          <a:p>
+            <a:pPr algn="ctr"/>
+          </a:p>
+        </p:txBody>
+      </p:sp>
+      <p:sp>
+        <p:nvSpPr>
+          <p:cNvPr id="7" name="TextBox 6"/>
+          <p:cNvSpPr txBox="1"/>
+          <p:nvPr/>
+        </p:nvSpPr>
+        <p:spPr>
+          <a:xfrm>
+            <a:off x="7498079" y="3474720"/>
+            <a:ext cx="3383280" cy="365760"/>
+          </a:xfrm>
+          <a:prstGeom prst="rect">
+            <a:avLst/>
+          </a:prstGeom>
+          <a:noFill/>
+        </p:spPr>
+        <p:txBody>
+          <a:bodyPr wrap="square">
+            <a:spAutoFit/>
+          </a:bodyPr>
+          <a:lstStyle/>
+          <a:p>
+            <a:pPr algn="l">
+              <a:lnSpc>
+                <a:spcPct val="120000"/>
+              </a:lnSpc>
+              <a:spcBef>
+                <a:spcPts val="0"/>
+              </a:spcBef>
+              <a:spcAft>
+                <a:spcPts val="0"/>
+              </a:spcAft>
+              <a:defRPr sz="1100" b="1">
+                <a:solidFill>
+                  <a:srgbClr val="4A7C59"/>
+                </a:solidFill>
+                <a:latin typeface="Calibri"/>
+              </a:defRPr>
+            </a:pPr>
+            <a:r>
+              <a:t>THE PENDANT</a:t>
+            </a:r>
+          </a:p>
+        </p:txBody>
+      </p:sp>
+      <p:sp>
+        <p:nvSpPr>
+          <p:cNvPr id="8" name="TextBox 7"/>
+          <p:cNvSpPr txBox="1"/>
+          <p:nvPr/>
+        </p:nvSpPr>
+        <p:spPr>
+          <a:xfrm>
+            <a:off x="7498079" y="3931920"/>
+            <a:ext cx="3383280" cy="1828800"/>
+          </a:xfrm>
+          <a:prstGeom prst="rect">
+            <a:avLst/>
+          </a:prstGeom>
+          <a:noFill/>
+        </p:spPr>
+        <p:txBody>
+          <a:bodyPr wrap="square">
+            <a:spAutoFit/>
+          </a:bodyPr>
+          <a:lstStyle/>
+          <a:p>
+            <a:pPr algn="l">
+              <a:lnSpc>
+                <a:spcPct val="145000"/>
+              </a:lnSpc>
+              <a:spcBef>
+                <a:spcPts val="0"/>
+              </a:spcBef>
+              <a:spcAft>
+                <a:spcPts val="0"/>
+              </a:spcAft>
+              <a:defRPr sz="1600" b="0">
+                <a:solidFill>
+                  <a:srgbClr val="6B6860"/>
+                </a:solidFill>
+                <a:latin typeface="Calibri"/>
+              </a:defRPr>
+            </a:pPr>
+            <a:r>
+              <a:t>Wearable voice capture device.</a:t>
+            </a:r>
+            <a:br/>
+            <a:br/>
+            <a:r>
+              <a:t>Go for a walk. Talk.</a:t>
+            </a:r>
+            <a:br/>
+            <a:r>
+              <a:t>Your thoughts become structured</a:t>
+            </a:r>
+            <a:br/>
+            <a:r>
+              <a:t>knowledge by the time you're home.</a:t>
+            </a:r>
+            <a:br/>
+            <a:br/>
+            <a:r>
+              <a:t>Working prototype on stage today.</a:t>
+            </a:r>
+          </a:p>
+        </p:txBody>
+      </p:sp>
+    </p:spTree>
+  </p:cSld>
+  <p:clrMapOvr>
+    <a:masterClrMapping/>
+  </p:clrMapOvr>
+</p:sld>
+</file>
+
+<file path=ppt/slides/slide6.xml><?xml version="1.0" encoding="utf-8"?>
+<p:sld xmlns:a="http://schemas.openxmlformats.org/drawingml/2006/main" xmlns:p="http://schemas.openxmlformats.org/presentationml/2006/main" xmlns:r="http://schemas.openxmlformats.org/officeDocument/2006/relationships">
+  <p:cSld>
+    <p:bg>
+      <p:bgPr>
+        <a:solidFill>
+          <a:srgbClr val="FAF8F4"/>
+        </a:solidFill>
+        <a:effectLst/>
+      </p:bgPr>
+    </p:bg>
+    <p:spTree>
+      <p:nvGrpSpPr>
+        <p:cNvPr id="1" name=""/>
+        <p:cNvGrpSpPr/>
+        <p:nvPr/>
+      </p:nvGrpSpPr>
+      <p:grpSpPr/>
+      <p:sp>
+        <p:nvSpPr>
+          <p:cNvPr id="2" name="TextBox 1"/>
+          <p:cNvSpPr txBox="1"/>
+          <p:nvPr/>
+        </p:nvSpPr>
+        <p:spPr>
+          <a:xfrm>
+            <a:off x="1097280" y="1097280"/>
+            <a:ext cx="3657600" cy="365760"/>
+          </a:xfrm>
+          <a:prstGeom prst="rect">
+            <a:avLst/>
+          </a:prstGeom>
+          <a:noFill/>
+        </p:spPr>
+        <p:txBody>
+          <a:bodyPr wrap="square">
+            <a:spAutoFit/>
+          </a:bodyPr>
+          <a:lstStyle/>
+          <a:p>
+            <a:pPr algn="l">
+              <a:lnSpc>
+                <a:spcPct val="120000"/>
+              </a:lnSpc>
+              <a:spcBef>
+                <a:spcPts val="0"/>
+              </a:spcBef>
+              <a:spcAft>
+                <a:spcPts val="0"/>
+              </a:spcAft>
+              <a:defRPr sz="1100" b="1">
+                <a:solidFill>
+                  <a:srgbClr val="4A7C59"/>
+                </a:solidFill>
+                <a:latin typeface="Calibri"/>
+              </a:defRPr>
+            </a:pPr>
+            <a:r>
+              <a:t>THE INSIGHT</a:t>
+            </a:r>
+          </a:p>
+        </p:txBody>
+      </p:sp>
+      <p:sp>
+        <p:nvSpPr>
+          <p:cNvPr id="3" name="TextBox 2"/>
+          <p:cNvSpPr txBox="1"/>
+          <p:nvPr/>
+        </p:nvSpPr>
+        <p:spPr>
+          <a:xfrm>
+            <a:off x="1097280" y="1554480"/>
+            <a:ext cx="9144000" cy="1371600"/>
+          </a:xfrm>
+          <a:prstGeom prst="rect">
+            <a:avLst/>
+          </a:prstGeom>
+          <a:noFill/>
+        </p:spPr>
+        <p:txBody>
+          <a:bodyPr wrap="square">
+            <a:spAutoFit/>
+          </a:bodyPr>
+          <a:lstStyle/>
+          <a:p>
+            <a:pPr algn="l">
+              <a:lnSpc>
+                <a:spcPct val="105000"/>
+              </a:lnSpc>
+              <a:spcBef>
+                <a:spcPts val="0"/>
+              </a:spcBef>
+              <a:spcAft>
+                <a:spcPts val="0"/>
+              </a:spcAft>
+              <a:defRPr sz="4000" b="0">
+                <a:solidFill>
+                  <a:srgbClr val="2C2A26"/>
+                </a:solidFill>
+                <a:latin typeface="Georgia"/>
+              </a:defRPr>
+            </a:pPr>
+            <a:r>
+              <a:t>Context compounds.</a:t>
+            </a:r>
+          </a:p>
+        </p:txBody>
+      </p:sp>
+      <p:sp>
+        <p:nvSpPr>
+          <p:cNvPr id="4" name="TextBox 3"/>
+          <p:cNvSpPr txBox="1"/>
+          <p:nvPr/>
+        </p:nvSpPr>
+        <p:spPr>
+          <a:xfrm>
+            <a:off x="1097280" y="3017520"/>
+            <a:ext cx="9144000" cy="731520"/>
+          </a:xfrm>
+          <a:prstGeom prst="rect">
+            <a:avLst/>
+          </a:prstGeom>
+          <a:noFill/>
+        </p:spPr>
+        <p:txBody>
+          <a:bodyPr wrap="square">
+            <a:spAutoFit/>
+          </a:bodyPr>
+          <a:lstStyle/>
+          <a:p>
+            <a:pPr algn="l">
+              <a:lnSpc>
+                <a:spcPct val="150000"/>
+              </a:lnSpc>
+              <a:spcBef>
+                <a:spcPts val="0"/>
+              </a:spcBef>
+              <a:spcAft>
+                <a:spcPts val="0"/>
+              </a:spcAft>
+              <a:defRPr sz="2000" b="0">
+                <a:solidFill>
+                  <a:srgbClr val="6B6860"/>
+                </a:solidFill>
+                <a:latin typeface="Calibri"/>
+              </a:defRPr>
+            </a:pPr>
+            <a:r>
+              <a:t>Every day you use Parachute, your AI gets meaningfully better.</a:t>
+            </a:r>
+            <a:br/>
+            <a:r>
+              <a:t>No competitor can shortcut months of accumulated personal context.</a:t>
+            </a:r>
+          </a:p>
+        </p:txBody>
+      </p:sp>
+      <p:sp>
+        <p:nvSpPr>
+          <p:cNvPr id="5" name="TextBox 4"/>
+          <p:cNvSpPr txBox="1"/>
+          <p:nvPr/>
+        </p:nvSpPr>
+        <p:spPr>
+          <a:xfrm>
+            <a:off x="1371600" y="4206240"/>
+            <a:ext cx="548640" cy="411480"/>
+          </a:xfrm>
+          <a:prstGeom prst="rect">
+            <a:avLst/>
+          </a:prstGeom>
+          <a:noFill/>
+        </p:spPr>
+        <p:txBody>
+          <a:bodyPr wrap="square">
+            <a:spAutoFit/>
+          </a:bodyPr>
+          <a:lstStyle/>
+          <a:p>
+            <a:pPr algn="l">
+              <a:lnSpc>
+                <a:spcPct val="120000"/>
+              </a:lnSpc>
+              <a:spcBef>
+                <a:spcPts val="0"/>
+              </a:spcBef>
+              <a:spcAft>
+                <a:spcPts val="0"/>
+              </a:spcAft>
+              <a:defRPr sz="1400" b="0">
+                <a:solidFill>
+                  <a:srgbClr val="9A9690"/>
+                </a:solidFill>
+                <a:latin typeface="Courier New"/>
+              </a:defRPr>
+            </a:pPr>
+            <a:r>
+              <a:t>01</a:t>
+            </a:r>
+          </a:p>
+        </p:txBody>
+      </p:sp>
+      <p:sp>
+        <p:nvSpPr>
+          <p:cNvPr id="6" name="TextBox 5"/>
+          <p:cNvSpPr txBox="1"/>
+          <p:nvPr/>
+        </p:nvSpPr>
+        <p:spPr>
+          <a:xfrm>
+            <a:off x="2011680" y="4206240"/>
+            <a:ext cx="5486400" cy="411480"/>
+          </a:xfrm>
+          <a:prstGeom prst="rect">
+            <a:avLst/>
+          </a:prstGeom>
+          <a:noFill/>
+        </p:spPr>
+        <p:txBody>
+          <a:bodyPr wrap="square">
+            <a:spAutoFit/>
+          </a:bodyPr>
+          <a:lstStyle/>
+          <a:p>
+            <a:pPr algn="l">
+              <a:lnSpc>
+                <a:spcPct val="120000"/>
+              </a:lnSpc>
+              <a:spcBef>
+                <a:spcPts val="0"/>
+              </a:spcBef>
+              <a:spcAft>
+                <a:spcPts val="0"/>
+              </a:spcAft>
+              <a:defRPr sz="2000" b="0">
+                <a:solidFill>
+                  <a:srgbClr val="2C2A26"/>
+                </a:solidFill>
+                <a:latin typeface="Georgia"/>
+              </a:defRPr>
+            </a:pPr>
+            <a:r>
+              <a:t>Start journaling in Daily</a:t>
+            </a:r>
+          </a:p>
+        </p:txBody>
+      </p:sp>
+      <p:sp>
+        <p:nvSpPr>
+          <p:cNvPr id="7" name="TextBox 6"/>
+          <p:cNvSpPr txBox="1"/>
+          <p:nvPr/>
+        </p:nvSpPr>
+        <p:spPr>
+          <a:xfrm>
+            <a:off x="1371600" y="4663440"/>
+            <a:ext cx="548640" cy="411480"/>
+          </a:xfrm>
+          <a:prstGeom prst="rect">
+            <a:avLst/>
+          </a:prstGeom>
+          <a:noFill/>
+        </p:spPr>
+        <p:txBody>
+          <a:bodyPr wrap="square">
+            <a:spAutoFit/>
+          </a:bodyPr>
+          <a:lstStyle/>
+          <a:p>
+            <a:pPr algn="l">
+              <a:lnSpc>
+                <a:spcPct val="120000"/>
+              </a:lnSpc>
+              <a:spcBef>
+                <a:spcPts val="0"/>
+              </a:spcBef>
+              <a:spcAft>
+                <a:spcPts val="0"/>
+              </a:spcAft>
+              <a:defRPr sz="1400" b="0">
+                <a:solidFill>
+                  <a:srgbClr val="9A9690"/>
+                </a:solidFill>
+                <a:latin typeface="Courier New"/>
+              </a:defRPr>
+            </a:pPr>
+            <a:r>
+              <a:t>02</a:t>
+            </a:r>
+          </a:p>
+        </p:txBody>
+      </p:sp>
+      <p:sp>
+        <p:nvSpPr>
+          <p:cNvPr id="8" name="TextBox 7"/>
+          <p:cNvSpPr txBox="1"/>
+          <p:nvPr/>
+        </p:nvSpPr>
+        <p:spPr>
+          <a:xfrm>
+            <a:off x="2011680" y="4663440"/>
+            <a:ext cx="5486400" cy="411480"/>
+          </a:xfrm>
+          <a:prstGeom prst="rect">
+            <a:avLst/>
+          </a:prstGeom>
+          <a:noFill/>
+        </p:spPr>
+        <p:txBody>
+          <a:bodyPr wrap="square">
+            <a:spAutoFit/>
+          </a:bodyPr>
+          <a:lstStyle/>
+          <a:p>
+            <a:pPr algn="l">
+              <a:lnSpc>
+                <a:spcPct val="120000"/>
+              </a:lnSpc>
+              <a:spcBef>
+                <a:spcPts val="0"/>
+              </a:spcBef>
+              <a:spcAft>
+                <a:spcPts val="0"/>
+              </a:spcAft>
+              <a:defRPr sz="2000" b="0">
+                <a:solidFill>
+                  <a:srgbClr val="2C2A26"/>
+                </a:solidFill>
+                <a:latin typeface="Georgia"/>
+              </a:defRPr>
+            </a:pPr>
+            <a:r>
+              <a:t>Build months of personal context</a:t>
+            </a:r>
+          </a:p>
+        </p:txBody>
+      </p:sp>
+      <p:sp>
+        <p:nvSpPr>
+          <p:cNvPr id="9" name="TextBox 8"/>
+          <p:cNvSpPr txBox="1"/>
+          <p:nvPr/>
+        </p:nvSpPr>
+        <p:spPr>
+          <a:xfrm>
+            <a:off x="1371600" y="5120640"/>
+            <a:ext cx="548640" cy="411480"/>
+          </a:xfrm>
+          <a:prstGeom prst="rect">
+            <a:avLst/>
+          </a:prstGeom>
+          <a:noFill/>
+        </p:spPr>
+        <p:txBody>
+          <a:bodyPr wrap="square">
+            <a:spAutoFit/>
+          </a:bodyPr>
+          <a:lstStyle/>
+          <a:p>
+            <a:pPr algn="l">
+              <a:lnSpc>
+                <a:spcPct val="120000"/>
+              </a:lnSpc>
+              <a:spcBef>
+                <a:spcPts val="0"/>
+              </a:spcBef>
+              <a:spcAft>
+                <a:spcPts val="0"/>
+              </a:spcAft>
+              <a:defRPr sz="1400" b="0">
+                <a:solidFill>
+                  <a:srgbClr val="9A9690"/>
+                </a:solidFill>
+                <a:latin typeface="Courier New"/>
+              </a:defRPr>
+            </a:pPr>
+            <a:r>
+              <a:t>03</a:t>
+            </a:r>
+          </a:p>
+        </p:txBody>
+      </p:sp>
+      <p:sp>
+        <p:nvSpPr>
+          <p:cNvPr id="10" name="TextBox 9"/>
+          <p:cNvSpPr txBox="1"/>
+          <p:nvPr/>
+        </p:nvSpPr>
+        <p:spPr>
+          <a:xfrm>
+            <a:off x="2011680" y="5120640"/>
+            <a:ext cx="5486400" cy="411480"/>
+          </a:xfrm>
+          <a:prstGeom prst="rect">
+            <a:avLst/>
+          </a:prstGeom>
+          <a:noFill/>
+        </p:spPr>
+        <p:txBody>
+          <a:bodyPr wrap="square">
+            <a:spAutoFit/>
+          </a:bodyPr>
+          <a:lstStyle/>
+          <a:p>
+            <a:pPr algn="l">
+              <a:lnSpc>
+                <a:spcPct val="120000"/>
+              </a:lnSpc>
+              <a:spcBef>
+                <a:spcPts val="0"/>
+              </a:spcBef>
+              <a:spcAft>
+                <a:spcPts val="0"/>
+              </a:spcAft>
+              <a:defRPr sz="2000" b="0">
+                <a:solidFill>
+                  <a:srgbClr val="2C2A26"/>
+                </a:solidFill>
+                <a:latin typeface="Georgia"/>
+              </a:defRPr>
+            </a:pPr>
+            <a:r>
+              <a:t>Upgrade to Parachute Computer</a:t>
+            </a:r>
+          </a:p>
+        </p:txBody>
+      </p:sp>
+      <p:sp>
+        <p:nvSpPr>
+          <p:cNvPr id="11" name="TextBox 10"/>
+          <p:cNvSpPr txBox="1"/>
+          <p:nvPr/>
+        </p:nvSpPr>
+        <p:spPr>
+          <a:xfrm>
+            <a:off x="1371600" y="5577840"/>
+            <a:ext cx="548640" cy="411480"/>
+          </a:xfrm>
+          <a:prstGeom prst="rect">
+            <a:avLst/>
+          </a:prstGeom>
+          <a:noFill/>
+        </p:spPr>
+        <p:txBody>
+          <a:bodyPr wrap="square">
+            <a:spAutoFit/>
+          </a:bodyPr>
+          <a:lstStyle/>
+          <a:p>
+            <a:pPr algn="l">
+              <a:lnSpc>
+                <a:spcPct val="120000"/>
+              </a:lnSpc>
+              <a:spcBef>
+                <a:spcPts val="0"/>
+              </a:spcBef>
+              <a:spcAft>
+                <a:spcPts val="0"/>
+              </a:spcAft>
+              <a:defRPr sz="1400" b="0">
+                <a:solidFill>
+                  <a:srgbClr val="9A9690"/>
+                </a:solidFill>
+                <a:latin typeface="Courier New"/>
+              </a:defRPr>
+            </a:pPr>
+            <a:r>
+              <a:t>04</a:t>
+            </a:r>
+          </a:p>
+        </p:txBody>
+      </p:sp>
+      <p:sp>
+        <p:nvSpPr>
+          <p:cNvPr id="12" name="TextBox 11"/>
+          <p:cNvSpPr txBox="1"/>
+          <p:nvPr/>
+        </p:nvSpPr>
+        <p:spPr>
+          <a:xfrm>
+            <a:off x="2011680" y="5577840"/>
+            <a:ext cx="5486400" cy="411480"/>
+          </a:xfrm>
+          <a:prstGeom prst="rect">
+            <a:avLst/>
+          </a:prstGeom>
+          <a:noFill/>
+        </p:spPr>
+        <p:txBody>
+          <a:bodyPr wrap="square">
+            <a:spAutoFit/>
+          </a:bodyPr>
+          <a:lstStyle/>
+          <a:p>
+            <a:pPr algn="l">
+              <a:lnSpc>
+                <a:spcPct val="120000"/>
+              </a:lnSpc>
+              <a:spcBef>
+                <a:spcPts val="0"/>
+              </a:spcBef>
+              <a:spcAft>
+                <a:spcPts val="0"/>
+              </a:spcAft>
+              <a:defRPr sz="2000" b="0">
+                <a:solidFill>
+                  <a:srgbClr val="2C2A26"/>
+                </a:solidFill>
+                <a:latin typeface="Georgia"/>
+              </a:defRPr>
+            </a:pPr>
+            <a:r>
+              <a:t>Brain ingests your history instantly</a:t>
+            </a:r>
+          </a:p>
+        </p:txBody>
+      </p:sp>
+      <p:sp>
+        <p:nvSpPr>
+          <p:cNvPr id="13" name="TextBox 12"/>
+          <p:cNvSpPr txBox="1"/>
+          <p:nvPr/>
+        </p:nvSpPr>
+        <p:spPr>
+          <a:xfrm>
+            <a:off x="1371600" y="6035040"/>
+            <a:ext cx="548640" cy="411480"/>
+          </a:xfrm>
+          <a:prstGeom prst="rect">
+            <a:avLst/>
+          </a:prstGeom>
+          <a:noFill/>
+        </p:spPr>
+        <p:txBody>
+          <a:bodyPr wrap="square">
+            <a:spAutoFit/>
+          </a:bodyPr>
+          <a:lstStyle/>
+          <a:p>
+            <a:pPr algn="l">
+              <a:lnSpc>
+                <a:spcPct val="120000"/>
+              </a:lnSpc>
+              <a:spcBef>
+                <a:spcPts val="0"/>
+              </a:spcBef>
+              <a:spcAft>
+                <a:spcPts val="0"/>
+              </a:spcAft>
+              <a:defRPr sz="1400" b="0">
+                <a:solidFill>
+                  <a:srgbClr val="4A7C59"/>
+                </a:solidFill>
+                <a:latin typeface="Courier New"/>
+              </a:defRPr>
+            </a:pPr>
+            <a:r>
+              <a:t>→</a:t>
+            </a:r>
+          </a:p>
+        </p:txBody>
+      </p:sp>
+      <p:sp>
+        <p:nvSpPr>
+          <p:cNvPr id="14" name="TextBox 13"/>
+          <p:cNvSpPr txBox="1"/>
+          <p:nvPr/>
+        </p:nvSpPr>
+        <p:spPr>
+          <a:xfrm>
+            <a:off x="2011680" y="6035040"/>
+            <a:ext cx="5486400" cy="411480"/>
+          </a:xfrm>
+          <a:prstGeom prst="rect">
+            <a:avLst/>
+          </a:prstGeom>
+          <a:noFill/>
+        </p:spPr>
+        <p:txBody>
+          <a:bodyPr wrap="square">
+            <a:spAutoFit/>
+          </a:bodyPr>
+          <a:lstStyle/>
+          <a:p>
+            <a:pPr algn="l">
+              <a:lnSpc>
+                <a:spcPct val="120000"/>
+              </a:lnSpc>
+              <a:spcBef>
+                <a:spcPts val="0"/>
+              </a:spcBef>
+              <a:spcAft>
+                <a:spcPts val="0"/>
+              </a:spcAft>
+              <a:defRPr sz="2000" b="1">
+                <a:solidFill>
+                  <a:srgbClr val="4A7C59"/>
+                </a:solidFill>
+                <a:latin typeface="Georgia"/>
+              </a:defRPr>
+            </a:pPr>
+            <a:r>
+              <a:t>System already knows you</a:t>
+            </a:r>
+          </a:p>
+        </p:txBody>
+      </p:sp>
+    </p:spTree>
+  </p:cSld>
+  <p:clrMapOvr>
+    <a:masterClrMapping/>
+  </p:clrMapOvr>
+</p:sld>
+</file>
+
+<file path=ppt/slides/slide7.xml><?xml version="1.0" encoding="utf-8"?>
+<p:sld xmlns:a="http://schemas.openxmlformats.org/drawingml/2006/main" xmlns:p="http://schemas.openxmlformats.org/presentationml/2006/main" xmlns:r="http://schemas.openxmlformats.org/officeDocument/2006/relationships">
+  <p:cSld>
+    <p:bg>
+      <p:bgPr>
+        <a:solidFill>
+          <a:srgbClr val="FAF8F4"/>
+        </a:solidFill>
+        <a:effectLst/>
+      </p:bgPr>
+    </p:bg>
+    <p:spTree>
+      <p:nvGrpSpPr>
+        <p:cNvPr id="1" name=""/>
+        <p:cNvGrpSpPr/>
+        <p:nvPr/>
+      </p:nvGrpSpPr>
+      <p:grpSpPr/>
+      <p:sp>
+        <p:nvSpPr>
+          <p:cNvPr id="2" name="TextBox 1"/>
+          <p:cNvSpPr txBox="1"/>
+          <p:nvPr/>
+        </p:nvSpPr>
+        <p:spPr>
+          <a:xfrm>
+            <a:off x="1097280" y="1097280"/>
+            <a:ext cx="3657600" cy="365760"/>
+          </a:xfrm>
+          <a:prstGeom prst="rect">
+            <a:avLst/>
+          </a:prstGeom>
+          <a:noFill/>
+        </p:spPr>
+        <p:txBody>
+          <a:bodyPr wrap="square">
+            <a:spAutoFit/>
+          </a:bodyPr>
+          <a:lstStyle/>
+          <a:p>
+            <a:pPr algn="l">
+              <a:lnSpc>
+                <a:spcPct val="120000"/>
+              </a:lnSpc>
+              <a:spcBef>
+                <a:spcPts val="0"/>
+              </a:spcBef>
+              <a:spcAft>
+                <a:spcPts val="0"/>
+              </a:spcAft>
+              <a:defRPr sz="1100" b="1">
+                <a:solidFill>
+                  <a:srgbClr val="4A7C59"/>
+                </a:solidFill>
+                <a:latin typeface="Calibri"/>
+              </a:defRPr>
+            </a:pPr>
+            <a:r>
+              <a:t>WHY US</a:t>
+            </a:r>
+          </a:p>
+        </p:txBody>
+      </p:sp>
+      <p:sp>
+        <p:nvSpPr>
+          <p:cNvPr id="3" name="TextBox 2"/>
+          <p:cNvSpPr txBox="1"/>
+          <p:nvPr/>
+        </p:nvSpPr>
+        <p:spPr>
+          <a:xfrm>
+            <a:off x="1097280" y="1554480"/>
+            <a:ext cx="9144000" cy="1371600"/>
+          </a:xfrm>
+          <a:prstGeom prst="rect">
+            <a:avLst/>
+          </a:prstGeom>
+          <a:noFill/>
+        </p:spPr>
+        <p:txBody>
+          <a:bodyPr wrap="square">
+            <a:spAutoFit/>
+          </a:bodyPr>
+          <a:lstStyle/>
+          <a:p>
+            <a:pPr algn="l">
+              <a:lnSpc>
+                <a:spcPct val="105000"/>
+              </a:lnSpc>
+              <a:spcBef>
+                <a:spcPts val="0"/>
+              </a:spcBef>
+              <a:spcAft>
+                <a:spcPts val="0"/>
+              </a:spcAft>
+              <a:defRPr sz="4000" b="0">
+                <a:solidFill>
+                  <a:srgbClr val="2C2A26"/>
+                </a:solidFill>
+                <a:latin typeface="Georgia"/>
+              </a:defRPr>
+            </a:pPr>
+            <a:r>
+              <a:t>Open source is</a:t>
+            </a:r>
+            <a:br/>
+            <a:r>
+              <a:t>the trust foundation.</a:t>
+            </a:r>
+          </a:p>
+        </p:txBody>
+      </p:sp>
+      <p:sp>
+        <p:nvSpPr>
+          <p:cNvPr id="4" name="TextBox 3"/>
+          <p:cNvSpPr txBox="1"/>
+          <p:nvPr/>
+        </p:nvSpPr>
+        <p:spPr>
+          <a:xfrm>
+            <a:off x="1097280" y="3200400"/>
+            <a:ext cx="3200400" cy="320040"/>
+          </a:xfrm>
+          <a:prstGeom prst="rect">
+            <a:avLst/>
+          </a:prstGeom>
+          <a:noFill/>
+        </p:spPr>
+        <p:txBody>
+          <a:bodyPr wrap="square">
+            <a:spAutoFit/>
+          </a:bodyPr>
+          <a:lstStyle/>
+          <a:p>
+            <a:pPr algn="l">
+              <a:lnSpc>
+                <a:spcPct val="120000"/>
+              </a:lnSpc>
+              <a:spcBef>
+                <a:spcPts val="0"/>
+              </a:spcBef>
+              <a:spcAft>
+                <a:spcPts val="0"/>
+              </a:spcAft>
+              <a:defRPr sz="1800" b="1">
+                <a:solidFill>
+                  <a:srgbClr val="2C2A26"/>
+                </a:solidFill>
+                <a:latin typeface="Calibri"/>
+              </a:defRPr>
+            </a:pPr>
+            <a:r>
+              <a:t>AGPL-3.0 licensed</a:t>
+            </a:r>
+          </a:p>
+        </p:txBody>
+      </p:sp>
+      <p:sp>
+        <p:nvSpPr>
+          <p:cNvPr id="5" name="TextBox 4"/>
+          <p:cNvSpPr txBox="1"/>
+          <p:nvPr/>
+        </p:nvSpPr>
+        <p:spPr>
+          <a:xfrm>
+            <a:off x="4572000" y="3200400"/>
+            <a:ext cx="6400800" cy="320040"/>
+          </a:xfrm>
+          <a:prstGeom prst="rect">
+            <a:avLst/>
+          </a:prstGeom>
+          <a:noFill/>
+        </p:spPr>
+        <p:txBody>
+          <a:bodyPr wrap="square">
+            <a:spAutoFit/>
+          </a:bodyPr>
+          <a:lstStyle/>
+          <a:p>
+            <a:pPr algn="l">
+              <a:lnSpc>
+                <a:spcPct val="120000"/>
+              </a:lnSpc>
+              <a:spcBef>
+                <a:spcPts val="0"/>
+              </a:spcBef>
+              <a:spcAft>
+                <a:spcPts val="0"/>
+              </a:spcAft>
+              <a:defRPr sz="1600" b="0">
+                <a:solidFill>
+                  <a:srgbClr val="6B6860"/>
+                </a:solidFill>
+                <a:latin typeface="Calibri"/>
+              </a:defRPr>
+            </a:pPr>
+            <a:r>
+              <a:t>Fully transparent. Proprietary forks must share changes.</a:t>
+            </a:r>
+          </a:p>
+        </p:txBody>
+      </p:sp>
+      <p:sp>
+        <p:nvSpPr>
+          <p:cNvPr id="6" name="TextBox 5"/>
+          <p:cNvSpPr txBox="1"/>
+          <p:nvPr/>
+        </p:nvSpPr>
+        <p:spPr>
+          <a:xfrm>
+            <a:off x="1097280" y="3794760"/>
+            <a:ext cx="3200400" cy="320040"/>
+          </a:xfrm>
+          <a:prstGeom prst="rect">
+            <a:avLst/>
+          </a:prstGeom>
+          <a:noFill/>
+        </p:spPr>
+        <p:txBody>
+          <a:bodyPr wrap="square">
+            <a:spAutoFit/>
+          </a:bodyPr>
+          <a:lstStyle/>
+          <a:p>
+            <a:pPr algn="l">
+              <a:lnSpc>
+                <a:spcPct val="120000"/>
+              </a:lnSpc>
+              <a:spcBef>
+                <a:spcPts val="0"/>
+              </a:spcBef>
+              <a:spcAft>
+                <a:spcPts val="0"/>
+              </a:spcAft>
+              <a:defRPr sz="1800" b="1">
+                <a:solidFill>
+                  <a:srgbClr val="2C2A26"/>
+                </a:solidFill>
+                <a:latin typeface="Calibri"/>
+              </a:defRPr>
+            </a:pPr>
+            <a:r>
+              <a:t>Local-first</a:t>
+            </a:r>
+          </a:p>
+        </p:txBody>
+      </p:sp>
+      <p:sp>
+        <p:nvSpPr>
+          <p:cNvPr id="7" name="TextBox 6"/>
+          <p:cNvSpPr txBox="1"/>
+          <p:nvPr/>
+        </p:nvSpPr>
+        <p:spPr>
+          <a:xfrm>
+            <a:off x="4572000" y="3794760"/>
+            <a:ext cx="6400800" cy="320040"/>
+          </a:xfrm>
+          <a:prstGeom prst="rect">
+            <a:avLst/>
+          </a:prstGeom>
+          <a:noFill/>
+        </p:spPr>
+        <p:txBody>
+          <a:bodyPr wrap="square">
+            <a:spAutoFit/>
+          </a:bodyPr>
+          <a:lstStyle/>
+          <a:p>
+            <a:pPr algn="l">
+              <a:lnSpc>
+                <a:spcPct val="120000"/>
+              </a:lnSpc>
+              <a:spcBef>
+                <a:spcPts val="0"/>
+              </a:spcBef>
+              <a:spcAft>
+                <a:spcPts val="0"/>
+              </a:spcAft>
+              <a:defRPr sz="1600" b="0">
+                <a:solidFill>
+                  <a:srgbClr val="6B6860"/>
+                </a:solidFill>
+                <a:latin typeface="Calibri"/>
+              </a:defRPr>
+            </a:pPr>
+            <a:r>
+              <a:t>Your data on your device. Portable. Exportable. Yours.</a:t>
+            </a:r>
+          </a:p>
+        </p:txBody>
+      </p:sp>
+      <p:sp>
+        <p:nvSpPr>
+          <p:cNvPr id="8" name="TextBox 7"/>
+          <p:cNvSpPr txBox="1"/>
+          <p:nvPr/>
+        </p:nvSpPr>
+        <p:spPr>
+          <a:xfrm>
+            <a:off x="1097280" y="4389120"/>
+            <a:ext cx="3200400" cy="320040"/>
+          </a:xfrm>
+          <a:prstGeom prst="rect">
+            <a:avLst/>
+          </a:prstGeom>
+          <a:noFill/>
+        </p:spPr>
+        <p:txBody>
+          <a:bodyPr wrap="square">
+            <a:spAutoFit/>
+          </a:bodyPr>
+          <a:lstStyle/>
+          <a:p>
+            <a:pPr algn="l">
+              <a:lnSpc>
+                <a:spcPct val="120000"/>
+              </a:lnSpc>
+              <a:spcBef>
+                <a:spcPts val="0"/>
+              </a:spcBef>
+              <a:spcAft>
+                <a:spcPts val="0"/>
+              </a:spcAft>
+              <a:defRPr sz="1800" b="1">
+                <a:solidFill>
+                  <a:srgbClr val="2C2A26"/>
+                </a:solidFill>
+                <a:latin typeface="Calibri"/>
+              </a:defRPr>
+            </a:pPr>
+            <a:r>
+              <a:t>Public Benefit Corporation</a:t>
+            </a:r>
+          </a:p>
+        </p:txBody>
+      </p:sp>
+      <p:sp>
+        <p:nvSpPr>
+          <p:cNvPr id="9" name="TextBox 8"/>
+          <p:cNvSpPr txBox="1"/>
+          <p:nvPr/>
+        </p:nvSpPr>
+        <p:spPr>
+          <a:xfrm>
+            <a:off x="4572000" y="4389120"/>
+            <a:ext cx="6400800" cy="320040"/>
+          </a:xfrm>
+          <a:prstGeom prst="rect">
+            <a:avLst/>
+          </a:prstGeom>
+          <a:noFill/>
+        </p:spPr>
+        <p:txBody>
+          <a:bodyPr wrap="square">
+            <a:spAutoFit/>
+          </a:bodyPr>
+          <a:lstStyle/>
+          <a:p>
+            <a:pPr algn="l">
+              <a:lnSpc>
+                <a:spcPct val="120000"/>
+              </a:lnSpc>
+              <a:spcBef>
+                <a:spcPts val="0"/>
+              </a:spcBef>
+              <a:spcAft>
+                <a:spcPts val="0"/>
+              </a:spcAft>
+              <a:defRPr sz="1600" b="0">
+                <a:solidFill>
+                  <a:srgbClr val="6B6860"/>
+                </a:solidFill>
+                <a:latin typeface="Calibri"/>
+              </a:defRPr>
+            </a:pPr>
+            <a:r>
+              <a:t>Legal mandate to serve users, not just shareholders.</a:t>
+            </a:r>
+          </a:p>
+        </p:txBody>
+      </p:sp>
+      <p:sp>
+        <p:nvSpPr>
+          <p:cNvPr id="10" name="TextBox 9"/>
+          <p:cNvSpPr txBox="1"/>
+          <p:nvPr/>
+        </p:nvSpPr>
+        <p:spPr>
+          <a:xfrm>
+            <a:off x="1097280" y="4983480"/>
+            <a:ext cx="3200400" cy="320040"/>
+          </a:xfrm>
+          <a:prstGeom prst="rect">
+            <a:avLst/>
+          </a:prstGeom>
+          <a:noFill/>
+        </p:spPr>
+        <p:txBody>
+          <a:bodyPr wrap="square">
+            <a:spAutoFit/>
+          </a:bodyPr>
+          <a:lstStyle/>
+          <a:p>
+            <a:pPr algn="l">
+              <a:lnSpc>
+                <a:spcPct val="120000"/>
+              </a:lnSpc>
+              <a:spcBef>
+                <a:spcPts val="0"/>
+              </a:spcBef>
+              <a:spcAft>
+                <a:spcPts val="0"/>
+              </a:spcAft>
+              <a:defRPr sz="1800" b="1">
+                <a:solidFill>
+                  <a:srgbClr val="2C2A26"/>
+                </a:solidFill>
+                <a:latin typeface="Calibri"/>
+              </a:defRPr>
+            </a:pPr>
+            <a:r>
+              <a:t>Software is no longer a moat</a:t>
+            </a:r>
+          </a:p>
+        </p:txBody>
+      </p:sp>
+      <p:sp>
+        <p:nvSpPr>
+          <p:cNvPr id="11" name="TextBox 10"/>
+          <p:cNvSpPr txBox="1"/>
+          <p:nvPr/>
+        </p:nvSpPr>
+        <p:spPr>
+          <a:xfrm>
+            <a:off x="4572000" y="4983480"/>
+            <a:ext cx="6400800" cy="320040"/>
+          </a:xfrm>
+          <a:prstGeom prst="rect">
+            <a:avLst/>
+          </a:prstGeom>
+          <a:noFill/>
+        </p:spPr>
+        <p:txBody>
+          <a:bodyPr wrap="square">
+            <a:spAutoFit/>
+          </a:bodyPr>
+          <a:lstStyle/>
+          <a:p>
+            <a:pPr algn="l">
+              <a:lnSpc>
+                <a:spcPct val="120000"/>
+              </a:lnSpc>
+              <a:spcBef>
+                <a:spcPts val="0"/>
+              </a:spcBef>
+              <a:spcAft>
+                <a:spcPts val="0"/>
+              </a:spcAft>
+              <a:defRPr sz="1600" b="0">
+                <a:solidFill>
+                  <a:srgbClr val="6B6860"/>
+                </a:solidFill>
+                <a:latin typeface="Calibri"/>
+              </a:defRPr>
+            </a:pPr>
+            <a:r>
+              <a:t>Ideas get cloned in a day. Trust and context cannot.</a:t>
+            </a:r>
+          </a:p>
+        </p:txBody>
+      </p:sp>
+      <p:sp>
+        <p:nvSpPr>
+          <p:cNvPr id="12" name="TextBox 11"/>
+          <p:cNvSpPr txBox="1"/>
+          <p:nvPr/>
+        </p:nvSpPr>
+        <p:spPr>
+          <a:xfrm>
+            <a:off x="1097280" y="5577840"/>
+            <a:ext cx="3200400" cy="320040"/>
+          </a:xfrm>
+          <a:prstGeom prst="rect">
+            <a:avLst/>
+          </a:prstGeom>
+          <a:noFill/>
+        </p:spPr>
+        <p:txBody>
+          <a:bodyPr wrap="square">
+            <a:spAutoFit/>
+          </a:bodyPr>
+          <a:lstStyle/>
+          <a:p>
+            <a:pPr algn="l">
+              <a:lnSpc>
+                <a:spcPct val="120000"/>
+              </a:lnSpc>
+              <a:spcBef>
+                <a:spcPts val="0"/>
+              </a:spcBef>
+              <a:spcAft>
+                <a:spcPts val="0"/>
+              </a:spcAft>
+              <a:defRPr sz="1800" b="1">
+                <a:solidFill>
+                  <a:srgbClr val="2C2A26"/>
+                </a:solidFill>
+                <a:latin typeface="Calibri"/>
+              </a:defRPr>
+            </a:pPr>
+            <a:r>
+              <a:t>Community as growth engine</a:t>
+            </a:r>
+          </a:p>
+        </p:txBody>
+      </p:sp>
+      <p:sp>
+        <p:nvSpPr>
+          <p:cNvPr id="13" name="TextBox 12"/>
+          <p:cNvSpPr txBox="1"/>
+          <p:nvPr/>
+        </p:nvSpPr>
+        <p:spPr>
+          <a:xfrm>
+            <a:off x="4572000" y="5577840"/>
+            <a:ext cx="6400800" cy="320040"/>
+          </a:xfrm>
+          <a:prstGeom prst="rect">
+            <a:avLst/>
+          </a:prstGeom>
+          <a:noFill/>
+        </p:spPr>
+        <p:txBody>
+          <a:bodyPr wrap="square">
+            <a:spAutoFit/>
+          </a:bodyPr>
+          <a:lstStyle/>
+          <a:p>
+            <a:pPr algn="l">
+              <a:lnSpc>
+                <a:spcPct val="120000"/>
+              </a:lnSpc>
+              <a:spcBef>
+                <a:spcPts val="0"/>
+              </a:spcBef>
+              <a:spcAft>
+                <a:spcPts val="0"/>
+              </a:spcAft>
+              <a:defRPr sz="1600" b="0">
+                <a:solidFill>
+                  <a:srgbClr val="6B6860"/>
+                </a:solidFill>
+                <a:latin typeface="Calibri"/>
+              </a:defRPr>
+            </a:pPr>
+            <a:r>
+              <a:t>We're building a learning community around AI tools — users who learn together become power users who build for others.</a:t>
+            </a:r>
+          </a:p>
+        </p:txBody>
+      </p:sp>
+    </p:spTree>
+  </p:cSld>
+  <p:clrMapOvr>
+    <a:masterClrMapping/>
+  </p:clrMapOvr>
+</p:sld>
+</file>
+
+<file path=ppt/slides/slide8.xml><?xml version="1.0" encoding="utf-8"?>
+<p:sld xmlns:a="http://schemas.openxmlformats.org/drawingml/2006/main" xmlns:p="http://schemas.openxmlformats.org/presentationml/2006/main" xmlns:r="http://schemas.openxmlformats.org/officeDocument/2006/relationships">
+  <p:cSld>
+    <p:bg>
+      <p:bgPr>
+        <a:solidFill>
+          <a:srgbClr val="FAF8F4"/>
+        </a:solidFill>
+        <a:effectLst/>
+      </p:bgPr>
+    </p:bg>
+    <p:spTree>
+      <p:nvGrpSpPr>
+        <p:cNvPr id="1" name=""/>
+        <p:cNvGrpSpPr/>
+        <p:nvPr/>
+      </p:nvGrpSpPr>
+      <p:grpSpPr/>
+      <p:sp>
+        <p:nvSpPr>
+          <p:cNvPr id="2" name="TextBox 1"/>
+          <p:cNvSpPr txBox="1"/>
+          <p:nvPr/>
+        </p:nvSpPr>
+        <p:spPr>
+          <a:xfrm>
+            <a:off x="1097280" y="1097280"/>
+            <a:ext cx="3657600" cy="365760"/>
+          </a:xfrm>
+          <a:prstGeom prst="rect">
+            <a:avLst/>
+          </a:prstGeom>
+          <a:noFill/>
+        </p:spPr>
+        <p:txBody>
+          <a:bodyPr wrap="square">
+            <a:spAutoFit/>
+          </a:bodyPr>
+          <a:lstStyle/>
+          <a:p>
+            <a:pPr algn="l">
+              <a:lnSpc>
+                <a:spcPct val="120000"/>
+              </a:lnSpc>
+              <a:spcBef>
+                <a:spcPts val="0"/>
+              </a:spcBef>
+              <a:spcAft>
+                <a:spcPts val="0"/>
+              </a:spcAft>
+              <a:defRPr sz="1100" b="1">
+                <a:solidFill>
+                  <a:srgbClr val="4A7C59"/>
+                </a:solidFill>
+                <a:latin typeface="Calibri"/>
+              </a:defRPr>
+            </a:pPr>
+            <a:r>
+              <a:t>BUSINESS MODEL</a:t>
+            </a:r>
+          </a:p>
+        </p:txBody>
+      </p:sp>
+      <p:sp>
+        <p:nvSpPr>
+          <p:cNvPr id="3" name="TextBox 2"/>
+          <p:cNvSpPr txBox="1"/>
+          <p:nvPr/>
+        </p:nvSpPr>
+        <p:spPr>
+          <a:xfrm>
+            <a:off x="1097280" y="1554480"/>
+            <a:ext cx="9144000" cy="1371600"/>
+          </a:xfrm>
+          <a:prstGeom prst="rect">
+            <a:avLst/>
+          </a:prstGeom>
+          <a:noFill/>
+        </p:spPr>
+        <p:txBody>
+          <a:bodyPr wrap="square">
+            <a:spAutoFit/>
+          </a:bodyPr>
+          <a:lstStyle/>
+          <a:p>
+            <a:pPr algn="l">
+              <a:lnSpc>
+                <a:spcPct val="105000"/>
+              </a:lnSpc>
+              <a:spcBef>
+                <a:spcPts val="0"/>
+              </a:spcBef>
+              <a:spcAft>
+                <a:spcPts val="0"/>
+              </a:spcAft>
+              <a:defRPr sz="4000" b="0">
+                <a:solidFill>
+                  <a:srgbClr val="2C2A26"/>
+                </a:solidFill>
+                <a:latin typeface="Georgia"/>
+              </a:defRPr>
+            </a:pPr>
+            <a:r>
+              <a:t>Start free.</a:t>
+            </a:r>
+            <a:br/>
+            <a:r>
+              <a:t>Grow with every user.</a:t>
+            </a:r>
+          </a:p>
+        </p:txBody>
+      </p:sp>
+      <p:sp>
+        <p:nvSpPr>
+          <p:cNvPr id="4" name="TextBox 3"/>
+          <p:cNvSpPr txBox="1"/>
+          <p:nvPr/>
+        </p:nvSpPr>
+        <p:spPr>
+          <a:xfrm>
+            <a:off x="1097280" y="3200400"/>
+            <a:ext cx="1645920" cy="365760"/>
+          </a:xfrm>
+          <a:prstGeom prst="rect">
+            <a:avLst/>
+          </a:prstGeom>
+          <a:noFill/>
+        </p:spPr>
+        <p:txBody>
+          <a:bodyPr wrap="square">
+            <a:spAutoFit/>
+          </a:bodyPr>
+          <a:lstStyle/>
+          <a:p>
+            <a:pPr algn="l">
+              <a:lnSpc>
+                <a:spcPct val="120000"/>
+              </a:lnSpc>
+              <a:spcBef>
+                <a:spcPts val="0"/>
+              </a:spcBef>
+              <a:spcAft>
+                <a:spcPts val="0"/>
+              </a:spcAft>
+              <a:defRPr sz="2400" b="0">
+                <a:solidFill>
+                  <a:srgbClr val="9A9690"/>
+                </a:solidFill>
+                <a:latin typeface="Georgia"/>
+              </a:defRPr>
+            </a:pPr>
+            <a:r>
+              <a:t>Free</a:t>
+            </a:r>
+          </a:p>
+        </p:txBody>
+      </p:sp>
+      <p:sp>
+        <p:nvSpPr>
+          <p:cNvPr id="5" name="TextBox 4"/>
+          <p:cNvSpPr txBox="1"/>
+          <p:nvPr/>
+        </p:nvSpPr>
+        <p:spPr>
+          <a:xfrm>
+            <a:off x="2926080" y="3246120"/>
+            <a:ext cx="7315200" cy="365760"/>
+          </a:xfrm>
+          <a:prstGeom prst="rect">
+            <a:avLst/>
+          </a:prstGeom>
+          <a:noFill/>
+        </p:spPr>
+        <p:txBody>
+          <a:bodyPr wrap="square">
+            <a:spAutoFit/>
+          </a:bodyPr>
+          <a:lstStyle/>
+          <a:p>
+            <a:pPr algn="l">
+              <a:lnSpc>
+                <a:spcPct val="120000"/>
+              </a:lnSpc>
+              <a:spcBef>
+                <a:spcPts val="0"/>
+              </a:spcBef>
+              <a:spcAft>
+                <a:spcPts val="0"/>
+              </a:spcAft>
+              <a:defRPr sz="1600" b="0">
+                <a:solidFill>
+                  <a:srgbClr val="6B6860"/>
+                </a:solidFill>
+                <a:latin typeface="Calibri"/>
+              </a:defRPr>
+            </a:pPr>
+            <a:r>
+              <a:t>Offline journal + on-device transcription. Zero hosting cost.</a:t>
+            </a:r>
+          </a:p>
+        </p:txBody>
+      </p:sp>
+      <p:sp>
+        <p:nvSpPr>
+          <p:cNvPr id="6" name="TextBox 5"/>
+          <p:cNvSpPr txBox="1"/>
+          <p:nvPr/>
+        </p:nvSpPr>
+        <p:spPr>
+          <a:xfrm>
+            <a:off x="1097280" y="3840480"/>
+            <a:ext cx="1645920" cy="365760"/>
+          </a:xfrm>
+          <a:prstGeom prst="rect">
+            <a:avLst/>
+          </a:prstGeom>
+          <a:noFill/>
+        </p:spPr>
+        <p:txBody>
+          <a:bodyPr wrap="square">
+            <a:spAutoFit/>
+          </a:bodyPr>
+          <a:lstStyle/>
+          <a:p>
+            <a:pPr algn="l">
+              <a:lnSpc>
+                <a:spcPct val="120000"/>
+              </a:lnSpc>
+              <a:spcBef>
+                <a:spcPts val="0"/>
+              </a:spcBef>
+              <a:spcAft>
+                <a:spcPts val="0"/>
+              </a:spcAft>
+              <a:defRPr sz="2400" b="0">
+                <a:solidFill>
+                  <a:srgbClr val="6B6860"/>
+                </a:solidFill>
+                <a:latin typeface="Georgia"/>
+              </a:defRPr>
+            </a:pPr>
+            <a:r>
+              <a:t>$1-2/mo</a:t>
+            </a:r>
+          </a:p>
+        </p:txBody>
+      </p:sp>
+      <p:sp>
+        <p:nvSpPr>
+          <p:cNvPr id="7" name="TextBox 6"/>
+          <p:cNvSpPr txBox="1"/>
+          <p:nvPr/>
+        </p:nvSpPr>
+        <p:spPr>
+          <a:xfrm>
+            <a:off x="2926080" y="3886200"/>
+            <a:ext cx="7315200" cy="365760"/>
+          </a:xfrm>
+          <a:prstGeom prst="rect">
+            <a:avLst/>
+          </a:prstGeom>
+          <a:noFill/>
+        </p:spPr>
+        <p:txBody>
+          <a:bodyPr wrap="square">
+            <a:spAutoFit/>
+          </a:bodyPr>
+          <a:lstStyle/>
+          <a:p>
+            <a:pPr algn="l">
+              <a:lnSpc>
+                <a:spcPct val="120000"/>
+              </a:lnSpc>
+              <a:spcBef>
+                <a:spcPts val="0"/>
+              </a:spcBef>
+              <a:spcAft>
+                <a:spcPts val="0"/>
+              </a:spcAft>
+              <a:defRPr sz="1600" b="0">
+                <a:solidFill>
+                  <a:srgbClr val="6B6860"/>
+                </a:solidFill>
+                <a:latin typeface="Calibri"/>
+              </a:defRPr>
+            </a:pPr>
+            <a:r>
+              <a:t>Cloud sync across devices. Your notes everywhere.</a:t>
+            </a:r>
+          </a:p>
+        </p:txBody>
+      </p:sp>
+      <p:sp>
+        <p:nvSpPr>
+          <p:cNvPr id="8" name="Rounded Rectangle 7"/>
+          <p:cNvSpPr/>
+          <p:nvPr/>
+        </p:nvSpPr>
+        <p:spPr>
+          <a:xfrm>
+            <a:off x="914400" y="4343400"/>
+            <a:ext cx="9601200" cy="594360"/>
+          </a:xfrm>
+          <a:prstGeom prst="roundRect">
+            <a:avLst/>
+          </a:prstGeom>
+          <a:solidFill>
+            <a:srgbClr val="E8F5EC"/>
+          </a:solidFill>
+          <a:ln>
+            <a:noFill/>
+          </a:ln>
+        </p:spPr>
+        <p:style>
+          <a:lnRef idx="1">
+            <a:schemeClr val="accent1"/>
+          </a:lnRef>
+          <a:fillRef idx="3">
+            <a:schemeClr val="accent1"/>
+          </a:fillRef>
+          <a:effectRef idx="2">
+            <a:schemeClr val="accent1"/>
+          </a:effectRef>
+          <a:fontRef idx="minor">
+            <a:schemeClr val="lt1"/>
+          </a:fontRef>
+        </p:style>
+        <p:txBody>
+          <a:bodyPr rtlCol="0" anchor="ctr"/>
+          <a:lstStyle/>
+          <a:p>
+            <a:pPr algn="ctr"/>
+          </a:p>
+        </p:txBody>
+      </p:sp>
+      <p:sp>
+        <p:nvSpPr>
+          <p:cNvPr id="9" name="TextBox 8"/>
+          <p:cNvSpPr txBox="1"/>
+          <p:nvPr/>
+        </p:nvSpPr>
+        <p:spPr>
+          <a:xfrm>
+            <a:off x="1097280" y="4480560"/>
+            <a:ext cx="1645920" cy="365760"/>
+          </a:xfrm>
+          <a:prstGeom prst="rect">
+            <a:avLst/>
+          </a:prstGeom>
+          <a:noFill/>
+        </p:spPr>
+        <p:txBody>
+          <a:bodyPr wrap="square">
+            <a:spAutoFit/>
+          </a:bodyPr>
+          <a:lstStyle/>
+          <a:p>
+            <a:pPr algn="l">
+              <a:lnSpc>
+                <a:spcPct val="120000"/>
+              </a:lnSpc>
+              <a:spcBef>
+                <a:spcPts val="0"/>
+              </a:spcBef>
+              <a:spcAft>
+                <a:spcPts val="0"/>
+              </a:spcAft>
+              <a:defRPr sz="2400" b="0">
+                <a:solidFill>
+                  <a:srgbClr val="4A7C59"/>
+                </a:solidFill>
+                <a:latin typeface="Georgia"/>
+              </a:defRPr>
+            </a:pPr>
+            <a:r>
+              <a:t>$5/mo</a:t>
+            </a:r>
+          </a:p>
+        </p:txBody>
+      </p:sp>
+      <p:sp>
+        <p:nvSpPr>
+          <p:cNvPr id="10" name="TextBox 9"/>
+          <p:cNvSpPr txBox="1"/>
+          <p:nvPr/>
+        </p:nvSpPr>
+        <p:spPr>
+          <a:xfrm>
+            <a:off x="2926080" y="4526280"/>
+            <a:ext cx="7315200" cy="365760"/>
+          </a:xfrm>
+          <a:prstGeom prst="rect">
+            <a:avLst/>
+          </a:prstGeom>
+          <a:noFill/>
+        </p:spPr>
+        <p:txBody>
+          <a:bodyPr wrap="square">
+            <a:spAutoFit/>
+          </a:bodyPr>
+          <a:lstStyle/>
+          <a:p>
+            <a:pPr algn="l">
+              <a:lnSpc>
+                <a:spcPct val="120000"/>
+              </a:lnSpc>
+              <a:spcBef>
+                <a:spcPts val="0"/>
+              </a:spcBef>
+              <a:spcAft>
+                <a:spcPts val="0"/>
+              </a:spcAft>
+              <a:defRPr sz="1600" b="0">
+                <a:solidFill>
+                  <a:srgbClr val="6B6860"/>
+                </a:solidFill>
+                <a:latin typeface="Calibri"/>
+              </a:defRPr>
+            </a:pPr>
+            <a:r>
+              <a:t>Cloud transcription + AI reflections, synthesis, pattern surfacing</a:t>
+            </a:r>
+          </a:p>
+        </p:txBody>
+      </p:sp>
+      <p:sp>
+        <p:nvSpPr>
+          <p:cNvPr id="11" name="TextBox 10"/>
+          <p:cNvSpPr txBox="1"/>
+          <p:nvPr/>
+        </p:nvSpPr>
+        <p:spPr>
+          <a:xfrm>
+            <a:off x="1097280" y="5120640"/>
+            <a:ext cx="1645920" cy="365760"/>
+          </a:xfrm>
+          <a:prstGeom prst="rect">
+            <a:avLst/>
+          </a:prstGeom>
+          <a:noFill/>
+        </p:spPr>
+        <p:txBody>
+          <a:bodyPr wrap="square">
+            <a:spAutoFit/>
+          </a:bodyPr>
+          <a:lstStyle/>
+          <a:p>
+            <a:pPr algn="l">
+              <a:lnSpc>
+                <a:spcPct val="120000"/>
+              </a:lnSpc>
+              <a:spcBef>
+                <a:spcPts val="0"/>
+              </a:spcBef>
+              <a:spcAft>
+                <a:spcPts val="0"/>
+              </a:spcAft>
+              <a:defRPr sz="2400" b="0">
+                <a:solidFill>
+                  <a:srgbClr val="2C2A26"/>
+                </a:solidFill>
+                <a:latin typeface="Georgia"/>
+              </a:defRPr>
+            </a:pPr>
+            <a:r>
+              <a:t>$20/mo</a:t>
+            </a:r>
+          </a:p>
+        </p:txBody>
+      </p:sp>
+      <p:sp>
+        <p:nvSpPr>
+          <p:cNvPr id="12" name="TextBox 11"/>
+          <p:cNvSpPr txBox="1"/>
+          <p:nvPr/>
+        </p:nvSpPr>
+        <p:spPr>
+          <a:xfrm>
+            <a:off x="2926080" y="5166360"/>
+            <a:ext cx="7315200" cy="365760"/>
+          </a:xfrm>
+          <a:prstGeom prst="rect">
+            <a:avLst/>
+          </a:prstGeom>
+          <a:noFill/>
+        </p:spPr>
+        <p:txBody>
+          <a:bodyPr wrap="square">
+            <a:spAutoFit/>
+          </a:bodyPr>
+          <a:lstStyle/>
+          <a:p>
+            <a:pPr algn="l">
+              <a:lnSpc>
+                <a:spcPct val="120000"/>
+              </a:lnSpc>
+              <a:spcBef>
+                <a:spcPts val="0"/>
+              </a:spcBef>
+              <a:spcAft>
+                <a:spcPts val="0"/>
+              </a:spcAft>
+              <a:defRPr sz="1600" b="0">
+                <a:solidFill>
+                  <a:srgbClr val="6B6860"/>
+                </a:solidFill>
+                <a:latin typeface="Calibri"/>
+              </a:defRPr>
+            </a:pPr>
+            <a:r>
+              <a:t>Hosted Parachute Computer — full agentic platform</a:t>
+            </a:r>
+          </a:p>
+        </p:txBody>
+      </p:sp>
+      <p:sp>
+        <p:nvSpPr>
+          <p:cNvPr id="13" name="TextBox 12"/>
+          <p:cNvSpPr txBox="1"/>
+          <p:nvPr/>
+        </p:nvSpPr>
+        <p:spPr>
+          <a:xfrm>
+            <a:off x="1097280" y="5760720"/>
+            <a:ext cx="9144000" cy="731520"/>
+          </a:xfrm>
+          <a:prstGeom prst="rect">
+            <a:avLst/>
+          </a:prstGeom>
+          <a:noFill/>
+        </p:spPr>
+        <p:txBody>
+          <a:bodyPr wrap="square">
+            <a:spAutoFit/>
+          </a:bodyPr>
+          <a:lstStyle/>
+          <a:p>
+            <a:pPr algn="l">
+              <a:lnSpc>
+                <a:spcPct val="150000"/>
+              </a:lnSpc>
+              <a:spcBef>
+                <a:spcPts val="0"/>
+              </a:spcBef>
+              <a:spcAft>
+                <a:spcPts val="0"/>
+              </a:spcAft>
+              <a:defRPr sz="1500" b="0">
+                <a:solidFill>
+                  <a:srgbClr val="9A9690"/>
+                </a:solidFill>
+                <a:latin typeface="Calibri"/>
+              </a:defRPr>
+            </a:pPr>
+            <a:r>
+              <a:t>Free tier has zero hosting cost — no subsidizing free users.</a:t>
+            </a:r>
+            <a:br/>
+            <a:r>
+              <a:t>AI at $5/mo uses cost-efficient models. Margins are real and improve as model costs drop.</a:t>
+            </a:r>
+          </a:p>
+        </p:txBody>
+      </p:sp>
+    </p:spTree>
+  </p:cSld>
+  <p:clrMapOvr>
+    <a:masterClrMapping/>
+  </p:clrMapOvr>
+</p:sld>
+</file>
+
+<file path=ppt/slides/slide9.xml><?xml version="1.0" encoding="utf-8"?>
+<p:sld xmlns:a="http://schemas.openxmlformats.org/drawingml/2006/main" xmlns:p="http://schemas.openxmlformats.org/presentationml/2006/main" xmlns:r="http://schemas.openxmlformats.org/officeDocument/2006/relationships">
+  <p:cSld>
+    <p:bg>
+      <p:bgPr>
+        <a:solidFill>
+          <a:srgbClr val="FAF8F4"/>
+        </a:solidFill>
+        <a:effectLst/>
+      </p:bgPr>
+    </p:bg>
+    <p:spTree>
+      <p:nvGrpSpPr>
+        <p:cNvPr id="1" name=""/>
+        <p:cNvGrpSpPr/>
+        <p:nvPr/>
+      </p:nvGrpSpPr>
+      <p:grpSpPr/>
+      <p:sp>
+        <p:nvSpPr>
+          <p:cNvPr id="2" name="TextBox 1"/>
+          <p:cNvSpPr txBox="1"/>
+          <p:nvPr/>
+        </p:nvSpPr>
+        <p:spPr>
+          <a:xfrm>
+            <a:off x="1097280" y="1097280"/>
+            <a:ext cx="3657600" cy="365760"/>
+          </a:xfrm>
+          <a:prstGeom prst="rect">
+            <a:avLst/>
+          </a:prstGeom>
+          <a:noFill/>
+        </p:spPr>
+        <p:txBody>
+          <a:bodyPr wrap="square">
+            <a:spAutoFit/>
+          </a:bodyPr>
+          <a:lstStyle/>
+          <a:p>
+            <a:pPr algn="l">
+              <a:lnSpc>
+                <a:spcPct val="120000"/>
+              </a:lnSpc>
+              <a:spcBef>
+                <a:spcPts val="0"/>
+              </a:spcBef>
+              <a:spcAft>
+                <a:spcPts val="0"/>
+              </a:spcAft>
+              <a:defRPr sz="1100" b="1">
+                <a:solidFill>
+                  <a:srgbClr val="4A7C59"/>
+                </a:solidFill>
+                <a:latin typeface="Calibri"/>
+              </a:defRPr>
+            </a:pPr>
+            <a:r>
+              <a:t>TEAM &amp; TRACTION</a:t>
+            </a:r>
+          </a:p>
+        </p:txBody>
+      </p:sp>
+      <p:sp>
+        <p:nvSpPr>
+          <p:cNvPr id="3" name="TextBox 2"/>
+          <p:cNvSpPr txBox="1"/>
+          <p:nvPr/>
+        </p:nvSpPr>
+        <p:spPr>
+          <a:xfrm>
+            <a:off x="1097280" y="1554480"/>
+            <a:ext cx="9144000" cy="1371600"/>
+          </a:xfrm>
+          <a:prstGeom prst="rect">
+            <a:avLst/>
+          </a:prstGeom>
+          <a:noFill/>
+        </p:spPr>
+        <p:txBody>
+          <a:bodyPr wrap="square">
+            <a:spAutoFit/>
+          </a:bodyPr>
+          <a:lstStyle/>
+          <a:p>
+            <a:pPr algn="l">
+              <a:lnSpc>
+                <a:spcPct val="105000"/>
+              </a:lnSpc>
+              <a:spcBef>
+                <a:spcPts val="0"/>
+              </a:spcBef>
+              <a:spcAft>
+                <a:spcPts val="0"/>
+              </a:spcAft>
+              <a:defRPr sz="4000" b="0">
+                <a:solidFill>
+                  <a:srgbClr val="2C2A26"/>
+                </a:solidFill>
+                <a:latin typeface="Georgia"/>
+              </a:defRPr>
+            </a:pPr>
+            <a:r>
+              <a:t>Built from zero.</a:t>
+            </a:r>
+            <a:br/>
+            <a:r>
+              <a:t>Solo. No funding.</a:t>
+            </a:r>
+          </a:p>
+        </p:txBody>
+      </p:sp>
+      <p:sp>
+        <p:nvSpPr>
+          <p:cNvPr id="4" name="TextBox 3"/>
+          <p:cNvSpPr txBox="1"/>
+          <p:nvPr/>
+        </p:nvSpPr>
+        <p:spPr>
+          <a:xfrm>
+            <a:off x="1097280" y="3200400"/>
+            <a:ext cx="5029200" cy="2743200"/>
+          </a:xfrm>
+          <a:prstGeom prst="rect">
+            <a:avLst/>
+          </a:prstGeom>
+          <a:noFill/>
+        </p:spPr>
+        <p:txBody>
+          <a:bodyPr wrap="square">
+            <a:spAutoFit/>
+          </a:bodyPr>
+          <a:lstStyle/>
+          <a:p>
+            <a:pPr algn="l">
+              <a:lnSpc>
+                <a:spcPct val="155000"/>
+              </a:lnSpc>
+              <a:spcBef>
+                <a:spcPts val="0"/>
+              </a:spcBef>
+              <a:spcAft>
+                <a:spcPts val="0"/>
+              </a:spcAft>
+              <a:defRPr sz="1600" b="0">
+                <a:solidFill>
+                  <a:srgbClr val="6B6860"/>
+                </a:solidFill>
+                <a:latin typeface="Calibri"/>
+              </a:defRPr>
+            </a:pPr>
+            <a:r>
+              <a:t>What exists today:</a:t>
+            </a:r>
+            <a:br/>
+            <a:br/>
+            <a:r>
+              <a:t>  ·  Working server, app, and graph-native memory</a:t>
+            </a:r>
+            <a:br/>
+            <a:r>
+              <a:t>  ·  Local voice transcription (fully offline)</a:t>
+            </a:r>
+            <a:br/>
+            <a:r>
+              <a:t>  ·  Multi-agent system with trust tiers</a:t>
+            </a:r>
+            <a:br/>
+            <a:r>
+              <a:t>  ·  Telegram, Discord, Matrix connectors</a:t>
+            </a:r>
+            <a:br/>
+            <a:r>
+              <a:t>  ·  Functional pendant prototype</a:t>
+            </a:r>
+            <a:br/>
+            <a:r>
+              <a:t>  ·  Beta launching next month</a:t>
+            </a:r>
+            <a:br/>
+            <a:r>
+              <a:t>  ·  PBC incorporated in Colorado</a:t>
+            </a:r>
+          </a:p>
+        </p:txBody>
+      </p:sp>
+      <p:sp>
+        <p:nvSpPr>
+          <p:cNvPr id="5" name="TextBox 4"/>
+          <p:cNvSpPr txBox="1"/>
+          <p:nvPr/>
+        </p:nvSpPr>
+        <p:spPr>
+          <a:xfrm>
+            <a:off x="7132320" y="3017520"/>
+            <a:ext cx="3657600" cy="320040"/>
+          </a:xfrm>
+          <a:prstGeom prst="rect">
+            <a:avLst/>
+          </a:prstGeom>
+          <a:noFill/>
+        </p:spPr>
+        <p:txBody>
+          <a:bodyPr wrap="square">
+            <a:spAutoFit/>
+          </a:bodyPr>
+          <a:lstStyle/>
+          <a:p>
+            <a:pPr algn="l">
+              <a:lnSpc>
+                <a:spcPct val="120000"/>
+              </a:lnSpc>
+              <a:spcBef>
+                <a:spcPts val="0"/>
+              </a:spcBef>
+              <a:spcAft>
+                <a:spcPts val="0"/>
+              </a:spcAft>
+              <a:defRPr sz="1100" b="1">
+                <a:solidFill>
+                  <a:srgbClr val="4A7C59"/>
+                </a:solidFill>
+                <a:latin typeface="Calibri"/>
+              </a:defRPr>
+            </a:pPr>
+            <a:r>
+              <a:t>THE TEAM</a:t>
+            </a:r>
+          </a:p>
+        </p:txBody>
+      </p:sp>
+      <p:sp>
+        <p:nvSpPr>
+          <p:cNvPr id="6" name="TextBox 5"/>
+          <p:cNvSpPr txBox="1"/>
+          <p:nvPr/>
+        </p:nvSpPr>
+        <p:spPr>
+          <a:xfrm>
+            <a:off x="7132320" y="3566160"/>
+            <a:ext cx="4114800" cy="274320"/>
+          </a:xfrm>
+          <a:prstGeom prst="rect">
+            <a:avLst/>
+          </a:prstGeom>
+          <a:noFill/>
+        </p:spPr>
+        <p:txBody>
+          <a:bodyPr wrap="square">
+            <a:spAutoFit/>
+          </a:bodyPr>
+          <a:lstStyle/>
+          <a:p>
+            <a:pPr algn="l">
+              <a:lnSpc>
+                <a:spcPct val="120000"/>
+              </a:lnSpc>
+              <a:spcBef>
+                <a:spcPts val="0"/>
+              </a:spcBef>
+              <a:spcAft>
+                <a:spcPts val="0"/>
+              </a:spcAft>
+              <a:defRPr sz="1400" b="1">
+                <a:solidFill>
+                  <a:srgbClr val="2C2A26"/>
+                </a:solidFill>
+                <a:latin typeface="Calibri"/>
+              </a:defRPr>
+            </a:pPr>
+            <a:r>
+              <a:t>Aaron Gabriel Neyer</a:t>
+            </a:r>
+          </a:p>
+        </p:txBody>
+      </p:sp>
+      <p:sp>
+        <p:nvSpPr>
+          <p:cNvPr id="7" name="TextBox 6"/>
+          <p:cNvSpPr txBox="1"/>
+          <p:nvPr/>
+        </p:nvSpPr>
+        <p:spPr>
+          <a:xfrm>
+            <a:off x="7132320" y="3822192"/>
+            <a:ext cx="4114800" cy="274320"/>
+          </a:xfrm>
+          <a:prstGeom prst="rect">
+            <a:avLst/>
+          </a:prstGeom>
+          <a:noFill/>
+        </p:spPr>
+        <p:txBody>
+          <a:bodyPr wrap="square">
+            <a:spAutoFit/>
+          </a:bodyPr>
+          <a:lstStyle/>
+          <a:p>
+            <a:pPr algn="l">
+              <a:lnSpc>
+                <a:spcPct val="120000"/>
+              </a:lnSpc>
+              <a:spcBef>
+                <a:spcPts val="0"/>
+              </a:spcBef>
+              <a:spcAft>
+                <a:spcPts val="0"/>
+              </a:spcAft>
+              <a:defRPr sz="1200" b="0">
+                <a:solidFill>
+                  <a:srgbClr val="6B6860"/>
+                </a:solidFill>
+                <a:latin typeface="Calibri"/>
+              </a:defRPr>
+            </a:pPr>
+            <a:r>
+              <a:t>Founder · Product &amp; architecture</a:t>
+            </a:r>
+          </a:p>
+        </p:txBody>
+      </p:sp>
+      <p:sp>
+        <p:nvSpPr>
+          <p:cNvPr id="8" name="TextBox 7"/>
+          <p:cNvSpPr txBox="1"/>
+          <p:nvPr/>
+        </p:nvSpPr>
+        <p:spPr>
+          <a:xfrm>
+            <a:off x="7132320" y="4114800"/>
+            <a:ext cx="4114800" cy="274320"/>
+          </a:xfrm>
+          <a:prstGeom prst="rect">
+            <a:avLst/>
+          </a:prstGeom>
+          <a:noFill/>
+        </p:spPr>
+        <p:txBody>
+          <a:bodyPr wrap="square">
+            <a:spAutoFit/>
+          </a:bodyPr>
+          <a:lstStyle/>
+          <a:p>
+            <a:pPr algn="l">
+              <a:lnSpc>
+                <a:spcPct val="120000"/>
+              </a:lnSpc>
+              <a:spcBef>
+                <a:spcPts val="0"/>
+              </a:spcBef>
+              <a:spcAft>
+                <a:spcPts val="0"/>
+              </a:spcAft>
+              <a:defRPr sz="1400" b="1">
+                <a:solidFill>
+                  <a:srgbClr val="2C2A26"/>
+                </a:solidFill>
+                <a:latin typeface="Calibri"/>
+              </a:defRPr>
+            </a:pPr>
+            <a:r>
+              <a:t>Jon Bo</a:t>
+            </a:r>
+          </a:p>
+        </p:txBody>
+      </p:sp>
+      <p:sp>
+        <p:nvSpPr>
+          <p:cNvPr id="9" name="TextBox 8"/>
+          <p:cNvSpPr txBox="1"/>
+          <p:nvPr/>
+        </p:nvSpPr>
+        <p:spPr>
+          <a:xfrm>
+            <a:off x="7132320" y="4370832"/>
+            <a:ext cx="4114800" cy="274320"/>
+          </a:xfrm>
+          <a:prstGeom prst="rect">
+            <a:avLst/>
+          </a:prstGeom>
+          <a:noFill/>
+        </p:spPr>
+        <p:txBody>
+          <a:bodyPr wrap="square">
+            <a:spAutoFit/>
+          </a:bodyPr>
+          <a:lstStyle/>
+          <a:p>
+            <a:pPr algn="l">
+              <a:lnSpc>
+                <a:spcPct val="120000"/>
+              </a:lnSpc>
+              <a:spcBef>
+                <a:spcPts val="0"/>
+              </a:spcBef>
+              <a:spcAft>
+                <a:spcPts val="0"/>
+              </a:spcAft>
+              <a:defRPr sz="1200" b="0">
+                <a:solidFill>
+                  <a:srgbClr val="6B6860"/>
+                </a:solidFill>
+                <a:latin typeface="Calibri"/>
+              </a:defRPr>
+            </a:pPr>
+            <a:r>
+              <a:t>Daily co-lead · Founding engineer</a:t>
+            </a:r>
+          </a:p>
+        </p:txBody>
+      </p:sp>
+      <p:sp>
+        <p:nvSpPr>
+          <p:cNvPr id="10" name="TextBox 9"/>
+          <p:cNvSpPr txBox="1"/>
+          <p:nvPr/>
+        </p:nvSpPr>
+        <p:spPr>
+          <a:xfrm>
+            <a:off x="7132320" y="4663440"/>
+            <a:ext cx="4114800" cy="274320"/>
+          </a:xfrm>
+          <a:prstGeom prst="rect">
+            <a:avLst/>
+          </a:prstGeom>
+          <a:noFill/>
+        </p:spPr>
+        <p:txBody>
+          <a:bodyPr wrap="square">
+            <a:spAutoFit/>
+          </a:bodyPr>
+          <a:lstStyle/>
+          <a:p>
+            <a:pPr algn="l">
+              <a:lnSpc>
+                <a:spcPct val="120000"/>
+              </a:lnSpc>
+              <a:spcBef>
+                <a:spcPts val="0"/>
+              </a:spcBef>
+              <a:spcAft>
+                <a:spcPts val="0"/>
+              </a:spcAft>
+              <a:defRPr sz="1400" b="1">
+                <a:solidFill>
+                  <a:srgbClr val="2C2A26"/>
+                </a:solidFill>
+                <a:latin typeface="Calibri"/>
+              </a:defRPr>
+            </a:pPr>
+            <a:r>
+              <a:t>Lucian Hymer</a:t>
+            </a:r>
+          </a:p>
+        </p:txBody>
+      </p:sp>
+      <p:sp>
+        <p:nvSpPr>
+          <p:cNvPr id="11" name="TextBox 10"/>
+          <p:cNvSpPr txBox="1"/>
+          <p:nvPr/>
+        </p:nvSpPr>
+        <p:spPr>
+          <a:xfrm>
+            <a:off x="7132320" y="4919472"/>
+            <a:ext cx="4114800" cy="274320"/>
+          </a:xfrm>
+          <a:prstGeom prst="rect">
+            <a:avLst/>
+          </a:prstGeom>
+          <a:noFill/>
+        </p:spPr>
+        <p:txBody>
+          <a:bodyPr wrap="square">
+            <a:spAutoFit/>
+          </a:bodyPr>
+          <a:lstStyle/>
+          <a:p>
+            <a:pPr algn="l">
+              <a:lnSpc>
+                <a:spcPct val="120000"/>
+              </a:lnSpc>
+              <a:spcBef>
+                <a:spcPts val="0"/>
+              </a:spcBef>
+              <a:spcAft>
+                <a:spcPts val="0"/>
+              </a:spcAft>
+              <a:defRPr sz="1200" b="0">
+                <a:solidFill>
+                  <a:srgbClr val="6B6860"/>
+                </a:solidFill>
+                <a:latin typeface="Calibri"/>
+              </a:defRPr>
+            </a:pPr>
+            <a:r>
+              <a:t>Computer co-lead · Founding engineer</a:t>
+            </a:r>
+          </a:p>
+        </p:txBody>
+      </p:sp>
+      <p:sp>
+        <p:nvSpPr>
+          <p:cNvPr id="12" name="TextBox 11"/>
+          <p:cNvSpPr txBox="1"/>
+          <p:nvPr/>
+        </p:nvSpPr>
+        <p:spPr>
+          <a:xfrm>
+            <a:off x="7132320" y="5212080"/>
+            <a:ext cx="4114800" cy="274320"/>
+          </a:xfrm>
+          <a:prstGeom prst="rect">
+            <a:avLst/>
+          </a:prstGeom>
+          <a:noFill/>
+        </p:spPr>
+        <p:txBody>
+          <a:bodyPr wrap="square">
+            <a:spAutoFit/>
+          </a:bodyPr>
+          <a:lstStyle/>
+          <a:p>
+            <a:pPr algn="l">
+              <a:lnSpc>
+                <a:spcPct val="120000"/>
+              </a:lnSpc>
+              <a:spcBef>
+                <a:spcPts val="0"/>
+              </a:spcBef>
+              <a:spcAft>
+                <a:spcPts val="0"/>
+              </a:spcAft>
+              <a:defRPr sz="1400" b="1">
+                <a:solidFill>
+                  <a:srgbClr val="2C2A26"/>
+                </a:solidFill>
+                <a:latin typeface="Calibri"/>
+              </a:defRPr>
+            </a:pPr>
+            <a:r>
+              <a:t>Marvin Melzer</a:t>
+            </a:r>
+          </a:p>
+        </p:txBody>
+      </p:sp>
+      <p:sp>
+        <p:nvSpPr>
+          <p:cNvPr id="13" name="TextBox 12"/>
+          <p:cNvSpPr txBox="1"/>
+          <p:nvPr/>
+        </p:nvSpPr>
+        <p:spPr>
+          <a:xfrm>
+            <a:off x="7132320" y="5468112"/>
+            <a:ext cx="4114800" cy="274320"/>
+          </a:xfrm>
+          <a:prstGeom prst="rect">
+            <a:avLst/>
+          </a:prstGeom>
+          <a:noFill/>
+        </p:spPr>
+        <p:txBody>
+          <a:bodyPr wrap="square">
+            <a:spAutoFit/>
+          </a:bodyPr>
+          <a:lstStyle/>
+          <a:p>
+            <a:pPr algn="l">
+              <a:lnSpc>
+                <a:spcPct val="120000"/>
+              </a:lnSpc>
+              <a:spcBef>
+                <a:spcPts val="0"/>
+              </a:spcBef>
+              <a:spcAft>
+                <a:spcPts val="0"/>
+              </a:spcAft>
+              <a:defRPr sz="1200" b="0">
+                <a:solidFill>
+                  <a:srgbClr val="6B6860"/>
+                </a:solidFill>
+                <a:latin typeface="Calibri"/>
+              </a:defRPr>
+            </a:pPr>
+            <a:r>
+              <a:t>Hardware · Pendant prototype</a:t>
+            </a:r>
+          </a:p>
+        </p:txBody>
+      </p:sp>
+      <p:sp>
+        <p:nvSpPr>
+          <p:cNvPr id="14" name="TextBox 13"/>
+          <p:cNvSpPr txBox="1"/>
+          <p:nvPr/>
+        </p:nvSpPr>
+        <p:spPr>
+          <a:xfrm>
+            <a:off x="7132320" y="5760720"/>
+            <a:ext cx="4114800" cy="274320"/>
+          </a:xfrm>
+          <a:prstGeom prst="rect">
+            <a:avLst/>
+          </a:prstGeom>
+          <a:noFill/>
+        </p:spPr>
+        <p:txBody>
+          <a:bodyPr wrap="square">
+            <a:spAutoFit/>
+          </a:bodyPr>
+          <a:lstStyle/>
+          <a:p>
+            <a:pPr algn="l">
+              <a:lnSpc>
+                <a:spcPct val="120000"/>
+              </a:lnSpc>
+              <a:spcBef>
+                <a:spcPts val="0"/>
+              </a:spcBef>
+              <a:spcAft>
+                <a:spcPts val="0"/>
+              </a:spcAft>
+              <a:defRPr sz="1400" b="1">
+                <a:solidFill>
+                  <a:srgbClr val="2C2A26"/>
+                </a:solidFill>
+                <a:latin typeface="Calibri"/>
+              </a:defRPr>
+            </a:pPr>
+            <a:r>
+              <a:t>Neil Yarnal</a:t>
+            </a:r>
+          </a:p>
+        </p:txBody>
+      </p:sp>
+      <p:sp>
+        <p:nvSpPr>
+          <p:cNvPr id="15" name="TextBox 14"/>
+          <p:cNvSpPr txBox="1"/>
+          <p:nvPr/>
+        </p:nvSpPr>
+        <p:spPr>
+          <a:xfrm>
+            <a:off x="7132320" y="6016752"/>
+            <a:ext cx="4114800" cy="274320"/>
+          </a:xfrm>
+          <a:prstGeom prst="rect">
+            <a:avLst/>
+          </a:prstGeom>
+          <a:noFill/>
+        </p:spPr>
+        <p:txBody>
+          <a:bodyPr wrap="square">
+            <a:spAutoFit/>
+          </a:bodyPr>
+          <a:lstStyle/>
+          <a:p>
+            <a:pPr algn="l">
+              <a:lnSpc>
+                <a:spcPct val="120000"/>
+              </a:lnSpc>
+              <a:spcBef>
+                <a:spcPts val="0"/>
+              </a:spcBef>
+              <a:spcAft>
+                <a:spcPts val="0"/>
+              </a:spcAft>
+              <a:defRPr sz="1200" b="0">
+                <a:solidFill>
+                  <a:srgbClr val="6B6860"/>
+                </a:solidFill>
+                <a:latin typeface="Calibri"/>
+              </a:defRPr>
+            </a:pPr>
+            <a:r>
+              <a:t>Brand &amp; design</a:t>
+            </a:r>
+          </a:p>
+        </p:txBody>
+      </p:sp>
+    </p:spTree>
+  </p:cSld>
+  <p:clrMapOvr>
+    <a:masterClrMapping/>
+  </p:clrMapOvr>
+</p:sld>
+</file>
+
 <file path=ppt/theme/theme1.xml><?xml version="1.0" encoding="utf-8"?>
 <a:theme xmlns:a="http://schemas.openxmlformats.org/drawingml/2006/main" name="Office Theme">
   <a:themeElements>

--- a/nvc-pitch-deck.pptx
+++ b/nvc-pitch-deck.pptx
@@ -3159,7 +3159,7 @@
         </p:nvSpPr>
         <p:spPr>
           <a:xfrm>
-            <a:off x="1097280" y="1828800"/>
+            <a:off x="1097280" y="1645920"/>
             <a:ext cx="9144000" cy="2286000"/>
           </a:xfrm>
           <a:prstGeom prst="rect">
@@ -3183,7 +3183,7 @@
               <a:spcAft>
                 <a:spcPts val="0"/>
               </a:spcAft>
-              <a:defRPr sz="4800" b="0">
+              <a:defRPr sz="4600" b="0">
                 <a:solidFill>
                   <a:srgbClr val="2C2A26"/>
                 </a:solidFill>
@@ -3191,15 +3191,19 @@
               </a:defRPr>
             </a:pPr>
             <a:r>
-              <a:t>Technology should help us</a:t>
+              <a:t>The most powerful technologies</a:t>
             </a:r>
             <a:br/>
             <a:r>
-              <a:t>live fully — not demand</a:t>
+              <a:t>in a generation are emerging.</a:t>
             </a:r>
             <a:br/>
             <a:r>
-              <a:t>we stop living to use it.</a:t>
+              <a:t>Balance and choice should be</a:t>
+            </a:r>
+            <a:br/>
+            <a:r>
+              <a:t>built in from the start.</a:t>
             </a:r>
           </a:p>
         </p:txBody>
@@ -3256,7 +3260,7 @@
             </a:r>
             <a:br/>
             <a:r>
-              <a:t>We shouldn't have to choose.</a:t>
+              <a:t>Technology should support both.</a:t>
             </a:r>
           </a:p>
         </p:txBody>
@@ -3821,7 +3825,7 @@
                         </a:defRPr>
                       </a:pPr>
                       <a:r>
-                        <a:t>~$5/mo</a:t>
+                        <a:t>~$10/mo</a:t>
                       </a:r>
                     </a:p>
                   </a:txBody>
@@ -3845,7 +3849,7 @@
                         </a:defRPr>
                       </a:pPr>
                       <a:r>
-                        <a:t>~$7/mo</a:t>
+                        <a:t>~$12/mo</a:t>
                       </a:r>
                     </a:p>
                   </a:txBody>
@@ -3869,7 +3873,7 @@
                         </a:defRPr>
                       </a:pPr>
                       <a:r>
-                        <a:t>~$8/mo</a:t>
+                        <a:t>~$14/mo</a:t>
                       </a:r>
                     </a:p>
                   </a:txBody>
@@ -3919,7 +3923,7 @@
                         </a:defRPr>
                       </a:pPr>
                       <a:r>
-                        <a:t>~$2,500</a:t>
+                        <a:t>~$5,000</a:t>
                       </a:r>
                     </a:p>
                   </a:txBody>
@@ -3943,7 +3947,7 @@
                         </a:defRPr>
                       </a:pPr>
                       <a:r>
-                        <a:t>~$35,000</a:t>
+                        <a:t>~$60,000</a:t>
                       </a:r>
                     </a:p>
                   </a:txBody>
@@ -3967,7 +3971,7 @@
                         </a:defRPr>
                       </a:pPr>
                       <a:r>
-                        <a:t>~$200,000</a:t>
+                        <a:t>~$350,000</a:t>
                       </a:r>
                     </a:p>
                   </a:txBody>
@@ -4017,7 +4021,7 @@
                         </a:defRPr>
                       </a:pPr>
                       <a:r>
-                        <a:t>~$30K</a:t>
+                        <a:t>~$60K</a:t>
                       </a:r>
                     </a:p>
                   </a:txBody>
@@ -4041,7 +4045,7 @@
                         </a:defRPr>
                       </a:pPr>
                       <a:r>
-                        <a:t>~$420K</a:t>
+                        <a:t>~$720K</a:t>
                       </a:r>
                     </a:p>
                   </a:txBody>
@@ -4065,7 +4069,7 @@
                         </a:defRPr>
                       </a:pPr>
                       <a:r>
-                        <a:t>~$2.4M</a:t>
+                        <a:t>~$4.2M</a:t>
                       </a:r>
                     </a:p>
                   </a:txBody>
@@ -4825,7 +4829,7 @@
           <a:p>
             <a:pPr algn="l">
               <a:lnSpc>
-                <a:spcPct val="120000"/>
+                <a:spcPct val="130000"/>
               </a:lnSpc>
               <a:spcBef>
                 <a:spcPts val="0"/>
@@ -4841,7 +4845,11 @@
               </a:defRPr>
             </a:pPr>
             <a:r>
-              <a:t>I want everyone to be able to hike up that mountain.</a:t>
+              <a:t>Open source. Local-first.</a:t>
+            </a:r>
+            <a:br/>
+            <a:r>
+              <a:t>Balance and choice — from the foundation.</a:t>
             </a:r>
           </a:p>
         </p:txBody>
@@ -5051,7 +5059,7 @@
               </a:defRPr>
             </a:pPr>
             <a:r>
-              <a:t>Hundreds of millions of people already pay $20-200/month for AI tools.</a:t>
+              <a:t>Over 100 million people already pay $20+/month for AI — including 50M+ ChatGPT Pro subscribers.</a:t>
             </a:r>
             <a:br/>
             <a:r>
@@ -7512,7 +7520,7 @@
               </a:defRPr>
             </a:pPr>
             <a:r>
-              <a:t>$1-2/mo</a:t>
+              <a:t>$2/mo</a:t>
             </a:r>
           </a:p>
         </p:txBody>
@@ -7645,7 +7653,7 @@
               </a:defRPr>
             </a:pPr>
             <a:r>
-              <a:t>$5/mo</a:t>
+              <a:t>$10/mo</a:t>
             </a:r>
           </a:p>
         </p:txBody>
@@ -7690,7 +7698,7 @@
               </a:defRPr>
             </a:pPr>
             <a:r>
-              <a:t>Cloud transcription + AI reflections, synthesis, pattern surfacing</a:t>
+              <a:t>Cloud transcription + AI — reflections, synthesis, pattern surfacing</a:t>
             </a:r>
           </a:p>
         </p:txBody>
@@ -7735,7 +7743,7 @@
               </a:defRPr>
             </a:pPr>
             <a:r>
-              <a:t>$20/mo</a:t>
+              <a:t>$40/mo</a:t>
             </a:r>
           </a:p>
         </p:txBody>
@@ -7780,7 +7788,7 @@
               </a:defRPr>
             </a:pPr>
             <a:r>
-              <a:t>Hosted Parachute Computer — full agentic platform</a:t>
+              <a:t>Hosted Parachute Computer — full agentic platform with bundled AI</a:t>
             </a:r>
           </a:p>
         </p:txBody>
@@ -7829,7 +7837,7 @@
             </a:r>
             <a:br/>
             <a:r>
-              <a:t>AI at $5/mo uses cost-efficient models. Margins are real and improve as model costs drop.</a:t>
+              <a:t>AI at $10/mo uses cost-efficient models. Margins are real and improve as model costs drop.</a:t>
             </a:r>
           </a:p>
         </p:txBody>
@@ -7945,11 +7953,11 @@
               </a:defRPr>
             </a:pPr>
             <a:r>
-              <a:t>Built from zero.</a:t>
+              <a:t>Bootstrapped.</a:t>
             </a:r>
             <a:br/>
             <a:r>
-              <a:t>Solo. No funding.</a:t>
+              <a:t>Zero funding.</a:t>
             </a:r>
           </a:p>
         </p:txBody>

--- a/nvc-pitch-deck.pptx
+++ b/nvc-pitch-deck.pptx
@@ -14,8 +14,6 @@
     <p:sldId id="262" r:id="rId13"/>
     <p:sldId id="263" r:id="rId14"/>
     <p:sldId id="264" r:id="rId15"/>
-    <p:sldId id="265" r:id="rId16"/>
-    <p:sldId id="266" r:id="rId17"/>
   </p:sldIdLst>
   <p:sldSz cx="12191695" cy="6858000" type="screen4x3"/>
   <p:notesSz cx="6858000" cy="9144000"/>
@@ -3114,7 +3112,7 @@
         </p:nvSpPr>
         <p:spPr>
           <a:xfrm>
-            <a:off x="1097280" y="731520"/>
+            <a:off x="1097280" y="1097280"/>
             <a:ext cx="3657600" cy="365760"/>
           </a:xfrm>
           <a:prstGeom prst="rect">
@@ -3146,7 +3144,7 @@
               </a:defRPr>
             </a:pPr>
             <a:r>
-              <a:t>OPEN PARACHUTE, PBC</a:t>
+              <a:t>THE LANDSCAPE</a:t>
             </a:r>
           </a:p>
         </p:txBody>
@@ -3159,8 +3157,8 @@
         </p:nvSpPr>
         <p:spPr>
           <a:xfrm>
-            <a:off x="1097280" y="1645920"/>
-            <a:ext cx="9144000" cy="2286000"/>
+            <a:off x="1097280" y="1554480"/>
+            <a:ext cx="9144000" cy="1371600"/>
           </a:xfrm>
           <a:prstGeom prst="rect">
             <a:avLst/>
@@ -3175,7 +3173,7 @@
           <a:p>
             <a:pPr algn="l">
               <a:lnSpc>
-                <a:spcPct val="112000"/>
+                <a:spcPct val="105000"/>
               </a:lnSpc>
               <a:spcBef>
                 <a:spcPts val="0"/>
@@ -3183,7 +3181,7 @@
               <a:spcAft>
                 <a:spcPts val="0"/>
               </a:spcAft>
-              <a:defRPr sz="4600" b="0">
+              <a:defRPr sz="4000" b="0">
                 <a:solidFill>
                   <a:srgbClr val="2C2A26"/>
                 </a:solidFill>
@@ -3191,19 +3189,11 @@
               </a:defRPr>
             </a:pPr>
             <a:r>
-              <a:t>The most powerful technologies</a:t>
+              <a:t>Everyone is building</a:t>
             </a:r>
             <a:br/>
             <a:r>
-              <a:t>in a generation are emerging.</a:t>
-            </a:r>
-            <a:br/>
-            <a:r>
-              <a:t>Balance and choice should be</a:t>
-            </a:r>
-            <a:br/>
-            <a:r>
-              <a:t>built in from the start.</a:t>
+              <a:t>personal AI computers.</a:t>
             </a:r>
           </a:p>
         </p:txBody>
@@ -3216,8 +3206,8 @@
         </p:nvSpPr>
         <p:spPr>
           <a:xfrm>
-            <a:off x="1097280" y="4389120"/>
-            <a:ext cx="7315200" cy="914400"/>
+            <a:off x="1097280" y="3200400"/>
+            <a:ext cx="9144000" cy="914400"/>
           </a:xfrm>
           <a:prstGeom prst="rect">
             <a:avLst/>
@@ -3240,7 +3230,7 @@
               <a:spcAft>
                 <a:spcPts val="0"/>
               </a:spcAft>
-              <a:defRPr sz="2000" b="0">
+              <a:defRPr sz="1800" b="0">
                 <a:solidFill>
                   <a:srgbClr val="6B6860"/>
                 </a:solidFill>
@@ -3248,19 +3238,11 @@
               </a:defRPr>
             </a:pPr>
             <a:r>
-              <a:t>I want to hike up a mountain, share my ideas as I walk,</a:t>
+              <a:t>Over 100 million people already pay $20+/month for AI.</a:t>
             </a:r>
             <a:br/>
             <a:r>
-              <a:t>and come back down to a working app.</a:t>
-            </a:r>
-            <a:br/>
-            <a:r>
-              <a:t>But I also want to hold my nephew. Be outside. Live a full life.</a:t>
-            </a:r>
-            <a:br/>
-            <a:r>
-              <a:t>Technology should support both.</a:t>
+              <a:t>OpenClaw. Claude Cowork. ZoComputer. Perplexity Computer. Manus.</a:t>
             </a:r>
           </a:p>
         </p:txBody>
@@ -3273,8 +3255,8 @@
         </p:nvSpPr>
         <p:spPr>
           <a:xfrm>
-            <a:off x="1097280" y="5669280"/>
-            <a:ext cx="9144000" cy="457200"/>
+            <a:off x="1097280" y="4572000"/>
+            <a:ext cx="2743200" cy="1097280"/>
           </a:xfrm>
           <a:prstGeom prst="rect">
             <a:avLst/>
@@ -3297,15 +3279,15 @@
               <a:spcAft>
                 <a:spcPts val="0"/>
               </a:spcAft>
-              <a:defRPr sz="1300" b="0">
-                <a:solidFill>
-                  <a:srgbClr val="9A9690"/>
-                </a:solidFill>
-                <a:latin typeface="Calibri"/>
+              <a:defRPr sz="6400" b="0">
+                <a:solidFill>
+                  <a:srgbClr val="4A7C59"/>
+                </a:solidFill>
+                <a:latin typeface="Georgia"/>
               </a:defRPr>
             </a:pPr>
             <a:r>
-              <a:t>MA Ecopsychology · MS Creative Technology &amp; Design (CU ATLAS) · Founding engineer ×2 · Ex-Google · 10+ years full stack</a:t>
+              <a:t>$50B+</a:t>
             </a:r>
           </a:p>
         </p:txBody>
@@ -3318,8 +3300,53 @@
         </p:nvSpPr>
         <p:spPr>
           <a:xfrm>
-            <a:off x="1097280" y="6126480"/>
-            <a:ext cx="5486400" cy="365760"/>
+            <a:off x="4114800" y="4800600"/>
+            <a:ext cx="4572000" cy="731520"/>
+          </a:xfrm>
+          <a:prstGeom prst="rect">
+            <a:avLst/>
+          </a:prstGeom>
+          <a:noFill/>
+        </p:spPr>
+        <p:txBody>
+          <a:bodyPr wrap="square">
+            <a:spAutoFit/>
+          </a:bodyPr>
+          <a:lstStyle/>
+          <a:p>
+            <a:pPr algn="l">
+              <a:lnSpc>
+                <a:spcPct val="140000"/>
+              </a:lnSpc>
+              <a:spcBef>
+                <a:spcPts val="0"/>
+              </a:spcBef>
+              <a:spcAft>
+                <a:spcPts val="0"/>
+              </a:spcAft>
+              <a:defRPr sz="1600" b="0">
+                <a:solidFill>
+                  <a:srgbClr val="6B6860"/>
+                </a:solidFill>
+                <a:latin typeface="Calibri"/>
+              </a:defRPr>
+            </a:pPr>
+            <a:r>
+              <a:t>agentic AI market by 2030 · 44% CAGR</a:t>
+            </a:r>
+          </a:p>
+        </p:txBody>
+      </p:sp>
+      <p:sp>
+        <p:nvSpPr>
+          <p:cNvPr id="7" name="TextBox 6"/>
+          <p:cNvSpPr txBox="1"/>
+          <p:nvPr/>
+        </p:nvSpPr>
+        <p:spPr>
+          <a:xfrm>
+            <a:off x="1097280" y="5760720"/>
+            <a:ext cx="9144000" cy="548640"/>
           </a:xfrm>
           <a:prstGeom prst="rect">
             <a:avLst/>
@@ -3342,15 +3369,15 @@
               <a:spcAft>
                 <a:spcPts val="0"/>
               </a:spcAft>
-              <a:defRPr sz="1200" b="0">
-                <a:solidFill>
-                  <a:srgbClr val="9A9690"/>
-                </a:solidFill>
-                <a:latin typeface="Calibri"/>
+              <a:defRPr sz="2200" b="0">
+                <a:solidFill>
+                  <a:srgbClr val="2C2A26"/>
+                </a:solidFill>
+                <a:latin typeface="Georgia"/>
               </a:defRPr>
             </a:pPr>
             <a:r>
-              <a:t>Aaron Gabriel Neyer  ·  aaron@parachute.computer  ·  Boulder, CO</a:t>
+              <a:t>But they're building walled gardens — and only for the 5% who are already power users.</a:t>
             </a:r>
           </a:p>
         </p:txBody>
@@ -3363,7 +3390,2199 @@
 </p:sld>
 </file>
 
-<file path=ppt/slides/slide10.xml><?xml version="1.0" encoding="utf-8"?>
+<file path=ppt/slides/slide2.xml><?xml version="1.0" encoding="utf-8"?>
+<p:sld xmlns:a="http://schemas.openxmlformats.org/drawingml/2006/main" xmlns:p="http://schemas.openxmlformats.org/presentationml/2006/main" xmlns:r="http://schemas.openxmlformats.org/officeDocument/2006/relationships">
+  <p:cSld>
+    <p:bg>
+      <p:bgPr>
+        <a:solidFill>
+          <a:srgbClr val="FAF8F4"/>
+        </a:solidFill>
+        <a:effectLst/>
+      </p:bgPr>
+    </p:bg>
+    <p:spTree>
+      <p:nvGrpSpPr>
+        <p:cNvPr id="1" name=""/>
+        <p:cNvGrpSpPr/>
+        <p:nvPr/>
+      </p:nvGrpSpPr>
+      <p:grpSpPr/>
+      <p:sp>
+        <p:nvSpPr>
+          <p:cNvPr id="2" name="TextBox 1"/>
+          <p:cNvSpPr txBox="1"/>
+          <p:nvPr/>
+        </p:nvSpPr>
+        <p:spPr>
+          <a:xfrm>
+            <a:off x="1097280" y="1097280"/>
+            <a:ext cx="3657600" cy="365760"/>
+          </a:xfrm>
+          <a:prstGeom prst="rect">
+            <a:avLst/>
+          </a:prstGeom>
+          <a:noFill/>
+        </p:spPr>
+        <p:txBody>
+          <a:bodyPr wrap="square">
+            <a:spAutoFit/>
+          </a:bodyPr>
+          <a:lstStyle/>
+          <a:p>
+            <a:pPr algn="l">
+              <a:lnSpc>
+                <a:spcPct val="120000"/>
+              </a:lnSpc>
+              <a:spcBef>
+                <a:spcPts val="0"/>
+              </a:spcBef>
+              <a:spcAft>
+                <a:spcPts val="0"/>
+              </a:spcAft>
+              <a:defRPr sz="1100" b="1">
+                <a:solidFill>
+                  <a:srgbClr val="4A7C59"/>
+                </a:solidFill>
+                <a:latin typeface="Calibri"/>
+              </a:defRPr>
+            </a:pPr>
+            <a:r>
+              <a:t>THE OPPORTUNITY</a:t>
+            </a:r>
+          </a:p>
+        </p:txBody>
+      </p:sp>
+      <p:sp>
+        <p:nvSpPr>
+          <p:cNvPr id="3" name="TextBox 2"/>
+          <p:cNvSpPr txBox="1"/>
+          <p:nvPr/>
+        </p:nvSpPr>
+        <p:spPr>
+          <a:xfrm>
+            <a:off x="1097280" y="1554480"/>
+            <a:ext cx="9144000" cy="1371600"/>
+          </a:xfrm>
+          <a:prstGeom prst="rect">
+            <a:avLst/>
+          </a:prstGeom>
+          <a:noFill/>
+        </p:spPr>
+        <p:txBody>
+          <a:bodyPr wrap="square">
+            <a:spAutoFit/>
+          </a:bodyPr>
+          <a:lstStyle/>
+          <a:p>
+            <a:pPr algn="l">
+              <a:lnSpc>
+                <a:spcPct val="105000"/>
+              </a:lnSpc>
+              <a:spcBef>
+                <a:spcPts val="0"/>
+              </a:spcBef>
+              <a:spcAft>
+                <a:spcPts val="0"/>
+              </a:spcAft>
+              <a:defRPr sz="4000" b="0">
+                <a:solidFill>
+                  <a:srgbClr val="2C2A26"/>
+                </a:solidFill>
+                <a:latin typeface="Georgia"/>
+              </a:defRPr>
+            </a:pPr>
+            <a:r>
+              <a:t>The other 95% just want</a:t>
+            </a:r>
+            <a:br/>
+            <a:r>
+              <a:t>something that works.</a:t>
+            </a:r>
+          </a:p>
+        </p:txBody>
+      </p:sp>
+      <p:sp>
+        <p:nvSpPr>
+          <p:cNvPr id="4" name="TextBox 3"/>
+          <p:cNvSpPr txBox="1"/>
+          <p:nvPr/>
+        </p:nvSpPr>
+        <p:spPr>
+          <a:xfrm>
+            <a:off x="1097280" y="3200400"/>
+            <a:ext cx="9144000" cy="1371600"/>
+          </a:xfrm>
+          <a:prstGeom prst="rect">
+            <a:avLst/>
+          </a:prstGeom>
+          <a:noFill/>
+        </p:spPr>
+        <p:txBody>
+          <a:bodyPr wrap="square">
+            <a:spAutoFit/>
+          </a:bodyPr>
+          <a:lstStyle/>
+          <a:p>
+            <a:pPr algn="l">
+              <a:lnSpc>
+                <a:spcPct val="160000"/>
+              </a:lnSpc>
+              <a:spcBef>
+                <a:spcPts val="0"/>
+              </a:spcBef>
+              <a:spcAft>
+                <a:spcPts val="0"/>
+              </a:spcAft>
+              <a:defRPr sz="2200" b="0">
+                <a:solidFill>
+                  <a:srgbClr val="6B6860"/>
+                </a:solidFill>
+                <a:latin typeface="Georgia"/>
+              </a:defRPr>
+            </a:pPr>
+            <a:r>
+              <a:t>The artist who wants to organize creative ideas.</a:t>
+            </a:r>
+            <a:br/>
+            <a:r>
+              <a:t>The small business owner tracking their days.</a:t>
+            </a:r>
+            <a:br/>
+            <a:r>
+              <a:t>The parent who wants a better way to remember and reflect.</a:t>
+            </a:r>
+          </a:p>
+        </p:txBody>
+      </p:sp>
+      <p:sp>
+        <p:nvSpPr>
+          <p:cNvPr id="5" name="TextBox 4"/>
+          <p:cNvSpPr txBox="1"/>
+          <p:nvPr/>
+        </p:nvSpPr>
+        <p:spPr>
+          <a:xfrm>
+            <a:off x="1097280" y="5212080"/>
+            <a:ext cx="9144000" cy="914400"/>
+          </a:xfrm>
+          <a:prstGeom prst="rect">
+            <a:avLst/>
+          </a:prstGeom>
+          <a:noFill/>
+        </p:spPr>
+        <p:txBody>
+          <a:bodyPr wrap="square">
+            <a:spAutoFit/>
+          </a:bodyPr>
+          <a:lstStyle/>
+          <a:p>
+            <a:pPr algn="l">
+              <a:lnSpc>
+                <a:spcPct val="150000"/>
+              </a:lnSpc>
+              <a:spcBef>
+                <a:spcPts val="0"/>
+              </a:spcBef>
+              <a:spcAft>
+                <a:spcPts val="0"/>
+              </a:spcAft>
+              <a:defRPr sz="2200" b="0">
+                <a:solidFill>
+                  <a:srgbClr val="2C2A26"/>
+                </a:solidFill>
+                <a:latin typeface="Georgia"/>
+              </a:defRPr>
+            </a:pPr>
+            <a:r>
+              <a:t>They need a system that learns them —</a:t>
+            </a:r>
+            <a:br/>
+            <a:r>
+              <a:t>not one that demands they learn it.</a:t>
+            </a:r>
+          </a:p>
+        </p:txBody>
+      </p:sp>
+    </p:spTree>
+  </p:cSld>
+  <p:clrMapOvr>
+    <a:masterClrMapping/>
+  </p:clrMapOvr>
+</p:sld>
+</file>
+
+<file path=ppt/slides/slide3.xml><?xml version="1.0" encoding="utf-8"?>
+<p:sld xmlns:a="http://schemas.openxmlformats.org/drawingml/2006/main" xmlns:p="http://schemas.openxmlformats.org/presentationml/2006/main" xmlns:r="http://schemas.openxmlformats.org/officeDocument/2006/relationships">
+  <p:cSld>
+    <p:bg>
+      <p:bgPr>
+        <a:solidFill>
+          <a:srgbClr val="FAF8F4"/>
+        </a:solidFill>
+        <a:effectLst/>
+      </p:bgPr>
+    </p:bg>
+    <p:spTree>
+      <p:nvGrpSpPr>
+        <p:cNvPr id="1" name=""/>
+        <p:cNvGrpSpPr/>
+        <p:nvPr/>
+      </p:nvGrpSpPr>
+      <p:grpSpPr/>
+      <p:sp>
+        <p:nvSpPr>
+          <p:cNvPr id="2" name="TextBox 1"/>
+          <p:cNvSpPr txBox="1"/>
+          <p:nvPr/>
+        </p:nvSpPr>
+        <p:spPr>
+          <a:xfrm>
+            <a:off x="1097280" y="1097280"/>
+            <a:ext cx="3657600" cy="365760"/>
+          </a:xfrm>
+          <a:prstGeom prst="rect">
+            <a:avLst/>
+          </a:prstGeom>
+          <a:noFill/>
+        </p:spPr>
+        <p:txBody>
+          <a:bodyPr wrap="square">
+            <a:spAutoFit/>
+          </a:bodyPr>
+          <a:lstStyle/>
+          <a:p>
+            <a:pPr algn="l">
+              <a:lnSpc>
+                <a:spcPct val="120000"/>
+              </a:lnSpc>
+              <a:spcBef>
+                <a:spcPts val="0"/>
+              </a:spcBef>
+              <a:spcAft>
+                <a:spcPts val="0"/>
+              </a:spcAft>
+              <a:defRPr sz="1100" b="1">
+                <a:solidFill>
+                  <a:srgbClr val="4A7C59"/>
+                </a:solidFill>
+                <a:latin typeface="Calibri"/>
+              </a:defRPr>
+            </a:pPr>
+            <a:r>
+              <a:t>OUR ANSWER</a:t>
+            </a:r>
+          </a:p>
+        </p:txBody>
+      </p:sp>
+      <p:sp>
+        <p:nvSpPr>
+          <p:cNvPr id="3" name="TextBox 2"/>
+          <p:cNvSpPr txBox="1"/>
+          <p:nvPr/>
+        </p:nvSpPr>
+        <p:spPr>
+          <a:xfrm>
+            <a:off x="1097280" y="1554480"/>
+            <a:ext cx="9144000" cy="1371600"/>
+          </a:xfrm>
+          <a:prstGeom prst="rect">
+            <a:avLst/>
+          </a:prstGeom>
+          <a:noFill/>
+        </p:spPr>
+        <p:txBody>
+          <a:bodyPr wrap="square">
+            <a:spAutoFit/>
+          </a:bodyPr>
+          <a:lstStyle/>
+          <a:p>
+            <a:pPr algn="l">
+              <a:lnSpc>
+                <a:spcPct val="105000"/>
+              </a:lnSpc>
+              <a:spcBef>
+                <a:spcPts val="0"/>
+              </a:spcBef>
+              <a:spcAft>
+                <a:spcPts val="0"/>
+              </a:spcAft>
+              <a:defRPr sz="4000" b="0">
+                <a:solidFill>
+                  <a:srgbClr val="2C2A26"/>
+                </a:solidFill>
+                <a:latin typeface="Georgia"/>
+              </a:defRPr>
+            </a:pPr>
+            <a:r>
+              <a:t>Parachute Computer.</a:t>
+            </a:r>
+            <a:br/>
+            <a:r>
+              <a:t>The personal AI you can trust.</a:t>
+            </a:r>
+          </a:p>
+        </p:txBody>
+      </p:sp>
+      <p:sp>
+        <p:nvSpPr>
+          <p:cNvPr id="4" name="TextBox 3"/>
+          <p:cNvSpPr txBox="1"/>
+          <p:nvPr/>
+        </p:nvSpPr>
+        <p:spPr>
+          <a:xfrm>
+            <a:off x="1371600" y="3200400"/>
+            <a:ext cx="8229600" cy="365760"/>
+          </a:xfrm>
+          <a:prstGeom prst="rect">
+            <a:avLst/>
+          </a:prstGeom>
+          <a:noFill/>
+        </p:spPr>
+        <p:txBody>
+          <a:bodyPr wrap="square">
+            <a:spAutoFit/>
+          </a:bodyPr>
+          <a:lstStyle/>
+          <a:p>
+            <a:pPr algn="l">
+              <a:lnSpc>
+                <a:spcPct val="130000"/>
+              </a:lnSpc>
+              <a:spcBef>
+                <a:spcPts val="0"/>
+              </a:spcBef>
+              <a:spcAft>
+                <a:spcPts val="0"/>
+              </a:spcAft>
+              <a:defRPr sz="1800" b="0">
+                <a:solidFill>
+                  <a:srgbClr val="6B6860"/>
+                </a:solidFill>
+                <a:latin typeface="Calibri"/>
+              </a:defRPr>
+            </a:pPr>
+            <a:r>
+              <a:t>·   Open source (AGPL-3.0) · local-first · self-hostable</a:t>
+            </a:r>
+          </a:p>
+        </p:txBody>
+      </p:sp>
+      <p:sp>
+        <p:nvSpPr>
+          <p:cNvPr id="5" name="TextBox 4"/>
+          <p:cNvSpPr txBox="1"/>
+          <p:nvPr/>
+        </p:nvSpPr>
+        <p:spPr>
+          <a:xfrm>
+            <a:off x="1371600" y="3703320"/>
+            <a:ext cx="8229600" cy="365760"/>
+          </a:xfrm>
+          <a:prstGeom prst="rect">
+            <a:avLst/>
+          </a:prstGeom>
+          <a:noFill/>
+        </p:spPr>
+        <p:txBody>
+          <a:bodyPr wrap="square">
+            <a:spAutoFit/>
+          </a:bodyPr>
+          <a:lstStyle/>
+          <a:p>
+            <a:pPr algn="l">
+              <a:lnSpc>
+                <a:spcPct val="130000"/>
+              </a:lnSpc>
+              <a:spcBef>
+                <a:spcPts val="0"/>
+              </a:spcBef>
+              <a:spcAft>
+                <a:spcPts val="0"/>
+              </a:spcAft>
+              <a:defRPr sz="1800" b="0">
+                <a:solidFill>
+                  <a:srgbClr val="6B6860"/>
+                </a:solidFill>
+                <a:latin typeface="Calibri"/>
+              </a:defRPr>
+            </a:pPr>
+            <a:r>
+              <a:t>·   Your data stays on your device — portable and exportable</a:t>
+            </a:r>
+          </a:p>
+        </p:txBody>
+      </p:sp>
+      <p:sp>
+        <p:nvSpPr>
+          <p:cNvPr id="6" name="TextBox 5"/>
+          <p:cNvSpPr txBox="1"/>
+          <p:nvPr/>
+        </p:nvSpPr>
+        <p:spPr>
+          <a:xfrm>
+            <a:off x="1371600" y="4206240"/>
+            <a:ext cx="8229600" cy="365760"/>
+          </a:xfrm>
+          <a:prstGeom prst="rect">
+            <a:avLst/>
+          </a:prstGeom>
+          <a:noFill/>
+        </p:spPr>
+        <p:txBody>
+          <a:bodyPr wrap="square">
+            <a:spAutoFit/>
+          </a:bodyPr>
+          <a:lstStyle/>
+          <a:p>
+            <a:pPr algn="l">
+              <a:lnSpc>
+                <a:spcPct val="130000"/>
+              </a:lnSpc>
+              <a:spcBef>
+                <a:spcPts val="0"/>
+              </a:spcBef>
+              <a:spcAft>
+                <a:spcPts val="0"/>
+              </a:spcAft>
+              <a:defRPr sz="1800" b="0">
+                <a:solidFill>
+                  <a:srgbClr val="6B6860"/>
+                </a:solidFill>
+                <a:latin typeface="Calibri"/>
+              </a:defRPr>
+            </a:pPr>
+            <a:r>
+              <a:t>·   Knowledge graph connects your journals, conversations, and thinking</a:t>
+            </a:r>
+          </a:p>
+        </p:txBody>
+      </p:sp>
+      <p:sp>
+        <p:nvSpPr>
+          <p:cNvPr id="7" name="TextBox 6"/>
+          <p:cNvSpPr txBox="1"/>
+          <p:nvPr/>
+        </p:nvSpPr>
+        <p:spPr>
+          <a:xfrm>
+            <a:off x="1371600" y="4709160"/>
+            <a:ext cx="8229600" cy="365760"/>
+          </a:xfrm>
+          <a:prstGeom prst="rect">
+            <a:avLst/>
+          </a:prstGeom>
+          <a:noFill/>
+        </p:spPr>
+        <p:txBody>
+          <a:bodyPr wrap="square">
+            <a:spAutoFit/>
+          </a:bodyPr>
+          <a:lstStyle/>
+          <a:p>
+            <a:pPr algn="l">
+              <a:lnSpc>
+                <a:spcPct val="130000"/>
+              </a:lnSpc>
+              <a:spcBef>
+                <a:spcPts val="0"/>
+              </a:spcBef>
+              <a:spcAft>
+                <a:spcPts val="0"/>
+              </a:spcAft>
+              <a:defRPr sz="1800" b="0">
+                <a:solidFill>
+                  <a:srgbClr val="6B6860"/>
+                </a:solidFill>
+                <a:latin typeface="Calibri"/>
+              </a:defRPr>
+            </a:pPr>
+            <a:r>
+              <a:t>·   Public Benefit Corporation — legally mandated to serve users</a:t>
+            </a:r>
+          </a:p>
+        </p:txBody>
+      </p:sp>
+      <p:sp>
+        <p:nvSpPr>
+          <p:cNvPr id="8" name="TextBox 7"/>
+          <p:cNvSpPr txBox="1"/>
+          <p:nvPr/>
+        </p:nvSpPr>
+        <p:spPr>
+          <a:xfrm>
+            <a:off x="1097280" y="5303520"/>
+            <a:ext cx="9144000" cy="731520"/>
+          </a:xfrm>
+          <a:prstGeom prst="rect">
+            <a:avLst/>
+          </a:prstGeom>
+          <a:noFill/>
+        </p:spPr>
+        <p:txBody>
+          <a:bodyPr wrap="square">
+            <a:spAutoFit/>
+          </a:bodyPr>
+          <a:lstStyle/>
+          <a:p>
+            <a:pPr algn="l">
+              <a:lnSpc>
+                <a:spcPct val="130000"/>
+              </a:lnSpc>
+              <a:spcBef>
+                <a:spcPts val="0"/>
+              </a:spcBef>
+              <a:spcAft>
+                <a:spcPts val="0"/>
+              </a:spcAft>
+              <a:defRPr sz="2200" b="0">
+                <a:solidFill>
+                  <a:srgbClr val="2C2A26"/>
+                </a:solidFill>
+                <a:latin typeface="Georgia"/>
+              </a:defRPr>
+            </a:pPr>
+            <a:r>
+              <a:t>Software gets cloned in a day.</a:t>
+            </a:r>
+            <a:br/>
+            <a:r>
+              <a:t>Trust and context cannot.</a:t>
+            </a:r>
+          </a:p>
+        </p:txBody>
+      </p:sp>
+      <p:sp>
+        <p:nvSpPr>
+          <p:cNvPr id="9" name="TextBox 8"/>
+          <p:cNvSpPr txBox="1"/>
+          <p:nvPr/>
+        </p:nvSpPr>
+        <p:spPr>
+          <a:xfrm>
+            <a:off x="1097280" y="6035040"/>
+            <a:ext cx="9144000" cy="457200"/>
+          </a:xfrm>
+          <a:prstGeom prst="rect">
+            <a:avLst/>
+          </a:prstGeom>
+          <a:noFill/>
+        </p:spPr>
+        <p:txBody>
+          <a:bodyPr wrap="square">
+            <a:spAutoFit/>
+          </a:bodyPr>
+          <a:lstStyle/>
+          <a:p>
+            <a:pPr algn="l">
+              <a:lnSpc>
+                <a:spcPct val="120000"/>
+              </a:lnSpc>
+              <a:spcBef>
+                <a:spcPts val="0"/>
+              </a:spcBef>
+              <a:spcAft>
+                <a:spcPts val="0"/>
+              </a:spcAft>
+              <a:defRPr sz="1800" b="0">
+                <a:solidFill>
+                  <a:srgbClr val="6B6860"/>
+                </a:solidFill>
+                <a:latin typeface="Georgia"/>
+              </a:defRPr>
+            </a:pPr>
+            <a:r>
+              <a:t>But most people don't want to self-host a server.</a:t>
+            </a:r>
+          </a:p>
+        </p:txBody>
+      </p:sp>
+    </p:spTree>
+  </p:cSld>
+  <p:clrMapOvr>
+    <a:masterClrMapping/>
+  </p:clrMapOvr>
+</p:sld>
+</file>
+
+<file path=ppt/slides/slide4.xml><?xml version="1.0" encoding="utf-8"?>
+<p:sld xmlns:a="http://schemas.openxmlformats.org/drawingml/2006/main" xmlns:p="http://schemas.openxmlformats.org/presentationml/2006/main" xmlns:r="http://schemas.openxmlformats.org/officeDocument/2006/relationships">
+  <p:cSld>
+    <p:bg>
+      <p:bgPr>
+        <a:solidFill>
+          <a:srgbClr val="FAF8F4"/>
+        </a:solidFill>
+        <a:effectLst/>
+      </p:bgPr>
+    </p:bg>
+    <p:spTree>
+      <p:nvGrpSpPr>
+        <p:cNvPr id="1" name=""/>
+        <p:cNvGrpSpPr/>
+        <p:nvPr/>
+      </p:nvGrpSpPr>
+      <p:grpSpPr/>
+      <p:sp>
+        <p:nvSpPr>
+          <p:cNvPr id="2" name="TextBox 1"/>
+          <p:cNvSpPr txBox="1"/>
+          <p:nvPr/>
+        </p:nvSpPr>
+        <p:spPr>
+          <a:xfrm>
+            <a:off x="1097280" y="1097280"/>
+            <a:ext cx="3657600" cy="365760"/>
+          </a:xfrm>
+          <a:prstGeom prst="rect">
+            <a:avLst/>
+          </a:prstGeom>
+          <a:noFill/>
+        </p:spPr>
+        <p:txBody>
+          <a:bodyPr wrap="square">
+            <a:spAutoFit/>
+          </a:bodyPr>
+          <a:lstStyle/>
+          <a:p>
+            <a:pPr algn="l">
+              <a:lnSpc>
+                <a:spcPct val="120000"/>
+              </a:lnSpc>
+              <a:spcBef>
+                <a:spcPts val="0"/>
+              </a:spcBef>
+              <a:spcAft>
+                <a:spcPts val="0"/>
+              </a:spcAft>
+              <a:defRPr sz="1100" b="1">
+                <a:solidFill>
+                  <a:srgbClr val="4A7C59"/>
+                </a:solidFill>
+                <a:latin typeface="Calibri"/>
+              </a:defRPr>
+            </a:pPr>
+            <a:r>
+              <a:t>THE BRIDGE</a:t>
+            </a:r>
+          </a:p>
+        </p:txBody>
+      </p:sp>
+      <p:sp>
+        <p:nvSpPr>
+          <p:cNvPr id="3" name="TextBox 2"/>
+          <p:cNvSpPr txBox="1"/>
+          <p:nvPr/>
+        </p:nvSpPr>
+        <p:spPr>
+          <a:xfrm>
+            <a:off x="1097280" y="1554480"/>
+            <a:ext cx="9144000" cy="1371600"/>
+          </a:xfrm>
+          <a:prstGeom prst="rect">
+            <a:avLst/>
+          </a:prstGeom>
+          <a:noFill/>
+        </p:spPr>
+        <p:txBody>
+          <a:bodyPr wrap="square">
+            <a:spAutoFit/>
+          </a:bodyPr>
+          <a:lstStyle/>
+          <a:p>
+            <a:pPr algn="l">
+              <a:lnSpc>
+                <a:spcPct val="105000"/>
+              </a:lnSpc>
+              <a:spcBef>
+                <a:spcPts val="0"/>
+              </a:spcBef>
+              <a:spcAft>
+                <a:spcPts val="0"/>
+              </a:spcAft>
+              <a:defRPr sz="4000" b="0">
+                <a:solidFill>
+                  <a:srgbClr val="2C2A26"/>
+                </a:solidFill>
+                <a:latin typeface="Georgia"/>
+              </a:defRPr>
+            </a:pPr>
+            <a:r>
+              <a:t>Parachute Daily.</a:t>
+            </a:r>
+            <a:br/>
+            <a:r>
+              <a:t>Just talk.</a:t>
+            </a:r>
+          </a:p>
+        </p:txBody>
+      </p:sp>
+      <p:sp>
+        <p:nvSpPr>
+          <p:cNvPr id="4" name="TextBox 3"/>
+          <p:cNvSpPr txBox="1"/>
+          <p:nvPr/>
+        </p:nvSpPr>
+        <p:spPr>
+          <a:xfrm>
+            <a:off x="1097280" y="3200400"/>
+            <a:ext cx="5029200" cy="2560320"/>
+          </a:xfrm>
+          <a:prstGeom prst="rect">
+            <a:avLst/>
+          </a:prstGeom>
+          <a:noFill/>
+        </p:spPr>
+        <p:txBody>
+          <a:bodyPr wrap="square">
+            <a:spAutoFit/>
+          </a:bodyPr>
+          <a:lstStyle/>
+          <a:p>
+            <a:pPr algn="l">
+              <a:lnSpc>
+                <a:spcPct val="150000"/>
+              </a:lnSpc>
+              <a:spcBef>
+                <a:spcPts val="0"/>
+              </a:spcBef>
+              <a:spcAft>
+                <a:spcPts val="0"/>
+              </a:spcAft>
+              <a:defRPr sz="1800" b="0">
+                <a:solidFill>
+                  <a:srgbClr val="6B6860"/>
+                </a:solidFill>
+                <a:latin typeface="Calibri"/>
+              </a:defRPr>
+            </a:pPr>
+            <a:r>
+              <a:t>A voice-first journal.</a:t>
+            </a:r>
+            <a:br/>
+            <a:br/>
+            <a:r>
+              <a:t>Speak into a wearable pendant or your phone —</a:t>
+            </a:r>
+            <a:br/>
+            <a:r>
+              <a:t>on a walk, in the car, wherever thinking happens.</a:t>
+            </a:r>
+            <a:br/>
+            <a:br/>
+            <a:r>
+              <a:t>AI weaves through gently:</a:t>
+            </a:r>
+            <a:br/>
+            <a:r>
+              <a:t>  ·  Daily reflections on your entries</a:t>
+            </a:r>
+            <a:br/>
+            <a:r>
+              <a:t>  ·  Pattern recognition over time</a:t>
+            </a:r>
+            <a:br/>
+            <a:r>
+              <a:t>  ·  Weekly synthesis of your thinking</a:t>
+            </a:r>
+          </a:p>
+        </p:txBody>
+      </p:sp>
+      <p:sp>
+        <p:nvSpPr>
+          <p:cNvPr id="5" name="TextBox 4"/>
+          <p:cNvSpPr txBox="1"/>
+          <p:nvPr/>
+        </p:nvSpPr>
+        <p:spPr>
+          <a:xfrm>
+            <a:off x="1097280" y="5943600"/>
+            <a:ext cx="5029200" cy="457200"/>
+          </a:xfrm>
+          <a:prstGeom prst="rect">
+            <a:avLst/>
+          </a:prstGeom>
+          <a:noFill/>
+        </p:spPr>
+        <p:txBody>
+          <a:bodyPr wrap="square">
+            <a:spAutoFit/>
+          </a:bodyPr>
+          <a:lstStyle/>
+          <a:p>
+            <a:pPr algn="l">
+              <a:lnSpc>
+                <a:spcPct val="120000"/>
+              </a:lnSpc>
+              <a:spcBef>
+                <a:spcPts val="0"/>
+              </a:spcBef>
+              <a:spcAft>
+                <a:spcPts val="0"/>
+              </a:spcAft>
+              <a:defRPr sz="1800" b="0">
+                <a:solidFill>
+                  <a:srgbClr val="2C2A26"/>
+                </a:solidFill>
+                <a:latin typeface="Calibri"/>
+              </a:defRPr>
+            </a:pPr>
+            <a:r>
+              <a:t>No learning curve. No technical sophistication required.</a:t>
+            </a:r>
+          </a:p>
+        </p:txBody>
+      </p:sp>
+      <p:sp>
+        <p:nvSpPr>
+          <p:cNvPr id="6" name="Rounded Rectangle 5"/>
+          <p:cNvSpPr/>
+          <p:nvPr/>
+        </p:nvSpPr>
+        <p:spPr>
+          <a:xfrm>
+            <a:off x="7132320" y="3200400"/>
+            <a:ext cx="4114800" cy="2743200"/>
+          </a:xfrm>
+          <a:prstGeom prst="roundRect">
+            <a:avLst/>
+          </a:prstGeom>
+          <a:solidFill>
+            <a:srgbClr val="F3F0EA"/>
+          </a:solidFill>
+          <a:ln w="12700">
+            <a:solidFill>
+              <a:srgbClr val="E4E0D8"/>
+            </a:solidFill>
+          </a:ln>
+        </p:spPr>
+        <p:style>
+          <a:lnRef idx="1">
+            <a:schemeClr val="accent1"/>
+          </a:lnRef>
+          <a:fillRef idx="3">
+            <a:schemeClr val="accent1"/>
+          </a:fillRef>
+          <a:effectRef idx="2">
+            <a:schemeClr val="accent1"/>
+          </a:effectRef>
+          <a:fontRef idx="minor">
+            <a:schemeClr val="lt1"/>
+          </a:fontRef>
+        </p:style>
+        <p:txBody>
+          <a:bodyPr rtlCol="0" anchor="ctr"/>
+          <a:lstStyle/>
+          <a:p>
+            <a:pPr algn="ctr"/>
+          </a:p>
+        </p:txBody>
+      </p:sp>
+      <p:sp>
+        <p:nvSpPr>
+          <p:cNvPr id="7" name="TextBox 6"/>
+          <p:cNvSpPr txBox="1"/>
+          <p:nvPr/>
+        </p:nvSpPr>
+        <p:spPr>
+          <a:xfrm>
+            <a:off x="7498079" y="3474720"/>
+            <a:ext cx="3383280" cy="365760"/>
+          </a:xfrm>
+          <a:prstGeom prst="rect">
+            <a:avLst/>
+          </a:prstGeom>
+          <a:noFill/>
+        </p:spPr>
+        <p:txBody>
+          <a:bodyPr wrap="square">
+            <a:spAutoFit/>
+          </a:bodyPr>
+          <a:lstStyle/>
+          <a:p>
+            <a:pPr algn="l">
+              <a:lnSpc>
+                <a:spcPct val="120000"/>
+              </a:lnSpc>
+              <a:spcBef>
+                <a:spcPts val="0"/>
+              </a:spcBef>
+              <a:spcAft>
+                <a:spcPts val="0"/>
+              </a:spcAft>
+              <a:defRPr sz="1100" b="1">
+                <a:solidFill>
+                  <a:srgbClr val="4A7C59"/>
+                </a:solidFill>
+                <a:latin typeface="Calibri"/>
+              </a:defRPr>
+            </a:pPr>
+            <a:r>
+              <a:t>THE PENDANT</a:t>
+            </a:r>
+          </a:p>
+        </p:txBody>
+      </p:sp>
+      <p:sp>
+        <p:nvSpPr>
+          <p:cNvPr id="8" name="TextBox 7"/>
+          <p:cNvSpPr txBox="1"/>
+          <p:nvPr/>
+        </p:nvSpPr>
+        <p:spPr>
+          <a:xfrm>
+            <a:off x="7498079" y="3931920"/>
+            <a:ext cx="3383280" cy="1828800"/>
+          </a:xfrm>
+          <a:prstGeom prst="rect">
+            <a:avLst/>
+          </a:prstGeom>
+          <a:noFill/>
+        </p:spPr>
+        <p:txBody>
+          <a:bodyPr wrap="square">
+            <a:spAutoFit/>
+          </a:bodyPr>
+          <a:lstStyle/>
+          <a:p>
+            <a:pPr algn="l">
+              <a:lnSpc>
+                <a:spcPct val="145000"/>
+              </a:lnSpc>
+              <a:spcBef>
+                <a:spcPts val="0"/>
+              </a:spcBef>
+              <a:spcAft>
+                <a:spcPts val="0"/>
+              </a:spcAft>
+              <a:defRPr sz="1600" b="0">
+                <a:solidFill>
+                  <a:srgbClr val="6B6860"/>
+                </a:solidFill>
+                <a:latin typeface="Calibri"/>
+              </a:defRPr>
+            </a:pPr>
+            <a:r>
+              <a:t>Wearable voice capture device.</a:t>
+            </a:r>
+            <a:br/>
+            <a:br/>
+            <a:r>
+              <a:t>Go for a walk. Talk.</a:t>
+            </a:r>
+            <a:br/>
+            <a:r>
+              <a:t>Your thoughts become structured</a:t>
+            </a:r>
+            <a:br/>
+            <a:r>
+              <a:t>knowledge by the time you're home.</a:t>
+            </a:r>
+            <a:br/>
+            <a:br/>
+            <a:r>
+              <a:t>Working prototype on stage today.</a:t>
+            </a:r>
+          </a:p>
+        </p:txBody>
+      </p:sp>
+    </p:spTree>
+  </p:cSld>
+  <p:clrMapOvr>
+    <a:masterClrMapping/>
+  </p:clrMapOvr>
+</p:sld>
+</file>
+
+<file path=ppt/slides/slide5.xml><?xml version="1.0" encoding="utf-8"?>
+<p:sld xmlns:a="http://schemas.openxmlformats.org/drawingml/2006/main" xmlns:p="http://schemas.openxmlformats.org/presentationml/2006/main" xmlns:r="http://schemas.openxmlformats.org/officeDocument/2006/relationships">
+  <p:cSld>
+    <p:bg>
+      <p:bgPr>
+        <a:solidFill>
+          <a:srgbClr val="FAF8F4"/>
+        </a:solidFill>
+        <a:effectLst/>
+      </p:bgPr>
+    </p:bg>
+    <p:spTree>
+      <p:nvGrpSpPr>
+        <p:cNvPr id="1" name=""/>
+        <p:cNvGrpSpPr/>
+        <p:nvPr/>
+      </p:nvGrpSpPr>
+      <p:grpSpPr/>
+      <p:sp>
+        <p:nvSpPr>
+          <p:cNvPr id="2" name="TextBox 1"/>
+          <p:cNvSpPr txBox="1"/>
+          <p:nvPr/>
+        </p:nvSpPr>
+        <p:spPr>
+          <a:xfrm>
+            <a:off x="1097280" y="1097280"/>
+            <a:ext cx="3657600" cy="365760"/>
+          </a:xfrm>
+          <a:prstGeom prst="rect">
+            <a:avLst/>
+          </a:prstGeom>
+          <a:noFill/>
+        </p:spPr>
+        <p:txBody>
+          <a:bodyPr wrap="square">
+            <a:spAutoFit/>
+          </a:bodyPr>
+          <a:lstStyle/>
+          <a:p>
+            <a:pPr algn="l">
+              <a:lnSpc>
+                <a:spcPct val="120000"/>
+              </a:lnSpc>
+              <a:spcBef>
+                <a:spcPts val="0"/>
+              </a:spcBef>
+              <a:spcAft>
+                <a:spcPts val="0"/>
+              </a:spcAft>
+              <a:defRPr sz="1100" b="1">
+                <a:solidFill>
+                  <a:srgbClr val="4A7C59"/>
+                </a:solidFill>
+                <a:latin typeface="Calibri"/>
+              </a:defRPr>
+            </a:pPr>
+            <a:r>
+              <a:t>THE INSIGHT</a:t>
+            </a:r>
+          </a:p>
+        </p:txBody>
+      </p:sp>
+      <p:sp>
+        <p:nvSpPr>
+          <p:cNvPr id="3" name="TextBox 2"/>
+          <p:cNvSpPr txBox="1"/>
+          <p:nvPr/>
+        </p:nvSpPr>
+        <p:spPr>
+          <a:xfrm>
+            <a:off x="1097280" y="1554480"/>
+            <a:ext cx="9144000" cy="1371600"/>
+          </a:xfrm>
+          <a:prstGeom prst="rect">
+            <a:avLst/>
+          </a:prstGeom>
+          <a:noFill/>
+        </p:spPr>
+        <p:txBody>
+          <a:bodyPr wrap="square">
+            <a:spAutoFit/>
+          </a:bodyPr>
+          <a:lstStyle/>
+          <a:p>
+            <a:pPr algn="l">
+              <a:lnSpc>
+                <a:spcPct val="105000"/>
+              </a:lnSpc>
+              <a:spcBef>
+                <a:spcPts val="0"/>
+              </a:spcBef>
+              <a:spcAft>
+                <a:spcPts val="0"/>
+              </a:spcAft>
+              <a:defRPr sz="4000" b="0">
+                <a:solidFill>
+                  <a:srgbClr val="2C2A26"/>
+                </a:solidFill>
+                <a:latin typeface="Georgia"/>
+              </a:defRPr>
+            </a:pPr>
+            <a:r>
+              <a:t>Context compounds.</a:t>
+            </a:r>
+          </a:p>
+        </p:txBody>
+      </p:sp>
+      <p:sp>
+        <p:nvSpPr>
+          <p:cNvPr id="4" name="TextBox 3"/>
+          <p:cNvSpPr txBox="1"/>
+          <p:nvPr/>
+        </p:nvSpPr>
+        <p:spPr>
+          <a:xfrm>
+            <a:off x="1097280" y="3017520"/>
+            <a:ext cx="9144000" cy="731520"/>
+          </a:xfrm>
+          <a:prstGeom prst="rect">
+            <a:avLst/>
+          </a:prstGeom>
+          <a:noFill/>
+        </p:spPr>
+        <p:txBody>
+          <a:bodyPr wrap="square">
+            <a:spAutoFit/>
+          </a:bodyPr>
+          <a:lstStyle/>
+          <a:p>
+            <a:pPr algn="l">
+              <a:lnSpc>
+                <a:spcPct val="150000"/>
+              </a:lnSpc>
+              <a:spcBef>
+                <a:spcPts val="0"/>
+              </a:spcBef>
+              <a:spcAft>
+                <a:spcPts val="0"/>
+              </a:spcAft>
+              <a:defRPr sz="2000" b="0">
+                <a:solidFill>
+                  <a:srgbClr val="6B6860"/>
+                </a:solidFill>
+                <a:latin typeface="Calibri"/>
+              </a:defRPr>
+            </a:pPr>
+            <a:r>
+              <a:t>Every day you use Parachute, your AI gets meaningfully better.</a:t>
+            </a:r>
+            <a:br/>
+            <a:r>
+              <a:t>No competitor can shortcut months of accumulated personal context.</a:t>
+            </a:r>
+          </a:p>
+        </p:txBody>
+      </p:sp>
+      <p:sp>
+        <p:nvSpPr>
+          <p:cNvPr id="5" name="TextBox 4"/>
+          <p:cNvSpPr txBox="1"/>
+          <p:nvPr/>
+        </p:nvSpPr>
+        <p:spPr>
+          <a:xfrm>
+            <a:off x="1371600" y="4206240"/>
+            <a:ext cx="548640" cy="411480"/>
+          </a:xfrm>
+          <a:prstGeom prst="rect">
+            <a:avLst/>
+          </a:prstGeom>
+          <a:noFill/>
+        </p:spPr>
+        <p:txBody>
+          <a:bodyPr wrap="square">
+            <a:spAutoFit/>
+          </a:bodyPr>
+          <a:lstStyle/>
+          <a:p>
+            <a:pPr algn="l">
+              <a:lnSpc>
+                <a:spcPct val="120000"/>
+              </a:lnSpc>
+              <a:spcBef>
+                <a:spcPts val="0"/>
+              </a:spcBef>
+              <a:spcAft>
+                <a:spcPts val="0"/>
+              </a:spcAft>
+              <a:defRPr sz="1400" b="0">
+                <a:solidFill>
+                  <a:srgbClr val="9A9690"/>
+                </a:solidFill>
+                <a:latin typeface="Courier New"/>
+              </a:defRPr>
+            </a:pPr>
+            <a:r>
+              <a:t>01</a:t>
+            </a:r>
+          </a:p>
+        </p:txBody>
+      </p:sp>
+      <p:sp>
+        <p:nvSpPr>
+          <p:cNvPr id="6" name="TextBox 5"/>
+          <p:cNvSpPr txBox="1"/>
+          <p:nvPr/>
+        </p:nvSpPr>
+        <p:spPr>
+          <a:xfrm>
+            <a:off x="2011680" y="4206240"/>
+            <a:ext cx="5486400" cy="411480"/>
+          </a:xfrm>
+          <a:prstGeom prst="rect">
+            <a:avLst/>
+          </a:prstGeom>
+          <a:noFill/>
+        </p:spPr>
+        <p:txBody>
+          <a:bodyPr wrap="square">
+            <a:spAutoFit/>
+          </a:bodyPr>
+          <a:lstStyle/>
+          <a:p>
+            <a:pPr algn="l">
+              <a:lnSpc>
+                <a:spcPct val="120000"/>
+              </a:lnSpc>
+              <a:spcBef>
+                <a:spcPts val="0"/>
+              </a:spcBef>
+              <a:spcAft>
+                <a:spcPts val="0"/>
+              </a:spcAft>
+              <a:defRPr sz="2000" b="0">
+                <a:solidFill>
+                  <a:srgbClr val="2C2A26"/>
+                </a:solidFill>
+                <a:latin typeface="Georgia"/>
+              </a:defRPr>
+            </a:pPr>
+            <a:r>
+              <a:t>Start journaling in Daily</a:t>
+            </a:r>
+          </a:p>
+        </p:txBody>
+      </p:sp>
+      <p:sp>
+        <p:nvSpPr>
+          <p:cNvPr id="7" name="TextBox 6"/>
+          <p:cNvSpPr txBox="1"/>
+          <p:nvPr/>
+        </p:nvSpPr>
+        <p:spPr>
+          <a:xfrm>
+            <a:off x="1371600" y="4663440"/>
+            <a:ext cx="548640" cy="411480"/>
+          </a:xfrm>
+          <a:prstGeom prst="rect">
+            <a:avLst/>
+          </a:prstGeom>
+          <a:noFill/>
+        </p:spPr>
+        <p:txBody>
+          <a:bodyPr wrap="square">
+            <a:spAutoFit/>
+          </a:bodyPr>
+          <a:lstStyle/>
+          <a:p>
+            <a:pPr algn="l">
+              <a:lnSpc>
+                <a:spcPct val="120000"/>
+              </a:lnSpc>
+              <a:spcBef>
+                <a:spcPts val="0"/>
+              </a:spcBef>
+              <a:spcAft>
+                <a:spcPts val="0"/>
+              </a:spcAft>
+              <a:defRPr sz="1400" b="0">
+                <a:solidFill>
+                  <a:srgbClr val="9A9690"/>
+                </a:solidFill>
+                <a:latin typeface="Courier New"/>
+              </a:defRPr>
+            </a:pPr>
+            <a:r>
+              <a:t>02</a:t>
+            </a:r>
+          </a:p>
+        </p:txBody>
+      </p:sp>
+      <p:sp>
+        <p:nvSpPr>
+          <p:cNvPr id="8" name="TextBox 7"/>
+          <p:cNvSpPr txBox="1"/>
+          <p:nvPr/>
+        </p:nvSpPr>
+        <p:spPr>
+          <a:xfrm>
+            <a:off x="2011680" y="4663440"/>
+            <a:ext cx="5486400" cy="411480"/>
+          </a:xfrm>
+          <a:prstGeom prst="rect">
+            <a:avLst/>
+          </a:prstGeom>
+          <a:noFill/>
+        </p:spPr>
+        <p:txBody>
+          <a:bodyPr wrap="square">
+            <a:spAutoFit/>
+          </a:bodyPr>
+          <a:lstStyle/>
+          <a:p>
+            <a:pPr algn="l">
+              <a:lnSpc>
+                <a:spcPct val="120000"/>
+              </a:lnSpc>
+              <a:spcBef>
+                <a:spcPts val="0"/>
+              </a:spcBef>
+              <a:spcAft>
+                <a:spcPts val="0"/>
+              </a:spcAft>
+              <a:defRPr sz="2000" b="0">
+                <a:solidFill>
+                  <a:srgbClr val="2C2A26"/>
+                </a:solidFill>
+                <a:latin typeface="Georgia"/>
+              </a:defRPr>
+            </a:pPr>
+            <a:r>
+              <a:t>Build months of personal context</a:t>
+            </a:r>
+          </a:p>
+        </p:txBody>
+      </p:sp>
+      <p:sp>
+        <p:nvSpPr>
+          <p:cNvPr id="9" name="TextBox 8"/>
+          <p:cNvSpPr txBox="1"/>
+          <p:nvPr/>
+        </p:nvSpPr>
+        <p:spPr>
+          <a:xfrm>
+            <a:off x="1371600" y="5120640"/>
+            <a:ext cx="548640" cy="411480"/>
+          </a:xfrm>
+          <a:prstGeom prst="rect">
+            <a:avLst/>
+          </a:prstGeom>
+          <a:noFill/>
+        </p:spPr>
+        <p:txBody>
+          <a:bodyPr wrap="square">
+            <a:spAutoFit/>
+          </a:bodyPr>
+          <a:lstStyle/>
+          <a:p>
+            <a:pPr algn="l">
+              <a:lnSpc>
+                <a:spcPct val="120000"/>
+              </a:lnSpc>
+              <a:spcBef>
+                <a:spcPts val="0"/>
+              </a:spcBef>
+              <a:spcAft>
+                <a:spcPts val="0"/>
+              </a:spcAft>
+              <a:defRPr sz="1400" b="0">
+                <a:solidFill>
+                  <a:srgbClr val="9A9690"/>
+                </a:solidFill>
+                <a:latin typeface="Courier New"/>
+              </a:defRPr>
+            </a:pPr>
+            <a:r>
+              <a:t>03</a:t>
+            </a:r>
+          </a:p>
+        </p:txBody>
+      </p:sp>
+      <p:sp>
+        <p:nvSpPr>
+          <p:cNvPr id="10" name="TextBox 9"/>
+          <p:cNvSpPr txBox="1"/>
+          <p:nvPr/>
+        </p:nvSpPr>
+        <p:spPr>
+          <a:xfrm>
+            <a:off x="2011680" y="5120640"/>
+            <a:ext cx="5486400" cy="411480"/>
+          </a:xfrm>
+          <a:prstGeom prst="rect">
+            <a:avLst/>
+          </a:prstGeom>
+          <a:noFill/>
+        </p:spPr>
+        <p:txBody>
+          <a:bodyPr wrap="square">
+            <a:spAutoFit/>
+          </a:bodyPr>
+          <a:lstStyle/>
+          <a:p>
+            <a:pPr algn="l">
+              <a:lnSpc>
+                <a:spcPct val="120000"/>
+              </a:lnSpc>
+              <a:spcBef>
+                <a:spcPts val="0"/>
+              </a:spcBef>
+              <a:spcAft>
+                <a:spcPts val="0"/>
+              </a:spcAft>
+              <a:defRPr sz="2000" b="0">
+                <a:solidFill>
+                  <a:srgbClr val="2C2A26"/>
+                </a:solidFill>
+                <a:latin typeface="Georgia"/>
+              </a:defRPr>
+            </a:pPr>
+            <a:r>
+              <a:t>Upgrade to Parachute Computer</a:t>
+            </a:r>
+          </a:p>
+        </p:txBody>
+      </p:sp>
+      <p:sp>
+        <p:nvSpPr>
+          <p:cNvPr id="11" name="TextBox 10"/>
+          <p:cNvSpPr txBox="1"/>
+          <p:nvPr/>
+        </p:nvSpPr>
+        <p:spPr>
+          <a:xfrm>
+            <a:off x="1371600" y="5577840"/>
+            <a:ext cx="548640" cy="411480"/>
+          </a:xfrm>
+          <a:prstGeom prst="rect">
+            <a:avLst/>
+          </a:prstGeom>
+          <a:noFill/>
+        </p:spPr>
+        <p:txBody>
+          <a:bodyPr wrap="square">
+            <a:spAutoFit/>
+          </a:bodyPr>
+          <a:lstStyle/>
+          <a:p>
+            <a:pPr algn="l">
+              <a:lnSpc>
+                <a:spcPct val="120000"/>
+              </a:lnSpc>
+              <a:spcBef>
+                <a:spcPts val="0"/>
+              </a:spcBef>
+              <a:spcAft>
+                <a:spcPts val="0"/>
+              </a:spcAft>
+              <a:defRPr sz="1400" b="0">
+                <a:solidFill>
+                  <a:srgbClr val="9A9690"/>
+                </a:solidFill>
+                <a:latin typeface="Courier New"/>
+              </a:defRPr>
+            </a:pPr>
+            <a:r>
+              <a:t>04</a:t>
+            </a:r>
+          </a:p>
+        </p:txBody>
+      </p:sp>
+      <p:sp>
+        <p:nvSpPr>
+          <p:cNvPr id="12" name="TextBox 11"/>
+          <p:cNvSpPr txBox="1"/>
+          <p:nvPr/>
+        </p:nvSpPr>
+        <p:spPr>
+          <a:xfrm>
+            <a:off x="2011680" y="5577840"/>
+            <a:ext cx="5486400" cy="411480"/>
+          </a:xfrm>
+          <a:prstGeom prst="rect">
+            <a:avLst/>
+          </a:prstGeom>
+          <a:noFill/>
+        </p:spPr>
+        <p:txBody>
+          <a:bodyPr wrap="square">
+            <a:spAutoFit/>
+          </a:bodyPr>
+          <a:lstStyle/>
+          <a:p>
+            <a:pPr algn="l">
+              <a:lnSpc>
+                <a:spcPct val="120000"/>
+              </a:lnSpc>
+              <a:spcBef>
+                <a:spcPts val="0"/>
+              </a:spcBef>
+              <a:spcAft>
+                <a:spcPts val="0"/>
+              </a:spcAft>
+              <a:defRPr sz="2000" b="0">
+                <a:solidFill>
+                  <a:srgbClr val="2C2A26"/>
+                </a:solidFill>
+                <a:latin typeface="Georgia"/>
+              </a:defRPr>
+            </a:pPr>
+            <a:r>
+              <a:t>Brain ingests your history instantly</a:t>
+            </a:r>
+          </a:p>
+        </p:txBody>
+      </p:sp>
+      <p:sp>
+        <p:nvSpPr>
+          <p:cNvPr id="13" name="TextBox 12"/>
+          <p:cNvSpPr txBox="1"/>
+          <p:nvPr/>
+        </p:nvSpPr>
+        <p:spPr>
+          <a:xfrm>
+            <a:off x="1371600" y="6035040"/>
+            <a:ext cx="548640" cy="411480"/>
+          </a:xfrm>
+          <a:prstGeom prst="rect">
+            <a:avLst/>
+          </a:prstGeom>
+          <a:noFill/>
+        </p:spPr>
+        <p:txBody>
+          <a:bodyPr wrap="square">
+            <a:spAutoFit/>
+          </a:bodyPr>
+          <a:lstStyle/>
+          <a:p>
+            <a:pPr algn="l">
+              <a:lnSpc>
+                <a:spcPct val="120000"/>
+              </a:lnSpc>
+              <a:spcBef>
+                <a:spcPts val="0"/>
+              </a:spcBef>
+              <a:spcAft>
+                <a:spcPts val="0"/>
+              </a:spcAft>
+              <a:defRPr sz="1400" b="0">
+                <a:solidFill>
+                  <a:srgbClr val="4A7C59"/>
+                </a:solidFill>
+                <a:latin typeface="Courier New"/>
+              </a:defRPr>
+            </a:pPr>
+            <a:r>
+              <a:t>→</a:t>
+            </a:r>
+          </a:p>
+        </p:txBody>
+      </p:sp>
+      <p:sp>
+        <p:nvSpPr>
+          <p:cNvPr id="14" name="TextBox 13"/>
+          <p:cNvSpPr txBox="1"/>
+          <p:nvPr/>
+        </p:nvSpPr>
+        <p:spPr>
+          <a:xfrm>
+            <a:off x="2011680" y="6035040"/>
+            <a:ext cx="5486400" cy="411480"/>
+          </a:xfrm>
+          <a:prstGeom prst="rect">
+            <a:avLst/>
+          </a:prstGeom>
+          <a:noFill/>
+        </p:spPr>
+        <p:txBody>
+          <a:bodyPr wrap="square">
+            <a:spAutoFit/>
+          </a:bodyPr>
+          <a:lstStyle/>
+          <a:p>
+            <a:pPr algn="l">
+              <a:lnSpc>
+                <a:spcPct val="120000"/>
+              </a:lnSpc>
+              <a:spcBef>
+                <a:spcPts val="0"/>
+              </a:spcBef>
+              <a:spcAft>
+                <a:spcPts val="0"/>
+              </a:spcAft>
+              <a:defRPr sz="2000" b="1">
+                <a:solidFill>
+                  <a:srgbClr val="4A7C59"/>
+                </a:solidFill>
+                <a:latin typeface="Georgia"/>
+              </a:defRPr>
+            </a:pPr>
+            <a:r>
+              <a:t>System already knows you</a:t>
+            </a:r>
+          </a:p>
+        </p:txBody>
+      </p:sp>
+    </p:spTree>
+  </p:cSld>
+  <p:clrMapOvr>
+    <a:masterClrMapping/>
+  </p:clrMapOvr>
+</p:sld>
+</file>
+
+<file path=ppt/slides/slide6.xml><?xml version="1.0" encoding="utf-8"?>
+<p:sld xmlns:a="http://schemas.openxmlformats.org/drawingml/2006/main" xmlns:p="http://schemas.openxmlformats.org/presentationml/2006/main" xmlns:r="http://schemas.openxmlformats.org/officeDocument/2006/relationships">
+  <p:cSld>
+    <p:bg>
+      <p:bgPr>
+        <a:solidFill>
+          <a:srgbClr val="FAF8F4"/>
+        </a:solidFill>
+        <a:effectLst/>
+      </p:bgPr>
+    </p:bg>
+    <p:spTree>
+      <p:nvGrpSpPr>
+        <p:cNvPr id="1" name=""/>
+        <p:cNvGrpSpPr/>
+        <p:nvPr/>
+      </p:nvGrpSpPr>
+      <p:grpSpPr/>
+      <p:sp>
+        <p:nvSpPr>
+          <p:cNvPr id="2" name="TextBox 1"/>
+          <p:cNvSpPr txBox="1"/>
+          <p:nvPr/>
+        </p:nvSpPr>
+        <p:spPr>
+          <a:xfrm>
+            <a:off x="1097280" y="1097280"/>
+            <a:ext cx="3657600" cy="365760"/>
+          </a:xfrm>
+          <a:prstGeom prst="rect">
+            <a:avLst/>
+          </a:prstGeom>
+          <a:noFill/>
+        </p:spPr>
+        <p:txBody>
+          <a:bodyPr wrap="square">
+            <a:spAutoFit/>
+          </a:bodyPr>
+          <a:lstStyle/>
+          <a:p>
+            <a:pPr algn="l">
+              <a:lnSpc>
+                <a:spcPct val="120000"/>
+              </a:lnSpc>
+              <a:spcBef>
+                <a:spcPts val="0"/>
+              </a:spcBef>
+              <a:spcAft>
+                <a:spcPts val="0"/>
+              </a:spcAft>
+              <a:defRPr sz="1100" b="1">
+                <a:solidFill>
+                  <a:srgbClr val="4A7C59"/>
+                </a:solidFill>
+                <a:latin typeface="Calibri"/>
+              </a:defRPr>
+            </a:pPr>
+            <a:r>
+              <a:t>BUSINESS MODEL</a:t>
+            </a:r>
+          </a:p>
+        </p:txBody>
+      </p:sp>
+      <p:sp>
+        <p:nvSpPr>
+          <p:cNvPr id="3" name="TextBox 2"/>
+          <p:cNvSpPr txBox="1"/>
+          <p:nvPr/>
+        </p:nvSpPr>
+        <p:spPr>
+          <a:xfrm>
+            <a:off x="1097280" y="1554480"/>
+            <a:ext cx="9144000" cy="1371600"/>
+          </a:xfrm>
+          <a:prstGeom prst="rect">
+            <a:avLst/>
+          </a:prstGeom>
+          <a:noFill/>
+        </p:spPr>
+        <p:txBody>
+          <a:bodyPr wrap="square">
+            <a:spAutoFit/>
+          </a:bodyPr>
+          <a:lstStyle/>
+          <a:p>
+            <a:pPr algn="l">
+              <a:lnSpc>
+                <a:spcPct val="105000"/>
+              </a:lnSpc>
+              <a:spcBef>
+                <a:spcPts val="0"/>
+              </a:spcBef>
+              <a:spcAft>
+                <a:spcPts val="0"/>
+              </a:spcAft>
+              <a:defRPr sz="4000" b="0">
+                <a:solidFill>
+                  <a:srgbClr val="2C2A26"/>
+                </a:solidFill>
+                <a:latin typeface="Georgia"/>
+              </a:defRPr>
+            </a:pPr>
+            <a:r>
+              <a:t>Start free.</a:t>
+            </a:r>
+            <a:br/>
+            <a:r>
+              <a:t>Grow with every user.</a:t>
+            </a:r>
+          </a:p>
+        </p:txBody>
+      </p:sp>
+      <p:sp>
+        <p:nvSpPr>
+          <p:cNvPr id="4" name="TextBox 3"/>
+          <p:cNvSpPr txBox="1"/>
+          <p:nvPr/>
+        </p:nvSpPr>
+        <p:spPr>
+          <a:xfrm>
+            <a:off x="1097280" y="3200400"/>
+            <a:ext cx="1645920" cy="365760"/>
+          </a:xfrm>
+          <a:prstGeom prst="rect">
+            <a:avLst/>
+          </a:prstGeom>
+          <a:noFill/>
+        </p:spPr>
+        <p:txBody>
+          <a:bodyPr wrap="square">
+            <a:spAutoFit/>
+          </a:bodyPr>
+          <a:lstStyle/>
+          <a:p>
+            <a:pPr algn="l">
+              <a:lnSpc>
+                <a:spcPct val="120000"/>
+              </a:lnSpc>
+              <a:spcBef>
+                <a:spcPts val="0"/>
+              </a:spcBef>
+              <a:spcAft>
+                <a:spcPts val="0"/>
+              </a:spcAft>
+              <a:defRPr sz="2400" b="0">
+                <a:solidFill>
+                  <a:srgbClr val="9A9690"/>
+                </a:solidFill>
+                <a:latin typeface="Georgia"/>
+              </a:defRPr>
+            </a:pPr>
+            <a:r>
+              <a:t>Free</a:t>
+            </a:r>
+          </a:p>
+        </p:txBody>
+      </p:sp>
+      <p:sp>
+        <p:nvSpPr>
+          <p:cNvPr id="5" name="TextBox 4"/>
+          <p:cNvSpPr txBox="1"/>
+          <p:nvPr/>
+        </p:nvSpPr>
+        <p:spPr>
+          <a:xfrm>
+            <a:off x="2926080" y="3246120"/>
+            <a:ext cx="7315200" cy="365760"/>
+          </a:xfrm>
+          <a:prstGeom prst="rect">
+            <a:avLst/>
+          </a:prstGeom>
+          <a:noFill/>
+        </p:spPr>
+        <p:txBody>
+          <a:bodyPr wrap="square">
+            <a:spAutoFit/>
+          </a:bodyPr>
+          <a:lstStyle/>
+          <a:p>
+            <a:pPr algn="l">
+              <a:lnSpc>
+                <a:spcPct val="120000"/>
+              </a:lnSpc>
+              <a:spcBef>
+                <a:spcPts val="0"/>
+              </a:spcBef>
+              <a:spcAft>
+                <a:spcPts val="0"/>
+              </a:spcAft>
+              <a:defRPr sz="1600" b="0">
+                <a:solidFill>
+                  <a:srgbClr val="6B6860"/>
+                </a:solidFill>
+                <a:latin typeface="Calibri"/>
+              </a:defRPr>
+            </a:pPr>
+            <a:r>
+              <a:t>Offline journal + on-device transcription. Zero hosting cost.</a:t>
+            </a:r>
+          </a:p>
+        </p:txBody>
+      </p:sp>
+      <p:sp>
+        <p:nvSpPr>
+          <p:cNvPr id="6" name="TextBox 5"/>
+          <p:cNvSpPr txBox="1"/>
+          <p:nvPr/>
+        </p:nvSpPr>
+        <p:spPr>
+          <a:xfrm>
+            <a:off x="1097280" y="3840480"/>
+            <a:ext cx="1645920" cy="365760"/>
+          </a:xfrm>
+          <a:prstGeom prst="rect">
+            <a:avLst/>
+          </a:prstGeom>
+          <a:noFill/>
+        </p:spPr>
+        <p:txBody>
+          <a:bodyPr wrap="square">
+            <a:spAutoFit/>
+          </a:bodyPr>
+          <a:lstStyle/>
+          <a:p>
+            <a:pPr algn="l">
+              <a:lnSpc>
+                <a:spcPct val="120000"/>
+              </a:lnSpc>
+              <a:spcBef>
+                <a:spcPts val="0"/>
+              </a:spcBef>
+              <a:spcAft>
+                <a:spcPts val="0"/>
+              </a:spcAft>
+              <a:defRPr sz="2400" b="0">
+                <a:solidFill>
+                  <a:srgbClr val="6B6860"/>
+                </a:solidFill>
+                <a:latin typeface="Georgia"/>
+              </a:defRPr>
+            </a:pPr>
+            <a:r>
+              <a:t>$2/mo</a:t>
+            </a:r>
+          </a:p>
+        </p:txBody>
+      </p:sp>
+      <p:sp>
+        <p:nvSpPr>
+          <p:cNvPr id="7" name="TextBox 6"/>
+          <p:cNvSpPr txBox="1"/>
+          <p:nvPr/>
+        </p:nvSpPr>
+        <p:spPr>
+          <a:xfrm>
+            <a:off x="2926080" y="3886200"/>
+            <a:ext cx="7315200" cy="365760"/>
+          </a:xfrm>
+          <a:prstGeom prst="rect">
+            <a:avLst/>
+          </a:prstGeom>
+          <a:noFill/>
+        </p:spPr>
+        <p:txBody>
+          <a:bodyPr wrap="square">
+            <a:spAutoFit/>
+          </a:bodyPr>
+          <a:lstStyle/>
+          <a:p>
+            <a:pPr algn="l">
+              <a:lnSpc>
+                <a:spcPct val="120000"/>
+              </a:lnSpc>
+              <a:spcBef>
+                <a:spcPts val="0"/>
+              </a:spcBef>
+              <a:spcAft>
+                <a:spcPts val="0"/>
+              </a:spcAft>
+              <a:defRPr sz="1600" b="0">
+                <a:solidFill>
+                  <a:srgbClr val="6B6860"/>
+                </a:solidFill>
+                <a:latin typeface="Calibri"/>
+              </a:defRPr>
+            </a:pPr>
+            <a:r>
+              <a:t>Cloud sync across devices. Your notes everywhere.</a:t>
+            </a:r>
+          </a:p>
+        </p:txBody>
+      </p:sp>
+      <p:sp>
+        <p:nvSpPr>
+          <p:cNvPr id="8" name="Rounded Rectangle 7"/>
+          <p:cNvSpPr/>
+          <p:nvPr/>
+        </p:nvSpPr>
+        <p:spPr>
+          <a:xfrm>
+            <a:off x="914400" y="4343400"/>
+            <a:ext cx="9601200" cy="594360"/>
+          </a:xfrm>
+          <a:prstGeom prst="roundRect">
+            <a:avLst/>
+          </a:prstGeom>
+          <a:solidFill>
+            <a:srgbClr val="E8F5EC"/>
+          </a:solidFill>
+          <a:ln>
+            <a:noFill/>
+          </a:ln>
+        </p:spPr>
+        <p:style>
+          <a:lnRef idx="1">
+            <a:schemeClr val="accent1"/>
+          </a:lnRef>
+          <a:fillRef idx="3">
+            <a:schemeClr val="accent1"/>
+          </a:fillRef>
+          <a:effectRef idx="2">
+            <a:schemeClr val="accent1"/>
+          </a:effectRef>
+          <a:fontRef idx="minor">
+            <a:schemeClr val="lt1"/>
+          </a:fontRef>
+        </p:style>
+        <p:txBody>
+          <a:bodyPr rtlCol="0" anchor="ctr"/>
+          <a:lstStyle/>
+          <a:p>
+            <a:pPr algn="ctr"/>
+          </a:p>
+        </p:txBody>
+      </p:sp>
+      <p:sp>
+        <p:nvSpPr>
+          <p:cNvPr id="9" name="TextBox 8"/>
+          <p:cNvSpPr txBox="1"/>
+          <p:nvPr/>
+        </p:nvSpPr>
+        <p:spPr>
+          <a:xfrm>
+            <a:off x="1097280" y="4480560"/>
+            <a:ext cx="1645920" cy="365760"/>
+          </a:xfrm>
+          <a:prstGeom prst="rect">
+            <a:avLst/>
+          </a:prstGeom>
+          <a:noFill/>
+        </p:spPr>
+        <p:txBody>
+          <a:bodyPr wrap="square">
+            <a:spAutoFit/>
+          </a:bodyPr>
+          <a:lstStyle/>
+          <a:p>
+            <a:pPr algn="l">
+              <a:lnSpc>
+                <a:spcPct val="120000"/>
+              </a:lnSpc>
+              <a:spcBef>
+                <a:spcPts val="0"/>
+              </a:spcBef>
+              <a:spcAft>
+                <a:spcPts val="0"/>
+              </a:spcAft>
+              <a:defRPr sz="2400" b="0">
+                <a:solidFill>
+                  <a:srgbClr val="4A7C59"/>
+                </a:solidFill>
+                <a:latin typeface="Georgia"/>
+              </a:defRPr>
+            </a:pPr>
+            <a:r>
+              <a:t>$10/mo</a:t>
+            </a:r>
+          </a:p>
+        </p:txBody>
+      </p:sp>
+      <p:sp>
+        <p:nvSpPr>
+          <p:cNvPr id="10" name="TextBox 9"/>
+          <p:cNvSpPr txBox="1"/>
+          <p:nvPr/>
+        </p:nvSpPr>
+        <p:spPr>
+          <a:xfrm>
+            <a:off x="2926080" y="4526280"/>
+            <a:ext cx="7315200" cy="365760"/>
+          </a:xfrm>
+          <a:prstGeom prst="rect">
+            <a:avLst/>
+          </a:prstGeom>
+          <a:noFill/>
+        </p:spPr>
+        <p:txBody>
+          <a:bodyPr wrap="square">
+            <a:spAutoFit/>
+          </a:bodyPr>
+          <a:lstStyle/>
+          <a:p>
+            <a:pPr algn="l">
+              <a:lnSpc>
+                <a:spcPct val="120000"/>
+              </a:lnSpc>
+              <a:spcBef>
+                <a:spcPts val="0"/>
+              </a:spcBef>
+              <a:spcAft>
+                <a:spcPts val="0"/>
+              </a:spcAft>
+              <a:defRPr sz="1600" b="0">
+                <a:solidFill>
+                  <a:srgbClr val="6B6860"/>
+                </a:solidFill>
+                <a:latin typeface="Calibri"/>
+              </a:defRPr>
+            </a:pPr>
+            <a:r>
+              <a:t>Cloud transcription + AI — reflections, synthesis, pattern surfacing</a:t>
+            </a:r>
+          </a:p>
+        </p:txBody>
+      </p:sp>
+      <p:sp>
+        <p:nvSpPr>
+          <p:cNvPr id="11" name="TextBox 10"/>
+          <p:cNvSpPr txBox="1"/>
+          <p:nvPr/>
+        </p:nvSpPr>
+        <p:spPr>
+          <a:xfrm>
+            <a:off x="1097280" y="5120640"/>
+            <a:ext cx="1645920" cy="365760"/>
+          </a:xfrm>
+          <a:prstGeom prst="rect">
+            <a:avLst/>
+          </a:prstGeom>
+          <a:noFill/>
+        </p:spPr>
+        <p:txBody>
+          <a:bodyPr wrap="square">
+            <a:spAutoFit/>
+          </a:bodyPr>
+          <a:lstStyle/>
+          <a:p>
+            <a:pPr algn="l">
+              <a:lnSpc>
+                <a:spcPct val="120000"/>
+              </a:lnSpc>
+              <a:spcBef>
+                <a:spcPts val="0"/>
+              </a:spcBef>
+              <a:spcAft>
+                <a:spcPts val="0"/>
+              </a:spcAft>
+              <a:defRPr sz="2400" b="0">
+                <a:solidFill>
+                  <a:srgbClr val="2C2A26"/>
+                </a:solidFill>
+                <a:latin typeface="Georgia"/>
+              </a:defRPr>
+            </a:pPr>
+            <a:r>
+              <a:t>$40/mo</a:t>
+            </a:r>
+          </a:p>
+        </p:txBody>
+      </p:sp>
+      <p:sp>
+        <p:nvSpPr>
+          <p:cNvPr id="12" name="TextBox 11"/>
+          <p:cNvSpPr txBox="1"/>
+          <p:nvPr/>
+        </p:nvSpPr>
+        <p:spPr>
+          <a:xfrm>
+            <a:off x="2926080" y="5166360"/>
+            <a:ext cx="7315200" cy="365760"/>
+          </a:xfrm>
+          <a:prstGeom prst="rect">
+            <a:avLst/>
+          </a:prstGeom>
+          <a:noFill/>
+        </p:spPr>
+        <p:txBody>
+          <a:bodyPr wrap="square">
+            <a:spAutoFit/>
+          </a:bodyPr>
+          <a:lstStyle/>
+          <a:p>
+            <a:pPr algn="l">
+              <a:lnSpc>
+                <a:spcPct val="120000"/>
+              </a:lnSpc>
+              <a:spcBef>
+                <a:spcPts val="0"/>
+              </a:spcBef>
+              <a:spcAft>
+                <a:spcPts val="0"/>
+              </a:spcAft>
+              <a:defRPr sz="1600" b="0">
+                <a:solidFill>
+                  <a:srgbClr val="6B6860"/>
+                </a:solidFill>
+                <a:latin typeface="Calibri"/>
+              </a:defRPr>
+            </a:pPr>
+            <a:r>
+              <a:t>Hosted Parachute Computer — full agentic platform with bundled AI</a:t>
+            </a:r>
+          </a:p>
+        </p:txBody>
+      </p:sp>
+      <p:sp>
+        <p:nvSpPr>
+          <p:cNvPr id="13" name="TextBox 12"/>
+          <p:cNvSpPr txBox="1"/>
+          <p:nvPr/>
+        </p:nvSpPr>
+        <p:spPr>
+          <a:xfrm>
+            <a:off x="1097280" y="5760720"/>
+            <a:ext cx="9144000" cy="731520"/>
+          </a:xfrm>
+          <a:prstGeom prst="rect">
+            <a:avLst/>
+          </a:prstGeom>
+          <a:noFill/>
+        </p:spPr>
+        <p:txBody>
+          <a:bodyPr wrap="square">
+            <a:spAutoFit/>
+          </a:bodyPr>
+          <a:lstStyle/>
+          <a:p>
+            <a:pPr algn="l">
+              <a:lnSpc>
+                <a:spcPct val="150000"/>
+              </a:lnSpc>
+              <a:spcBef>
+                <a:spcPts val="0"/>
+              </a:spcBef>
+              <a:spcAft>
+                <a:spcPts val="0"/>
+              </a:spcAft>
+              <a:defRPr sz="1500" b="0">
+                <a:solidFill>
+                  <a:srgbClr val="9A9690"/>
+                </a:solidFill>
+                <a:latin typeface="Calibri"/>
+              </a:defRPr>
+            </a:pPr>
+            <a:r>
+              <a:t>Free tier has zero hosting cost — no subsidizing free users.</a:t>
+            </a:r>
+            <a:br/>
+            <a:r>
+              <a:t>AI at $10/mo uses cost-efficient models. Margins are real and improve as model costs drop.</a:t>
+            </a:r>
+          </a:p>
+        </p:txBody>
+      </p:sp>
+    </p:spTree>
+  </p:cSld>
+  <p:clrMapOvr>
+    <a:masterClrMapping/>
+  </p:clrMapOvr>
+</p:sld>
+</file>
+
+<file path=ppt/slides/slide7.xml><?xml version="1.0" encoding="utf-8"?>
 <p:sld xmlns:a="http://schemas.openxmlformats.org/drawingml/2006/main" xmlns:p="http://schemas.openxmlformats.org/presentationml/2006/main" xmlns:r="http://schemas.openxmlformats.org/officeDocument/2006/relationships">
   <p:cSld>
     <p:bg>
@@ -4280,2996 +6499,6 @@
           </a:graphicData>
         </a:graphic>
       </p:graphicFrame>
-      <p:sp>
-        <p:nvSpPr>
-          <p:cNvPr id="5" name="TextBox 4"/>
-          <p:cNvSpPr txBox="1"/>
-          <p:nvPr/>
-        </p:nvSpPr>
-        <p:spPr>
-          <a:xfrm>
-            <a:off x="1371600" y="6035040"/>
-            <a:ext cx="8229600" cy="457200"/>
-          </a:xfrm>
-          <a:prstGeom prst="rect">
-            <a:avLst/>
-          </a:prstGeom>
-          <a:noFill/>
-        </p:spPr>
-        <p:txBody>
-          <a:bodyPr wrap="square">
-            <a:spAutoFit/>
-          </a:bodyPr>
-          <a:lstStyle/>
-          <a:p>
-            <a:pPr algn="l">
-              <a:lnSpc>
-                <a:spcPct val="120000"/>
-              </a:lnSpc>
-              <a:spcBef>
-                <a:spcPts val="0"/>
-              </a:spcBef>
-              <a:spcAft>
-                <a:spcPts val="0"/>
-              </a:spcAft>
-              <a:defRPr sz="1400" b="0">
-                <a:solidFill>
-                  <a:srgbClr val="9A9690"/>
-                </a:solidFill>
-                <a:latin typeface="Calibri"/>
-              </a:defRPr>
-            </a:pPr>
-            <a:r>
-              <a:t>Funded to date: $0. Entire product built by founder with no outside funding.</a:t>
-            </a:r>
-          </a:p>
-        </p:txBody>
-      </p:sp>
-    </p:spTree>
-  </p:cSld>
-  <p:clrMapOvr>
-    <a:masterClrMapping/>
-  </p:clrMapOvr>
-</p:sld>
-</file>
-
-<file path=ppt/slides/slide11.xml><?xml version="1.0" encoding="utf-8"?>
-<p:sld xmlns:a="http://schemas.openxmlformats.org/drawingml/2006/main" xmlns:p="http://schemas.openxmlformats.org/presentationml/2006/main" xmlns:r="http://schemas.openxmlformats.org/officeDocument/2006/relationships">
-  <p:cSld>
-    <p:bg>
-      <p:bgPr>
-        <a:solidFill>
-          <a:srgbClr val="FAF8F4"/>
-        </a:solidFill>
-        <a:effectLst/>
-      </p:bgPr>
-    </p:bg>
-    <p:spTree>
-      <p:nvGrpSpPr>
-        <p:cNvPr id="1" name=""/>
-        <p:cNvGrpSpPr/>
-        <p:nvPr/>
-      </p:nvGrpSpPr>
-      <p:grpSpPr/>
-      <p:sp>
-        <p:nvSpPr>
-          <p:cNvPr id="2" name="TextBox 1"/>
-          <p:cNvSpPr txBox="1"/>
-          <p:nvPr/>
-        </p:nvSpPr>
-        <p:spPr>
-          <a:xfrm>
-            <a:off x="1097280" y="1097280"/>
-            <a:ext cx="3657600" cy="365760"/>
-          </a:xfrm>
-          <a:prstGeom prst="rect">
-            <a:avLst/>
-          </a:prstGeom>
-          <a:noFill/>
-        </p:spPr>
-        <p:txBody>
-          <a:bodyPr wrap="square">
-            <a:spAutoFit/>
-          </a:bodyPr>
-          <a:lstStyle/>
-          <a:p>
-            <a:pPr algn="l">
-              <a:lnSpc>
-                <a:spcPct val="120000"/>
-              </a:lnSpc>
-              <a:spcBef>
-                <a:spcPts val="0"/>
-              </a:spcBef>
-              <a:spcAft>
-                <a:spcPts val="0"/>
-              </a:spcAft>
-              <a:defRPr sz="1100" b="1">
-                <a:solidFill>
-                  <a:srgbClr val="4A7C59"/>
-                </a:solidFill>
-                <a:latin typeface="Calibri"/>
-              </a:defRPr>
-            </a:pPr>
-            <a:r>
-              <a:t>THE ASK</a:t>
-            </a:r>
-          </a:p>
-        </p:txBody>
-      </p:sp>
-      <p:sp>
-        <p:nvSpPr>
-          <p:cNvPr id="3" name="TextBox 2"/>
-          <p:cNvSpPr txBox="1"/>
-          <p:nvPr/>
-        </p:nvSpPr>
-        <p:spPr>
-          <a:xfrm>
-            <a:off x="1097280" y="1554480"/>
-            <a:ext cx="9144000" cy="1371600"/>
-          </a:xfrm>
-          <a:prstGeom prst="rect">
-            <a:avLst/>
-          </a:prstGeom>
-          <a:noFill/>
-        </p:spPr>
-        <p:txBody>
-          <a:bodyPr wrap="square">
-            <a:spAutoFit/>
-          </a:bodyPr>
-          <a:lstStyle/>
-          <a:p>
-            <a:pPr algn="l">
-              <a:lnSpc>
-                <a:spcPct val="105000"/>
-              </a:lnSpc>
-              <a:spcBef>
-                <a:spcPts val="0"/>
-              </a:spcBef>
-              <a:spcAft>
-                <a:spcPts val="0"/>
-              </a:spcAft>
-              <a:defRPr sz="4000" b="0">
-                <a:solidFill>
-                  <a:srgbClr val="2C2A26"/>
-                </a:solidFill>
-                <a:latin typeface="Georgia"/>
-              </a:defRPr>
-            </a:pPr>
-            <a:r>
-              <a:t>$300K to reach revenue.</a:t>
-            </a:r>
-            <a:br/>
-            <a:r>
-              <a:t>Then scale.</a:t>
-            </a:r>
-          </a:p>
-        </p:txBody>
-      </p:sp>
-      <p:sp>
-        <p:nvSpPr>
-          <p:cNvPr id="4" name="TextBox 3"/>
-          <p:cNvSpPr txBox="1"/>
-          <p:nvPr/>
-        </p:nvSpPr>
-        <p:spPr>
-          <a:xfrm>
-            <a:off x="1097280" y="3200400"/>
-            <a:ext cx="2286000" cy="365760"/>
-          </a:xfrm>
-          <a:prstGeom prst="rect">
-            <a:avLst/>
-          </a:prstGeom>
-          <a:noFill/>
-        </p:spPr>
-        <p:txBody>
-          <a:bodyPr wrap="square">
-            <a:spAutoFit/>
-          </a:bodyPr>
-          <a:lstStyle/>
-          <a:p>
-            <a:pPr algn="l">
-              <a:lnSpc>
-                <a:spcPct val="120000"/>
-              </a:lnSpc>
-              <a:spcBef>
-                <a:spcPts val="0"/>
-              </a:spcBef>
-              <a:spcAft>
-                <a:spcPts val="0"/>
-              </a:spcAft>
-              <a:defRPr sz="1400" b="0">
-                <a:solidFill>
-                  <a:srgbClr val="9A9690"/>
-                </a:solidFill>
-                <a:latin typeface="Calibri"/>
-              </a:defRPr>
-            </a:pPr>
-            <a:r>
-              <a:t>Instrument</a:t>
-            </a:r>
-          </a:p>
-        </p:txBody>
-      </p:sp>
-      <p:sp>
-        <p:nvSpPr>
-          <p:cNvPr id="5" name="TextBox 4"/>
-          <p:cNvSpPr txBox="1"/>
-          <p:nvPr/>
-        </p:nvSpPr>
-        <p:spPr>
-          <a:xfrm>
-            <a:off x="3474720" y="3200400"/>
-            <a:ext cx="4572000" cy="365760"/>
-          </a:xfrm>
-          <a:prstGeom prst="rect">
-            <a:avLst/>
-          </a:prstGeom>
-          <a:noFill/>
-        </p:spPr>
-        <p:txBody>
-          <a:bodyPr wrap="square">
-            <a:spAutoFit/>
-          </a:bodyPr>
-          <a:lstStyle/>
-          <a:p>
-            <a:pPr algn="l">
-              <a:lnSpc>
-                <a:spcPct val="120000"/>
-              </a:lnSpc>
-              <a:spcBef>
-                <a:spcPts val="0"/>
-              </a:spcBef>
-              <a:spcAft>
-                <a:spcPts val="0"/>
-              </a:spcAft>
-              <a:defRPr sz="2000" b="0">
-                <a:solidFill>
-                  <a:srgbClr val="2C2A26"/>
-                </a:solidFill>
-                <a:latin typeface="Georgia"/>
-              </a:defRPr>
-            </a:pPr>
-            <a:r>
-              <a:t>SAFE (YC standard)</a:t>
-            </a:r>
-          </a:p>
-        </p:txBody>
-      </p:sp>
-      <p:sp>
-        <p:nvSpPr>
-          <p:cNvPr id="6" name="TextBox 5"/>
-          <p:cNvSpPr txBox="1"/>
-          <p:nvPr/>
-        </p:nvSpPr>
-        <p:spPr>
-          <a:xfrm>
-            <a:off x="1097280" y="3703320"/>
-            <a:ext cx="2286000" cy="365760"/>
-          </a:xfrm>
-          <a:prstGeom prst="rect">
-            <a:avLst/>
-          </a:prstGeom>
-          <a:noFill/>
-        </p:spPr>
-        <p:txBody>
-          <a:bodyPr wrap="square">
-            <a:spAutoFit/>
-          </a:bodyPr>
-          <a:lstStyle/>
-          <a:p>
-            <a:pPr algn="l">
-              <a:lnSpc>
-                <a:spcPct val="120000"/>
-              </a:lnSpc>
-              <a:spcBef>
-                <a:spcPts val="0"/>
-              </a:spcBef>
-              <a:spcAft>
-                <a:spcPts val="0"/>
-              </a:spcAft>
-              <a:defRPr sz="1400" b="0">
-                <a:solidFill>
-                  <a:srgbClr val="9A9690"/>
-                </a:solidFill>
-                <a:latin typeface="Calibri"/>
-              </a:defRPr>
-            </a:pPr>
-            <a:r>
-              <a:t>Valuation cap</a:t>
-            </a:r>
-          </a:p>
-        </p:txBody>
-      </p:sp>
-      <p:sp>
-        <p:nvSpPr>
-          <p:cNvPr id="7" name="TextBox 6"/>
-          <p:cNvSpPr txBox="1"/>
-          <p:nvPr/>
-        </p:nvSpPr>
-        <p:spPr>
-          <a:xfrm>
-            <a:off x="3474720" y="3703320"/>
-            <a:ext cx="4572000" cy="365760"/>
-          </a:xfrm>
-          <a:prstGeom prst="rect">
-            <a:avLst/>
-          </a:prstGeom>
-          <a:noFill/>
-        </p:spPr>
-        <p:txBody>
-          <a:bodyPr wrap="square">
-            <a:spAutoFit/>
-          </a:bodyPr>
-          <a:lstStyle/>
-          <a:p>
-            <a:pPr algn="l">
-              <a:lnSpc>
-                <a:spcPct val="120000"/>
-              </a:lnSpc>
-              <a:spcBef>
-                <a:spcPts val="0"/>
-              </a:spcBef>
-              <a:spcAft>
-                <a:spcPts val="0"/>
-              </a:spcAft>
-              <a:defRPr sz="2000" b="0">
-                <a:solidFill>
-                  <a:srgbClr val="2C2A26"/>
-                </a:solidFill>
-                <a:latin typeface="Georgia"/>
-              </a:defRPr>
-            </a:pPr>
-            <a:r>
-              <a:t>$5,000,000</a:t>
-            </a:r>
-          </a:p>
-        </p:txBody>
-      </p:sp>
-      <p:sp>
-        <p:nvSpPr>
-          <p:cNvPr id="8" name="TextBox 7"/>
-          <p:cNvSpPr txBox="1"/>
-          <p:nvPr/>
-        </p:nvSpPr>
-        <p:spPr>
-          <a:xfrm>
-            <a:off x="1097280" y="4206240"/>
-            <a:ext cx="2286000" cy="365760"/>
-          </a:xfrm>
-          <a:prstGeom prst="rect">
-            <a:avLst/>
-          </a:prstGeom>
-          <a:noFill/>
-        </p:spPr>
-        <p:txBody>
-          <a:bodyPr wrap="square">
-            <a:spAutoFit/>
-          </a:bodyPr>
-          <a:lstStyle/>
-          <a:p>
-            <a:pPr algn="l">
-              <a:lnSpc>
-                <a:spcPct val="120000"/>
-              </a:lnSpc>
-              <a:spcBef>
-                <a:spcPts val="0"/>
-              </a:spcBef>
-              <a:spcAft>
-                <a:spcPts val="0"/>
-              </a:spcAft>
-              <a:defRPr sz="1400" b="0">
-                <a:solidFill>
-                  <a:srgbClr val="9A9690"/>
-                </a:solidFill>
-                <a:latin typeface="Calibri"/>
-              </a:defRPr>
-            </a:pPr>
-            <a:r>
-              <a:t>Giving away</a:t>
-            </a:r>
-          </a:p>
-        </p:txBody>
-      </p:sp>
-      <p:sp>
-        <p:nvSpPr>
-          <p:cNvPr id="9" name="TextBox 8"/>
-          <p:cNvSpPr txBox="1"/>
-          <p:nvPr/>
-        </p:nvSpPr>
-        <p:spPr>
-          <a:xfrm>
-            <a:off x="3474720" y="4206240"/>
-            <a:ext cx="4572000" cy="365760"/>
-          </a:xfrm>
-          <a:prstGeom prst="rect">
-            <a:avLst/>
-          </a:prstGeom>
-          <a:noFill/>
-        </p:spPr>
-        <p:txBody>
-          <a:bodyPr wrap="square">
-            <a:spAutoFit/>
-          </a:bodyPr>
-          <a:lstStyle/>
-          <a:p>
-            <a:pPr algn="l">
-              <a:lnSpc>
-                <a:spcPct val="120000"/>
-              </a:lnSpc>
-              <a:spcBef>
-                <a:spcPts val="0"/>
-              </a:spcBef>
-              <a:spcAft>
-                <a:spcPts val="0"/>
-              </a:spcAft>
-              <a:defRPr sz="2000" b="0">
-                <a:solidFill>
-                  <a:srgbClr val="2C2A26"/>
-                </a:solidFill>
-                <a:latin typeface="Georgia"/>
-              </a:defRPr>
-            </a:pPr>
-            <a:r>
-              <a:t>&lt; 10%</a:t>
-            </a:r>
-          </a:p>
-        </p:txBody>
-      </p:sp>
-      <p:sp>
-        <p:nvSpPr>
-          <p:cNvPr id="10" name="TextBox 9"/>
-          <p:cNvSpPr txBox="1"/>
-          <p:nvPr/>
-        </p:nvSpPr>
-        <p:spPr>
-          <a:xfrm>
-            <a:off x="1097280" y="4709160"/>
-            <a:ext cx="2286000" cy="365760"/>
-          </a:xfrm>
-          <a:prstGeom prst="rect">
-            <a:avLst/>
-          </a:prstGeom>
-          <a:noFill/>
-        </p:spPr>
-        <p:txBody>
-          <a:bodyPr wrap="square">
-            <a:spAutoFit/>
-          </a:bodyPr>
-          <a:lstStyle/>
-          <a:p>
-            <a:pPr algn="l">
-              <a:lnSpc>
-                <a:spcPct val="120000"/>
-              </a:lnSpc>
-              <a:spcBef>
-                <a:spcPts val="0"/>
-              </a:spcBef>
-              <a:spcAft>
-                <a:spcPts val="0"/>
-              </a:spcAft>
-              <a:defRPr sz="1400" b="0">
-                <a:solidFill>
-                  <a:srgbClr val="9A9690"/>
-                </a:solidFill>
-                <a:latin typeface="Calibri"/>
-              </a:defRPr>
-            </a:pPr>
-            <a:r>
-              <a:t>Use of funds</a:t>
-            </a:r>
-          </a:p>
-        </p:txBody>
-      </p:sp>
-      <p:sp>
-        <p:nvSpPr>
-          <p:cNvPr id="11" name="TextBox 10"/>
-          <p:cNvSpPr txBox="1"/>
-          <p:nvPr/>
-        </p:nvSpPr>
-        <p:spPr>
-          <a:xfrm>
-            <a:off x="3474720" y="4709160"/>
-            <a:ext cx="4572000" cy="365760"/>
-          </a:xfrm>
-          <a:prstGeom prst="rect">
-            <a:avLst/>
-          </a:prstGeom>
-          <a:noFill/>
-        </p:spPr>
-        <p:txBody>
-          <a:bodyPr wrap="square">
-            <a:spAutoFit/>
-          </a:bodyPr>
-          <a:lstStyle/>
-          <a:p>
-            <a:pPr algn="l">
-              <a:lnSpc>
-                <a:spcPct val="120000"/>
-              </a:lnSpc>
-              <a:spcBef>
-                <a:spcPts val="0"/>
-              </a:spcBef>
-              <a:spcAft>
-                <a:spcPts val="0"/>
-              </a:spcAft>
-              <a:defRPr sz="2000" b="0">
-                <a:solidFill>
-                  <a:srgbClr val="2C2A26"/>
-                </a:solidFill>
-                <a:latin typeface="Georgia"/>
-              </a:defRPr>
-            </a:pPr>
-            <a:r>
-              <a:t>Core team full-time through 2026 → production launch June</a:t>
-            </a:r>
-          </a:p>
-        </p:txBody>
-      </p:sp>
-      <p:sp>
-        <p:nvSpPr>
-          <p:cNvPr id="12" name="TextBox 11"/>
-          <p:cNvSpPr txBox="1"/>
-          <p:nvPr/>
-        </p:nvSpPr>
-        <p:spPr>
-          <a:xfrm>
-            <a:off x="1097280" y="5303520"/>
-            <a:ext cx="9144000" cy="1097280"/>
-          </a:xfrm>
-          <a:prstGeom prst="rect">
-            <a:avLst/>
-          </a:prstGeom>
-          <a:noFill/>
-        </p:spPr>
-        <p:txBody>
-          <a:bodyPr wrap="square">
-            <a:spAutoFit/>
-          </a:bodyPr>
-          <a:lstStyle/>
-          <a:p>
-            <a:pPr algn="l">
-              <a:lnSpc>
-                <a:spcPct val="130000"/>
-              </a:lnSpc>
-              <a:spcBef>
-                <a:spcPts val="0"/>
-              </a:spcBef>
-              <a:spcAft>
-                <a:spcPts val="0"/>
-              </a:spcAft>
-              <a:defRPr sz="2800" b="0">
-                <a:solidFill>
-                  <a:srgbClr val="2C2A26"/>
-                </a:solidFill>
-                <a:latin typeface="Georgia"/>
-              </a:defRPr>
-            </a:pPr>
-            <a:r>
-              <a:t>Open source. Local-first.</a:t>
-            </a:r>
-            <a:br/>
-            <a:r>
-              <a:t>Balance and choice — from the foundation.</a:t>
-            </a:r>
-          </a:p>
-        </p:txBody>
-      </p:sp>
-      <p:sp>
-        <p:nvSpPr>
-          <p:cNvPr id="13" name="TextBox 12"/>
-          <p:cNvSpPr txBox="1"/>
-          <p:nvPr/>
-        </p:nvSpPr>
-        <p:spPr>
-          <a:xfrm>
-            <a:off x="1097280" y="6035040"/>
-            <a:ext cx="9144000" cy="457200"/>
-          </a:xfrm>
-          <a:prstGeom prst="rect">
-            <a:avLst/>
-          </a:prstGeom>
-          <a:noFill/>
-        </p:spPr>
-        <p:txBody>
-          <a:bodyPr wrap="square">
-            <a:spAutoFit/>
-          </a:bodyPr>
-          <a:lstStyle/>
-          <a:p>
-            <a:pPr algn="l">
-              <a:lnSpc>
-                <a:spcPct val="120000"/>
-              </a:lnSpc>
-              <a:spcBef>
-                <a:spcPts val="0"/>
-              </a:spcBef>
-              <a:spcAft>
-                <a:spcPts val="0"/>
-              </a:spcAft>
-              <a:defRPr sz="1300" b="0">
-                <a:solidFill>
-                  <a:srgbClr val="9A9690"/>
-                </a:solidFill>
-                <a:latin typeface="Calibri"/>
-              </a:defRPr>
-            </a:pPr>
-            <a:r>
-              <a:t>parachute.computer  ·  github.com/OpenParachutePBC  ·  aaron@parachute.computer</a:t>
-            </a:r>
-          </a:p>
-        </p:txBody>
-      </p:sp>
-    </p:spTree>
-  </p:cSld>
-  <p:clrMapOvr>
-    <a:masterClrMapping/>
-  </p:clrMapOvr>
-</p:sld>
-</file>
-
-<file path=ppt/slides/slide2.xml><?xml version="1.0" encoding="utf-8"?>
-<p:sld xmlns:a="http://schemas.openxmlformats.org/drawingml/2006/main" xmlns:p="http://schemas.openxmlformats.org/presentationml/2006/main" xmlns:r="http://schemas.openxmlformats.org/officeDocument/2006/relationships">
-  <p:cSld>
-    <p:bg>
-      <p:bgPr>
-        <a:solidFill>
-          <a:srgbClr val="FAF8F4"/>
-        </a:solidFill>
-        <a:effectLst/>
-      </p:bgPr>
-    </p:bg>
-    <p:spTree>
-      <p:nvGrpSpPr>
-        <p:cNvPr id="1" name=""/>
-        <p:cNvGrpSpPr/>
-        <p:nvPr/>
-      </p:nvGrpSpPr>
-      <p:grpSpPr/>
-      <p:sp>
-        <p:nvSpPr>
-          <p:cNvPr id="2" name="TextBox 1"/>
-          <p:cNvSpPr txBox="1"/>
-          <p:nvPr/>
-        </p:nvSpPr>
-        <p:spPr>
-          <a:xfrm>
-            <a:off x="1097280" y="1097280"/>
-            <a:ext cx="3657600" cy="365760"/>
-          </a:xfrm>
-          <a:prstGeom prst="rect">
-            <a:avLst/>
-          </a:prstGeom>
-          <a:noFill/>
-        </p:spPr>
-        <p:txBody>
-          <a:bodyPr wrap="square">
-            <a:spAutoFit/>
-          </a:bodyPr>
-          <a:lstStyle/>
-          <a:p>
-            <a:pPr algn="l">
-              <a:lnSpc>
-                <a:spcPct val="120000"/>
-              </a:lnSpc>
-              <a:spcBef>
-                <a:spcPts val="0"/>
-              </a:spcBef>
-              <a:spcAft>
-                <a:spcPts val="0"/>
-              </a:spcAft>
-              <a:defRPr sz="1100" b="1">
-                <a:solidFill>
-                  <a:srgbClr val="4A7C59"/>
-                </a:solidFill>
-                <a:latin typeface="Calibri"/>
-              </a:defRPr>
-            </a:pPr>
-            <a:r>
-              <a:t>THE LANDSCAPE</a:t>
-            </a:r>
-          </a:p>
-        </p:txBody>
-      </p:sp>
-      <p:sp>
-        <p:nvSpPr>
-          <p:cNvPr id="3" name="TextBox 2"/>
-          <p:cNvSpPr txBox="1"/>
-          <p:nvPr/>
-        </p:nvSpPr>
-        <p:spPr>
-          <a:xfrm>
-            <a:off x="1097280" y="1554480"/>
-            <a:ext cx="9144000" cy="1371600"/>
-          </a:xfrm>
-          <a:prstGeom prst="rect">
-            <a:avLst/>
-          </a:prstGeom>
-          <a:noFill/>
-        </p:spPr>
-        <p:txBody>
-          <a:bodyPr wrap="square">
-            <a:spAutoFit/>
-          </a:bodyPr>
-          <a:lstStyle/>
-          <a:p>
-            <a:pPr algn="l">
-              <a:lnSpc>
-                <a:spcPct val="105000"/>
-              </a:lnSpc>
-              <a:spcBef>
-                <a:spcPts val="0"/>
-              </a:spcBef>
-              <a:spcAft>
-                <a:spcPts val="0"/>
-              </a:spcAft>
-              <a:defRPr sz="4000" b="0">
-                <a:solidFill>
-                  <a:srgbClr val="2C2A26"/>
-                </a:solidFill>
-                <a:latin typeface="Georgia"/>
-              </a:defRPr>
-            </a:pPr>
-            <a:r>
-              <a:t>Everyone is building</a:t>
-            </a:r>
-            <a:br/>
-            <a:r>
-              <a:t>personal AI computers.</a:t>
-            </a:r>
-          </a:p>
-        </p:txBody>
-      </p:sp>
-      <p:sp>
-        <p:nvSpPr>
-          <p:cNvPr id="4" name="TextBox 3"/>
-          <p:cNvSpPr txBox="1"/>
-          <p:nvPr/>
-        </p:nvSpPr>
-        <p:spPr>
-          <a:xfrm>
-            <a:off x="1097280" y="3200400"/>
-            <a:ext cx="9144000" cy="914400"/>
-          </a:xfrm>
-          <a:prstGeom prst="rect">
-            <a:avLst/>
-          </a:prstGeom>
-          <a:noFill/>
-        </p:spPr>
-        <p:txBody>
-          <a:bodyPr wrap="square">
-            <a:spAutoFit/>
-          </a:bodyPr>
-          <a:lstStyle/>
-          <a:p>
-            <a:pPr algn="l">
-              <a:lnSpc>
-                <a:spcPct val="150000"/>
-              </a:lnSpc>
-              <a:spcBef>
-                <a:spcPts val="0"/>
-              </a:spcBef>
-              <a:spcAft>
-                <a:spcPts val="0"/>
-              </a:spcAft>
-              <a:defRPr sz="1800" b="0">
-                <a:solidFill>
-                  <a:srgbClr val="6B6860"/>
-                </a:solidFill>
-                <a:latin typeface="Calibri"/>
-              </a:defRPr>
-            </a:pPr>
-            <a:r>
-              <a:t>Over 100 million people already pay $20+/month for AI — including 50M+ ChatGPT Pro subscribers.</a:t>
-            </a:r>
-            <a:br/>
-            <a:r>
-              <a:t>OpenClaw — 300K+ stars in 3 months. Claude Cowork. ZoComputer. Perplexity Computer. Manus.</a:t>
-            </a:r>
-          </a:p>
-        </p:txBody>
-      </p:sp>
-      <p:sp>
-        <p:nvSpPr>
-          <p:cNvPr id="5" name="TextBox 4"/>
-          <p:cNvSpPr txBox="1"/>
-          <p:nvPr/>
-        </p:nvSpPr>
-        <p:spPr>
-          <a:xfrm>
-            <a:off x="1097280" y="4754880"/>
-            <a:ext cx="2743200" cy="1097280"/>
-          </a:xfrm>
-          <a:prstGeom prst="rect">
-            <a:avLst/>
-          </a:prstGeom>
-          <a:noFill/>
-        </p:spPr>
-        <p:txBody>
-          <a:bodyPr wrap="square">
-            <a:spAutoFit/>
-          </a:bodyPr>
-          <a:lstStyle/>
-          <a:p>
-            <a:pPr algn="l">
-              <a:lnSpc>
-                <a:spcPct val="120000"/>
-              </a:lnSpc>
-              <a:spcBef>
-                <a:spcPts val="0"/>
-              </a:spcBef>
-              <a:spcAft>
-                <a:spcPts val="0"/>
-              </a:spcAft>
-              <a:defRPr sz="6400" b="0">
-                <a:solidFill>
-                  <a:srgbClr val="4A7C59"/>
-                </a:solidFill>
-                <a:latin typeface="Georgia"/>
-              </a:defRPr>
-            </a:pPr>
-            <a:r>
-              <a:t>$50B+</a:t>
-            </a:r>
-          </a:p>
-        </p:txBody>
-      </p:sp>
-      <p:sp>
-        <p:nvSpPr>
-          <p:cNvPr id="6" name="TextBox 5"/>
-          <p:cNvSpPr txBox="1"/>
-          <p:nvPr/>
-        </p:nvSpPr>
-        <p:spPr>
-          <a:xfrm>
-            <a:off x="4114800" y="4983480"/>
-            <a:ext cx="4572000" cy="731520"/>
-          </a:xfrm>
-          <a:prstGeom prst="rect">
-            <a:avLst/>
-          </a:prstGeom>
-          <a:noFill/>
-        </p:spPr>
-        <p:txBody>
-          <a:bodyPr wrap="square">
-            <a:spAutoFit/>
-          </a:bodyPr>
-          <a:lstStyle/>
-          <a:p>
-            <a:pPr algn="l">
-              <a:lnSpc>
-                <a:spcPct val="140000"/>
-              </a:lnSpc>
-              <a:spcBef>
-                <a:spcPts val="0"/>
-              </a:spcBef>
-              <a:spcAft>
-                <a:spcPts val="0"/>
-              </a:spcAft>
-              <a:defRPr sz="1600" b="0">
-                <a:solidFill>
-                  <a:srgbClr val="6B6860"/>
-                </a:solidFill>
-                <a:latin typeface="Calibri"/>
-              </a:defRPr>
-            </a:pPr>
-            <a:r>
-              <a:t>agentic AI market by 2030 · 44% CAGR</a:t>
-            </a:r>
-            <a:br/>
-            <a:r>
-              <a:t>OpenAI alone projects $200B revenue by 2030</a:t>
-            </a:r>
-          </a:p>
-        </p:txBody>
-      </p:sp>
-      <p:sp>
-        <p:nvSpPr>
-          <p:cNvPr id="7" name="TextBox 6"/>
-          <p:cNvSpPr txBox="1"/>
-          <p:nvPr/>
-        </p:nvSpPr>
-        <p:spPr>
-          <a:xfrm>
-            <a:off x="1097280" y="5943600"/>
-            <a:ext cx="9144000" cy="548640"/>
-          </a:xfrm>
-          <a:prstGeom prst="rect">
-            <a:avLst/>
-          </a:prstGeom>
-          <a:noFill/>
-        </p:spPr>
-        <p:txBody>
-          <a:bodyPr wrap="square">
-            <a:spAutoFit/>
-          </a:bodyPr>
-          <a:lstStyle/>
-          <a:p>
-            <a:pPr algn="l">
-              <a:lnSpc>
-                <a:spcPct val="120000"/>
-              </a:lnSpc>
-              <a:spcBef>
-                <a:spcPts val="0"/>
-              </a:spcBef>
-              <a:spcAft>
-                <a:spcPts val="0"/>
-              </a:spcAft>
-              <a:defRPr sz="2200" b="0">
-                <a:solidFill>
-                  <a:srgbClr val="2C2A26"/>
-                </a:solidFill>
-                <a:latin typeface="Georgia"/>
-              </a:defRPr>
-            </a:pPr>
-            <a:r>
-              <a:t>The question isn't whether this market exists — it's who they'll trust.</a:t>
-            </a:r>
-          </a:p>
-        </p:txBody>
-      </p:sp>
-    </p:spTree>
-  </p:cSld>
-  <p:clrMapOvr>
-    <a:masterClrMapping/>
-  </p:clrMapOvr>
-</p:sld>
-</file>
-
-<file path=ppt/slides/slide3.xml><?xml version="1.0" encoding="utf-8"?>
-<p:sld xmlns:a="http://schemas.openxmlformats.org/drawingml/2006/main" xmlns:p="http://schemas.openxmlformats.org/presentationml/2006/main" xmlns:r="http://schemas.openxmlformats.org/officeDocument/2006/relationships">
-  <p:cSld>
-    <p:bg>
-      <p:bgPr>
-        <a:solidFill>
-          <a:srgbClr val="FAF8F4"/>
-        </a:solidFill>
-        <a:effectLst/>
-      </p:bgPr>
-    </p:bg>
-    <p:spTree>
-      <p:nvGrpSpPr>
-        <p:cNvPr id="1" name=""/>
-        <p:cNvGrpSpPr/>
-        <p:nvPr/>
-      </p:nvGrpSpPr>
-      <p:grpSpPr/>
-      <p:sp>
-        <p:nvSpPr>
-          <p:cNvPr id="2" name="TextBox 1"/>
-          <p:cNvSpPr txBox="1"/>
-          <p:nvPr/>
-        </p:nvSpPr>
-        <p:spPr>
-          <a:xfrm>
-            <a:off x="1097280" y="1097280"/>
-            <a:ext cx="3657600" cy="365760"/>
-          </a:xfrm>
-          <a:prstGeom prst="rect">
-            <a:avLst/>
-          </a:prstGeom>
-          <a:noFill/>
-        </p:spPr>
-        <p:txBody>
-          <a:bodyPr wrap="square">
-            <a:spAutoFit/>
-          </a:bodyPr>
-          <a:lstStyle/>
-          <a:p>
-            <a:pPr algn="l">
-              <a:lnSpc>
-                <a:spcPct val="120000"/>
-              </a:lnSpc>
-              <a:spcBef>
-                <a:spcPts val="0"/>
-              </a:spcBef>
-              <a:spcAft>
-                <a:spcPts val="0"/>
-              </a:spcAft>
-              <a:defRPr sz="1100" b="1">
-                <a:solidFill>
-                  <a:srgbClr val="4A7C59"/>
-                </a:solidFill>
-                <a:latin typeface="Calibri"/>
-              </a:defRPr>
-            </a:pPr>
-            <a:r>
-              <a:t>OUR ANSWER</a:t>
-            </a:r>
-          </a:p>
-        </p:txBody>
-      </p:sp>
-      <p:sp>
-        <p:nvSpPr>
-          <p:cNvPr id="3" name="TextBox 2"/>
-          <p:cNvSpPr txBox="1"/>
-          <p:nvPr/>
-        </p:nvSpPr>
-        <p:spPr>
-          <a:xfrm>
-            <a:off x="1097280" y="1554480"/>
-            <a:ext cx="9144000" cy="1371600"/>
-          </a:xfrm>
-          <a:prstGeom prst="rect">
-            <a:avLst/>
-          </a:prstGeom>
-          <a:noFill/>
-        </p:spPr>
-        <p:txBody>
-          <a:bodyPr wrap="square">
-            <a:spAutoFit/>
-          </a:bodyPr>
-          <a:lstStyle/>
-          <a:p>
-            <a:pPr algn="l">
-              <a:lnSpc>
-                <a:spcPct val="105000"/>
-              </a:lnSpc>
-              <a:spcBef>
-                <a:spcPts val="0"/>
-              </a:spcBef>
-              <a:spcAft>
-                <a:spcPts val="0"/>
-              </a:spcAft>
-              <a:defRPr sz="4000" b="0">
-                <a:solidFill>
-                  <a:srgbClr val="2C2A26"/>
-                </a:solidFill>
-                <a:latin typeface="Georgia"/>
-              </a:defRPr>
-            </a:pPr>
-            <a:r>
-              <a:t>Parachute Computer.</a:t>
-            </a:r>
-            <a:br/>
-            <a:r>
-              <a:t>The personal AI you can trust.</a:t>
-            </a:r>
-          </a:p>
-        </p:txBody>
-      </p:sp>
-      <p:sp>
-        <p:nvSpPr>
-          <p:cNvPr id="4" name="TextBox 3"/>
-          <p:cNvSpPr txBox="1"/>
-          <p:nvPr/>
-        </p:nvSpPr>
-        <p:spPr>
-          <a:xfrm>
-            <a:off x="1097280" y="3200400"/>
-            <a:ext cx="9144000" cy="1371600"/>
-          </a:xfrm>
-          <a:prstGeom prst="rect">
-            <a:avLst/>
-          </a:prstGeom>
-          <a:noFill/>
-        </p:spPr>
-        <p:txBody>
-          <a:bodyPr wrap="square">
-            <a:spAutoFit/>
-          </a:bodyPr>
-          <a:lstStyle/>
-          <a:p>
-            <a:pPr algn="l">
-              <a:lnSpc>
-                <a:spcPct val="160000"/>
-              </a:lnSpc>
-              <a:spcBef>
-                <a:spcPts val="0"/>
-              </a:spcBef>
-              <a:spcAft>
-                <a:spcPts val="0"/>
-              </a:spcAft>
-              <a:defRPr sz="2000" b="0">
-                <a:solidFill>
-                  <a:srgbClr val="6B6860"/>
-                </a:solidFill>
-                <a:latin typeface="Calibri"/>
-              </a:defRPr>
-            </a:pPr>
-            <a:r>
-              <a:t>A full agentic computing platform — open source, local-first, self-hostable.</a:t>
-            </a:r>
-            <a:br/>
-            <a:r>
-              <a:t>Your data stays on your device. Use your own AI models.</a:t>
-            </a:r>
-            <a:br/>
-            <a:r>
-              <a:t>Knowledge graph that connects your journals, conversations, and thinking.</a:t>
-            </a:r>
-          </a:p>
-        </p:txBody>
-      </p:sp>
-      <p:sp>
-        <p:nvSpPr>
-          <p:cNvPr id="5" name="TextBox 4"/>
-          <p:cNvSpPr txBox="1"/>
-          <p:nvPr/>
-        </p:nvSpPr>
-        <p:spPr>
-          <a:xfrm>
-            <a:off x="1097280" y="5029200"/>
-            <a:ext cx="9144000" cy="1371600"/>
-          </a:xfrm>
-          <a:prstGeom prst="rect">
-            <a:avLst/>
-          </a:prstGeom>
-          <a:noFill/>
-        </p:spPr>
-        <p:txBody>
-          <a:bodyPr wrap="square">
-            <a:spAutoFit/>
-          </a:bodyPr>
-          <a:lstStyle/>
-          <a:p>
-            <a:pPr algn="l">
-              <a:lnSpc>
-                <a:spcPct val="150000"/>
-              </a:lnSpc>
-              <a:spcBef>
-                <a:spcPts val="0"/>
-              </a:spcBef>
-              <a:spcAft>
-                <a:spcPts val="0"/>
-              </a:spcAft>
-              <a:defRPr sz="1800" b="0">
-                <a:solidFill>
-                  <a:srgbClr val="6B6860"/>
-                </a:solidFill>
-                <a:latin typeface="Calibri"/>
-              </a:defRPr>
-            </a:pPr>
-            <a:r>
-              <a:t>A lot of people don't want to trust big corporations with their most personal data.</a:t>
-            </a:r>
-            <a:br/>
-            <a:r>
-              <a:t>Open source gives them a choice. AGPL-3.0 licensed. Fully transparent.</a:t>
-            </a:r>
-          </a:p>
-        </p:txBody>
-      </p:sp>
-      <p:sp>
-        <p:nvSpPr>
-          <p:cNvPr id="6" name="TextBox 5"/>
-          <p:cNvSpPr txBox="1"/>
-          <p:nvPr/>
-        </p:nvSpPr>
-        <p:spPr>
-          <a:xfrm>
-            <a:off x="1097280" y="5943600"/>
-            <a:ext cx="9144000" cy="548640"/>
-          </a:xfrm>
-          <a:prstGeom prst="rect">
-            <a:avLst/>
-          </a:prstGeom>
-          <a:noFill/>
-        </p:spPr>
-        <p:txBody>
-          <a:bodyPr wrap="square">
-            <a:spAutoFit/>
-          </a:bodyPr>
-          <a:lstStyle/>
-          <a:p>
-            <a:pPr algn="l">
-              <a:lnSpc>
-                <a:spcPct val="120000"/>
-              </a:lnSpc>
-              <a:spcBef>
-                <a:spcPts val="0"/>
-              </a:spcBef>
-              <a:spcAft>
-                <a:spcPts val="0"/>
-              </a:spcAft>
-              <a:defRPr sz="2200" b="0">
-                <a:solidFill>
-                  <a:srgbClr val="2C2A26"/>
-                </a:solidFill>
-                <a:latin typeface="Georgia"/>
-              </a:defRPr>
-            </a:pPr>
-            <a:r>
-              <a:t>But most people don't want to self-host a server.</a:t>
-            </a:r>
-          </a:p>
-        </p:txBody>
-      </p:sp>
-    </p:spTree>
-  </p:cSld>
-  <p:clrMapOvr>
-    <a:masterClrMapping/>
-  </p:clrMapOvr>
-</p:sld>
-</file>
-
-<file path=ppt/slides/slide4.xml><?xml version="1.0" encoding="utf-8"?>
-<p:sld xmlns:a="http://schemas.openxmlformats.org/drawingml/2006/main" xmlns:p="http://schemas.openxmlformats.org/presentationml/2006/main" xmlns:r="http://schemas.openxmlformats.org/officeDocument/2006/relationships">
-  <p:cSld>
-    <p:bg>
-      <p:bgPr>
-        <a:solidFill>
-          <a:srgbClr val="FAF8F4"/>
-        </a:solidFill>
-        <a:effectLst/>
-      </p:bgPr>
-    </p:bg>
-    <p:spTree>
-      <p:nvGrpSpPr>
-        <p:cNvPr id="1" name=""/>
-        <p:cNvGrpSpPr/>
-        <p:nvPr/>
-      </p:nvGrpSpPr>
-      <p:grpSpPr/>
-      <p:sp>
-        <p:nvSpPr>
-          <p:cNvPr id="2" name="TextBox 1"/>
-          <p:cNvSpPr txBox="1"/>
-          <p:nvPr/>
-        </p:nvSpPr>
-        <p:spPr>
-          <a:xfrm>
-            <a:off x="1097280" y="1097280"/>
-            <a:ext cx="3657600" cy="365760"/>
-          </a:xfrm>
-          <a:prstGeom prst="rect">
-            <a:avLst/>
-          </a:prstGeom>
-          <a:noFill/>
-        </p:spPr>
-        <p:txBody>
-          <a:bodyPr wrap="square">
-            <a:spAutoFit/>
-          </a:bodyPr>
-          <a:lstStyle/>
-          <a:p>
-            <a:pPr algn="l">
-              <a:lnSpc>
-                <a:spcPct val="120000"/>
-              </a:lnSpc>
-              <a:spcBef>
-                <a:spcPts val="0"/>
-              </a:spcBef>
-              <a:spcAft>
-                <a:spcPts val="0"/>
-              </a:spcAft>
-              <a:defRPr sz="1100" b="1">
-                <a:solidFill>
-                  <a:srgbClr val="4A7C59"/>
-                </a:solidFill>
-                <a:latin typeface="Calibri"/>
-              </a:defRPr>
-            </a:pPr>
-            <a:r>
-              <a:t>THE OPPORTUNITY</a:t>
-            </a:r>
-          </a:p>
-        </p:txBody>
-      </p:sp>
-      <p:sp>
-        <p:nvSpPr>
-          <p:cNvPr id="3" name="TextBox 2"/>
-          <p:cNvSpPr txBox="1"/>
-          <p:nvPr/>
-        </p:nvSpPr>
-        <p:spPr>
-          <a:xfrm>
-            <a:off x="1097280" y="1554480"/>
-            <a:ext cx="9144000" cy="1371600"/>
-          </a:xfrm>
-          <a:prstGeom prst="rect">
-            <a:avLst/>
-          </a:prstGeom>
-          <a:noFill/>
-        </p:spPr>
-        <p:txBody>
-          <a:bodyPr wrap="square">
-            <a:spAutoFit/>
-          </a:bodyPr>
-          <a:lstStyle/>
-          <a:p>
-            <a:pPr algn="l">
-              <a:lnSpc>
-                <a:spcPct val="105000"/>
-              </a:lnSpc>
-              <a:spcBef>
-                <a:spcPts val="0"/>
-              </a:spcBef>
-              <a:spcAft>
-                <a:spcPts val="0"/>
-              </a:spcAft>
-              <a:defRPr sz="4000" b="0">
-                <a:solidFill>
-                  <a:srgbClr val="2C2A26"/>
-                </a:solidFill>
-                <a:latin typeface="Georgia"/>
-              </a:defRPr>
-            </a:pPr>
-            <a:r>
-              <a:t>The other 95% just want</a:t>
-            </a:r>
-            <a:br/>
-            <a:r>
-              <a:t>something that works.</a:t>
-            </a:r>
-          </a:p>
-        </p:txBody>
-      </p:sp>
-      <p:sp>
-        <p:nvSpPr>
-          <p:cNvPr id="4" name="TextBox 3"/>
-          <p:cNvSpPr txBox="1"/>
-          <p:nvPr/>
-        </p:nvSpPr>
-        <p:spPr>
-          <a:xfrm>
-            <a:off x="1097280" y="3200400"/>
-            <a:ext cx="9144000" cy="1371600"/>
-          </a:xfrm>
-          <a:prstGeom prst="rect">
-            <a:avLst/>
-          </a:prstGeom>
-          <a:noFill/>
-        </p:spPr>
-        <p:txBody>
-          <a:bodyPr wrap="square">
-            <a:spAutoFit/>
-          </a:bodyPr>
-          <a:lstStyle/>
-          <a:p>
-            <a:pPr algn="l">
-              <a:lnSpc>
-                <a:spcPct val="160000"/>
-              </a:lnSpc>
-              <a:spcBef>
-                <a:spcPts val="0"/>
-              </a:spcBef>
-              <a:spcAft>
-                <a:spcPts val="0"/>
-              </a:spcAft>
-              <a:defRPr sz="2200" b="0">
-                <a:solidFill>
-                  <a:srgbClr val="6B6860"/>
-                </a:solidFill>
-                <a:latin typeface="Georgia"/>
-              </a:defRPr>
-            </a:pPr>
-            <a:r>
-              <a:t>The artist who wants to organize creative ideas.</a:t>
-            </a:r>
-            <a:br/>
-            <a:r>
-              <a:t>The small business owner tracking their days.</a:t>
-            </a:r>
-            <a:br/>
-            <a:r>
-              <a:t>The parent who wants a better way to remember and reflect.</a:t>
-            </a:r>
-          </a:p>
-        </p:txBody>
-      </p:sp>
-      <p:sp>
-        <p:nvSpPr>
-          <p:cNvPr id="5" name="TextBox 4"/>
-          <p:cNvSpPr txBox="1"/>
-          <p:nvPr/>
-        </p:nvSpPr>
-        <p:spPr>
-          <a:xfrm>
-            <a:off x="1097280" y="5212080"/>
-            <a:ext cx="9144000" cy="914400"/>
-          </a:xfrm>
-          <a:prstGeom prst="rect">
-            <a:avLst/>
-          </a:prstGeom>
-          <a:noFill/>
-        </p:spPr>
-        <p:txBody>
-          <a:bodyPr wrap="square">
-            <a:spAutoFit/>
-          </a:bodyPr>
-          <a:lstStyle/>
-          <a:p>
-            <a:pPr algn="l">
-              <a:lnSpc>
-                <a:spcPct val="150000"/>
-              </a:lnSpc>
-              <a:spcBef>
-                <a:spcPts val="0"/>
-              </a:spcBef>
-              <a:spcAft>
-                <a:spcPts val="0"/>
-              </a:spcAft>
-              <a:defRPr sz="2200" b="0">
-                <a:solidFill>
-                  <a:srgbClr val="2C2A26"/>
-                </a:solidFill>
-                <a:latin typeface="Georgia"/>
-              </a:defRPr>
-            </a:pPr>
-            <a:r>
-              <a:t>They need a system that learns them —</a:t>
-            </a:r>
-            <a:br/>
-            <a:r>
-              <a:t>not one that demands they learn it.</a:t>
-            </a:r>
-          </a:p>
-        </p:txBody>
-      </p:sp>
-    </p:spTree>
-  </p:cSld>
-  <p:clrMapOvr>
-    <a:masterClrMapping/>
-  </p:clrMapOvr>
-</p:sld>
-</file>
-
-<file path=ppt/slides/slide5.xml><?xml version="1.0" encoding="utf-8"?>
-<p:sld xmlns:a="http://schemas.openxmlformats.org/drawingml/2006/main" xmlns:p="http://schemas.openxmlformats.org/presentationml/2006/main" xmlns:r="http://schemas.openxmlformats.org/officeDocument/2006/relationships">
-  <p:cSld>
-    <p:bg>
-      <p:bgPr>
-        <a:solidFill>
-          <a:srgbClr val="FAF8F4"/>
-        </a:solidFill>
-        <a:effectLst/>
-      </p:bgPr>
-    </p:bg>
-    <p:spTree>
-      <p:nvGrpSpPr>
-        <p:cNvPr id="1" name=""/>
-        <p:cNvGrpSpPr/>
-        <p:nvPr/>
-      </p:nvGrpSpPr>
-      <p:grpSpPr/>
-      <p:sp>
-        <p:nvSpPr>
-          <p:cNvPr id="2" name="TextBox 1"/>
-          <p:cNvSpPr txBox="1"/>
-          <p:nvPr/>
-        </p:nvSpPr>
-        <p:spPr>
-          <a:xfrm>
-            <a:off x="1097280" y="1097280"/>
-            <a:ext cx="3657600" cy="365760"/>
-          </a:xfrm>
-          <a:prstGeom prst="rect">
-            <a:avLst/>
-          </a:prstGeom>
-          <a:noFill/>
-        </p:spPr>
-        <p:txBody>
-          <a:bodyPr wrap="square">
-            <a:spAutoFit/>
-          </a:bodyPr>
-          <a:lstStyle/>
-          <a:p>
-            <a:pPr algn="l">
-              <a:lnSpc>
-                <a:spcPct val="120000"/>
-              </a:lnSpc>
-              <a:spcBef>
-                <a:spcPts val="0"/>
-              </a:spcBef>
-              <a:spcAft>
-                <a:spcPts val="0"/>
-              </a:spcAft>
-              <a:defRPr sz="1100" b="1">
-                <a:solidFill>
-                  <a:srgbClr val="4A7C59"/>
-                </a:solidFill>
-                <a:latin typeface="Calibri"/>
-              </a:defRPr>
-            </a:pPr>
-            <a:r>
-              <a:t>THE SOLUTION</a:t>
-            </a:r>
-          </a:p>
-        </p:txBody>
-      </p:sp>
-      <p:sp>
-        <p:nvSpPr>
-          <p:cNvPr id="3" name="TextBox 2"/>
-          <p:cNvSpPr txBox="1"/>
-          <p:nvPr/>
-        </p:nvSpPr>
-        <p:spPr>
-          <a:xfrm>
-            <a:off x="1097280" y="1554480"/>
-            <a:ext cx="9144000" cy="1371600"/>
-          </a:xfrm>
-          <a:prstGeom prst="rect">
-            <a:avLst/>
-          </a:prstGeom>
-          <a:noFill/>
-        </p:spPr>
-        <p:txBody>
-          <a:bodyPr wrap="square">
-            <a:spAutoFit/>
-          </a:bodyPr>
-          <a:lstStyle/>
-          <a:p>
-            <a:pPr algn="l">
-              <a:lnSpc>
-                <a:spcPct val="105000"/>
-              </a:lnSpc>
-              <a:spcBef>
-                <a:spcPts val="0"/>
-              </a:spcBef>
-              <a:spcAft>
-                <a:spcPts val="0"/>
-              </a:spcAft>
-              <a:defRPr sz="4000" b="0">
-                <a:solidFill>
-                  <a:srgbClr val="2C2A26"/>
-                </a:solidFill>
-                <a:latin typeface="Georgia"/>
-              </a:defRPr>
-            </a:pPr>
-            <a:r>
-              <a:t>Parachute Daily.</a:t>
-            </a:r>
-            <a:br/>
-            <a:r>
-              <a:t>Just talk.</a:t>
-            </a:r>
-          </a:p>
-        </p:txBody>
-      </p:sp>
-      <p:sp>
-        <p:nvSpPr>
-          <p:cNvPr id="4" name="TextBox 3"/>
-          <p:cNvSpPr txBox="1"/>
-          <p:nvPr/>
-        </p:nvSpPr>
-        <p:spPr>
-          <a:xfrm>
-            <a:off x="1097280" y="3200400"/>
-            <a:ext cx="5029200" cy="2560320"/>
-          </a:xfrm>
-          <a:prstGeom prst="rect">
-            <a:avLst/>
-          </a:prstGeom>
-          <a:noFill/>
-        </p:spPr>
-        <p:txBody>
-          <a:bodyPr wrap="square">
-            <a:spAutoFit/>
-          </a:bodyPr>
-          <a:lstStyle/>
-          <a:p>
-            <a:pPr algn="l">
-              <a:lnSpc>
-                <a:spcPct val="150000"/>
-              </a:lnSpc>
-              <a:spcBef>
-                <a:spcPts val="0"/>
-              </a:spcBef>
-              <a:spcAft>
-                <a:spcPts val="0"/>
-              </a:spcAft>
-              <a:defRPr sz="1800" b="0">
-                <a:solidFill>
-                  <a:srgbClr val="6B6860"/>
-                </a:solidFill>
-                <a:latin typeface="Calibri"/>
-              </a:defRPr>
-            </a:pPr>
-            <a:r>
-              <a:t>A voice-first journal.</a:t>
-            </a:r>
-            <a:br/>
-            <a:br/>
-            <a:r>
-              <a:t>Speak into a wearable pendant or your phone —</a:t>
-            </a:r>
-            <a:br/>
-            <a:r>
-              <a:t>on a walk, in the car, wherever thinking happens.</a:t>
-            </a:r>
-            <a:br/>
-            <a:br/>
-            <a:r>
-              <a:t>AI weaves through gently:</a:t>
-            </a:r>
-            <a:br/>
-            <a:r>
-              <a:t>  ·  Daily reflections on your entries</a:t>
-            </a:r>
-            <a:br/>
-            <a:r>
-              <a:t>  ·  Pattern recognition over time</a:t>
-            </a:r>
-            <a:br/>
-            <a:r>
-              <a:t>  ·  Weekly synthesis of your thinking</a:t>
-            </a:r>
-          </a:p>
-        </p:txBody>
-      </p:sp>
-      <p:sp>
-        <p:nvSpPr>
-          <p:cNvPr id="5" name="TextBox 4"/>
-          <p:cNvSpPr txBox="1"/>
-          <p:nvPr/>
-        </p:nvSpPr>
-        <p:spPr>
-          <a:xfrm>
-            <a:off x="1097280" y="5943600"/>
-            <a:ext cx="5029200" cy="457200"/>
-          </a:xfrm>
-          <a:prstGeom prst="rect">
-            <a:avLst/>
-          </a:prstGeom>
-          <a:noFill/>
-        </p:spPr>
-        <p:txBody>
-          <a:bodyPr wrap="square">
-            <a:spAutoFit/>
-          </a:bodyPr>
-          <a:lstStyle/>
-          <a:p>
-            <a:pPr algn="l">
-              <a:lnSpc>
-                <a:spcPct val="120000"/>
-              </a:lnSpc>
-              <a:spcBef>
-                <a:spcPts val="0"/>
-              </a:spcBef>
-              <a:spcAft>
-                <a:spcPts val="0"/>
-              </a:spcAft>
-              <a:defRPr sz="1800" b="0">
-                <a:solidFill>
-                  <a:srgbClr val="2C2A26"/>
-                </a:solidFill>
-                <a:latin typeface="Calibri"/>
-              </a:defRPr>
-            </a:pPr>
-            <a:r>
-              <a:t>No learning curve. No technical sophistication required.</a:t>
-            </a:r>
-          </a:p>
-        </p:txBody>
-      </p:sp>
-      <p:sp>
-        <p:nvSpPr>
-          <p:cNvPr id="6" name="Rounded Rectangle 5"/>
-          <p:cNvSpPr/>
-          <p:nvPr/>
-        </p:nvSpPr>
-        <p:spPr>
-          <a:xfrm>
-            <a:off x="7132320" y="3200400"/>
-            <a:ext cx="4114800" cy="2743200"/>
-          </a:xfrm>
-          <a:prstGeom prst="roundRect">
-            <a:avLst/>
-          </a:prstGeom>
-          <a:solidFill>
-            <a:srgbClr val="F3F0EA"/>
-          </a:solidFill>
-          <a:ln w="12700">
-            <a:solidFill>
-              <a:srgbClr val="E4E0D8"/>
-            </a:solidFill>
-          </a:ln>
-        </p:spPr>
-        <p:style>
-          <a:lnRef idx="1">
-            <a:schemeClr val="accent1"/>
-          </a:lnRef>
-          <a:fillRef idx="3">
-            <a:schemeClr val="accent1"/>
-          </a:fillRef>
-          <a:effectRef idx="2">
-            <a:schemeClr val="accent1"/>
-          </a:effectRef>
-          <a:fontRef idx="minor">
-            <a:schemeClr val="lt1"/>
-          </a:fontRef>
-        </p:style>
-        <p:txBody>
-          <a:bodyPr rtlCol="0" anchor="ctr"/>
-          <a:lstStyle/>
-          <a:p>
-            <a:pPr algn="ctr"/>
-          </a:p>
-        </p:txBody>
-      </p:sp>
-      <p:sp>
-        <p:nvSpPr>
-          <p:cNvPr id="7" name="TextBox 6"/>
-          <p:cNvSpPr txBox="1"/>
-          <p:nvPr/>
-        </p:nvSpPr>
-        <p:spPr>
-          <a:xfrm>
-            <a:off x="7498079" y="3474720"/>
-            <a:ext cx="3383280" cy="365760"/>
-          </a:xfrm>
-          <a:prstGeom prst="rect">
-            <a:avLst/>
-          </a:prstGeom>
-          <a:noFill/>
-        </p:spPr>
-        <p:txBody>
-          <a:bodyPr wrap="square">
-            <a:spAutoFit/>
-          </a:bodyPr>
-          <a:lstStyle/>
-          <a:p>
-            <a:pPr algn="l">
-              <a:lnSpc>
-                <a:spcPct val="120000"/>
-              </a:lnSpc>
-              <a:spcBef>
-                <a:spcPts val="0"/>
-              </a:spcBef>
-              <a:spcAft>
-                <a:spcPts val="0"/>
-              </a:spcAft>
-              <a:defRPr sz="1100" b="1">
-                <a:solidFill>
-                  <a:srgbClr val="4A7C59"/>
-                </a:solidFill>
-                <a:latin typeface="Calibri"/>
-              </a:defRPr>
-            </a:pPr>
-            <a:r>
-              <a:t>THE PENDANT</a:t>
-            </a:r>
-          </a:p>
-        </p:txBody>
-      </p:sp>
-      <p:sp>
-        <p:nvSpPr>
-          <p:cNvPr id="8" name="TextBox 7"/>
-          <p:cNvSpPr txBox="1"/>
-          <p:nvPr/>
-        </p:nvSpPr>
-        <p:spPr>
-          <a:xfrm>
-            <a:off x="7498079" y="3931920"/>
-            <a:ext cx="3383280" cy="1828800"/>
-          </a:xfrm>
-          <a:prstGeom prst="rect">
-            <a:avLst/>
-          </a:prstGeom>
-          <a:noFill/>
-        </p:spPr>
-        <p:txBody>
-          <a:bodyPr wrap="square">
-            <a:spAutoFit/>
-          </a:bodyPr>
-          <a:lstStyle/>
-          <a:p>
-            <a:pPr algn="l">
-              <a:lnSpc>
-                <a:spcPct val="145000"/>
-              </a:lnSpc>
-              <a:spcBef>
-                <a:spcPts val="0"/>
-              </a:spcBef>
-              <a:spcAft>
-                <a:spcPts val="0"/>
-              </a:spcAft>
-              <a:defRPr sz="1600" b="0">
-                <a:solidFill>
-                  <a:srgbClr val="6B6860"/>
-                </a:solidFill>
-                <a:latin typeface="Calibri"/>
-              </a:defRPr>
-            </a:pPr>
-            <a:r>
-              <a:t>Wearable voice capture device.</a:t>
-            </a:r>
-            <a:br/>
-            <a:br/>
-            <a:r>
-              <a:t>Go for a walk. Talk.</a:t>
-            </a:r>
-            <a:br/>
-            <a:r>
-              <a:t>Your thoughts become structured</a:t>
-            </a:r>
-            <a:br/>
-            <a:r>
-              <a:t>knowledge by the time you're home.</a:t>
-            </a:r>
-            <a:br/>
-            <a:br/>
-            <a:r>
-              <a:t>Working prototype on stage today.</a:t>
-            </a:r>
-          </a:p>
-        </p:txBody>
-      </p:sp>
-    </p:spTree>
-  </p:cSld>
-  <p:clrMapOvr>
-    <a:masterClrMapping/>
-  </p:clrMapOvr>
-</p:sld>
-</file>
-
-<file path=ppt/slides/slide6.xml><?xml version="1.0" encoding="utf-8"?>
-<p:sld xmlns:a="http://schemas.openxmlformats.org/drawingml/2006/main" xmlns:p="http://schemas.openxmlformats.org/presentationml/2006/main" xmlns:r="http://schemas.openxmlformats.org/officeDocument/2006/relationships">
-  <p:cSld>
-    <p:bg>
-      <p:bgPr>
-        <a:solidFill>
-          <a:srgbClr val="FAF8F4"/>
-        </a:solidFill>
-        <a:effectLst/>
-      </p:bgPr>
-    </p:bg>
-    <p:spTree>
-      <p:nvGrpSpPr>
-        <p:cNvPr id="1" name=""/>
-        <p:cNvGrpSpPr/>
-        <p:nvPr/>
-      </p:nvGrpSpPr>
-      <p:grpSpPr/>
-      <p:sp>
-        <p:nvSpPr>
-          <p:cNvPr id="2" name="TextBox 1"/>
-          <p:cNvSpPr txBox="1"/>
-          <p:nvPr/>
-        </p:nvSpPr>
-        <p:spPr>
-          <a:xfrm>
-            <a:off x="1097280" y="1097280"/>
-            <a:ext cx="3657600" cy="365760"/>
-          </a:xfrm>
-          <a:prstGeom prst="rect">
-            <a:avLst/>
-          </a:prstGeom>
-          <a:noFill/>
-        </p:spPr>
-        <p:txBody>
-          <a:bodyPr wrap="square">
-            <a:spAutoFit/>
-          </a:bodyPr>
-          <a:lstStyle/>
-          <a:p>
-            <a:pPr algn="l">
-              <a:lnSpc>
-                <a:spcPct val="120000"/>
-              </a:lnSpc>
-              <a:spcBef>
-                <a:spcPts val="0"/>
-              </a:spcBef>
-              <a:spcAft>
-                <a:spcPts val="0"/>
-              </a:spcAft>
-              <a:defRPr sz="1100" b="1">
-                <a:solidFill>
-                  <a:srgbClr val="4A7C59"/>
-                </a:solidFill>
-                <a:latin typeface="Calibri"/>
-              </a:defRPr>
-            </a:pPr>
-            <a:r>
-              <a:t>THE INSIGHT</a:t>
-            </a:r>
-          </a:p>
-        </p:txBody>
-      </p:sp>
-      <p:sp>
-        <p:nvSpPr>
-          <p:cNvPr id="3" name="TextBox 2"/>
-          <p:cNvSpPr txBox="1"/>
-          <p:nvPr/>
-        </p:nvSpPr>
-        <p:spPr>
-          <a:xfrm>
-            <a:off x="1097280" y="1554480"/>
-            <a:ext cx="9144000" cy="1371600"/>
-          </a:xfrm>
-          <a:prstGeom prst="rect">
-            <a:avLst/>
-          </a:prstGeom>
-          <a:noFill/>
-        </p:spPr>
-        <p:txBody>
-          <a:bodyPr wrap="square">
-            <a:spAutoFit/>
-          </a:bodyPr>
-          <a:lstStyle/>
-          <a:p>
-            <a:pPr algn="l">
-              <a:lnSpc>
-                <a:spcPct val="105000"/>
-              </a:lnSpc>
-              <a:spcBef>
-                <a:spcPts val="0"/>
-              </a:spcBef>
-              <a:spcAft>
-                <a:spcPts val="0"/>
-              </a:spcAft>
-              <a:defRPr sz="4000" b="0">
-                <a:solidFill>
-                  <a:srgbClr val="2C2A26"/>
-                </a:solidFill>
-                <a:latin typeface="Georgia"/>
-              </a:defRPr>
-            </a:pPr>
-            <a:r>
-              <a:t>Context compounds.</a:t>
-            </a:r>
-          </a:p>
-        </p:txBody>
-      </p:sp>
-      <p:sp>
-        <p:nvSpPr>
-          <p:cNvPr id="4" name="TextBox 3"/>
-          <p:cNvSpPr txBox="1"/>
-          <p:nvPr/>
-        </p:nvSpPr>
-        <p:spPr>
-          <a:xfrm>
-            <a:off x="1097280" y="3017520"/>
-            <a:ext cx="9144000" cy="731520"/>
-          </a:xfrm>
-          <a:prstGeom prst="rect">
-            <a:avLst/>
-          </a:prstGeom>
-          <a:noFill/>
-        </p:spPr>
-        <p:txBody>
-          <a:bodyPr wrap="square">
-            <a:spAutoFit/>
-          </a:bodyPr>
-          <a:lstStyle/>
-          <a:p>
-            <a:pPr algn="l">
-              <a:lnSpc>
-                <a:spcPct val="150000"/>
-              </a:lnSpc>
-              <a:spcBef>
-                <a:spcPts val="0"/>
-              </a:spcBef>
-              <a:spcAft>
-                <a:spcPts val="0"/>
-              </a:spcAft>
-              <a:defRPr sz="2000" b="0">
-                <a:solidFill>
-                  <a:srgbClr val="6B6860"/>
-                </a:solidFill>
-                <a:latin typeface="Calibri"/>
-              </a:defRPr>
-            </a:pPr>
-            <a:r>
-              <a:t>Every day you use Parachute, your AI gets meaningfully better.</a:t>
-            </a:r>
-            <a:br/>
-            <a:r>
-              <a:t>No competitor can shortcut months of accumulated personal context.</a:t>
-            </a:r>
-          </a:p>
-        </p:txBody>
-      </p:sp>
-      <p:sp>
-        <p:nvSpPr>
-          <p:cNvPr id="5" name="TextBox 4"/>
-          <p:cNvSpPr txBox="1"/>
-          <p:nvPr/>
-        </p:nvSpPr>
-        <p:spPr>
-          <a:xfrm>
-            <a:off x="1371600" y="4206240"/>
-            <a:ext cx="548640" cy="411480"/>
-          </a:xfrm>
-          <a:prstGeom prst="rect">
-            <a:avLst/>
-          </a:prstGeom>
-          <a:noFill/>
-        </p:spPr>
-        <p:txBody>
-          <a:bodyPr wrap="square">
-            <a:spAutoFit/>
-          </a:bodyPr>
-          <a:lstStyle/>
-          <a:p>
-            <a:pPr algn="l">
-              <a:lnSpc>
-                <a:spcPct val="120000"/>
-              </a:lnSpc>
-              <a:spcBef>
-                <a:spcPts val="0"/>
-              </a:spcBef>
-              <a:spcAft>
-                <a:spcPts val="0"/>
-              </a:spcAft>
-              <a:defRPr sz="1400" b="0">
-                <a:solidFill>
-                  <a:srgbClr val="9A9690"/>
-                </a:solidFill>
-                <a:latin typeface="Courier New"/>
-              </a:defRPr>
-            </a:pPr>
-            <a:r>
-              <a:t>01</a:t>
-            </a:r>
-          </a:p>
-        </p:txBody>
-      </p:sp>
-      <p:sp>
-        <p:nvSpPr>
-          <p:cNvPr id="6" name="TextBox 5"/>
-          <p:cNvSpPr txBox="1"/>
-          <p:nvPr/>
-        </p:nvSpPr>
-        <p:spPr>
-          <a:xfrm>
-            <a:off x="2011680" y="4206240"/>
-            <a:ext cx="5486400" cy="411480"/>
-          </a:xfrm>
-          <a:prstGeom prst="rect">
-            <a:avLst/>
-          </a:prstGeom>
-          <a:noFill/>
-        </p:spPr>
-        <p:txBody>
-          <a:bodyPr wrap="square">
-            <a:spAutoFit/>
-          </a:bodyPr>
-          <a:lstStyle/>
-          <a:p>
-            <a:pPr algn="l">
-              <a:lnSpc>
-                <a:spcPct val="120000"/>
-              </a:lnSpc>
-              <a:spcBef>
-                <a:spcPts val="0"/>
-              </a:spcBef>
-              <a:spcAft>
-                <a:spcPts val="0"/>
-              </a:spcAft>
-              <a:defRPr sz="2000" b="0">
-                <a:solidFill>
-                  <a:srgbClr val="2C2A26"/>
-                </a:solidFill>
-                <a:latin typeface="Georgia"/>
-              </a:defRPr>
-            </a:pPr>
-            <a:r>
-              <a:t>Start journaling in Daily</a:t>
-            </a:r>
-          </a:p>
-        </p:txBody>
-      </p:sp>
-      <p:sp>
-        <p:nvSpPr>
-          <p:cNvPr id="7" name="TextBox 6"/>
-          <p:cNvSpPr txBox="1"/>
-          <p:nvPr/>
-        </p:nvSpPr>
-        <p:spPr>
-          <a:xfrm>
-            <a:off x="1371600" y="4663440"/>
-            <a:ext cx="548640" cy="411480"/>
-          </a:xfrm>
-          <a:prstGeom prst="rect">
-            <a:avLst/>
-          </a:prstGeom>
-          <a:noFill/>
-        </p:spPr>
-        <p:txBody>
-          <a:bodyPr wrap="square">
-            <a:spAutoFit/>
-          </a:bodyPr>
-          <a:lstStyle/>
-          <a:p>
-            <a:pPr algn="l">
-              <a:lnSpc>
-                <a:spcPct val="120000"/>
-              </a:lnSpc>
-              <a:spcBef>
-                <a:spcPts val="0"/>
-              </a:spcBef>
-              <a:spcAft>
-                <a:spcPts val="0"/>
-              </a:spcAft>
-              <a:defRPr sz="1400" b="0">
-                <a:solidFill>
-                  <a:srgbClr val="9A9690"/>
-                </a:solidFill>
-                <a:latin typeface="Courier New"/>
-              </a:defRPr>
-            </a:pPr>
-            <a:r>
-              <a:t>02</a:t>
-            </a:r>
-          </a:p>
-        </p:txBody>
-      </p:sp>
-      <p:sp>
-        <p:nvSpPr>
-          <p:cNvPr id="8" name="TextBox 7"/>
-          <p:cNvSpPr txBox="1"/>
-          <p:nvPr/>
-        </p:nvSpPr>
-        <p:spPr>
-          <a:xfrm>
-            <a:off x="2011680" y="4663440"/>
-            <a:ext cx="5486400" cy="411480"/>
-          </a:xfrm>
-          <a:prstGeom prst="rect">
-            <a:avLst/>
-          </a:prstGeom>
-          <a:noFill/>
-        </p:spPr>
-        <p:txBody>
-          <a:bodyPr wrap="square">
-            <a:spAutoFit/>
-          </a:bodyPr>
-          <a:lstStyle/>
-          <a:p>
-            <a:pPr algn="l">
-              <a:lnSpc>
-                <a:spcPct val="120000"/>
-              </a:lnSpc>
-              <a:spcBef>
-                <a:spcPts val="0"/>
-              </a:spcBef>
-              <a:spcAft>
-                <a:spcPts val="0"/>
-              </a:spcAft>
-              <a:defRPr sz="2000" b="0">
-                <a:solidFill>
-                  <a:srgbClr val="2C2A26"/>
-                </a:solidFill>
-                <a:latin typeface="Georgia"/>
-              </a:defRPr>
-            </a:pPr>
-            <a:r>
-              <a:t>Build months of personal context</a:t>
-            </a:r>
-          </a:p>
-        </p:txBody>
-      </p:sp>
-      <p:sp>
-        <p:nvSpPr>
-          <p:cNvPr id="9" name="TextBox 8"/>
-          <p:cNvSpPr txBox="1"/>
-          <p:nvPr/>
-        </p:nvSpPr>
-        <p:spPr>
-          <a:xfrm>
-            <a:off x="1371600" y="5120640"/>
-            <a:ext cx="548640" cy="411480"/>
-          </a:xfrm>
-          <a:prstGeom prst="rect">
-            <a:avLst/>
-          </a:prstGeom>
-          <a:noFill/>
-        </p:spPr>
-        <p:txBody>
-          <a:bodyPr wrap="square">
-            <a:spAutoFit/>
-          </a:bodyPr>
-          <a:lstStyle/>
-          <a:p>
-            <a:pPr algn="l">
-              <a:lnSpc>
-                <a:spcPct val="120000"/>
-              </a:lnSpc>
-              <a:spcBef>
-                <a:spcPts val="0"/>
-              </a:spcBef>
-              <a:spcAft>
-                <a:spcPts val="0"/>
-              </a:spcAft>
-              <a:defRPr sz="1400" b="0">
-                <a:solidFill>
-                  <a:srgbClr val="9A9690"/>
-                </a:solidFill>
-                <a:latin typeface="Courier New"/>
-              </a:defRPr>
-            </a:pPr>
-            <a:r>
-              <a:t>03</a:t>
-            </a:r>
-          </a:p>
-        </p:txBody>
-      </p:sp>
-      <p:sp>
-        <p:nvSpPr>
-          <p:cNvPr id="10" name="TextBox 9"/>
-          <p:cNvSpPr txBox="1"/>
-          <p:nvPr/>
-        </p:nvSpPr>
-        <p:spPr>
-          <a:xfrm>
-            <a:off x="2011680" y="5120640"/>
-            <a:ext cx="5486400" cy="411480"/>
-          </a:xfrm>
-          <a:prstGeom prst="rect">
-            <a:avLst/>
-          </a:prstGeom>
-          <a:noFill/>
-        </p:spPr>
-        <p:txBody>
-          <a:bodyPr wrap="square">
-            <a:spAutoFit/>
-          </a:bodyPr>
-          <a:lstStyle/>
-          <a:p>
-            <a:pPr algn="l">
-              <a:lnSpc>
-                <a:spcPct val="120000"/>
-              </a:lnSpc>
-              <a:spcBef>
-                <a:spcPts val="0"/>
-              </a:spcBef>
-              <a:spcAft>
-                <a:spcPts val="0"/>
-              </a:spcAft>
-              <a:defRPr sz="2000" b="0">
-                <a:solidFill>
-                  <a:srgbClr val="2C2A26"/>
-                </a:solidFill>
-                <a:latin typeface="Georgia"/>
-              </a:defRPr>
-            </a:pPr>
-            <a:r>
-              <a:t>Upgrade to Parachute Computer</a:t>
-            </a:r>
-          </a:p>
-        </p:txBody>
-      </p:sp>
-      <p:sp>
-        <p:nvSpPr>
-          <p:cNvPr id="11" name="TextBox 10"/>
-          <p:cNvSpPr txBox="1"/>
-          <p:nvPr/>
-        </p:nvSpPr>
-        <p:spPr>
-          <a:xfrm>
-            <a:off x="1371600" y="5577840"/>
-            <a:ext cx="548640" cy="411480"/>
-          </a:xfrm>
-          <a:prstGeom prst="rect">
-            <a:avLst/>
-          </a:prstGeom>
-          <a:noFill/>
-        </p:spPr>
-        <p:txBody>
-          <a:bodyPr wrap="square">
-            <a:spAutoFit/>
-          </a:bodyPr>
-          <a:lstStyle/>
-          <a:p>
-            <a:pPr algn="l">
-              <a:lnSpc>
-                <a:spcPct val="120000"/>
-              </a:lnSpc>
-              <a:spcBef>
-                <a:spcPts val="0"/>
-              </a:spcBef>
-              <a:spcAft>
-                <a:spcPts val="0"/>
-              </a:spcAft>
-              <a:defRPr sz="1400" b="0">
-                <a:solidFill>
-                  <a:srgbClr val="9A9690"/>
-                </a:solidFill>
-                <a:latin typeface="Courier New"/>
-              </a:defRPr>
-            </a:pPr>
-            <a:r>
-              <a:t>04</a:t>
-            </a:r>
-          </a:p>
-        </p:txBody>
-      </p:sp>
-      <p:sp>
-        <p:nvSpPr>
-          <p:cNvPr id="12" name="TextBox 11"/>
-          <p:cNvSpPr txBox="1"/>
-          <p:nvPr/>
-        </p:nvSpPr>
-        <p:spPr>
-          <a:xfrm>
-            <a:off x="2011680" y="5577840"/>
-            <a:ext cx="5486400" cy="411480"/>
-          </a:xfrm>
-          <a:prstGeom prst="rect">
-            <a:avLst/>
-          </a:prstGeom>
-          <a:noFill/>
-        </p:spPr>
-        <p:txBody>
-          <a:bodyPr wrap="square">
-            <a:spAutoFit/>
-          </a:bodyPr>
-          <a:lstStyle/>
-          <a:p>
-            <a:pPr algn="l">
-              <a:lnSpc>
-                <a:spcPct val="120000"/>
-              </a:lnSpc>
-              <a:spcBef>
-                <a:spcPts val="0"/>
-              </a:spcBef>
-              <a:spcAft>
-                <a:spcPts val="0"/>
-              </a:spcAft>
-              <a:defRPr sz="2000" b="0">
-                <a:solidFill>
-                  <a:srgbClr val="2C2A26"/>
-                </a:solidFill>
-                <a:latin typeface="Georgia"/>
-              </a:defRPr>
-            </a:pPr>
-            <a:r>
-              <a:t>Brain ingests your history instantly</a:t>
-            </a:r>
-          </a:p>
-        </p:txBody>
-      </p:sp>
-      <p:sp>
-        <p:nvSpPr>
-          <p:cNvPr id="13" name="TextBox 12"/>
-          <p:cNvSpPr txBox="1"/>
-          <p:nvPr/>
-        </p:nvSpPr>
-        <p:spPr>
-          <a:xfrm>
-            <a:off x="1371600" y="6035040"/>
-            <a:ext cx="548640" cy="411480"/>
-          </a:xfrm>
-          <a:prstGeom prst="rect">
-            <a:avLst/>
-          </a:prstGeom>
-          <a:noFill/>
-        </p:spPr>
-        <p:txBody>
-          <a:bodyPr wrap="square">
-            <a:spAutoFit/>
-          </a:bodyPr>
-          <a:lstStyle/>
-          <a:p>
-            <a:pPr algn="l">
-              <a:lnSpc>
-                <a:spcPct val="120000"/>
-              </a:lnSpc>
-              <a:spcBef>
-                <a:spcPts val="0"/>
-              </a:spcBef>
-              <a:spcAft>
-                <a:spcPts val="0"/>
-              </a:spcAft>
-              <a:defRPr sz="1400" b="0">
-                <a:solidFill>
-                  <a:srgbClr val="4A7C59"/>
-                </a:solidFill>
-                <a:latin typeface="Courier New"/>
-              </a:defRPr>
-            </a:pPr>
-            <a:r>
-              <a:t>→</a:t>
-            </a:r>
-          </a:p>
-        </p:txBody>
-      </p:sp>
-      <p:sp>
-        <p:nvSpPr>
-          <p:cNvPr id="14" name="TextBox 13"/>
-          <p:cNvSpPr txBox="1"/>
-          <p:nvPr/>
-        </p:nvSpPr>
-        <p:spPr>
-          <a:xfrm>
-            <a:off x="2011680" y="6035040"/>
-            <a:ext cx="5486400" cy="411480"/>
-          </a:xfrm>
-          <a:prstGeom prst="rect">
-            <a:avLst/>
-          </a:prstGeom>
-          <a:noFill/>
-        </p:spPr>
-        <p:txBody>
-          <a:bodyPr wrap="square">
-            <a:spAutoFit/>
-          </a:bodyPr>
-          <a:lstStyle/>
-          <a:p>
-            <a:pPr algn="l">
-              <a:lnSpc>
-                <a:spcPct val="120000"/>
-              </a:lnSpc>
-              <a:spcBef>
-                <a:spcPts val="0"/>
-              </a:spcBef>
-              <a:spcAft>
-                <a:spcPts val="0"/>
-              </a:spcAft>
-              <a:defRPr sz="2000" b="1">
-                <a:solidFill>
-                  <a:srgbClr val="4A7C59"/>
-                </a:solidFill>
-                <a:latin typeface="Georgia"/>
-              </a:defRPr>
-            </a:pPr>
-            <a:r>
-              <a:t>System already knows you</a:t>
-            </a:r>
-          </a:p>
-        </p:txBody>
-      </p:sp>
-    </p:spTree>
-  </p:cSld>
-  <p:clrMapOvr>
-    <a:masterClrMapping/>
-  </p:clrMapOvr>
-</p:sld>
-</file>
-
-<file path=ppt/slides/slide7.xml><?xml version="1.0" encoding="utf-8"?>
-<p:sld xmlns:a="http://schemas.openxmlformats.org/drawingml/2006/main" xmlns:p="http://schemas.openxmlformats.org/presentationml/2006/main" xmlns:r="http://schemas.openxmlformats.org/officeDocument/2006/relationships">
-  <p:cSld>
-    <p:bg>
-      <p:bgPr>
-        <a:solidFill>
-          <a:srgbClr val="FAF8F4"/>
-        </a:solidFill>
-        <a:effectLst/>
-      </p:bgPr>
-    </p:bg>
-    <p:spTree>
-      <p:nvGrpSpPr>
-        <p:cNvPr id="1" name=""/>
-        <p:cNvGrpSpPr/>
-        <p:nvPr/>
-      </p:nvGrpSpPr>
-      <p:grpSpPr/>
-      <p:sp>
-        <p:nvSpPr>
-          <p:cNvPr id="2" name="TextBox 1"/>
-          <p:cNvSpPr txBox="1"/>
-          <p:nvPr/>
-        </p:nvSpPr>
-        <p:spPr>
-          <a:xfrm>
-            <a:off x="1097280" y="1097280"/>
-            <a:ext cx="3657600" cy="365760"/>
-          </a:xfrm>
-          <a:prstGeom prst="rect">
-            <a:avLst/>
-          </a:prstGeom>
-          <a:noFill/>
-        </p:spPr>
-        <p:txBody>
-          <a:bodyPr wrap="square">
-            <a:spAutoFit/>
-          </a:bodyPr>
-          <a:lstStyle/>
-          <a:p>
-            <a:pPr algn="l">
-              <a:lnSpc>
-                <a:spcPct val="120000"/>
-              </a:lnSpc>
-              <a:spcBef>
-                <a:spcPts val="0"/>
-              </a:spcBef>
-              <a:spcAft>
-                <a:spcPts val="0"/>
-              </a:spcAft>
-              <a:defRPr sz="1100" b="1">
-                <a:solidFill>
-                  <a:srgbClr val="4A7C59"/>
-                </a:solidFill>
-                <a:latin typeface="Calibri"/>
-              </a:defRPr>
-            </a:pPr>
-            <a:r>
-              <a:t>WHY US</a:t>
-            </a:r>
-          </a:p>
-        </p:txBody>
-      </p:sp>
-      <p:sp>
-        <p:nvSpPr>
-          <p:cNvPr id="3" name="TextBox 2"/>
-          <p:cNvSpPr txBox="1"/>
-          <p:nvPr/>
-        </p:nvSpPr>
-        <p:spPr>
-          <a:xfrm>
-            <a:off x="1097280" y="1554480"/>
-            <a:ext cx="9144000" cy="1371600"/>
-          </a:xfrm>
-          <a:prstGeom prst="rect">
-            <a:avLst/>
-          </a:prstGeom>
-          <a:noFill/>
-        </p:spPr>
-        <p:txBody>
-          <a:bodyPr wrap="square">
-            <a:spAutoFit/>
-          </a:bodyPr>
-          <a:lstStyle/>
-          <a:p>
-            <a:pPr algn="l">
-              <a:lnSpc>
-                <a:spcPct val="105000"/>
-              </a:lnSpc>
-              <a:spcBef>
-                <a:spcPts val="0"/>
-              </a:spcBef>
-              <a:spcAft>
-                <a:spcPts val="0"/>
-              </a:spcAft>
-              <a:defRPr sz="4000" b="0">
-                <a:solidFill>
-                  <a:srgbClr val="2C2A26"/>
-                </a:solidFill>
-                <a:latin typeface="Georgia"/>
-              </a:defRPr>
-            </a:pPr>
-            <a:r>
-              <a:t>Open source is</a:t>
-            </a:r>
-            <a:br/>
-            <a:r>
-              <a:t>the trust foundation.</a:t>
-            </a:r>
-          </a:p>
-        </p:txBody>
-      </p:sp>
-      <p:sp>
-        <p:nvSpPr>
-          <p:cNvPr id="4" name="TextBox 3"/>
-          <p:cNvSpPr txBox="1"/>
-          <p:nvPr/>
-        </p:nvSpPr>
-        <p:spPr>
-          <a:xfrm>
-            <a:off x="1097280" y="3200400"/>
-            <a:ext cx="3200400" cy="320040"/>
-          </a:xfrm>
-          <a:prstGeom prst="rect">
-            <a:avLst/>
-          </a:prstGeom>
-          <a:noFill/>
-        </p:spPr>
-        <p:txBody>
-          <a:bodyPr wrap="square">
-            <a:spAutoFit/>
-          </a:bodyPr>
-          <a:lstStyle/>
-          <a:p>
-            <a:pPr algn="l">
-              <a:lnSpc>
-                <a:spcPct val="120000"/>
-              </a:lnSpc>
-              <a:spcBef>
-                <a:spcPts val="0"/>
-              </a:spcBef>
-              <a:spcAft>
-                <a:spcPts val="0"/>
-              </a:spcAft>
-              <a:defRPr sz="1800" b="1">
-                <a:solidFill>
-                  <a:srgbClr val="2C2A26"/>
-                </a:solidFill>
-                <a:latin typeface="Calibri"/>
-              </a:defRPr>
-            </a:pPr>
-            <a:r>
-              <a:t>AGPL-3.0 licensed</a:t>
-            </a:r>
-          </a:p>
-        </p:txBody>
-      </p:sp>
-      <p:sp>
-        <p:nvSpPr>
-          <p:cNvPr id="5" name="TextBox 4"/>
-          <p:cNvSpPr txBox="1"/>
-          <p:nvPr/>
-        </p:nvSpPr>
-        <p:spPr>
-          <a:xfrm>
-            <a:off x="4572000" y="3200400"/>
-            <a:ext cx="6400800" cy="320040"/>
-          </a:xfrm>
-          <a:prstGeom prst="rect">
-            <a:avLst/>
-          </a:prstGeom>
-          <a:noFill/>
-        </p:spPr>
-        <p:txBody>
-          <a:bodyPr wrap="square">
-            <a:spAutoFit/>
-          </a:bodyPr>
-          <a:lstStyle/>
-          <a:p>
-            <a:pPr algn="l">
-              <a:lnSpc>
-                <a:spcPct val="120000"/>
-              </a:lnSpc>
-              <a:spcBef>
-                <a:spcPts val="0"/>
-              </a:spcBef>
-              <a:spcAft>
-                <a:spcPts val="0"/>
-              </a:spcAft>
-              <a:defRPr sz="1600" b="0">
-                <a:solidFill>
-                  <a:srgbClr val="6B6860"/>
-                </a:solidFill>
-                <a:latin typeface="Calibri"/>
-              </a:defRPr>
-            </a:pPr>
-            <a:r>
-              <a:t>Fully transparent. Proprietary forks must share changes.</a:t>
-            </a:r>
-          </a:p>
-        </p:txBody>
-      </p:sp>
-      <p:sp>
-        <p:nvSpPr>
-          <p:cNvPr id="6" name="TextBox 5"/>
-          <p:cNvSpPr txBox="1"/>
-          <p:nvPr/>
-        </p:nvSpPr>
-        <p:spPr>
-          <a:xfrm>
-            <a:off x="1097280" y="3794760"/>
-            <a:ext cx="3200400" cy="320040"/>
-          </a:xfrm>
-          <a:prstGeom prst="rect">
-            <a:avLst/>
-          </a:prstGeom>
-          <a:noFill/>
-        </p:spPr>
-        <p:txBody>
-          <a:bodyPr wrap="square">
-            <a:spAutoFit/>
-          </a:bodyPr>
-          <a:lstStyle/>
-          <a:p>
-            <a:pPr algn="l">
-              <a:lnSpc>
-                <a:spcPct val="120000"/>
-              </a:lnSpc>
-              <a:spcBef>
-                <a:spcPts val="0"/>
-              </a:spcBef>
-              <a:spcAft>
-                <a:spcPts val="0"/>
-              </a:spcAft>
-              <a:defRPr sz="1800" b="1">
-                <a:solidFill>
-                  <a:srgbClr val="2C2A26"/>
-                </a:solidFill>
-                <a:latin typeface="Calibri"/>
-              </a:defRPr>
-            </a:pPr>
-            <a:r>
-              <a:t>Local-first</a:t>
-            </a:r>
-          </a:p>
-        </p:txBody>
-      </p:sp>
-      <p:sp>
-        <p:nvSpPr>
-          <p:cNvPr id="7" name="TextBox 6"/>
-          <p:cNvSpPr txBox="1"/>
-          <p:nvPr/>
-        </p:nvSpPr>
-        <p:spPr>
-          <a:xfrm>
-            <a:off x="4572000" y="3794760"/>
-            <a:ext cx="6400800" cy="320040"/>
-          </a:xfrm>
-          <a:prstGeom prst="rect">
-            <a:avLst/>
-          </a:prstGeom>
-          <a:noFill/>
-        </p:spPr>
-        <p:txBody>
-          <a:bodyPr wrap="square">
-            <a:spAutoFit/>
-          </a:bodyPr>
-          <a:lstStyle/>
-          <a:p>
-            <a:pPr algn="l">
-              <a:lnSpc>
-                <a:spcPct val="120000"/>
-              </a:lnSpc>
-              <a:spcBef>
-                <a:spcPts val="0"/>
-              </a:spcBef>
-              <a:spcAft>
-                <a:spcPts val="0"/>
-              </a:spcAft>
-              <a:defRPr sz="1600" b="0">
-                <a:solidFill>
-                  <a:srgbClr val="6B6860"/>
-                </a:solidFill>
-                <a:latin typeface="Calibri"/>
-              </a:defRPr>
-            </a:pPr>
-            <a:r>
-              <a:t>Your data on your device. Portable. Exportable. Yours.</a:t>
-            </a:r>
-          </a:p>
-        </p:txBody>
-      </p:sp>
-      <p:sp>
-        <p:nvSpPr>
-          <p:cNvPr id="8" name="TextBox 7"/>
-          <p:cNvSpPr txBox="1"/>
-          <p:nvPr/>
-        </p:nvSpPr>
-        <p:spPr>
-          <a:xfrm>
-            <a:off x="1097280" y="4389120"/>
-            <a:ext cx="3200400" cy="320040"/>
-          </a:xfrm>
-          <a:prstGeom prst="rect">
-            <a:avLst/>
-          </a:prstGeom>
-          <a:noFill/>
-        </p:spPr>
-        <p:txBody>
-          <a:bodyPr wrap="square">
-            <a:spAutoFit/>
-          </a:bodyPr>
-          <a:lstStyle/>
-          <a:p>
-            <a:pPr algn="l">
-              <a:lnSpc>
-                <a:spcPct val="120000"/>
-              </a:lnSpc>
-              <a:spcBef>
-                <a:spcPts val="0"/>
-              </a:spcBef>
-              <a:spcAft>
-                <a:spcPts val="0"/>
-              </a:spcAft>
-              <a:defRPr sz="1800" b="1">
-                <a:solidFill>
-                  <a:srgbClr val="2C2A26"/>
-                </a:solidFill>
-                <a:latin typeface="Calibri"/>
-              </a:defRPr>
-            </a:pPr>
-            <a:r>
-              <a:t>Public Benefit Corporation</a:t>
-            </a:r>
-          </a:p>
-        </p:txBody>
-      </p:sp>
-      <p:sp>
-        <p:nvSpPr>
-          <p:cNvPr id="9" name="TextBox 8"/>
-          <p:cNvSpPr txBox="1"/>
-          <p:nvPr/>
-        </p:nvSpPr>
-        <p:spPr>
-          <a:xfrm>
-            <a:off x="4572000" y="4389120"/>
-            <a:ext cx="6400800" cy="320040"/>
-          </a:xfrm>
-          <a:prstGeom prst="rect">
-            <a:avLst/>
-          </a:prstGeom>
-          <a:noFill/>
-        </p:spPr>
-        <p:txBody>
-          <a:bodyPr wrap="square">
-            <a:spAutoFit/>
-          </a:bodyPr>
-          <a:lstStyle/>
-          <a:p>
-            <a:pPr algn="l">
-              <a:lnSpc>
-                <a:spcPct val="120000"/>
-              </a:lnSpc>
-              <a:spcBef>
-                <a:spcPts val="0"/>
-              </a:spcBef>
-              <a:spcAft>
-                <a:spcPts val="0"/>
-              </a:spcAft>
-              <a:defRPr sz="1600" b="0">
-                <a:solidFill>
-                  <a:srgbClr val="6B6860"/>
-                </a:solidFill>
-                <a:latin typeface="Calibri"/>
-              </a:defRPr>
-            </a:pPr>
-            <a:r>
-              <a:t>Legal mandate to serve users, not just shareholders.</a:t>
-            </a:r>
-          </a:p>
-        </p:txBody>
-      </p:sp>
-      <p:sp>
-        <p:nvSpPr>
-          <p:cNvPr id="10" name="TextBox 9"/>
-          <p:cNvSpPr txBox="1"/>
-          <p:nvPr/>
-        </p:nvSpPr>
-        <p:spPr>
-          <a:xfrm>
-            <a:off x="1097280" y="4983480"/>
-            <a:ext cx="3200400" cy="320040"/>
-          </a:xfrm>
-          <a:prstGeom prst="rect">
-            <a:avLst/>
-          </a:prstGeom>
-          <a:noFill/>
-        </p:spPr>
-        <p:txBody>
-          <a:bodyPr wrap="square">
-            <a:spAutoFit/>
-          </a:bodyPr>
-          <a:lstStyle/>
-          <a:p>
-            <a:pPr algn="l">
-              <a:lnSpc>
-                <a:spcPct val="120000"/>
-              </a:lnSpc>
-              <a:spcBef>
-                <a:spcPts val="0"/>
-              </a:spcBef>
-              <a:spcAft>
-                <a:spcPts val="0"/>
-              </a:spcAft>
-              <a:defRPr sz="1800" b="1">
-                <a:solidFill>
-                  <a:srgbClr val="2C2A26"/>
-                </a:solidFill>
-                <a:latin typeface="Calibri"/>
-              </a:defRPr>
-            </a:pPr>
-            <a:r>
-              <a:t>Software is no longer a moat</a:t>
-            </a:r>
-          </a:p>
-        </p:txBody>
-      </p:sp>
-      <p:sp>
-        <p:nvSpPr>
-          <p:cNvPr id="11" name="TextBox 10"/>
-          <p:cNvSpPr txBox="1"/>
-          <p:nvPr/>
-        </p:nvSpPr>
-        <p:spPr>
-          <a:xfrm>
-            <a:off x="4572000" y="4983480"/>
-            <a:ext cx="6400800" cy="320040"/>
-          </a:xfrm>
-          <a:prstGeom prst="rect">
-            <a:avLst/>
-          </a:prstGeom>
-          <a:noFill/>
-        </p:spPr>
-        <p:txBody>
-          <a:bodyPr wrap="square">
-            <a:spAutoFit/>
-          </a:bodyPr>
-          <a:lstStyle/>
-          <a:p>
-            <a:pPr algn="l">
-              <a:lnSpc>
-                <a:spcPct val="120000"/>
-              </a:lnSpc>
-              <a:spcBef>
-                <a:spcPts val="0"/>
-              </a:spcBef>
-              <a:spcAft>
-                <a:spcPts val="0"/>
-              </a:spcAft>
-              <a:defRPr sz="1600" b="0">
-                <a:solidFill>
-                  <a:srgbClr val="6B6860"/>
-                </a:solidFill>
-                <a:latin typeface="Calibri"/>
-              </a:defRPr>
-            </a:pPr>
-            <a:r>
-              <a:t>Ideas get cloned in a day. Trust and context cannot.</a:t>
-            </a:r>
-          </a:p>
-        </p:txBody>
-      </p:sp>
-      <p:sp>
-        <p:nvSpPr>
-          <p:cNvPr id="12" name="TextBox 11"/>
-          <p:cNvSpPr txBox="1"/>
-          <p:nvPr/>
-        </p:nvSpPr>
-        <p:spPr>
-          <a:xfrm>
-            <a:off x="1097280" y="5577840"/>
-            <a:ext cx="3200400" cy="320040"/>
-          </a:xfrm>
-          <a:prstGeom prst="rect">
-            <a:avLst/>
-          </a:prstGeom>
-          <a:noFill/>
-        </p:spPr>
-        <p:txBody>
-          <a:bodyPr wrap="square">
-            <a:spAutoFit/>
-          </a:bodyPr>
-          <a:lstStyle/>
-          <a:p>
-            <a:pPr algn="l">
-              <a:lnSpc>
-                <a:spcPct val="120000"/>
-              </a:lnSpc>
-              <a:spcBef>
-                <a:spcPts val="0"/>
-              </a:spcBef>
-              <a:spcAft>
-                <a:spcPts val="0"/>
-              </a:spcAft>
-              <a:defRPr sz="1800" b="1">
-                <a:solidFill>
-                  <a:srgbClr val="2C2A26"/>
-                </a:solidFill>
-                <a:latin typeface="Calibri"/>
-              </a:defRPr>
-            </a:pPr>
-            <a:r>
-              <a:t>Community as growth engine</a:t>
-            </a:r>
-          </a:p>
-        </p:txBody>
-      </p:sp>
-      <p:sp>
-        <p:nvSpPr>
-          <p:cNvPr id="13" name="TextBox 12"/>
-          <p:cNvSpPr txBox="1"/>
-          <p:nvPr/>
-        </p:nvSpPr>
-        <p:spPr>
-          <a:xfrm>
-            <a:off x="4572000" y="5577840"/>
-            <a:ext cx="6400800" cy="320040"/>
-          </a:xfrm>
-          <a:prstGeom prst="rect">
-            <a:avLst/>
-          </a:prstGeom>
-          <a:noFill/>
-        </p:spPr>
-        <p:txBody>
-          <a:bodyPr wrap="square">
-            <a:spAutoFit/>
-          </a:bodyPr>
-          <a:lstStyle/>
-          <a:p>
-            <a:pPr algn="l">
-              <a:lnSpc>
-                <a:spcPct val="120000"/>
-              </a:lnSpc>
-              <a:spcBef>
-                <a:spcPts val="0"/>
-              </a:spcBef>
-              <a:spcAft>
-                <a:spcPts val="0"/>
-              </a:spcAft>
-              <a:defRPr sz="1600" b="0">
-                <a:solidFill>
-                  <a:srgbClr val="6B6860"/>
-                </a:solidFill>
-                <a:latin typeface="Calibri"/>
-              </a:defRPr>
-            </a:pPr>
-            <a:r>
-              <a:t>We're building a learning community around AI tools — users who learn together become power users who build for others.</a:t>
-            </a:r>
-          </a:p>
-        </p:txBody>
-      </p:sp>
     </p:spTree>
   </p:cSld>
   <p:clrMapOvr>
@@ -7336,7 +6565,7 @@
               </a:defRPr>
             </a:pPr>
             <a:r>
-              <a:t>BUSINESS MODEL</a:t>
+              <a:t>TEAM &amp; TRACTION</a:t>
             </a:r>
           </a:p>
         </p:txBody>
@@ -7381,11 +6610,11 @@
               </a:defRPr>
             </a:pPr>
             <a:r>
-              <a:t>Start free.</a:t>
+              <a:t>Self-funded.</a:t>
             </a:r>
             <a:br/>
             <a:r>
-              <a:t>Grow with every user.</a:t>
+              <a:t>Built from scratch.</a:t>
             </a:r>
           </a:p>
         </p:txBody>
@@ -7399,7 +6628,81 @@
         <p:spPr>
           <a:xfrm>
             <a:off x="1097280" y="3200400"/>
-            <a:ext cx="1645920" cy="365760"/>
+            <a:ext cx="5029200" cy="2743200"/>
+          </a:xfrm>
+          <a:prstGeom prst="rect">
+            <a:avLst/>
+          </a:prstGeom>
+          <a:noFill/>
+        </p:spPr>
+        <p:txBody>
+          <a:bodyPr wrap="square">
+            <a:spAutoFit/>
+          </a:bodyPr>
+          <a:lstStyle/>
+          <a:p>
+            <a:pPr algn="l">
+              <a:lnSpc>
+                <a:spcPct val="155000"/>
+              </a:lnSpc>
+              <a:spcBef>
+                <a:spcPts val="0"/>
+              </a:spcBef>
+              <a:spcAft>
+                <a:spcPts val="0"/>
+              </a:spcAft>
+              <a:defRPr sz="1600" b="0">
+                <a:solidFill>
+                  <a:srgbClr val="6B6860"/>
+                </a:solidFill>
+                <a:latin typeface="Calibri"/>
+              </a:defRPr>
+            </a:pPr>
+            <a:r>
+              <a:t>What exists today:</a:t>
+            </a:r>
+            <a:br/>
+            <a:br/>
+            <a:r>
+              <a:t>  ·  Working server, app, and graph-native memory</a:t>
+            </a:r>
+            <a:br/>
+            <a:r>
+              <a:t>  ·  Local voice transcription (fully offline)</a:t>
+            </a:r>
+            <a:br/>
+            <a:r>
+              <a:t>  ·  Multi-agent system with trust tiers</a:t>
+            </a:r>
+            <a:br/>
+            <a:r>
+              <a:t>  ·  Telegram, Discord, Matrix connectors</a:t>
+            </a:r>
+            <a:br/>
+            <a:r>
+              <a:t>  ·  Functional pendant prototype</a:t>
+            </a:r>
+            <a:br/>
+            <a:r>
+              <a:t>  ·  Beta launching next month</a:t>
+            </a:r>
+            <a:br/>
+            <a:r>
+              <a:t>  ·  PBC incorporated in Colorado</a:t>
+            </a:r>
+          </a:p>
+        </p:txBody>
+      </p:sp>
+      <p:sp>
+        <p:nvSpPr>
+          <p:cNvPr id="5" name="TextBox 4"/>
+          <p:cNvSpPr txBox="1"/>
+          <p:nvPr/>
+        </p:nvSpPr>
+        <p:spPr>
+          <a:xfrm>
+            <a:off x="7132320" y="3017520"/>
+            <a:ext cx="3657600" cy="320040"/>
           </a:xfrm>
           <a:prstGeom prst="rect">
             <a:avLst/>
@@ -7422,29 +6725,29 @@
               <a:spcAft>
                 <a:spcPts val="0"/>
               </a:spcAft>
-              <a:defRPr sz="2400" b="0">
-                <a:solidFill>
-                  <a:srgbClr val="9A9690"/>
-                </a:solidFill>
-                <a:latin typeface="Georgia"/>
+              <a:defRPr sz="1100" b="1">
+                <a:solidFill>
+                  <a:srgbClr val="4A7C59"/>
+                </a:solidFill>
+                <a:latin typeface="Calibri"/>
               </a:defRPr>
             </a:pPr>
             <a:r>
-              <a:t>Free</a:t>
-            </a:r>
-          </a:p>
-        </p:txBody>
-      </p:sp>
-      <p:sp>
-        <p:nvSpPr>
-          <p:cNvPr id="5" name="TextBox 4"/>
+              <a:t>THE TEAM</a:t>
+            </a:r>
+          </a:p>
+        </p:txBody>
+      </p:sp>
+      <p:sp>
+        <p:nvSpPr>
+          <p:cNvPr id="6" name="TextBox 5"/>
           <p:cNvSpPr txBox="1"/>
           <p:nvPr/>
         </p:nvSpPr>
         <p:spPr>
           <a:xfrm>
-            <a:off x="2926080" y="3246120"/>
-            <a:ext cx="7315200" cy="365760"/>
+            <a:off x="7132320" y="3566160"/>
+            <a:ext cx="4114800" cy="274320"/>
           </a:xfrm>
           <a:prstGeom prst="rect">
             <a:avLst/>
@@ -7467,29 +6770,29 @@
               <a:spcAft>
                 <a:spcPts val="0"/>
               </a:spcAft>
-              <a:defRPr sz="1600" b="0">
-                <a:solidFill>
-                  <a:srgbClr val="6B6860"/>
+              <a:defRPr sz="1400" b="1">
+                <a:solidFill>
+                  <a:srgbClr val="2C2A26"/>
                 </a:solidFill>
                 <a:latin typeface="Calibri"/>
               </a:defRPr>
             </a:pPr>
             <a:r>
-              <a:t>Offline journal + on-device transcription. Zero hosting cost.</a:t>
-            </a:r>
-          </a:p>
-        </p:txBody>
-      </p:sp>
-      <p:sp>
-        <p:nvSpPr>
-          <p:cNvPr id="6" name="TextBox 5"/>
+              <a:t>Aaron Gabriel Neyer</a:t>
+            </a:r>
+          </a:p>
+        </p:txBody>
+      </p:sp>
+      <p:sp>
+        <p:nvSpPr>
+          <p:cNvPr id="7" name="TextBox 6"/>
           <p:cNvSpPr txBox="1"/>
           <p:nvPr/>
         </p:nvSpPr>
         <p:spPr>
           <a:xfrm>
-            <a:off x="1097280" y="3840480"/>
-            <a:ext cx="1645920" cy="365760"/>
+            <a:off x="7132320" y="3822192"/>
+            <a:ext cx="4114800" cy="274320"/>
           </a:xfrm>
           <a:prstGeom prst="rect">
             <a:avLst/>
@@ -7512,29 +6815,29 @@
               <a:spcAft>
                 <a:spcPts val="0"/>
               </a:spcAft>
-              <a:defRPr sz="2400" b="0">
+              <a:defRPr sz="1200" b="0">
                 <a:solidFill>
                   <a:srgbClr val="6B6860"/>
                 </a:solidFill>
-                <a:latin typeface="Georgia"/>
+                <a:latin typeface="Calibri"/>
               </a:defRPr>
             </a:pPr>
             <a:r>
-              <a:t>$2/mo</a:t>
-            </a:r>
-          </a:p>
-        </p:txBody>
-      </p:sp>
-      <p:sp>
-        <p:nvSpPr>
-          <p:cNvPr id="7" name="TextBox 6"/>
+              <a:t>Founder · Product &amp; architecture</a:t>
+            </a:r>
+          </a:p>
+        </p:txBody>
+      </p:sp>
+      <p:sp>
+        <p:nvSpPr>
+          <p:cNvPr id="8" name="TextBox 7"/>
           <p:cNvSpPr txBox="1"/>
           <p:nvPr/>
         </p:nvSpPr>
         <p:spPr>
           <a:xfrm>
-            <a:off x="2926080" y="3886200"/>
-            <a:ext cx="7315200" cy="365760"/>
+            <a:off x="7132320" y="4114800"/>
+            <a:ext cx="4114800" cy="274320"/>
           </a:xfrm>
           <a:prstGeom prst="rect">
             <a:avLst/>
@@ -7557,59 +6860,16 @@
               <a:spcAft>
                 <a:spcPts val="0"/>
               </a:spcAft>
-              <a:defRPr sz="1600" b="0">
-                <a:solidFill>
-                  <a:srgbClr val="6B6860"/>
+              <a:defRPr sz="1400" b="1">
+                <a:solidFill>
+                  <a:srgbClr val="2C2A26"/>
                 </a:solidFill>
                 <a:latin typeface="Calibri"/>
               </a:defRPr>
             </a:pPr>
             <a:r>
-              <a:t>Cloud sync across devices. Your notes everywhere.</a:t>
-            </a:r>
-          </a:p>
-        </p:txBody>
-      </p:sp>
-      <p:sp>
-        <p:nvSpPr>
-          <p:cNvPr id="8" name="Rounded Rectangle 7"/>
-          <p:cNvSpPr/>
-          <p:nvPr/>
-        </p:nvSpPr>
-        <p:spPr>
-          <a:xfrm>
-            <a:off x="914400" y="4343400"/>
-            <a:ext cx="9601200" cy="594360"/>
-          </a:xfrm>
-          <a:prstGeom prst="roundRect">
-            <a:avLst/>
-          </a:prstGeom>
-          <a:solidFill>
-            <a:srgbClr val="E8F5EC"/>
-          </a:solidFill>
-          <a:ln>
-            <a:noFill/>
-          </a:ln>
-        </p:spPr>
-        <p:style>
-          <a:lnRef idx="1">
-            <a:schemeClr val="accent1"/>
-          </a:lnRef>
-          <a:fillRef idx="3">
-            <a:schemeClr val="accent1"/>
-          </a:fillRef>
-          <a:effectRef idx="2">
-            <a:schemeClr val="accent1"/>
-          </a:effectRef>
-          <a:fontRef idx="minor">
-            <a:schemeClr val="lt1"/>
-          </a:fontRef>
-        </p:style>
-        <p:txBody>
-          <a:bodyPr rtlCol="0" anchor="ctr"/>
-          <a:lstStyle/>
-          <a:p>
-            <a:pPr algn="ctr"/>
+              <a:t>Jon Bo</a:t>
+            </a:r>
           </a:p>
         </p:txBody>
       </p:sp>
@@ -7621,8 +6881,8 @@
         </p:nvSpPr>
         <p:spPr>
           <a:xfrm>
-            <a:off x="1097280" y="4480560"/>
-            <a:ext cx="1645920" cy="365760"/>
+            <a:off x="7132320" y="4370832"/>
+            <a:ext cx="4114800" cy="274320"/>
           </a:xfrm>
           <a:prstGeom prst="rect">
             <a:avLst/>
@@ -7645,15 +6905,15 @@
               <a:spcAft>
                 <a:spcPts val="0"/>
               </a:spcAft>
-              <a:defRPr sz="2400" b="0">
-                <a:solidFill>
-                  <a:srgbClr val="4A7C59"/>
-                </a:solidFill>
-                <a:latin typeface="Georgia"/>
+              <a:defRPr sz="1200" b="0">
+                <a:solidFill>
+                  <a:srgbClr val="6B6860"/>
+                </a:solidFill>
+                <a:latin typeface="Calibri"/>
               </a:defRPr>
             </a:pPr>
             <a:r>
-              <a:t>$10/mo</a:t>
+              <a:t>Daily co-lead · Founding engineer</a:t>
             </a:r>
           </a:p>
         </p:txBody>
@@ -7666,8 +6926,8 @@
         </p:nvSpPr>
         <p:spPr>
           <a:xfrm>
-            <a:off x="2926080" y="4526280"/>
-            <a:ext cx="7315200" cy="365760"/>
+            <a:off x="7132320" y="4663440"/>
+            <a:ext cx="4114800" cy="274320"/>
           </a:xfrm>
           <a:prstGeom prst="rect">
             <a:avLst/>
@@ -7690,15 +6950,15 @@
               <a:spcAft>
                 <a:spcPts val="0"/>
               </a:spcAft>
-              <a:defRPr sz="1600" b="0">
-                <a:solidFill>
-                  <a:srgbClr val="6B6860"/>
+              <a:defRPr sz="1400" b="1">
+                <a:solidFill>
+                  <a:srgbClr val="2C2A26"/>
                 </a:solidFill>
                 <a:latin typeface="Calibri"/>
               </a:defRPr>
             </a:pPr>
             <a:r>
-              <a:t>Cloud transcription + AI — reflections, synthesis, pattern surfacing</a:t>
+              <a:t>Lucian Hymer</a:t>
             </a:r>
           </a:p>
         </p:txBody>
@@ -7711,8 +6971,8 @@
         </p:nvSpPr>
         <p:spPr>
           <a:xfrm>
-            <a:off x="1097280" y="5120640"/>
-            <a:ext cx="1645920" cy="365760"/>
+            <a:off x="7132320" y="4919472"/>
+            <a:ext cx="4114800" cy="274320"/>
           </a:xfrm>
           <a:prstGeom prst="rect">
             <a:avLst/>
@@ -7735,15 +6995,15 @@
               <a:spcAft>
                 <a:spcPts val="0"/>
               </a:spcAft>
-              <a:defRPr sz="2400" b="0">
-                <a:solidFill>
-                  <a:srgbClr val="2C2A26"/>
-                </a:solidFill>
-                <a:latin typeface="Georgia"/>
+              <a:defRPr sz="1200" b="0">
+                <a:solidFill>
+                  <a:srgbClr val="6B6860"/>
+                </a:solidFill>
+                <a:latin typeface="Calibri"/>
               </a:defRPr>
             </a:pPr>
             <a:r>
-              <a:t>$40/mo</a:t>
+              <a:t>Computer co-lead · Founding engineer</a:t>
             </a:r>
           </a:p>
         </p:txBody>
@@ -7756,8 +7016,8 @@
         </p:nvSpPr>
         <p:spPr>
           <a:xfrm>
-            <a:off x="2926080" y="5166360"/>
-            <a:ext cx="7315200" cy="365760"/>
+            <a:off x="7132320" y="5212080"/>
+            <a:ext cx="4114800" cy="274320"/>
           </a:xfrm>
           <a:prstGeom prst="rect">
             <a:avLst/>
@@ -7780,15 +7040,15 @@
               <a:spcAft>
                 <a:spcPts val="0"/>
               </a:spcAft>
-              <a:defRPr sz="1600" b="0">
-                <a:solidFill>
-                  <a:srgbClr val="6B6860"/>
+              <a:defRPr sz="1400" b="1">
+                <a:solidFill>
+                  <a:srgbClr val="2C2A26"/>
                 </a:solidFill>
                 <a:latin typeface="Calibri"/>
               </a:defRPr>
             </a:pPr>
             <a:r>
-              <a:t>Hosted Parachute Computer — full agentic platform with bundled AI</a:t>
+              <a:t>Marvin Melzer</a:t>
             </a:r>
           </a:p>
         </p:txBody>
@@ -7801,8 +7061,8 @@
         </p:nvSpPr>
         <p:spPr>
           <a:xfrm>
-            <a:off x="1097280" y="5760720"/>
-            <a:ext cx="9144000" cy="731520"/>
+            <a:off x="7132320" y="5468112"/>
+            <a:ext cx="4114800" cy="274320"/>
           </a:xfrm>
           <a:prstGeom prst="rect">
             <a:avLst/>
@@ -7817,7 +7077,7 @@
           <a:p>
             <a:pPr algn="l">
               <a:lnSpc>
-                <a:spcPct val="150000"/>
+                <a:spcPct val="120000"/>
               </a:lnSpc>
               <a:spcBef>
                 <a:spcPts val="0"/>
@@ -7825,7 +7085,142 @@
               <a:spcAft>
                 <a:spcPts val="0"/>
               </a:spcAft>
-              <a:defRPr sz="1500" b="0">
+              <a:defRPr sz="1200" b="0">
+                <a:solidFill>
+                  <a:srgbClr val="6B6860"/>
+                </a:solidFill>
+                <a:latin typeface="Calibri"/>
+              </a:defRPr>
+            </a:pPr>
+            <a:r>
+              <a:t>Hardware · Pendant prototype</a:t>
+            </a:r>
+          </a:p>
+        </p:txBody>
+      </p:sp>
+      <p:sp>
+        <p:nvSpPr>
+          <p:cNvPr id="14" name="TextBox 13"/>
+          <p:cNvSpPr txBox="1"/>
+          <p:nvPr/>
+        </p:nvSpPr>
+        <p:spPr>
+          <a:xfrm>
+            <a:off x="7132320" y="5760720"/>
+            <a:ext cx="4114800" cy="274320"/>
+          </a:xfrm>
+          <a:prstGeom prst="rect">
+            <a:avLst/>
+          </a:prstGeom>
+          <a:noFill/>
+        </p:spPr>
+        <p:txBody>
+          <a:bodyPr wrap="square">
+            <a:spAutoFit/>
+          </a:bodyPr>
+          <a:lstStyle/>
+          <a:p>
+            <a:pPr algn="l">
+              <a:lnSpc>
+                <a:spcPct val="120000"/>
+              </a:lnSpc>
+              <a:spcBef>
+                <a:spcPts val="0"/>
+              </a:spcBef>
+              <a:spcAft>
+                <a:spcPts val="0"/>
+              </a:spcAft>
+              <a:defRPr sz="1400" b="1">
+                <a:solidFill>
+                  <a:srgbClr val="2C2A26"/>
+                </a:solidFill>
+                <a:latin typeface="Calibri"/>
+              </a:defRPr>
+            </a:pPr>
+            <a:r>
+              <a:t>Neil Yarnal</a:t>
+            </a:r>
+          </a:p>
+        </p:txBody>
+      </p:sp>
+      <p:sp>
+        <p:nvSpPr>
+          <p:cNvPr id="15" name="TextBox 14"/>
+          <p:cNvSpPr txBox="1"/>
+          <p:nvPr/>
+        </p:nvSpPr>
+        <p:spPr>
+          <a:xfrm>
+            <a:off x="7132320" y="6016752"/>
+            <a:ext cx="4114800" cy="274320"/>
+          </a:xfrm>
+          <a:prstGeom prst="rect">
+            <a:avLst/>
+          </a:prstGeom>
+          <a:noFill/>
+        </p:spPr>
+        <p:txBody>
+          <a:bodyPr wrap="square">
+            <a:spAutoFit/>
+          </a:bodyPr>
+          <a:lstStyle/>
+          <a:p>
+            <a:pPr algn="l">
+              <a:lnSpc>
+                <a:spcPct val="120000"/>
+              </a:lnSpc>
+              <a:spcBef>
+                <a:spcPts val="0"/>
+              </a:spcBef>
+              <a:spcAft>
+                <a:spcPts val="0"/>
+              </a:spcAft>
+              <a:defRPr sz="1200" b="0">
+                <a:solidFill>
+                  <a:srgbClr val="6B6860"/>
+                </a:solidFill>
+                <a:latin typeface="Calibri"/>
+              </a:defRPr>
+            </a:pPr>
+            <a:r>
+              <a:t>Brand &amp; design</a:t>
+            </a:r>
+          </a:p>
+        </p:txBody>
+      </p:sp>
+      <p:sp>
+        <p:nvSpPr>
+          <p:cNvPr id="16" name="TextBox 15"/>
+          <p:cNvSpPr txBox="1"/>
+          <p:nvPr/>
+        </p:nvSpPr>
+        <p:spPr>
+          <a:xfrm>
+            <a:off x="1097280" y="5943600"/>
+            <a:ext cx="9144000" cy="457200"/>
+          </a:xfrm>
+          <a:prstGeom prst="rect">
+            <a:avLst/>
+          </a:prstGeom>
+          <a:noFill/>
+        </p:spPr>
+        <p:txBody>
+          <a:bodyPr wrap="square">
+            <a:spAutoFit/>
+          </a:bodyPr>
+          <a:lstStyle/>
+          <a:p>
+            <a:pPr algn="l">
+              <a:lnSpc>
+                <a:spcPct val="120000"/>
+              </a:lnSpc>
+              <a:spcBef>
+                <a:spcPts val="0"/>
+              </a:spcBef>
+              <a:spcAft>
+                <a:spcPts val="0"/>
+              </a:spcAft>
+              <a:defRPr sz="1300" b="0">
                 <a:solidFill>
                   <a:srgbClr val="9A9690"/>
                 </a:solidFill>
@@ -7833,11 +7228,7 @@
               </a:defRPr>
             </a:pPr>
             <a:r>
-              <a:t>Free tier has zero hosting cost — no subsidizing free users.</a:t>
-            </a:r>
-            <a:br/>
-            <a:r>
-              <a:t>AI at $10/mo uses cost-efficient models. Margins are real and improve as model costs drop.</a:t>
+              <a:t>MA Ecopsychology · MS Creative Technology &amp; Design (CU ATLAS) · Founding engineer ×2 · Ex-Google · 10+ years full stack</a:t>
             </a:r>
           </a:p>
         </p:txBody>
@@ -7908,7 +7299,7 @@
               </a:defRPr>
             </a:pPr>
             <a:r>
-              <a:t>TEAM &amp; TRACTION</a:t>
+              <a:t>THE ASK</a:t>
             </a:r>
           </a:p>
         </p:txBody>
@@ -7953,11 +7344,11 @@
               </a:defRPr>
             </a:pPr>
             <a:r>
-              <a:t>Bootstrapped.</a:t>
+              <a:t>Raising $300K to hire</a:t>
             </a:r>
             <a:br/>
             <a:r>
-              <a:t>Zero funding.</a:t>
+              <a:t>the core team.</a:t>
             </a:r>
           </a:p>
         </p:txBody>
@@ -7971,81 +7362,7 @@
         <p:spPr>
           <a:xfrm>
             <a:off x="1097280" y="3200400"/>
-            <a:ext cx="5029200" cy="2743200"/>
-          </a:xfrm>
-          <a:prstGeom prst="rect">
-            <a:avLst/>
-          </a:prstGeom>
-          <a:noFill/>
-        </p:spPr>
-        <p:txBody>
-          <a:bodyPr wrap="square">
-            <a:spAutoFit/>
-          </a:bodyPr>
-          <a:lstStyle/>
-          <a:p>
-            <a:pPr algn="l">
-              <a:lnSpc>
-                <a:spcPct val="155000"/>
-              </a:lnSpc>
-              <a:spcBef>
-                <a:spcPts val="0"/>
-              </a:spcBef>
-              <a:spcAft>
-                <a:spcPts val="0"/>
-              </a:spcAft>
-              <a:defRPr sz="1600" b="0">
-                <a:solidFill>
-                  <a:srgbClr val="6B6860"/>
-                </a:solidFill>
-                <a:latin typeface="Calibri"/>
-              </a:defRPr>
-            </a:pPr>
-            <a:r>
-              <a:t>What exists today:</a:t>
-            </a:r>
-            <a:br/>
-            <a:br/>
-            <a:r>
-              <a:t>  ·  Working server, app, and graph-native memory</a:t>
-            </a:r>
-            <a:br/>
-            <a:r>
-              <a:t>  ·  Local voice transcription (fully offline)</a:t>
-            </a:r>
-            <a:br/>
-            <a:r>
-              <a:t>  ·  Multi-agent system with trust tiers</a:t>
-            </a:r>
-            <a:br/>
-            <a:r>
-              <a:t>  ·  Telegram, Discord, Matrix connectors</a:t>
-            </a:r>
-            <a:br/>
-            <a:r>
-              <a:t>  ·  Functional pendant prototype</a:t>
-            </a:r>
-            <a:br/>
-            <a:r>
-              <a:t>  ·  Beta launching next month</a:t>
-            </a:r>
-            <a:br/>
-            <a:r>
-              <a:t>  ·  PBC incorporated in Colorado</a:t>
-            </a:r>
-          </a:p>
-        </p:txBody>
-      </p:sp>
-      <p:sp>
-        <p:nvSpPr>
-          <p:cNvPr id="5" name="TextBox 4"/>
-          <p:cNvSpPr txBox="1"/>
-          <p:nvPr/>
-        </p:nvSpPr>
-        <p:spPr>
-          <a:xfrm>
-            <a:off x="7132320" y="3017520"/>
-            <a:ext cx="3657600" cy="320040"/>
+            <a:ext cx="2286000" cy="365760"/>
           </a:xfrm>
           <a:prstGeom prst="rect">
             <a:avLst/>
@@ -8068,29 +7385,29 @@
               <a:spcAft>
                 <a:spcPts val="0"/>
               </a:spcAft>
-              <a:defRPr sz="1100" b="1">
-                <a:solidFill>
-                  <a:srgbClr val="4A7C59"/>
+              <a:defRPr sz="1400" b="0">
+                <a:solidFill>
+                  <a:srgbClr val="9A9690"/>
                 </a:solidFill>
                 <a:latin typeface="Calibri"/>
               </a:defRPr>
             </a:pPr>
             <a:r>
-              <a:t>THE TEAM</a:t>
-            </a:r>
-          </a:p>
-        </p:txBody>
-      </p:sp>
-      <p:sp>
-        <p:nvSpPr>
-          <p:cNvPr id="6" name="TextBox 5"/>
+              <a:t>Instrument</a:t>
+            </a:r>
+          </a:p>
+        </p:txBody>
+      </p:sp>
+      <p:sp>
+        <p:nvSpPr>
+          <p:cNvPr id="5" name="TextBox 4"/>
           <p:cNvSpPr txBox="1"/>
           <p:nvPr/>
         </p:nvSpPr>
         <p:spPr>
           <a:xfrm>
-            <a:off x="7132320" y="3566160"/>
-            <a:ext cx="4114800" cy="274320"/>
+            <a:off x="3474720" y="3200400"/>
+            <a:ext cx="6400800" cy="365760"/>
           </a:xfrm>
           <a:prstGeom prst="rect">
             <a:avLst/>
@@ -8113,29 +7430,29 @@
               <a:spcAft>
                 <a:spcPts val="0"/>
               </a:spcAft>
-              <a:defRPr sz="1400" b="1">
+              <a:defRPr sz="2000" b="0">
                 <a:solidFill>
                   <a:srgbClr val="2C2A26"/>
                 </a:solidFill>
-                <a:latin typeface="Calibri"/>
+                <a:latin typeface="Georgia"/>
               </a:defRPr>
             </a:pPr>
             <a:r>
-              <a:t>Aaron Gabriel Neyer</a:t>
-            </a:r>
-          </a:p>
-        </p:txBody>
-      </p:sp>
-      <p:sp>
-        <p:nvSpPr>
-          <p:cNvPr id="7" name="TextBox 6"/>
+              <a:t>SAFE (YC standard)</a:t>
+            </a:r>
+          </a:p>
+        </p:txBody>
+      </p:sp>
+      <p:sp>
+        <p:nvSpPr>
+          <p:cNvPr id="6" name="TextBox 5"/>
           <p:cNvSpPr txBox="1"/>
           <p:nvPr/>
         </p:nvSpPr>
         <p:spPr>
           <a:xfrm>
-            <a:off x="7132320" y="3822192"/>
-            <a:ext cx="4114800" cy="274320"/>
+            <a:off x="1097280" y="3703320"/>
+            <a:ext cx="2286000" cy="365760"/>
           </a:xfrm>
           <a:prstGeom prst="rect">
             <a:avLst/>
@@ -8158,29 +7475,29 @@
               <a:spcAft>
                 <a:spcPts val="0"/>
               </a:spcAft>
-              <a:defRPr sz="1200" b="0">
-                <a:solidFill>
-                  <a:srgbClr val="6B6860"/>
+              <a:defRPr sz="1400" b="0">
+                <a:solidFill>
+                  <a:srgbClr val="9A9690"/>
                 </a:solidFill>
                 <a:latin typeface="Calibri"/>
               </a:defRPr>
             </a:pPr>
             <a:r>
-              <a:t>Founder · Product &amp; architecture</a:t>
-            </a:r>
-          </a:p>
-        </p:txBody>
-      </p:sp>
-      <p:sp>
-        <p:nvSpPr>
-          <p:cNvPr id="8" name="TextBox 7"/>
+              <a:t>Use of funds</a:t>
+            </a:r>
+          </a:p>
+        </p:txBody>
+      </p:sp>
+      <p:sp>
+        <p:nvSpPr>
+          <p:cNvPr id="7" name="TextBox 6"/>
           <p:cNvSpPr txBox="1"/>
           <p:nvPr/>
         </p:nvSpPr>
         <p:spPr>
           <a:xfrm>
-            <a:off x="7132320" y="4114800"/>
-            <a:ext cx="4114800" cy="274320"/>
+            <a:off x="3474720" y="3703320"/>
+            <a:ext cx="6400800" cy="365760"/>
           </a:xfrm>
           <a:prstGeom prst="rect">
             <a:avLst/>
@@ -8203,29 +7520,29 @@
               <a:spcAft>
                 <a:spcPts val="0"/>
               </a:spcAft>
-              <a:defRPr sz="1400" b="1">
+              <a:defRPr sz="2000" b="0">
                 <a:solidFill>
                   <a:srgbClr val="2C2A26"/>
                 </a:solidFill>
-                <a:latin typeface="Calibri"/>
+                <a:latin typeface="Georgia"/>
               </a:defRPr>
             </a:pPr>
             <a:r>
-              <a:t>Jon Bo</a:t>
-            </a:r>
-          </a:p>
-        </p:txBody>
-      </p:sp>
-      <p:sp>
-        <p:nvSpPr>
-          <p:cNvPr id="9" name="TextBox 8"/>
+              <a:t>Core team full-time through 2026</a:t>
+            </a:r>
+          </a:p>
+        </p:txBody>
+      </p:sp>
+      <p:sp>
+        <p:nvSpPr>
+          <p:cNvPr id="8" name="TextBox 7"/>
           <p:cNvSpPr txBox="1"/>
           <p:nvPr/>
         </p:nvSpPr>
         <p:spPr>
           <a:xfrm>
-            <a:off x="7132320" y="4370832"/>
-            <a:ext cx="4114800" cy="274320"/>
+            <a:off x="1097280" y="4206240"/>
+            <a:ext cx="2286000" cy="365760"/>
           </a:xfrm>
           <a:prstGeom prst="rect">
             <a:avLst/>
@@ -8248,29 +7565,29 @@
               <a:spcAft>
                 <a:spcPts val="0"/>
               </a:spcAft>
-              <a:defRPr sz="1200" b="0">
-                <a:solidFill>
-                  <a:srgbClr val="6B6860"/>
+              <a:defRPr sz="1400" b="0">
+                <a:solidFill>
+                  <a:srgbClr val="9A9690"/>
                 </a:solidFill>
                 <a:latin typeface="Calibri"/>
               </a:defRPr>
             </a:pPr>
             <a:r>
-              <a:t>Daily co-lead · Founding engineer</a:t>
-            </a:r>
-          </a:p>
-        </p:txBody>
-      </p:sp>
-      <p:sp>
-        <p:nvSpPr>
-          <p:cNvPr id="10" name="TextBox 9"/>
+              <a:t>Goal</a:t>
+            </a:r>
+          </a:p>
+        </p:txBody>
+      </p:sp>
+      <p:sp>
+        <p:nvSpPr>
+          <p:cNvPr id="9" name="TextBox 8"/>
           <p:cNvSpPr txBox="1"/>
           <p:nvPr/>
         </p:nvSpPr>
         <p:spPr>
           <a:xfrm>
-            <a:off x="7132320" y="4663440"/>
-            <a:ext cx="4114800" cy="274320"/>
+            <a:off x="3474720" y="4206240"/>
+            <a:ext cx="6400800" cy="365760"/>
           </a:xfrm>
           <a:prstGeom prst="rect">
             <a:avLst/>
@@ -8293,15 +7610,64 @@
               <a:spcAft>
                 <a:spcPts val="0"/>
               </a:spcAft>
-              <a:defRPr sz="1400" b="1">
+              <a:defRPr sz="2000" b="0">
                 <a:solidFill>
                   <a:srgbClr val="2C2A26"/>
                 </a:solidFill>
-                <a:latin typeface="Calibri"/>
+                <a:latin typeface="Georgia"/>
               </a:defRPr>
             </a:pPr>
             <a:r>
-              <a:t>Lucian Hymer</a:t>
+              <a:t>Production launch by June · revenue immediately</a:t>
+            </a:r>
+          </a:p>
+        </p:txBody>
+      </p:sp>
+      <p:sp>
+        <p:nvSpPr>
+          <p:cNvPr id="10" name="TextBox 9"/>
+          <p:cNvSpPr txBox="1"/>
+          <p:nvPr/>
+        </p:nvSpPr>
+        <p:spPr>
+          <a:xfrm>
+            <a:off x="1097280" y="5029200"/>
+            <a:ext cx="9144000" cy="1097280"/>
+          </a:xfrm>
+          <a:prstGeom prst="rect">
+            <a:avLst/>
+          </a:prstGeom>
+          <a:noFill/>
+        </p:spPr>
+        <p:txBody>
+          <a:bodyPr wrap="square">
+            <a:spAutoFit/>
+          </a:bodyPr>
+          <a:lstStyle/>
+          <a:p>
+            <a:pPr algn="l">
+              <a:lnSpc>
+                <a:spcPct val="130000"/>
+              </a:lnSpc>
+              <a:spcBef>
+                <a:spcPts val="0"/>
+              </a:spcBef>
+              <a:spcAft>
+                <a:spcPts val="0"/>
+              </a:spcAft>
+              <a:defRPr sz="2800" b="0">
+                <a:solidFill>
+                  <a:srgbClr val="2C2A26"/>
+                </a:solidFill>
+                <a:latin typeface="Georgia"/>
+              </a:defRPr>
+            </a:pPr>
+            <a:r>
+              <a:t>Open source. Local-first.</a:t>
+            </a:r>
+            <a:br/>
+            <a:r>
+              <a:t>Balance and choice — from the foundation.</a:t>
             </a:r>
           </a:p>
         </p:txBody>
@@ -8314,8 +7680,8 @@
         </p:nvSpPr>
         <p:spPr>
           <a:xfrm>
-            <a:off x="7132320" y="4919472"/>
-            <a:ext cx="4114800" cy="274320"/>
+            <a:off x="1097280" y="5943600"/>
+            <a:ext cx="9144000" cy="457200"/>
           </a:xfrm>
           <a:prstGeom prst="rect">
             <a:avLst/>
@@ -8338,15 +7704,15 @@
               <a:spcAft>
                 <a:spcPts val="0"/>
               </a:spcAft>
-              <a:defRPr sz="1200" b="0">
-                <a:solidFill>
-                  <a:srgbClr val="6B6860"/>
+              <a:defRPr sz="1300" b="0">
+                <a:solidFill>
+                  <a:srgbClr val="9A9690"/>
                 </a:solidFill>
                 <a:latin typeface="Calibri"/>
               </a:defRPr>
             </a:pPr>
             <a:r>
-              <a:t>Computer co-lead · Founding engineer</a:t>
+              <a:t>Aaron Gabriel Neyer  ·  aaron@parachute.computer  ·  Boulder, CO</a:t>
             </a:r>
           </a:p>
         </p:txBody>
@@ -8359,8 +7725,8 @@
         </p:nvSpPr>
         <p:spPr>
           <a:xfrm>
-            <a:off x="7132320" y="5212080"/>
-            <a:ext cx="4114800" cy="274320"/>
+            <a:off x="1097280" y="6309360"/>
+            <a:ext cx="9144000" cy="365760"/>
           </a:xfrm>
           <a:prstGeom prst="rect">
             <a:avLst/>
@@ -8383,150 +7749,15 @@
               <a:spcAft>
                 <a:spcPts val="0"/>
               </a:spcAft>
-              <a:defRPr sz="1400" b="1">
-                <a:solidFill>
-                  <a:srgbClr val="2C2A26"/>
+              <a:defRPr sz="1200" b="0">
+                <a:solidFill>
+                  <a:srgbClr val="9A9690"/>
                 </a:solidFill>
                 <a:latin typeface="Calibri"/>
               </a:defRPr>
             </a:pPr>
             <a:r>
-              <a:t>Marvin Melzer</a:t>
-            </a:r>
-          </a:p>
-        </p:txBody>
-      </p:sp>
-      <p:sp>
-        <p:nvSpPr>
-          <p:cNvPr id="13" name="TextBox 12"/>
-          <p:cNvSpPr txBox="1"/>
-          <p:nvPr/>
-        </p:nvSpPr>
-        <p:spPr>
-          <a:xfrm>
-            <a:off x="7132320" y="5468112"/>
-            <a:ext cx="4114800" cy="274320"/>
-          </a:xfrm>
-          <a:prstGeom prst="rect">
-            <a:avLst/>
-          </a:prstGeom>
-          <a:noFill/>
-        </p:spPr>
-        <p:txBody>
-          <a:bodyPr wrap="square">
-            <a:spAutoFit/>
-          </a:bodyPr>
-          <a:lstStyle/>
-          <a:p>
-            <a:pPr algn="l">
-              <a:lnSpc>
-                <a:spcPct val="120000"/>
-              </a:lnSpc>
-              <a:spcBef>
-                <a:spcPts val="0"/>
-              </a:spcBef>
-              <a:spcAft>
-                <a:spcPts val="0"/>
-              </a:spcAft>
-              <a:defRPr sz="1200" b="0">
-                <a:solidFill>
-                  <a:srgbClr val="6B6860"/>
-                </a:solidFill>
-                <a:latin typeface="Calibri"/>
-              </a:defRPr>
-            </a:pPr>
-            <a:r>
-              <a:t>Hardware · Pendant prototype</a:t>
-            </a:r>
-          </a:p>
-        </p:txBody>
-      </p:sp>
-      <p:sp>
-        <p:nvSpPr>
-          <p:cNvPr id="14" name="TextBox 13"/>
-          <p:cNvSpPr txBox="1"/>
-          <p:nvPr/>
-        </p:nvSpPr>
-        <p:spPr>
-          <a:xfrm>
-            <a:off x="7132320" y="5760720"/>
-            <a:ext cx="4114800" cy="274320"/>
-          </a:xfrm>
-          <a:prstGeom prst="rect">
-            <a:avLst/>
-          </a:prstGeom>
-          <a:noFill/>
-        </p:spPr>
-        <p:txBody>
-          <a:bodyPr wrap="square">
-            <a:spAutoFit/>
-          </a:bodyPr>
-          <a:lstStyle/>
-          <a:p>
-            <a:pPr algn="l">
-              <a:lnSpc>
-                <a:spcPct val="120000"/>
-              </a:lnSpc>
-              <a:spcBef>
-                <a:spcPts val="0"/>
-              </a:spcBef>
-              <a:spcAft>
-                <a:spcPts val="0"/>
-              </a:spcAft>
-              <a:defRPr sz="1400" b="1">
-                <a:solidFill>
-                  <a:srgbClr val="2C2A26"/>
-                </a:solidFill>
-                <a:latin typeface="Calibri"/>
-              </a:defRPr>
-            </a:pPr>
-            <a:r>
-              <a:t>Neil Yarnal</a:t>
-            </a:r>
-          </a:p>
-        </p:txBody>
-      </p:sp>
-      <p:sp>
-        <p:nvSpPr>
-          <p:cNvPr id="15" name="TextBox 14"/>
-          <p:cNvSpPr txBox="1"/>
-          <p:nvPr/>
-        </p:nvSpPr>
-        <p:spPr>
-          <a:xfrm>
-            <a:off x="7132320" y="6016752"/>
-            <a:ext cx="4114800" cy="274320"/>
-          </a:xfrm>
-          <a:prstGeom prst="rect">
-            <a:avLst/>
-          </a:prstGeom>
-          <a:noFill/>
-        </p:spPr>
-        <p:txBody>
-          <a:bodyPr wrap="square">
-            <a:spAutoFit/>
-          </a:bodyPr>
-          <a:lstStyle/>
-          <a:p>
-            <a:pPr algn="l">
-              <a:lnSpc>
-                <a:spcPct val="120000"/>
-              </a:lnSpc>
-              <a:spcBef>
-                <a:spcPts val="0"/>
-              </a:spcBef>
-              <a:spcAft>
-                <a:spcPts val="0"/>
-              </a:spcAft>
-              <a:defRPr sz="1200" b="0">
-                <a:solidFill>
-                  <a:srgbClr val="6B6860"/>
-                </a:solidFill>
-                <a:latin typeface="Calibri"/>
-              </a:defRPr>
-            </a:pPr>
-            <a:r>
-              <a:t>Brand &amp; design</a:t>
+              <a:t>parachute.computer  ·  github.com/OpenParachutePBC</a:t>
             </a:r>
           </a:p>
         </p:txBody>

--- a/nvc-pitch-deck.pptx
+++ b/nvc-pitch-deck.pptx
@@ -5304,13 +5304,103 @@
       </p:sp>
       <p:sp>
         <p:nvSpPr>
-          <p:cNvPr id="8" name="Rounded Rectangle 7"/>
+          <p:cNvPr id="8" name="TextBox 7"/>
+          <p:cNvSpPr txBox="1"/>
+          <p:nvPr/>
+        </p:nvSpPr>
+        <p:spPr>
+          <a:xfrm>
+            <a:off x="1097280" y="4480560"/>
+            <a:ext cx="1645920" cy="365760"/>
+          </a:xfrm>
+          <a:prstGeom prst="rect">
+            <a:avLst/>
+          </a:prstGeom>
+          <a:noFill/>
+        </p:spPr>
+        <p:txBody>
+          <a:bodyPr wrap="square">
+            <a:spAutoFit/>
+          </a:bodyPr>
+          <a:lstStyle/>
+          <a:p>
+            <a:pPr algn="l">
+              <a:lnSpc>
+                <a:spcPct val="120000"/>
+              </a:lnSpc>
+              <a:spcBef>
+                <a:spcPts val="0"/>
+              </a:spcBef>
+              <a:spcAft>
+                <a:spcPts val="0"/>
+              </a:spcAft>
+              <a:defRPr sz="2400" b="0">
+                <a:solidFill>
+                  <a:srgbClr val="6B6860"/>
+                </a:solidFill>
+                <a:latin typeface="Georgia"/>
+              </a:defRPr>
+            </a:pPr>
+            <a:r>
+              <a:t>$5/mo</a:t>
+            </a:r>
+          </a:p>
+        </p:txBody>
+      </p:sp>
+      <p:sp>
+        <p:nvSpPr>
+          <p:cNvPr id="9" name="TextBox 8"/>
+          <p:cNvSpPr txBox="1"/>
+          <p:nvPr/>
+        </p:nvSpPr>
+        <p:spPr>
+          <a:xfrm>
+            <a:off x="2926080" y="4526280"/>
+            <a:ext cx="7315200" cy="365760"/>
+          </a:xfrm>
+          <a:prstGeom prst="rect">
+            <a:avLst/>
+          </a:prstGeom>
+          <a:noFill/>
+        </p:spPr>
+        <p:txBody>
+          <a:bodyPr wrap="square">
+            <a:spAutoFit/>
+          </a:bodyPr>
+          <a:lstStyle/>
+          <a:p>
+            <a:pPr algn="l">
+              <a:lnSpc>
+                <a:spcPct val="120000"/>
+              </a:lnSpc>
+              <a:spcBef>
+                <a:spcPts val="0"/>
+              </a:spcBef>
+              <a:spcAft>
+                <a:spcPts val="0"/>
+              </a:spcAft>
+              <a:defRPr sz="1600" b="0">
+                <a:solidFill>
+                  <a:srgbClr val="6B6860"/>
+                </a:solidFill>
+                <a:latin typeface="Calibri"/>
+              </a:defRPr>
+            </a:pPr>
+            <a:r>
+              <a:t>Cloud transcription + cleanup — server-side processing, better accuracy</a:t>
+            </a:r>
+          </a:p>
+        </p:txBody>
+      </p:sp>
+      <p:sp>
+        <p:nvSpPr>
+          <p:cNvPr id="10" name="Rounded Rectangle 9"/>
           <p:cNvSpPr/>
           <p:nvPr/>
         </p:nvSpPr>
         <p:spPr>
           <a:xfrm>
-            <a:off x="914400" y="4343400"/>
+            <a:off x="914400" y="4983480"/>
             <a:ext cx="9601200" cy="594360"/>
           </a:xfrm>
           <a:prstGeom prst="roundRect">
@@ -5347,13 +5437,13 @@
       </p:sp>
       <p:sp>
         <p:nvSpPr>
-          <p:cNvPr id="9" name="TextBox 8"/>
+          <p:cNvPr id="11" name="TextBox 10"/>
           <p:cNvSpPr txBox="1"/>
           <p:nvPr/>
         </p:nvSpPr>
         <p:spPr>
           <a:xfrm>
-            <a:off x="1097280" y="4480560"/>
+            <a:off x="1097280" y="5120640"/>
             <a:ext cx="1645920" cy="365760"/>
           </a:xfrm>
           <a:prstGeom prst="rect">
@@ -5392,13 +5482,13 @@
       </p:sp>
       <p:sp>
         <p:nvSpPr>
-          <p:cNvPr id="10" name="TextBox 9"/>
+          <p:cNvPr id="12" name="TextBox 11"/>
           <p:cNvSpPr txBox="1"/>
           <p:nvPr/>
         </p:nvSpPr>
         <p:spPr>
           <a:xfrm>
-            <a:off x="2926080" y="4526280"/>
+            <a:off x="2926080" y="5166360"/>
             <a:ext cx="7315200" cy="365760"/>
           </a:xfrm>
           <a:prstGeom prst="rect">
@@ -5430,20 +5520,20 @@
               </a:defRPr>
             </a:pPr>
             <a:r>
-              <a:t>Cloud transcription + AI — reflections, synthesis, pattern surfacing</a:t>
-            </a:r>
-          </a:p>
-        </p:txBody>
-      </p:sp>
-      <p:sp>
-        <p:nvSpPr>
-          <p:cNvPr id="11" name="TextBox 10"/>
+              <a:t>AI reflections, synthesis, and pattern surfacing</a:t>
+            </a:r>
+          </a:p>
+        </p:txBody>
+      </p:sp>
+      <p:sp>
+        <p:nvSpPr>
+          <p:cNvPr id="13" name="TextBox 12"/>
           <p:cNvSpPr txBox="1"/>
           <p:nvPr/>
         </p:nvSpPr>
         <p:spPr>
           <a:xfrm>
-            <a:off x="1097280" y="5120640"/>
+            <a:off x="1097280" y="5760720"/>
             <a:ext cx="1645920" cy="365760"/>
           </a:xfrm>
           <a:prstGeom prst="rect">
@@ -5482,13 +5572,13 @@
       </p:sp>
       <p:sp>
         <p:nvSpPr>
-          <p:cNvPr id="12" name="TextBox 11"/>
+          <p:cNvPr id="14" name="TextBox 13"/>
           <p:cNvSpPr txBox="1"/>
           <p:nvPr/>
         </p:nvSpPr>
         <p:spPr>
           <a:xfrm>
-            <a:off x="2926080" y="5166360"/>
+            <a:off x="2926080" y="5806440"/>
             <a:ext cx="7315200" cy="365760"/>
           </a:xfrm>
           <a:prstGeom prst="rect">
@@ -5527,7 +5617,7 @@
       </p:sp>
       <p:sp>
         <p:nvSpPr>
-          <p:cNvPr id="13" name="TextBox 12"/>
+          <p:cNvPr id="15" name="TextBox 14"/>
           <p:cNvSpPr txBox="1"/>
           <p:nvPr/>
         </p:nvSpPr>
@@ -6044,7 +6134,31 @@
                         </a:defRPr>
                       </a:pPr>
                       <a:r>
-                        <a:t>~$10/mo</a:t>
+                        <a:t>~$7/mo</a:t>
+                      </a:r>
+                    </a:p>
+                  </a:txBody>
+                  <a:tcPr>
+                    <a:solidFill>
+                      <a:srgbClr val="FFFFFF"/>
+                    </a:solidFill>
+                  </a:tcPr>
+                </a:tc>
+                <a:tc>
+                  <a:txBody>
+                    <a:bodyPr/>
+                    <a:lstStyle/>
+                    <a:p>
+                      <a:pPr algn="ctr">
+                        <a:defRPr sz="1300">
+                          <a:solidFill>
+                            <a:srgbClr val="6B6860"/>
+                          </a:solidFill>
+                          <a:latin typeface="Calibri"/>
+                        </a:defRPr>
+                      </a:pPr>
+                      <a:r>
+                        <a:t>~$9/mo</a:t>
                       </a:r>
                     </a:p>
                   </a:txBody>
@@ -6078,6 +6192,130 @@
                     </a:solidFill>
                   </a:tcPr>
                 </a:tc>
+              </a:tr>
+              <a:tr h="365760">
+                <a:tc>
+                  <a:txBody>
+                    <a:bodyPr/>
+                    <a:lstStyle/>
+                    <a:p>
+                      <a:pPr algn="l">
+                        <a:defRPr sz="1200" b="1">
+                          <a:solidFill>
+                            <a:srgbClr val="2C2A26"/>
+                          </a:solidFill>
+                          <a:latin typeface="Calibri"/>
+                        </a:defRPr>
+                      </a:pPr>
+                      <a:r>
+                        <a:t>ARR</a:t>
+                      </a:r>
+                    </a:p>
+                  </a:txBody>
+                  <a:tcPr>
+                    <a:solidFill>
+                      <a:srgbClr val="FAF8F4"/>
+                    </a:solidFill>
+                  </a:tcPr>
+                </a:tc>
+                <a:tc>
+                  <a:txBody>
+                    <a:bodyPr/>
+                    <a:lstStyle/>
+                    <a:p>
+                      <a:pPr algn="ctr">
+                        <a:defRPr sz="1300" b="1">
+                          <a:solidFill>
+                            <a:srgbClr val="4A7C59"/>
+                          </a:solidFill>
+                          <a:latin typeface="Calibri"/>
+                        </a:defRPr>
+                      </a:pPr>
+                      <a:r>
+                        <a:t>~$42K</a:t>
+                      </a:r>
+                    </a:p>
+                  </a:txBody>
+                  <a:tcPr>
+                    <a:solidFill>
+                      <a:srgbClr val="FAF8F4"/>
+                    </a:solidFill>
+                  </a:tcPr>
+                </a:tc>
+                <a:tc>
+                  <a:txBody>
+                    <a:bodyPr/>
+                    <a:lstStyle/>
+                    <a:p>
+                      <a:pPr algn="ctr">
+                        <a:defRPr sz="1300" b="1">
+                          <a:solidFill>
+                            <a:srgbClr val="4A7C59"/>
+                          </a:solidFill>
+                          <a:latin typeface="Calibri"/>
+                        </a:defRPr>
+                      </a:pPr>
+                      <a:r>
+                        <a:t>~$540K</a:t>
+                      </a:r>
+                    </a:p>
+                  </a:txBody>
+                  <a:tcPr>
+                    <a:solidFill>
+                      <a:srgbClr val="FAF8F4"/>
+                    </a:solidFill>
+                  </a:tcPr>
+                </a:tc>
+                <a:tc>
+                  <a:txBody>
+                    <a:bodyPr/>
+                    <a:lstStyle/>
+                    <a:p>
+                      <a:pPr algn="ctr">
+                        <a:defRPr sz="1300" b="1">
+                          <a:solidFill>
+                            <a:srgbClr val="4A7C59"/>
+                          </a:solidFill>
+                          <a:latin typeface="Calibri"/>
+                        </a:defRPr>
+                      </a:pPr>
+                      <a:r>
+                        <a:t>~$3.6M</a:t>
+                      </a:r>
+                    </a:p>
+                  </a:txBody>
+                  <a:tcPr>
+                    <a:solidFill>
+                      <a:srgbClr val="FAF8F4"/>
+                    </a:solidFill>
+                  </a:tcPr>
+                </a:tc>
+              </a:tr>
+              <a:tr h="365760">
+                <a:tc>
+                  <a:txBody>
+                    <a:bodyPr/>
+                    <a:lstStyle/>
+                    <a:p>
+                      <a:pPr algn="l">
+                        <a:defRPr sz="1200" b="1">
+                          <a:solidFill>
+                            <a:srgbClr val="2C2A26"/>
+                          </a:solidFill>
+                          <a:latin typeface="Calibri"/>
+                        </a:defRPr>
+                      </a:pPr>
+                      <a:r>
+                        <a:t>Team costs</a:t>
+                      </a:r>
+                    </a:p>
+                  </a:txBody>
+                  <a:tcPr>
+                    <a:solidFill>
+                      <a:srgbClr val="FFFFFF"/>
+                    </a:solidFill>
+                  </a:tcPr>
+                </a:tc>
                 <a:tc>
                   <a:txBody>
                     <a:bodyPr/>
@@ -6092,7 +6330,55 @@
                         </a:defRPr>
                       </a:pPr>
                       <a:r>
-                        <a:t>~$14/mo</a:t>
+                        <a:t>~$150K</a:t>
+                      </a:r>
+                    </a:p>
+                  </a:txBody>
+                  <a:tcPr>
+                    <a:solidFill>
+                      <a:srgbClr val="FFFFFF"/>
+                    </a:solidFill>
+                  </a:tcPr>
+                </a:tc>
+                <a:tc>
+                  <a:txBody>
+                    <a:bodyPr/>
+                    <a:lstStyle/>
+                    <a:p>
+                      <a:pPr algn="ctr">
+                        <a:defRPr sz="1300">
+                          <a:solidFill>
+                            <a:srgbClr val="6B6860"/>
+                          </a:solidFill>
+                          <a:latin typeface="Calibri"/>
+                        </a:defRPr>
+                      </a:pPr>
+                      <a:r>
+                        <a:t>~$400K</a:t>
+                      </a:r>
+                    </a:p>
+                  </a:txBody>
+                  <a:tcPr>
+                    <a:solidFill>
+                      <a:srgbClr val="FFFFFF"/>
+                    </a:solidFill>
+                  </a:tcPr>
+                </a:tc>
+                <a:tc>
+                  <a:txBody>
+                    <a:bodyPr/>
+                    <a:lstStyle/>
+                    <a:p>
+                      <a:pPr algn="ctr">
+                        <a:defRPr sz="1300">
+                          <a:solidFill>
+                            <a:srgbClr val="6B6860"/>
+                          </a:solidFill>
+                          <a:latin typeface="Calibri"/>
+                        </a:defRPr>
+                      </a:pPr>
+                      <a:r>
+                        <a:t>~$800K</a:t>
                       </a:r>
                     </a:p>
                   </a:txBody>
@@ -6118,7 +6404,7 @@
                         </a:defRPr>
                       </a:pPr>
                       <a:r>
-                        <a:t>MRR (end of year)</a:t>
+                        <a:t>Infra + COGS</a:t>
                       </a:r>
                     </a:p>
                   </a:txBody>
@@ -6142,7 +6428,7 @@
                         </a:defRPr>
                       </a:pPr>
                       <a:r>
-                        <a:t>~$5,000</a:t>
+                        <a:t>~$15K</a:t>
                       </a:r>
                     </a:p>
                   </a:txBody>
@@ -6166,7 +6452,7 @@
                         </a:defRPr>
                       </a:pPr>
                       <a:r>
-                        <a:t>~$60,000</a:t>
+                        <a:t>~$130K</a:t>
                       </a:r>
                     </a:p>
                   </a:txBody>
@@ -6190,7 +6476,7 @@
                         </a:defRPr>
                       </a:pPr>
                       <a:r>
-                        <a:t>~$350,000</a:t>
+                        <a:t>~$500K</a:t>
                       </a:r>
                     </a:p>
                   </a:txBody>
@@ -6216,203 +6502,7 @@
                         </a:defRPr>
                       </a:pPr>
                       <a:r>
-                        <a:t>ARR (end of year)</a:t>
-                      </a:r>
-                    </a:p>
-                  </a:txBody>
-                  <a:tcPr>
-                    <a:solidFill>
-                      <a:srgbClr val="FFFFFF"/>
-                    </a:solidFill>
-                  </a:tcPr>
-                </a:tc>
-                <a:tc>
-                  <a:txBody>
-                    <a:bodyPr/>
-                    <a:lstStyle/>
-                    <a:p>
-                      <a:pPr algn="ctr">
-                        <a:defRPr sz="1300" b="1">
-                          <a:solidFill>
-                            <a:srgbClr val="4A7C59"/>
-                          </a:solidFill>
-                          <a:latin typeface="Calibri"/>
-                        </a:defRPr>
-                      </a:pPr>
-                      <a:r>
-                        <a:t>~$60K</a:t>
-                      </a:r>
-                    </a:p>
-                  </a:txBody>
-                  <a:tcPr>
-                    <a:solidFill>
-                      <a:srgbClr val="FFFFFF"/>
-                    </a:solidFill>
-                  </a:tcPr>
-                </a:tc>
-                <a:tc>
-                  <a:txBody>
-                    <a:bodyPr/>
-                    <a:lstStyle/>
-                    <a:p>
-                      <a:pPr algn="ctr">
-                        <a:defRPr sz="1300" b="1">
-                          <a:solidFill>
-                            <a:srgbClr val="4A7C59"/>
-                          </a:solidFill>
-                          <a:latin typeface="Calibri"/>
-                        </a:defRPr>
-                      </a:pPr>
-                      <a:r>
-                        <a:t>~$720K</a:t>
-                      </a:r>
-                    </a:p>
-                  </a:txBody>
-                  <a:tcPr>
-                    <a:solidFill>
-                      <a:srgbClr val="FFFFFF"/>
-                    </a:solidFill>
-                  </a:tcPr>
-                </a:tc>
-                <a:tc>
-                  <a:txBody>
-                    <a:bodyPr/>
-                    <a:lstStyle/>
-                    <a:p>
-                      <a:pPr algn="ctr">
-                        <a:defRPr sz="1300" b="1">
-                          <a:solidFill>
-                            <a:srgbClr val="4A7C59"/>
-                          </a:solidFill>
-                          <a:latin typeface="Calibri"/>
-                        </a:defRPr>
-                      </a:pPr>
-                      <a:r>
-                        <a:t>~$4.2M</a:t>
-                      </a:r>
-                    </a:p>
-                  </a:txBody>
-                  <a:tcPr>
-                    <a:solidFill>
-                      <a:srgbClr val="FFFFFF"/>
-                    </a:solidFill>
-                  </a:tcPr>
-                </a:tc>
-              </a:tr>
-              <a:tr h="365760">
-                <a:tc>
-                  <a:txBody>
-                    <a:bodyPr/>
-                    <a:lstStyle/>
-                    <a:p>
-                      <a:pPr algn="l">
-                        <a:defRPr sz="1200" b="1">
-                          <a:solidFill>
-                            <a:srgbClr val="2C2A26"/>
-                          </a:solidFill>
-                          <a:latin typeface="Calibri"/>
-                        </a:defRPr>
-                      </a:pPr>
-                      <a:r>
-                        <a:t>Team (salaried)</a:t>
-                      </a:r>
-                    </a:p>
-                  </a:txBody>
-                  <a:tcPr>
-                    <a:solidFill>
-                      <a:srgbClr val="FAF8F4"/>
-                    </a:solidFill>
-                  </a:tcPr>
-                </a:tc>
-                <a:tc>
-                  <a:txBody>
-                    <a:bodyPr/>
-                    <a:lstStyle/>
-                    <a:p>
-                      <a:pPr algn="ctr">
-                        <a:defRPr sz="1300">
-                          <a:solidFill>
-                            <a:srgbClr val="6B6860"/>
-                          </a:solidFill>
-                          <a:latin typeface="Calibri"/>
-                        </a:defRPr>
-                      </a:pPr>
-                      <a:r>
-                        <a:t>3</a:t>
-                      </a:r>
-                    </a:p>
-                  </a:txBody>
-                  <a:tcPr>
-                    <a:solidFill>
-                      <a:srgbClr val="FAF8F4"/>
-                    </a:solidFill>
-                  </a:tcPr>
-                </a:tc>
-                <a:tc>
-                  <a:txBody>
-                    <a:bodyPr/>
-                    <a:lstStyle/>
-                    <a:p>
-                      <a:pPr algn="ctr">
-                        <a:defRPr sz="1300">
-                          <a:solidFill>
-                            <a:srgbClr val="6B6860"/>
-                          </a:solidFill>
-                          <a:latin typeface="Calibri"/>
-                        </a:defRPr>
-                      </a:pPr>
-                      <a:r>
-                        <a:t>5-6</a:t>
-                      </a:r>
-                    </a:p>
-                  </a:txBody>
-                  <a:tcPr>
-                    <a:solidFill>
-                      <a:srgbClr val="FAF8F4"/>
-                    </a:solidFill>
-                  </a:tcPr>
-                </a:tc>
-                <a:tc>
-                  <a:txBody>
-                    <a:bodyPr/>
-                    <a:lstStyle/>
-                    <a:p>
-                      <a:pPr algn="ctr">
-                        <a:defRPr sz="1300">
-                          <a:solidFill>
-                            <a:srgbClr val="6B6860"/>
-                          </a:solidFill>
-                          <a:latin typeface="Calibri"/>
-                        </a:defRPr>
-                      </a:pPr>
-                      <a:r>
-                        <a:t>9-10</a:t>
-                      </a:r>
-                    </a:p>
-                  </a:txBody>
-                  <a:tcPr>
-                    <a:solidFill>
-                      <a:srgbClr val="FAF8F4"/>
-                    </a:solidFill>
-                  </a:tcPr>
-                </a:tc>
-              </a:tr>
-              <a:tr h="365760">
-                <a:tc>
-                  <a:txBody>
-                    <a:bodyPr/>
-                    <a:lstStyle/>
-                    <a:p>
-                      <a:pPr algn="l">
-                        <a:defRPr sz="1200" b="1">
-                          <a:solidFill>
-                            <a:srgbClr val="2C2A26"/>
-                          </a:solidFill>
-                          <a:latin typeface="Calibri"/>
-                        </a:defRPr>
-                      </a:pPr>
-                      <a:r>
-                        <a:t>Operating costs</a:t>
+                        <a:t>Total opex</a:t>
                       </a:r>
                     </a:p>
                   </a:txBody>
@@ -6436,7 +6526,7 @@
                         </a:defRPr>
                       </a:pPr>
                       <a:r>
-                        <a:t>~$170K</a:t>
+                        <a:t>~$165K</a:t>
                       </a:r>
                     </a:p>
                   </a:txBody>
@@ -6460,7 +6550,7 @@
                         </a:defRPr>
                       </a:pPr>
                       <a:r>
-                        <a:t>~$550K</a:t>
+                        <a:t>~$530K</a:t>
                       </a:r>
                     </a:p>
                   </a:txBody>
@@ -6484,7 +6574,7 @@
                         </a:defRPr>
                       </a:pPr>
                       <a:r>
-                        <a:t>~$900K</a:t>
+                        <a:t>~$1.3M</a:t>
                       </a:r>
                     </a:p>
                   </a:txBody>
@@ -6628,7 +6718,7 @@
         <p:spPr>
           <a:xfrm>
             <a:off x="1097280" y="3200400"/>
-            <a:ext cx="5029200" cy="2743200"/>
+            <a:ext cx="5029200" cy="2286000"/>
           </a:xfrm>
           <a:prstGeom prst="rect">
             <a:avLst/>
@@ -6664,31 +6754,19 @@
             <a:br/>
             <a:br/>
             <a:r>
-              <a:t>  ·  Working server, app, and graph-native memory</a:t>
+              <a:t>  ·  Working app with local voice transcription + graph-native memory</a:t>
             </a:r>
             <a:br/>
             <a:r>
-              <a:t>  ·  Local voice transcription (fully offline)</a:t>
+              <a:t>  ·  Multi-platform: phone, Telegram, Discord, Matrix</a:t>
             </a:r>
             <a:br/>
             <a:r>
-              <a:t>  ·  Multi-agent system with trust tiers</a:t>
+              <a:t>  ·  Functional pendant prototype (on stage today)</a:t>
             </a:r>
             <a:br/>
             <a:r>
-              <a:t>  ·  Telegram, Discord, Matrix connectors</a:t>
-            </a:r>
-            <a:br/>
-            <a:r>
-              <a:t>  ·  Functional pendant prototype</a:t>
-            </a:r>
-            <a:br/>
-            <a:r>
-              <a:t>  ·  Beta launching next month</a:t>
-            </a:r>
-            <a:br/>
-            <a:r>
-              <a:t>  ·  PBC incorporated in Colorado</a:t>
+              <a:t>  ·  Daily beta launching this month · PBC incorporated in Colorado</a:t>
             </a:r>
           </a:p>
         </p:txBody>

--- a/nvc-pitch-deck.pptx
+++ b/nvc-pitch-deck.pptx
@@ -3106,7 +3106,86 @@
       <p:grpSpPr/>
       <p:sp>
         <p:nvSpPr>
-          <p:cNvPr id="2" name="TextBox 1"/>
+          <p:cNvPr id="2" name="Rectangle 1"/>
+          <p:cNvSpPr/>
+          <p:nvPr/>
+        </p:nvSpPr>
+        <p:spPr>
+          <a:xfrm>
+            <a:off x="0" y="0"/>
+            <a:ext cx="12191695" cy="54864"/>
+          </a:xfrm>
+          <a:prstGeom prst="rect">
+            <a:avLst/>
+          </a:prstGeom>
+          <a:solidFill>
+            <a:srgbClr val="4A7C59"/>
+          </a:solidFill>
+          <a:ln>
+            <a:noFill/>
+          </a:ln>
+        </p:spPr>
+        <p:style>
+          <a:lnRef idx="1">
+            <a:schemeClr val="accent1"/>
+          </a:lnRef>
+          <a:fillRef idx="3">
+            <a:schemeClr val="accent1"/>
+          </a:fillRef>
+          <a:effectRef idx="2">
+            <a:schemeClr val="accent1"/>
+          </a:effectRef>
+          <a:fontRef idx="minor">
+            <a:schemeClr val="lt1"/>
+          </a:fontRef>
+        </p:style>
+        <p:txBody>
+          <a:bodyPr rtlCol="0" anchor="ctr"/>
+          <a:lstStyle/>
+          <a:p>
+            <a:pPr algn="ctr"/>
+          </a:p>
+        </p:txBody>
+      </p:sp>
+      <p:sp>
+        <p:nvSpPr>
+          <p:cNvPr id="3" name="TextBox 2"/>
+          <p:cNvSpPr txBox="1"/>
+          <p:nvPr/>
+        </p:nvSpPr>
+        <p:spPr>
+          <a:xfrm>
+            <a:off x="1097280" y="6400800"/>
+            <a:ext cx="3657600" cy="274320"/>
+          </a:xfrm>
+          <a:prstGeom prst="rect">
+            <a:avLst/>
+          </a:prstGeom>
+          <a:noFill/>
+        </p:spPr>
+        <p:txBody>
+          <a:bodyPr wrap="none">
+            <a:spAutoFit/>
+          </a:bodyPr>
+          <a:lstStyle/>
+          <a:p>
+            <a:pPr>
+              <a:defRPr sz="900">
+                <a:solidFill>
+                  <a:srgbClr val="9A9690"/>
+                </a:solidFill>
+                <a:latin typeface="Calibri"/>
+              </a:defRPr>
+            </a:pPr>
+            <a:r>
+              <a:t>parachute.computer</a:t>
+            </a:r>
+          </a:p>
+        </p:txBody>
+      </p:sp>
+      <p:sp>
+        <p:nvSpPr>
+          <p:cNvPr id="4" name="TextBox 3"/>
           <p:cNvSpPr txBox="1"/>
           <p:nvPr/>
         </p:nvSpPr>
@@ -3151,7 +3230,7 @@
       </p:sp>
       <p:sp>
         <p:nvSpPr>
-          <p:cNvPr id="3" name="TextBox 2"/>
+          <p:cNvPr id="5" name="TextBox 4"/>
           <p:cNvSpPr txBox="1"/>
           <p:nvPr/>
         </p:nvSpPr>
@@ -3200,7 +3279,7 @@
       </p:sp>
       <p:sp>
         <p:nvSpPr>
-          <p:cNvPr id="4" name="TextBox 3"/>
+          <p:cNvPr id="6" name="TextBox 5"/>
           <p:cNvSpPr txBox="1"/>
           <p:nvPr/>
         </p:nvSpPr>
@@ -3249,7 +3328,7 @@
       </p:sp>
       <p:sp>
         <p:nvSpPr>
-          <p:cNvPr id="5" name="TextBox 4"/>
+          <p:cNvPr id="7" name="TextBox 6"/>
           <p:cNvSpPr txBox="1"/>
           <p:nvPr/>
         </p:nvSpPr>
@@ -3294,7 +3373,7 @@
       </p:sp>
       <p:sp>
         <p:nvSpPr>
-          <p:cNvPr id="6" name="TextBox 5"/>
+          <p:cNvPr id="8" name="TextBox 7"/>
           <p:cNvSpPr txBox="1"/>
           <p:nvPr/>
         </p:nvSpPr>
@@ -3339,7 +3418,7 @@
       </p:sp>
       <p:sp>
         <p:nvSpPr>
-          <p:cNvPr id="7" name="TextBox 6"/>
+          <p:cNvPr id="9" name="TextBox 8"/>
           <p:cNvSpPr txBox="1"/>
           <p:nvPr/>
         </p:nvSpPr>
@@ -3377,7 +3456,7 @@
               </a:defRPr>
             </a:pPr>
             <a:r>
-              <a:t>But they're building walled gardens — and only for the 5% who are already power users.</a:t>
+              <a:t>But they’re building walled gardens — and only for the 5% who are already power users.</a:t>
             </a:r>
           </a:p>
         </p:txBody>
@@ -3410,7 +3489,86 @@
       <p:grpSpPr/>
       <p:sp>
         <p:nvSpPr>
-          <p:cNvPr id="2" name="TextBox 1"/>
+          <p:cNvPr id="2" name="Rectangle 1"/>
+          <p:cNvSpPr/>
+          <p:nvPr/>
+        </p:nvSpPr>
+        <p:spPr>
+          <a:xfrm>
+            <a:off x="0" y="0"/>
+            <a:ext cx="12191695" cy="54864"/>
+          </a:xfrm>
+          <a:prstGeom prst="rect">
+            <a:avLst/>
+          </a:prstGeom>
+          <a:solidFill>
+            <a:srgbClr val="4A7C59"/>
+          </a:solidFill>
+          <a:ln>
+            <a:noFill/>
+          </a:ln>
+        </p:spPr>
+        <p:style>
+          <a:lnRef idx="1">
+            <a:schemeClr val="accent1"/>
+          </a:lnRef>
+          <a:fillRef idx="3">
+            <a:schemeClr val="accent1"/>
+          </a:fillRef>
+          <a:effectRef idx="2">
+            <a:schemeClr val="accent1"/>
+          </a:effectRef>
+          <a:fontRef idx="minor">
+            <a:schemeClr val="lt1"/>
+          </a:fontRef>
+        </p:style>
+        <p:txBody>
+          <a:bodyPr rtlCol="0" anchor="ctr"/>
+          <a:lstStyle/>
+          <a:p>
+            <a:pPr algn="ctr"/>
+          </a:p>
+        </p:txBody>
+      </p:sp>
+      <p:sp>
+        <p:nvSpPr>
+          <p:cNvPr id="3" name="TextBox 2"/>
+          <p:cNvSpPr txBox="1"/>
+          <p:nvPr/>
+        </p:nvSpPr>
+        <p:spPr>
+          <a:xfrm>
+            <a:off x="1097280" y="6400800"/>
+            <a:ext cx="3657600" cy="274320"/>
+          </a:xfrm>
+          <a:prstGeom prst="rect">
+            <a:avLst/>
+          </a:prstGeom>
+          <a:noFill/>
+        </p:spPr>
+        <p:txBody>
+          <a:bodyPr wrap="none">
+            <a:spAutoFit/>
+          </a:bodyPr>
+          <a:lstStyle/>
+          <a:p>
+            <a:pPr>
+              <a:defRPr sz="900">
+                <a:solidFill>
+                  <a:srgbClr val="9A9690"/>
+                </a:solidFill>
+                <a:latin typeface="Calibri"/>
+              </a:defRPr>
+            </a:pPr>
+            <a:r>
+              <a:t>parachute.computer</a:t>
+            </a:r>
+          </a:p>
+        </p:txBody>
+      </p:sp>
+      <p:sp>
+        <p:nvSpPr>
+          <p:cNvPr id="4" name="TextBox 3"/>
           <p:cNvSpPr txBox="1"/>
           <p:nvPr/>
         </p:nvSpPr>
@@ -3455,7 +3613,7 @@
       </p:sp>
       <p:sp>
         <p:nvSpPr>
-          <p:cNvPr id="3" name="TextBox 2"/>
+          <p:cNvPr id="5" name="TextBox 4"/>
           <p:cNvSpPr txBox="1"/>
           <p:nvPr/>
         </p:nvSpPr>
@@ -3504,7 +3662,7 @@
       </p:sp>
       <p:sp>
         <p:nvSpPr>
-          <p:cNvPr id="4" name="TextBox 3"/>
+          <p:cNvPr id="6" name="TextBox 5"/>
           <p:cNvSpPr txBox="1"/>
           <p:nvPr/>
         </p:nvSpPr>
@@ -3557,7 +3715,7 @@
       </p:sp>
       <p:sp>
         <p:nvSpPr>
-          <p:cNvPr id="5" name="TextBox 4"/>
+          <p:cNvPr id="7" name="TextBox 6"/>
           <p:cNvSpPr txBox="1"/>
           <p:nvPr/>
         </p:nvSpPr>
@@ -3632,7 +3790,86 @@
       <p:grpSpPr/>
       <p:sp>
         <p:nvSpPr>
-          <p:cNvPr id="2" name="TextBox 1"/>
+          <p:cNvPr id="2" name="Rectangle 1"/>
+          <p:cNvSpPr/>
+          <p:nvPr/>
+        </p:nvSpPr>
+        <p:spPr>
+          <a:xfrm>
+            <a:off x="0" y="0"/>
+            <a:ext cx="12191695" cy="54864"/>
+          </a:xfrm>
+          <a:prstGeom prst="rect">
+            <a:avLst/>
+          </a:prstGeom>
+          <a:solidFill>
+            <a:srgbClr val="4A7C59"/>
+          </a:solidFill>
+          <a:ln>
+            <a:noFill/>
+          </a:ln>
+        </p:spPr>
+        <p:style>
+          <a:lnRef idx="1">
+            <a:schemeClr val="accent1"/>
+          </a:lnRef>
+          <a:fillRef idx="3">
+            <a:schemeClr val="accent1"/>
+          </a:fillRef>
+          <a:effectRef idx="2">
+            <a:schemeClr val="accent1"/>
+          </a:effectRef>
+          <a:fontRef idx="minor">
+            <a:schemeClr val="lt1"/>
+          </a:fontRef>
+        </p:style>
+        <p:txBody>
+          <a:bodyPr rtlCol="0" anchor="ctr"/>
+          <a:lstStyle/>
+          <a:p>
+            <a:pPr algn="ctr"/>
+          </a:p>
+        </p:txBody>
+      </p:sp>
+      <p:sp>
+        <p:nvSpPr>
+          <p:cNvPr id="3" name="TextBox 2"/>
+          <p:cNvSpPr txBox="1"/>
+          <p:nvPr/>
+        </p:nvSpPr>
+        <p:spPr>
+          <a:xfrm>
+            <a:off x="1097280" y="6400800"/>
+            <a:ext cx="3657600" cy="274320"/>
+          </a:xfrm>
+          <a:prstGeom prst="rect">
+            <a:avLst/>
+          </a:prstGeom>
+          <a:noFill/>
+        </p:spPr>
+        <p:txBody>
+          <a:bodyPr wrap="none">
+            <a:spAutoFit/>
+          </a:bodyPr>
+          <a:lstStyle/>
+          <a:p>
+            <a:pPr>
+              <a:defRPr sz="900">
+                <a:solidFill>
+                  <a:srgbClr val="9A9690"/>
+                </a:solidFill>
+                <a:latin typeface="Calibri"/>
+              </a:defRPr>
+            </a:pPr>
+            <a:r>
+              <a:t>parachute.computer</a:t>
+            </a:r>
+          </a:p>
+        </p:txBody>
+      </p:sp>
+      <p:sp>
+        <p:nvSpPr>
+          <p:cNvPr id="4" name="TextBox 3"/>
           <p:cNvSpPr txBox="1"/>
           <p:nvPr/>
         </p:nvSpPr>
@@ -3677,7 +3914,7 @@
       </p:sp>
       <p:sp>
         <p:nvSpPr>
-          <p:cNvPr id="3" name="TextBox 2"/>
+          <p:cNvPr id="5" name="TextBox 4"/>
           <p:cNvSpPr txBox="1"/>
           <p:nvPr/>
         </p:nvSpPr>
@@ -3726,13 +3963,58 @@
       </p:sp>
       <p:sp>
         <p:nvSpPr>
-          <p:cNvPr id="4" name="TextBox 3"/>
+          <p:cNvPr id="6" name="TextBox 5"/>
           <p:cNvSpPr txBox="1"/>
           <p:nvPr/>
         </p:nvSpPr>
         <p:spPr>
           <a:xfrm>
-            <a:off x="1371600" y="3200400"/>
+            <a:off x="1188720" y="3218688"/>
+            <a:ext cx="274320" cy="320040"/>
+          </a:xfrm>
+          <a:prstGeom prst="rect">
+            <a:avLst/>
+          </a:prstGeom>
+          <a:noFill/>
+        </p:spPr>
+        <p:txBody>
+          <a:bodyPr wrap="square">
+            <a:spAutoFit/>
+          </a:bodyPr>
+          <a:lstStyle/>
+          <a:p>
+            <a:pPr algn="l">
+              <a:lnSpc>
+                <a:spcPct val="120000"/>
+              </a:lnSpc>
+              <a:spcBef>
+                <a:spcPts val="0"/>
+              </a:spcBef>
+              <a:spcAft>
+                <a:spcPts val="0"/>
+              </a:spcAft>
+              <a:defRPr sz="1600" b="0">
+                <a:solidFill>
+                  <a:srgbClr val="4A7C59"/>
+                </a:solidFill>
+                <a:latin typeface="Calibri"/>
+              </a:defRPr>
+            </a:pPr>
+            <a:r>
+              <a:t>•</a:t>
+            </a:r>
+          </a:p>
+        </p:txBody>
+      </p:sp>
+      <p:sp>
+        <p:nvSpPr>
+          <p:cNvPr id="7" name="TextBox 6"/>
+          <p:cNvSpPr txBox="1"/>
+          <p:nvPr/>
+        </p:nvSpPr>
+        <p:spPr>
+          <a:xfrm>
+            <a:off x="1554480" y="3200400"/>
             <a:ext cx="8229600" cy="365760"/>
           </a:xfrm>
           <a:prstGeom prst="rect">
@@ -3764,20 +4046,65 @@
               </a:defRPr>
             </a:pPr>
             <a:r>
-              <a:t>·   Open source (AGPL-3.0) · local-first · self-hostable</a:t>
-            </a:r>
-          </a:p>
-        </p:txBody>
-      </p:sp>
-      <p:sp>
-        <p:nvSpPr>
-          <p:cNvPr id="5" name="TextBox 4"/>
+              <a:t>Open source (AGPL-3.0) · local-first · self-hostable</a:t>
+            </a:r>
+          </a:p>
+        </p:txBody>
+      </p:sp>
+      <p:sp>
+        <p:nvSpPr>
+          <p:cNvPr id="8" name="TextBox 7"/>
           <p:cNvSpPr txBox="1"/>
           <p:nvPr/>
         </p:nvSpPr>
         <p:spPr>
           <a:xfrm>
-            <a:off x="1371600" y="3703320"/>
+            <a:off x="1188720" y="3721608"/>
+            <a:ext cx="274320" cy="320040"/>
+          </a:xfrm>
+          <a:prstGeom prst="rect">
+            <a:avLst/>
+          </a:prstGeom>
+          <a:noFill/>
+        </p:spPr>
+        <p:txBody>
+          <a:bodyPr wrap="square">
+            <a:spAutoFit/>
+          </a:bodyPr>
+          <a:lstStyle/>
+          <a:p>
+            <a:pPr algn="l">
+              <a:lnSpc>
+                <a:spcPct val="120000"/>
+              </a:lnSpc>
+              <a:spcBef>
+                <a:spcPts val="0"/>
+              </a:spcBef>
+              <a:spcAft>
+                <a:spcPts val="0"/>
+              </a:spcAft>
+              <a:defRPr sz="1600" b="0">
+                <a:solidFill>
+                  <a:srgbClr val="4A7C59"/>
+                </a:solidFill>
+                <a:latin typeface="Calibri"/>
+              </a:defRPr>
+            </a:pPr>
+            <a:r>
+              <a:t>•</a:t>
+            </a:r>
+          </a:p>
+        </p:txBody>
+      </p:sp>
+      <p:sp>
+        <p:nvSpPr>
+          <p:cNvPr id="9" name="TextBox 8"/>
+          <p:cNvSpPr txBox="1"/>
+          <p:nvPr/>
+        </p:nvSpPr>
+        <p:spPr>
+          <a:xfrm>
+            <a:off x="1554480" y="3703320"/>
             <a:ext cx="8229600" cy="365760"/>
           </a:xfrm>
           <a:prstGeom prst="rect">
@@ -3809,20 +4136,65 @@
               </a:defRPr>
             </a:pPr>
             <a:r>
-              <a:t>·   Your data stays on your device — portable and exportable</a:t>
-            </a:r>
-          </a:p>
-        </p:txBody>
-      </p:sp>
-      <p:sp>
-        <p:nvSpPr>
-          <p:cNvPr id="6" name="TextBox 5"/>
+              <a:t>Your data stays on your device — portable and exportable</a:t>
+            </a:r>
+          </a:p>
+        </p:txBody>
+      </p:sp>
+      <p:sp>
+        <p:nvSpPr>
+          <p:cNvPr id="10" name="TextBox 9"/>
           <p:cNvSpPr txBox="1"/>
           <p:nvPr/>
         </p:nvSpPr>
         <p:spPr>
           <a:xfrm>
-            <a:off x="1371600" y="4206240"/>
+            <a:off x="1188720" y="4224528"/>
+            <a:ext cx="274320" cy="320040"/>
+          </a:xfrm>
+          <a:prstGeom prst="rect">
+            <a:avLst/>
+          </a:prstGeom>
+          <a:noFill/>
+        </p:spPr>
+        <p:txBody>
+          <a:bodyPr wrap="square">
+            <a:spAutoFit/>
+          </a:bodyPr>
+          <a:lstStyle/>
+          <a:p>
+            <a:pPr algn="l">
+              <a:lnSpc>
+                <a:spcPct val="120000"/>
+              </a:lnSpc>
+              <a:spcBef>
+                <a:spcPts val="0"/>
+              </a:spcBef>
+              <a:spcAft>
+                <a:spcPts val="0"/>
+              </a:spcAft>
+              <a:defRPr sz="1600" b="0">
+                <a:solidFill>
+                  <a:srgbClr val="4A7C59"/>
+                </a:solidFill>
+                <a:latin typeface="Calibri"/>
+              </a:defRPr>
+            </a:pPr>
+            <a:r>
+              <a:t>•</a:t>
+            </a:r>
+          </a:p>
+        </p:txBody>
+      </p:sp>
+      <p:sp>
+        <p:nvSpPr>
+          <p:cNvPr id="11" name="TextBox 10"/>
+          <p:cNvSpPr txBox="1"/>
+          <p:nvPr/>
+        </p:nvSpPr>
+        <p:spPr>
+          <a:xfrm>
+            <a:off x="1554480" y="4206240"/>
             <a:ext cx="8229600" cy="365760"/>
           </a:xfrm>
           <a:prstGeom prst="rect">
@@ -3854,20 +4226,65 @@
               </a:defRPr>
             </a:pPr>
             <a:r>
-              <a:t>·   Knowledge graph connects your journals, conversations, and thinking</a:t>
-            </a:r>
-          </a:p>
-        </p:txBody>
-      </p:sp>
-      <p:sp>
-        <p:nvSpPr>
-          <p:cNvPr id="7" name="TextBox 6"/>
+              <a:t>Knowledge graph connects your journals, conversations, and thinking</a:t>
+            </a:r>
+          </a:p>
+        </p:txBody>
+      </p:sp>
+      <p:sp>
+        <p:nvSpPr>
+          <p:cNvPr id="12" name="TextBox 11"/>
           <p:cNvSpPr txBox="1"/>
           <p:nvPr/>
         </p:nvSpPr>
         <p:spPr>
           <a:xfrm>
-            <a:off x="1371600" y="4709160"/>
+            <a:off x="1188720" y="4727448"/>
+            <a:ext cx="274320" cy="320040"/>
+          </a:xfrm>
+          <a:prstGeom prst="rect">
+            <a:avLst/>
+          </a:prstGeom>
+          <a:noFill/>
+        </p:spPr>
+        <p:txBody>
+          <a:bodyPr wrap="square">
+            <a:spAutoFit/>
+          </a:bodyPr>
+          <a:lstStyle/>
+          <a:p>
+            <a:pPr algn="l">
+              <a:lnSpc>
+                <a:spcPct val="120000"/>
+              </a:lnSpc>
+              <a:spcBef>
+                <a:spcPts val="0"/>
+              </a:spcBef>
+              <a:spcAft>
+                <a:spcPts val="0"/>
+              </a:spcAft>
+              <a:defRPr sz="1600" b="0">
+                <a:solidFill>
+                  <a:srgbClr val="4A7C59"/>
+                </a:solidFill>
+                <a:latin typeface="Calibri"/>
+              </a:defRPr>
+            </a:pPr>
+            <a:r>
+              <a:t>•</a:t>
+            </a:r>
+          </a:p>
+        </p:txBody>
+      </p:sp>
+      <p:sp>
+        <p:nvSpPr>
+          <p:cNvPr id="13" name="TextBox 12"/>
+          <p:cNvSpPr txBox="1"/>
+          <p:nvPr/>
+        </p:nvSpPr>
+        <p:spPr>
+          <a:xfrm>
+            <a:off x="1554480" y="4709160"/>
             <a:ext cx="8229600" cy="365760"/>
           </a:xfrm>
           <a:prstGeom prst="rect">
@@ -3899,14 +4316,14 @@
               </a:defRPr>
             </a:pPr>
             <a:r>
-              <a:t>·   Public Benefit Corporation — legally mandated to serve users</a:t>
-            </a:r>
-          </a:p>
-        </p:txBody>
-      </p:sp>
-      <p:sp>
-        <p:nvSpPr>
-          <p:cNvPr id="8" name="TextBox 7"/>
+              <a:t>Public Benefit Corporation — legally mandated to serve users</a:t>
+            </a:r>
+          </a:p>
+        </p:txBody>
+      </p:sp>
+      <p:sp>
+        <p:nvSpPr>
+          <p:cNvPr id="14" name="TextBox 13"/>
           <p:cNvSpPr txBox="1"/>
           <p:nvPr/>
         </p:nvSpPr>
@@ -3955,7 +4372,7 @@
       </p:sp>
       <p:sp>
         <p:nvSpPr>
-          <p:cNvPr id="9" name="TextBox 8"/>
+          <p:cNvPr id="15" name="TextBox 14"/>
           <p:cNvSpPr txBox="1"/>
           <p:nvPr/>
         </p:nvSpPr>
@@ -3993,7 +4410,7 @@
               </a:defRPr>
             </a:pPr>
             <a:r>
-              <a:t>But most people don't want to self-host a server.</a:t>
+              <a:t>But most people don’t want to self-host a server.</a:t>
             </a:r>
           </a:p>
         </p:txBody>
@@ -4026,235 +4443,23 @@
       <p:grpSpPr/>
       <p:sp>
         <p:nvSpPr>
-          <p:cNvPr id="2" name="TextBox 1"/>
-          <p:cNvSpPr txBox="1"/>
-          <p:nvPr/>
-        </p:nvSpPr>
-        <p:spPr>
-          <a:xfrm>
-            <a:off x="1097280" y="1097280"/>
-            <a:ext cx="3657600" cy="365760"/>
-          </a:xfrm>
-          <a:prstGeom prst="rect">
-            <a:avLst/>
-          </a:prstGeom>
-          <a:noFill/>
-        </p:spPr>
-        <p:txBody>
-          <a:bodyPr wrap="square">
-            <a:spAutoFit/>
-          </a:bodyPr>
-          <a:lstStyle/>
-          <a:p>
-            <a:pPr algn="l">
-              <a:lnSpc>
-                <a:spcPct val="120000"/>
-              </a:lnSpc>
-              <a:spcBef>
-                <a:spcPts val="0"/>
-              </a:spcBef>
-              <a:spcAft>
-                <a:spcPts val="0"/>
-              </a:spcAft>
-              <a:defRPr sz="1100" b="1">
-                <a:solidFill>
-                  <a:srgbClr val="4A7C59"/>
-                </a:solidFill>
-                <a:latin typeface="Calibri"/>
-              </a:defRPr>
-            </a:pPr>
-            <a:r>
-              <a:t>THE BRIDGE</a:t>
-            </a:r>
-          </a:p>
-        </p:txBody>
-      </p:sp>
-      <p:sp>
-        <p:nvSpPr>
-          <p:cNvPr id="3" name="TextBox 2"/>
-          <p:cNvSpPr txBox="1"/>
-          <p:nvPr/>
-        </p:nvSpPr>
-        <p:spPr>
-          <a:xfrm>
-            <a:off x="1097280" y="1554480"/>
-            <a:ext cx="9144000" cy="1371600"/>
-          </a:xfrm>
-          <a:prstGeom prst="rect">
-            <a:avLst/>
-          </a:prstGeom>
-          <a:noFill/>
-        </p:spPr>
-        <p:txBody>
-          <a:bodyPr wrap="square">
-            <a:spAutoFit/>
-          </a:bodyPr>
-          <a:lstStyle/>
-          <a:p>
-            <a:pPr algn="l">
-              <a:lnSpc>
-                <a:spcPct val="105000"/>
-              </a:lnSpc>
-              <a:spcBef>
-                <a:spcPts val="0"/>
-              </a:spcBef>
-              <a:spcAft>
-                <a:spcPts val="0"/>
-              </a:spcAft>
-              <a:defRPr sz="4000" b="0">
-                <a:solidFill>
-                  <a:srgbClr val="2C2A26"/>
-                </a:solidFill>
-                <a:latin typeface="Georgia"/>
-              </a:defRPr>
-            </a:pPr>
-            <a:r>
-              <a:t>Parachute Daily.</a:t>
-            </a:r>
-            <a:br/>
-            <a:r>
-              <a:t>Just talk.</a:t>
-            </a:r>
-          </a:p>
-        </p:txBody>
-      </p:sp>
-      <p:sp>
-        <p:nvSpPr>
-          <p:cNvPr id="4" name="TextBox 3"/>
-          <p:cNvSpPr txBox="1"/>
-          <p:nvPr/>
-        </p:nvSpPr>
-        <p:spPr>
-          <a:xfrm>
-            <a:off x="1097280" y="3200400"/>
-            <a:ext cx="5029200" cy="2560320"/>
-          </a:xfrm>
-          <a:prstGeom prst="rect">
-            <a:avLst/>
-          </a:prstGeom>
-          <a:noFill/>
-        </p:spPr>
-        <p:txBody>
-          <a:bodyPr wrap="square">
-            <a:spAutoFit/>
-          </a:bodyPr>
-          <a:lstStyle/>
-          <a:p>
-            <a:pPr algn="l">
-              <a:lnSpc>
-                <a:spcPct val="150000"/>
-              </a:lnSpc>
-              <a:spcBef>
-                <a:spcPts val="0"/>
-              </a:spcBef>
-              <a:spcAft>
-                <a:spcPts val="0"/>
-              </a:spcAft>
-              <a:defRPr sz="1800" b="0">
-                <a:solidFill>
-                  <a:srgbClr val="6B6860"/>
-                </a:solidFill>
-                <a:latin typeface="Calibri"/>
-              </a:defRPr>
-            </a:pPr>
-            <a:r>
-              <a:t>A voice-first journal.</a:t>
-            </a:r>
-            <a:br/>
-            <a:br/>
-            <a:r>
-              <a:t>Speak into a wearable pendant or your phone —</a:t>
-            </a:r>
-            <a:br/>
-            <a:r>
-              <a:t>on a walk, in the car, wherever thinking happens.</a:t>
-            </a:r>
-            <a:br/>
-            <a:br/>
-            <a:r>
-              <a:t>AI weaves through gently:</a:t>
-            </a:r>
-            <a:br/>
-            <a:r>
-              <a:t>  ·  Daily reflections on your entries</a:t>
-            </a:r>
-            <a:br/>
-            <a:r>
-              <a:t>  ·  Pattern recognition over time</a:t>
-            </a:r>
-            <a:br/>
-            <a:r>
-              <a:t>  ·  Weekly synthesis of your thinking</a:t>
-            </a:r>
-          </a:p>
-        </p:txBody>
-      </p:sp>
-      <p:sp>
-        <p:nvSpPr>
-          <p:cNvPr id="5" name="TextBox 4"/>
-          <p:cNvSpPr txBox="1"/>
-          <p:nvPr/>
-        </p:nvSpPr>
-        <p:spPr>
-          <a:xfrm>
-            <a:off x="1097280" y="5943600"/>
-            <a:ext cx="5029200" cy="457200"/>
-          </a:xfrm>
-          <a:prstGeom prst="rect">
-            <a:avLst/>
-          </a:prstGeom>
-          <a:noFill/>
-        </p:spPr>
-        <p:txBody>
-          <a:bodyPr wrap="square">
-            <a:spAutoFit/>
-          </a:bodyPr>
-          <a:lstStyle/>
-          <a:p>
-            <a:pPr algn="l">
-              <a:lnSpc>
-                <a:spcPct val="120000"/>
-              </a:lnSpc>
-              <a:spcBef>
-                <a:spcPts val="0"/>
-              </a:spcBef>
-              <a:spcAft>
-                <a:spcPts val="0"/>
-              </a:spcAft>
-              <a:defRPr sz="1800" b="0">
-                <a:solidFill>
-                  <a:srgbClr val="2C2A26"/>
-                </a:solidFill>
-                <a:latin typeface="Calibri"/>
-              </a:defRPr>
-            </a:pPr>
-            <a:r>
-              <a:t>No learning curve. No technical sophistication required.</a:t>
-            </a:r>
-          </a:p>
-        </p:txBody>
-      </p:sp>
-      <p:sp>
-        <p:nvSpPr>
-          <p:cNvPr id="6" name="Rounded Rectangle 5"/>
+          <p:cNvPr id="2" name="Rectangle 1"/>
           <p:cNvSpPr/>
           <p:nvPr/>
         </p:nvSpPr>
         <p:spPr>
           <a:xfrm>
-            <a:off x="7132320" y="3200400"/>
-            <a:ext cx="4114800" cy="2743200"/>
-          </a:xfrm>
-          <a:prstGeom prst="roundRect">
+            <a:off x="0" y="0"/>
+            <a:ext cx="12191695" cy="54864"/>
+          </a:xfrm>
+          <a:prstGeom prst="rect">
             <a:avLst/>
           </a:prstGeom>
           <a:solidFill>
-            <a:srgbClr val="F3F0EA"/>
+            <a:srgbClr val="4A7C59"/>
           </a:solidFill>
-          <a:ln w="12700">
-            <a:solidFill>
-              <a:srgbClr val="E4E0D8"/>
-            </a:solidFill>
+          <a:ln>
+            <a:noFill/>
           </a:ln>
         </p:spPr>
         <p:style>
@@ -4281,14 +4486,50 @@
       </p:sp>
       <p:sp>
         <p:nvSpPr>
-          <p:cNvPr id="7" name="TextBox 6"/>
+          <p:cNvPr id="3" name="TextBox 2"/>
           <p:cNvSpPr txBox="1"/>
           <p:nvPr/>
         </p:nvSpPr>
         <p:spPr>
           <a:xfrm>
-            <a:off x="7498079" y="3474720"/>
-            <a:ext cx="3383280" cy="365760"/>
+            <a:off x="1097280" y="6400800"/>
+            <a:ext cx="3657600" cy="274320"/>
+          </a:xfrm>
+          <a:prstGeom prst="rect">
+            <a:avLst/>
+          </a:prstGeom>
+          <a:noFill/>
+        </p:spPr>
+        <p:txBody>
+          <a:bodyPr wrap="none">
+            <a:spAutoFit/>
+          </a:bodyPr>
+          <a:lstStyle/>
+          <a:p>
+            <a:pPr>
+              <a:defRPr sz="900">
+                <a:solidFill>
+                  <a:srgbClr val="9A9690"/>
+                </a:solidFill>
+                <a:latin typeface="Calibri"/>
+              </a:defRPr>
+            </a:pPr>
+            <a:r>
+              <a:t>parachute.computer</a:t>
+            </a:r>
+          </a:p>
+        </p:txBody>
+      </p:sp>
+      <p:sp>
+        <p:nvSpPr>
+          <p:cNvPr id="4" name="TextBox 3"/>
+          <p:cNvSpPr txBox="1"/>
+          <p:nvPr/>
+        </p:nvSpPr>
+        <p:spPr>
+          <a:xfrm>
+            <a:off x="1097280" y="1097280"/>
+            <a:ext cx="3657600" cy="365760"/>
           </a:xfrm>
           <a:prstGeom prst="rect">
             <a:avLst/>
@@ -4319,6 +4560,261 @@
               </a:defRPr>
             </a:pPr>
             <a:r>
+              <a:t>THE BRIDGE</a:t>
+            </a:r>
+          </a:p>
+        </p:txBody>
+      </p:sp>
+      <p:sp>
+        <p:nvSpPr>
+          <p:cNvPr id="5" name="TextBox 4"/>
+          <p:cNvSpPr txBox="1"/>
+          <p:nvPr/>
+        </p:nvSpPr>
+        <p:spPr>
+          <a:xfrm>
+            <a:off x="1097280" y="1554480"/>
+            <a:ext cx="9144000" cy="1371600"/>
+          </a:xfrm>
+          <a:prstGeom prst="rect">
+            <a:avLst/>
+          </a:prstGeom>
+          <a:noFill/>
+        </p:spPr>
+        <p:txBody>
+          <a:bodyPr wrap="square">
+            <a:spAutoFit/>
+          </a:bodyPr>
+          <a:lstStyle/>
+          <a:p>
+            <a:pPr algn="l">
+              <a:lnSpc>
+                <a:spcPct val="105000"/>
+              </a:lnSpc>
+              <a:spcBef>
+                <a:spcPts val="0"/>
+              </a:spcBef>
+              <a:spcAft>
+                <a:spcPts val="0"/>
+              </a:spcAft>
+              <a:defRPr sz="4000" b="0">
+                <a:solidFill>
+                  <a:srgbClr val="2C2A26"/>
+                </a:solidFill>
+                <a:latin typeface="Georgia"/>
+              </a:defRPr>
+            </a:pPr>
+            <a:r>
+              <a:t>Parachute Daily.</a:t>
+            </a:r>
+            <a:br/>
+            <a:r>
+              <a:t>Just talk.</a:t>
+            </a:r>
+          </a:p>
+        </p:txBody>
+      </p:sp>
+      <p:sp>
+        <p:nvSpPr>
+          <p:cNvPr id="6" name="TextBox 5"/>
+          <p:cNvSpPr txBox="1"/>
+          <p:nvPr/>
+        </p:nvSpPr>
+        <p:spPr>
+          <a:xfrm>
+            <a:off x="1097280" y="3200400"/>
+            <a:ext cx="5029200" cy="2560320"/>
+          </a:xfrm>
+          <a:prstGeom prst="rect">
+            <a:avLst/>
+          </a:prstGeom>
+          <a:noFill/>
+        </p:spPr>
+        <p:txBody>
+          <a:bodyPr wrap="square">
+            <a:spAutoFit/>
+          </a:bodyPr>
+          <a:lstStyle/>
+          <a:p>
+            <a:pPr algn="l">
+              <a:lnSpc>
+                <a:spcPct val="150000"/>
+              </a:lnSpc>
+              <a:spcBef>
+                <a:spcPts val="0"/>
+              </a:spcBef>
+              <a:spcAft>
+                <a:spcPts val="0"/>
+              </a:spcAft>
+              <a:defRPr sz="1800" b="0">
+                <a:solidFill>
+                  <a:srgbClr val="6B6860"/>
+                </a:solidFill>
+                <a:latin typeface="Calibri"/>
+              </a:defRPr>
+            </a:pPr>
+            <a:r>
+              <a:t>A voice-first journal.</a:t>
+            </a:r>
+            <a:br/>
+            <a:br/>
+            <a:r>
+              <a:t>Speak into a wearable pendant or your phone —</a:t>
+            </a:r>
+            <a:br/>
+            <a:r>
+              <a:t>on a walk, in the car, wherever thinking happens.</a:t>
+            </a:r>
+            <a:br/>
+            <a:br/>
+            <a:r>
+              <a:t>AI weaves through gently:</a:t>
+            </a:r>
+            <a:br/>
+            <a:r>
+              <a:t>  ·  Daily reflections on your entries</a:t>
+            </a:r>
+            <a:br/>
+            <a:r>
+              <a:t>  ·  Pattern recognition over time</a:t>
+            </a:r>
+            <a:br/>
+            <a:r>
+              <a:t>  ·  Weekly synthesis of your thinking</a:t>
+            </a:r>
+          </a:p>
+        </p:txBody>
+      </p:sp>
+      <p:sp>
+        <p:nvSpPr>
+          <p:cNvPr id="7" name="TextBox 6"/>
+          <p:cNvSpPr txBox="1"/>
+          <p:nvPr/>
+        </p:nvSpPr>
+        <p:spPr>
+          <a:xfrm>
+            <a:off x="1097280" y="5943600"/>
+            <a:ext cx="5029200" cy="457200"/>
+          </a:xfrm>
+          <a:prstGeom prst="rect">
+            <a:avLst/>
+          </a:prstGeom>
+          <a:noFill/>
+        </p:spPr>
+        <p:txBody>
+          <a:bodyPr wrap="square">
+            <a:spAutoFit/>
+          </a:bodyPr>
+          <a:lstStyle/>
+          <a:p>
+            <a:pPr algn="l">
+              <a:lnSpc>
+                <a:spcPct val="120000"/>
+              </a:lnSpc>
+              <a:spcBef>
+                <a:spcPts val="0"/>
+              </a:spcBef>
+              <a:spcAft>
+                <a:spcPts val="0"/>
+              </a:spcAft>
+              <a:defRPr sz="1800" b="0">
+                <a:solidFill>
+                  <a:srgbClr val="2C2A26"/>
+                </a:solidFill>
+                <a:latin typeface="Calibri"/>
+              </a:defRPr>
+            </a:pPr>
+            <a:r>
+              <a:t>No learning curve. No technical sophistication required.</a:t>
+            </a:r>
+          </a:p>
+        </p:txBody>
+      </p:sp>
+      <p:sp>
+        <p:nvSpPr>
+          <p:cNvPr id="8" name="Rounded Rectangle 7"/>
+          <p:cNvSpPr/>
+          <p:nvPr/>
+        </p:nvSpPr>
+        <p:spPr>
+          <a:xfrm>
+            <a:off x="7132320" y="3200400"/>
+            <a:ext cx="4114800" cy="2743200"/>
+          </a:xfrm>
+          <a:prstGeom prst="roundRect">
+            <a:avLst/>
+          </a:prstGeom>
+          <a:solidFill>
+            <a:srgbClr val="F3F0EA"/>
+          </a:solidFill>
+          <a:ln w="12700">
+            <a:solidFill>
+              <a:srgbClr val="E4E0D8"/>
+            </a:solidFill>
+          </a:ln>
+        </p:spPr>
+        <p:style>
+          <a:lnRef idx="1">
+            <a:schemeClr val="accent1"/>
+          </a:lnRef>
+          <a:fillRef idx="3">
+            <a:schemeClr val="accent1"/>
+          </a:fillRef>
+          <a:effectRef idx="2">
+            <a:schemeClr val="accent1"/>
+          </a:effectRef>
+          <a:fontRef idx="minor">
+            <a:schemeClr val="lt1"/>
+          </a:fontRef>
+        </p:style>
+        <p:txBody>
+          <a:bodyPr rtlCol="0" anchor="ctr"/>
+          <a:lstStyle/>
+          <a:p>
+            <a:pPr algn="ctr"/>
+          </a:p>
+        </p:txBody>
+      </p:sp>
+      <p:sp>
+        <p:nvSpPr>
+          <p:cNvPr id="9" name="TextBox 8"/>
+          <p:cNvSpPr txBox="1"/>
+          <p:nvPr/>
+        </p:nvSpPr>
+        <p:spPr>
+          <a:xfrm>
+            <a:off x="7498079" y="3474720"/>
+            <a:ext cx="3383280" cy="365760"/>
+          </a:xfrm>
+          <a:prstGeom prst="rect">
+            <a:avLst/>
+          </a:prstGeom>
+          <a:noFill/>
+        </p:spPr>
+        <p:txBody>
+          <a:bodyPr wrap="square">
+            <a:spAutoFit/>
+          </a:bodyPr>
+          <a:lstStyle/>
+          <a:p>
+            <a:pPr algn="l">
+              <a:lnSpc>
+                <a:spcPct val="120000"/>
+              </a:lnSpc>
+              <a:spcBef>
+                <a:spcPts val="0"/>
+              </a:spcBef>
+              <a:spcAft>
+                <a:spcPts val="0"/>
+              </a:spcAft>
+              <a:defRPr sz="1100" b="1">
+                <a:solidFill>
+                  <a:srgbClr val="4A7C59"/>
+                </a:solidFill>
+                <a:latin typeface="Calibri"/>
+              </a:defRPr>
+            </a:pPr>
+            <a:r>
               <a:t>THE PENDANT</a:t>
             </a:r>
           </a:p>
@@ -4326,7 +4822,7 @@
       </p:sp>
       <p:sp>
         <p:nvSpPr>
-          <p:cNvPr id="8" name="TextBox 7"/>
+          <p:cNvPr id="10" name="TextBox 9"/>
           <p:cNvSpPr txBox="1"/>
           <p:nvPr/>
         </p:nvSpPr>
@@ -4377,7 +4873,7 @@
             </a:r>
             <a:br/>
             <a:r>
-              <a:t>knowledge by the time you're home.</a:t>
+              <a:t>knowledge by the time you’re home.</a:t>
             </a:r>
             <a:br/>
             <a:br/>
@@ -4415,7 +4911,86 @@
       <p:grpSpPr/>
       <p:sp>
         <p:nvSpPr>
-          <p:cNvPr id="2" name="TextBox 1"/>
+          <p:cNvPr id="2" name="Rectangle 1"/>
+          <p:cNvSpPr/>
+          <p:nvPr/>
+        </p:nvSpPr>
+        <p:spPr>
+          <a:xfrm>
+            <a:off x="0" y="0"/>
+            <a:ext cx="12191695" cy="54864"/>
+          </a:xfrm>
+          <a:prstGeom prst="rect">
+            <a:avLst/>
+          </a:prstGeom>
+          <a:solidFill>
+            <a:srgbClr val="4A7C59"/>
+          </a:solidFill>
+          <a:ln>
+            <a:noFill/>
+          </a:ln>
+        </p:spPr>
+        <p:style>
+          <a:lnRef idx="1">
+            <a:schemeClr val="accent1"/>
+          </a:lnRef>
+          <a:fillRef idx="3">
+            <a:schemeClr val="accent1"/>
+          </a:fillRef>
+          <a:effectRef idx="2">
+            <a:schemeClr val="accent1"/>
+          </a:effectRef>
+          <a:fontRef idx="minor">
+            <a:schemeClr val="lt1"/>
+          </a:fontRef>
+        </p:style>
+        <p:txBody>
+          <a:bodyPr rtlCol="0" anchor="ctr"/>
+          <a:lstStyle/>
+          <a:p>
+            <a:pPr algn="ctr"/>
+          </a:p>
+        </p:txBody>
+      </p:sp>
+      <p:sp>
+        <p:nvSpPr>
+          <p:cNvPr id="3" name="TextBox 2"/>
+          <p:cNvSpPr txBox="1"/>
+          <p:nvPr/>
+        </p:nvSpPr>
+        <p:spPr>
+          <a:xfrm>
+            <a:off x="1097280" y="6400800"/>
+            <a:ext cx="3657600" cy="274320"/>
+          </a:xfrm>
+          <a:prstGeom prst="rect">
+            <a:avLst/>
+          </a:prstGeom>
+          <a:noFill/>
+        </p:spPr>
+        <p:txBody>
+          <a:bodyPr wrap="none">
+            <a:spAutoFit/>
+          </a:bodyPr>
+          <a:lstStyle/>
+          <a:p>
+            <a:pPr>
+              <a:defRPr sz="900">
+                <a:solidFill>
+                  <a:srgbClr val="9A9690"/>
+                </a:solidFill>
+                <a:latin typeface="Calibri"/>
+              </a:defRPr>
+            </a:pPr>
+            <a:r>
+              <a:t>parachute.computer</a:t>
+            </a:r>
+          </a:p>
+        </p:txBody>
+      </p:sp>
+      <p:sp>
+        <p:nvSpPr>
+          <p:cNvPr id="4" name="TextBox 3"/>
           <p:cNvSpPr txBox="1"/>
           <p:nvPr/>
         </p:nvSpPr>
@@ -4460,7 +5035,7 @@
       </p:sp>
       <p:sp>
         <p:nvSpPr>
-          <p:cNvPr id="3" name="TextBox 2"/>
+          <p:cNvPr id="5" name="TextBox 4"/>
           <p:cNvSpPr txBox="1"/>
           <p:nvPr/>
         </p:nvSpPr>
@@ -4505,7 +5080,7 @@
       </p:sp>
       <p:sp>
         <p:nvSpPr>
-          <p:cNvPr id="4" name="TextBox 3"/>
+          <p:cNvPr id="6" name="TextBox 5"/>
           <p:cNvSpPr txBox="1"/>
           <p:nvPr/>
         </p:nvSpPr>
@@ -4554,7 +5129,7 @@
       </p:sp>
       <p:sp>
         <p:nvSpPr>
-          <p:cNvPr id="5" name="TextBox 4"/>
+          <p:cNvPr id="7" name="TextBox 6"/>
           <p:cNvSpPr txBox="1"/>
           <p:nvPr/>
         </p:nvSpPr>
@@ -4599,7 +5174,7 @@
       </p:sp>
       <p:sp>
         <p:nvSpPr>
-          <p:cNvPr id="6" name="TextBox 5"/>
+          <p:cNvPr id="8" name="TextBox 7"/>
           <p:cNvSpPr txBox="1"/>
           <p:nvPr/>
         </p:nvSpPr>
@@ -4644,7 +5219,7 @@
       </p:sp>
       <p:sp>
         <p:nvSpPr>
-          <p:cNvPr id="7" name="TextBox 6"/>
+          <p:cNvPr id="9" name="TextBox 8"/>
           <p:cNvSpPr txBox="1"/>
           <p:nvPr/>
         </p:nvSpPr>
@@ -4689,7 +5264,7 @@
       </p:sp>
       <p:sp>
         <p:nvSpPr>
-          <p:cNvPr id="8" name="TextBox 7"/>
+          <p:cNvPr id="10" name="TextBox 9"/>
           <p:cNvSpPr txBox="1"/>
           <p:nvPr/>
         </p:nvSpPr>
@@ -4734,7 +5309,7 @@
       </p:sp>
       <p:sp>
         <p:nvSpPr>
-          <p:cNvPr id="9" name="TextBox 8"/>
+          <p:cNvPr id="11" name="TextBox 10"/>
           <p:cNvSpPr txBox="1"/>
           <p:nvPr/>
         </p:nvSpPr>
@@ -4779,7 +5354,7 @@
       </p:sp>
       <p:sp>
         <p:nvSpPr>
-          <p:cNvPr id="10" name="TextBox 9"/>
+          <p:cNvPr id="12" name="TextBox 11"/>
           <p:cNvSpPr txBox="1"/>
           <p:nvPr/>
         </p:nvSpPr>
@@ -4824,7 +5399,7 @@
       </p:sp>
       <p:sp>
         <p:nvSpPr>
-          <p:cNvPr id="11" name="TextBox 10"/>
+          <p:cNvPr id="13" name="TextBox 12"/>
           <p:cNvSpPr txBox="1"/>
           <p:nvPr/>
         </p:nvSpPr>
@@ -4869,7 +5444,7 @@
       </p:sp>
       <p:sp>
         <p:nvSpPr>
-          <p:cNvPr id="12" name="TextBox 11"/>
+          <p:cNvPr id="14" name="TextBox 13"/>
           <p:cNvSpPr txBox="1"/>
           <p:nvPr/>
         </p:nvSpPr>
@@ -4914,7 +5489,7 @@
       </p:sp>
       <p:sp>
         <p:nvSpPr>
-          <p:cNvPr id="13" name="TextBox 12"/>
+          <p:cNvPr id="15" name="TextBox 14"/>
           <p:cNvSpPr txBox="1"/>
           <p:nvPr/>
         </p:nvSpPr>
@@ -4959,7 +5534,7 @@
       </p:sp>
       <p:sp>
         <p:nvSpPr>
-          <p:cNvPr id="14" name="TextBox 13"/>
+          <p:cNvPr id="16" name="TextBox 15"/>
           <p:cNvSpPr txBox="1"/>
           <p:nvPr/>
         </p:nvSpPr>
@@ -5030,384 +5605,20 @@
       <p:grpSpPr/>
       <p:sp>
         <p:nvSpPr>
-          <p:cNvPr id="2" name="TextBox 1"/>
-          <p:cNvSpPr txBox="1"/>
-          <p:nvPr/>
-        </p:nvSpPr>
-        <p:spPr>
-          <a:xfrm>
-            <a:off x="1097280" y="1097280"/>
-            <a:ext cx="3657600" cy="365760"/>
-          </a:xfrm>
-          <a:prstGeom prst="rect">
-            <a:avLst/>
-          </a:prstGeom>
-          <a:noFill/>
-        </p:spPr>
-        <p:txBody>
-          <a:bodyPr wrap="square">
-            <a:spAutoFit/>
-          </a:bodyPr>
-          <a:lstStyle/>
-          <a:p>
-            <a:pPr algn="l">
-              <a:lnSpc>
-                <a:spcPct val="120000"/>
-              </a:lnSpc>
-              <a:spcBef>
-                <a:spcPts val="0"/>
-              </a:spcBef>
-              <a:spcAft>
-                <a:spcPts val="0"/>
-              </a:spcAft>
-              <a:defRPr sz="1100" b="1">
-                <a:solidFill>
-                  <a:srgbClr val="4A7C59"/>
-                </a:solidFill>
-                <a:latin typeface="Calibri"/>
-              </a:defRPr>
-            </a:pPr>
-            <a:r>
-              <a:t>BUSINESS MODEL</a:t>
-            </a:r>
-          </a:p>
-        </p:txBody>
-      </p:sp>
-      <p:sp>
-        <p:nvSpPr>
-          <p:cNvPr id="3" name="TextBox 2"/>
-          <p:cNvSpPr txBox="1"/>
-          <p:nvPr/>
-        </p:nvSpPr>
-        <p:spPr>
-          <a:xfrm>
-            <a:off x="1097280" y="1554480"/>
-            <a:ext cx="9144000" cy="1371600"/>
-          </a:xfrm>
-          <a:prstGeom prst="rect">
-            <a:avLst/>
-          </a:prstGeom>
-          <a:noFill/>
-        </p:spPr>
-        <p:txBody>
-          <a:bodyPr wrap="square">
-            <a:spAutoFit/>
-          </a:bodyPr>
-          <a:lstStyle/>
-          <a:p>
-            <a:pPr algn="l">
-              <a:lnSpc>
-                <a:spcPct val="105000"/>
-              </a:lnSpc>
-              <a:spcBef>
-                <a:spcPts val="0"/>
-              </a:spcBef>
-              <a:spcAft>
-                <a:spcPts val="0"/>
-              </a:spcAft>
-              <a:defRPr sz="4000" b="0">
-                <a:solidFill>
-                  <a:srgbClr val="2C2A26"/>
-                </a:solidFill>
-                <a:latin typeface="Georgia"/>
-              </a:defRPr>
-            </a:pPr>
-            <a:r>
-              <a:t>Start free.</a:t>
-            </a:r>
-            <a:br/>
-            <a:r>
-              <a:t>Grow with every user.</a:t>
-            </a:r>
-          </a:p>
-        </p:txBody>
-      </p:sp>
-      <p:sp>
-        <p:nvSpPr>
-          <p:cNvPr id="4" name="TextBox 3"/>
-          <p:cNvSpPr txBox="1"/>
-          <p:nvPr/>
-        </p:nvSpPr>
-        <p:spPr>
-          <a:xfrm>
-            <a:off x="1097280" y="3200400"/>
-            <a:ext cx="1645920" cy="365760"/>
-          </a:xfrm>
-          <a:prstGeom prst="rect">
-            <a:avLst/>
-          </a:prstGeom>
-          <a:noFill/>
-        </p:spPr>
-        <p:txBody>
-          <a:bodyPr wrap="square">
-            <a:spAutoFit/>
-          </a:bodyPr>
-          <a:lstStyle/>
-          <a:p>
-            <a:pPr algn="l">
-              <a:lnSpc>
-                <a:spcPct val="120000"/>
-              </a:lnSpc>
-              <a:spcBef>
-                <a:spcPts val="0"/>
-              </a:spcBef>
-              <a:spcAft>
-                <a:spcPts val="0"/>
-              </a:spcAft>
-              <a:defRPr sz="2400" b="0">
-                <a:solidFill>
-                  <a:srgbClr val="9A9690"/>
-                </a:solidFill>
-                <a:latin typeface="Georgia"/>
-              </a:defRPr>
-            </a:pPr>
-            <a:r>
-              <a:t>Free</a:t>
-            </a:r>
-          </a:p>
-        </p:txBody>
-      </p:sp>
-      <p:sp>
-        <p:nvSpPr>
-          <p:cNvPr id="5" name="TextBox 4"/>
-          <p:cNvSpPr txBox="1"/>
-          <p:nvPr/>
-        </p:nvSpPr>
-        <p:spPr>
-          <a:xfrm>
-            <a:off x="2926080" y="3246120"/>
-            <a:ext cx="7315200" cy="365760"/>
-          </a:xfrm>
-          <a:prstGeom prst="rect">
-            <a:avLst/>
-          </a:prstGeom>
-          <a:noFill/>
-        </p:spPr>
-        <p:txBody>
-          <a:bodyPr wrap="square">
-            <a:spAutoFit/>
-          </a:bodyPr>
-          <a:lstStyle/>
-          <a:p>
-            <a:pPr algn="l">
-              <a:lnSpc>
-                <a:spcPct val="120000"/>
-              </a:lnSpc>
-              <a:spcBef>
-                <a:spcPts val="0"/>
-              </a:spcBef>
-              <a:spcAft>
-                <a:spcPts val="0"/>
-              </a:spcAft>
-              <a:defRPr sz="1600" b="0">
-                <a:solidFill>
-                  <a:srgbClr val="6B6860"/>
-                </a:solidFill>
-                <a:latin typeface="Calibri"/>
-              </a:defRPr>
-            </a:pPr>
-            <a:r>
-              <a:t>Offline journal + on-device transcription. Zero hosting cost.</a:t>
-            </a:r>
-          </a:p>
-        </p:txBody>
-      </p:sp>
-      <p:sp>
-        <p:nvSpPr>
-          <p:cNvPr id="6" name="TextBox 5"/>
-          <p:cNvSpPr txBox="1"/>
-          <p:nvPr/>
-        </p:nvSpPr>
-        <p:spPr>
-          <a:xfrm>
-            <a:off x="1097280" y="3840480"/>
-            <a:ext cx="1645920" cy="365760"/>
-          </a:xfrm>
-          <a:prstGeom prst="rect">
-            <a:avLst/>
-          </a:prstGeom>
-          <a:noFill/>
-        </p:spPr>
-        <p:txBody>
-          <a:bodyPr wrap="square">
-            <a:spAutoFit/>
-          </a:bodyPr>
-          <a:lstStyle/>
-          <a:p>
-            <a:pPr algn="l">
-              <a:lnSpc>
-                <a:spcPct val="120000"/>
-              </a:lnSpc>
-              <a:spcBef>
-                <a:spcPts val="0"/>
-              </a:spcBef>
-              <a:spcAft>
-                <a:spcPts val="0"/>
-              </a:spcAft>
-              <a:defRPr sz="2400" b="0">
-                <a:solidFill>
-                  <a:srgbClr val="6B6860"/>
-                </a:solidFill>
-                <a:latin typeface="Georgia"/>
-              </a:defRPr>
-            </a:pPr>
-            <a:r>
-              <a:t>$2/mo</a:t>
-            </a:r>
-          </a:p>
-        </p:txBody>
-      </p:sp>
-      <p:sp>
-        <p:nvSpPr>
-          <p:cNvPr id="7" name="TextBox 6"/>
-          <p:cNvSpPr txBox="1"/>
-          <p:nvPr/>
-        </p:nvSpPr>
-        <p:spPr>
-          <a:xfrm>
-            <a:off x="2926080" y="3886200"/>
-            <a:ext cx="7315200" cy="365760"/>
-          </a:xfrm>
-          <a:prstGeom prst="rect">
-            <a:avLst/>
-          </a:prstGeom>
-          <a:noFill/>
-        </p:spPr>
-        <p:txBody>
-          <a:bodyPr wrap="square">
-            <a:spAutoFit/>
-          </a:bodyPr>
-          <a:lstStyle/>
-          <a:p>
-            <a:pPr algn="l">
-              <a:lnSpc>
-                <a:spcPct val="120000"/>
-              </a:lnSpc>
-              <a:spcBef>
-                <a:spcPts val="0"/>
-              </a:spcBef>
-              <a:spcAft>
-                <a:spcPts val="0"/>
-              </a:spcAft>
-              <a:defRPr sz="1600" b="0">
-                <a:solidFill>
-                  <a:srgbClr val="6B6860"/>
-                </a:solidFill>
-                <a:latin typeface="Calibri"/>
-              </a:defRPr>
-            </a:pPr>
-            <a:r>
-              <a:t>Cloud sync across devices. Your notes everywhere.</a:t>
-            </a:r>
-          </a:p>
-        </p:txBody>
-      </p:sp>
-      <p:sp>
-        <p:nvSpPr>
-          <p:cNvPr id="8" name="TextBox 7"/>
-          <p:cNvSpPr txBox="1"/>
-          <p:nvPr/>
-        </p:nvSpPr>
-        <p:spPr>
-          <a:xfrm>
-            <a:off x="1097280" y="4480560"/>
-            <a:ext cx="1645920" cy="365760"/>
-          </a:xfrm>
-          <a:prstGeom prst="rect">
-            <a:avLst/>
-          </a:prstGeom>
-          <a:noFill/>
-        </p:spPr>
-        <p:txBody>
-          <a:bodyPr wrap="square">
-            <a:spAutoFit/>
-          </a:bodyPr>
-          <a:lstStyle/>
-          <a:p>
-            <a:pPr algn="l">
-              <a:lnSpc>
-                <a:spcPct val="120000"/>
-              </a:lnSpc>
-              <a:spcBef>
-                <a:spcPts val="0"/>
-              </a:spcBef>
-              <a:spcAft>
-                <a:spcPts val="0"/>
-              </a:spcAft>
-              <a:defRPr sz="2400" b="0">
-                <a:solidFill>
-                  <a:srgbClr val="6B6860"/>
-                </a:solidFill>
-                <a:latin typeface="Georgia"/>
-              </a:defRPr>
-            </a:pPr>
-            <a:r>
-              <a:t>$5/mo</a:t>
-            </a:r>
-          </a:p>
-        </p:txBody>
-      </p:sp>
-      <p:sp>
-        <p:nvSpPr>
-          <p:cNvPr id="9" name="TextBox 8"/>
-          <p:cNvSpPr txBox="1"/>
-          <p:nvPr/>
-        </p:nvSpPr>
-        <p:spPr>
-          <a:xfrm>
-            <a:off x="2926080" y="4526280"/>
-            <a:ext cx="7315200" cy="365760"/>
-          </a:xfrm>
-          <a:prstGeom prst="rect">
-            <a:avLst/>
-          </a:prstGeom>
-          <a:noFill/>
-        </p:spPr>
-        <p:txBody>
-          <a:bodyPr wrap="square">
-            <a:spAutoFit/>
-          </a:bodyPr>
-          <a:lstStyle/>
-          <a:p>
-            <a:pPr algn="l">
-              <a:lnSpc>
-                <a:spcPct val="120000"/>
-              </a:lnSpc>
-              <a:spcBef>
-                <a:spcPts val="0"/>
-              </a:spcBef>
-              <a:spcAft>
-                <a:spcPts val="0"/>
-              </a:spcAft>
-              <a:defRPr sz="1600" b="0">
-                <a:solidFill>
-                  <a:srgbClr val="6B6860"/>
-                </a:solidFill>
-                <a:latin typeface="Calibri"/>
-              </a:defRPr>
-            </a:pPr>
-            <a:r>
-              <a:t>Cloud transcription + cleanup — server-side processing, better accuracy</a:t>
-            </a:r>
-          </a:p>
-        </p:txBody>
-      </p:sp>
-      <p:sp>
-        <p:nvSpPr>
-          <p:cNvPr id="10" name="Rounded Rectangle 9"/>
+          <p:cNvPr id="2" name="Rectangle 1"/>
           <p:cNvSpPr/>
           <p:nvPr/>
         </p:nvSpPr>
         <p:spPr>
           <a:xfrm>
-            <a:off x="914400" y="4983480"/>
-            <a:ext cx="9601200" cy="594360"/>
-          </a:xfrm>
-          <a:prstGeom prst="roundRect">
+            <a:off x="0" y="0"/>
+            <a:ext cx="12191695" cy="54864"/>
+          </a:xfrm>
+          <a:prstGeom prst="rect">
             <a:avLst/>
           </a:prstGeom>
           <a:solidFill>
-            <a:srgbClr val="E8F5EC"/>
+            <a:srgbClr val="4A7C59"/>
           </a:solidFill>
           <a:ln>
             <a:noFill/>
@@ -5437,14 +5648,50 @@
       </p:sp>
       <p:sp>
         <p:nvSpPr>
-          <p:cNvPr id="11" name="TextBox 10"/>
+          <p:cNvPr id="3" name="TextBox 2"/>
           <p:cNvSpPr txBox="1"/>
           <p:nvPr/>
         </p:nvSpPr>
         <p:spPr>
           <a:xfrm>
-            <a:off x="1097280" y="5120640"/>
-            <a:ext cx="1645920" cy="365760"/>
+            <a:off x="1097280" y="6400800"/>
+            <a:ext cx="3657600" cy="274320"/>
+          </a:xfrm>
+          <a:prstGeom prst="rect">
+            <a:avLst/>
+          </a:prstGeom>
+          <a:noFill/>
+        </p:spPr>
+        <p:txBody>
+          <a:bodyPr wrap="none">
+            <a:spAutoFit/>
+          </a:bodyPr>
+          <a:lstStyle/>
+          <a:p>
+            <a:pPr>
+              <a:defRPr sz="900">
+                <a:solidFill>
+                  <a:srgbClr val="9A9690"/>
+                </a:solidFill>
+                <a:latin typeface="Calibri"/>
+              </a:defRPr>
+            </a:pPr>
+            <a:r>
+              <a:t>parachute.computer</a:t>
+            </a:r>
+          </a:p>
+        </p:txBody>
+      </p:sp>
+      <p:sp>
+        <p:nvSpPr>
+          <p:cNvPr id="4" name="TextBox 3"/>
+          <p:cNvSpPr txBox="1"/>
+          <p:nvPr/>
+        </p:nvSpPr>
+        <p:spPr>
+          <a:xfrm>
+            <a:off x="1097280" y="1097280"/>
+            <a:ext cx="3657600" cy="365760"/>
           </a:xfrm>
           <a:prstGeom prst="rect">
             <a:avLst/>
@@ -5467,29 +5714,78 @@
               <a:spcAft>
                 <a:spcPts val="0"/>
               </a:spcAft>
-              <a:defRPr sz="2400" b="0">
+              <a:defRPr sz="1100" b="1">
                 <a:solidFill>
                   <a:srgbClr val="4A7C59"/>
                 </a:solidFill>
+                <a:latin typeface="Calibri"/>
+              </a:defRPr>
+            </a:pPr>
+            <a:r>
+              <a:t>BUSINESS MODEL</a:t>
+            </a:r>
+          </a:p>
+        </p:txBody>
+      </p:sp>
+      <p:sp>
+        <p:nvSpPr>
+          <p:cNvPr id="5" name="TextBox 4"/>
+          <p:cNvSpPr txBox="1"/>
+          <p:nvPr/>
+        </p:nvSpPr>
+        <p:spPr>
+          <a:xfrm>
+            <a:off x="1097280" y="1554480"/>
+            <a:ext cx="9144000" cy="1371600"/>
+          </a:xfrm>
+          <a:prstGeom prst="rect">
+            <a:avLst/>
+          </a:prstGeom>
+          <a:noFill/>
+        </p:spPr>
+        <p:txBody>
+          <a:bodyPr wrap="square">
+            <a:spAutoFit/>
+          </a:bodyPr>
+          <a:lstStyle/>
+          <a:p>
+            <a:pPr algn="l">
+              <a:lnSpc>
+                <a:spcPct val="105000"/>
+              </a:lnSpc>
+              <a:spcBef>
+                <a:spcPts val="0"/>
+              </a:spcBef>
+              <a:spcAft>
+                <a:spcPts val="0"/>
+              </a:spcAft>
+              <a:defRPr sz="4000" b="0">
+                <a:solidFill>
+                  <a:srgbClr val="2C2A26"/>
+                </a:solidFill>
                 <a:latin typeface="Georgia"/>
               </a:defRPr>
             </a:pPr>
             <a:r>
-              <a:t>$10/mo</a:t>
-            </a:r>
-          </a:p>
-        </p:txBody>
-      </p:sp>
-      <p:sp>
-        <p:nvSpPr>
-          <p:cNvPr id="12" name="TextBox 11"/>
+              <a:t>Start free.</a:t>
+            </a:r>
+            <a:br/>
+            <a:r>
+              <a:t>Grow with every user.</a:t>
+            </a:r>
+          </a:p>
+        </p:txBody>
+      </p:sp>
+      <p:sp>
+        <p:nvSpPr>
+          <p:cNvPr id="6" name="TextBox 5"/>
           <p:cNvSpPr txBox="1"/>
           <p:nvPr/>
         </p:nvSpPr>
         <p:spPr>
           <a:xfrm>
-            <a:off x="2926080" y="5166360"/>
-            <a:ext cx="7315200" cy="365760"/>
+            <a:off x="1097280" y="3108960"/>
+            <a:ext cx="1645920" cy="365760"/>
           </a:xfrm>
           <a:prstGeom prst="rect">
             <a:avLst/>
@@ -5512,29 +5808,29 @@
               <a:spcAft>
                 <a:spcPts val="0"/>
               </a:spcAft>
-              <a:defRPr sz="1600" b="0">
-                <a:solidFill>
-                  <a:srgbClr val="6B6860"/>
-                </a:solidFill>
-                <a:latin typeface="Calibri"/>
+              <a:defRPr sz="2200" b="0">
+                <a:solidFill>
+                  <a:srgbClr val="9A9690"/>
+                </a:solidFill>
+                <a:latin typeface="Georgia"/>
               </a:defRPr>
             </a:pPr>
             <a:r>
-              <a:t>AI reflections, synthesis, and pattern surfacing</a:t>
-            </a:r>
-          </a:p>
-        </p:txBody>
-      </p:sp>
-      <p:sp>
-        <p:nvSpPr>
-          <p:cNvPr id="13" name="TextBox 12"/>
+              <a:t>Free</a:t>
+            </a:r>
+          </a:p>
+        </p:txBody>
+      </p:sp>
+      <p:sp>
+        <p:nvSpPr>
+          <p:cNvPr id="7" name="TextBox 6"/>
           <p:cNvSpPr txBox="1"/>
           <p:nvPr/>
         </p:nvSpPr>
         <p:spPr>
           <a:xfrm>
-            <a:off x="1097280" y="5760720"/>
-            <a:ext cx="1645920" cy="365760"/>
+            <a:off x="2926080" y="3136392"/>
+            <a:ext cx="7315200" cy="365760"/>
           </a:xfrm>
           <a:prstGeom prst="rect">
             <a:avLst/>
@@ -5557,29 +5853,29 @@
               <a:spcAft>
                 <a:spcPts val="0"/>
               </a:spcAft>
-              <a:defRPr sz="2400" b="0">
-                <a:solidFill>
-                  <a:srgbClr val="2C2A26"/>
-                </a:solidFill>
-                <a:latin typeface="Georgia"/>
+              <a:defRPr sz="1500" b="0">
+                <a:solidFill>
+                  <a:srgbClr val="6B6860"/>
+                </a:solidFill>
+                <a:latin typeface="Calibri"/>
               </a:defRPr>
             </a:pPr>
             <a:r>
-              <a:t>$40/mo</a:t>
-            </a:r>
-          </a:p>
-        </p:txBody>
-      </p:sp>
-      <p:sp>
-        <p:nvSpPr>
-          <p:cNvPr id="14" name="TextBox 13"/>
+              <a:t>Offline journal + on-device transcription. Zero hosting cost.</a:t>
+            </a:r>
+          </a:p>
+        </p:txBody>
+      </p:sp>
+      <p:sp>
+        <p:nvSpPr>
+          <p:cNvPr id="8" name="TextBox 7"/>
           <p:cNvSpPr txBox="1"/>
           <p:nvPr/>
         </p:nvSpPr>
         <p:spPr>
           <a:xfrm>
-            <a:off x="2926080" y="5806440"/>
-            <a:ext cx="7315200" cy="365760"/>
+            <a:off x="1097280" y="3657600"/>
+            <a:ext cx="1645920" cy="365760"/>
           </a:xfrm>
           <a:prstGeom prst="rect">
             <a:avLst/>
@@ -5602,15 +5898,283 @@
               <a:spcAft>
                 <a:spcPts val="0"/>
               </a:spcAft>
-              <a:defRPr sz="1600" b="0">
+              <a:defRPr sz="2200" b="0">
                 <a:solidFill>
                   <a:srgbClr val="6B6860"/>
                 </a:solidFill>
+                <a:latin typeface="Georgia"/>
+              </a:defRPr>
+            </a:pPr>
+            <a:r>
+              <a:t>$2/mo</a:t>
+            </a:r>
+          </a:p>
+        </p:txBody>
+      </p:sp>
+      <p:sp>
+        <p:nvSpPr>
+          <p:cNvPr id="9" name="TextBox 8"/>
+          <p:cNvSpPr txBox="1"/>
+          <p:nvPr/>
+        </p:nvSpPr>
+        <p:spPr>
+          <a:xfrm>
+            <a:off x="2926080" y="3685032"/>
+            <a:ext cx="7315200" cy="365760"/>
+          </a:xfrm>
+          <a:prstGeom prst="rect">
+            <a:avLst/>
+          </a:prstGeom>
+          <a:noFill/>
+        </p:spPr>
+        <p:txBody>
+          <a:bodyPr wrap="square">
+            <a:spAutoFit/>
+          </a:bodyPr>
+          <a:lstStyle/>
+          <a:p>
+            <a:pPr algn="l">
+              <a:lnSpc>
+                <a:spcPct val="120000"/>
+              </a:lnSpc>
+              <a:spcBef>
+                <a:spcPts val="0"/>
+              </a:spcBef>
+              <a:spcAft>
+                <a:spcPts val="0"/>
+              </a:spcAft>
+              <a:defRPr sz="1500" b="0">
+                <a:solidFill>
+                  <a:srgbClr val="6B6860"/>
+                </a:solidFill>
                 <a:latin typeface="Calibri"/>
               </a:defRPr>
             </a:pPr>
             <a:r>
-              <a:t>Hosted Parachute Computer — full agentic platform with bundled AI</a:t>
+              <a:t>Cloud sync across devices. Your notes everywhere.</a:t>
+            </a:r>
+          </a:p>
+        </p:txBody>
+      </p:sp>
+      <p:sp>
+        <p:nvSpPr>
+          <p:cNvPr id="10" name="TextBox 9"/>
+          <p:cNvSpPr txBox="1"/>
+          <p:nvPr/>
+        </p:nvSpPr>
+        <p:spPr>
+          <a:xfrm>
+            <a:off x="1097280" y="4206240"/>
+            <a:ext cx="1645920" cy="365760"/>
+          </a:xfrm>
+          <a:prstGeom prst="rect">
+            <a:avLst/>
+          </a:prstGeom>
+          <a:noFill/>
+        </p:spPr>
+        <p:txBody>
+          <a:bodyPr wrap="square">
+            <a:spAutoFit/>
+          </a:bodyPr>
+          <a:lstStyle/>
+          <a:p>
+            <a:pPr algn="l">
+              <a:lnSpc>
+                <a:spcPct val="120000"/>
+              </a:lnSpc>
+              <a:spcBef>
+                <a:spcPts val="0"/>
+              </a:spcBef>
+              <a:spcAft>
+                <a:spcPts val="0"/>
+              </a:spcAft>
+              <a:defRPr sz="2200" b="0">
+                <a:solidFill>
+                  <a:srgbClr val="6B6860"/>
+                </a:solidFill>
+                <a:latin typeface="Georgia"/>
+              </a:defRPr>
+            </a:pPr>
+            <a:r>
+              <a:t>$5/mo</a:t>
+            </a:r>
+          </a:p>
+        </p:txBody>
+      </p:sp>
+      <p:sp>
+        <p:nvSpPr>
+          <p:cNvPr id="11" name="TextBox 10"/>
+          <p:cNvSpPr txBox="1"/>
+          <p:nvPr/>
+        </p:nvSpPr>
+        <p:spPr>
+          <a:xfrm>
+            <a:off x="2926080" y="4233672"/>
+            <a:ext cx="7315200" cy="365760"/>
+          </a:xfrm>
+          <a:prstGeom prst="rect">
+            <a:avLst/>
+          </a:prstGeom>
+          <a:noFill/>
+        </p:spPr>
+        <p:txBody>
+          <a:bodyPr wrap="square">
+            <a:spAutoFit/>
+          </a:bodyPr>
+          <a:lstStyle/>
+          <a:p>
+            <a:pPr algn="l">
+              <a:lnSpc>
+                <a:spcPct val="120000"/>
+              </a:lnSpc>
+              <a:spcBef>
+                <a:spcPts val="0"/>
+              </a:spcBef>
+              <a:spcAft>
+                <a:spcPts val="0"/>
+              </a:spcAft>
+              <a:defRPr sz="1500" b="0">
+                <a:solidFill>
+                  <a:srgbClr val="6B6860"/>
+                </a:solidFill>
+                <a:latin typeface="Calibri"/>
+              </a:defRPr>
+            </a:pPr>
+            <a:r>
+              <a:t>Cloud transcription + cleanup — server-side, better accuracy</a:t>
+            </a:r>
+          </a:p>
+        </p:txBody>
+      </p:sp>
+      <p:sp>
+        <p:nvSpPr>
+          <p:cNvPr id="12" name="Rounded Rectangle 11"/>
+          <p:cNvSpPr/>
+          <p:nvPr/>
+        </p:nvSpPr>
+        <p:spPr>
+          <a:xfrm>
+            <a:off x="914400" y="4663440"/>
+            <a:ext cx="9601200" cy="502920"/>
+          </a:xfrm>
+          <a:prstGeom prst="roundRect">
+            <a:avLst/>
+          </a:prstGeom>
+          <a:solidFill>
+            <a:srgbClr val="E8F5EC"/>
+          </a:solidFill>
+          <a:ln>
+            <a:noFill/>
+          </a:ln>
+        </p:spPr>
+        <p:style>
+          <a:lnRef idx="1">
+            <a:schemeClr val="accent1"/>
+          </a:lnRef>
+          <a:fillRef idx="3">
+            <a:schemeClr val="accent1"/>
+          </a:fillRef>
+          <a:effectRef idx="2">
+            <a:schemeClr val="accent1"/>
+          </a:effectRef>
+          <a:fontRef idx="minor">
+            <a:schemeClr val="lt1"/>
+          </a:fontRef>
+        </p:style>
+        <p:txBody>
+          <a:bodyPr rtlCol="0" anchor="ctr"/>
+          <a:lstStyle/>
+          <a:p>
+            <a:pPr algn="ctr"/>
+          </a:p>
+        </p:txBody>
+      </p:sp>
+      <p:sp>
+        <p:nvSpPr>
+          <p:cNvPr id="13" name="TextBox 12"/>
+          <p:cNvSpPr txBox="1"/>
+          <p:nvPr/>
+        </p:nvSpPr>
+        <p:spPr>
+          <a:xfrm>
+            <a:off x="1097280" y="4754880"/>
+            <a:ext cx="1645920" cy="365760"/>
+          </a:xfrm>
+          <a:prstGeom prst="rect">
+            <a:avLst/>
+          </a:prstGeom>
+          <a:noFill/>
+        </p:spPr>
+        <p:txBody>
+          <a:bodyPr wrap="square">
+            <a:spAutoFit/>
+          </a:bodyPr>
+          <a:lstStyle/>
+          <a:p>
+            <a:pPr algn="l">
+              <a:lnSpc>
+                <a:spcPct val="120000"/>
+              </a:lnSpc>
+              <a:spcBef>
+                <a:spcPts val="0"/>
+              </a:spcBef>
+              <a:spcAft>
+                <a:spcPts val="0"/>
+              </a:spcAft>
+              <a:defRPr sz="2200" b="0">
+                <a:solidFill>
+                  <a:srgbClr val="4A7C59"/>
+                </a:solidFill>
+                <a:latin typeface="Georgia"/>
+              </a:defRPr>
+            </a:pPr>
+            <a:r>
+              <a:t>$10/mo</a:t>
+            </a:r>
+          </a:p>
+        </p:txBody>
+      </p:sp>
+      <p:sp>
+        <p:nvSpPr>
+          <p:cNvPr id="14" name="TextBox 13"/>
+          <p:cNvSpPr txBox="1"/>
+          <p:nvPr/>
+        </p:nvSpPr>
+        <p:spPr>
+          <a:xfrm>
+            <a:off x="2926080" y="4782312"/>
+            <a:ext cx="7315200" cy="365760"/>
+          </a:xfrm>
+          <a:prstGeom prst="rect">
+            <a:avLst/>
+          </a:prstGeom>
+          <a:noFill/>
+        </p:spPr>
+        <p:txBody>
+          <a:bodyPr wrap="square">
+            <a:spAutoFit/>
+          </a:bodyPr>
+          <a:lstStyle/>
+          <a:p>
+            <a:pPr algn="l">
+              <a:lnSpc>
+                <a:spcPct val="120000"/>
+              </a:lnSpc>
+              <a:spcBef>
+                <a:spcPts val="0"/>
+              </a:spcBef>
+              <a:spcAft>
+                <a:spcPts val="0"/>
+              </a:spcAft>
+              <a:defRPr sz="1500" b="0">
+                <a:solidFill>
+                  <a:srgbClr val="6B6860"/>
+                </a:solidFill>
+                <a:latin typeface="Calibri"/>
+              </a:defRPr>
+            </a:pPr>
+            <a:r>
+              <a:t>AI reflections, synthesis, and pattern surfacing</a:t>
             </a:r>
           </a:p>
         </p:txBody>
@@ -5623,8 +6187,98 @@
         </p:nvSpPr>
         <p:spPr>
           <a:xfrm>
-            <a:off x="1097280" y="5760720"/>
-            <a:ext cx="9144000" cy="731520"/>
+            <a:off x="1097280" y="5303520"/>
+            <a:ext cx="1645920" cy="365760"/>
+          </a:xfrm>
+          <a:prstGeom prst="rect">
+            <a:avLst/>
+          </a:prstGeom>
+          <a:noFill/>
+        </p:spPr>
+        <p:txBody>
+          <a:bodyPr wrap="square">
+            <a:spAutoFit/>
+          </a:bodyPr>
+          <a:lstStyle/>
+          <a:p>
+            <a:pPr algn="l">
+              <a:lnSpc>
+                <a:spcPct val="120000"/>
+              </a:lnSpc>
+              <a:spcBef>
+                <a:spcPts val="0"/>
+              </a:spcBef>
+              <a:spcAft>
+                <a:spcPts val="0"/>
+              </a:spcAft>
+              <a:defRPr sz="2200" b="0">
+                <a:solidFill>
+                  <a:srgbClr val="2C2A26"/>
+                </a:solidFill>
+                <a:latin typeface="Georgia"/>
+              </a:defRPr>
+            </a:pPr>
+            <a:r>
+              <a:t>$40/mo</a:t>
+            </a:r>
+          </a:p>
+        </p:txBody>
+      </p:sp>
+      <p:sp>
+        <p:nvSpPr>
+          <p:cNvPr id="16" name="TextBox 15"/>
+          <p:cNvSpPr txBox="1"/>
+          <p:nvPr/>
+        </p:nvSpPr>
+        <p:spPr>
+          <a:xfrm>
+            <a:off x="2926080" y="5330952"/>
+            <a:ext cx="7315200" cy="365760"/>
+          </a:xfrm>
+          <a:prstGeom prst="rect">
+            <a:avLst/>
+          </a:prstGeom>
+          <a:noFill/>
+        </p:spPr>
+        <p:txBody>
+          <a:bodyPr wrap="square">
+            <a:spAutoFit/>
+          </a:bodyPr>
+          <a:lstStyle/>
+          <a:p>
+            <a:pPr algn="l">
+              <a:lnSpc>
+                <a:spcPct val="120000"/>
+              </a:lnSpc>
+              <a:spcBef>
+                <a:spcPts val="0"/>
+              </a:spcBef>
+              <a:spcAft>
+                <a:spcPts val="0"/>
+              </a:spcAft>
+              <a:defRPr sz="1500" b="0">
+                <a:solidFill>
+                  <a:srgbClr val="6B6860"/>
+                </a:solidFill>
+                <a:latin typeface="Calibri"/>
+              </a:defRPr>
+            </a:pPr>
+            <a:r>
+              <a:t>Hosted Parachute Computer — full agentic platform with bundled AI</a:t>
+            </a:r>
+          </a:p>
+        </p:txBody>
+      </p:sp>
+      <p:sp>
+        <p:nvSpPr>
+          <p:cNvPr id="17" name="TextBox 16"/>
+          <p:cNvSpPr txBox="1"/>
+          <p:nvPr/>
+        </p:nvSpPr>
+        <p:spPr>
+          <a:xfrm>
+            <a:off x="1097280" y="5943600"/>
+            <a:ext cx="9144000" cy="548640"/>
           </a:xfrm>
           <a:prstGeom prst="rect">
             <a:avLst/>
@@ -5647,7 +6301,7 @@
               <a:spcAft>
                 <a:spcPts val="0"/>
               </a:spcAft>
-              <a:defRPr sz="1500" b="0">
+              <a:defRPr sz="1400" b="0">
                 <a:solidFill>
                   <a:srgbClr val="9A9690"/>
                 </a:solidFill>
@@ -5655,11 +6309,11 @@
               </a:defRPr>
             </a:pPr>
             <a:r>
-              <a:t>Free tier has zero hosting cost — no subsidizing free users.</a:t>
+              <a:t>Free tier has zero hosting cost. AI at $10/mo uses cost-efficient models.</a:t>
             </a:r>
             <a:br/>
             <a:r>
-              <a:t>AI at $10/mo uses cost-efficient models. Margins are real and improve as model costs drop.</a:t>
+              <a:t>Margins are real and improve as model costs drop.</a:t>
             </a:r>
           </a:p>
         </p:txBody>
@@ -5692,7 +6346,86 @@
       <p:grpSpPr/>
       <p:sp>
         <p:nvSpPr>
-          <p:cNvPr id="2" name="TextBox 1"/>
+          <p:cNvPr id="2" name="Rectangle 1"/>
+          <p:cNvSpPr/>
+          <p:nvPr/>
+        </p:nvSpPr>
+        <p:spPr>
+          <a:xfrm>
+            <a:off x="0" y="0"/>
+            <a:ext cx="12191695" cy="54864"/>
+          </a:xfrm>
+          <a:prstGeom prst="rect">
+            <a:avLst/>
+          </a:prstGeom>
+          <a:solidFill>
+            <a:srgbClr val="4A7C59"/>
+          </a:solidFill>
+          <a:ln>
+            <a:noFill/>
+          </a:ln>
+        </p:spPr>
+        <p:style>
+          <a:lnRef idx="1">
+            <a:schemeClr val="accent1"/>
+          </a:lnRef>
+          <a:fillRef idx="3">
+            <a:schemeClr val="accent1"/>
+          </a:fillRef>
+          <a:effectRef idx="2">
+            <a:schemeClr val="accent1"/>
+          </a:effectRef>
+          <a:fontRef idx="minor">
+            <a:schemeClr val="lt1"/>
+          </a:fontRef>
+        </p:style>
+        <p:txBody>
+          <a:bodyPr rtlCol="0" anchor="ctr"/>
+          <a:lstStyle/>
+          <a:p>
+            <a:pPr algn="ctr"/>
+          </a:p>
+        </p:txBody>
+      </p:sp>
+      <p:sp>
+        <p:nvSpPr>
+          <p:cNvPr id="3" name="TextBox 2"/>
+          <p:cNvSpPr txBox="1"/>
+          <p:nvPr/>
+        </p:nvSpPr>
+        <p:spPr>
+          <a:xfrm>
+            <a:off x="1097280" y="6400800"/>
+            <a:ext cx="3657600" cy="274320"/>
+          </a:xfrm>
+          <a:prstGeom prst="rect">
+            <a:avLst/>
+          </a:prstGeom>
+          <a:noFill/>
+        </p:spPr>
+        <p:txBody>
+          <a:bodyPr wrap="none">
+            <a:spAutoFit/>
+          </a:bodyPr>
+          <a:lstStyle/>
+          <a:p>
+            <a:pPr>
+              <a:defRPr sz="900">
+                <a:solidFill>
+                  <a:srgbClr val="9A9690"/>
+                </a:solidFill>
+                <a:latin typeface="Calibri"/>
+              </a:defRPr>
+            </a:pPr>
+            <a:r>
+              <a:t>parachute.computer</a:t>
+            </a:r>
+          </a:p>
+        </p:txBody>
+      </p:sp>
+      <p:sp>
+        <p:nvSpPr>
+          <p:cNvPr id="4" name="TextBox 3"/>
           <p:cNvSpPr txBox="1"/>
           <p:nvPr/>
         </p:nvSpPr>
@@ -5737,7 +6470,7 @@
       </p:sp>
       <p:sp>
         <p:nvSpPr>
-          <p:cNvPr id="3" name="TextBox 2"/>
+          <p:cNvPr id="5" name="TextBox 4"/>
           <p:cNvSpPr txBox="1"/>
           <p:nvPr/>
         </p:nvSpPr>
@@ -5782,7 +6515,7 @@
       </p:sp>
       <p:graphicFrame>
         <p:nvGraphicFramePr>
-          <p:cNvPr id="4" name="Table 3"/>
+          <p:cNvPr id="6" name="Table 5"/>
           <p:cNvGraphicFramePr>
             <a:graphicFrameLocks noGrp="1"/>
           </p:cNvGraphicFramePr>
@@ -5790,7 +6523,7 @@
         </p:nvGraphicFramePr>
         <p:xfrm>
           <a:off x="1371600" y="3017520"/>
-          <a:ext cx="7498080" cy="2926080"/>
+          <a:ext cx="7498080" cy="2743200"/>
         </p:xfrm>
         <a:graphic>
           <a:graphicData uri="http://schemas.openxmlformats.org/drawingml/2006/table">
@@ -5804,14 +6537,14 @@
                 <a:gridCol w="1645920"/>
                 <a:gridCol w="1645920"/>
               </a:tblGrid>
-              <a:tr h="365760">
+              <a:tr h="342900">
                 <a:tc>
                   <a:txBody>
                     <a:bodyPr/>
                     <a:lstStyle/>
                     <a:p>
                       <a:pPr algn="l">
-                        <a:defRPr sz="1200" b="1">
+                        <a:defRPr sz="1100" b="1">
                           <a:solidFill>
                             <a:srgbClr val="9A9690"/>
                           </a:solidFill>
@@ -5824,6 +6557,26 @@
                     <a:solidFill>
                       <a:srgbClr val="F3F0EA"/>
                     </a:solidFill>
+                    <a:lnL w="6350">
+                      <a:solidFill>
+                        <a:srgbClr val="E4E0D8"/>
+                      </a:solidFill>
+                    </a:lnL>
+                    <a:lnR w="6350">
+                      <a:solidFill>
+                        <a:srgbClr val="E4E0D8"/>
+                      </a:solidFill>
+                    </a:lnR>
+                    <a:lnT w="6350">
+                      <a:solidFill>
+                        <a:srgbClr val="E4E0D8"/>
+                      </a:solidFill>
+                    </a:lnT>
+                    <a:lnB w="6350">
+                      <a:solidFill>
+                        <a:srgbClr val="E4E0D8"/>
+                      </a:solidFill>
+                    </a:lnB>
                   </a:tcPr>
                 </a:tc>
                 <a:tc>
@@ -5832,7 +6585,7 @@
                     <a:lstStyle/>
                     <a:p>
                       <a:pPr algn="ctr">
-                        <a:defRPr sz="1200" b="1">
+                        <a:defRPr sz="1100" b="1">
                           <a:solidFill>
                             <a:srgbClr val="9A9690"/>
                           </a:solidFill>
@@ -5848,6 +6601,26 @@
                     <a:solidFill>
                       <a:srgbClr val="F3F0EA"/>
                     </a:solidFill>
+                    <a:lnL w="6350">
+                      <a:solidFill>
+                        <a:srgbClr val="E4E0D8"/>
+                      </a:solidFill>
+                    </a:lnL>
+                    <a:lnR w="6350">
+                      <a:solidFill>
+                        <a:srgbClr val="E4E0D8"/>
+                      </a:solidFill>
+                    </a:lnR>
+                    <a:lnT w="6350">
+                      <a:solidFill>
+                        <a:srgbClr val="E4E0D8"/>
+                      </a:solidFill>
+                    </a:lnT>
+                    <a:lnB w="6350">
+                      <a:solidFill>
+                        <a:srgbClr val="E4E0D8"/>
+                      </a:solidFill>
+                    </a:lnB>
                   </a:tcPr>
                 </a:tc>
                 <a:tc>
@@ -5856,7 +6629,7 @@
                     <a:lstStyle/>
                     <a:p>
                       <a:pPr algn="ctr">
-                        <a:defRPr sz="1200" b="1">
+                        <a:defRPr sz="1100" b="1">
                           <a:solidFill>
                             <a:srgbClr val="9A9690"/>
                           </a:solidFill>
@@ -5872,6 +6645,26 @@
                     <a:solidFill>
                       <a:srgbClr val="F3F0EA"/>
                     </a:solidFill>
+                    <a:lnL w="6350">
+                      <a:solidFill>
+                        <a:srgbClr val="E4E0D8"/>
+                      </a:solidFill>
+                    </a:lnL>
+                    <a:lnR w="6350">
+                      <a:solidFill>
+                        <a:srgbClr val="E4E0D8"/>
+                      </a:solidFill>
+                    </a:lnR>
+                    <a:lnT w="6350">
+                      <a:solidFill>
+                        <a:srgbClr val="E4E0D8"/>
+                      </a:solidFill>
+                    </a:lnT>
+                    <a:lnB w="6350">
+                      <a:solidFill>
+                        <a:srgbClr val="E4E0D8"/>
+                      </a:solidFill>
+                    </a:lnB>
                   </a:tcPr>
                 </a:tc>
                 <a:tc>
@@ -5880,7 +6673,7 @@
                     <a:lstStyle/>
                     <a:p>
                       <a:pPr algn="ctr">
-                        <a:defRPr sz="1200" b="1">
+                        <a:defRPr sz="1100" b="1">
                           <a:solidFill>
                             <a:srgbClr val="9A9690"/>
                           </a:solidFill>
@@ -5896,17 +6689,37 @@
                     <a:solidFill>
                       <a:srgbClr val="F3F0EA"/>
                     </a:solidFill>
+                    <a:lnL w="6350">
+                      <a:solidFill>
+                        <a:srgbClr val="E4E0D8"/>
+                      </a:solidFill>
+                    </a:lnL>
+                    <a:lnR w="6350">
+                      <a:solidFill>
+                        <a:srgbClr val="E4E0D8"/>
+                      </a:solidFill>
+                    </a:lnR>
+                    <a:lnT w="6350">
+                      <a:solidFill>
+                        <a:srgbClr val="E4E0D8"/>
+                      </a:solidFill>
+                    </a:lnT>
+                    <a:lnB w="6350">
+                      <a:solidFill>
+                        <a:srgbClr val="E4E0D8"/>
+                      </a:solidFill>
+                    </a:lnB>
                   </a:tcPr>
                 </a:tc>
               </a:tr>
-              <a:tr h="365760">
+              <a:tr h="342900">
                 <a:tc>
                   <a:txBody>
                     <a:bodyPr/>
                     <a:lstStyle/>
                     <a:p>
                       <a:pPr algn="l">
-                        <a:defRPr sz="1200" b="1">
+                        <a:defRPr sz="1100" b="1">
                           <a:solidFill>
                             <a:srgbClr val="2C2A26"/>
                           </a:solidFill>
@@ -5922,6 +6735,26 @@
                     <a:solidFill>
                       <a:srgbClr val="FFFFFF"/>
                     </a:solidFill>
+                    <a:lnL w="6350">
+                      <a:solidFill>
+                        <a:srgbClr val="E4E0D8"/>
+                      </a:solidFill>
+                    </a:lnL>
+                    <a:lnR w="6350">
+                      <a:solidFill>
+                        <a:srgbClr val="E4E0D8"/>
+                      </a:solidFill>
+                    </a:lnR>
+                    <a:lnT w="6350">
+                      <a:solidFill>
+                        <a:srgbClr val="E4E0D8"/>
+                      </a:solidFill>
+                    </a:lnT>
+                    <a:lnB w="6350">
+                      <a:solidFill>
+                        <a:srgbClr val="E4E0D8"/>
+                      </a:solidFill>
+                    </a:lnB>
                   </a:tcPr>
                 </a:tc>
                 <a:tc>
@@ -5930,7 +6763,7 @@
                     <a:lstStyle/>
                     <a:p>
                       <a:pPr algn="ctr">
-                        <a:defRPr sz="1300">
+                        <a:defRPr sz="1200">
                           <a:solidFill>
                             <a:srgbClr val="6B6860"/>
                           </a:solidFill>
@@ -5946,6 +6779,26 @@
                     <a:solidFill>
                       <a:srgbClr val="FFFFFF"/>
                     </a:solidFill>
+                    <a:lnL w="6350">
+                      <a:solidFill>
+                        <a:srgbClr val="E4E0D8"/>
+                      </a:solidFill>
+                    </a:lnL>
+                    <a:lnR w="6350">
+                      <a:solidFill>
+                        <a:srgbClr val="E4E0D8"/>
+                      </a:solidFill>
+                    </a:lnR>
+                    <a:lnT w="6350">
+                      <a:solidFill>
+                        <a:srgbClr val="E4E0D8"/>
+                      </a:solidFill>
+                    </a:lnT>
+                    <a:lnB w="6350">
+                      <a:solidFill>
+                        <a:srgbClr val="E4E0D8"/>
+                      </a:solidFill>
+                    </a:lnB>
                   </a:tcPr>
                 </a:tc>
                 <a:tc>
@@ -5954,7 +6807,7 @@
                     <a:lstStyle/>
                     <a:p>
                       <a:pPr algn="ctr">
-                        <a:defRPr sz="1300">
+                        <a:defRPr sz="1200">
                           <a:solidFill>
                             <a:srgbClr val="6B6860"/>
                           </a:solidFill>
@@ -5970,6 +6823,26 @@
                     <a:solidFill>
                       <a:srgbClr val="FFFFFF"/>
                     </a:solidFill>
+                    <a:lnL w="6350">
+                      <a:solidFill>
+                        <a:srgbClr val="E4E0D8"/>
+                      </a:solidFill>
+                    </a:lnL>
+                    <a:lnR w="6350">
+                      <a:solidFill>
+                        <a:srgbClr val="E4E0D8"/>
+                      </a:solidFill>
+                    </a:lnR>
+                    <a:lnT w="6350">
+                      <a:solidFill>
+                        <a:srgbClr val="E4E0D8"/>
+                      </a:solidFill>
+                    </a:lnT>
+                    <a:lnB w="6350">
+                      <a:solidFill>
+                        <a:srgbClr val="E4E0D8"/>
+                      </a:solidFill>
+                    </a:lnB>
                   </a:tcPr>
                 </a:tc>
                 <a:tc>
@@ -5978,7 +6851,7 @@
                     <a:lstStyle/>
                     <a:p>
                       <a:pPr algn="ctr">
-                        <a:defRPr sz="1300">
+                        <a:defRPr sz="1200">
                           <a:solidFill>
                             <a:srgbClr val="6B6860"/>
                           </a:solidFill>
@@ -5994,17 +6867,37 @@
                     <a:solidFill>
                       <a:srgbClr val="FFFFFF"/>
                     </a:solidFill>
+                    <a:lnL w="6350">
+                      <a:solidFill>
+                        <a:srgbClr val="E4E0D8"/>
+                      </a:solidFill>
+                    </a:lnL>
+                    <a:lnR w="6350">
+                      <a:solidFill>
+                        <a:srgbClr val="E4E0D8"/>
+                      </a:solidFill>
+                    </a:lnR>
+                    <a:lnT w="6350">
+                      <a:solidFill>
+                        <a:srgbClr val="E4E0D8"/>
+                      </a:solidFill>
+                    </a:lnT>
+                    <a:lnB w="6350">
+                      <a:solidFill>
+                        <a:srgbClr val="E4E0D8"/>
+                      </a:solidFill>
+                    </a:lnB>
                   </a:tcPr>
                 </a:tc>
               </a:tr>
-              <a:tr h="365760">
+              <a:tr h="342900">
                 <a:tc>
                   <a:txBody>
                     <a:bodyPr/>
                     <a:lstStyle/>
                     <a:p>
                       <a:pPr algn="l">
-                        <a:defRPr sz="1200" b="1">
+                        <a:defRPr sz="1100" b="1">
                           <a:solidFill>
                             <a:srgbClr val="2C2A26"/>
                           </a:solidFill>
@@ -6020,6 +6913,26 @@
                     <a:solidFill>
                       <a:srgbClr val="FAF8F4"/>
                     </a:solidFill>
+                    <a:lnL w="6350">
+                      <a:solidFill>
+                        <a:srgbClr val="E4E0D8"/>
+                      </a:solidFill>
+                    </a:lnL>
+                    <a:lnR w="6350">
+                      <a:solidFill>
+                        <a:srgbClr val="E4E0D8"/>
+                      </a:solidFill>
+                    </a:lnR>
+                    <a:lnT w="6350">
+                      <a:solidFill>
+                        <a:srgbClr val="E4E0D8"/>
+                      </a:solidFill>
+                    </a:lnT>
+                    <a:lnB w="6350">
+                      <a:solidFill>
+                        <a:srgbClr val="E4E0D8"/>
+                      </a:solidFill>
+                    </a:lnB>
                   </a:tcPr>
                 </a:tc>
                 <a:tc>
@@ -6028,7 +6941,7 @@
                     <a:lstStyle/>
                     <a:p>
                       <a:pPr algn="ctr">
-                        <a:defRPr sz="1300">
+                        <a:defRPr sz="1200">
                           <a:solidFill>
                             <a:srgbClr val="6B6860"/>
                           </a:solidFill>
@@ -6044,6 +6957,26 @@
                     <a:solidFill>
                       <a:srgbClr val="FAF8F4"/>
                     </a:solidFill>
+                    <a:lnL w="6350">
+                      <a:solidFill>
+                        <a:srgbClr val="E4E0D8"/>
+                      </a:solidFill>
+                    </a:lnL>
+                    <a:lnR w="6350">
+                      <a:solidFill>
+                        <a:srgbClr val="E4E0D8"/>
+                      </a:solidFill>
+                    </a:lnR>
+                    <a:lnT w="6350">
+                      <a:solidFill>
+                        <a:srgbClr val="E4E0D8"/>
+                      </a:solidFill>
+                    </a:lnT>
+                    <a:lnB w="6350">
+                      <a:solidFill>
+                        <a:srgbClr val="E4E0D8"/>
+                      </a:solidFill>
+                    </a:lnB>
                   </a:tcPr>
                 </a:tc>
                 <a:tc>
@@ -6052,7 +6985,7 @@
                     <a:lstStyle/>
                     <a:p>
                       <a:pPr algn="ctr">
-                        <a:defRPr sz="1300">
+                        <a:defRPr sz="1200">
                           <a:solidFill>
                             <a:srgbClr val="6B6860"/>
                           </a:solidFill>
@@ -6068,6 +7001,26 @@
                     <a:solidFill>
                       <a:srgbClr val="FAF8F4"/>
                     </a:solidFill>
+                    <a:lnL w="6350">
+                      <a:solidFill>
+                        <a:srgbClr val="E4E0D8"/>
+                      </a:solidFill>
+                    </a:lnL>
+                    <a:lnR w="6350">
+                      <a:solidFill>
+                        <a:srgbClr val="E4E0D8"/>
+                      </a:solidFill>
+                    </a:lnR>
+                    <a:lnT w="6350">
+                      <a:solidFill>
+                        <a:srgbClr val="E4E0D8"/>
+                      </a:solidFill>
+                    </a:lnT>
+                    <a:lnB w="6350">
+                      <a:solidFill>
+                        <a:srgbClr val="E4E0D8"/>
+                      </a:solidFill>
+                    </a:lnB>
                   </a:tcPr>
                 </a:tc>
                 <a:tc>
@@ -6076,7 +7029,7 @@
                     <a:lstStyle/>
                     <a:p>
                       <a:pPr algn="ctr">
-                        <a:defRPr sz="1300">
+                        <a:defRPr sz="1200">
                           <a:solidFill>
                             <a:srgbClr val="6B6860"/>
                           </a:solidFill>
@@ -6092,17 +7045,37 @@
                     <a:solidFill>
                       <a:srgbClr val="FAF8F4"/>
                     </a:solidFill>
+                    <a:lnL w="6350">
+                      <a:solidFill>
+                        <a:srgbClr val="E4E0D8"/>
+                      </a:solidFill>
+                    </a:lnL>
+                    <a:lnR w="6350">
+                      <a:solidFill>
+                        <a:srgbClr val="E4E0D8"/>
+                      </a:solidFill>
+                    </a:lnR>
+                    <a:lnT w="6350">
+                      <a:solidFill>
+                        <a:srgbClr val="E4E0D8"/>
+                      </a:solidFill>
+                    </a:lnT>
+                    <a:lnB w="6350">
+                      <a:solidFill>
+                        <a:srgbClr val="E4E0D8"/>
+                      </a:solidFill>
+                    </a:lnB>
                   </a:tcPr>
                 </a:tc>
               </a:tr>
-              <a:tr h="365760">
+              <a:tr h="342900">
                 <a:tc>
                   <a:txBody>
                     <a:bodyPr/>
                     <a:lstStyle/>
                     <a:p>
                       <a:pPr algn="l">
-                        <a:defRPr sz="1200" b="1">
+                        <a:defRPr sz="1100" b="1">
                           <a:solidFill>
                             <a:srgbClr val="2C2A26"/>
                           </a:solidFill>
@@ -6118,6 +7091,26 @@
                     <a:solidFill>
                       <a:srgbClr val="FFFFFF"/>
                     </a:solidFill>
+                    <a:lnL w="6350">
+                      <a:solidFill>
+                        <a:srgbClr val="E4E0D8"/>
+                      </a:solidFill>
+                    </a:lnL>
+                    <a:lnR w="6350">
+                      <a:solidFill>
+                        <a:srgbClr val="E4E0D8"/>
+                      </a:solidFill>
+                    </a:lnR>
+                    <a:lnT w="6350">
+                      <a:solidFill>
+                        <a:srgbClr val="E4E0D8"/>
+                      </a:solidFill>
+                    </a:lnT>
+                    <a:lnB w="6350">
+                      <a:solidFill>
+                        <a:srgbClr val="E4E0D8"/>
+                      </a:solidFill>
+                    </a:lnB>
                   </a:tcPr>
                 </a:tc>
                 <a:tc>
@@ -6126,7 +7119,7 @@
                     <a:lstStyle/>
                     <a:p>
                       <a:pPr algn="ctr">
-                        <a:defRPr sz="1300">
+                        <a:defRPr sz="1200">
                           <a:solidFill>
                             <a:srgbClr val="6B6860"/>
                           </a:solidFill>
@@ -6142,6 +7135,26 @@
                     <a:solidFill>
                       <a:srgbClr val="FFFFFF"/>
                     </a:solidFill>
+                    <a:lnL w="6350">
+                      <a:solidFill>
+                        <a:srgbClr val="E4E0D8"/>
+                      </a:solidFill>
+                    </a:lnL>
+                    <a:lnR w="6350">
+                      <a:solidFill>
+                        <a:srgbClr val="E4E0D8"/>
+                      </a:solidFill>
+                    </a:lnR>
+                    <a:lnT w="6350">
+                      <a:solidFill>
+                        <a:srgbClr val="E4E0D8"/>
+                      </a:solidFill>
+                    </a:lnT>
+                    <a:lnB w="6350">
+                      <a:solidFill>
+                        <a:srgbClr val="E4E0D8"/>
+                      </a:solidFill>
+                    </a:lnB>
                   </a:tcPr>
                 </a:tc>
                 <a:tc>
@@ -6150,7 +7163,7 @@
                     <a:lstStyle/>
                     <a:p>
                       <a:pPr algn="ctr">
-                        <a:defRPr sz="1300">
+                        <a:defRPr sz="1200">
                           <a:solidFill>
                             <a:srgbClr val="6B6860"/>
                           </a:solidFill>
@@ -6166,6 +7179,26 @@
                     <a:solidFill>
                       <a:srgbClr val="FFFFFF"/>
                     </a:solidFill>
+                    <a:lnL w="6350">
+                      <a:solidFill>
+                        <a:srgbClr val="E4E0D8"/>
+                      </a:solidFill>
+                    </a:lnL>
+                    <a:lnR w="6350">
+                      <a:solidFill>
+                        <a:srgbClr val="E4E0D8"/>
+                      </a:solidFill>
+                    </a:lnR>
+                    <a:lnT w="6350">
+                      <a:solidFill>
+                        <a:srgbClr val="E4E0D8"/>
+                      </a:solidFill>
+                    </a:lnT>
+                    <a:lnB w="6350">
+                      <a:solidFill>
+                        <a:srgbClr val="E4E0D8"/>
+                      </a:solidFill>
+                    </a:lnB>
                   </a:tcPr>
                 </a:tc>
                 <a:tc>
@@ -6174,7 +7207,7 @@
                     <a:lstStyle/>
                     <a:p>
                       <a:pPr algn="ctr">
-                        <a:defRPr sz="1300">
+                        <a:defRPr sz="1200">
                           <a:solidFill>
                             <a:srgbClr val="6B6860"/>
                           </a:solidFill>
@@ -6190,17 +7223,37 @@
                     <a:solidFill>
                       <a:srgbClr val="FFFFFF"/>
                     </a:solidFill>
+                    <a:lnL w="6350">
+                      <a:solidFill>
+                        <a:srgbClr val="E4E0D8"/>
+                      </a:solidFill>
+                    </a:lnL>
+                    <a:lnR w="6350">
+                      <a:solidFill>
+                        <a:srgbClr val="E4E0D8"/>
+                      </a:solidFill>
+                    </a:lnR>
+                    <a:lnT w="6350">
+                      <a:solidFill>
+                        <a:srgbClr val="E4E0D8"/>
+                      </a:solidFill>
+                    </a:lnT>
+                    <a:lnB w="6350">
+                      <a:solidFill>
+                        <a:srgbClr val="E4E0D8"/>
+                      </a:solidFill>
+                    </a:lnB>
                   </a:tcPr>
                 </a:tc>
               </a:tr>
-              <a:tr h="365760">
+              <a:tr h="342900">
                 <a:tc>
                   <a:txBody>
                     <a:bodyPr/>
                     <a:lstStyle/>
                     <a:p>
                       <a:pPr algn="l">
-                        <a:defRPr sz="1200" b="1">
+                        <a:defRPr sz="1100" b="1">
                           <a:solidFill>
                             <a:srgbClr val="2C2A26"/>
                           </a:solidFill>
@@ -6214,8 +7267,28 @@
                   </a:txBody>
                   <a:tcPr>
                     <a:solidFill>
-                      <a:srgbClr val="FAF8F4"/>
+                      <a:srgbClr val="F0F8F2"/>
                     </a:solidFill>
+                    <a:lnL w="6350">
+                      <a:solidFill>
+                        <a:srgbClr val="E4E0D8"/>
+                      </a:solidFill>
+                    </a:lnL>
+                    <a:lnR w="6350">
+                      <a:solidFill>
+                        <a:srgbClr val="E4E0D8"/>
+                      </a:solidFill>
+                    </a:lnR>
+                    <a:lnT w="6350">
+                      <a:solidFill>
+                        <a:srgbClr val="E4E0D8"/>
+                      </a:solidFill>
+                    </a:lnT>
+                    <a:lnB w="6350">
+                      <a:solidFill>
+                        <a:srgbClr val="E4E0D8"/>
+                      </a:solidFill>
+                    </a:lnB>
                   </a:tcPr>
                 </a:tc>
                 <a:tc>
@@ -6224,7 +7297,7 @@
                     <a:lstStyle/>
                     <a:p>
                       <a:pPr algn="ctr">
-                        <a:defRPr sz="1300" b="1">
+                        <a:defRPr sz="1200" b="1">
                           <a:solidFill>
                             <a:srgbClr val="4A7C59"/>
                           </a:solidFill>
@@ -6238,8 +7311,28 @@
                   </a:txBody>
                   <a:tcPr>
                     <a:solidFill>
-                      <a:srgbClr val="FAF8F4"/>
+                      <a:srgbClr val="F0F8F2"/>
                     </a:solidFill>
+                    <a:lnL w="6350">
+                      <a:solidFill>
+                        <a:srgbClr val="E4E0D8"/>
+                      </a:solidFill>
+                    </a:lnL>
+                    <a:lnR w="6350">
+                      <a:solidFill>
+                        <a:srgbClr val="E4E0D8"/>
+                      </a:solidFill>
+                    </a:lnR>
+                    <a:lnT w="6350">
+                      <a:solidFill>
+                        <a:srgbClr val="E4E0D8"/>
+                      </a:solidFill>
+                    </a:lnT>
+                    <a:lnB w="6350">
+                      <a:solidFill>
+                        <a:srgbClr val="E4E0D8"/>
+                      </a:solidFill>
+                    </a:lnB>
                   </a:tcPr>
                 </a:tc>
                 <a:tc>
@@ -6248,7 +7341,7 @@
                     <a:lstStyle/>
                     <a:p>
                       <a:pPr algn="ctr">
-                        <a:defRPr sz="1300" b="1">
+                        <a:defRPr sz="1200" b="1">
                           <a:solidFill>
                             <a:srgbClr val="4A7C59"/>
                           </a:solidFill>
@@ -6262,8 +7355,28 @@
                   </a:txBody>
                   <a:tcPr>
                     <a:solidFill>
-                      <a:srgbClr val="FAF8F4"/>
+                      <a:srgbClr val="F0F8F2"/>
                     </a:solidFill>
+                    <a:lnL w="6350">
+                      <a:solidFill>
+                        <a:srgbClr val="E4E0D8"/>
+                      </a:solidFill>
+                    </a:lnL>
+                    <a:lnR w="6350">
+                      <a:solidFill>
+                        <a:srgbClr val="E4E0D8"/>
+                      </a:solidFill>
+                    </a:lnR>
+                    <a:lnT w="6350">
+                      <a:solidFill>
+                        <a:srgbClr val="E4E0D8"/>
+                      </a:solidFill>
+                    </a:lnT>
+                    <a:lnB w="6350">
+                      <a:solidFill>
+                        <a:srgbClr val="E4E0D8"/>
+                      </a:solidFill>
+                    </a:lnB>
                   </a:tcPr>
                 </a:tc>
                 <a:tc>
@@ -6272,7 +7385,7 @@
                     <a:lstStyle/>
                     <a:p>
                       <a:pPr algn="ctr">
-                        <a:defRPr sz="1300" b="1">
+                        <a:defRPr sz="1200" b="1">
                           <a:solidFill>
                             <a:srgbClr val="4A7C59"/>
                           </a:solidFill>
@@ -6286,19 +7399,39 @@
                   </a:txBody>
                   <a:tcPr>
                     <a:solidFill>
-                      <a:srgbClr val="FAF8F4"/>
+                      <a:srgbClr val="F0F8F2"/>
                     </a:solidFill>
+                    <a:lnL w="6350">
+                      <a:solidFill>
+                        <a:srgbClr val="E4E0D8"/>
+                      </a:solidFill>
+                    </a:lnL>
+                    <a:lnR w="6350">
+                      <a:solidFill>
+                        <a:srgbClr val="E4E0D8"/>
+                      </a:solidFill>
+                    </a:lnR>
+                    <a:lnT w="6350">
+                      <a:solidFill>
+                        <a:srgbClr val="E4E0D8"/>
+                      </a:solidFill>
+                    </a:lnT>
+                    <a:lnB w="6350">
+                      <a:solidFill>
+                        <a:srgbClr val="E4E0D8"/>
+                      </a:solidFill>
+                    </a:lnB>
                   </a:tcPr>
                 </a:tc>
               </a:tr>
-              <a:tr h="365760">
+              <a:tr h="342900">
                 <a:tc>
                   <a:txBody>
                     <a:bodyPr/>
                     <a:lstStyle/>
                     <a:p>
                       <a:pPr algn="l">
-                        <a:defRPr sz="1200" b="1">
+                        <a:defRPr sz="1100" b="1">
                           <a:solidFill>
                             <a:srgbClr val="2C2A26"/>
                           </a:solidFill>
@@ -6314,6 +7447,26 @@
                     <a:solidFill>
                       <a:srgbClr val="FFFFFF"/>
                     </a:solidFill>
+                    <a:lnL w="6350">
+                      <a:solidFill>
+                        <a:srgbClr val="E4E0D8"/>
+                      </a:solidFill>
+                    </a:lnL>
+                    <a:lnR w="6350">
+                      <a:solidFill>
+                        <a:srgbClr val="E4E0D8"/>
+                      </a:solidFill>
+                    </a:lnR>
+                    <a:lnT w="6350">
+                      <a:solidFill>
+                        <a:srgbClr val="E4E0D8"/>
+                      </a:solidFill>
+                    </a:lnT>
+                    <a:lnB w="6350">
+                      <a:solidFill>
+                        <a:srgbClr val="E4E0D8"/>
+                      </a:solidFill>
+                    </a:lnB>
                   </a:tcPr>
                 </a:tc>
                 <a:tc>
@@ -6322,7 +7475,7 @@
                     <a:lstStyle/>
                     <a:p>
                       <a:pPr algn="ctr">
-                        <a:defRPr sz="1300">
+                        <a:defRPr sz="1200">
                           <a:solidFill>
                             <a:srgbClr val="6B6860"/>
                           </a:solidFill>
@@ -6338,6 +7491,26 @@
                     <a:solidFill>
                       <a:srgbClr val="FFFFFF"/>
                     </a:solidFill>
+                    <a:lnL w="6350">
+                      <a:solidFill>
+                        <a:srgbClr val="E4E0D8"/>
+                      </a:solidFill>
+                    </a:lnL>
+                    <a:lnR w="6350">
+                      <a:solidFill>
+                        <a:srgbClr val="E4E0D8"/>
+                      </a:solidFill>
+                    </a:lnR>
+                    <a:lnT w="6350">
+                      <a:solidFill>
+                        <a:srgbClr val="E4E0D8"/>
+                      </a:solidFill>
+                    </a:lnT>
+                    <a:lnB w="6350">
+                      <a:solidFill>
+                        <a:srgbClr val="E4E0D8"/>
+                      </a:solidFill>
+                    </a:lnB>
                   </a:tcPr>
                 </a:tc>
                 <a:tc>
@@ -6346,7 +7519,7 @@
                     <a:lstStyle/>
                     <a:p>
                       <a:pPr algn="ctr">
-                        <a:defRPr sz="1300">
+                        <a:defRPr sz="1200">
                           <a:solidFill>
                             <a:srgbClr val="6B6860"/>
                           </a:solidFill>
@@ -6362,6 +7535,26 @@
                     <a:solidFill>
                       <a:srgbClr val="FFFFFF"/>
                     </a:solidFill>
+                    <a:lnL w="6350">
+                      <a:solidFill>
+                        <a:srgbClr val="E4E0D8"/>
+                      </a:solidFill>
+                    </a:lnL>
+                    <a:lnR w="6350">
+                      <a:solidFill>
+                        <a:srgbClr val="E4E0D8"/>
+                      </a:solidFill>
+                    </a:lnR>
+                    <a:lnT w="6350">
+                      <a:solidFill>
+                        <a:srgbClr val="E4E0D8"/>
+                      </a:solidFill>
+                    </a:lnT>
+                    <a:lnB w="6350">
+                      <a:solidFill>
+                        <a:srgbClr val="E4E0D8"/>
+                      </a:solidFill>
+                    </a:lnB>
                   </a:tcPr>
                 </a:tc>
                 <a:tc>
@@ -6370,7 +7563,7 @@
                     <a:lstStyle/>
                     <a:p>
                       <a:pPr algn="ctr">
-                        <a:defRPr sz="1300">
+                        <a:defRPr sz="1200">
                           <a:solidFill>
                             <a:srgbClr val="6B6860"/>
                           </a:solidFill>
@@ -6386,17 +7579,37 @@
                     <a:solidFill>
                       <a:srgbClr val="FFFFFF"/>
                     </a:solidFill>
+                    <a:lnL w="6350">
+                      <a:solidFill>
+                        <a:srgbClr val="E4E0D8"/>
+                      </a:solidFill>
+                    </a:lnL>
+                    <a:lnR w="6350">
+                      <a:solidFill>
+                        <a:srgbClr val="E4E0D8"/>
+                      </a:solidFill>
+                    </a:lnR>
+                    <a:lnT w="6350">
+                      <a:solidFill>
+                        <a:srgbClr val="E4E0D8"/>
+                      </a:solidFill>
+                    </a:lnT>
+                    <a:lnB w="6350">
+                      <a:solidFill>
+                        <a:srgbClr val="E4E0D8"/>
+                      </a:solidFill>
+                    </a:lnB>
                   </a:tcPr>
                 </a:tc>
               </a:tr>
-              <a:tr h="365760">
+              <a:tr h="342900">
                 <a:tc>
                   <a:txBody>
                     <a:bodyPr/>
                     <a:lstStyle/>
                     <a:p>
                       <a:pPr algn="l">
-                        <a:defRPr sz="1200" b="1">
+                        <a:defRPr sz="1100" b="1">
                           <a:solidFill>
                             <a:srgbClr val="2C2A26"/>
                           </a:solidFill>
@@ -6412,6 +7625,26 @@
                     <a:solidFill>
                       <a:srgbClr val="FAF8F4"/>
                     </a:solidFill>
+                    <a:lnL w="6350">
+                      <a:solidFill>
+                        <a:srgbClr val="E4E0D8"/>
+                      </a:solidFill>
+                    </a:lnL>
+                    <a:lnR w="6350">
+                      <a:solidFill>
+                        <a:srgbClr val="E4E0D8"/>
+                      </a:solidFill>
+                    </a:lnR>
+                    <a:lnT w="6350">
+                      <a:solidFill>
+                        <a:srgbClr val="E4E0D8"/>
+                      </a:solidFill>
+                    </a:lnT>
+                    <a:lnB w="6350">
+                      <a:solidFill>
+                        <a:srgbClr val="E4E0D8"/>
+                      </a:solidFill>
+                    </a:lnB>
                   </a:tcPr>
                 </a:tc>
                 <a:tc>
@@ -6420,7 +7653,7 @@
                     <a:lstStyle/>
                     <a:p>
                       <a:pPr algn="ctr">
-                        <a:defRPr sz="1300">
+                        <a:defRPr sz="1200">
                           <a:solidFill>
                             <a:srgbClr val="6B6860"/>
                           </a:solidFill>
@@ -6436,6 +7669,26 @@
                     <a:solidFill>
                       <a:srgbClr val="FAF8F4"/>
                     </a:solidFill>
+                    <a:lnL w="6350">
+                      <a:solidFill>
+                        <a:srgbClr val="E4E0D8"/>
+                      </a:solidFill>
+                    </a:lnL>
+                    <a:lnR w="6350">
+                      <a:solidFill>
+                        <a:srgbClr val="E4E0D8"/>
+                      </a:solidFill>
+                    </a:lnR>
+                    <a:lnT w="6350">
+                      <a:solidFill>
+                        <a:srgbClr val="E4E0D8"/>
+                      </a:solidFill>
+                    </a:lnT>
+                    <a:lnB w="6350">
+                      <a:solidFill>
+                        <a:srgbClr val="E4E0D8"/>
+                      </a:solidFill>
+                    </a:lnB>
                   </a:tcPr>
                 </a:tc>
                 <a:tc>
@@ -6444,7 +7697,7 @@
                     <a:lstStyle/>
                     <a:p>
                       <a:pPr algn="ctr">
-                        <a:defRPr sz="1300">
+                        <a:defRPr sz="1200">
                           <a:solidFill>
                             <a:srgbClr val="6B6860"/>
                           </a:solidFill>
@@ -6460,6 +7713,26 @@
                     <a:solidFill>
                       <a:srgbClr val="FAF8F4"/>
                     </a:solidFill>
+                    <a:lnL w="6350">
+                      <a:solidFill>
+                        <a:srgbClr val="E4E0D8"/>
+                      </a:solidFill>
+                    </a:lnL>
+                    <a:lnR w="6350">
+                      <a:solidFill>
+                        <a:srgbClr val="E4E0D8"/>
+                      </a:solidFill>
+                    </a:lnR>
+                    <a:lnT w="6350">
+                      <a:solidFill>
+                        <a:srgbClr val="E4E0D8"/>
+                      </a:solidFill>
+                    </a:lnT>
+                    <a:lnB w="6350">
+                      <a:solidFill>
+                        <a:srgbClr val="E4E0D8"/>
+                      </a:solidFill>
+                    </a:lnB>
                   </a:tcPr>
                 </a:tc>
                 <a:tc>
@@ -6468,7 +7741,7 @@
                     <a:lstStyle/>
                     <a:p>
                       <a:pPr algn="ctr">
-                        <a:defRPr sz="1300">
+                        <a:defRPr sz="1200">
                           <a:solidFill>
                             <a:srgbClr val="6B6860"/>
                           </a:solidFill>
@@ -6484,17 +7757,37 @@
                     <a:solidFill>
                       <a:srgbClr val="FAF8F4"/>
                     </a:solidFill>
+                    <a:lnL w="6350">
+                      <a:solidFill>
+                        <a:srgbClr val="E4E0D8"/>
+                      </a:solidFill>
+                    </a:lnL>
+                    <a:lnR w="6350">
+                      <a:solidFill>
+                        <a:srgbClr val="E4E0D8"/>
+                      </a:solidFill>
+                    </a:lnR>
+                    <a:lnT w="6350">
+                      <a:solidFill>
+                        <a:srgbClr val="E4E0D8"/>
+                      </a:solidFill>
+                    </a:lnT>
+                    <a:lnB w="6350">
+                      <a:solidFill>
+                        <a:srgbClr val="E4E0D8"/>
+                      </a:solidFill>
+                    </a:lnB>
                   </a:tcPr>
                 </a:tc>
               </a:tr>
-              <a:tr h="365760">
+              <a:tr h="342900">
                 <a:tc>
                   <a:txBody>
                     <a:bodyPr/>
                     <a:lstStyle/>
                     <a:p>
                       <a:pPr algn="l">
-                        <a:defRPr sz="1200" b="1">
+                        <a:defRPr sz="1100" b="1">
                           <a:solidFill>
                             <a:srgbClr val="2C2A26"/>
                           </a:solidFill>
@@ -6510,6 +7803,26 @@
                     <a:solidFill>
                       <a:srgbClr val="FFFFFF"/>
                     </a:solidFill>
+                    <a:lnL w="6350">
+                      <a:solidFill>
+                        <a:srgbClr val="E4E0D8"/>
+                      </a:solidFill>
+                    </a:lnL>
+                    <a:lnR w="6350">
+                      <a:solidFill>
+                        <a:srgbClr val="E4E0D8"/>
+                      </a:solidFill>
+                    </a:lnR>
+                    <a:lnT w="6350">
+                      <a:solidFill>
+                        <a:srgbClr val="E4E0D8"/>
+                      </a:solidFill>
+                    </a:lnT>
+                    <a:lnB w="6350">
+                      <a:solidFill>
+                        <a:srgbClr val="E4E0D8"/>
+                      </a:solidFill>
+                    </a:lnB>
                   </a:tcPr>
                 </a:tc>
                 <a:tc>
@@ -6518,7 +7831,7 @@
                     <a:lstStyle/>
                     <a:p>
                       <a:pPr algn="ctr">
-                        <a:defRPr sz="1300">
+                        <a:defRPr sz="1200">
                           <a:solidFill>
                             <a:srgbClr val="6B6860"/>
                           </a:solidFill>
@@ -6534,6 +7847,26 @@
                     <a:solidFill>
                       <a:srgbClr val="FFFFFF"/>
                     </a:solidFill>
+                    <a:lnL w="6350">
+                      <a:solidFill>
+                        <a:srgbClr val="E4E0D8"/>
+                      </a:solidFill>
+                    </a:lnL>
+                    <a:lnR w="6350">
+                      <a:solidFill>
+                        <a:srgbClr val="E4E0D8"/>
+                      </a:solidFill>
+                    </a:lnR>
+                    <a:lnT w="6350">
+                      <a:solidFill>
+                        <a:srgbClr val="E4E0D8"/>
+                      </a:solidFill>
+                    </a:lnT>
+                    <a:lnB w="6350">
+                      <a:solidFill>
+                        <a:srgbClr val="E4E0D8"/>
+                      </a:solidFill>
+                    </a:lnB>
                   </a:tcPr>
                 </a:tc>
                 <a:tc>
@@ -6542,7 +7875,7 @@
                     <a:lstStyle/>
                     <a:p>
                       <a:pPr algn="ctr">
-                        <a:defRPr sz="1300">
+                        <a:defRPr sz="1200">
                           <a:solidFill>
                             <a:srgbClr val="6B6860"/>
                           </a:solidFill>
@@ -6558,6 +7891,26 @@
                     <a:solidFill>
                       <a:srgbClr val="FFFFFF"/>
                     </a:solidFill>
+                    <a:lnL w="6350">
+                      <a:solidFill>
+                        <a:srgbClr val="E4E0D8"/>
+                      </a:solidFill>
+                    </a:lnL>
+                    <a:lnR w="6350">
+                      <a:solidFill>
+                        <a:srgbClr val="E4E0D8"/>
+                      </a:solidFill>
+                    </a:lnR>
+                    <a:lnT w="6350">
+                      <a:solidFill>
+                        <a:srgbClr val="E4E0D8"/>
+                      </a:solidFill>
+                    </a:lnT>
+                    <a:lnB w="6350">
+                      <a:solidFill>
+                        <a:srgbClr val="E4E0D8"/>
+                      </a:solidFill>
+                    </a:lnB>
                   </a:tcPr>
                 </a:tc>
                 <a:tc>
@@ -6566,7 +7919,7 @@
                     <a:lstStyle/>
                     <a:p>
                       <a:pPr algn="ctr">
-                        <a:defRPr sz="1300">
+                        <a:defRPr sz="1200">
                           <a:solidFill>
                             <a:srgbClr val="6B6860"/>
                           </a:solidFill>
@@ -6582,6 +7935,26 @@
                     <a:solidFill>
                       <a:srgbClr val="FFFFFF"/>
                     </a:solidFill>
+                    <a:lnL w="6350">
+                      <a:solidFill>
+                        <a:srgbClr val="E4E0D8"/>
+                      </a:solidFill>
+                    </a:lnL>
+                    <a:lnR w="6350">
+                      <a:solidFill>
+                        <a:srgbClr val="E4E0D8"/>
+                      </a:solidFill>
+                    </a:lnR>
+                    <a:lnT w="6350">
+                      <a:solidFill>
+                        <a:srgbClr val="E4E0D8"/>
+                      </a:solidFill>
+                    </a:lnT>
+                    <a:lnB w="6350">
+                      <a:solidFill>
+                        <a:srgbClr val="E4E0D8"/>
+                      </a:solidFill>
+                    </a:lnB>
                   </a:tcPr>
                 </a:tc>
               </a:tr>
@@ -6589,6 +7962,51 @@
           </a:graphicData>
         </a:graphic>
       </p:graphicFrame>
+      <p:sp>
+        <p:nvSpPr>
+          <p:cNvPr id="7" name="TextBox 6"/>
+          <p:cNvSpPr txBox="1"/>
+          <p:nvPr/>
+        </p:nvSpPr>
+        <p:spPr>
+          <a:xfrm>
+            <a:off x="1371600" y="5943600"/>
+            <a:ext cx="8229600" cy="365760"/>
+          </a:xfrm>
+          <a:prstGeom prst="rect">
+            <a:avLst/>
+          </a:prstGeom>
+          <a:noFill/>
+        </p:spPr>
+        <p:txBody>
+          <a:bodyPr wrap="square">
+            <a:spAutoFit/>
+          </a:bodyPr>
+          <a:lstStyle/>
+          <a:p>
+            <a:pPr algn="l">
+              <a:lnSpc>
+                <a:spcPct val="120000"/>
+              </a:lnSpc>
+              <a:spcBef>
+                <a:spcPts val="0"/>
+              </a:spcBef>
+              <a:spcAft>
+                <a:spcPts val="0"/>
+              </a:spcAft>
+              <a:defRPr sz="1300" b="0">
+                <a:solidFill>
+                  <a:srgbClr val="9A9690"/>
+                </a:solidFill>
+                <a:latin typeface="Calibri"/>
+              </a:defRPr>
+            </a:pPr>
+            <a:r>
+              <a:t>Year two approaches breakeven. Year three clearly profitable as tier mix shifts upward.</a:t>
+            </a:r>
+          </a:p>
+        </p:txBody>
+      </p:sp>
     </p:spTree>
   </p:cSld>
   <p:clrMapOvr>
@@ -6617,7 +8035,86 @@
       <p:grpSpPr/>
       <p:sp>
         <p:nvSpPr>
-          <p:cNvPr id="2" name="TextBox 1"/>
+          <p:cNvPr id="2" name="Rectangle 1"/>
+          <p:cNvSpPr/>
+          <p:nvPr/>
+        </p:nvSpPr>
+        <p:spPr>
+          <a:xfrm>
+            <a:off x="0" y="0"/>
+            <a:ext cx="12191695" cy="54864"/>
+          </a:xfrm>
+          <a:prstGeom prst="rect">
+            <a:avLst/>
+          </a:prstGeom>
+          <a:solidFill>
+            <a:srgbClr val="4A7C59"/>
+          </a:solidFill>
+          <a:ln>
+            <a:noFill/>
+          </a:ln>
+        </p:spPr>
+        <p:style>
+          <a:lnRef idx="1">
+            <a:schemeClr val="accent1"/>
+          </a:lnRef>
+          <a:fillRef idx="3">
+            <a:schemeClr val="accent1"/>
+          </a:fillRef>
+          <a:effectRef idx="2">
+            <a:schemeClr val="accent1"/>
+          </a:effectRef>
+          <a:fontRef idx="minor">
+            <a:schemeClr val="lt1"/>
+          </a:fontRef>
+        </p:style>
+        <p:txBody>
+          <a:bodyPr rtlCol="0" anchor="ctr"/>
+          <a:lstStyle/>
+          <a:p>
+            <a:pPr algn="ctr"/>
+          </a:p>
+        </p:txBody>
+      </p:sp>
+      <p:sp>
+        <p:nvSpPr>
+          <p:cNvPr id="3" name="TextBox 2"/>
+          <p:cNvSpPr txBox="1"/>
+          <p:nvPr/>
+        </p:nvSpPr>
+        <p:spPr>
+          <a:xfrm>
+            <a:off x="1097280" y="6400800"/>
+            <a:ext cx="3657600" cy="274320"/>
+          </a:xfrm>
+          <a:prstGeom prst="rect">
+            <a:avLst/>
+          </a:prstGeom>
+          <a:noFill/>
+        </p:spPr>
+        <p:txBody>
+          <a:bodyPr wrap="none">
+            <a:spAutoFit/>
+          </a:bodyPr>
+          <a:lstStyle/>
+          <a:p>
+            <a:pPr>
+              <a:defRPr sz="900">
+                <a:solidFill>
+                  <a:srgbClr val="9A9690"/>
+                </a:solidFill>
+                <a:latin typeface="Calibri"/>
+              </a:defRPr>
+            </a:pPr>
+            <a:r>
+              <a:t>parachute.computer</a:t>
+            </a:r>
+          </a:p>
+        </p:txBody>
+      </p:sp>
+      <p:sp>
+        <p:nvSpPr>
+          <p:cNvPr id="4" name="TextBox 3"/>
           <p:cNvSpPr txBox="1"/>
           <p:nvPr/>
         </p:nvSpPr>
@@ -6662,7 +8159,7 @@
       </p:sp>
       <p:sp>
         <p:nvSpPr>
-          <p:cNvPr id="3" name="TextBox 2"/>
+          <p:cNvPr id="5" name="TextBox 4"/>
           <p:cNvSpPr txBox="1"/>
           <p:nvPr/>
         </p:nvSpPr>
@@ -6711,76 +8208,14 @@
       </p:sp>
       <p:sp>
         <p:nvSpPr>
-          <p:cNvPr id="4" name="TextBox 3"/>
+          <p:cNvPr id="6" name="TextBox 5"/>
           <p:cNvSpPr txBox="1"/>
           <p:nvPr/>
         </p:nvSpPr>
         <p:spPr>
           <a:xfrm>
-            <a:off x="1097280" y="3200400"/>
-            <a:ext cx="5029200" cy="2286000"/>
-          </a:xfrm>
-          <a:prstGeom prst="rect">
-            <a:avLst/>
-          </a:prstGeom>
-          <a:noFill/>
-        </p:spPr>
-        <p:txBody>
-          <a:bodyPr wrap="square">
-            <a:spAutoFit/>
-          </a:bodyPr>
-          <a:lstStyle/>
-          <a:p>
-            <a:pPr algn="l">
-              <a:lnSpc>
-                <a:spcPct val="155000"/>
-              </a:lnSpc>
-              <a:spcBef>
-                <a:spcPts val="0"/>
-              </a:spcBef>
-              <a:spcAft>
-                <a:spcPts val="0"/>
-              </a:spcAft>
-              <a:defRPr sz="1600" b="0">
-                <a:solidFill>
-                  <a:srgbClr val="6B6860"/>
-                </a:solidFill>
-                <a:latin typeface="Calibri"/>
-              </a:defRPr>
-            </a:pPr>
-            <a:r>
-              <a:t>What exists today:</a:t>
-            </a:r>
-            <a:br/>
-            <a:br/>
-            <a:r>
-              <a:t>  ·  Working app with local voice transcription + graph-native memory</a:t>
-            </a:r>
-            <a:br/>
-            <a:r>
-              <a:t>  ·  Multi-platform: phone, Telegram, Discord, Matrix</a:t>
-            </a:r>
-            <a:br/>
-            <a:r>
-              <a:t>  ·  Functional pendant prototype (on stage today)</a:t>
-            </a:r>
-            <a:br/>
-            <a:r>
-              <a:t>  ·  Daily beta launching this month · PBC incorporated in Colorado</a:t>
-            </a:r>
-          </a:p>
-        </p:txBody>
-      </p:sp>
-      <p:sp>
-        <p:nvSpPr>
-          <p:cNvPr id="5" name="TextBox 4"/>
-          <p:cNvSpPr txBox="1"/>
-          <p:nvPr/>
-        </p:nvSpPr>
-        <p:spPr>
-          <a:xfrm>
-            <a:off x="7132320" y="3017520"/>
-            <a:ext cx="3657600" cy="320040"/>
+            <a:off x="1188720" y="3310128"/>
+            <a:ext cx="274320" cy="274320"/>
           </a:xfrm>
           <a:prstGeom prst="rect">
             <a:avLst/>
@@ -6803,7 +8238,7 @@
               <a:spcAft>
                 <a:spcPts val="0"/>
               </a:spcAft>
-              <a:defRPr sz="1100" b="1">
+              <a:defRPr sz="1400" b="0">
                 <a:solidFill>
                   <a:srgbClr val="4A7C59"/>
                 </a:solidFill>
@@ -6811,21 +8246,66 @@
               </a:defRPr>
             </a:pPr>
             <a:r>
-              <a:t>THE TEAM</a:t>
-            </a:r>
-          </a:p>
-        </p:txBody>
-      </p:sp>
-      <p:sp>
-        <p:nvSpPr>
-          <p:cNvPr id="6" name="TextBox 5"/>
+              <a:t>•</a:t>
+            </a:r>
+          </a:p>
+        </p:txBody>
+      </p:sp>
+      <p:sp>
+        <p:nvSpPr>
+          <p:cNvPr id="7" name="TextBox 6"/>
           <p:cNvSpPr txBox="1"/>
           <p:nvPr/>
         </p:nvSpPr>
         <p:spPr>
           <a:xfrm>
-            <a:off x="7132320" y="3566160"/>
-            <a:ext cx="4114800" cy="274320"/>
+            <a:off x="1554480" y="3291840"/>
+            <a:ext cx="4572000" cy="365760"/>
+          </a:xfrm>
+          <a:prstGeom prst="rect">
+            <a:avLst/>
+          </a:prstGeom>
+          <a:noFill/>
+        </p:spPr>
+        <p:txBody>
+          <a:bodyPr wrap="square">
+            <a:spAutoFit/>
+          </a:bodyPr>
+          <a:lstStyle/>
+          <a:p>
+            <a:pPr algn="l">
+              <a:lnSpc>
+                <a:spcPct val="130000"/>
+              </a:lnSpc>
+              <a:spcBef>
+                <a:spcPts val="0"/>
+              </a:spcBef>
+              <a:spcAft>
+                <a:spcPts val="0"/>
+              </a:spcAft>
+              <a:defRPr sz="1500" b="0">
+                <a:solidFill>
+                  <a:srgbClr val="6B6860"/>
+                </a:solidFill>
+                <a:latin typeface="Calibri"/>
+              </a:defRPr>
+            </a:pPr>
+            <a:r>
+              <a:t>Working app with local voice transcription + graph-native memory</a:t>
+            </a:r>
+          </a:p>
+        </p:txBody>
+      </p:sp>
+      <p:sp>
+        <p:nvSpPr>
+          <p:cNvPr id="8" name="TextBox 7"/>
+          <p:cNvSpPr txBox="1"/>
+          <p:nvPr/>
+        </p:nvSpPr>
+        <p:spPr>
+          <a:xfrm>
+            <a:off x="1188720" y="3767328"/>
+            <a:ext cx="274320" cy="274320"/>
           </a:xfrm>
           <a:prstGeom prst="rect">
             <a:avLst/>
@@ -6848,29 +8328,74 @@
               <a:spcAft>
                 <a:spcPts val="0"/>
               </a:spcAft>
-              <a:defRPr sz="1400" b="1">
-                <a:solidFill>
-                  <a:srgbClr val="2C2A26"/>
+              <a:defRPr sz="1400" b="0">
+                <a:solidFill>
+                  <a:srgbClr val="4A7C59"/>
                 </a:solidFill>
                 <a:latin typeface="Calibri"/>
               </a:defRPr>
             </a:pPr>
             <a:r>
-              <a:t>Aaron Gabriel Neyer</a:t>
-            </a:r>
-          </a:p>
-        </p:txBody>
-      </p:sp>
-      <p:sp>
-        <p:nvSpPr>
-          <p:cNvPr id="7" name="TextBox 6"/>
+              <a:t>•</a:t>
+            </a:r>
+          </a:p>
+        </p:txBody>
+      </p:sp>
+      <p:sp>
+        <p:nvSpPr>
+          <p:cNvPr id="9" name="TextBox 8"/>
           <p:cNvSpPr txBox="1"/>
           <p:nvPr/>
         </p:nvSpPr>
         <p:spPr>
           <a:xfrm>
-            <a:off x="7132320" y="3822192"/>
-            <a:ext cx="4114800" cy="274320"/>
+            <a:off x="1554480" y="3749040"/>
+            <a:ext cx="4572000" cy="365760"/>
+          </a:xfrm>
+          <a:prstGeom prst="rect">
+            <a:avLst/>
+          </a:prstGeom>
+          <a:noFill/>
+        </p:spPr>
+        <p:txBody>
+          <a:bodyPr wrap="square">
+            <a:spAutoFit/>
+          </a:bodyPr>
+          <a:lstStyle/>
+          <a:p>
+            <a:pPr algn="l">
+              <a:lnSpc>
+                <a:spcPct val="130000"/>
+              </a:lnSpc>
+              <a:spcBef>
+                <a:spcPts val="0"/>
+              </a:spcBef>
+              <a:spcAft>
+                <a:spcPts val="0"/>
+              </a:spcAft>
+              <a:defRPr sz="1500" b="0">
+                <a:solidFill>
+                  <a:srgbClr val="6B6860"/>
+                </a:solidFill>
+                <a:latin typeface="Calibri"/>
+              </a:defRPr>
+            </a:pPr>
+            <a:r>
+              <a:t>Multi-platform: phone, Telegram, Discord, Matrix</a:t>
+            </a:r>
+          </a:p>
+        </p:txBody>
+      </p:sp>
+      <p:sp>
+        <p:nvSpPr>
+          <p:cNvPr id="10" name="TextBox 9"/>
+          <p:cNvSpPr txBox="1"/>
+          <p:nvPr/>
+        </p:nvSpPr>
+        <p:spPr>
+          <a:xfrm>
+            <a:off x="1188720" y="4224528"/>
+            <a:ext cx="274320" cy="274320"/>
           </a:xfrm>
           <a:prstGeom prst="rect">
             <a:avLst/>
@@ -6893,7 +8418,52 @@
               <a:spcAft>
                 <a:spcPts val="0"/>
               </a:spcAft>
-              <a:defRPr sz="1200" b="0">
+              <a:defRPr sz="1400" b="0">
+                <a:solidFill>
+                  <a:srgbClr val="4A7C59"/>
+                </a:solidFill>
+                <a:latin typeface="Calibri"/>
+              </a:defRPr>
+            </a:pPr>
+            <a:r>
+              <a:t>•</a:t>
+            </a:r>
+          </a:p>
+        </p:txBody>
+      </p:sp>
+      <p:sp>
+        <p:nvSpPr>
+          <p:cNvPr id="11" name="TextBox 10"/>
+          <p:cNvSpPr txBox="1"/>
+          <p:nvPr/>
+        </p:nvSpPr>
+        <p:spPr>
+          <a:xfrm>
+            <a:off x="1554480" y="4206240"/>
+            <a:ext cx="4572000" cy="365760"/>
+          </a:xfrm>
+          <a:prstGeom prst="rect">
+            <a:avLst/>
+          </a:prstGeom>
+          <a:noFill/>
+        </p:spPr>
+        <p:txBody>
+          <a:bodyPr wrap="square">
+            <a:spAutoFit/>
+          </a:bodyPr>
+          <a:lstStyle/>
+          <a:p>
+            <a:pPr algn="l">
+              <a:lnSpc>
+                <a:spcPct val="130000"/>
+              </a:lnSpc>
+              <a:spcBef>
+                <a:spcPts val="0"/>
+              </a:spcBef>
+              <a:spcAft>
+                <a:spcPts val="0"/>
+              </a:spcAft>
+              <a:defRPr sz="1500" b="0">
                 <a:solidFill>
                   <a:srgbClr val="6B6860"/>
                 </a:solidFill>
@@ -6901,21 +8471,21 @@
               </a:defRPr>
             </a:pPr>
             <a:r>
-              <a:t>Founder · Product &amp; architecture</a:t>
-            </a:r>
-          </a:p>
-        </p:txBody>
-      </p:sp>
-      <p:sp>
-        <p:nvSpPr>
-          <p:cNvPr id="8" name="TextBox 7"/>
+              <a:t>Functional pendant prototype (on stage today)</a:t>
+            </a:r>
+          </a:p>
+        </p:txBody>
+      </p:sp>
+      <p:sp>
+        <p:nvSpPr>
+          <p:cNvPr id="12" name="TextBox 11"/>
           <p:cNvSpPr txBox="1"/>
           <p:nvPr/>
         </p:nvSpPr>
         <p:spPr>
           <a:xfrm>
-            <a:off x="7132320" y="4114800"/>
-            <a:ext cx="4114800" cy="274320"/>
+            <a:off x="1188720" y="4681728"/>
+            <a:ext cx="274320" cy="274320"/>
           </a:xfrm>
           <a:prstGeom prst="rect">
             <a:avLst/>
@@ -6938,29 +8508,119 @@
               <a:spcAft>
                 <a:spcPts val="0"/>
               </a:spcAft>
-              <a:defRPr sz="1400" b="1">
-                <a:solidFill>
-                  <a:srgbClr val="2C2A26"/>
+              <a:defRPr sz="1400" b="0">
+                <a:solidFill>
+                  <a:srgbClr val="4A7C59"/>
                 </a:solidFill>
                 <a:latin typeface="Calibri"/>
               </a:defRPr>
             </a:pPr>
             <a:r>
-              <a:t>Jon Bo</a:t>
-            </a:r>
-          </a:p>
-        </p:txBody>
-      </p:sp>
-      <p:sp>
-        <p:nvSpPr>
-          <p:cNvPr id="9" name="TextBox 8"/>
+              <a:t>•</a:t>
+            </a:r>
+          </a:p>
+        </p:txBody>
+      </p:sp>
+      <p:sp>
+        <p:nvSpPr>
+          <p:cNvPr id="13" name="TextBox 12"/>
           <p:cNvSpPr txBox="1"/>
           <p:nvPr/>
         </p:nvSpPr>
         <p:spPr>
           <a:xfrm>
-            <a:off x="7132320" y="4370832"/>
-            <a:ext cx="4114800" cy="274320"/>
+            <a:off x="1554480" y="4663440"/>
+            <a:ext cx="4572000" cy="365760"/>
+          </a:xfrm>
+          <a:prstGeom prst="rect">
+            <a:avLst/>
+          </a:prstGeom>
+          <a:noFill/>
+        </p:spPr>
+        <p:txBody>
+          <a:bodyPr wrap="square">
+            <a:spAutoFit/>
+          </a:bodyPr>
+          <a:lstStyle/>
+          <a:p>
+            <a:pPr algn="l">
+              <a:lnSpc>
+                <a:spcPct val="130000"/>
+              </a:lnSpc>
+              <a:spcBef>
+                <a:spcPts val="0"/>
+              </a:spcBef>
+              <a:spcAft>
+                <a:spcPts val="0"/>
+              </a:spcAft>
+              <a:defRPr sz="1500" b="0">
+                <a:solidFill>
+                  <a:srgbClr val="6B6860"/>
+                </a:solidFill>
+                <a:latin typeface="Calibri"/>
+              </a:defRPr>
+            </a:pPr>
+            <a:r>
+              <a:t>Daily beta launching this month · PBC incorporated in Colorado</a:t>
+            </a:r>
+          </a:p>
+        </p:txBody>
+      </p:sp>
+      <p:sp>
+        <p:nvSpPr>
+          <p:cNvPr id="14" name="Rounded Rectangle 13"/>
+          <p:cNvSpPr/>
+          <p:nvPr/>
+        </p:nvSpPr>
+        <p:spPr>
+          <a:xfrm>
+            <a:off x="6858000" y="3017520"/>
+            <a:ext cx="4572000" cy="2926080"/>
+          </a:xfrm>
+          <a:prstGeom prst="roundRect">
+            <a:avLst/>
+          </a:prstGeom>
+          <a:solidFill>
+            <a:srgbClr val="F3F0EA"/>
+          </a:solidFill>
+          <a:ln w="12700">
+            <a:solidFill>
+              <a:srgbClr val="E4E0D8"/>
+            </a:solidFill>
+          </a:ln>
+        </p:spPr>
+        <p:style>
+          <a:lnRef idx="1">
+            <a:schemeClr val="accent1"/>
+          </a:lnRef>
+          <a:fillRef idx="3">
+            <a:schemeClr val="accent1"/>
+          </a:fillRef>
+          <a:effectRef idx="2">
+            <a:schemeClr val="accent1"/>
+          </a:effectRef>
+          <a:fontRef idx="minor">
+            <a:schemeClr val="lt1"/>
+          </a:fontRef>
+        </p:style>
+        <p:txBody>
+          <a:bodyPr rtlCol="0" anchor="ctr"/>
+          <a:lstStyle/>
+          <a:p>
+            <a:pPr algn="ctr"/>
+          </a:p>
+        </p:txBody>
+      </p:sp>
+      <p:sp>
+        <p:nvSpPr>
+          <p:cNvPr id="15" name="TextBox 14"/>
+          <p:cNvSpPr txBox="1"/>
+          <p:nvPr/>
+        </p:nvSpPr>
+        <p:spPr>
+          <a:xfrm>
+            <a:off x="7223760" y="3200400"/>
+            <a:ext cx="3657600" cy="320040"/>
           </a:xfrm>
           <a:prstGeom prst="rect">
             <a:avLst/>
@@ -6983,29 +8643,29 @@
               <a:spcAft>
                 <a:spcPts val="0"/>
               </a:spcAft>
-              <a:defRPr sz="1200" b="0">
-                <a:solidFill>
-                  <a:srgbClr val="6B6860"/>
+              <a:defRPr sz="1100" b="1">
+                <a:solidFill>
+                  <a:srgbClr val="4A7C59"/>
                 </a:solidFill>
                 <a:latin typeface="Calibri"/>
               </a:defRPr>
             </a:pPr>
             <a:r>
-              <a:t>Daily co-lead · Founding engineer</a:t>
-            </a:r>
-          </a:p>
-        </p:txBody>
-      </p:sp>
-      <p:sp>
-        <p:nvSpPr>
-          <p:cNvPr id="10" name="TextBox 9"/>
+              <a:t>THE TEAM</a:t>
+            </a:r>
+          </a:p>
+        </p:txBody>
+      </p:sp>
+      <p:sp>
+        <p:nvSpPr>
+          <p:cNvPr id="16" name="TextBox 15"/>
           <p:cNvSpPr txBox="1"/>
           <p:nvPr/>
         </p:nvSpPr>
         <p:spPr>
           <a:xfrm>
-            <a:off x="7132320" y="4663440"/>
-            <a:ext cx="4114800" cy="274320"/>
+            <a:off x="7223760" y="3657600"/>
+            <a:ext cx="4114800" cy="256032"/>
           </a:xfrm>
           <a:prstGeom prst="rect">
             <a:avLst/>
@@ -7028,7 +8688,7 @@
               <a:spcAft>
                 <a:spcPts val="0"/>
               </a:spcAft>
-              <a:defRPr sz="1400" b="1">
+              <a:defRPr sz="1300" b="1">
                 <a:solidFill>
                   <a:srgbClr val="2C2A26"/>
                 </a:solidFill>
@@ -7036,21 +8696,21 @@
               </a:defRPr>
             </a:pPr>
             <a:r>
-              <a:t>Lucian Hymer</a:t>
-            </a:r>
-          </a:p>
-        </p:txBody>
-      </p:sp>
-      <p:sp>
-        <p:nvSpPr>
-          <p:cNvPr id="11" name="TextBox 10"/>
+              <a:t>Aaron Gabriel Neyer</a:t>
+            </a:r>
+          </a:p>
+        </p:txBody>
+      </p:sp>
+      <p:sp>
+        <p:nvSpPr>
+          <p:cNvPr id="17" name="TextBox 16"/>
           <p:cNvSpPr txBox="1"/>
           <p:nvPr/>
         </p:nvSpPr>
         <p:spPr>
           <a:xfrm>
-            <a:off x="7132320" y="4919472"/>
-            <a:ext cx="4114800" cy="274320"/>
+            <a:off x="7223760" y="3886200"/>
+            <a:ext cx="4114800" cy="256032"/>
           </a:xfrm>
           <a:prstGeom prst="rect">
             <a:avLst/>
@@ -7073,7 +8733,7 @@
               <a:spcAft>
                 <a:spcPts val="0"/>
               </a:spcAft>
-              <a:defRPr sz="1200" b="0">
+              <a:defRPr sz="1100" b="0">
                 <a:solidFill>
                   <a:srgbClr val="6B6860"/>
                 </a:solidFill>
@@ -7081,21 +8741,21 @@
               </a:defRPr>
             </a:pPr>
             <a:r>
-              <a:t>Computer co-lead · Founding engineer</a:t>
-            </a:r>
-          </a:p>
-        </p:txBody>
-      </p:sp>
-      <p:sp>
-        <p:nvSpPr>
-          <p:cNvPr id="12" name="TextBox 11"/>
+              <a:t>Founder · Product &amp; architecture</a:t>
+            </a:r>
+          </a:p>
+        </p:txBody>
+      </p:sp>
+      <p:sp>
+        <p:nvSpPr>
+          <p:cNvPr id="18" name="TextBox 17"/>
           <p:cNvSpPr txBox="1"/>
           <p:nvPr/>
         </p:nvSpPr>
         <p:spPr>
           <a:xfrm>
-            <a:off x="7132320" y="5212080"/>
-            <a:ext cx="4114800" cy="274320"/>
+            <a:off x="7223760" y="4114800"/>
+            <a:ext cx="4114800" cy="256032"/>
           </a:xfrm>
           <a:prstGeom prst="rect">
             <a:avLst/>
@@ -7118,7 +8778,7 @@
               <a:spcAft>
                 <a:spcPts val="0"/>
               </a:spcAft>
-              <a:defRPr sz="1400" b="1">
+              <a:defRPr sz="1300" b="1">
                 <a:solidFill>
                   <a:srgbClr val="2C2A26"/>
                 </a:solidFill>
@@ -7126,21 +8786,21 @@
               </a:defRPr>
             </a:pPr>
             <a:r>
-              <a:t>Marvin Melzer</a:t>
-            </a:r>
-          </a:p>
-        </p:txBody>
-      </p:sp>
-      <p:sp>
-        <p:nvSpPr>
-          <p:cNvPr id="13" name="TextBox 12"/>
+              <a:t>Jon Bo</a:t>
+            </a:r>
+          </a:p>
+        </p:txBody>
+      </p:sp>
+      <p:sp>
+        <p:nvSpPr>
+          <p:cNvPr id="19" name="TextBox 18"/>
           <p:cNvSpPr txBox="1"/>
           <p:nvPr/>
         </p:nvSpPr>
         <p:spPr>
           <a:xfrm>
-            <a:off x="7132320" y="5468112"/>
-            <a:ext cx="4114800" cy="274320"/>
+            <a:off x="7223760" y="4343400"/>
+            <a:ext cx="4114800" cy="256032"/>
           </a:xfrm>
           <a:prstGeom prst="rect">
             <a:avLst/>
@@ -7163,7 +8823,7 @@
               <a:spcAft>
                 <a:spcPts val="0"/>
               </a:spcAft>
-              <a:defRPr sz="1200" b="0">
+              <a:defRPr sz="1100" b="0">
                 <a:solidFill>
                   <a:srgbClr val="6B6860"/>
                 </a:solidFill>
@@ -7171,21 +8831,21 @@
               </a:defRPr>
             </a:pPr>
             <a:r>
-              <a:t>Hardware · Pendant prototype</a:t>
-            </a:r>
-          </a:p>
-        </p:txBody>
-      </p:sp>
-      <p:sp>
-        <p:nvSpPr>
-          <p:cNvPr id="14" name="TextBox 13"/>
+              <a:t>Daily co-lead · Founding engineer</a:t>
+            </a:r>
+          </a:p>
+        </p:txBody>
+      </p:sp>
+      <p:sp>
+        <p:nvSpPr>
+          <p:cNvPr id="20" name="TextBox 19"/>
           <p:cNvSpPr txBox="1"/>
           <p:nvPr/>
         </p:nvSpPr>
         <p:spPr>
           <a:xfrm>
-            <a:off x="7132320" y="5760720"/>
-            <a:ext cx="4114800" cy="274320"/>
+            <a:off x="7223760" y="4572000"/>
+            <a:ext cx="4114800" cy="256032"/>
           </a:xfrm>
           <a:prstGeom prst="rect">
             <a:avLst/>
@@ -7208,7 +8868,7 @@
               <a:spcAft>
                 <a:spcPts val="0"/>
               </a:spcAft>
-              <a:defRPr sz="1400" b="1">
+              <a:defRPr sz="1300" b="1">
                 <a:solidFill>
                   <a:srgbClr val="2C2A26"/>
                 </a:solidFill>
@@ -7216,21 +8876,21 @@
               </a:defRPr>
             </a:pPr>
             <a:r>
-              <a:t>Neil Yarnal</a:t>
-            </a:r>
-          </a:p>
-        </p:txBody>
-      </p:sp>
-      <p:sp>
-        <p:nvSpPr>
-          <p:cNvPr id="15" name="TextBox 14"/>
+              <a:t>Lucian Hymer</a:t>
+            </a:r>
+          </a:p>
+        </p:txBody>
+      </p:sp>
+      <p:sp>
+        <p:nvSpPr>
+          <p:cNvPr id="21" name="TextBox 20"/>
           <p:cNvSpPr txBox="1"/>
           <p:nvPr/>
         </p:nvSpPr>
         <p:spPr>
           <a:xfrm>
-            <a:off x="7132320" y="6016752"/>
-            <a:ext cx="4114800" cy="274320"/>
+            <a:off x="7223760" y="4800600"/>
+            <a:ext cx="4114800" cy="256032"/>
           </a:xfrm>
           <a:prstGeom prst="rect">
             <a:avLst/>
@@ -7253,7 +8913,7 @@
               <a:spcAft>
                 <a:spcPts val="0"/>
               </a:spcAft>
-              <a:defRPr sz="1200" b="0">
+              <a:defRPr sz="1100" b="0">
                 <a:solidFill>
                   <a:srgbClr val="6B6860"/>
                 </a:solidFill>
@@ -7261,21 +8921,21 @@
               </a:defRPr>
             </a:pPr>
             <a:r>
-              <a:t>Brand &amp; design</a:t>
-            </a:r>
-          </a:p>
-        </p:txBody>
-      </p:sp>
-      <p:sp>
-        <p:nvSpPr>
-          <p:cNvPr id="16" name="TextBox 15"/>
+              <a:t>Computer co-lead · Founding engineer</a:t>
+            </a:r>
+          </a:p>
+        </p:txBody>
+      </p:sp>
+      <p:sp>
+        <p:nvSpPr>
+          <p:cNvPr id="22" name="TextBox 21"/>
           <p:cNvSpPr txBox="1"/>
           <p:nvPr/>
         </p:nvSpPr>
         <p:spPr>
           <a:xfrm>
-            <a:off x="1097280" y="5943600"/>
-            <a:ext cx="9144000" cy="457200"/>
+            <a:off x="7223760" y="5029200"/>
+            <a:ext cx="4114800" cy="256032"/>
           </a:xfrm>
           <a:prstGeom prst="rect">
             <a:avLst/>
@@ -7298,7 +8958,187 @@
               <a:spcAft>
                 <a:spcPts val="0"/>
               </a:spcAft>
-              <a:defRPr sz="1300" b="0">
+              <a:defRPr sz="1300" b="1">
+                <a:solidFill>
+                  <a:srgbClr val="2C2A26"/>
+                </a:solidFill>
+                <a:latin typeface="Calibri"/>
+              </a:defRPr>
+            </a:pPr>
+            <a:r>
+              <a:t>Marvin Melzer</a:t>
+            </a:r>
+          </a:p>
+        </p:txBody>
+      </p:sp>
+      <p:sp>
+        <p:nvSpPr>
+          <p:cNvPr id="23" name="TextBox 22"/>
+          <p:cNvSpPr txBox="1"/>
+          <p:nvPr/>
+        </p:nvSpPr>
+        <p:spPr>
+          <a:xfrm>
+            <a:off x="7223760" y="5257800"/>
+            <a:ext cx="4114800" cy="256032"/>
+          </a:xfrm>
+          <a:prstGeom prst="rect">
+            <a:avLst/>
+          </a:prstGeom>
+          <a:noFill/>
+        </p:spPr>
+        <p:txBody>
+          <a:bodyPr wrap="square">
+            <a:spAutoFit/>
+          </a:bodyPr>
+          <a:lstStyle/>
+          <a:p>
+            <a:pPr algn="l">
+              <a:lnSpc>
+                <a:spcPct val="120000"/>
+              </a:lnSpc>
+              <a:spcBef>
+                <a:spcPts val="0"/>
+              </a:spcBef>
+              <a:spcAft>
+                <a:spcPts val="0"/>
+              </a:spcAft>
+              <a:defRPr sz="1100" b="0">
+                <a:solidFill>
+                  <a:srgbClr val="6B6860"/>
+                </a:solidFill>
+                <a:latin typeface="Calibri"/>
+              </a:defRPr>
+            </a:pPr>
+            <a:r>
+              <a:t>Hardware · Pendant prototype</a:t>
+            </a:r>
+          </a:p>
+        </p:txBody>
+      </p:sp>
+      <p:sp>
+        <p:nvSpPr>
+          <p:cNvPr id="24" name="TextBox 23"/>
+          <p:cNvSpPr txBox="1"/>
+          <p:nvPr/>
+        </p:nvSpPr>
+        <p:spPr>
+          <a:xfrm>
+            <a:off x="7223760" y="5486400"/>
+            <a:ext cx="4114800" cy="256032"/>
+          </a:xfrm>
+          <a:prstGeom prst="rect">
+            <a:avLst/>
+          </a:prstGeom>
+          <a:noFill/>
+        </p:spPr>
+        <p:txBody>
+          <a:bodyPr wrap="square">
+            <a:spAutoFit/>
+          </a:bodyPr>
+          <a:lstStyle/>
+          <a:p>
+            <a:pPr algn="l">
+              <a:lnSpc>
+                <a:spcPct val="120000"/>
+              </a:lnSpc>
+              <a:spcBef>
+                <a:spcPts val="0"/>
+              </a:spcBef>
+              <a:spcAft>
+                <a:spcPts val="0"/>
+              </a:spcAft>
+              <a:defRPr sz="1300" b="1">
+                <a:solidFill>
+                  <a:srgbClr val="2C2A26"/>
+                </a:solidFill>
+                <a:latin typeface="Calibri"/>
+              </a:defRPr>
+            </a:pPr>
+            <a:r>
+              <a:t>Neil Yarnal</a:t>
+            </a:r>
+          </a:p>
+        </p:txBody>
+      </p:sp>
+      <p:sp>
+        <p:nvSpPr>
+          <p:cNvPr id="25" name="TextBox 24"/>
+          <p:cNvSpPr txBox="1"/>
+          <p:nvPr/>
+        </p:nvSpPr>
+        <p:spPr>
+          <a:xfrm>
+            <a:off x="7223760" y="5715000"/>
+            <a:ext cx="4114800" cy="256032"/>
+          </a:xfrm>
+          <a:prstGeom prst="rect">
+            <a:avLst/>
+          </a:prstGeom>
+          <a:noFill/>
+        </p:spPr>
+        <p:txBody>
+          <a:bodyPr wrap="square">
+            <a:spAutoFit/>
+          </a:bodyPr>
+          <a:lstStyle/>
+          <a:p>
+            <a:pPr algn="l">
+              <a:lnSpc>
+                <a:spcPct val="120000"/>
+              </a:lnSpc>
+              <a:spcBef>
+                <a:spcPts val="0"/>
+              </a:spcBef>
+              <a:spcAft>
+                <a:spcPts val="0"/>
+              </a:spcAft>
+              <a:defRPr sz="1100" b="0">
+                <a:solidFill>
+                  <a:srgbClr val="6B6860"/>
+                </a:solidFill>
+                <a:latin typeface="Calibri"/>
+              </a:defRPr>
+            </a:pPr>
+            <a:r>
+              <a:t>Brand &amp; design</a:t>
+            </a:r>
+          </a:p>
+        </p:txBody>
+      </p:sp>
+      <p:sp>
+        <p:nvSpPr>
+          <p:cNvPr id="26" name="TextBox 25"/>
+          <p:cNvSpPr txBox="1"/>
+          <p:nvPr/>
+        </p:nvSpPr>
+        <p:spPr>
+          <a:xfrm>
+            <a:off x="1097280" y="5943600"/>
+            <a:ext cx="9144000" cy="457200"/>
+          </a:xfrm>
+          <a:prstGeom prst="rect">
+            <a:avLst/>
+          </a:prstGeom>
+          <a:noFill/>
+        </p:spPr>
+        <p:txBody>
+          <a:bodyPr wrap="square">
+            <a:spAutoFit/>
+          </a:bodyPr>
+          <a:lstStyle/>
+          <a:p>
+            <a:pPr algn="l">
+              <a:lnSpc>
+                <a:spcPct val="120000"/>
+              </a:lnSpc>
+              <a:spcBef>
+                <a:spcPts val="0"/>
+              </a:spcBef>
+              <a:spcAft>
+                <a:spcPts val="0"/>
+              </a:spcAft>
+              <a:defRPr sz="1200" b="0">
                 <a:solidFill>
                   <a:srgbClr val="9A9690"/>
                 </a:solidFill>
@@ -7339,7 +9179,86 @@
       <p:grpSpPr/>
       <p:sp>
         <p:nvSpPr>
-          <p:cNvPr id="2" name="TextBox 1"/>
+          <p:cNvPr id="2" name="Rectangle 1"/>
+          <p:cNvSpPr/>
+          <p:nvPr/>
+        </p:nvSpPr>
+        <p:spPr>
+          <a:xfrm>
+            <a:off x="0" y="0"/>
+            <a:ext cx="12191695" cy="54864"/>
+          </a:xfrm>
+          <a:prstGeom prst="rect">
+            <a:avLst/>
+          </a:prstGeom>
+          <a:solidFill>
+            <a:srgbClr val="4A7C59"/>
+          </a:solidFill>
+          <a:ln>
+            <a:noFill/>
+          </a:ln>
+        </p:spPr>
+        <p:style>
+          <a:lnRef idx="1">
+            <a:schemeClr val="accent1"/>
+          </a:lnRef>
+          <a:fillRef idx="3">
+            <a:schemeClr val="accent1"/>
+          </a:fillRef>
+          <a:effectRef idx="2">
+            <a:schemeClr val="accent1"/>
+          </a:effectRef>
+          <a:fontRef idx="minor">
+            <a:schemeClr val="lt1"/>
+          </a:fontRef>
+        </p:style>
+        <p:txBody>
+          <a:bodyPr rtlCol="0" anchor="ctr"/>
+          <a:lstStyle/>
+          <a:p>
+            <a:pPr algn="ctr"/>
+          </a:p>
+        </p:txBody>
+      </p:sp>
+      <p:sp>
+        <p:nvSpPr>
+          <p:cNvPr id="3" name="TextBox 2"/>
+          <p:cNvSpPr txBox="1"/>
+          <p:nvPr/>
+        </p:nvSpPr>
+        <p:spPr>
+          <a:xfrm>
+            <a:off x="1097280" y="6400800"/>
+            <a:ext cx="3657600" cy="274320"/>
+          </a:xfrm>
+          <a:prstGeom prst="rect">
+            <a:avLst/>
+          </a:prstGeom>
+          <a:noFill/>
+        </p:spPr>
+        <p:txBody>
+          <a:bodyPr wrap="none">
+            <a:spAutoFit/>
+          </a:bodyPr>
+          <a:lstStyle/>
+          <a:p>
+            <a:pPr>
+              <a:defRPr sz="900">
+                <a:solidFill>
+                  <a:srgbClr val="9A9690"/>
+                </a:solidFill>
+                <a:latin typeface="Calibri"/>
+              </a:defRPr>
+            </a:pPr>
+            <a:r>
+              <a:t>parachute.computer</a:t>
+            </a:r>
+          </a:p>
+        </p:txBody>
+      </p:sp>
+      <p:sp>
+        <p:nvSpPr>
+          <p:cNvPr id="4" name="TextBox 3"/>
           <p:cNvSpPr txBox="1"/>
           <p:nvPr/>
         </p:nvSpPr>
@@ -7384,7 +9303,7 @@
       </p:sp>
       <p:sp>
         <p:nvSpPr>
-          <p:cNvPr id="3" name="TextBox 2"/>
+          <p:cNvPr id="5" name="TextBox 4"/>
           <p:cNvSpPr txBox="1"/>
           <p:nvPr/>
         </p:nvSpPr>
@@ -7433,14 +9352,59 @@
       </p:sp>
       <p:sp>
         <p:nvSpPr>
-          <p:cNvPr id="4" name="TextBox 3"/>
+          <p:cNvPr id="6" name="Rounded Rectangle 5"/>
+          <p:cNvSpPr/>
+          <p:nvPr/>
+        </p:nvSpPr>
+        <p:spPr>
+          <a:xfrm>
+            <a:off x="914400" y="3017520"/>
+            <a:ext cx="5486400" cy="2011680"/>
+          </a:xfrm>
+          <a:prstGeom prst="roundRect">
+            <a:avLst/>
+          </a:prstGeom>
+          <a:solidFill>
+            <a:srgbClr val="FFFFFF"/>
+          </a:solidFill>
+          <a:ln w="12700">
+            <a:solidFill>
+              <a:srgbClr val="E4E0D8"/>
+            </a:solidFill>
+          </a:ln>
+        </p:spPr>
+        <p:style>
+          <a:lnRef idx="1">
+            <a:schemeClr val="accent1"/>
+          </a:lnRef>
+          <a:fillRef idx="3">
+            <a:schemeClr val="accent1"/>
+          </a:fillRef>
+          <a:effectRef idx="2">
+            <a:schemeClr val="accent1"/>
+          </a:effectRef>
+          <a:fontRef idx="minor">
+            <a:schemeClr val="lt1"/>
+          </a:fontRef>
+        </p:style>
+        <p:txBody>
+          <a:bodyPr rtlCol="0" anchor="ctr"/>
+          <a:lstStyle/>
+          <a:p>
+            <a:pPr algn="ctr"/>
+          </a:p>
+        </p:txBody>
+      </p:sp>
+      <p:sp>
+        <p:nvSpPr>
+          <p:cNvPr id="7" name="TextBox 6"/>
           <p:cNvSpPr txBox="1"/>
           <p:nvPr/>
         </p:nvSpPr>
         <p:spPr>
           <a:xfrm>
-            <a:off x="1097280" y="3200400"/>
-            <a:ext cx="2286000" cy="365760"/>
+            <a:off x="1280160" y="3246120"/>
+            <a:ext cx="2011680" cy="365760"/>
           </a:xfrm>
           <a:prstGeom prst="rect">
             <a:avLst/>
@@ -7463,7 +9427,7 @@
               <a:spcAft>
                 <a:spcPts val="0"/>
               </a:spcAft>
-              <a:defRPr sz="1400" b="0">
+              <a:defRPr sz="1300" b="0">
                 <a:solidFill>
                   <a:srgbClr val="9A9690"/>
                 </a:solidFill>
@@ -7478,14 +9442,14 @@
       </p:sp>
       <p:sp>
         <p:nvSpPr>
-          <p:cNvPr id="5" name="TextBox 4"/>
+          <p:cNvPr id="8" name="TextBox 7"/>
           <p:cNvSpPr txBox="1"/>
           <p:nvPr/>
         </p:nvSpPr>
         <p:spPr>
           <a:xfrm>
-            <a:off x="3474720" y="3200400"/>
-            <a:ext cx="6400800" cy="365760"/>
+            <a:off x="3291840" y="3246120"/>
+            <a:ext cx="2926080" cy="365760"/>
           </a:xfrm>
           <a:prstGeom prst="rect">
             <a:avLst/>
@@ -7508,7 +9472,7 @@
               <a:spcAft>
                 <a:spcPts val="0"/>
               </a:spcAft>
-              <a:defRPr sz="2000" b="0">
+              <a:defRPr sz="1600" b="0">
                 <a:solidFill>
                   <a:srgbClr val="2C2A26"/>
                 </a:solidFill>
@@ -7523,14 +9487,14 @@
       </p:sp>
       <p:sp>
         <p:nvSpPr>
-          <p:cNvPr id="6" name="TextBox 5"/>
+          <p:cNvPr id="9" name="TextBox 8"/>
           <p:cNvSpPr txBox="1"/>
           <p:nvPr/>
         </p:nvSpPr>
         <p:spPr>
           <a:xfrm>
-            <a:off x="1097280" y="3703320"/>
-            <a:ext cx="2286000" cy="365760"/>
+            <a:off x="1280160" y="3749040"/>
+            <a:ext cx="2011680" cy="365760"/>
           </a:xfrm>
           <a:prstGeom prst="rect">
             <a:avLst/>
@@ -7553,7 +9517,7 @@
               <a:spcAft>
                 <a:spcPts val="0"/>
               </a:spcAft>
-              <a:defRPr sz="1400" b="0">
+              <a:defRPr sz="1300" b="0">
                 <a:solidFill>
                   <a:srgbClr val="9A9690"/>
                 </a:solidFill>
@@ -7568,14 +9532,14 @@
       </p:sp>
       <p:sp>
         <p:nvSpPr>
-          <p:cNvPr id="7" name="TextBox 6"/>
+          <p:cNvPr id="10" name="TextBox 9"/>
           <p:cNvSpPr txBox="1"/>
           <p:nvPr/>
         </p:nvSpPr>
         <p:spPr>
           <a:xfrm>
-            <a:off x="3474720" y="3703320"/>
-            <a:ext cx="6400800" cy="365760"/>
+            <a:off x="3291840" y="3749040"/>
+            <a:ext cx="2926080" cy="365760"/>
           </a:xfrm>
           <a:prstGeom prst="rect">
             <a:avLst/>
@@ -7598,7 +9562,7 @@
               <a:spcAft>
                 <a:spcPts val="0"/>
               </a:spcAft>
-              <a:defRPr sz="2000" b="0">
+              <a:defRPr sz="1600" b="0">
                 <a:solidFill>
                   <a:srgbClr val="2C2A26"/>
                 </a:solidFill>
@@ -7613,14 +9577,14 @@
       </p:sp>
       <p:sp>
         <p:nvSpPr>
-          <p:cNvPr id="8" name="TextBox 7"/>
+          <p:cNvPr id="11" name="TextBox 10"/>
           <p:cNvSpPr txBox="1"/>
           <p:nvPr/>
         </p:nvSpPr>
         <p:spPr>
           <a:xfrm>
-            <a:off x="1097280" y="4206240"/>
-            <a:ext cx="2286000" cy="365760"/>
+            <a:off x="1280160" y="4251960"/>
+            <a:ext cx="2011680" cy="365760"/>
           </a:xfrm>
           <a:prstGeom prst="rect">
             <a:avLst/>
@@ -7643,7 +9607,7 @@
               <a:spcAft>
                 <a:spcPts val="0"/>
               </a:spcAft>
-              <a:defRPr sz="1400" b="0">
+              <a:defRPr sz="1300" b="0">
                 <a:solidFill>
                   <a:srgbClr val="9A9690"/>
                 </a:solidFill>
@@ -7658,14 +9622,14 @@
       </p:sp>
       <p:sp>
         <p:nvSpPr>
-          <p:cNvPr id="9" name="TextBox 8"/>
+          <p:cNvPr id="12" name="TextBox 11"/>
           <p:cNvSpPr txBox="1"/>
           <p:nvPr/>
         </p:nvSpPr>
         <p:spPr>
           <a:xfrm>
-            <a:off x="3474720" y="4206240"/>
-            <a:ext cx="6400800" cy="365760"/>
+            <a:off x="3291840" y="4251960"/>
+            <a:ext cx="2926080" cy="365760"/>
           </a:xfrm>
           <a:prstGeom prst="rect">
             <a:avLst/>
@@ -7688,7 +9652,7 @@
               <a:spcAft>
                 <a:spcPts val="0"/>
               </a:spcAft>
-              <a:defRPr sz="2000" b="0">
+              <a:defRPr sz="1600" b="0">
                 <a:solidFill>
                   <a:srgbClr val="2C2A26"/>
                 </a:solidFill>
@@ -7703,14 +9667,14 @@
       </p:sp>
       <p:sp>
         <p:nvSpPr>
-          <p:cNvPr id="10" name="TextBox 9"/>
+          <p:cNvPr id="13" name="TextBox 12"/>
           <p:cNvSpPr txBox="1"/>
           <p:nvPr/>
         </p:nvSpPr>
         <p:spPr>
           <a:xfrm>
-            <a:off x="1097280" y="5029200"/>
-            <a:ext cx="9144000" cy="1097280"/>
+            <a:off x="1097280" y="5303520"/>
+            <a:ext cx="9144000" cy="914400"/>
           </a:xfrm>
           <a:prstGeom prst="rect">
             <a:avLst/>
@@ -7752,14 +9716,14 @@
       </p:sp>
       <p:sp>
         <p:nvSpPr>
-          <p:cNvPr id="11" name="TextBox 10"/>
+          <p:cNvPr id="14" name="TextBox 13"/>
           <p:cNvSpPr txBox="1"/>
           <p:nvPr/>
         </p:nvSpPr>
         <p:spPr>
           <a:xfrm>
-            <a:off x="1097280" y="5943600"/>
-            <a:ext cx="9144000" cy="457200"/>
+            <a:off x="1097280" y="6126480"/>
+            <a:ext cx="9144000" cy="365760"/>
           </a:xfrm>
           <a:prstGeom prst="rect">
             <a:avLst/>
@@ -7782,7 +9746,7 @@
               <a:spcAft>
                 <a:spcPts val="0"/>
               </a:spcAft>
-              <a:defRPr sz="1300" b="0">
+              <a:defRPr sz="1200" b="0">
                 <a:solidFill>
                   <a:srgbClr val="9A9690"/>
                 </a:solidFill>
@@ -7791,51 +9755,6 @@
             </a:pPr>
             <a:r>
               <a:t>Aaron Gabriel Neyer  ·  aaron@parachute.computer  ·  Boulder, CO</a:t>
-            </a:r>
-          </a:p>
-        </p:txBody>
-      </p:sp>
-      <p:sp>
-        <p:nvSpPr>
-          <p:cNvPr id="12" name="TextBox 11"/>
-          <p:cNvSpPr txBox="1"/>
-          <p:nvPr/>
-        </p:nvSpPr>
-        <p:spPr>
-          <a:xfrm>
-            <a:off x="1097280" y="6309360"/>
-            <a:ext cx="9144000" cy="365760"/>
-          </a:xfrm>
-          <a:prstGeom prst="rect">
-            <a:avLst/>
-          </a:prstGeom>
-          <a:noFill/>
-        </p:spPr>
-        <p:txBody>
-          <a:bodyPr wrap="square">
-            <a:spAutoFit/>
-          </a:bodyPr>
-          <a:lstStyle/>
-          <a:p>
-            <a:pPr algn="l">
-              <a:lnSpc>
-                <a:spcPct val="120000"/>
-              </a:lnSpc>
-              <a:spcBef>
-                <a:spcPts val="0"/>
-              </a:spcBef>
-              <a:spcAft>
-                <a:spcPts val="0"/>
-              </a:spcAft>
-              <a:defRPr sz="1200" b="0">
-                <a:solidFill>
-                  <a:srgbClr val="9A9690"/>
-                </a:solidFill>
-                <a:latin typeface="Calibri"/>
-              </a:defRPr>
-            </a:pPr>
-            <a:r>
-              <a:t>parachute.computer  ·  github.com/OpenParachutePBC</a:t>
             </a:r>
           </a:p>
         </p:txBody>

--- a/nvc-pitch-deck.pptx
+++ b/nvc-pitch-deck.pptx
@@ -14,8 +14,6 @@
     <p:sldId id="262" r:id="rId13"/>
     <p:sldId id="263" r:id="rId14"/>
     <p:sldId id="264" r:id="rId15"/>
-    <p:sldId id="265" r:id="rId16"/>
-    <p:sldId id="266" r:id="rId17"/>
   </p:sldIdLst>
   <p:sldSz cx="12191695" cy="6858000" type="screen4x3"/>
   <p:notesSz cx="6858000" cy="9144000"/>
@@ -3108,13 +3106,92 @@
       <p:grpSpPr/>
       <p:sp>
         <p:nvSpPr>
-          <p:cNvPr id="2" name="TextBox 1"/>
+          <p:cNvPr id="2" name="Rectangle 1"/>
+          <p:cNvSpPr/>
+          <p:nvPr/>
+        </p:nvSpPr>
+        <p:spPr>
+          <a:xfrm>
+            <a:off x="0" y="0"/>
+            <a:ext cx="12191695" cy="54864"/>
+          </a:xfrm>
+          <a:prstGeom prst="rect">
+            <a:avLst/>
+          </a:prstGeom>
+          <a:solidFill>
+            <a:srgbClr val="4A7C59"/>
+          </a:solidFill>
+          <a:ln>
+            <a:noFill/>
+          </a:ln>
+        </p:spPr>
+        <p:style>
+          <a:lnRef idx="1">
+            <a:schemeClr val="accent1"/>
+          </a:lnRef>
+          <a:fillRef idx="3">
+            <a:schemeClr val="accent1"/>
+          </a:fillRef>
+          <a:effectRef idx="2">
+            <a:schemeClr val="accent1"/>
+          </a:effectRef>
+          <a:fontRef idx="minor">
+            <a:schemeClr val="lt1"/>
+          </a:fontRef>
+        </p:style>
+        <p:txBody>
+          <a:bodyPr rtlCol="0" anchor="ctr"/>
+          <a:lstStyle/>
+          <a:p>
+            <a:pPr algn="ctr"/>
+          </a:p>
+        </p:txBody>
+      </p:sp>
+      <p:sp>
+        <p:nvSpPr>
+          <p:cNvPr id="3" name="TextBox 2"/>
           <p:cNvSpPr txBox="1"/>
           <p:nvPr/>
         </p:nvSpPr>
         <p:spPr>
           <a:xfrm>
-            <a:off x="1097280" y="731520"/>
+            <a:off x="1097280" y="6400800"/>
+            <a:ext cx="3657600" cy="274320"/>
+          </a:xfrm>
+          <a:prstGeom prst="rect">
+            <a:avLst/>
+          </a:prstGeom>
+          <a:noFill/>
+        </p:spPr>
+        <p:txBody>
+          <a:bodyPr wrap="none">
+            <a:spAutoFit/>
+          </a:bodyPr>
+          <a:lstStyle/>
+          <a:p>
+            <a:pPr>
+              <a:defRPr sz="900">
+                <a:solidFill>
+                  <a:srgbClr val="9A9690"/>
+                </a:solidFill>
+                <a:latin typeface="Calibri"/>
+              </a:defRPr>
+            </a:pPr>
+            <a:r>
+              <a:t>parachute.computer</a:t>
+            </a:r>
+          </a:p>
+        </p:txBody>
+      </p:sp>
+      <p:sp>
+        <p:nvSpPr>
+          <p:cNvPr id="4" name="TextBox 3"/>
+          <p:cNvSpPr txBox="1"/>
+          <p:nvPr/>
+        </p:nvSpPr>
+        <p:spPr>
+          <a:xfrm>
+            <a:off x="1097280" y="1097280"/>
             <a:ext cx="3657600" cy="365760"/>
           </a:xfrm>
           <a:prstGeom prst="rect">
@@ -3146,21 +3223,21 @@
               </a:defRPr>
             </a:pPr>
             <a:r>
-              <a:t>OPEN PARACHUTE, PBC</a:t>
-            </a:r>
-          </a:p>
-        </p:txBody>
-      </p:sp>
-      <p:sp>
-        <p:nvSpPr>
-          <p:cNvPr id="3" name="TextBox 2"/>
+              <a:t>THE LANDSCAPE</a:t>
+            </a:r>
+          </a:p>
+        </p:txBody>
+      </p:sp>
+      <p:sp>
+        <p:nvSpPr>
+          <p:cNvPr id="5" name="TextBox 4"/>
           <p:cNvSpPr txBox="1"/>
           <p:nvPr/>
         </p:nvSpPr>
         <p:spPr>
           <a:xfrm>
-            <a:off x="1097280" y="1828800"/>
-            <a:ext cx="9144000" cy="2286000"/>
+            <a:off x="1097280" y="1554480"/>
+            <a:ext cx="9144000" cy="1371600"/>
           </a:xfrm>
           <a:prstGeom prst="rect">
             <a:avLst/>
@@ -3175,7 +3252,7 @@
           <a:p>
             <a:pPr algn="l">
               <a:lnSpc>
-                <a:spcPct val="112000"/>
+                <a:spcPct val="105000"/>
               </a:lnSpc>
               <a:spcBef>
                 <a:spcPts val="0"/>
@@ -3183,7 +3260,7 @@
               <a:spcAft>
                 <a:spcPts val="0"/>
               </a:spcAft>
-              <a:defRPr sz="4800" b="0">
+              <a:defRPr sz="4000" b="0">
                 <a:solidFill>
                   <a:srgbClr val="2C2A26"/>
                 </a:solidFill>
@@ -3191,29 +3268,25 @@
               </a:defRPr>
             </a:pPr>
             <a:r>
-              <a:t>Technology should help us</a:t>
+              <a:t>Everyone is racing to build</a:t>
             </a:r>
             <a:br/>
             <a:r>
-              <a:t>live fully — not demand</a:t>
-            </a:r>
-            <a:br/>
-            <a:r>
-              <a:t>we stop living to use it.</a:t>
-            </a:r>
-          </a:p>
-        </p:txBody>
-      </p:sp>
-      <p:sp>
-        <p:nvSpPr>
-          <p:cNvPr id="4" name="TextBox 3"/>
+              <a:t>your AI agent.</a:t>
+            </a:r>
+          </a:p>
+        </p:txBody>
+      </p:sp>
+      <p:sp>
+        <p:nvSpPr>
+          <p:cNvPr id="6" name="TextBox 5"/>
           <p:cNvSpPr txBox="1"/>
           <p:nvPr/>
         </p:nvSpPr>
         <p:spPr>
           <a:xfrm>
-            <a:off x="1097280" y="4389120"/>
-            <a:ext cx="7315200" cy="914400"/>
+            <a:off x="1097280" y="3200400"/>
+            <a:ext cx="9144000" cy="914400"/>
           </a:xfrm>
           <a:prstGeom prst="rect">
             <a:avLst/>
@@ -3236,7 +3309,7 @@
               <a:spcAft>
                 <a:spcPts val="0"/>
               </a:spcAft>
-              <a:defRPr sz="2000" b="0">
+              <a:defRPr sz="1800" b="0">
                 <a:solidFill>
                   <a:srgbClr val="6B6860"/>
                 </a:solidFill>
@@ -3244,33 +3317,25 @@
               </a:defRPr>
             </a:pPr>
             <a:r>
-              <a:t>I want to hike up a mountain, share my ideas as I walk,</a:t>
+              <a:t>OpenClaw. Claude Cowork. ZoComputer. Perplexity Computer. Manus.</a:t>
             </a:r>
             <a:br/>
             <a:r>
-              <a:t>and come back down to a working app.</a:t>
-            </a:r>
-            <a:br/>
-            <a:r>
-              <a:t>But I also want to hold my nephew. Be outside. Live a full life.</a:t>
-            </a:r>
-            <a:br/>
-            <a:r>
-              <a:t>We shouldn't have to choose.</a:t>
-            </a:r>
-          </a:p>
-        </p:txBody>
-      </p:sp>
-      <p:sp>
-        <p:nvSpPr>
-          <p:cNvPr id="5" name="TextBox 4"/>
+              <a:t>Over 100 million people already pay $20+/month for AI.</a:t>
+            </a:r>
+          </a:p>
+        </p:txBody>
+      </p:sp>
+      <p:sp>
+        <p:nvSpPr>
+          <p:cNvPr id="7" name="TextBox 6"/>
           <p:cNvSpPr txBox="1"/>
           <p:nvPr/>
         </p:nvSpPr>
         <p:spPr>
           <a:xfrm>
-            <a:off x="1097280" y="5669280"/>
-            <a:ext cx="9144000" cy="457200"/>
+            <a:off x="1097280" y="4572000"/>
+            <a:ext cx="2743200" cy="1097280"/>
           </a:xfrm>
           <a:prstGeom prst="rect">
             <a:avLst/>
@@ -3293,29 +3358,74 @@
               <a:spcAft>
                 <a:spcPts val="0"/>
               </a:spcAft>
-              <a:defRPr sz="1300" b="0">
-                <a:solidFill>
-                  <a:srgbClr val="9A9690"/>
+              <a:defRPr sz="6400" b="0">
+                <a:solidFill>
+                  <a:srgbClr val="4A7C59"/>
+                </a:solidFill>
+                <a:latin typeface="Georgia"/>
+              </a:defRPr>
+            </a:pPr>
+            <a:r>
+              <a:t>$50B+</a:t>
+            </a:r>
+          </a:p>
+        </p:txBody>
+      </p:sp>
+      <p:sp>
+        <p:nvSpPr>
+          <p:cNvPr id="8" name="TextBox 7"/>
+          <p:cNvSpPr txBox="1"/>
+          <p:nvPr/>
+        </p:nvSpPr>
+        <p:spPr>
+          <a:xfrm>
+            <a:off x="4114800" y="4800600"/>
+            <a:ext cx="4572000" cy="731520"/>
+          </a:xfrm>
+          <a:prstGeom prst="rect">
+            <a:avLst/>
+          </a:prstGeom>
+          <a:noFill/>
+        </p:spPr>
+        <p:txBody>
+          <a:bodyPr wrap="square">
+            <a:spAutoFit/>
+          </a:bodyPr>
+          <a:lstStyle/>
+          <a:p>
+            <a:pPr algn="l">
+              <a:lnSpc>
+                <a:spcPct val="140000"/>
+              </a:lnSpc>
+              <a:spcBef>
+                <a:spcPts val="0"/>
+              </a:spcBef>
+              <a:spcAft>
+                <a:spcPts val="0"/>
+              </a:spcAft>
+              <a:defRPr sz="1600" b="0">
+                <a:solidFill>
+                  <a:srgbClr val="6B6860"/>
                 </a:solidFill>
                 <a:latin typeface="Calibri"/>
               </a:defRPr>
             </a:pPr>
             <a:r>
-              <a:t>MA Ecopsychology · MS Creative Technology &amp; Design (CU ATLAS) · Founding engineer ×2 · Ex-Google · 10+ years full stack</a:t>
-            </a:r>
-          </a:p>
-        </p:txBody>
-      </p:sp>
-      <p:sp>
-        <p:nvSpPr>
-          <p:cNvPr id="6" name="TextBox 5"/>
+              <a:t>agentic AI market by 2030 · 44% CAGR</a:t>
+            </a:r>
+          </a:p>
+        </p:txBody>
+      </p:sp>
+      <p:sp>
+        <p:nvSpPr>
+          <p:cNvPr id="9" name="TextBox 8"/>
           <p:cNvSpPr txBox="1"/>
           <p:nvPr/>
         </p:nvSpPr>
         <p:spPr>
           <a:xfrm>
-            <a:off x="1097280" y="6126480"/>
-            <a:ext cx="5486400" cy="365760"/>
+            <a:off x="1097280" y="5760720"/>
+            <a:ext cx="9144000" cy="548640"/>
           </a:xfrm>
           <a:prstGeom prst="rect">
             <a:avLst/>
@@ -3338,1555 +3448,15 @@
               <a:spcAft>
                 <a:spcPts val="0"/>
               </a:spcAft>
-              <a:defRPr sz="1200" b="0">
-                <a:solidFill>
-                  <a:srgbClr val="9A9690"/>
-                </a:solidFill>
-                <a:latin typeface="Calibri"/>
+              <a:defRPr sz="2200" b="0">
+                <a:solidFill>
+                  <a:srgbClr val="2C2A26"/>
+                </a:solidFill>
+                <a:latin typeface="Georgia"/>
               </a:defRPr>
             </a:pPr>
             <a:r>
-              <a:t>Aaron Gabriel Neyer  ·  aaron@parachute.computer  ·  Boulder, CO</a:t>
-            </a:r>
-          </a:p>
-        </p:txBody>
-      </p:sp>
-    </p:spTree>
-  </p:cSld>
-  <p:clrMapOvr>
-    <a:masterClrMapping/>
-  </p:clrMapOvr>
-</p:sld>
-</file>
-
-<file path=ppt/slides/slide10.xml><?xml version="1.0" encoding="utf-8"?>
-<p:sld xmlns:a="http://schemas.openxmlformats.org/drawingml/2006/main" xmlns:p="http://schemas.openxmlformats.org/presentationml/2006/main" xmlns:r="http://schemas.openxmlformats.org/officeDocument/2006/relationships">
-  <p:cSld>
-    <p:bg>
-      <p:bgPr>
-        <a:solidFill>
-          <a:srgbClr val="FAF8F4"/>
-        </a:solidFill>
-        <a:effectLst/>
-      </p:bgPr>
-    </p:bg>
-    <p:spTree>
-      <p:nvGrpSpPr>
-        <p:cNvPr id="1" name=""/>
-        <p:cNvGrpSpPr/>
-        <p:nvPr/>
-      </p:nvGrpSpPr>
-      <p:grpSpPr/>
-      <p:sp>
-        <p:nvSpPr>
-          <p:cNvPr id="2" name="TextBox 1"/>
-          <p:cNvSpPr txBox="1"/>
-          <p:nvPr/>
-        </p:nvSpPr>
-        <p:spPr>
-          <a:xfrm>
-            <a:off x="1097280" y="1097280"/>
-            <a:ext cx="3657600" cy="365760"/>
-          </a:xfrm>
-          <a:prstGeom prst="rect">
-            <a:avLst/>
-          </a:prstGeom>
-          <a:noFill/>
-        </p:spPr>
-        <p:txBody>
-          <a:bodyPr wrap="square">
-            <a:spAutoFit/>
-          </a:bodyPr>
-          <a:lstStyle/>
-          <a:p>
-            <a:pPr algn="l">
-              <a:lnSpc>
-                <a:spcPct val="120000"/>
-              </a:lnSpc>
-              <a:spcBef>
-                <a:spcPts val="0"/>
-              </a:spcBef>
-              <a:spcAft>
-                <a:spcPts val="0"/>
-              </a:spcAft>
-              <a:defRPr sz="1100" b="1">
-                <a:solidFill>
-                  <a:srgbClr val="4A7C59"/>
-                </a:solidFill>
-                <a:latin typeface="Calibri"/>
-              </a:defRPr>
-            </a:pPr>
-            <a:r>
-              <a:t>FINANCIAL PROJECTIONS</a:t>
-            </a:r>
-          </a:p>
-        </p:txBody>
-      </p:sp>
-      <p:sp>
-        <p:nvSpPr>
-          <p:cNvPr id="3" name="TextBox 2"/>
-          <p:cNvSpPr txBox="1"/>
-          <p:nvPr/>
-        </p:nvSpPr>
-        <p:spPr>
-          <a:xfrm>
-            <a:off x="1097280" y="1554480"/>
-            <a:ext cx="9144000" cy="1371600"/>
-          </a:xfrm>
-          <a:prstGeom prst="rect">
-            <a:avLst/>
-          </a:prstGeom>
-          <a:noFill/>
-        </p:spPr>
-        <p:txBody>
-          <a:bodyPr wrap="square">
-            <a:spAutoFit/>
-          </a:bodyPr>
-          <a:lstStyle/>
-          <a:p>
-            <a:pPr algn="l">
-              <a:lnSpc>
-                <a:spcPct val="105000"/>
-              </a:lnSpc>
-              <a:spcBef>
-                <a:spcPts val="0"/>
-              </a:spcBef>
-              <a:spcAft>
-                <a:spcPts val="0"/>
-              </a:spcAft>
-              <a:defRPr sz="4000" b="0">
-                <a:solidFill>
-                  <a:srgbClr val="2C2A26"/>
-                </a:solidFill>
-                <a:latin typeface="Georgia"/>
-              </a:defRPr>
-            </a:pPr>
-            <a:r>
-              <a:t>Profitable by year three.</a:t>
-            </a:r>
-          </a:p>
-        </p:txBody>
-      </p:sp>
-      <p:graphicFrame>
-        <p:nvGraphicFramePr>
-          <p:cNvPr id="4" name="Table 3"/>
-          <p:cNvGraphicFramePr>
-            <a:graphicFrameLocks noGrp="1"/>
-          </p:cNvGraphicFramePr>
-          <p:nvPr/>
-        </p:nvGraphicFramePr>
-        <p:xfrm>
-          <a:off x="1371600" y="3017520"/>
-          <a:ext cx="7498080" cy="2926080"/>
-        </p:xfrm>
-        <a:graphic>
-          <a:graphicData uri="http://schemas.openxmlformats.org/drawingml/2006/table">
-            <a:tbl>
-              <a:tblPr firstRow="1" bandRow="1">
-                <a:tableStyleId>{5C22544A-7EE6-4342-B048-85BDC9FD1C3A}</a:tableStyleId>
-              </a:tblPr>
-              <a:tblGrid>
-                <a:gridCol w="2560320"/>
-                <a:gridCol w="1645920"/>
-                <a:gridCol w="1645920"/>
-                <a:gridCol w="1645920"/>
-              </a:tblGrid>
-              <a:tr h="365760">
-                <a:tc>
-                  <a:txBody>
-                    <a:bodyPr/>
-                    <a:lstStyle/>
-                    <a:p>
-                      <a:pPr algn="l">
-                        <a:defRPr sz="1200" b="1">
-                          <a:solidFill>
-                            <a:srgbClr val="9A9690"/>
-                          </a:solidFill>
-                          <a:latin typeface="Calibri"/>
-                        </a:defRPr>
-                      </a:pPr>
-                    </a:p>
-                  </a:txBody>
-                  <a:tcPr>
-                    <a:solidFill>
-                      <a:srgbClr val="F3F0EA"/>
-                    </a:solidFill>
-                  </a:tcPr>
-                </a:tc>
-                <a:tc>
-                  <a:txBody>
-                    <a:bodyPr/>
-                    <a:lstStyle/>
-                    <a:p>
-                      <a:pPr algn="ctr">
-                        <a:defRPr sz="1200" b="1">
-                          <a:solidFill>
-                            <a:srgbClr val="9A9690"/>
-                          </a:solidFill>
-                          <a:latin typeface="Calibri"/>
-                        </a:defRPr>
-                      </a:pPr>
-                      <a:r>
-                        <a:t>2026</a:t>
-                      </a:r>
-                    </a:p>
-                  </a:txBody>
-                  <a:tcPr>
-                    <a:solidFill>
-                      <a:srgbClr val="F3F0EA"/>
-                    </a:solidFill>
-                  </a:tcPr>
-                </a:tc>
-                <a:tc>
-                  <a:txBody>
-                    <a:bodyPr/>
-                    <a:lstStyle/>
-                    <a:p>
-                      <a:pPr algn="ctr">
-                        <a:defRPr sz="1200" b="1">
-                          <a:solidFill>
-                            <a:srgbClr val="9A9690"/>
-                          </a:solidFill>
-                          <a:latin typeface="Calibri"/>
-                        </a:defRPr>
-                      </a:pPr>
-                      <a:r>
-                        <a:t>2027</a:t>
-                      </a:r>
-                    </a:p>
-                  </a:txBody>
-                  <a:tcPr>
-                    <a:solidFill>
-                      <a:srgbClr val="F3F0EA"/>
-                    </a:solidFill>
-                  </a:tcPr>
-                </a:tc>
-                <a:tc>
-                  <a:txBody>
-                    <a:bodyPr/>
-                    <a:lstStyle/>
-                    <a:p>
-                      <a:pPr algn="ctr">
-                        <a:defRPr sz="1200" b="1">
-                          <a:solidFill>
-                            <a:srgbClr val="9A9690"/>
-                          </a:solidFill>
-                          <a:latin typeface="Calibri"/>
-                        </a:defRPr>
-                      </a:pPr>
-                      <a:r>
-                        <a:t>2028</a:t>
-                      </a:r>
-                    </a:p>
-                  </a:txBody>
-                  <a:tcPr>
-                    <a:solidFill>
-                      <a:srgbClr val="F3F0EA"/>
-                    </a:solidFill>
-                  </a:tcPr>
-                </a:tc>
-              </a:tr>
-              <a:tr h="365760">
-                <a:tc>
-                  <a:txBody>
-                    <a:bodyPr/>
-                    <a:lstStyle/>
-                    <a:p>
-                      <a:pPr algn="l">
-                        <a:defRPr sz="1200" b="1">
-                          <a:solidFill>
-                            <a:srgbClr val="2C2A26"/>
-                          </a:solidFill>
-                          <a:latin typeface="Calibri"/>
-                        </a:defRPr>
-                      </a:pPr>
-                      <a:r>
-                        <a:t>Free + sync users</a:t>
-                      </a:r>
-                    </a:p>
-                  </a:txBody>
-                  <a:tcPr>
-                    <a:solidFill>
-                      <a:srgbClr val="FFFFFF"/>
-                    </a:solidFill>
-                  </a:tcPr>
-                </a:tc>
-                <a:tc>
-                  <a:txBody>
-                    <a:bodyPr/>
-                    <a:lstStyle/>
-                    <a:p>
-                      <a:pPr algn="ctr">
-                        <a:defRPr sz="1300">
-                          <a:solidFill>
-                            <a:srgbClr val="6B6860"/>
-                          </a:solidFill>
-                          <a:latin typeface="Calibri"/>
-                        </a:defRPr>
-                      </a:pPr>
-                      <a:r>
-                        <a:t>5,000</a:t>
-                      </a:r>
-                    </a:p>
-                  </a:txBody>
-                  <a:tcPr>
-                    <a:solidFill>
-                      <a:srgbClr val="FFFFFF"/>
-                    </a:solidFill>
-                  </a:tcPr>
-                </a:tc>
-                <a:tc>
-                  <a:txBody>
-                    <a:bodyPr/>
-                    <a:lstStyle/>
-                    <a:p>
-                      <a:pPr algn="ctr">
-                        <a:defRPr sz="1300">
-                          <a:solidFill>
-                            <a:srgbClr val="6B6860"/>
-                          </a:solidFill>
-                          <a:latin typeface="Calibri"/>
-                        </a:defRPr>
-                      </a:pPr>
-                      <a:r>
-                        <a:t>50,000</a:t>
-                      </a:r>
-                    </a:p>
-                  </a:txBody>
-                  <a:tcPr>
-                    <a:solidFill>
-                      <a:srgbClr val="FFFFFF"/>
-                    </a:solidFill>
-                  </a:tcPr>
-                </a:tc>
-                <a:tc>
-                  <a:txBody>
-                    <a:bodyPr/>
-                    <a:lstStyle/>
-                    <a:p>
-                      <a:pPr algn="ctr">
-                        <a:defRPr sz="1300">
-                          <a:solidFill>
-                            <a:srgbClr val="6B6860"/>
-                          </a:solidFill>
-                          <a:latin typeface="Calibri"/>
-                        </a:defRPr>
-                      </a:pPr>
-                      <a:r>
-                        <a:t>250,000</a:t>
-                      </a:r>
-                    </a:p>
-                  </a:txBody>
-                  <a:tcPr>
-                    <a:solidFill>
-                      <a:srgbClr val="FFFFFF"/>
-                    </a:solidFill>
-                  </a:tcPr>
-                </a:tc>
-              </a:tr>
-              <a:tr h="365760">
-                <a:tc>
-                  <a:txBody>
-                    <a:bodyPr/>
-                    <a:lstStyle/>
-                    <a:p>
-                      <a:pPr algn="l">
-                        <a:defRPr sz="1200" b="1">
-                          <a:solidFill>
-                            <a:srgbClr val="2C2A26"/>
-                          </a:solidFill>
-                          <a:latin typeface="Calibri"/>
-                        </a:defRPr>
-                      </a:pPr>
-                      <a:r>
-                        <a:t>Paid subscribers</a:t>
-                      </a:r>
-                    </a:p>
-                  </a:txBody>
-                  <a:tcPr>
-                    <a:solidFill>
-                      <a:srgbClr val="FAF8F4"/>
-                    </a:solidFill>
-                  </a:tcPr>
-                </a:tc>
-                <a:tc>
-                  <a:txBody>
-                    <a:bodyPr/>
-                    <a:lstStyle/>
-                    <a:p>
-                      <a:pPr algn="ctr">
-                        <a:defRPr sz="1300">
-                          <a:solidFill>
-                            <a:srgbClr val="6B6860"/>
-                          </a:solidFill>
-                          <a:latin typeface="Calibri"/>
-                        </a:defRPr>
-                      </a:pPr>
-                      <a:r>
-                        <a:t>500</a:t>
-                      </a:r>
-                    </a:p>
-                  </a:txBody>
-                  <a:tcPr>
-                    <a:solidFill>
-                      <a:srgbClr val="FAF8F4"/>
-                    </a:solidFill>
-                  </a:tcPr>
-                </a:tc>
-                <a:tc>
-                  <a:txBody>
-                    <a:bodyPr/>
-                    <a:lstStyle/>
-                    <a:p>
-                      <a:pPr algn="ctr">
-                        <a:defRPr sz="1300">
-                          <a:solidFill>
-                            <a:srgbClr val="6B6860"/>
-                          </a:solidFill>
-                          <a:latin typeface="Calibri"/>
-                        </a:defRPr>
-                      </a:pPr>
-                      <a:r>
-                        <a:t>5,000</a:t>
-                      </a:r>
-                    </a:p>
-                  </a:txBody>
-                  <a:tcPr>
-                    <a:solidFill>
-                      <a:srgbClr val="FAF8F4"/>
-                    </a:solidFill>
-                  </a:tcPr>
-                </a:tc>
-                <a:tc>
-                  <a:txBody>
-                    <a:bodyPr/>
-                    <a:lstStyle/>
-                    <a:p>
-                      <a:pPr algn="ctr">
-                        <a:defRPr sz="1300">
-                          <a:solidFill>
-                            <a:srgbClr val="6B6860"/>
-                          </a:solidFill>
-                          <a:latin typeface="Calibri"/>
-                        </a:defRPr>
-                      </a:pPr>
-                      <a:r>
-                        <a:t>25,000</a:t>
-                      </a:r>
-                    </a:p>
-                  </a:txBody>
-                  <a:tcPr>
-                    <a:solidFill>
-                      <a:srgbClr val="FAF8F4"/>
-                    </a:solidFill>
-                  </a:tcPr>
-                </a:tc>
-              </a:tr>
-              <a:tr h="365760">
-                <a:tc>
-                  <a:txBody>
-                    <a:bodyPr/>
-                    <a:lstStyle/>
-                    <a:p>
-                      <a:pPr algn="l">
-                        <a:defRPr sz="1200" b="1">
-                          <a:solidFill>
-                            <a:srgbClr val="2C2A26"/>
-                          </a:solidFill>
-                          <a:latin typeface="Calibri"/>
-                        </a:defRPr>
-                      </a:pPr>
-                      <a:r>
-                        <a:t>Avg rev / subscriber</a:t>
-                      </a:r>
-                    </a:p>
-                  </a:txBody>
-                  <a:tcPr>
-                    <a:solidFill>
-                      <a:srgbClr val="FFFFFF"/>
-                    </a:solidFill>
-                  </a:tcPr>
-                </a:tc>
-                <a:tc>
-                  <a:txBody>
-                    <a:bodyPr/>
-                    <a:lstStyle/>
-                    <a:p>
-                      <a:pPr algn="ctr">
-                        <a:defRPr sz="1300">
-                          <a:solidFill>
-                            <a:srgbClr val="6B6860"/>
-                          </a:solidFill>
-                          <a:latin typeface="Calibri"/>
-                        </a:defRPr>
-                      </a:pPr>
-                      <a:r>
-                        <a:t>~$5/mo</a:t>
-                      </a:r>
-                    </a:p>
-                  </a:txBody>
-                  <a:tcPr>
-                    <a:solidFill>
-                      <a:srgbClr val="FFFFFF"/>
-                    </a:solidFill>
-                  </a:tcPr>
-                </a:tc>
-                <a:tc>
-                  <a:txBody>
-                    <a:bodyPr/>
-                    <a:lstStyle/>
-                    <a:p>
-                      <a:pPr algn="ctr">
-                        <a:defRPr sz="1300">
-                          <a:solidFill>
-                            <a:srgbClr val="6B6860"/>
-                          </a:solidFill>
-                          <a:latin typeface="Calibri"/>
-                        </a:defRPr>
-                      </a:pPr>
-                      <a:r>
-                        <a:t>~$7/mo</a:t>
-                      </a:r>
-                    </a:p>
-                  </a:txBody>
-                  <a:tcPr>
-                    <a:solidFill>
-                      <a:srgbClr val="FFFFFF"/>
-                    </a:solidFill>
-                  </a:tcPr>
-                </a:tc>
-                <a:tc>
-                  <a:txBody>
-                    <a:bodyPr/>
-                    <a:lstStyle/>
-                    <a:p>
-                      <a:pPr algn="ctr">
-                        <a:defRPr sz="1300">
-                          <a:solidFill>
-                            <a:srgbClr val="6B6860"/>
-                          </a:solidFill>
-                          <a:latin typeface="Calibri"/>
-                        </a:defRPr>
-                      </a:pPr>
-                      <a:r>
-                        <a:t>~$8/mo</a:t>
-                      </a:r>
-                    </a:p>
-                  </a:txBody>
-                  <a:tcPr>
-                    <a:solidFill>
-                      <a:srgbClr val="FFFFFF"/>
-                    </a:solidFill>
-                  </a:tcPr>
-                </a:tc>
-              </a:tr>
-              <a:tr h="365760">
-                <a:tc>
-                  <a:txBody>
-                    <a:bodyPr/>
-                    <a:lstStyle/>
-                    <a:p>
-                      <a:pPr algn="l">
-                        <a:defRPr sz="1200" b="1">
-                          <a:solidFill>
-                            <a:srgbClr val="2C2A26"/>
-                          </a:solidFill>
-                          <a:latin typeface="Calibri"/>
-                        </a:defRPr>
-                      </a:pPr>
-                      <a:r>
-                        <a:t>MRR (end of year)</a:t>
-                      </a:r>
-                    </a:p>
-                  </a:txBody>
-                  <a:tcPr>
-                    <a:solidFill>
-                      <a:srgbClr val="FAF8F4"/>
-                    </a:solidFill>
-                  </a:tcPr>
-                </a:tc>
-                <a:tc>
-                  <a:txBody>
-                    <a:bodyPr/>
-                    <a:lstStyle/>
-                    <a:p>
-                      <a:pPr algn="ctr">
-                        <a:defRPr sz="1300">
-                          <a:solidFill>
-                            <a:srgbClr val="6B6860"/>
-                          </a:solidFill>
-                          <a:latin typeface="Calibri"/>
-                        </a:defRPr>
-                      </a:pPr>
-                      <a:r>
-                        <a:t>~$2,500</a:t>
-                      </a:r>
-                    </a:p>
-                  </a:txBody>
-                  <a:tcPr>
-                    <a:solidFill>
-                      <a:srgbClr val="FAF8F4"/>
-                    </a:solidFill>
-                  </a:tcPr>
-                </a:tc>
-                <a:tc>
-                  <a:txBody>
-                    <a:bodyPr/>
-                    <a:lstStyle/>
-                    <a:p>
-                      <a:pPr algn="ctr">
-                        <a:defRPr sz="1300">
-                          <a:solidFill>
-                            <a:srgbClr val="6B6860"/>
-                          </a:solidFill>
-                          <a:latin typeface="Calibri"/>
-                        </a:defRPr>
-                      </a:pPr>
-                      <a:r>
-                        <a:t>~$35,000</a:t>
-                      </a:r>
-                    </a:p>
-                  </a:txBody>
-                  <a:tcPr>
-                    <a:solidFill>
-                      <a:srgbClr val="FAF8F4"/>
-                    </a:solidFill>
-                  </a:tcPr>
-                </a:tc>
-                <a:tc>
-                  <a:txBody>
-                    <a:bodyPr/>
-                    <a:lstStyle/>
-                    <a:p>
-                      <a:pPr algn="ctr">
-                        <a:defRPr sz="1300">
-                          <a:solidFill>
-                            <a:srgbClr val="6B6860"/>
-                          </a:solidFill>
-                          <a:latin typeface="Calibri"/>
-                        </a:defRPr>
-                      </a:pPr>
-                      <a:r>
-                        <a:t>~$200,000</a:t>
-                      </a:r>
-                    </a:p>
-                  </a:txBody>
-                  <a:tcPr>
-                    <a:solidFill>
-                      <a:srgbClr val="FAF8F4"/>
-                    </a:solidFill>
-                  </a:tcPr>
-                </a:tc>
-              </a:tr>
-              <a:tr h="365760">
-                <a:tc>
-                  <a:txBody>
-                    <a:bodyPr/>
-                    <a:lstStyle/>
-                    <a:p>
-                      <a:pPr algn="l">
-                        <a:defRPr sz="1200" b="1">
-                          <a:solidFill>
-                            <a:srgbClr val="2C2A26"/>
-                          </a:solidFill>
-                          <a:latin typeface="Calibri"/>
-                        </a:defRPr>
-                      </a:pPr>
-                      <a:r>
-                        <a:t>ARR (end of year)</a:t>
-                      </a:r>
-                    </a:p>
-                  </a:txBody>
-                  <a:tcPr>
-                    <a:solidFill>
-                      <a:srgbClr val="FFFFFF"/>
-                    </a:solidFill>
-                  </a:tcPr>
-                </a:tc>
-                <a:tc>
-                  <a:txBody>
-                    <a:bodyPr/>
-                    <a:lstStyle/>
-                    <a:p>
-                      <a:pPr algn="ctr">
-                        <a:defRPr sz="1300" b="1">
-                          <a:solidFill>
-                            <a:srgbClr val="4A7C59"/>
-                          </a:solidFill>
-                          <a:latin typeface="Calibri"/>
-                        </a:defRPr>
-                      </a:pPr>
-                      <a:r>
-                        <a:t>~$30K</a:t>
-                      </a:r>
-                    </a:p>
-                  </a:txBody>
-                  <a:tcPr>
-                    <a:solidFill>
-                      <a:srgbClr val="FFFFFF"/>
-                    </a:solidFill>
-                  </a:tcPr>
-                </a:tc>
-                <a:tc>
-                  <a:txBody>
-                    <a:bodyPr/>
-                    <a:lstStyle/>
-                    <a:p>
-                      <a:pPr algn="ctr">
-                        <a:defRPr sz="1300" b="1">
-                          <a:solidFill>
-                            <a:srgbClr val="4A7C59"/>
-                          </a:solidFill>
-                          <a:latin typeface="Calibri"/>
-                        </a:defRPr>
-                      </a:pPr>
-                      <a:r>
-                        <a:t>~$420K</a:t>
-                      </a:r>
-                    </a:p>
-                  </a:txBody>
-                  <a:tcPr>
-                    <a:solidFill>
-                      <a:srgbClr val="FFFFFF"/>
-                    </a:solidFill>
-                  </a:tcPr>
-                </a:tc>
-                <a:tc>
-                  <a:txBody>
-                    <a:bodyPr/>
-                    <a:lstStyle/>
-                    <a:p>
-                      <a:pPr algn="ctr">
-                        <a:defRPr sz="1300" b="1">
-                          <a:solidFill>
-                            <a:srgbClr val="4A7C59"/>
-                          </a:solidFill>
-                          <a:latin typeface="Calibri"/>
-                        </a:defRPr>
-                      </a:pPr>
-                      <a:r>
-                        <a:t>~$2.4M</a:t>
-                      </a:r>
-                    </a:p>
-                  </a:txBody>
-                  <a:tcPr>
-                    <a:solidFill>
-                      <a:srgbClr val="FFFFFF"/>
-                    </a:solidFill>
-                  </a:tcPr>
-                </a:tc>
-              </a:tr>
-              <a:tr h="365760">
-                <a:tc>
-                  <a:txBody>
-                    <a:bodyPr/>
-                    <a:lstStyle/>
-                    <a:p>
-                      <a:pPr algn="l">
-                        <a:defRPr sz="1200" b="1">
-                          <a:solidFill>
-                            <a:srgbClr val="2C2A26"/>
-                          </a:solidFill>
-                          <a:latin typeface="Calibri"/>
-                        </a:defRPr>
-                      </a:pPr>
-                      <a:r>
-                        <a:t>Team (salaried)</a:t>
-                      </a:r>
-                    </a:p>
-                  </a:txBody>
-                  <a:tcPr>
-                    <a:solidFill>
-                      <a:srgbClr val="FAF8F4"/>
-                    </a:solidFill>
-                  </a:tcPr>
-                </a:tc>
-                <a:tc>
-                  <a:txBody>
-                    <a:bodyPr/>
-                    <a:lstStyle/>
-                    <a:p>
-                      <a:pPr algn="ctr">
-                        <a:defRPr sz="1300">
-                          <a:solidFill>
-                            <a:srgbClr val="6B6860"/>
-                          </a:solidFill>
-                          <a:latin typeface="Calibri"/>
-                        </a:defRPr>
-                      </a:pPr>
-                      <a:r>
-                        <a:t>3</a:t>
-                      </a:r>
-                    </a:p>
-                  </a:txBody>
-                  <a:tcPr>
-                    <a:solidFill>
-                      <a:srgbClr val="FAF8F4"/>
-                    </a:solidFill>
-                  </a:tcPr>
-                </a:tc>
-                <a:tc>
-                  <a:txBody>
-                    <a:bodyPr/>
-                    <a:lstStyle/>
-                    <a:p>
-                      <a:pPr algn="ctr">
-                        <a:defRPr sz="1300">
-                          <a:solidFill>
-                            <a:srgbClr val="6B6860"/>
-                          </a:solidFill>
-                          <a:latin typeface="Calibri"/>
-                        </a:defRPr>
-                      </a:pPr>
-                      <a:r>
-                        <a:t>5-6</a:t>
-                      </a:r>
-                    </a:p>
-                  </a:txBody>
-                  <a:tcPr>
-                    <a:solidFill>
-                      <a:srgbClr val="FAF8F4"/>
-                    </a:solidFill>
-                  </a:tcPr>
-                </a:tc>
-                <a:tc>
-                  <a:txBody>
-                    <a:bodyPr/>
-                    <a:lstStyle/>
-                    <a:p>
-                      <a:pPr algn="ctr">
-                        <a:defRPr sz="1300">
-                          <a:solidFill>
-                            <a:srgbClr val="6B6860"/>
-                          </a:solidFill>
-                          <a:latin typeface="Calibri"/>
-                        </a:defRPr>
-                      </a:pPr>
-                      <a:r>
-                        <a:t>9-10</a:t>
-                      </a:r>
-                    </a:p>
-                  </a:txBody>
-                  <a:tcPr>
-                    <a:solidFill>
-                      <a:srgbClr val="FAF8F4"/>
-                    </a:solidFill>
-                  </a:tcPr>
-                </a:tc>
-              </a:tr>
-              <a:tr h="365760">
-                <a:tc>
-                  <a:txBody>
-                    <a:bodyPr/>
-                    <a:lstStyle/>
-                    <a:p>
-                      <a:pPr algn="l">
-                        <a:defRPr sz="1200" b="1">
-                          <a:solidFill>
-                            <a:srgbClr val="2C2A26"/>
-                          </a:solidFill>
-                          <a:latin typeface="Calibri"/>
-                        </a:defRPr>
-                      </a:pPr>
-                      <a:r>
-                        <a:t>Operating costs</a:t>
-                      </a:r>
-                    </a:p>
-                  </a:txBody>
-                  <a:tcPr>
-                    <a:solidFill>
-                      <a:srgbClr val="FFFFFF"/>
-                    </a:solidFill>
-                  </a:tcPr>
-                </a:tc>
-                <a:tc>
-                  <a:txBody>
-                    <a:bodyPr/>
-                    <a:lstStyle/>
-                    <a:p>
-                      <a:pPr algn="ctr">
-                        <a:defRPr sz="1300">
-                          <a:solidFill>
-                            <a:srgbClr val="6B6860"/>
-                          </a:solidFill>
-                          <a:latin typeface="Calibri"/>
-                        </a:defRPr>
-                      </a:pPr>
-                      <a:r>
-                        <a:t>~$170K</a:t>
-                      </a:r>
-                    </a:p>
-                  </a:txBody>
-                  <a:tcPr>
-                    <a:solidFill>
-                      <a:srgbClr val="FFFFFF"/>
-                    </a:solidFill>
-                  </a:tcPr>
-                </a:tc>
-                <a:tc>
-                  <a:txBody>
-                    <a:bodyPr/>
-                    <a:lstStyle/>
-                    <a:p>
-                      <a:pPr algn="ctr">
-                        <a:defRPr sz="1300">
-                          <a:solidFill>
-                            <a:srgbClr val="6B6860"/>
-                          </a:solidFill>
-                          <a:latin typeface="Calibri"/>
-                        </a:defRPr>
-                      </a:pPr>
-                      <a:r>
-                        <a:t>~$550K</a:t>
-                      </a:r>
-                    </a:p>
-                  </a:txBody>
-                  <a:tcPr>
-                    <a:solidFill>
-                      <a:srgbClr val="FFFFFF"/>
-                    </a:solidFill>
-                  </a:tcPr>
-                </a:tc>
-                <a:tc>
-                  <a:txBody>
-                    <a:bodyPr/>
-                    <a:lstStyle/>
-                    <a:p>
-                      <a:pPr algn="ctr">
-                        <a:defRPr sz="1300">
-                          <a:solidFill>
-                            <a:srgbClr val="6B6860"/>
-                          </a:solidFill>
-                          <a:latin typeface="Calibri"/>
-                        </a:defRPr>
-                      </a:pPr>
-                      <a:r>
-                        <a:t>~$900K</a:t>
-                      </a:r>
-                    </a:p>
-                  </a:txBody>
-                  <a:tcPr>
-                    <a:solidFill>
-                      <a:srgbClr val="FFFFFF"/>
-                    </a:solidFill>
-                  </a:tcPr>
-                </a:tc>
-              </a:tr>
-            </a:tbl>
-          </a:graphicData>
-        </a:graphic>
-      </p:graphicFrame>
-      <p:sp>
-        <p:nvSpPr>
-          <p:cNvPr id="5" name="TextBox 4"/>
-          <p:cNvSpPr txBox="1"/>
-          <p:nvPr/>
-        </p:nvSpPr>
-        <p:spPr>
-          <a:xfrm>
-            <a:off x="1371600" y="6035040"/>
-            <a:ext cx="8229600" cy="457200"/>
-          </a:xfrm>
-          <a:prstGeom prst="rect">
-            <a:avLst/>
-          </a:prstGeom>
-          <a:noFill/>
-        </p:spPr>
-        <p:txBody>
-          <a:bodyPr wrap="square">
-            <a:spAutoFit/>
-          </a:bodyPr>
-          <a:lstStyle/>
-          <a:p>
-            <a:pPr algn="l">
-              <a:lnSpc>
-                <a:spcPct val="120000"/>
-              </a:lnSpc>
-              <a:spcBef>
-                <a:spcPts val="0"/>
-              </a:spcBef>
-              <a:spcAft>
-                <a:spcPts val="0"/>
-              </a:spcAft>
-              <a:defRPr sz="1400" b="0">
-                <a:solidFill>
-                  <a:srgbClr val="9A9690"/>
-                </a:solidFill>
-                <a:latin typeface="Calibri"/>
-              </a:defRPr>
-            </a:pPr>
-            <a:r>
-              <a:t>Funded to date: $0. Entire product built by founder with no outside funding.</a:t>
-            </a:r>
-          </a:p>
-        </p:txBody>
-      </p:sp>
-    </p:spTree>
-  </p:cSld>
-  <p:clrMapOvr>
-    <a:masterClrMapping/>
-  </p:clrMapOvr>
-</p:sld>
-</file>
-
-<file path=ppt/slides/slide11.xml><?xml version="1.0" encoding="utf-8"?>
-<p:sld xmlns:a="http://schemas.openxmlformats.org/drawingml/2006/main" xmlns:p="http://schemas.openxmlformats.org/presentationml/2006/main" xmlns:r="http://schemas.openxmlformats.org/officeDocument/2006/relationships">
-  <p:cSld>
-    <p:bg>
-      <p:bgPr>
-        <a:solidFill>
-          <a:srgbClr val="FAF8F4"/>
-        </a:solidFill>
-        <a:effectLst/>
-      </p:bgPr>
-    </p:bg>
-    <p:spTree>
-      <p:nvGrpSpPr>
-        <p:cNvPr id="1" name=""/>
-        <p:cNvGrpSpPr/>
-        <p:nvPr/>
-      </p:nvGrpSpPr>
-      <p:grpSpPr/>
-      <p:sp>
-        <p:nvSpPr>
-          <p:cNvPr id="2" name="TextBox 1"/>
-          <p:cNvSpPr txBox="1"/>
-          <p:nvPr/>
-        </p:nvSpPr>
-        <p:spPr>
-          <a:xfrm>
-            <a:off x="1097280" y="1097280"/>
-            <a:ext cx="3657600" cy="365760"/>
-          </a:xfrm>
-          <a:prstGeom prst="rect">
-            <a:avLst/>
-          </a:prstGeom>
-          <a:noFill/>
-        </p:spPr>
-        <p:txBody>
-          <a:bodyPr wrap="square">
-            <a:spAutoFit/>
-          </a:bodyPr>
-          <a:lstStyle/>
-          <a:p>
-            <a:pPr algn="l">
-              <a:lnSpc>
-                <a:spcPct val="120000"/>
-              </a:lnSpc>
-              <a:spcBef>
-                <a:spcPts val="0"/>
-              </a:spcBef>
-              <a:spcAft>
-                <a:spcPts val="0"/>
-              </a:spcAft>
-              <a:defRPr sz="1100" b="1">
-                <a:solidFill>
-                  <a:srgbClr val="4A7C59"/>
-                </a:solidFill>
-                <a:latin typeface="Calibri"/>
-              </a:defRPr>
-            </a:pPr>
-            <a:r>
-              <a:t>THE ASK</a:t>
-            </a:r>
-          </a:p>
-        </p:txBody>
-      </p:sp>
-      <p:sp>
-        <p:nvSpPr>
-          <p:cNvPr id="3" name="TextBox 2"/>
-          <p:cNvSpPr txBox="1"/>
-          <p:nvPr/>
-        </p:nvSpPr>
-        <p:spPr>
-          <a:xfrm>
-            <a:off x="1097280" y="1554480"/>
-            <a:ext cx="9144000" cy="1371600"/>
-          </a:xfrm>
-          <a:prstGeom prst="rect">
-            <a:avLst/>
-          </a:prstGeom>
-          <a:noFill/>
-        </p:spPr>
-        <p:txBody>
-          <a:bodyPr wrap="square">
-            <a:spAutoFit/>
-          </a:bodyPr>
-          <a:lstStyle/>
-          <a:p>
-            <a:pPr algn="l">
-              <a:lnSpc>
-                <a:spcPct val="105000"/>
-              </a:lnSpc>
-              <a:spcBef>
-                <a:spcPts val="0"/>
-              </a:spcBef>
-              <a:spcAft>
-                <a:spcPts val="0"/>
-              </a:spcAft>
-              <a:defRPr sz="4000" b="0">
-                <a:solidFill>
-                  <a:srgbClr val="2C2A26"/>
-                </a:solidFill>
-                <a:latin typeface="Georgia"/>
-              </a:defRPr>
-            </a:pPr>
-            <a:r>
-              <a:t>$300K to reach revenue.</a:t>
-            </a:r>
-            <a:br/>
-            <a:r>
-              <a:t>Then scale.</a:t>
-            </a:r>
-          </a:p>
-        </p:txBody>
-      </p:sp>
-      <p:sp>
-        <p:nvSpPr>
-          <p:cNvPr id="4" name="TextBox 3"/>
-          <p:cNvSpPr txBox="1"/>
-          <p:nvPr/>
-        </p:nvSpPr>
-        <p:spPr>
-          <a:xfrm>
-            <a:off x="1097280" y="3200400"/>
-            <a:ext cx="2286000" cy="365760"/>
-          </a:xfrm>
-          <a:prstGeom prst="rect">
-            <a:avLst/>
-          </a:prstGeom>
-          <a:noFill/>
-        </p:spPr>
-        <p:txBody>
-          <a:bodyPr wrap="square">
-            <a:spAutoFit/>
-          </a:bodyPr>
-          <a:lstStyle/>
-          <a:p>
-            <a:pPr algn="l">
-              <a:lnSpc>
-                <a:spcPct val="120000"/>
-              </a:lnSpc>
-              <a:spcBef>
-                <a:spcPts val="0"/>
-              </a:spcBef>
-              <a:spcAft>
-                <a:spcPts val="0"/>
-              </a:spcAft>
-              <a:defRPr sz="1400" b="0">
-                <a:solidFill>
-                  <a:srgbClr val="9A9690"/>
-                </a:solidFill>
-                <a:latin typeface="Calibri"/>
-              </a:defRPr>
-            </a:pPr>
-            <a:r>
-              <a:t>Instrument</a:t>
-            </a:r>
-          </a:p>
-        </p:txBody>
-      </p:sp>
-      <p:sp>
-        <p:nvSpPr>
-          <p:cNvPr id="5" name="TextBox 4"/>
-          <p:cNvSpPr txBox="1"/>
-          <p:nvPr/>
-        </p:nvSpPr>
-        <p:spPr>
-          <a:xfrm>
-            <a:off x="3474720" y="3200400"/>
-            <a:ext cx="4572000" cy="365760"/>
-          </a:xfrm>
-          <a:prstGeom prst="rect">
-            <a:avLst/>
-          </a:prstGeom>
-          <a:noFill/>
-        </p:spPr>
-        <p:txBody>
-          <a:bodyPr wrap="square">
-            <a:spAutoFit/>
-          </a:bodyPr>
-          <a:lstStyle/>
-          <a:p>
-            <a:pPr algn="l">
-              <a:lnSpc>
-                <a:spcPct val="120000"/>
-              </a:lnSpc>
-              <a:spcBef>
-                <a:spcPts val="0"/>
-              </a:spcBef>
-              <a:spcAft>
-                <a:spcPts val="0"/>
-              </a:spcAft>
-              <a:defRPr sz="2000" b="0">
-                <a:solidFill>
-                  <a:srgbClr val="2C2A26"/>
-                </a:solidFill>
-                <a:latin typeface="Georgia"/>
-              </a:defRPr>
-            </a:pPr>
-            <a:r>
-              <a:t>SAFE (YC standard)</a:t>
-            </a:r>
-          </a:p>
-        </p:txBody>
-      </p:sp>
-      <p:sp>
-        <p:nvSpPr>
-          <p:cNvPr id="6" name="TextBox 5"/>
-          <p:cNvSpPr txBox="1"/>
-          <p:nvPr/>
-        </p:nvSpPr>
-        <p:spPr>
-          <a:xfrm>
-            <a:off x="1097280" y="3703320"/>
-            <a:ext cx="2286000" cy="365760"/>
-          </a:xfrm>
-          <a:prstGeom prst="rect">
-            <a:avLst/>
-          </a:prstGeom>
-          <a:noFill/>
-        </p:spPr>
-        <p:txBody>
-          <a:bodyPr wrap="square">
-            <a:spAutoFit/>
-          </a:bodyPr>
-          <a:lstStyle/>
-          <a:p>
-            <a:pPr algn="l">
-              <a:lnSpc>
-                <a:spcPct val="120000"/>
-              </a:lnSpc>
-              <a:spcBef>
-                <a:spcPts val="0"/>
-              </a:spcBef>
-              <a:spcAft>
-                <a:spcPts val="0"/>
-              </a:spcAft>
-              <a:defRPr sz="1400" b="0">
-                <a:solidFill>
-                  <a:srgbClr val="9A9690"/>
-                </a:solidFill>
-                <a:latin typeface="Calibri"/>
-              </a:defRPr>
-            </a:pPr>
-            <a:r>
-              <a:t>Valuation cap</a:t>
-            </a:r>
-          </a:p>
-        </p:txBody>
-      </p:sp>
-      <p:sp>
-        <p:nvSpPr>
-          <p:cNvPr id="7" name="TextBox 6"/>
-          <p:cNvSpPr txBox="1"/>
-          <p:nvPr/>
-        </p:nvSpPr>
-        <p:spPr>
-          <a:xfrm>
-            <a:off x="3474720" y="3703320"/>
-            <a:ext cx="4572000" cy="365760"/>
-          </a:xfrm>
-          <a:prstGeom prst="rect">
-            <a:avLst/>
-          </a:prstGeom>
-          <a:noFill/>
-        </p:spPr>
-        <p:txBody>
-          <a:bodyPr wrap="square">
-            <a:spAutoFit/>
-          </a:bodyPr>
-          <a:lstStyle/>
-          <a:p>
-            <a:pPr algn="l">
-              <a:lnSpc>
-                <a:spcPct val="120000"/>
-              </a:lnSpc>
-              <a:spcBef>
-                <a:spcPts val="0"/>
-              </a:spcBef>
-              <a:spcAft>
-                <a:spcPts val="0"/>
-              </a:spcAft>
-              <a:defRPr sz="2000" b="0">
-                <a:solidFill>
-                  <a:srgbClr val="2C2A26"/>
-                </a:solidFill>
-                <a:latin typeface="Georgia"/>
-              </a:defRPr>
-            </a:pPr>
-            <a:r>
-              <a:t>$5,000,000</a:t>
-            </a:r>
-          </a:p>
-        </p:txBody>
-      </p:sp>
-      <p:sp>
-        <p:nvSpPr>
-          <p:cNvPr id="8" name="TextBox 7"/>
-          <p:cNvSpPr txBox="1"/>
-          <p:nvPr/>
-        </p:nvSpPr>
-        <p:spPr>
-          <a:xfrm>
-            <a:off x="1097280" y="4206240"/>
-            <a:ext cx="2286000" cy="365760"/>
-          </a:xfrm>
-          <a:prstGeom prst="rect">
-            <a:avLst/>
-          </a:prstGeom>
-          <a:noFill/>
-        </p:spPr>
-        <p:txBody>
-          <a:bodyPr wrap="square">
-            <a:spAutoFit/>
-          </a:bodyPr>
-          <a:lstStyle/>
-          <a:p>
-            <a:pPr algn="l">
-              <a:lnSpc>
-                <a:spcPct val="120000"/>
-              </a:lnSpc>
-              <a:spcBef>
-                <a:spcPts val="0"/>
-              </a:spcBef>
-              <a:spcAft>
-                <a:spcPts val="0"/>
-              </a:spcAft>
-              <a:defRPr sz="1400" b="0">
-                <a:solidFill>
-                  <a:srgbClr val="9A9690"/>
-                </a:solidFill>
-                <a:latin typeface="Calibri"/>
-              </a:defRPr>
-            </a:pPr>
-            <a:r>
-              <a:t>Giving away</a:t>
-            </a:r>
-          </a:p>
-        </p:txBody>
-      </p:sp>
-      <p:sp>
-        <p:nvSpPr>
-          <p:cNvPr id="9" name="TextBox 8"/>
-          <p:cNvSpPr txBox="1"/>
-          <p:nvPr/>
-        </p:nvSpPr>
-        <p:spPr>
-          <a:xfrm>
-            <a:off x="3474720" y="4206240"/>
-            <a:ext cx="4572000" cy="365760"/>
-          </a:xfrm>
-          <a:prstGeom prst="rect">
-            <a:avLst/>
-          </a:prstGeom>
-          <a:noFill/>
-        </p:spPr>
-        <p:txBody>
-          <a:bodyPr wrap="square">
-            <a:spAutoFit/>
-          </a:bodyPr>
-          <a:lstStyle/>
-          <a:p>
-            <a:pPr algn="l">
-              <a:lnSpc>
-                <a:spcPct val="120000"/>
-              </a:lnSpc>
-              <a:spcBef>
-                <a:spcPts val="0"/>
-              </a:spcBef>
-              <a:spcAft>
-                <a:spcPts val="0"/>
-              </a:spcAft>
-              <a:defRPr sz="2000" b="0">
-                <a:solidFill>
-                  <a:srgbClr val="2C2A26"/>
-                </a:solidFill>
-                <a:latin typeface="Georgia"/>
-              </a:defRPr>
-            </a:pPr>
-            <a:r>
-              <a:t>&lt; 10%</a:t>
-            </a:r>
-          </a:p>
-        </p:txBody>
-      </p:sp>
-      <p:sp>
-        <p:nvSpPr>
-          <p:cNvPr id="10" name="TextBox 9"/>
-          <p:cNvSpPr txBox="1"/>
-          <p:nvPr/>
-        </p:nvSpPr>
-        <p:spPr>
-          <a:xfrm>
-            <a:off x="1097280" y="4709160"/>
-            <a:ext cx="2286000" cy="365760"/>
-          </a:xfrm>
-          <a:prstGeom prst="rect">
-            <a:avLst/>
-          </a:prstGeom>
-          <a:noFill/>
-        </p:spPr>
-        <p:txBody>
-          <a:bodyPr wrap="square">
-            <a:spAutoFit/>
-          </a:bodyPr>
-          <a:lstStyle/>
-          <a:p>
-            <a:pPr algn="l">
-              <a:lnSpc>
-                <a:spcPct val="120000"/>
-              </a:lnSpc>
-              <a:spcBef>
-                <a:spcPts val="0"/>
-              </a:spcBef>
-              <a:spcAft>
-                <a:spcPts val="0"/>
-              </a:spcAft>
-              <a:defRPr sz="1400" b="0">
-                <a:solidFill>
-                  <a:srgbClr val="9A9690"/>
-                </a:solidFill>
-                <a:latin typeface="Calibri"/>
-              </a:defRPr>
-            </a:pPr>
-            <a:r>
-              <a:t>Use of funds</a:t>
-            </a:r>
-          </a:p>
-        </p:txBody>
-      </p:sp>
-      <p:sp>
-        <p:nvSpPr>
-          <p:cNvPr id="11" name="TextBox 10"/>
-          <p:cNvSpPr txBox="1"/>
-          <p:nvPr/>
-        </p:nvSpPr>
-        <p:spPr>
-          <a:xfrm>
-            <a:off x="3474720" y="4709160"/>
-            <a:ext cx="4572000" cy="365760"/>
-          </a:xfrm>
-          <a:prstGeom prst="rect">
-            <a:avLst/>
-          </a:prstGeom>
-          <a:noFill/>
-        </p:spPr>
-        <p:txBody>
-          <a:bodyPr wrap="square">
-            <a:spAutoFit/>
-          </a:bodyPr>
-          <a:lstStyle/>
-          <a:p>
-            <a:pPr algn="l">
-              <a:lnSpc>
-                <a:spcPct val="120000"/>
-              </a:lnSpc>
-              <a:spcBef>
-                <a:spcPts val="0"/>
-              </a:spcBef>
-              <a:spcAft>
-                <a:spcPts val="0"/>
-              </a:spcAft>
-              <a:defRPr sz="2000" b="0">
-                <a:solidFill>
-                  <a:srgbClr val="2C2A26"/>
-                </a:solidFill>
-                <a:latin typeface="Georgia"/>
-              </a:defRPr>
-            </a:pPr>
-            <a:r>
-              <a:t>Core team full-time through 2026 → production launch June</a:t>
-            </a:r>
-          </a:p>
-        </p:txBody>
-      </p:sp>
-      <p:sp>
-        <p:nvSpPr>
-          <p:cNvPr id="12" name="TextBox 11"/>
-          <p:cNvSpPr txBox="1"/>
-          <p:nvPr/>
-        </p:nvSpPr>
-        <p:spPr>
-          <a:xfrm>
-            <a:off x="1097280" y="5303520"/>
-            <a:ext cx="9144000" cy="1097280"/>
-          </a:xfrm>
-          <a:prstGeom prst="rect">
-            <a:avLst/>
-          </a:prstGeom>
-          <a:noFill/>
-        </p:spPr>
-        <p:txBody>
-          <a:bodyPr wrap="square">
-            <a:spAutoFit/>
-          </a:bodyPr>
-          <a:lstStyle/>
-          <a:p>
-            <a:pPr algn="l">
-              <a:lnSpc>
-                <a:spcPct val="120000"/>
-              </a:lnSpc>
-              <a:spcBef>
-                <a:spcPts val="0"/>
-              </a:spcBef>
-              <a:spcAft>
-                <a:spcPts val="0"/>
-              </a:spcAft>
-              <a:defRPr sz="2800" b="0">
-                <a:solidFill>
-                  <a:srgbClr val="2C2A26"/>
-                </a:solidFill>
-                <a:latin typeface="Georgia"/>
-              </a:defRPr>
-            </a:pPr>
-            <a:r>
-              <a:t>I want everyone to be able to hike up that mountain.</a:t>
-            </a:r>
-          </a:p>
-        </p:txBody>
-      </p:sp>
-      <p:sp>
-        <p:nvSpPr>
-          <p:cNvPr id="13" name="TextBox 12"/>
-          <p:cNvSpPr txBox="1"/>
-          <p:nvPr/>
-        </p:nvSpPr>
-        <p:spPr>
-          <a:xfrm>
-            <a:off x="1097280" y="6035040"/>
-            <a:ext cx="9144000" cy="457200"/>
-          </a:xfrm>
-          <a:prstGeom prst="rect">
-            <a:avLst/>
-          </a:prstGeom>
-          <a:noFill/>
-        </p:spPr>
-        <p:txBody>
-          <a:bodyPr wrap="square">
-            <a:spAutoFit/>
-          </a:bodyPr>
-          <a:lstStyle/>
-          <a:p>
-            <a:pPr algn="l">
-              <a:lnSpc>
-                <a:spcPct val="120000"/>
-              </a:lnSpc>
-              <a:spcBef>
-                <a:spcPts val="0"/>
-              </a:spcBef>
-              <a:spcAft>
-                <a:spcPts val="0"/>
-              </a:spcAft>
-              <a:defRPr sz="1300" b="0">
-                <a:solidFill>
-                  <a:srgbClr val="9A9690"/>
-                </a:solidFill>
-                <a:latin typeface="Calibri"/>
-              </a:defRPr>
-            </a:pPr>
-            <a:r>
-              <a:t>parachute.computer  ·  github.com/OpenParachutePBC  ·  aaron@parachute.computer</a:t>
+              <a:t>Features get cloned in weeks. It’s a race to the bottom. So we stopped trying to win it.</a:t>
             </a:r>
           </a:p>
         </p:txBody>
@@ -4919,7 +3489,86 @@
       <p:grpSpPr/>
       <p:sp>
         <p:nvSpPr>
-          <p:cNvPr id="2" name="TextBox 1"/>
+          <p:cNvPr id="2" name="Rectangle 1"/>
+          <p:cNvSpPr/>
+          <p:nvPr/>
+        </p:nvSpPr>
+        <p:spPr>
+          <a:xfrm>
+            <a:off x="0" y="0"/>
+            <a:ext cx="12191695" cy="54864"/>
+          </a:xfrm>
+          <a:prstGeom prst="rect">
+            <a:avLst/>
+          </a:prstGeom>
+          <a:solidFill>
+            <a:srgbClr val="4A7C59"/>
+          </a:solidFill>
+          <a:ln>
+            <a:noFill/>
+          </a:ln>
+        </p:spPr>
+        <p:style>
+          <a:lnRef idx="1">
+            <a:schemeClr val="accent1"/>
+          </a:lnRef>
+          <a:fillRef idx="3">
+            <a:schemeClr val="accent1"/>
+          </a:fillRef>
+          <a:effectRef idx="2">
+            <a:schemeClr val="accent1"/>
+          </a:effectRef>
+          <a:fontRef idx="minor">
+            <a:schemeClr val="lt1"/>
+          </a:fontRef>
+        </p:style>
+        <p:txBody>
+          <a:bodyPr rtlCol="0" anchor="ctr"/>
+          <a:lstStyle/>
+          <a:p>
+            <a:pPr algn="ctr"/>
+          </a:p>
+        </p:txBody>
+      </p:sp>
+      <p:sp>
+        <p:nvSpPr>
+          <p:cNvPr id="3" name="TextBox 2"/>
+          <p:cNvSpPr txBox="1"/>
+          <p:nvPr/>
+        </p:nvSpPr>
+        <p:spPr>
+          <a:xfrm>
+            <a:off x="1097280" y="6400800"/>
+            <a:ext cx="3657600" cy="274320"/>
+          </a:xfrm>
+          <a:prstGeom prst="rect">
+            <a:avLst/>
+          </a:prstGeom>
+          <a:noFill/>
+        </p:spPr>
+        <p:txBody>
+          <a:bodyPr wrap="none">
+            <a:spAutoFit/>
+          </a:bodyPr>
+          <a:lstStyle/>
+          <a:p>
+            <a:pPr>
+              <a:defRPr sz="900">
+                <a:solidFill>
+                  <a:srgbClr val="9A9690"/>
+                </a:solidFill>
+                <a:latin typeface="Calibri"/>
+              </a:defRPr>
+            </a:pPr>
+            <a:r>
+              <a:t>parachute.computer</a:t>
+            </a:r>
+          </a:p>
+        </p:txBody>
+      </p:sp>
+      <p:sp>
+        <p:nvSpPr>
+          <p:cNvPr id="4" name="TextBox 3"/>
           <p:cNvSpPr txBox="1"/>
           <p:nvPr/>
         </p:nvSpPr>
@@ -4957,14 +3606,14 @@
               </a:defRPr>
             </a:pPr>
             <a:r>
-              <a:t>THE LANDSCAPE</a:t>
-            </a:r>
-          </a:p>
-        </p:txBody>
-      </p:sp>
-      <p:sp>
-        <p:nvSpPr>
-          <p:cNvPr id="3" name="TextBox 2"/>
+              <a:t>THE PROBLEM</a:t>
+            </a:r>
+          </a:p>
+        </p:txBody>
+      </p:sp>
+      <p:sp>
+        <p:nvSpPr>
+          <p:cNvPr id="5" name="TextBox 4"/>
           <p:cNvSpPr txBox="1"/>
           <p:nvPr/>
         </p:nvSpPr>
@@ -5002,25 +3651,25 @@
               </a:defRPr>
             </a:pPr>
             <a:r>
-              <a:t>Everyone is building</a:t>
+              <a:t>Memory is shallow.</a:t>
             </a:r>
             <a:br/>
             <a:r>
-              <a:t>personal AI computers.</a:t>
-            </a:r>
-          </a:p>
-        </p:txBody>
-      </p:sp>
-      <p:sp>
-        <p:nvSpPr>
-          <p:cNvPr id="4" name="TextBox 3"/>
+              <a:t>Capture is broken.</a:t>
+            </a:r>
+          </a:p>
+        </p:txBody>
+      </p:sp>
+      <p:sp>
+        <p:nvSpPr>
+          <p:cNvPr id="6" name="TextBox 5"/>
           <p:cNvSpPr txBox="1"/>
           <p:nvPr/>
         </p:nvSpPr>
         <p:spPr>
           <a:xfrm>
             <a:off x="1097280" y="3200400"/>
-            <a:ext cx="9144000" cy="914400"/>
+            <a:ext cx="9144000" cy="1371600"/>
           </a:xfrm>
           <a:prstGeom prst="rect">
             <a:avLst/>
@@ -5043,7 +3692,7 @@
               <a:spcAft>
                 <a:spcPts val="0"/>
               </a:spcAft>
-              <a:defRPr sz="1800" b="0">
+              <a:defRPr sz="2000" b="0">
                 <a:solidFill>
                   <a:srgbClr val="6B6860"/>
                 </a:solidFill>
@@ -5051,25 +3700,29 @@
               </a:defRPr>
             </a:pPr>
             <a:r>
-              <a:t>Hundreds of millions of people already pay $20-200/month for AI tools.</a:t>
+              <a:t>These platforms all have memory now — but it’s shallow.</a:t>
             </a:r>
             <a:br/>
             <a:r>
-              <a:t>OpenClaw — 300K+ stars in 3 months. Claude Cowork. ZoComputer. Perplexity Computer. Manus.</a:t>
-            </a:r>
-          </a:p>
-        </p:txBody>
-      </p:sp>
-      <p:sp>
-        <p:nvSpPr>
-          <p:cNvPr id="5" name="TextBox 4"/>
+              <a:t>Basically one big text file. It remembers your name,</a:t>
+            </a:r>
+            <a:br/>
+            <a:r>
+              <a:t>not six months of your thinking.</a:t>
+            </a:r>
+          </a:p>
+        </p:txBody>
+      </p:sp>
+      <p:sp>
+        <p:nvSpPr>
+          <p:cNvPr id="7" name="TextBox 6"/>
           <p:cNvSpPr txBox="1"/>
           <p:nvPr/>
         </p:nvSpPr>
         <p:spPr>
           <a:xfrm>
-            <a:off x="1097280" y="4754880"/>
-            <a:ext cx="2743200" cy="1097280"/>
+            <a:off x="1097280" y="4572000"/>
+            <a:ext cx="9144000" cy="1097280"/>
           </a:xfrm>
           <a:prstGeom prst="rect">
             <a:avLst/>
@@ -5084,7 +3737,7 @@
           <a:p>
             <a:pPr algn="l">
               <a:lnSpc>
-                <a:spcPct val="120000"/>
+                <a:spcPct val="150000"/>
               </a:lnSpc>
               <a:spcBef>
                 <a:spcPts val="0"/>
@@ -5092,29 +3745,37 @@
               <a:spcAft>
                 <a:spcPts val="0"/>
               </a:spcAft>
-              <a:defRPr sz="6400" b="0">
-                <a:solidFill>
-                  <a:srgbClr val="4A7C59"/>
-                </a:solidFill>
-                <a:latin typeface="Georgia"/>
+              <a:defRPr sz="1800" b="0">
+                <a:solidFill>
+                  <a:srgbClr val="6B6860"/>
+                </a:solidFill>
+                <a:latin typeface="Calibri"/>
               </a:defRPr>
             </a:pPr>
             <a:r>
-              <a:t>$50B+</a:t>
-            </a:r>
-          </a:p>
-        </p:txBody>
-      </p:sp>
-      <p:sp>
-        <p:nvSpPr>
-          <p:cNvPr id="6" name="TextBox 5"/>
+              <a:t>And there’s a deeper problem: how your thinking gets into</a:t>
+            </a:r>
+            <a:br/>
+            <a:r>
+              <a:t>the system. You can talk to your AI, but that’s a conversation —</a:t>
+            </a:r>
+            <a:br/>
+            <a:r>
+              <a:t>the AI is always in the middle.</a:t>
+            </a:r>
+          </a:p>
+        </p:txBody>
+      </p:sp>
+      <p:sp>
+        <p:nvSpPr>
+          <p:cNvPr id="8" name="TextBox 7"/>
           <p:cNvSpPr txBox="1"/>
           <p:nvPr/>
         </p:nvSpPr>
         <p:spPr>
           <a:xfrm>
-            <a:off x="4114800" y="4983480"/>
-            <a:ext cx="4572000" cy="731520"/>
+            <a:off x="1097280" y="5760720"/>
+            <a:ext cx="9144000" cy="548640"/>
           </a:xfrm>
           <a:prstGeom prst="rect">
             <a:avLst/>
@@ -5129,7 +3790,7 @@
           <a:p>
             <a:pPr algn="l">
               <a:lnSpc>
-                <a:spcPct val="140000"/>
+                <a:spcPct val="130000"/>
               </a:lnSpc>
               <a:spcBef>
                 <a:spcPts val="0"/>
@@ -5137,64 +3798,19 @@
               <a:spcAft>
                 <a:spcPts val="0"/>
               </a:spcAft>
-              <a:defRPr sz="1600" b="0">
-                <a:solidFill>
-                  <a:srgbClr val="6B6860"/>
-                </a:solidFill>
-                <a:latin typeface="Calibri"/>
+              <a:defRPr sz="2000" b="0">
+                <a:solidFill>
+                  <a:srgbClr val="2C2A26"/>
+                </a:solidFill>
+                <a:latin typeface="Georgia"/>
               </a:defRPr>
             </a:pPr>
             <a:r>
-              <a:t>agentic AI market by 2030 · 44% CAGR</a:t>
+              <a:t>Tools that help us think for ourselves — not just think with AI —</a:t>
             </a:r>
             <a:br/>
             <a:r>
-              <a:t>OpenAI alone projects $200B revenue by 2030</a:t>
-            </a:r>
-          </a:p>
-        </p:txBody>
-      </p:sp>
-      <p:sp>
-        <p:nvSpPr>
-          <p:cNvPr id="7" name="TextBox 6"/>
-          <p:cNvSpPr txBox="1"/>
-          <p:nvPr/>
-        </p:nvSpPr>
-        <p:spPr>
-          <a:xfrm>
-            <a:off x="1097280" y="5943600"/>
-            <a:ext cx="9144000" cy="548640"/>
-          </a:xfrm>
-          <a:prstGeom prst="rect">
-            <a:avLst/>
-          </a:prstGeom>
-          <a:noFill/>
-        </p:spPr>
-        <p:txBody>
-          <a:bodyPr wrap="square">
-            <a:spAutoFit/>
-          </a:bodyPr>
-          <a:lstStyle/>
-          <a:p>
-            <a:pPr algn="l">
-              <a:lnSpc>
-                <a:spcPct val="120000"/>
-              </a:lnSpc>
-              <a:spcBef>
-                <a:spcPts val="0"/>
-              </a:spcBef>
-              <a:spcAft>
-                <a:spcPts val="0"/>
-              </a:spcAft>
-              <a:defRPr sz="2200" b="0">
-                <a:solidFill>
-                  <a:srgbClr val="2C2A26"/>
-                </a:solidFill>
-                <a:latin typeface="Georgia"/>
-              </a:defRPr>
-            </a:pPr>
-            <a:r>
-              <a:t>The question isn't whether this market exists — it's who they'll trust.</a:t>
+              <a:t>produce the quality of thinking that makes AI most useful.</a:t>
             </a:r>
           </a:p>
         </p:txBody>
@@ -5227,7 +3843,86 @@
       <p:grpSpPr/>
       <p:sp>
         <p:nvSpPr>
-          <p:cNvPr id="2" name="TextBox 1"/>
+          <p:cNvPr id="2" name="Rectangle 1"/>
+          <p:cNvSpPr/>
+          <p:nvPr/>
+        </p:nvSpPr>
+        <p:spPr>
+          <a:xfrm>
+            <a:off x="0" y="0"/>
+            <a:ext cx="12191695" cy="54864"/>
+          </a:xfrm>
+          <a:prstGeom prst="rect">
+            <a:avLst/>
+          </a:prstGeom>
+          <a:solidFill>
+            <a:srgbClr val="4A7C59"/>
+          </a:solidFill>
+          <a:ln>
+            <a:noFill/>
+          </a:ln>
+        </p:spPr>
+        <p:style>
+          <a:lnRef idx="1">
+            <a:schemeClr val="accent1"/>
+          </a:lnRef>
+          <a:fillRef idx="3">
+            <a:schemeClr val="accent1"/>
+          </a:fillRef>
+          <a:effectRef idx="2">
+            <a:schemeClr val="accent1"/>
+          </a:effectRef>
+          <a:fontRef idx="minor">
+            <a:schemeClr val="lt1"/>
+          </a:fontRef>
+        </p:style>
+        <p:txBody>
+          <a:bodyPr rtlCol="0" anchor="ctr"/>
+          <a:lstStyle/>
+          <a:p>
+            <a:pPr algn="ctr"/>
+          </a:p>
+        </p:txBody>
+      </p:sp>
+      <p:sp>
+        <p:nvSpPr>
+          <p:cNvPr id="3" name="TextBox 2"/>
+          <p:cNvSpPr txBox="1"/>
+          <p:nvPr/>
+        </p:nvSpPr>
+        <p:spPr>
+          <a:xfrm>
+            <a:off x="1097280" y="6400800"/>
+            <a:ext cx="3657600" cy="274320"/>
+          </a:xfrm>
+          <a:prstGeom prst="rect">
+            <a:avLst/>
+          </a:prstGeom>
+          <a:noFill/>
+        </p:spPr>
+        <p:txBody>
+          <a:bodyPr wrap="none">
+            <a:spAutoFit/>
+          </a:bodyPr>
+          <a:lstStyle/>
+          <a:p>
+            <a:pPr>
+              <a:defRPr sz="900">
+                <a:solidFill>
+                  <a:srgbClr val="9A9690"/>
+                </a:solidFill>
+                <a:latin typeface="Calibri"/>
+              </a:defRPr>
+            </a:pPr>
+            <a:r>
+              <a:t>parachute.computer</a:t>
+            </a:r>
+          </a:p>
+        </p:txBody>
+      </p:sp>
+      <p:sp>
+        <p:nvSpPr>
+          <p:cNvPr id="4" name="TextBox 3"/>
           <p:cNvSpPr txBox="1"/>
           <p:nvPr/>
         </p:nvSpPr>
@@ -5272,7 +3967,7 @@
       </p:sp>
       <p:sp>
         <p:nvSpPr>
-          <p:cNvPr id="3" name="TextBox 2"/>
+          <p:cNvPr id="5" name="TextBox 4"/>
           <p:cNvSpPr txBox="1"/>
           <p:nvPr/>
         </p:nvSpPr>
@@ -5310,78 +4005,25 @@
               </a:defRPr>
             </a:pPr>
             <a:r>
-              <a:t>Parachute Computer.</a:t>
+              <a:t>Parachute Daily.</a:t>
             </a:r>
             <a:br/>
             <a:r>
-              <a:t>The personal AI you can trust.</a:t>
-            </a:r>
-          </a:p>
-        </p:txBody>
-      </p:sp>
-      <p:sp>
-        <p:nvSpPr>
-          <p:cNvPr id="4" name="TextBox 3"/>
+              <a:t>Just talk.</a:t>
+            </a:r>
+          </a:p>
+        </p:txBody>
+      </p:sp>
+      <p:sp>
+        <p:nvSpPr>
+          <p:cNvPr id="6" name="TextBox 5"/>
           <p:cNvSpPr txBox="1"/>
           <p:nvPr/>
         </p:nvSpPr>
         <p:spPr>
           <a:xfrm>
             <a:off x="1097280" y="3200400"/>
-            <a:ext cx="9144000" cy="1371600"/>
-          </a:xfrm>
-          <a:prstGeom prst="rect">
-            <a:avLst/>
-          </a:prstGeom>
-          <a:noFill/>
-        </p:spPr>
-        <p:txBody>
-          <a:bodyPr wrap="square">
-            <a:spAutoFit/>
-          </a:bodyPr>
-          <a:lstStyle/>
-          <a:p>
-            <a:pPr algn="l">
-              <a:lnSpc>
-                <a:spcPct val="160000"/>
-              </a:lnSpc>
-              <a:spcBef>
-                <a:spcPts val="0"/>
-              </a:spcBef>
-              <a:spcAft>
-                <a:spcPts val="0"/>
-              </a:spcAft>
-              <a:defRPr sz="2000" b="0">
-                <a:solidFill>
-                  <a:srgbClr val="6B6860"/>
-                </a:solidFill>
-                <a:latin typeface="Calibri"/>
-              </a:defRPr>
-            </a:pPr>
-            <a:r>
-              <a:t>A full agentic computing platform — open source, local-first, self-hostable.</a:t>
-            </a:r>
-            <a:br/>
-            <a:r>
-              <a:t>Your data stays on your device. Use your own AI models.</a:t>
-            </a:r>
-            <a:br/>
-            <a:r>
-              <a:t>Knowledge graph that connects your journals, conversations, and thinking.</a:t>
-            </a:r>
-          </a:p>
-        </p:txBody>
-      </p:sp>
-      <p:sp>
-        <p:nvSpPr>
-          <p:cNvPr id="5" name="TextBox 4"/>
-          <p:cNvSpPr txBox="1"/>
-          <p:nvPr/>
-        </p:nvSpPr>
-        <p:spPr>
-          <a:xfrm>
-            <a:off x="1097280" y="5029200"/>
-            <a:ext cx="9144000" cy="1371600"/>
+            <a:ext cx="5029200" cy="2560320"/>
           </a:xfrm>
           <a:prstGeom prst="rect">
             <a:avLst/>
@@ -5412,25 +4054,84 @@
               </a:defRPr>
             </a:pPr>
             <a:r>
-              <a:t>A lot of people don't want to trust big corporations with their most personal data.</a:t>
+              <a:t>A voice-first journal.</a:t>
             </a:r>
             <a:br/>
-            <a:r>
-              <a:t>Open source gives them a choice. AGPL-3.0 licensed. Fully transparent.</a:t>
-            </a:r>
-          </a:p>
-        </p:txBody>
-      </p:sp>
-      <p:sp>
-        <p:nvSpPr>
-          <p:cNvPr id="6" name="TextBox 5"/>
+            <a:br/>
+            <a:r>
+              <a:t>Speak into a wearable pendant or your phone —</a:t>
+            </a:r>
+            <a:br/>
+            <a:r>
+              <a:t>on a walk, in the car, wherever thinking happens.</a:t>
+            </a:r>
+            <a:br/>
+            <a:br/>
+            <a:r>
+              <a:t>Simple for humans. Native for AI.</a:t>
+            </a:r>
+            <a:br/>
+            <a:r>
+              <a:t>No learning curve. Just talk.</a:t>
+            </a:r>
+          </a:p>
+        </p:txBody>
+      </p:sp>
+      <p:sp>
+        <p:nvSpPr>
+          <p:cNvPr id="7" name="Rounded Rectangle 6"/>
+          <p:cNvSpPr/>
+          <p:nvPr/>
+        </p:nvSpPr>
+        <p:spPr>
+          <a:xfrm>
+            <a:off x="7132320" y="3200400"/>
+            <a:ext cx="4114800" cy="2743200"/>
+          </a:xfrm>
+          <a:prstGeom prst="roundRect">
+            <a:avLst/>
+          </a:prstGeom>
+          <a:solidFill>
+            <a:srgbClr val="F3F0EA"/>
+          </a:solidFill>
+          <a:ln w="12700">
+            <a:solidFill>
+              <a:srgbClr val="E4E0D8"/>
+            </a:solidFill>
+          </a:ln>
+        </p:spPr>
+        <p:style>
+          <a:lnRef idx="1">
+            <a:schemeClr val="accent1"/>
+          </a:lnRef>
+          <a:fillRef idx="3">
+            <a:schemeClr val="accent1"/>
+          </a:fillRef>
+          <a:effectRef idx="2">
+            <a:schemeClr val="accent1"/>
+          </a:effectRef>
+          <a:fontRef idx="minor">
+            <a:schemeClr val="lt1"/>
+          </a:fontRef>
+        </p:style>
+        <p:txBody>
+          <a:bodyPr rtlCol="0" anchor="ctr"/>
+          <a:lstStyle/>
+          <a:p>
+            <a:pPr algn="ctr"/>
+          </a:p>
+        </p:txBody>
+      </p:sp>
+      <p:sp>
+        <p:nvSpPr>
+          <p:cNvPr id="8" name="TextBox 7"/>
           <p:cNvSpPr txBox="1"/>
           <p:nvPr/>
         </p:nvSpPr>
         <p:spPr>
           <a:xfrm>
-            <a:off x="1097280" y="5943600"/>
-            <a:ext cx="9144000" cy="548640"/>
+            <a:off x="7498079" y="3474720"/>
+            <a:ext cx="3383280" cy="365760"/>
           </a:xfrm>
           <a:prstGeom prst="rect">
             <a:avLst/>
@@ -5453,15 +4154,78 @@
               <a:spcAft>
                 <a:spcPts val="0"/>
               </a:spcAft>
-              <a:defRPr sz="2200" b="0">
-                <a:solidFill>
-                  <a:srgbClr val="2C2A26"/>
-                </a:solidFill>
-                <a:latin typeface="Georgia"/>
+              <a:defRPr sz="1100" b="1">
+                <a:solidFill>
+                  <a:srgbClr val="4A7C59"/>
+                </a:solidFill>
+                <a:latin typeface="Calibri"/>
               </a:defRPr>
             </a:pPr>
             <a:r>
-              <a:t>But most people don't want to self-host a server.</a:t>
+              <a:t>THE PENDANT</a:t>
+            </a:r>
+          </a:p>
+        </p:txBody>
+      </p:sp>
+      <p:sp>
+        <p:nvSpPr>
+          <p:cNvPr id="9" name="TextBox 8"/>
+          <p:cNvSpPr txBox="1"/>
+          <p:nvPr/>
+        </p:nvSpPr>
+        <p:spPr>
+          <a:xfrm>
+            <a:off x="7498079" y="3931920"/>
+            <a:ext cx="3383280" cy="1828800"/>
+          </a:xfrm>
+          <a:prstGeom prst="rect">
+            <a:avLst/>
+          </a:prstGeom>
+          <a:noFill/>
+        </p:spPr>
+        <p:txBody>
+          <a:bodyPr wrap="square">
+            <a:spAutoFit/>
+          </a:bodyPr>
+          <a:lstStyle/>
+          <a:p>
+            <a:pPr algn="l">
+              <a:lnSpc>
+                <a:spcPct val="145000"/>
+              </a:lnSpc>
+              <a:spcBef>
+                <a:spcPts val="0"/>
+              </a:spcBef>
+              <a:spcAft>
+                <a:spcPts val="0"/>
+              </a:spcAft>
+              <a:defRPr sz="1600" b="0">
+                <a:solidFill>
+                  <a:srgbClr val="6B6860"/>
+                </a:solidFill>
+                <a:latin typeface="Calibri"/>
+              </a:defRPr>
+            </a:pPr>
+            <a:r>
+              <a:t>Wearable voice capture device.</a:t>
+            </a:r>
+            <a:br/>
+            <a:br/>
+            <a:r>
+              <a:t>Press a button. Talk.</a:t>
+            </a:r>
+            <a:br/>
+            <a:r>
+              <a:t>Your thoughts are transcribed and</a:t>
+            </a:r>
+            <a:br/>
+            <a:r>
+              <a:t>structured by the time you’re home.</a:t>
+            </a:r>
+            <a:br/>
+            <a:br/>
+            <a:r>
+              <a:t>Working prototype on stage today.</a:t>
             </a:r>
           </a:p>
         </p:txBody>
@@ -5494,7 +4258,86 @@
       <p:grpSpPr/>
       <p:sp>
         <p:nvSpPr>
-          <p:cNvPr id="2" name="TextBox 1"/>
+          <p:cNvPr id="2" name="Rectangle 1"/>
+          <p:cNvSpPr/>
+          <p:nvPr/>
+        </p:nvSpPr>
+        <p:spPr>
+          <a:xfrm>
+            <a:off x="0" y="0"/>
+            <a:ext cx="12191695" cy="54864"/>
+          </a:xfrm>
+          <a:prstGeom prst="rect">
+            <a:avLst/>
+          </a:prstGeom>
+          <a:solidFill>
+            <a:srgbClr val="4A7C59"/>
+          </a:solidFill>
+          <a:ln>
+            <a:noFill/>
+          </a:ln>
+        </p:spPr>
+        <p:style>
+          <a:lnRef idx="1">
+            <a:schemeClr val="accent1"/>
+          </a:lnRef>
+          <a:fillRef idx="3">
+            <a:schemeClr val="accent1"/>
+          </a:fillRef>
+          <a:effectRef idx="2">
+            <a:schemeClr val="accent1"/>
+          </a:effectRef>
+          <a:fontRef idx="minor">
+            <a:schemeClr val="lt1"/>
+          </a:fontRef>
+        </p:style>
+        <p:txBody>
+          <a:bodyPr rtlCol="0" anchor="ctr"/>
+          <a:lstStyle/>
+          <a:p>
+            <a:pPr algn="ctr"/>
+          </a:p>
+        </p:txBody>
+      </p:sp>
+      <p:sp>
+        <p:nvSpPr>
+          <p:cNvPr id="3" name="TextBox 2"/>
+          <p:cNvSpPr txBox="1"/>
+          <p:nvPr/>
+        </p:nvSpPr>
+        <p:spPr>
+          <a:xfrm>
+            <a:off x="1097280" y="6400800"/>
+            <a:ext cx="3657600" cy="274320"/>
+          </a:xfrm>
+          <a:prstGeom prst="rect">
+            <a:avLst/>
+          </a:prstGeom>
+          <a:noFill/>
+        </p:spPr>
+        <p:txBody>
+          <a:bodyPr wrap="none">
+            <a:spAutoFit/>
+          </a:bodyPr>
+          <a:lstStyle/>
+          <a:p>
+            <a:pPr>
+              <a:defRPr sz="900">
+                <a:solidFill>
+                  <a:srgbClr val="9A9690"/>
+                </a:solidFill>
+                <a:latin typeface="Calibri"/>
+              </a:defRPr>
+            </a:pPr>
+            <a:r>
+              <a:t>parachute.computer</a:t>
+            </a:r>
+          </a:p>
+        </p:txBody>
+      </p:sp>
+      <p:sp>
+        <p:nvSpPr>
+          <p:cNvPr id="4" name="TextBox 3"/>
           <p:cNvSpPr txBox="1"/>
           <p:nvPr/>
         </p:nvSpPr>
@@ -5532,14 +4375,14 @@
               </a:defRPr>
             </a:pPr>
             <a:r>
-              <a:t>THE OPPORTUNITY</a:t>
-            </a:r>
-          </a:p>
-        </p:txBody>
-      </p:sp>
-      <p:sp>
-        <p:nvSpPr>
-          <p:cNvPr id="3" name="TextBox 2"/>
+              <a:t>AGENT-NATIVE</a:t>
+            </a:r>
+          </a:p>
+        </p:txBody>
+      </p:sp>
+      <p:sp>
+        <p:nvSpPr>
+          <p:cNvPr id="5" name="TextBox 4"/>
           <p:cNvSpPr txBox="1"/>
           <p:nvPr/>
         </p:nvSpPr>
@@ -5577,78 +4420,25 @@
               </a:defRPr>
             </a:pPr>
             <a:r>
-              <a:t>The other 95% just want</a:t>
+              <a:t>Don’t compete with agents.</a:t>
             </a:r>
             <a:br/>
             <a:r>
-              <a:t>something that works.</a:t>
-            </a:r>
-          </a:p>
-        </p:txBody>
-      </p:sp>
-      <p:sp>
-        <p:nvSpPr>
-          <p:cNvPr id="4" name="TextBox 3"/>
+              <a:t>Build the tool layer they all need.</a:t>
+            </a:r>
+          </a:p>
+        </p:txBody>
+      </p:sp>
+      <p:sp>
+        <p:nvSpPr>
+          <p:cNvPr id="6" name="TextBox 5"/>
           <p:cNvSpPr txBox="1"/>
           <p:nvPr/>
         </p:nvSpPr>
         <p:spPr>
           <a:xfrm>
             <a:off x="1097280" y="3200400"/>
-            <a:ext cx="9144000" cy="1371600"/>
-          </a:xfrm>
-          <a:prstGeom prst="rect">
-            <a:avLst/>
-          </a:prstGeom>
-          <a:noFill/>
-        </p:spPr>
-        <p:txBody>
-          <a:bodyPr wrap="square">
-            <a:spAutoFit/>
-          </a:bodyPr>
-          <a:lstStyle/>
-          <a:p>
-            <a:pPr algn="l">
-              <a:lnSpc>
-                <a:spcPct val="160000"/>
-              </a:lnSpc>
-              <a:spcBef>
-                <a:spcPts val="0"/>
-              </a:spcBef>
-              <a:spcAft>
-                <a:spcPts val="0"/>
-              </a:spcAft>
-              <a:defRPr sz="2200" b="0">
-                <a:solidFill>
-                  <a:srgbClr val="6B6860"/>
-                </a:solidFill>
-                <a:latin typeface="Georgia"/>
-              </a:defRPr>
-            </a:pPr>
-            <a:r>
-              <a:t>The artist who wants to organize creative ideas.</a:t>
-            </a:r>
-            <a:br/>
-            <a:r>
-              <a:t>The small business owner tracking their days.</a:t>
-            </a:r>
-            <a:br/>
-            <a:r>
-              <a:t>The parent who wants a better way to remember and reflect.</a:t>
-            </a:r>
-          </a:p>
-        </p:txBody>
-      </p:sp>
-      <p:sp>
-        <p:nvSpPr>
-          <p:cNvPr id="5" name="TextBox 4"/>
-          <p:cNvSpPr txBox="1"/>
-          <p:nvPr/>
-        </p:nvSpPr>
-        <p:spPr>
-          <a:xfrm>
-            <a:off x="1097280" y="5212080"/>
-            <a:ext cx="9144000" cy="914400"/>
+            <a:ext cx="5029200" cy="1371600"/>
           </a:xfrm>
           <a:prstGeom prst="rect">
             <a:avLst/>
@@ -5671,19 +4461,576 @@
               <a:spcAft>
                 <a:spcPts val="0"/>
               </a:spcAft>
-              <a:defRPr sz="2200" b="0">
+              <a:defRPr sz="1800" b="0">
+                <a:solidFill>
+                  <a:srgbClr val="6B6860"/>
+                </a:solidFill>
+                <a:latin typeface="Calibri"/>
+              </a:defRPr>
+            </a:pPr>
+            <a:r>
+              <a:t>Your data lives in a graph database organized around</a:t>
+            </a:r>
+            <a:br/>
+            <a:r>
+              <a:t>three primitives: Things, Tags, and Tools.</a:t>
+            </a:r>
+            <a:br/>
+            <a:br/>
+            <a:r>
+              <a:t>The whole system speaks MCP — the open standard</a:t>
+            </a:r>
+            <a:br/>
+            <a:r>
+              <a:t>for connecting AI to tools.</a:t>
+            </a:r>
+          </a:p>
+        </p:txBody>
+      </p:sp>
+      <p:sp>
+        <p:nvSpPr>
+          <p:cNvPr id="7" name="TextBox 6"/>
+          <p:cNvSpPr txBox="1"/>
+          <p:nvPr/>
+        </p:nvSpPr>
+        <p:spPr>
+          <a:xfrm>
+            <a:off x="1097280" y="4846320"/>
+            <a:ext cx="5029200" cy="914400"/>
+          </a:xfrm>
+          <a:prstGeom prst="rect">
+            <a:avLst/>
+          </a:prstGeom>
+          <a:noFill/>
+        </p:spPr>
+        <p:txBody>
+          <a:bodyPr wrap="square">
+            <a:spAutoFit/>
+          </a:bodyPr>
+          <a:lstStyle/>
+          <a:p>
+            <a:pPr algn="l">
+              <a:lnSpc>
+                <a:spcPct val="150000"/>
+              </a:lnSpc>
+              <a:spcBef>
+                <a:spcPts val="0"/>
+              </a:spcBef>
+              <a:spcAft>
+                <a:spcPts val="0"/>
+              </a:spcAft>
+              <a:defRPr sz="1600" b="0">
+                <a:solidFill>
+                  <a:srgbClr val="6B6860"/>
+                </a:solidFill>
+                <a:latin typeface="Calibri"/>
+              </a:defRPr>
+            </a:pPr>
+            <a:r>
+              <a:t>Your AI can read, search, and create structure.</a:t>
+            </a:r>
+            <a:br/>
+            <a:r>
+              <a:t>People nodes. Project nodes. A living knowledge graph.</a:t>
+            </a:r>
+          </a:p>
+        </p:txBody>
+      </p:sp>
+      <p:sp>
+        <p:nvSpPr>
+          <p:cNvPr id="8" name="Rounded Rectangle 7"/>
+          <p:cNvSpPr/>
+          <p:nvPr/>
+        </p:nvSpPr>
+        <p:spPr>
+          <a:xfrm>
+            <a:off x="6858000" y="2743200"/>
+            <a:ext cx="4572000" cy="3657600"/>
+          </a:xfrm>
+          <a:prstGeom prst="roundRect">
+            <a:avLst/>
+          </a:prstGeom>
+          <a:solidFill>
+            <a:srgbClr val="FFFFFF"/>
+          </a:solidFill>
+          <a:ln w="12700">
+            <a:solidFill>
+              <a:srgbClr val="E4E0D8"/>
+            </a:solidFill>
+          </a:ln>
+        </p:spPr>
+        <p:style>
+          <a:lnRef idx="1">
+            <a:schemeClr val="accent1"/>
+          </a:lnRef>
+          <a:fillRef idx="3">
+            <a:schemeClr val="accent1"/>
+          </a:fillRef>
+          <a:effectRef idx="2">
+            <a:schemeClr val="accent1"/>
+          </a:effectRef>
+          <a:fontRef idx="minor">
+            <a:schemeClr val="lt1"/>
+          </a:fontRef>
+        </p:style>
+        <p:txBody>
+          <a:bodyPr rtlCol="0" anchor="ctr"/>
+          <a:lstStyle/>
+          <a:p>
+            <a:pPr algn="ctr"/>
+          </a:p>
+        </p:txBody>
+      </p:sp>
+      <p:sp>
+        <p:nvSpPr>
+          <p:cNvPr id="9" name="TextBox 8"/>
+          <p:cNvSpPr txBox="1"/>
+          <p:nvPr/>
+        </p:nvSpPr>
+        <p:spPr>
+          <a:xfrm>
+            <a:off x="7223760" y="2926080"/>
+            <a:ext cx="3657600" cy="274320"/>
+          </a:xfrm>
+          <a:prstGeom prst="rect">
+            <a:avLst/>
+          </a:prstGeom>
+          <a:noFill/>
+        </p:spPr>
+        <p:txBody>
+          <a:bodyPr wrap="square">
+            <a:spAutoFit/>
+          </a:bodyPr>
+          <a:lstStyle/>
+          <a:p>
+            <a:pPr algn="l">
+              <a:lnSpc>
+                <a:spcPct val="120000"/>
+              </a:lnSpc>
+              <a:spcBef>
+                <a:spcPts val="0"/>
+              </a:spcBef>
+              <a:spcAft>
+                <a:spcPts val="0"/>
+              </a:spcAft>
+              <a:defRPr sz="1000" b="1">
+                <a:solidFill>
+                  <a:srgbClr val="9A9690"/>
+                </a:solidFill>
+                <a:latin typeface="Courier New"/>
+              </a:defRPr>
+            </a:pPr>
+            <a:r>
+              <a:t>YOU</a:t>
+            </a:r>
+          </a:p>
+        </p:txBody>
+      </p:sp>
+      <p:sp>
+        <p:nvSpPr>
+          <p:cNvPr id="10" name="TextBox 9"/>
+          <p:cNvSpPr txBox="1"/>
+          <p:nvPr/>
+        </p:nvSpPr>
+        <p:spPr>
+          <a:xfrm>
+            <a:off x="7223760" y="3200400"/>
+            <a:ext cx="3657600" cy="365760"/>
+          </a:xfrm>
+          <a:prstGeom prst="rect">
+            <a:avLst/>
+          </a:prstGeom>
+          <a:noFill/>
+        </p:spPr>
+        <p:txBody>
+          <a:bodyPr wrap="square">
+            <a:spAutoFit/>
+          </a:bodyPr>
+          <a:lstStyle/>
+          <a:p>
+            <a:pPr algn="l">
+              <a:lnSpc>
+                <a:spcPct val="120000"/>
+              </a:lnSpc>
+              <a:spcBef>
+                <a:spcPts val="0"/>
+              </a:spcBef>
+              <a:spcAft>
+                <a:spcPts val="0"/>
+              </a:spcAft>
+              <a:defRPr sz="1400" b="0">
                 <a:solidFill>
                   <a:srgbClr val="2C2A26"/>
                 </a:solidFill>
+                <a:latin typeface="Calibri"/>
+              </a:defRPr>
+            </a:pPr>
+            <a:r>
+              <a:t>Parachute Daily  ·  Pendant  ·  Phone</a:t>
+            </a:r>
+          </a:p>
+        </p:txBody>
+      </p:sp>
+      <p:sp>
+        <p:nvSpPr>
+          <p:cNvPr id="11" name="TextBox 10"/>
+          <p:cNvSpPr txBox="1"/>
+          <p:nvPr/>
+        </p:nvSpPr>
+        <p:spPr>
+          <a:xfrm>
+            <a:off x="8686800" y="3611880"/>
+            <a:ext cx="914400" cy="274320"/>
+          </a:xfrm>
+          <a:prstGeom prst="rect">
+            <a:avLst/>
+          </a:prstGeom>
+          <a:noFill/>
+        </p:spPr>
+        <p:txBody>
+          <a:bodyPr wrap="square">
+            <a:spAutoFit/>
+          </a:bodyPr>
+          <a:lstStyle/>
+          <a:p>
+            <a:pPr algn="ctr">
+              <a:lnSpc>
+                <a:spcPct val="120000"/>
+              </a:lnSpc>
+              <a:spcBef>
+                <a:spcPts val="0"/>
+              </a:spcBef>
+              <a:spcAft>
+                <a:spcPts val="0"/>
+              </a:spcAft>
+              <a:defRPr sz="1400" b="0">
+                <a:solidFill>
+                  <a:srgbClr val="9A9690"/>
+                </a:solidFill>
+                <a:latin typeface="Courier New"/>
+              </a:defRPr>
+            </a:pPr>
+            <a:r>
+              <a:t>↓</a:t>
+            </a:r>
+          </a:p>
+        </p:txBody>
+      </p:sp>
+      <p:sp>
+        <p:nvSpPr>
+          <p:cNvPr id="12" name="TextBox 11"/>
+          <p:cNvSpPr txBox="1"/>
+          <p:nvPr/>
+        </p:nvSpPr>
+        <p:spPr>
+          <a:xfrm>
+            <a:off x="7223760" y="3931920"/>
+            <a:ext cx="3657600" cy="274320"/>
+          </a:xfrm>
+          <a:prstGeom prst="rect">
+            <a:avLst/>
+          </a:prstGeom>
+          <a:noFill/>
+        </p:spPr>
+        <p:txBody>
+          <a:bodyPr wrap="square">
+            <a:spAutoFit/>
+          </a:bodyPr>
+          <a:lstStyle/>
+          <a:p>
+            <a:pPr algn="l">
+              <a:lnSpc>
+                <a:spcPct val="120000"/>
+              </a:lnSpc>
+              <a:spcBef>
+                <a:spcPts val="0"/>
+              </a:spcBef>
+              <a:spcAft>
+                <a:spcPts val="0"/>
+              </a:spcAft>
+              <a:defRPr sz="1000" b="1">
+                <a:solidFill>
+                  <a:srgbClr val="4A7C59"/>
+                </a:solidFill>
+                <a:latin typeface="Courier New"/>
+              </a:defRPr>
+            </a:pPr>
+            <a:r>
+              <a:t>DATA</a:t>
+            </a:r>
+          </a:p>
+        </p:txBody>
+      </p:sp>
+      <p:sp>
+        <p:nvSpPr>
+          <p:cNvPr id="13" name="Rounded Rectangle 12"/>
+          <p:cNvSpPr/>
+          <p:nvPr/>
+        </p:nvSpPr>
+        <p:spPr>
+          <a:xfrm>
+            <a:off x="7132320" y="4160520"/>
+            <a:ext cx="4023360" cy="502920"/>
+          </a:xfrm>
+          <a:prstGeom prst="roundRect">
+            <a:avLst/>
+          </a:prstGeom>
+          <a:solidFill>
+            <a:srgbClr val="E8F5EC"/>
+          </a:solidFill>
+          <a:ln w="12700">
+            <a:solidFill>
+              <a:srgbClr val="4A7C59"/>
+            </a:solidFill>
+          </a:ln>
+        </p:spPr>
+        <p:style>
+          <a:lnRef idx="1">
+            <a:schemeClr val="accent1"/>
+          </a:lnRef>
+          <a:fillRef idx="3">
+            <a:schemeClr val="accent1"/>
+          </a:fillRef>
+          <a:effectRef idx="2">
+            <a:schemeClr val="accent1"/>
+          </a:effectRef>
+          <a:fontRef idx="minor">
+            <a:schemeClr val="lt1"/>
+          </a:fontRef>
+        </p:style>
+        <p:txBody>
+          <a:bodyPr rtlCol="0" anchor="ctr"/>
+          <a:lstStyle/>
+          <a:p>
+            <a:pPr algn="ctr"/>
+          </a:p>
+        </p:txBody>
+      </p:sp>
+      <p:sp>
+        <p:nvSpPr>
+          <p:cNvPr id="14" name="TextBox 13"/>
+          <p:cNvSpPr txBox="1"/>
+          <p:nvPr/>
+        </p:nvSpPr>
+        <p:spPr>
+          <a:xfrm>
+            <a:off x="7315200" y="4206240"/>
+            <a:ext cx="3657600" cy="365760"/>
+          </a:xfrm>
+          <a:prstGeom prst="rect">
+            <a:avLst/>
+          </a:prstGeom>
+          <a:noFill/>
+        </p:spPr>
+        <p:txBody>
+          <a:bodyPr wrap="square">
+            <a:spAutoFit/>
+          </a:bodyPr>
+          <a:lstStyle/>
+          <a:p>
+            <a:pPr algn="l">
+              <a:lnSpc>
+                <a:spcPct val="120000"/>
+              </a:lnSpc>
+              <a:spcBef>
+                <a:spcPts val="0"/>
+              </a:spcBef>
+              <a:spcAft>
+                <a:spcPts val="0"/>
+              </a:spcAft>
+              <a:defRPr sz="1300" b="1">
+                <a:solidFill>
+                  <a:srgbClr val="4A7C59"/>
+                </a:solidFill>
+                <a:latin typeface="Calibri"/>
+              </a:defRPr>
+            </a:pPr>
+            <a:r>
+              <a:t>Parachute Server — Things · Tags · Tools</a:t>
+            </a:r>
+          </a:p>
+        </p:txBody>
+      </p:sp>
+      <p:sp>
+        <p:nvSpPr>
+          <p:cNvPr id="15" name="TextBox 14"/>
+          <p:cNvSpPr txBox="1"/>
+          <p:nvPr/>
+        </p:nvSpPr>
+        <p:spPr>
+          <a:xfrm>
+            <a:off x="8412480" y="4709160"/>
+            <a:ext cx="1371600" cy="274320"/>
+          </a:xfrm>
+          <a:prstGeom prst="rect">
+            <a:avLst/>
+          </a:prstGeom>
+          <a:noFill/>
+        </p:spPr>
+        <p:txBody>
+          <a:bodyPr wrap="square">
+            <a:spAutoFit/>
+          </a:bodyPr>
+          <a:lstStyle/>
+          <a:p>
+            <a:pPr algn="ctr">
+              <a:lnSpc>
+                <a:spcPct val="120000"/>
+              </a:lnSpc>
+              <a:spcBef>
+                <a:spcPts val="0"/>
+              </a:spcBef>
+              <a:spcAft>
+                <a:spcPts val="0"/>
+              </a:spcAft>
+              <a:defRPr sz="1000" b="0">
+                <a:solidFill>
+                  <a:srgbClr val="9A9690"/>
+                </a:solidFill>
+                <a:latin typeface="Courier New"/>
+              </a:defRPr>
+            </a:pPr>
+            <a:r>
+              <a:t>↓ MCP</a:t>
+            </a:r>
+          </a:p>
+        </p:txBody>
+      </p:sp>
+      <p:sp>
+        <p:nvSpPr>
+          <p:cNvPr id="16" name="TextBox 15"/>
+          <p:cNvSpPr txBox="1"/>
+          <p:nvPr/>
+        </p:nvSpPr>
+        <p:spPr>
+          <a:xfrm>
+            <a:off x="7223760" y="5029200"/>
+            <a:ext cx="3657600" cy="274320"/>
+          </a:xfrm>
+          <a:prstGeom prst="rect">
+            <a:avLst/>
+          </a:prstGeom>
+          <a:noFill/>
+        </p:spPr>
+        <p:txBody>
+          <a:bodyPr wrap="square">
+            <a:spAutoFit/>
+          </a:bodyPr>
+          <a:lstStyle/>
+          <a:p>
+            <a:pPr algn="l">
+              <a:lnSpc>
+                <a:spcPct val="120000"/>
+              </a:lnSpc>
+              <a:spcBef>
+                <a:spcPts val="0"/>
+              </a:spcBef>
+              <a:spcAft>
+                <a:spcPts val="0"/>
+              </a:spcAft>
+              <a:defRPr sz="1000" b="1">
+                <a:solidFill>
+                  <a:srgbClr val="9A9690"/>
+                </a:solidFill>
+                <a:latin typeface="Courier New"/>
+              </a:defRPr>
+            </a:pPr>
+            <a:r>
+              <a:t>AGENTS</a:t>
+            </a:r>
+          </a:p>
+        </p:txBody>
+      </p:sp>
+      <p:sp>
+        <p:nvSpPr>
+          <p:cNvPr id="17" name="TextBox 16"/>
+          <p:cNvSpPr txBox="1"/>
+          <p:nvPr/>
+        </p:nvSpPr>
+        <p:spPr>
+          <a:xfrm>
+            <a:off x="7223760" y="5303520"/>
+            <a:ext cx="3657600" cy="365760"/>
+          </a:xfrm>
+          <a:prstGeom prst="rect">
+            <a:avLst/>
+          </a:prstGeom>
+          <a:noFill/>
+        </p:spPr>
+        <p:txBody>
+          <a:bodyPr wrap="square">
+            <a:spAutoFit/>
+          </a:bodyPr>
+          <a:lstStyle/>
+          <a:p>
+            <a:pPr algn="l">
+              <a:lnSpc>
+                <a:spcPct val="120000"/>
+              </a:lnSpc>
+              <a:spcBef>
+                <a:spcPts val="0"/>
+              </a:spcBef>
+              <a:spcAft>
+                <a:spcPts val="0"/>
+              </a:spcAft>
+              <a:defRPr sz="1400" b="0">
+                <a:solidFill>
+                  <a:srgbClr val="2C2A26"/>
+                </a:solidFill>
+                <a:latin typeface="Calibri"/>
+              </a:defRPr>
+            </a:pPr>
+            <a:r>
+              <a:t>Claude  ·  ChatGPT  ·  OpenClaw  ·  Any AI</a:t>
+            </a:r>
+          </a:p>
+        </p:txBody>
+      </p:sp>
+      <p:sp>
+        <p:nvSpPr>
+          <p:cNvPr id="18" name="TextBox 17"/>
+          <p:cNvSpPr txBox="1"/>
+          <p:nvPr/>
+        </p:nvSpPr>
+        <p:spPr>
+          <a:xfrm>
+            <a:off x="1097280" y="5760720"/>
+            <a:ext cx="9144000" cy="548640"/>
+          </a:xfrm>
+          <a:prstGeom prst="rect">
+            <a:avLst/>
+          </a:prstGeom>
+          <a:noFill/>
+        </p:spPr>
+        <p:txBody>
+          <a:bodyPr wrap="square">
+            <a:spAutoFit/>
+          </a:bodyPr>
+          <a:lstStyle/>
+          <a:p>
+            <a:pPr algn="l">
+              <a:lnSpc>
+                <a:spcPct val="130000"/>
+              </a:lnSpc>
+              <a:spcBef>
+                <a:spcPts val="0"/>
+              </a:spcBef>
+              <a:spcAft>
+                <a:spcPts val="0"/>
+              </a:spcAft>
+              <a:defRPr sz="2000" b="0">
+                <a:solidFill>
+                  <a:srgbClr val="2C2A26"/>
+                </a:solidFill>
                 <a:latin typeface="Georgia"/>
               </a:defRPr>
             </a:pPr>
             <a:r>
-              <a:t>They need a system that learns them —</a:t>
+              <a:t>We’re not trying to build the most intelligent tool.</a:t>
             </a:r>
             <a:br/>
             <a:r>
-              <a:t>not one that demands they learn it.</a:t>
+              <a:t>We’re building the most important tool for intelligent systems to use.</a:t>
             </a:r>
           </a:p>
         </p:txBody>
@@ -5716,235 +5063,23 @@
       <p:grpSpPr/>
       <p:sp>
         <p:nvSpPr>
-          <p:cNvPr id="2" name="TextBox 1"/>
-          <p:cNvSpPr txBox="1"/>
-          <p:nvPr/>
-        </p:nvSpPr>
-        <p:spPr>
-          <a:xfrm>
-            <a:off x="1097280" y="1097280"/>
-            <a:ext cx="3657600" cy="365760"/>
-          </a:xfrm>
-          <a:prstGeom prst="rect">
-            <a:avLst/>
-          </a:prstGeom>
-          <a:noFill/>
-        </p:spPr>
-        <p:txBody>
-          <a:bodyPr wrap="square">
-            <a:spAutoFit/>
-          </a:bodyPr>
-          <a:lstStyle/>
-          <a:p>
-            <a:pPr algn="l">
-              <a:lnSpc>
-                <a:spcPct val="120000"/>
-              </a:lnSpc>
-              <a:spcBef>
-                <a:spcPts val="0"/>
-              </a:spcBef>
-              <a:spcAft>
-                <a:spcPts val="0"/>
-              </a:spcAft>
-              <a:defRPr sz="1100" b="1">
-                <a:solidFill>
-                  <a:srgbClr val="4A7C59"/>
-                </a:solidFill>
-                <a:latin typeface="Calibri"/>
-              </a:defRPr>
-            </a:pPr>
-            <a:r>
-              <a:t>THE SOLUTION</a:t>
-            </a:r>
-          </a:p>
-        </p:txBody>
-      </p:sp>
-      <p:sp>
-        <p:nvSpPr>
-          <p:cNvPr id="3" name="TextBox 2"/>
-          <p:cNvSpPr txBox="1"/>
-          <p:nvPr/>
-        </p:nvSpPr>
-        <p:spPr>
-          <a:xfrm>
-            <a:off x="1097280" y="1554480"/>
-            <a:ext cx="9144000" cy="1371600"/>
-          </a:xfrm>
-          <a:prstGeom prst="rect">
-            <a:avLst/>
-          </a:prstGeom>
-          <a:noFill/>
-        </p:spPr>
-        <p:txBody>
-          <a:bodyPr wrap="square">
-            <a:spAutoFit/>
-          </a:bodyPr>
-          <a:lstStyle/>
-          <a:p>
-            <a:pPr algn="l">
-              <a:lnSpc>
-                <a:spcPct val="105000"/>
-              </a:lnSpc>
-              <a:spcBef>
-                <a:spcPts val="0"/>
-              </a:spcBef>
-              <a:spcAft>
-                <a:spcPts val="0"/>
-              </a:spcAft>
-              <a:defRPr sz="4000" b="0">
-                <a:solidFill>
-                  <a:srgbClr val="2C2A26"/>
-                </a:solidFill>
-                <a:latin typeface="Georgia"/>
-              </a:defRPr>
-            </a:pPr>
-            <a:r>
-              <a:t>Parachute Daily.</a:t>
-            </a:r>
-            <a:br/>
-            <a:r>
-              <a:t>Just talk.</a:t>
-            </a:r>
-          </a:p>
-        </p:txBody>
-      </p:sp>
-      <p:sp>
-        <p:nvSpPr>
-          <p:cNvPr id="4" name="TextBox 3"/>
-          <p:cNvSpPr txBox="1"/>
-          <p:nvPr/>
-        </p:nvSpPr>
-        <p:spPr>
-          <a:xfrm>
-            <a:off x="1097280" y="3200400"/>
-            <a:ext cx="5029200" cy="2560320"/>
-          </a:xfrm>
-          <a:prstGeom prst="rect">
-            <a:avLst/>
-          </a:prstGeom>
-          <a:noFill/>
-        </p:spPr>
-        <p:txBody>
-          <a:bodyPr wrap="square">
-            <a:spAutoFit/>
-          </a:bodyPr>
-          <a:lstStyle/>
-          <a:p>
-            <a:pPr algn="l">
-              <a:lnSpc>
-                <a:spcPct val="150000"/>
-              </a:lnSpc>
-              <a:spcBef>
-                <a:spcPts val="0"/>
-              </a:spcBef>
-              <a:spcAft>
-                <a:spcPts val="0"/>
-              </a:spcAft>
-              <a:defRPr sz="1800" b="0">
-                <a:solidFill>
-                  <a:srgbClr val="6B6860"/>
-                </a:solidFill>
-                <a:latin typeface="Calibri"/>
-              </a:defRPr>
-            </a:pPr>
-            <a:r>
-              <a:t>A voice-first journal.</a:t>
-            </a:r>
-            <a:br/>
-            <a:br/>
-            <a:r>
-              <a:t>Speak into a wearable pendant or your phone —</a:t>
-            </a:r>
-            <a:br/>
-            <a:r>
-              <a:t>on a walk, in the car, wherever thinking happens.</a:t>
-            </a:r>
-            <a:br/>
-            <a:br/>
-            <a:r>
-              <a:t>AI weaves through gently:</a:t>
-            </a:r>
-            <a:br/>
-            <a:r>
-              <a:t>  ·  Daily reflections on your entries</a:t>
-            </a:r>
-            <a:br/>
-            <a:r>
-              <a:t>  ·  Pattern recognition over time</a:t>
-            </a:r>
-            <a:br/>
-            <a:r>
-              <a:t>  ·  Weekly synthesis of your thinking</a:t>
-            </a:r>
-          </a:p>
-        </p:txBody>
-      </p:sp>
-      <p:sp>
-        <p:nvSpPr>
-          <p:cNvPr id="5" name="TextBox 4"/>
-          <p:cNvSpPr txBox="1"/>
-          <p:nvPr/>
-        </p:nvSpPr>
-        <p:spPr>
-          <a:xfrm>
-            <a:off x="1097280" y="5943600"/>
-            <a:ext cx="5029200" cy="457200"/>
-          </a:xfrm>
-          <a:prstGeom prst="rect">
-            <a:avLst/>
-          </a:prstGeom>
-          <a:noFill/>
-        </p:spPr>
-        <p:txBody>
-          <a:bodyPr wrap="square">
-            <a:spAutoFit/>
-          </a:bodyPr>
-          <a:lstStyle/>
-          <a:p>
-            <a:pPr algn="l">
-              <a:lnSpc>
-                <a:spcPct val="120000"/>
-              </a:lnSpc>
-              <a:spcBef>
-                <a:spcPts val="0"/>
-              </a:spcBef>
-              <a:spcAft>
-                <a:spcPts val="0"/>
-              </a:spcAft>
-              <a:defRPr sz="1800" b="0">
-                <a:solidFill>
-                  <a:srgbClr val="2C2A26"/>
-                </a:solidFill>
-                <a:latin typeface="Calibri"/>
-              </a:defRPr>
-            </a:pPr>
-            <a:r>
-              <a:t>No learning curve. No technical sophistication required.</a:t>
-            </a:r>
-          </a:p>
-        </p:txBody>
-      </p:sp>
-      <p:sp>
-        <p:nvSpPr>
-          <p:cNvPr id="6" name="Rounded Rectangle 5"/>
+          <p:cNvPr id="2" name="Rectangle 1"/>
           <p:cNvSpPr/>
           <p:nvPr/>
         </p:nvSpPr>
         <p:spPr>
           <a:xfrm>
-            <a:off x="7132320" y="3200400"/>
-            <a:ext cx="4114800" cy="2743200"/>
-          </a:xfrm>
-          <a:prstGeom prst="roundRect">
+            <a:off x="0" y="0"/>
+            <a:ext cx="12191695" cy="54864"/>
+          </a:xfrm>
+          <a:prstGeom prst="rect">
             <a:avLst/>
           </a:prstGeom>
           <a:solidFill>
-            <a:srgbClr val="F3F0EA"/>
+            <a:srgbClr val="4A7C59"/>
           </a:solidFill>
-          <a:ln w="12700">
-            <a:solidFill>
-              <a:srgbClr val="E4E0D8"/>
-            </a:solidFill>
+          <a:ln>
+            <a:noFill/>
           </a:ln>
         </p:spPr>
         <p:style>
@@ -5971,14 +5106,50 @@
       </p:sp>
       <p:sp>
         <p:nvSpPr>
-          <p:cNvPr id="7" name="TextBox 6"/>
+          <p:cNvPr id="3" name="TextBox 2"/>
           <p:cNvSpPr txBox="1"/>
           <p:nvPr/>
         </p:nvSpPr>
         <p:spPr>
           <a:xfrm>
-            <a:off x="7498079" y="3474720"/>
-            <a:ext cx="3383280" cy="365760"/>
+            <a:off x="1097280" y="6400800"/>
+            <a:ext cx="3657600" cy="274320"/>
+          </a:xfrm>
+          <a:prstGeom prst="rect">
+            <a:avLst/>
+          </a:prstGeom>
+          <a:noFill/>
+        </p:spPr>
+        <p:txBody>
+          <a:bodyPr wrap="none">
+            <a:spAutoFit/>
+          </a:bodyPr>
+          <a:lstStyle/>
+          <a:p>
+            <a:pPr>
+              <a:defRPr sz="900">
+                <a:solidFill>
+                  <a:srgbClr val="9A9690"/>
+                </a:solidFill>
+                <a:latin typeface="Calibri"/>
+              </a:defRPr>
+            </a:pPr>
+            <a:r>
+              <a:t>parachute.computer</a:t>
+            </a:r>
+          </a:p>
+        </p:txBody>
+      </p:sp>
+      <p:sp>
+        <p:nvSpPr>
+          <p:cNvPr id="4" name="TextBox 3"/>
+          <p:cNvSpPr txBox="1"/>
+          <p:nvPr/>
+        </p:nvSpPr>
+        <p:spPr>
+          <a:xfrm>
+            <a:off x="1097280" y="1097280"/>
+            <a:ext cx="3657600" cy="365760"/>
           </a:xfrm>
           <a:prstGeom prst="rect">
             <a:avLst/>
@@ -6009,21 +5180,21 @@
               </a:defRPr>
             </a:pPr>
             <a:r>
-              <a:t>THE PENDANT</a:t>
-            </a:r>
-          </a:p>
-        </p:txBody>
-      </p:sp>
-      <p:sp>
-        <p:nvSpPr>
-          <p:cNvPr id="8" name="TextBox 7"/>
+              <a:t>THE INSIGHT</a:t>
+            </a:r>
+          </a:p>
+        </p:txBody>
+      </p:sp>
+      <p:sp>
+        <p:nvSpPr>
+          <p:cNvPr id="5" name="TextBox 4"/>
           <p:cNvSpPr txBox="1"/>
           <p:nvPr/>
         </p:nvSpPr>
         <p:spPr>
           <a:xfrm>
-            <a:off x="7498079" y="3931920"/>
-            <a:ext cx="3383280" cy="1828800"/>
+            <a:off x="1097280" y="1554480"/>
+            <a:ext cx="9144000" cy="1371600"/>
           </a:xfrm>
           <a:prstGeom prst="rect">
             <a:avLst/>
@@ -6038,7 +5209,7 @@
           <a:p>
             <a:pPr algn="l">
               <a:lnSpc>
-                <a:spcPct val="145000"/>
+                <a:spcPct val="105000"/>
               </a:lnSpc>
               <a:spcBef>
                 <a:spcPts val="0"/>
@@ -6046,6 +5217,550 @@
               <a:spcAft>
                 <a:spcPts val="0"/>
               </a:spcAft>
+              <a:defRPr sz="4000" b="0">
+                <a:solidFill>
+                  <a:srgbClr val="2C2A26"/>
+                </a:solidFill>
+                <a:latin typeface="Georgia"/>
+              </a:defRPr>
+            </a:pPr>
+            <a:r>
+              <a:t>Context compounds.</a:t>
+            </a:r>
+          </a:p>
+        </p:txBody>
+      </p:sp>
+      <p:sp>
+        <p:nvSpPr>
+          <p:cNvPr id="6" name="TextBox 5"/>
+          <p:cNvSpPr txBox="1"/>
+          <p:nvPr/>
+        </p:nvSpPr>
+        <p:spPr>
+          <a:xfrm>
+            <a:off x="1097280" y="3017520"/>
+            <a:ext cx="9144000" cy="731520"/>
+          </a:xfrm>
+          <a:prstGeom prst="rect">
+            <a:avLst/>
+          </a:prstGeom>
+          <a:noFill/>
+        </p:spPr>
+        <p:txBody>
+          <a:bodyPr wrap="square">
+            <a:spAutoFit/>
+          </a:bodyPr>
+          <a:lstStyle/>
+          <a:p>
+            <a:pPr algn="l">
+              <a:lnSpc>
+                <a:spcPct val="150000"/>
+              </a:lnSpc>
+              <a:spcBef>
+                <a:spcPts val="0"/>
+              </a:spcBef>
+              <a:spcAft>
+                <a:spcPts val="0"/>
+              </a:spcAft>
+              <a:defRPr sz="2000" b="0">
+                <a:solidFill>
+                  <a:srgbClr val="6B6860"/>
+                </a:solidFill>
+                <a:latin typeface="Calibri"/>
+              </a:defRPr>
+            </a:pPr>
+            <a:r>
+              <a:t>Every note, every voice entry builds a richer personal data layer —</a:t>
+            </a:r>
+            <a:br/>
+            <a:r>
+              <a:t>not a flat text file, but a real graph that can be queried across months and years.</a:t>
+            </a:r>
+          </a:p>
+        </p:txBody>
+      </p:sp>
+      <p:sp>
+        <p:nvSpPr>
+          <p:cNvPr id="7" name="TextBox 6"/>
+          <p:cNvSpPr txBox="1"/>
+          <p:nvPr/>
+        </p:nvSpPr>
+        <p:spPr>
+          <a:xfrm>
+            <a:off x="1371600" y="4206240"/>
+            <a:ext cx="548640" cy="411480"/>
+          </a:xfrm>
+          <a:prstGeom prst="rect">
+            <a:avLst/>
+          </a:prstGeom>
+          <a:noFill/>
+        </p:spPr>
+        <p:txBody>
+          <a:bodyPr wrap="square">
+            <a:spAutoFit/>
+          </a:bodyPr>
+          <a:lstStyle/>
+          <a:p>
+            <a:pPr algn="l">
+              <a:lnSpc>
+                <a:spcPct val="120000"/>
+              </a:lnSpc>
+              <a:spcBef>
+                <a:spcPts val="0"/>
+              </a:spcBef>
+              <a:spcAft>
+                <a:spcPts val="0"/>
+              </a:spcAft>
+              <a:defRPr sz="1400" b="0">
+                <a:solidFill>
+                  <a:srgbClr val="9A9690"/>
+                </a:solidFill>
+                <a:latin typeface="Courier New"/>
+              </a:defRPr>
+            </a:pPr>
+            <a:r>
+              <a:t>01</a:t>
+            </a:r>
+          </a:p>
+        </p:txBody>
+      </p:sp>
+      <p:sp>
+        <p:nvSpPr>
+          <p:cNvPr id="8" name="TextBox 7"/>
+          <p:cNvSpPr txBox="1"/>
+          <p:nvPr/>
+        </p:nvSpPr>
+        <p:spPr>
+          <a:xfrm>
+            <a:off x="2011680" y="4206240"/>
+            <a:ext cx="5486400" cy="411480"/>
+          </a:xfrm>
+          <a:prstGeom prst="rect">
+            <a:avLst/>
+          </a:prstGeom>
+          <a:noFill/>
+        </p:spPr>
+        <p:txBody>
+          <a:bodyPr wrap="square">
+            <a:spAutoFit/>
+          </a:bodyPr>
+          <a:lstStyle/>
+          <a:p>
+            <a:pPr algn="l">
+              <a:lnSpc>
+                <a:spcPct val="120000"/>
+              </a:lnSpc>
+              <a:spcBef>
+                <a:spcPts val="0"/>
+              </a:spcBef>
+              <a:spcAft>
+                <a:spcPts val="0"/>
+              </a:spcAft>
+              <a:defRPr sz="2000" b="0">
+                <a:solidFill>
+                  <a:srgbClr val="2C2A26"/>
+                </a:solidFill>
+                <a:latin typeface="Georgia"/>
+              </a:defRPr>
+            </a:pPr>
+            <a:r>
+              <a:t>Capture thoughts in Daily</a:t>
+            </a:r>
+          </a:p>
+        </p:txBody>
+      </p:sp>
+      <p:sp>
+        <p:nvSpPr>
+          <p:cNvPr id="9" name="TextBox 8"/>
+          <p:cNvSpPr txBox="1"/>
+          <p:nvPr/>
+        </p:nvSpPr>
+        <p:spPr>
+          <a:xfrm>
+            <a:off x="1371600" y="4663440"/>
+            <a:ext cx="548640" cy="411480"/>
+          </a:xfrm>
+          <a:prstGeom prst="rect">
+            <a:avLst/>
+          </a:prstGeom>
+          <a:noFill/>
+        </p:spPr>
+        <p:txBody>
+          <a:bodyPr wrap="square">
+            <a:spAutoFit/>
+          </a:bodyPr>
+          <a:lstStyle/>
+          <a:p>
+            <a:pPr algn="l">
+              <a:lnSpc>
+                <a:spcPct val="120000"/>
+              </a:lnSpc>
+              <a:spcBef>
+                <a:spcPts val="0"/>
+              </a:spcBef>
+              <a:spcAft>
+                <a:spcPts val="0"/>
+              </a:spcAft>
+              <a:defRPr sz="1400" b="0">
+                <a:solidFill>
+                  <a:srgbClr val="9A9690"/>
+                </a:solidFill>
+                <a:latin typeface="Courier New"/>
+              </a:defRPr>
+            </a:pPr>
+            <a:r>
+              <a:t>02</a:t>
+            </a:r>
+          </a:p>
+        </p:txBody>
+      </p:sp>
+      <p:sp>
+        <p:nvSpPr>
+          <p:cNvPr id="10" name="TextBox 9"/>
+          <p:cNvSpPr txBox="1"/>
+          <p:nvPr/>
+        </p:nvSpPr>
+        <p:spPr>
+          <a:xfrm>
+            <a:off x="2011680" y="4663440"/>
+            <a:ext cx="5486400" cy="411480"/>
+          </a:xfrm>
+          <a:prstGeom prst="rect">
+            <a:avLst/>
+          </a:prstGeom>
+          <a:noFill/>
+        </p:spPr>
+        <p:txBody>
+          <a:bodyPr wrap="square">
+            <a:spAutoFit/>
+          </a:bodyPr>
+          <a:lstStyle/>
+          <a:p>
+            <a:pPr algn="l">
+              <a:lnSpc>
+                <a:spcPct val="120000"/>
+              </a:lnSpc>
+              <a:spcBef>
+                <a:spcPts val="0"/>
+              </a:spcBef>
+              <a:spcAft>
+                <a:spcPts val="0"/>
+              </a:spcAft>
+              <a:defRPr sz="2000" b="0">
+                <a:solidFill>
+                  <a:srgbClr val="2C2A26"/>
+                </a:solidFill>
+                <a:latin typeface="Georgia"/>
+              </a:defRPr>
+            </a:pPr>
+            <a:r>
+              <a:t>Build months of personal context</a:t>
+            </a:r>
+          </a:p>
+        </p:txBody>
+      </p:sp>
+      <p:sp>
+        <p:nvSpPr>
+          <p:cNvPr id="11" name="TextBox 10"/>
+          <p:cNvSpPr txBox="1"/>
+          <p:nvPr/>
+        </p:nvSpPr>
+        <p:spPr>
+          <a:xfrm>
+            <a:off x="1371600" y="5120640"/>
+            <a:ext cx="548640" cy="411480"/>
+          </a:xfrm>
+          <a:prstGeom prst="rect">
+            <a:avLst/>
+          </a:prstGeom>
+          <a:noFill/>
+        </p:spPr>
+        <p:txBody>
+          <a:bodyPr wrap="square">
+            <a:spAutoFit/>
+          </a:bodyPr>
+          <a:lstStyle/>
+          <a:p>
+            <a:pPr algn="l">
+              <a:lnSpc>
+                <a:spcPct val="120000"/>
+              </a:lnSpc>
+              <a:spcBef>
+                <a:spcPts val="0"/>
+              </a:spcBef>
+              <a:spcAft>
+                <a:spcPts val="0"/>
+              </a:spcAft>
+              <a:defRPr sz="1400" b="0">
+                <a:solidFill>
+                  <a:srgbClr val="9A9690"/>
+                </a:solidFill>
+                <a:latin typeface="Courier New"/>
+              </a:defRPr>
+            </a:pPr>
+            <a:r>
+              <a:t>03</a:t>
+            </a:r>
+          </a:p>
+        </p:txBody>
+      </p:sp>
+      <p:sp>
+        <p:nvSpPr>
+          <p:cNvPr id="12" name="TextBox 11"/>
+          <p:cNvSpPr txBox="1"/>
+          <p:nvPr/>
+        </p:nvSpPr>
+        <p:spPr>
+          <a:xfrm>
+            <a:off x="2011680" y="5120640"/>
+            <a:ext cx="5486400" cy="411480"/>
+          </a:xfrm>
+          <a:prstGeom prst="rect">
+            <a:avLst/>
+          </a:prstGeom>
+          <a:noFill/>
+        </p:spPr>
+        <p:txBody>
+          <a:bodyPr wrap="square">
+            <a:spAutoFit/>
+          </a:bodyPr>
+          <a:lstStyle/>
+          <a:p>
+            <a:pPr algn="l">
+              <a:lnSpc>
+                <a:spcPct val="120000"/>
+              </a:lnSpc>
+              <a:spcBef>
+                <a:spcPts val="0"/>
+              </a:spcBef>
+              <a:spcAft>
+                <a:spcPts val="0"/>
+              </a:spcAft>
+              <a:defRPr sz="2000" b="0">
+                <a:solidFill>
+                  <a:srgbClr val="2C2A26"/>
+                </a:solidFill>
+                <a:latin typeface="Georgia"/>
+              </a:defRPr>
+            </a:pPr>
+            <a:r>
+              <a:t>Connect any AI via MCP</a:t>
+            </a:r>
+          </a:p>
+        </p:txBody>
+      </p:sp>
+      <p:sp>
+        <p:nvSpPr>
+          <p:cNvPr id="13" name="TextBox 12"/>
+          <p:cNvSpPr txBox="1"/>
+          <p:nvPr/>
+        </p:nvSpPr>
+        <p:spPr>
+          <a:xfrm>
+            <a:off x="1371600" y="5577840"/>
+            <a:ext cx="548640" cy="411480"/>
+          </a:xfrm>
+          <a:prstGeom prst="rect">
+            <a:avLst/>
+          </a:prstGeom>
+          <a:noFill/>
+        </p:spPr>
+        <p:txBody>
+          <a:bodyPr wrap="square">
+            <a:spAutoFit/>
+          </a:bodyPr>
+          <a:lstStyle/>
+          <a:p>
+            <a:pPr algn="l">
+              <a:lnSpc>
+                <a:spcPct val="120000"/>
+              </a:lnSpc>
+              <a:spcBef>
+                <a:spcPts val="0"/>
+              </a:spcBef>
+              <a:spcAft>
+                <a:spcPts val="0"/>
+              </a:spcAft>
+              <a:defRPr sz="1400" b="0">
+                <a:solidFill>
+                  <a:srgbClr val="9A9690"/>
+                </a:solidFill>
+                <a:latin typeface="Courier New"/>
+              </a:defRPr>
+            </a:pPr>
+            <a:r>
+              <a:t>04</a:t>
+            </a:r>
+          </a:p>
+        </p:txBody>
+      </p:sp>
+      <p:sp>
+        <p:nvSpPr>
+          <p:cNvPr id="14" name="TextBox 13"/>
+          <p:cNvSpPr txBox="1"/>
+          <p:nvPr/>
+        </p:nvSpPr>
+        <p:spPr>
+          <a:xfrm>
+            <a:off x="2011680" y="5577840"/>
+            <a:ext cx="5486400" cy="411480"/>
+          </a:xfrm>
+          <a:prstGeom prst="rect">
+            <a:avLst/>
+          </a:prstGeom>
+          <a:noFill/>
+        </p:spPr>
+        <p:txBody>
+          <a:bodyPr wrap="square">
+            <a:spAutoFit/>
+          </a:bodyPr>
+          <a:lstStyle/>
+          <a:p>
+            <a:pPr algn="l">
+              <a:lnSpc>
+                <a:spcPct val="120000"/>
+              </a:lnSpc>
+              <a:spcBef>
+                <a:spcPts val="0"/>
+              </a:spcBef>
+              <a:spcAft>
+                <a:spcPts val="0"/>
+              </a:spcAft>
+              <a:defRPr sz="2000" b="0">
+                <a:solidFill>
+                  <a:srgbClr val="2C2A26"/>
+                </a:solidFill>
+                <a:latin typeface="Georgia"/>
+              </a:defRPr>
+            </a:pPr>
+            <a:r>
+              <a:t>AI already knows you</a:t>
+            </a:r>
+          </a:p>
+        </p:txBody>
+      </p:sp>
+      <p:sp>
+        <p:nvSpPr>
+          <p:cNvPr id="15" name="TextBox 14"/>
+          <p:cNvSpPr txBox="1"/>
+          <p:nvPr/>
+        </p:nvSpPr>
+        <p:spPr>
+          <a:xfrm>
+            <a:off x="1371600" y="6035040"/>
+            <a:ext cx="548640" cy="411480"/>
+          </a:xfrm>
+          <a:prstGeom prst="rect">
+            <a:avLst/>
+          </a:prstGeom>
+          <a:noFill/>
+        </p:spPr>
+        <p:txBody>
+          <a:bodyPr wrap="square">
+            <a:spAutoFit/>
+          </a:bodyPr>
+          <a:lstStyle/>
+          <a:p>
+            <a:pPr algn="l">
+              <a:lnSpc>
+                <a:spcPct val="120000"/>
+              </a:lnSpc>
+              <a:spcBef>
+                <a:spcPts val="0"/>
+              </a:spcBef>
+              <a:spcAft>
+                <a:spcPts val="0"/>
+              </a:spcAft>
+              <a:defRPr sz="1400" b="0">
+                <a:solidFill>
+                  <a:srgbClr val="4A7C59"/>
+                </a:solidFill>
+                <a:latin typeface="Courier New"/>
+              </a:defRPr>
+            </a:pPr>
+            <a:r>
+              <a:t>→</a:t>
+            </a:r>
+          </a:p>
+        </p:txBody>
+      </p:sp>
+      <p:sp>
+        <p:nvSpPr>
+          <p:cNvPr id="16" name="TextBox 15"/>
+          <p:cNvSpPr txBox="1"/>
+          <p:nvPr/>
+        </p:nvSpPr>
+        <p:spPr>
+          <a:xfrm>
+            <a:off x="2011680" y="6035040"/>
+            <a:ext cx="5486400" cy="411480"/>
+          </a:xfrm>
+          <a:prstGeom prst="rect">
+            <a:avLst/>
+          </a:prstGeom>
+          <a:noFill/>
+        </p:spPr>
+        <p:txBody>
+          <a:bodyPr wrap="square">
+            <a:spAutoFit/>
+          </a:bodyPr>
+          <a:lstStyle/>
+          <a:p>
+            <a:pPr algn="l">
+              <a:lnSpc>
+                <a:spcPct val="120000"/>
+              </a:lnSpc>
+              <a:spcBef>
+                <a:spcPts val="0"/>
+              </a:spcBef>
+              <a:spcAft>
+                <a:spcPts val="0"/>
+              </a:spcAft>
+              <a:defRPr sz="2000" b="1">
+                <a:solidFill>
+                  <a:srgbClr val="4A7C59"/>
+                </a:solidFill>
+                <a:latin typeface="Georgia"/>
+              </a:defRPr>
+            </a:pPr>
+            <a:r>
+              <a:t>Switching cost through genuine value</a:t>
+            </a:r>
+          </a:p>
+        </p:txBody>
+      </p:sp>
+      <p:sp>
+        <p:nvSpPr>
+          <p:cNvPr id="17" name="TextBox 16"/>
+          <p:cNvSpPr txBox="1"/>
+          <p:nvPr/>
+        </p:nvSpPr>
+        <p:spPr>
+          <a:xfrm>
+            <a:off x="6858000" y="4206240"/>
+            <a:ext cx="4572000" cy="1828800"/>
+          </a:xfrm>
+          <a:prstGeom prst="rect">
+            <a:avLst/>
+          </a:prstGeom>
+          <a:noFill/>
+        </p:spPr>
+        <p:txBody>
+          <a:bodyPr wrap="square">
+            <a:spAutoFit/>
+          </a:bodyPr>
+          <a:lstStyle/>
+          <a:p>
+            <a:pPr algn="l">
+              <a:lnSpc>
+                <a:spcPct val="150000"/>
+              </a:lnSpc>
+              <a:spcBef>
+                <a:spcPts val="0"/>
+              </a:spcBef>
+              <a:spcAft>
+                <a:spcPts val="0"/>
+              </a:spcAft>
               <a:defRPr sz="1600" b="0">
                 <a:solidFill>
                   <a:srgbClr val="6B6860"/>
@@ -6054,25 +5769,24 @@
               </a:defRPr>
             </a:pPr>
             <a:r>
-              <a:t>Wearable voice capture device.</a:t>
+              <a:t>Open source (AGPL-3.0)</a:t>
+            </a:r>
+            <a:br/>
+            <a:r>
+              <a:t>Local-first</a:t>
+            </a:r>
+            <a:br/>
+            <a:r>
+              <a:t>Public Benefit Corporation</a:t>
             </a:r>
             <a:br/>
             <a:br/>
             <a:r>
-              <a:t>Go for a walk. Talk.</a:t>
+              <a:t>Your data is yours —</a:t>
             </a:r>
             <a:br/>
             <a:r>
-              <a:t>Your thoughts become structured</a:t>
-            </a:r>
-            <a:br/>
-            <a:r>
-              <a:t>knowledge by the time you're home.</a:t>
-            </a:r>
-            <a:br/>
-            <a:br/>
-            <a:r>
-              <a:t>Working prototype on stage today.</a:t>
+              <a:t>portable, exportable, self-hostable.</a:t>
             </a:r>
           </a:p>
         </p:txBody>
@@ -6105,7 +5819,86 @@
       <p:grpSpPr/>
       <p:sp>
         <p:nvSpPr>
-          <p:cNvPr id="2" name="TextBox 1"/>
+          <p:cNvPr id="2" name="Rectangle 1"/>
+          <p:cNvSpPr/>
+          <p:nvPr/>
+        </p:nvSpPr>
+        <p:spPr>
+          <a:xfrm>
+            <a:off x="0" y="0"/>
+            <a:ext cx="12191695" cy="54864"/>
+          </a:xfrm>
+          <a:prstGeom prst="rect">
+            <a:avLst/>
+          </a:prstGeom>
+          <a:solidFill>
+            <a:srgbClr val="4A7C59"/>
+          </a:solidFill>
+          <a:ln>
+            <a:noFill/>
+          </a:ln>
+        </p:spPr>
+        <p:style>
+          <a:lnRef idx="1">
+            <a:schemeClr val="accent1"/>
+          </a:lnRef>
+          <a:fillRef idx="3">
+            <a:schemeClr val="accent1"/>
+          </a:fillRef>
+          <a:effectRef idx="2">
+            <a:schemeClr val="accent1"/>
+          </a:effectRef>
+          <a:fontRef idx="minor">
+            <a:schemeClr val="lt1"/>
+          </a:fontRef>
+        </p:style>
+        <p:txBody>
+          <a:bodyPr rtlCol="0" anchor="ctr"/>
+          <a:lstStyle/>
+          <a:p>
+            <a:pPr algn="ctr"/>
+          </a:p>
+        </p:txBody>
+      </p:sp>
+      <p:sp>
+        <p:nvSpPr>
+          <p:cNvPr id="3" name="TextBox 2"/>
+          <p:cNvSpPr txBox="1"/>
+          <p:nvPr/>
+        </p:nvSpPr>
+        <p:spPr>
+          <a:xfrm>
+            <a:off x="1097280" y="6400800"/>
+            <a:ext cx="3657600" cy="274320"/>
+          </a:xfrm>
+          <a:prstGeom prst="rect">
+            <a:avLst/>
+          </a:prstGeom>
+          <a:noFill/>
+        </p:spPr>
+        <p:txBody>
+          <a:bodyPr wrap="none">
+            <a:spAutoFit/>
+          </a:bodyPr>
+          <a:lstStyle/>
+          <a:p>
+            <a:pPr>
+              <a:defRPr sz="900">
+                <a:solidFill>
+                  <a:srgbClr val="9A9690"/>
+                </a:solidFill>
+                <a:latin typeface="Calibri"/>
+              </a:defRPr>
+            </a:pPr>
+            <a:r>
+              <a:t>parachute.computer</a:t>
+            </a:r>
+          </a:p>
+        </p:txBody>
+      </p:sp>
+      <p:sp>
+        <p:nvSpPr>
+          <p:cNvPr id="4" name="TextBox 3"/>
           <p:cNvSpPr txBox="1"/>
           <p:nvPr/>
         </p:nvSpPr>
@@ -6143,14 +5936,14 @@
               </a:defRPr>
             </a:pPr>
             <a:r>
-              <a:t>THE INSIGHT</a:t>
-            </a:r>
-          </a:p>
-        </p:txBody>
-      </p:sp>
-      <p:sp>
-        <p:nvSpPr>
-          <p:cNvPr id="3" name="TextBox 2"/>
+              <a:t>BUSINESS MODEL</a:t>
+            </a:r>
+          </a:p>
+        </p:txBody>
+      </p:sp>
+      <p:sp>
+        <p:nvSpPr>
+          <p:cNvPr id="5" name="TextBox 4"/>
           <p:cNvSpPr txBox="1"/>
           <p:nvPr/>
         </p:nvSpPr>
@@ -6188,21 +5981,428 @@
               </a:defRPr>
             </a:pPr>
             <a:r>
-              <a:t>Context compounds.</a:t>
-            </a:r>
-          </a:p>
-        </p:txBody>
-      </p:sp>
-      <p:sp>
-        <p:nvSpPr>
-          <p:cNvPr id="4" name="TextBox 3"/>
+              <a:t>Start free.</a:t>
+            </a:r>
+            <a:br/>
+            <a:r>
+              <a:t>Grow with every user.</a:t>
+            </a:r>
+          </a:p>
+        </p:txBody>
+      </p:sp>
+      <p:sp>
+        <p:nvSpPr>
+          <p:cNvPr id="6" name="TextBox 5"/>
           <p:cNvSpPr txBox="1"/>
           <p:nvPr/>
         </p:nvSpPr>
         <p:spPr>
           <a:xfrm>
-            <a:off x="1097280" y="3017520"/>
-            <a:ext cx="9144000" cy="731520"/>
+            <a:off x="1097280" y="3108960"/>
+            <a:ext cx="1645920" cy="365760"/>
+          </a:xfrm>
+          <a:prstGeom prst="rect">
+            <a:avLst/>
+          </a:prstGeom>
+          <a:noFill/>
+        </p:spPr>
+        <p:txBody>
+          <a:bodyPr wrap="square">
+            <a:spAutoFit/>
+          </a:bodyPr>
+          <a:lstStyle/>
+          <a:p>
+            <a:pPr algn="l">
+              <a:lnSpc>
+                <a:spcPct val="120000"/>
+              </a:lnSpc>
+              <a:spcBef>
+                <a:spcPts val="0"/>
+              </a:spcBef>
+              <a:spcAft>
+                <a:spcPts val="0"/>
+              </a:spcAft>
+              <a:defRPr sz="2200" b="0">
+                <a:solidFill>
+                  <a:srgbClr val="9A9690"/>
+                </a:solidFill>
+                <a:latin typeface="Georgia"/>
+              </a:defRPr>
+            </a:pPr>
+            <a:r>
+              <a:t>Free</a:t>
+            </a:r>
+          </a:p>
+        </p:txBody>
+      </p:sp>
+      <p:sp>
+        <p:nvSpPr>
+          <p:cNvPr id="7" name="TextBox 6"/>
+          <p:cNvSpPr txBox="1"/>
+          <p:nvPr/>
+        </p:nvSpPr>
+        <p:spPr>
+          <a:xfrm>
+            <a:off x="2926080" y="3136392"/>
+            <a:ext cx="7315200" cy="365760"/>
+          </a:xfrm>
+          <a:prstGeom prst="rect">
+            <a:avLst/>
+          </a:prstGeom>
+          <a:noFill/>
+        </p:spPr>
+        <p:txBody>
+          <a:bodyPr wrap="square">
+            <a:spAutoFit/>
+          </a:bodyPr>
+          <a:lstStyle/>
+          <a:p>
+            <a:pPr algn="l">
+              <a:lnSpc>
+                <a:spcPct val="120000"/>
+              </a:lnSpc>
+              <a:spcBef>
+                <a:spcPts val="0"/>
+              </a:spcBef>
+              <a:spcAft>
+                <a:spcPts val="0"/>
+              </a:spcAft>
+              <a:defRPr sz="1500" b="0">
+                <a:solidFill>
+                  <a:srgbClr val="6B6860"/>
+                </a:solidFill>
+                <a:latin typeface="Calibri"/>
+              </a:defRPr>
+            </a:pPr>
+            <a:r>
+              <a:t>Offline journal + on-device transcription. Zero hosting cost.</a:t>
+            </a:r>
+          </a:p>
+        </p:txBody>
+      </p:sp>
+      <p:sp>
+        <p:nvSpPr>
+          <p:cNvPr id="8" name="TextBox 7"/>
+          <p:cNvSpPr txBox="1"/>
+          <p:nvPr/>
+        </p:nvSpPr>
+        <p:spPr>
+          <a:xfrm>
+            <a:off x="1097280" y="3749040"/>
+            <a:ext cx="1645920" cy="365760"/>
+          </a:xfrm>
+          <a:prstGeom prst="rect">
+            <a:avLst/>
+          </a:prstGeom>
+          <a:noFill/>
+        </p:spPr>
+        <p:txBody>
+          <a:bodyPr wrap="square">
+            <a:spAutoFit/>
+          </a:bodyPr>
+          <a:lstStyle/>
+          <a:p>
+            <a:pPr algn="l">
+              <a:lnSpc>
+                <a:spcPct val="120000"/>
+              </a:lnSpc>
+              <a:spcBef>
+                <a:spcPts val="0"/>
+              </a:spcBef>
+              <a:spcAft>
+                <a:spcPts val="0"/>
+              </a:spcAft>
+              <a:defRPr sz="2200" b="0">
+                <a:solidFill>
+                  <a:srgbClr val="6B6860"/>
+                </a:solidFill>
+                <a:latin typeface="Georgia"/>
+              </a:defRPr>
+            </a:pPr>
+            <a:r>
+              <a:t>$2/mo</a:t>
+            </a:r>
+          </a:p>
+        </p:txBody>
+      </p:sp>
+      <p:sp>
+        <p:nvSpPr>
+          <p:cNvPr id="9" name="TextBox 8"/>
+          <p:cNvSpPr txBox="1"/>
+          <p:nvPr/>
+        </p:nvSpPr>
+        <p:spPr>
+          <a:xfrm>
+            <a:off x="2926080" y="3776472"/>
+            <a:ext cx="7315200" cy="365760"/>
+          </a:xfrm>
+          <a:prstGeom prst="rect">
+            <a:avLst/>
+          </a:prstGeom>
+          <a:noFill/>
+        </p:spPr>
+        <p:txBody>
+          <a:bodyPr wrap="square">
+            <a:spAutoFit/>
+          </a:bodyPr>
+          <a:lstStyle/>
+          <a:p>
+            <a:pPr algn="l">
+              <a:lnSpc>
+                <a:spcPct val="120000"/>
+              </a:lnSpc>
+              <a:spcBef>
+                <a:spcPts val="0"/>
+              </a:spcBef>
+              <a:spcAft>
+                <a:spcPts val="0"/>
+              </a:spcAft>
+              <a:defRPr sz="1500" b="0">
+                <a:solidFill>
+                  <a:srgbClr val="6B6860"/>
+                </a:solidFill>
+                <a:latin typeface="Calibri"/>
+              </a:defRPr>
+            </a:pPr>
+            <a:r>
+              <a:t>Cloud sync + MCP access — your notes available to any AI</a:t>
+            </a:r>
+          </a:p>
+        </p:txBody>
+      </p:sp>
+      <p:sp>
+        <p:nvSpPr>
+          <p:cNvPr id="10" name="TextBox 9"/>
+          <p:cNvSpPr txBox="1"/>
+          <p:nvPr/>
+        </p:nvSpPr>
+        <p:spPr>
+          <a:xfrm>
+            <a:off x="1097280" y="4389120"/>
+            <a:ext cx="1645920" cy="365760"/>
+          </a:xfrm>
+          <a:prstGeom prst="rect">
+            <a:avLst/>
+          </a:prstGeom>
+          <a:noFill/>
+        </p:spPr>
+        <p:txBody>
+          <a:bodyPr wrap="square">
+            <a:spAutoFit/>
+          </a:bodyPr>
+          <a:lstStyle/>
+          <a:p>
+            <a:pPr algn="l">
+              <a:lnSpc>
+                <a:spcPct val="120000"/>
+              </a:lnSpc>
+              <a:spcBef>
+                <a:spcPts val="0"/>
+              </a:spcBef>
+              <a:spcAft>
+                <a:spcPts val="0"/>
+              </a:spcAft>
+              <a:defRPr sz="2200" b="0">
+                <a:solidFill>
+                  <a:srgbClr val="6B6860"/>
+                </a:solidFill>
+                <a:latin typeface="Georgia"/>
+              </a:defRPr>
+            </a:pPr>
+            <a:r>
+              <a:t>$5/mo</a:t>
+            </a:r>
+          </a:p>
+        </p:txBody>
+      </p:sp>
+      <p:sp>
+        <p:nvSpPr>
+          <p:cNvPr id="11" name="TextBox 10"/>
+          <p:cNvSpPr txBox="1"/>
+          <p:nvPr/>
+        </p:nvSpPr>
+        <p:spPr>
+          <a:xfrm>
+            <a:off x="2926080" y="4416552"/>
+            <a:ext cx="7315200" cy="365760"/>
+          </a:xfrm>
+          <a:prstGeom prst="rect">
+            <a:avLst/>
+          </a:prstGeom>
+          <a:noFill/>
+        </p:spPr>
+        <p:txBody>
+          <a:bodyPr wrap="square">
+            <a:spAutoFit/>
+          </a:bodyPr>
+          <a:lstStyle/>
+          <a:p>
+            <a:pPr algn="l">
+              <a:lnSpc>
+                <a:spcPct val="120000"/>
+              </a:lnSpc>
+              <a:spcBef>
+                <a:spcPts val="0"/>
+              </a:spcBef>
+              <a:spcAft>
+                <a:spcPts val="0"/>
+              </a:spcAft>
+              <a:defRPr sz="1500" b="0">
+                <a:solidFill>
+                  <a:srgbClr val="6B6860"/>
+                </a:solidFill>
+                <a:latin typeface="Calibri"/>
+              </a:defRPr>
+            </a:pPr>
+            <a:r>
+              <a:t>Cloud transcription + cleanup — server-side, better accuracy</a:t>
+            </a:r>
+          </a:p>
+        </p:txBody>
+      </p:sp>
+      <p:sp>
+        <p:nvSpPr>
+          <p:cNvPr id="12" name="Rounded Rectangle 11"/>
+          <p:cNvSpPr/>
+          <p:nvPr/>
+        </p:nvSpPr>
+        <p:spPr>
+          <a:xfrm>
+            <a:off x="914400" y="4937760"/>
+            <a:ext cx="9601200" cy="502920"/>
+          </a:xfrm>
+          <a:prstGeom prst="roundRect">
+            <a:avLst/>
+          </a:prstGeom>
+          <a:solidFill>
+            <a:srgbClr val="E8F5EC"/>
+          </a:solidFill>
+          <a:ln>
+            <a:noFill/>
+          </a:ln>
+        </p:spPr>
+        <p:style>
+          <a:lnRef idx="1">
+            <a:schemeClr val="accent1"/>
+          </a:lnRef>
+          <a:fillRef idx="3">
+            <a:schemeClr val="accent1"/>
+          </a:fillRef>
+          <a:effectRef idx="2">
+            <a:schemeClr val="accent1"/>
+          </a:effectRef>
+          <a:fontRef idx="minor">
+            <a:schemeClr val="lt1"/>
+          </a:fontRef>
+        </p:style>
+        <p:txBody>
+          <a:bodyPr rtlCol="0" anchor="ctr"/>
+          <a:lstStyle/>
+          <a:p>
+            <a:pPr algn="ctr"/>
+          </a:p>
+        </p:txBody>
+      </p:sp>
+      <p:sp>
+        <p:nvSpPr>
+          <p:cNvPr id="13" name="TextBox 12"/>
+          <p:cNvSpPr txBox="1"/>
+          <p:nvPr/>
+        </p:nvSpPr>
+        <p:spPr>
+          <a:xfrm>
+            <a:off x="1097280" y="5029200"/>
+            <a:ext cx="1645920" cy="365760"/>
+          </a:xfrm>
+          <a:prstGeom prst="rect">
+            <a:avLst/>
+          </a:prstGeom>
+          <a:noFill/>
+        </p:spPr>
+        <p:txBody>
+          <a:bodyPr wrap="square">
+            <a:spAutoFit/>
+          </a:bodyPr>
+          <a:lstStyle/>
+          <a:p>
+            <a:pPr algn="l">
+              <a:lnSpc>
+                <a:spcPct val="120000"/>
+              </a:lnSpc>
+              <a:spcBef>
+                <a:spcPts val="0"/>
+              </a:spcBef>
+              <a:spcAft>
+                <a:spcPts val="0"/>
+              </a:spcAft>
+              <a:defRPr sz="2200" b="0">
+                <a:solidFill>
+                  <a:srgbClr val="4A7C59"/>
+                </a:solidFill>
+                <a:latin typeface="Georgia"/>
+              </a:defRPr>
+            </a:pPr>
+            <a:r>
+              <a:t>$10/mo</a:t>
+            </a:r>
+          </a:p>
+        </p:txBody>
+      </p:sp>
+      <p:sp>
+        <p:nvSpPr>
+          <p:cNvPr id="14" name="TextBox 13"/>
+          <p:cNvSpPr txBox="1"/>
+          <p:nvPr/>
+        </p:nvSpPr>
+        <p:spPr>
+          <a:xfrm>
+            <a:off x="2926080" y="5056632"/>
+            <a:ext cx="7315200" cy="365760"/>
+          </a:xfrm>
+          <a:prstGeom prst="rect">
+            <a:avLst/>
+          </a:prstGeom>
+          <a:noFill/>
+        </p:spPr>
+        <p:txBody>
+          <a:bodyPr wrap="square">
+            <a:spAutoFit/>
+          </a:bodyPr>
+          <a:lstStyle/>
+          <a:p>
+            <a:pPr algn="l">
+              <a:lnSpc>
+                <a:spcPct val="120000"/>
+              </a:lnSpc>
+              <a:spcBef>
+                <a:spcPts val="0"/>
+              </a:spcBef>
+              <a:spcAft>
+                <a:spcPts val="0"/>
+              </a:spcAft>
+              <a:defRPr sz="1500" b="0">
+                <a:solidFill>
+                  <a:srgbClr val="6B6860"/>
+                </a:solidFill>
+                <a:latin typeface="Calibri"/>
+              </a:defRPr>
+            </a:pPr>
+            <a:r>
+              <a:t>AI reflections, vector search, and synthesis</a:t>
+            </a:r>
+          </a:p>
+        </p:txBody>
+      </p:sp>
+      <p:sp>
+        <p:nvSpPr>
+          <p:cNvPr id="15" name="TextBox 14"/>
+          <p:cNvSpPr txBox="1"/>
+          <p:nvPr/>
+        </p:nvSpPr>
+        <p:spPr>
+          <a:xfrm>
+            <a:off x="1097280" y="5943600"/>
+            <a:ext cx="9144000" cy="548640"/>
           </a:xfrm>
           <a:prstGeom prst="rect">
             <a:avLst/>
@@ -6225,469 +6425,19 @@
               <a:spcAft>
                 <a:spcPts val="0"/>
               </a:spcAft>
-              <a:defRPr sz="2000" b="0">
-                <a:solidFill>
-                  <a:srgbClr val="6B6860"/>
+              <a:defRPr sz="1500" b="0">
+                <a:solidFill>
+                  <a:srgbClr val="9A9690"/>
                 </a:solidFill>
                 <a:latin typeface="Calibri"/>
               </a:defRPr>
             </a:pPr>
             <a:r>
-              <a:t>Every day you use Parachute, your AI gets meaningfully better.</a:t>
+              <a:t>We’re not competing with anyone’s AI subscription.</a:t>
             </a:r>
             <a:br/>
             <a:r>
-              <a:t>No competitor can shortcut months of accumulated personal context.</a:t>
-            </a:r>
-          </a:p>
-        </p:txBody>
-      </p:sp>
-      <p:sp>
-        <p:nvSpPr>
-          <p:cNvPr id="5" name="TextBox 4"/>
-          <p:cNvSpPr txBox="1"/>
-          <p:nvPr/>
-        </p:nvSpPr>
-        <p:spPr>
-          <a:xfrm>
-            <a:off x="1371600" y="4206240"/>
-            <a:ext cx="548640" cy="411480"/>
-          </a:xfrm>
-          <a:prstGeom prst="rect">
-            <a:avLst/>
-          </a:prstGeom>
-          <a:noFill/>
-        </p:spPr>
-        <p:txBody>
-          <a:bodyPr wrap="square">
-            <a:spAutoFit/>
-          </a:bodyPr>
-          <a:lstStyle/>
-          <a:p>
-            <a:pPr algn="l">
-              <a:lnSpc>
-                <a:spcPct val="120000"/>
-              </a:lnSpc>
-              <a:spcBef>
-                <a:spcPts val="0"/>
-              </a:spcBef>
-              <a:spcAft>
-                <a:spcPts val="0"/>
-              </a:spcAft>
-              <a:defRPr sz="1400" b="0">
-                <a:solidFill>
-                  <a:srgbClr val="9A9690"/>
-                </a:solidFill>
-                <a:latin typeface="Courier New"/>
-              </a:defRPr>
-            </a:pPr>
-            <a:r>
-              <a:t>01</a:t>
-            </a:r>
-          </a:p>
-        </p:txBody>
-      </p:sp>
-      <p:sp>
-        <p:nvSpPr>
-          <p:cNvPr id="6" name="TextBox 5"/>
-          <p:cNvSpPr txBox="1"/>
-          <p:nvPr/>
-        </p:nvSpPr>
-        <p:spPr>
-          <a:xfrm>
-            <a:off x="2011680" y="4206240"/>
-            <a:ext cx="5486400" cy="411480"/>
-          </a:xfrm>
-          <a:prstGeom prst="rect">
-            <a:avLst/>
-          </a:prstGeom>
-          <a:noFill/>
-        </p:spPr>
-        <p:txBody>
-          <a:bodyPr wrap="square">
-            <a:spAutoFit/>
-          </a:bodyPr>
-          <a:lstStyle/>
-          <a:p>
-            <a:pPr algn="l">
-              <a:lnSpc>
-                <a:spcPct val="120000"/>
-              </a:lnSpc>
-              <a:spcBef>
-                <a:spcPts val="0"/>
-              </a:spcBef>
-              <a:spcAft>
-                <a:spcPts val="0"/>
-              </a:spcAft>
-              <a:defRPr sz="2000" b="0">
-                <a:solidFill>
-                  <a:srgbClr val="2C2A26"/>
-                </a:solidFill>
-                <a:latin typeface="Georgia"/>
-              </a:defRPr>
-            </a:pPr>
-            <a:r>
-              <a:t>Start journaling in Daily</a:t>
-            </a:r>
-          </a:p>
-        </p:txBody>
-      </p:sp>
-      <p:sp>
-        <p:nvSpPr>
-          <p:cNvPr id="7" name="TextBox 6"/>
-          <p:cNvSpPr txBox="1"/>
-          <p:nvPr/>
-        </p:nvSpPr>
-        <p:spPr>
-          <a:xfrm>
-            <a:off x="1371600" y="4663440"/>
-            <a:ext cx="548640" cy="411480"/>
-          </a:xfrm>
-          <a:prstGeom prst="rect">
-            <a:avLst/>
-          </a:prstGeom>
-          <a:noFill/>
-        </p:spPr>
-        <p:txBody>
-          <a:bodyPr wrap="square">
-            <a:spAutoFit/>
-          </a:bodyPr>
-          <a:lstStyle/>
-          <a:p>
-            <a:pPr algn="l">
-              <a:lnSpc>
-                <a:spcPct val="120000"/>
-              </a:lnSpc>
-              <a:spcBef>
-                <a:spcPts val="0"/>
-              </a:spcBef>
-              <a:spcAft>
-                <a:spcPts val="0"/>
-              </a:spcAft>
-              <a:defRPr sz="1400" b="0">
-                <a:solidFill>
-                  <a:srgbClr val="9A9690"/>
-                </a:solidFill>
-                <a:latin typeface="Courier New"/>
-              </a:defRPr>
-            </a:pPr>
-            <a:r>
-              <a:t>02</a:t>
-            </a:r>
-          </a:p>
-        </p:txBody>
-      </p:sp>
-      <p:sp>
-        <p:nvSpPr>
-          <p:cNvPr id="8" name="TextBox 7"/>
-          <p:cNvSpPr txBox="1"/>
-          <p:nvPr/>
-        </p:nvSpPr>
-        <p:spPr>
-          <a:xfrm>
-            <a:off x="2011680" y="4663440"/>
-            <a:ext cx="5486400" cy="411480"/>
-          </a:xfrm>
-          <a:prstGeom prst="rect">
-            <a:avLst/>
-          </a:prstGeom>
-          <a:noFill/>
-        </p:spPr>
-        <p:txBody>
-          <a:bodyPr wrap="square">
-            <a:spAutoFit/>
-          </a:bodyPr>
-          <a:lstStyle/>
-          <a:p>
-            <a:pPr algn="l">
-              <a:lnSpc>
-                <a:spcPct val="120000"/>
-              </a:lnSpc>
-              <a:spcBef>
-                <a:spcPts val="0"/>
-              </a:spcBef>
-              <a:spcAft>
-                <a:spcPts val="0"/>
-              </a:spcAft>
-              <a:defRPr sz="2000" b="0">
-                <a:solidFill>
-                  <a:srgbClr val="2C2A26"/>
-                </a:solidFill>
-                <a:latin typeface="Georgia"/>
-              </a:defRPr>
-            </a:pPr>
-            <a:r>
-              <a:t>Build months of personal context</a:t>
-            </a:r>
-          </a:p>
-        </p:txBody>
-      </p:sp>
-      <p:sp>
-        <p:nvSpPr>
-          <p:cNvPr id="9" name="TextBox 8"/>
-          <p:cNvSpPr txBox="1"/>
-          <p:nvPr/>
-        </p:nvSpPr>
-        <p:spPr>
-          <a:xfrm>
-            <a:off x="1371600" y="5120640"/>
-            <a:ext cx="548640" cy="411480"/>
-          </a:xfrm>
-          <a:prstGeom prst="rect">
-            <a:avLst/>
-          </a:prstGeom>
-          <a:noFill/>
-        </p:spPr>
-        <p:txBody>
-          <a:bodyPr wrap="square">
-            <a:spAutoFit/>
-          </a:bodyPr>
-          <a:lstStyle/>
-          <a:p>
-            <a:pPr algn="l">
-              <a:lnSpc>
-                <a:spcPct val="120000"/>
-              </a:lnSpc>
-              <a:spcBef>
-                <a:spcPts val="0"/>
-              </a:spcBef>
-              <a:spcAft>
-                <a:spcPts val="0"/>
-              </a:spcAft>
-              <a:defRPr sz="1400" b="0">
-                <a:solidFill>
-                  <a:srgbClr val="9A9690"/>
-                </a:solidFill>
-                <a:latin typeface="Courier New"/>
-              </a:defRPr>
-            </a:pPr>
-            <a:r>
-              <a:t>03</a:t>
-            </a:r>
-          </a:p>
-        </p:txBody>
-      </p:sp>
-      <p:sp>
-        <p:nvSpPr>
-          <p:cNvPr id="10" name="TextBox 9"/>
-          <p:cNvSpPr txBox="1"/>
-          <p:nvPr/>
-        </p:nvSpPr>
-        <p:spPr>
-          <a:xfrm>
-            <a:off x="2011680" y="5120640"/>
-            <a:ext cx="5486400" cy="411480"/>
-          </a:xfrm>
-          <a:prstGeom prst="rect">
-            <a:avLst/>
-          </a:prstGeom>
-          <a:noFill/>
-        </p:spPr>
-        <p:txBody>
-          <a:bodyPr wrap="square">
-            <a:spAutoFit/>
-          </a:bodyPr>
-          <a:lstStyle/>
-          <a:p>
-            <a:pPr algn="l">
-              <a:lnSpc>
-                <a:spcPct val="120000"/>
-              </a:lnSpc>
-              <a:spcBef>
-                <a:spcPts val="0"/>
-              </a:spcBef>
-              <a:spcAft>
-                <a:spcPts val="0"/>
-              </a:spcAft>
-              <a:defRPr sz="2000" b="0">
-                <a:solidFill>
-                  <a:srgbClr val="2C2A26"/>
-                </a:solidFill>
-                <a:latin typeface="Georgia"/>
-              </a:defRPr>
-            </a:pPr>
-            <a:r>
-              <a:t>Upgrade to Parachute Computer</a:t>
-            </a:r>
-          </a:p>
-        </p:txBody>
-      </p:sp>
-      <p:sp>
-        <p:nvSpPr>
-          <p:cNvPr id="11" name="TextBox 10"/>
-          <p:cNvSpPr txBox="1"/>
-          <p:nvPr/>
-        </p:nvSpPr>
-        <p:spPr>
-          <a:xfrm>
-            <a:off x="1371600" y="5577840"/>
-            <a:ext cx="548640" cy="411480"/>
-          </a:xfrm>
-          <a:prstGeom prst="rect">
-            <a:avLst/>
-          </a:prstGeom>
-          <a:noFill/>
-        </p:spPr>
-        <p:txBody>
-          <a:bodyPr wrap="square">
-            <a:spAutoFit/>
-          </a:bodyPr>
-          <a:lstStyle/>
-          <a:p>
-            <a:pPr algn="l">
-              <a:lnSpc>
-                <a:spcPct val="120000"/>
-              </a:lnSpc>
-              <a:spcBef>
-                <a:spcPts val="0"/>
-              </a:spcBef>
-              <a:spcAft>
-                <a:spcPts val="0"/>
-              </a:spcAft>
-              <a:defRPr sz="1400" b="0">
-                <a:solidFill>
-                  <a:srgbClr val="9A9690"/>
-                </a:solidFill>
-                <a:latin typeface="Courier New"/>
-              </a:defRPr>
-            </a:pPr>
-            <a:r>
-              <a:t>04</a:t>
-            </a:r>
-          </a:p>
-        </p:txBody>
-      </p:sp>
-      <p:sp>
-        <p:nvSpPr>
-          <p:cNvPr id="12" name="TextBox 11"/>
-          <p:cNvSpPr txBox="1"/>
-          <p:nvPr/>
-        </p:nvSpPr>
-        <p:spPr>
-          <a:xfrm>
-            <a:off x="2011680" y="5577840"/>
-            <a:ext cx="5486400" cy="411480"/>
-          </a:xfrm>
-          <a:prstGeom prst="rect">
-            <a:avLst/>
-          </a:prstGeom>
-          <a:noFill/>
-        </p:spPr>
-        <p:txBody>
-          <a:bodyPr wrap="square">
-            <a:spAutoFit/>
-          </a:bodyPr>
-          <a:lstStyle/>
-          <a:p>
-            <a:pPr algn="l">
-              <a:lnSpc>
-                <a:spcPct val="120000"/>
-              </a:lnSpc>
-              <a:spcBef>
-                <a:spcPts val="0"/>
-              </a:spcBef>
-              <a:spcAft>
-                <a:spcPts val="0"/>
-              </a:spcAft>
-              <a:defRPr sz="2000" b="0">
-                <a:solidFill>
-                  <a:srgbClr val="2C2A26"/>
-                </a:solidFill>
-                <a:latin typeface="Georgia"/>
-              </a:defRPr>
-            </a:pPr>
-            <a:r>
-              <a:t>Brain ingests your history instantly</a:t>
-            </a:r>
-          </a:p>
-        </p:txBody>
-      </p:sp>
-      <p:sp>
-        <p:nvSpPr>
-          <p:cNvPr id="13" name="TextBox 12"/>
-          <p:cNvSpPr txBox="1"/>
-          <p:nvPr/>
-        </p:nvSpPr>
-        <p:spPr>
-          <a:xfrm>
-            <a:off x="1371600" y="6035040"/>
-            <a:ext cx="548640" cy="411480"/>
-          </a:xfrm>
-          <a:prstGeom prst="rect">
-            <a:avLst/>
-          </a:prstGeom>
-          <a:noFill/>
-        </p:spPr>
-        <p:txBody>
-          <a:bodyPr wrap="square">
-            <a:spAutoFit/>
-          </a:bodyPr>
-          <a:lstStyle/>
-          <a:p>
-            <a:pPr algn="l">
-              <a:lnSpc>
-                <a:spcPct val="120000"/>
-              </a:lnSpc>
-              <a:spcBef>
-                <a:spcPts val="0"/>
-              </a:spcBef>
-              <a:spcAft>
-                <a:spcPts val="0"/>
-              </a:spcAft>
-              <a:defRPr sz="1400" b="0">
-                <a:solidFill>
-                  <a:srgbClr val="4A7C59"/>
-                </a:solidFill>
-                <a:latin typeface="Courier New"/>
-              </a:defRPr>
-            </a:pPr>
-            <a:r>
-              <a:t>→</a:t>
-            </a:r>
-          </a:p>
-        </p:txBody>
-      </p:sp>
-      <p:sp>
-        <p:nvSpPr>
-          <p:cNvPr id="14" name="TextBox 13"/>
-          <p:cNvSpPr txBox="1"/>
-          <p:nvPr/>
-        </p:nvSpPr>
-        <p:spPr>
-          <a:xfrm>
-            <a:off x="2011680" y="6035040"/>
-            <a:ext cx="5486400" cy="411480"/>
-          </a:xfrm>
-          <a:prstGeom prst="rect">
-            <a:avLst/>
-          </a:prstGeom>
-          <a:noFill/>
-        </p:spPr>
-        <p:txBody>
-          <a:bodyPr wrap="square">
-            <a:spAutoFit/>
-          </a:bodyPr>
-          <a:lstStyle/>
-          <a:p>
-            <a:pPr algn="l">
-              <a:lnSpc>
-                <a:spcPct val="120000"/>
-              </a:lnSpc>
-              <a:spcBef>
-                <a:spcPts val="0"/>
-              </a:spcBef>
-              <a:spcAft>
-                <a:spcPts val="0"/>
-              </a:spcAft>
-              <a:defRPr sz="2000" b="1">
-                <a:solidFill>
-                  <a:srgbClr val="4A7C59"/>
-                </a:solidFill>
-                <a:latin typeface="Georgia"/>
-              </a:defRPr>
-            </a:pPr>
-            <a:r>
-              <a:t>System already knows you</a:t>
+              <a:t>$2/mo to make whatever AI you’re already paying for dramatically better.</a:t>
             </a:r>
           </a:p>
         </p:txBody>
@@ -6720,7 +6470,86 @@
       <p:grpSpPr/>
       <p:sp>
         <p:nvSpPr>
-          <p:cNvPr id="2" name="TextBox 1"/>
+          <p:cNvPr id="2" name="Rectangle 1"/>
+          <p:cNvSpPr/>
+          <p:nvPr/>
+        </p:nvSpPr>
+        <p:spPr>
+          <a:xfrm>
+            <a:off x="0" y="0"/>
+            <a:ext cx="12191695" cy="54864"/>
+          </a:xfrm>
+          <a:prstGeom prst="rect">
+            <a:avLst/>
+          </a:prstGeom>
+          <a:solidFill>
+            <a:srgbClr val="4A7C59"/>
+          </a:solidFill>
+          <a:ln>
+            <a:noFill/>
+          </a:ln>
+        </p:spPr>
+        <p:style>
+          <a:lnRef idx="1">
+            <a:schemeClr val="accent1"/>
+          </a:lnRef>
+          <a:fillRef idx="3">
+            <a:schemeClr val="accent1"/>
+          </a:fillRef>
+          <a:effectRef idx="2">
+            <a:schemeClr val="accent1"/>
+          </a:effectRef>
+          <a:fontRef idx="minor">
+            <a:schemeClr val="lt1"/>
+          </a:fontRef>
+        </p:style>
+        <p:txBody>
+          <a:bodyPr rtlCol="0" anchor="ctr"/>
+          <a:lstStyle/>
+          <a:p>
+            <a:pPr algn="ctr"/>
+          </a:p>
+        </p:txBody>
+      </p:sp>
+      <p:sp>
+        <p:nvSpPr>
+          <p:cNvPr id="3" name="TextBox 2"/>
+          <p:cNvSpPr txBox="1"/>
+          <p:nvPr/>
+        </p:nvSpPr>
+        <p:spPr>
+          <a:xfrm>
+            <a:off x="1097280" y="6400800"/>
+            <a:ext cx="3657600" cy="274320"/>
+          </a:xfrm>
+          <a:prstGeom prst="rect">
+            <a:avLst/>
+          </a:prstGeom>
+          <a:noFill/>
+        </p:spPr>
+        <p:txBody>
+          <a:bodyPr wrap="none">
+            <a:spAutoFit/>
+          </a:bodyPr>
+          <a:lstStyle/>
+          <a:p>
+            <a:pPr>
+              <a:defRPr sz="900">
+                <a:solidFill>
+                  <a:srgbClr val="9A9690"/>
+                </a:solidFill>
+                <a:latin typeface="Calibri"/>
+              </a:defRPr>
+            </a:pPr>
+            <a:r>
+              <a:t>parachute.computer</a:t>
+            </a:r>
+          </a:p>
+        </p:txBody>
+      </p:sp>
+      <p:sp>
+        <p:nvSpPr>
+          <p:cNvPr id="4" name="TextBox 3"/>
           <p:cNvSpPr txBox="1"/>
           <p:nvPr/>
         </p:nvSpPr>
@@ -6758,14 +6587,14 @@
               </a:defRPr>
             </a:pPr>
             <a:r>
-              <a:t>WHY US</a:t>
-            </a:r>
-          </a:p>
-        </p:txBody>
-      </p:sp>
-      <p:sp>
-        <p:nvSpPr>
-          <p:cNvPr id="3" name="TextBox 2"/>
+              <a:t>FINANCIAL PROJECTIONS</a:t>
+            </a:r>
+          </a:p>
+        </p:txBody>
+      </p:sp>
+      <p:sp>
+        <p:nvSpPr>
+          <p:cNvPr id="5" name="TextBox 4"/>
           <p:cNvSpPr txBox="1"/>
           <p:nvPr/>
         </p:nvSpPr>
@@ -6803,25 +6632,1470 @@
               </a:defRPr>
             </a:pPr>
             <a:r>
-              <a:t>Open source is</a:t>
-            </a:r>
-            <a:br/>
-            <a:r>
-              <a:t>the trust foundation.</a:t>
-            </a:r>
-          </a:p>
-        </p:txBody>
-      </p:sp>
-      <p:sp>
-        <p:nvSpPr>
-          <p:cNvPr id="4" name="TextBox 3"/>
+              <a:t>Profitable by year three.</a:t>
+            </a:r>
+          </a:p>
+        </p:txBody>
+      </p:sp>
+      <p:graphicFrame>
+        <p:nvGraphicFramePr>
+          <p:cNvPr id="6" name="Table 5"/>
+          <p:cNvGraphicFramePr>
+            <a:graphicFrameLocks noGrp="1"/>
+          </p:cNvGraphicFramePr>
+          <p:nvPr/>
+        </p:nvGraphicFramePr>
+        <p:xfrm>
+          <a:off x="1371600" y="3017520"/>
+          <a:ext cx="7498080" cy="2743200"/>
+        </p:xfrm>
+        <a:graphic>
+          <a:graphicData uri="http://schemas.openxmlformats.org/drawingml/2006/table">
+            <a:tbl>
+              <a:tblPr firstRow="1" bandRow="1">
+                <a:tableStyleId>{5C22544A-7EE6-4342-B048-85BDC9FD1C3A}</a:tableStyleId>
+              </a:tblPr>
+              <a:tblGrid>
+                <a:gridCol w="2560320"/>
+                <a:gridCol w="1645920"/>
+                <a:gridCol w="1645920"/>
+                <a:gridCol w="1645920"/>
+              </a:tblGrid>
+              <a:tr h="342900">
+                <a:tc>
+                  <a:txBody>
+                    <a:bodyPr/>
+                    <a:lstStyle/>
+                    <a:p>
+                      <a:pPr algn="l">
+                        <a:defRPr sz="1100" b="1">
+                          <a:solidFill>
+                            <a:srgbClr val="9A9690"/>
+                          </a:solidFill>
+                          <a:latin typeface="Calibri"/>
+                        </a:defRPr>
+                      </a:pPr>
+                    </a:p>
+                  </a:txBody>
+                  <a:tcPr>
+                    <a:solidFill>
+                      <a:srgbClr val="F3F0EA"/>
+                    </a:solidFill>
+                    <a:lnL w="6350">
+                      <a:solidFill>
+                        <a:srgbClr val="E4E0D8"/>
+                      </a:solidFill>
+                    </a:lnL>
+                    <a:lnR w="6350">
+                      <a:solidFill>
+                        <a:srgbClr val="E4E0D8"/>
+                      </a:solidFill>
+                    </a:lnR>
+                    <a:lnT w="6350">
+                      <a:solidFill>
+                        <a:srgbClr val="E4E0D8"/>
+                      </a:solidFill>
+                    </a:lnT>
+                    <a:lnB w="6350">
+                      <a:solidFill>
+                        <a:srgbClr val="E4E0D8"/>
+                      </a:solidFill>
+                    </a:lnB>
+                  </a:tcPr>
+                </a:tc>
+                <a:tc>
+                  <a:txBody>
+                    <a:bodyPr/>
+                    <a:lstStyle/>
+                    <a:p>
+                      <a:pPr algn="ctr">
+                        <a:defRPr sz="1100" b="1">
+                          <a:solidFill>
+                            <a:srgbClr val="9A9690"/>
+                          </a:solidFill>
+                          <a:latin typeface="Calibri"/>
+                        </a:defRPr>
+                      </a:pPr>
+                      <a:r>
+                        <a:t>2026</a:t>
+                      </a:r>
+                    </a:p>
+                  </a:txBody>
+                  <a:tcPr>
+                    <a:solidFill>
+                      <a:srgbClr val="F3F0EA"/>
+                    </a:solidFill>
+                    <a:lnL w="6350">
+                      <a:solidFill>
+                        <a:srgbClr val="E4E0D8"/>
+                      </a:solidFill>
+                    </a:lnL>
+                    <a:lnR w="6350">
+                      <a:solidFill>
+                        <a:srgbClr val="E4E0D8"/>
+                      </a:solidFill>
+                    </a:lnR>
+                    <a:lnT w="6350">
+                      <a:solidFill>
+                        <a:srgbClr val="E4E0D8"/>
+                      </a:solidFill>
+                    </a:lnT>
+                    <a:lnB w="6350">
+                      <a:solidFill>
+                        <a:srgbClr val="E4E0D8"/>
+                      </a:solidFill>
+                    </a:lnB>
+                  </a:tcPr>
+                </a:tc>
+                <a:tc>
+                  <a:txBody>
+                    <a:bodyPr/>
+                    <a:lstStyle/>
+                    <a:p>
+                      <a:pPr algn="ctr">
+                        <a:defRPr sz="1100" b="1">
+                          <a:solidFill>
+                            <a:srgbClr val="9A9690"/>
+                          </a:solidFill>
+                          <a:latin typeface="Calibri"/>
+                        </a:defRPr>
+                      </a:pPr>
+                      <a:r>
+                        <a:t>2027</a:t>
+                      </a:r>
+                    </a:p>
+                  </a:txBody>
+                  <a:tcPr>
+                    <a:solidFill>
+                      <a:srgbClr val="F3F0EA"/>
+                    </a:solidFill>
+                    <a:lnL w="6350">
+                      <a:solidFill>
+                        <a:srgbClr val="E4E0D8"/>
+                      </a:solidFill>
+                    </a:lnL>
+                    <a:lnR w="6350">
+                      <a:solidFill>
+                        <a:srgbClr val="E4E0D8"/>
+                      </a:solidFill>
+                    </a:lnR>
+                    <a:lnT w="6350">
+                      <a:solidFill>
+                        <a:srgbClr val="E4E0D8"/>
+                      </a:solidFill>
+                    </a:lnT>
+                    <a:lnB w="6350">
+                      <a:solidFill>
+                        <a:srgbClr val="E4E0D8"/>
+                      </a:solidFill>
+                    </a:lnB>
+                  </a:tcPr>
+                </a:tc>
+                <a:tc>
+                  <a:txBody>
+                    <a:bodyPr/>
+                    <a:lstStyle/>
+                    <a:p>
+                      <a:pPr algn="ctr">
+                        <a:defRPr sz="1100" b="1">
+                          <a:solidFill>
+                            <a:srgbClr val="9A9690"/>
+                          </a:solidFill>
+                          <a:latin typeface="Calibri"/>
+                        </a:defRPr>
+                      </a:pPr>
+                      <a:r>
+                        <a:t>2028</a:t>
+                      </a:r>
+                    </a:p>
+                  </a:txBody>
+                  <a:tcPr>
+                    <a:solidFill>
+                      <a:srgbClr val="F3F0EA"/>
+                    </a:solidFill>
+                    <a:lnL w="6350">
+                      <a:solidFill>
+                        <a:srgbClr val="E4E0D8"/>
+                      </a:solidFill>
+                    </a:lnL>
+                    <a:lnR w="6350">
+                      <a:solidFill>
+                        <a:srgbClr val="E4E0D8"/>
+                      </a:solidFill>
+                    </a:lnR>
+                    <a:lnT w="6350">
+                      <a:solidFill>
+                        <a:srgbClr val="E4E0D8"/>
+                      </a:solidFill>
+                    </a:lnT>
+                    <a:lnB w="6350">
+                      <a:solidFill>
+                        <a:srgbClr val="E4E0D8"/>
+                      </a:solidFill>
+                    </a:lnB>
+                  </a:tcPr>
+                </a:tc>
+              </a:tr>
+              <a:tr h="342900">
+                <a:tc>
+                  <a:txBody>
+                    <a:bodyPr/>
+                    <a:lstStyle/>
+                    <a:p>
+                      <a:pPr algn="l">
+                        <a:defRPr sz="1100" b="1">
+                          <a:solidFill>
+                            <a:srgbClr val="2C2A26"/>
+                          </a:solidFill>
+                          <a:latin typeface="Calibri"/>
+                        </a:defRPr>
+                      </a:pPr>
+                      <a:r>
+                        <a:t>Free users</a:t>
+                      </a:r>
+                    </a:p>
+                  </a:txBody>
+                  <a:tcPr>
+                    <a:solidFill>
+                      <a:srgbClr val="FFFFFF"/>
+                    </a:solidFill>
+                    <a:lnL w="6350">
+                      <a:solidFill>
+                        <a:srgbClr val="E4E0D8"/>
+                      </a:solidFill>
+                    </a:lnL>
+                    <a:lnR w="6350">
+                      <a:solidFill>
+                        <a:srgbClr val="E4E0D8"/>
+                      </a:solidFill>
+                    </a:lnR>
+                    <a:lnT w="6350">
+                      <a:solidFill>
+                        <a:srgbClr val="E4E0D8"/>
+                      </a:solidFill>
+                    </a:lnT>
+                    <a:lnB w="6350">
+                      <a:solidFill>
+                        <a:srgbClr val="E4E0D8"/>
+                      </a:solidFill>
+                    </a:lnB>
+                  </a:tcPr>
+                </a:tc>
+                <a:tc>
+                  <a:txBody>
+                    <a:bodyPr/>
+                    <a:lstStyle/>
+                    <a:p>
+                      <a:pPr algn="ctr">
+                        <a:defRPr sz="1200">
+                          <a:solidFill>
+                            <a:srgbClr val="6B6860"/>
+                          </a:solidFill>
+                          <a:latin typeface="Calibri"/>
+                        </a:defRPr>
+                      </a:pPr>
+                      <a:r>
+                        <a:t>5,000</a:t>
+                      </a:r>
+                    </a:p>
+                  </a:txBody>
+                  <a:tcPr>
+                    <a:solidFill>
+                      <a:srgbClr val="FFFFFF"/>
+                    </a:solidFill>
+                    <a:lnL w="6350">
+                      <a:solidFill>
+                        <a:srgbClr val="E4E0D8"/>
+                      </a:solidFill>
+                    </a:lnL>
+                    <a:lnR w="6350">
+                      <a:solidFill>
+                        <a:srgbClr val="E4E0D8"/>
+                      </a:solidFill>
+                    </a:lnR>
+                    <a:lnT w="6350">
+                      <a:solidFill>
+                        <a:srgbClr val="E4E0D8"/>
+                      </a:solidFill>
+                    </a:lnT>
+                    <a:lnB w="6350">
+                      <a:solidFill>
+                        <a:srgbClr val="E4E0D8"/>
+                      </a:solidFill>
+                    </a:lnB>
+                  </a:tcPr>
+                </a:tc>
+                <a:tc>
+                  <a:txBody>
+                    <a:bodyPr/>
+                    <a:lstStyle/>
+                    <a:p>
+                      <a:pPr algn="ctr">
+                        <a:defRPr sz="1200">
+                          <a:solidFill>
+                            <a:srgbClr val="6B6860"/>
+                          </a:solidFill>
+                          <a:latin typeface="Calibri"/>
+                        </a:defRPr>
+                      </a:pPr>
+                      <a:r>
+                        <a:t>75,000</a:t>
+                      </a:r>
+                    </a:p>
+                  </a:txBody>
+                  <a:tcPr>
+                    <a:solidFill>
+                      <a:srgbClr val="FFFFFF"/>
+                    </a:solidFill>
+                    <a:lnL w="6350">
+                      <a:solidFill>
+                        <a:srgbClr val="E4E0D8"/>
+                      </a:solidFill>
+                    </a:lnL>
+                    <a:lnR w="6350">
+                      <a:solidFill>
+                        <a:srgbClr val="E4E0D8"/>
+                      </a:solidFill>
+                    </a:lnR>
+                    <a:lnT w="6350">
+                      <a:solidFill>
+                        <a:srgbClr val="E4E0D8"/>
+                      </a:solidFill>
+                    </a:lnT>
+                    <a:lnB w="6350">
+                      <a:solidFill>
+                        <a:srgbClr val="E4E0D8"/>
+                      </a:solidFill>
+                    </a:lnB>
+                  </a:tcPr>
+                </a:tc>
+                <a:tc>
+                  <a:txBody>
+                    <a:bodyPr/>
+                    <a:lstStyle/>
+                    <a:p>
+                      <a:pPr algn="ctr">
+                        <a:defRPr sz="1200">
+                          <a:solidFill>
+                            <a:srgbClr val="6B6860"/>
+                          </a:solidFill>
+                          <a:latin typeface="Calibri"/>
+                        </a:defRPr>
+                      </a:pPr>
+                      <a:r>
+                        <a:t>500,000</a:t>
+                      </a:r>
+                    </a:p>
+                  </a:txBody>
+                  <a:tcPr>
+                    <a:solidFill>
+                      <a:srgbClr val="FFFFFF"/>
+                    </a:solidFill>
+                    <a:lnL w="6350">
+                      <a:solidFill>
+                        <a:srgbClr val="E4E0D8"/>
+                      </a:solidFill>
+                    </a:lnL>
+                    <a:lnR w="6350">
+                      <a:solidFill>
+                        <a:srgbClr val="E4E0D8"/>
+                      </a:solidFill>
+                    </a:lnR>
+                    <a:lnT w="6350">
+                      <a:solidFill>
+                        <a:srgbClr val="E4E0D8"/>
+                      </a:solidFill>
+                    </a:lnT>
+                    <a:lnB w="6350">
+                      <a:solidFill>
+                        <a:srgbClr val="E4E0D8"/>
+                      </a:solidFill>
+                    </a:lnB>
+                  </a:tcPr>
+                </a:tc>
+              </a:tr>
+              <a:tr h="342900">
+                <a:tc>
+                  <a:txBody>
+                    <a:bodyPr/>
+                    <a:lstStyle/>
+                    <a:p>
+                      <a:pPr algn="l">
+                        <a:defRPr sz="1100" b="1">
+                          <a:solidFill>
+                            <a:srgbClr val="2C2A26"/>
+                          </a:solidFill>
+                          <a:latin typeface="Calibri"/>
+                        </a:defRPr>
+                      </a:pPr>
+                      <a:r>
+                        <a:t>Paid subscribers</a:t>
+                      </a:r>
+                    </a:p>
+                  </a:txBody>
+                  <a:tcPr>
+                    <a:solidFill>
+                      <a:srgbClr val="FAF8F4"/>
+                    </a:solidFill>
+                    <a:lnL w="6350">
+                      <a:solidFill>
+                        <a:srgbClr val="E4E0D8"/>
+                      </a:solidFill>
+                    </a:lnL>
+                    <a:lnR w="6350">
+                      <a:solidFill>
+                        <a:srgbClr val="E4E0D8"/>
+                      </a:solidFill>
+                    </a:lnR>
+                    <a:lnT w="6350">
+                      <a:solidFill>
+                        <a:srgbClr val="E4E0D8"/>
+                      </a:solidFill>
+                    </a:lnT>
+                    <a:lnB w="6350">
+                      <a:solidFill>
+                        <a:srgbClr val="E4E0D8"/>
+                      </a:solidFill>
+                    </a:lnB>
+                  </a:tcPr>
+                </a:tc>
+                <a:tc>
+                  <a:txBody>
+                    <a:bodyPr/>
+                    <a:lstStyle/>
+                    <a:p>
+                      <a:pPr algn="ctr">
+                        <a:defRPr sz="1200">
+                          <a:solidFill>
+                            <a:srgbClr val="6B6860"/>
+                          </a:solidFill>
+                          <a:latin typeface="Calibri"/>
+                        </a:defRPr>
+                      </a:pPr>
+                      <a:r>
+                        <a:t>500</a:t>
+                      </a:r>
+                    </a:p>
+                  </a:txBody>
+                  <a:tcPr>
+                    <a:solidFill>
+                      <a:srgbClr val="FAF8F4"/>
+                    </a:solidFill>
+                    <a:lnL w="6350">
+                      <a:solidFill>
+                        <a:srgbClr val="E4E0D8"/>
+                      </a:solidFill>
+                    </a:lnL>
+                    <a:lnR w="6350">
+                      <a:solidFill>
+                        <a:srgbClr val="E4E0D8"/>
+                      </a:solidFill>
+                    </a:lnR>
+                    <a:lnT w="6350">
+                      <a:solidFill>
+                        <a:srgbClr val="E4E0D8"/>
+                      </a:solidFill>
+                    </a:lnT>
+                    <a:lnB w="6350">
+                      <a:solidFill>
+                        <a:srgbClr val="E4E0D8"/>
+                      </a:solidFill>
+                    </a:lnB>
+                  </a:tcPr>
+                </a:tc>
+                <a:tc>
+                  <a:txBody>
+                    <a:bodyPr/>
+                    <a:lstStyle/>
+                    <a:p>
+                      <a:pPr algn="ctr">
+                        <a:defRPr sz="1200">
+                          <a:solidFill>
+                            <a:srgbClr val="6B6860"/>
+                          </a:solidFill>
+                          <a:latin typeface="Calibri"/>
+                        </a:defRPr>
+                      </a:pPr>
+                      <a:r>
+                        <a:t>8,000</a:t>
+                      </a:r>
+                    </a:p>
+                  </a:txBody>
+                  <a:tcPr>
+                    <a:solidFill>
+                      <a:srgbClr val="FAF8F4"/>
+                    </a:solidFill>
+                    <a:lnL w="6350">
+                      <a:solidFill>
+                        <a:srgbClr val="E4E0D8"/>
+                      </a:solidFill>
+                    </a:lnL>
+                    <a:lnR w="6350">
+                      <a:solidFill>
+                        <a:srgbClr val="E4E0D8"/>
+                      </a:solidFill>
+                    </a:lnR>
+                    <a:lnT w="6350">
+                      <a:solidFill>
+                        <a:srgbClr val="E4E0D8"/>
+                      </a:solidFill>
+                    </a:lnT>
+                    <a:lnB w="6350">
+                      <a:solidFill>
+                        <a:srgbClr val="E4E0D8"/>
+                      </a:solidFill>
+                    </a:lnB>
+                  </a:tcPr>
+                </a:tc>
+                <a:tc>
+                  <a:txBody>
+                    <a:bodyPr/>
+                    <a:lstStyle/>
+                    <a:p>
+                      <a:pPr algn="ctr">
+                        <a:defRPr sz="1200">
+                          <a:solidFill>
+                            <a:srgbClr val="6B6860"/>
+                          </a:solidFill>
+                          <a:latin typeface="Calibri"/>
+                        </a:defRPr>
+                      </a:pPr>
+                      <a:r>
+                        <a:t>50,000</a:t>
+                      </a:r>
+                    </a:p>
+                  </a:txBody>
+                  <a:tcPr>
+                    <a:solidFill>
+                      <a:srgbClr val="FAF8F4"/>
+                    </a:solidFill>
+                    <a:lnL w="6350">
+                      <a:solidFill>
+                        <a:srgbClr val="E4E0D8"/>
+                      </a:solidFill>
+                    </a:lnL>
+                    <a:lnR w="6350">
+                      <a:solidFill>
+                        <a:srgbClr val="E4E0D8"/>
+                      </a:solidFill>
+                    </a:lnR>
+                    <a:lnT w="6350">
+                      <a:solidFill>
+                        <a:srgbClr val="E4E0D8"/>
+                      </a:solidFill>
+                    </a:lnT>
+                    <a:lnB w="6350">
+                      <a:solidFill>
+                        <a:srgbClr val="E4E0D8"/>
+                      </a:solidFill>
+                    </a:lnB>
+                  </a:tcPr>
+                </a:tc>
+              </a:tr>
+              <a:tr h="342900">
+                <a:tc>
+                  <a:txBody>
+                    <a:bodyPr/>
+                    <a:lstStyle/>
+                    <a:p>
+                      <a:pPr algn="l">
+                        <a:defRPr sz="1100" b="1">
+                          <a:solidFill>
+                            <a:srgbClr val="2C2A26"/>
+                          </a:solidFill>
+                          <a:latin typeface="Calibri"/>
+                        </a:defRPr>
+                      </a:pPr>
+                      <a:r>
+                        <a:t>Avg rev / subscriber</a:t>
+                      </a:r>
+                    </a:p>
+                  </a:txBody>
+                  <a:tcPr>
+                    <a:solidFill>
+                      <a:srgbClr val="FFFFFF"/>
+                    </a:solidFill>
+                    <a:lnL w="6350">
+                      <a:solidFill>
+                        <a:srgbClr val="E4E0D8"/>
+                      </a:solidFill>
+                    </a:lnL>
+                    <a:lnR w="6350">
+                      <a:solidFill>
+                        <a:srgbClr val="E4E0D8"/>
+                      </a:solidFill>
+                    </a:lnR>
+                    <a:lnT w="6350">
+                      <a:solidFill>
+                        <a:srgbClr val="E4E0D8"/>
+                      </a:solidFill>
+                    </a:lnT>
+                    <a:lnB w="6350">
+                      <a:solidFill>
+                        <a:srgbClr val="E4E0D8"/>
+                      </a:solidFill>
+                    </a:lnB>
+                  </a:tcPr>
+                </a:tc>
+                <a:tc>
+                  <a:txBody>
+                    <a:bodyPr/>
+                    <a:lstStyle/>
+                    <a:p>
+                      <a:pPr algn="ctr">
+                        <a:defRPr sz="1200">
+                          <a:solidFill>
+                            <a:srgbClr val="6B6860"/>
+                          </a:solidFill>
+                          <a:latin typeface="Calibri"/>
+                        </a:defRPr>
+                      </a:pPr>
+                      <a:r>
+                        <a:t>~$5/mo</a:t>
+                      </a:r>
+                    </a:p>
+                  </a:txBody>
+                  <a:tcPr>
+                    <a:solidFill>
+                      <a:srgbClr val="FFFFFF"/>
+                    </a:solidFill>
+                    <a:lnL w="6350">
+                      <a:solidFill>
+                        <a:srgbClr val="E4E0D8"/>
+                      </a:solidFill>
+                    </a:lnL>
+                    <a:lnR w="6350">
+                      <a:solidFill>
+                        <a:srgbClr val="E4E0D8"/>
+                      </a:solidFill>
+                    </a:lnR>
+                    <a:lnT w="6350">
+                      <a:solidFill>
+                        <a:srgbClr val="E4E0D8"/>
+                      </a:solidFill>
+                    </a:lnT>
+                    <a:lnB w="6350">
+                      <a:solidFill>
+                        <a:srgbClr val="E4E0D8"/>
+                      </a:solidFill>
+                    </a:lnB>
+                  </a:tcPr>
+                </a:tc>
+                <a:tc>
+                  <a:txBody>
+                    <a:bodyPr/>
+                    <a:lstStyle/>
+                    <a:p>
+                      <a:pPr algn="ctr">
+                        <a:defRPr sz="1200">
+                          <a:solidFill>
+                            <a:srgbClr val="6B6860"/>
+                          </a:solidFill>
+                          <a:latin typeface="Calibri"/>
+                        </a:defRPr>
+                      </a:pPr>
+                      <a:r>
+                        <a:t>~$5/mo</a:t>
+                      </a:r>
+                    </a:p>
+                  </a:txBody>
+                  <a:tcPr>
+                    <a:solidFill>
+                      <a:srgbClr val="FFFFFF"/>
+                    </a:solidFill>
+                    <a:lnL w="6350">
+                      <a:solidFill>
+                        <a:srgbClr val="E4E0D8"/>
+                      </a:solidFill>
+                    </a:lnL>
+                    <a:lnR w="6350">
+                      <a:solidFill>
+                        <a:srgbClr val="E4E0D8"/>
+                      </a:solidFill>
+                    </a:lnR>
+                    <a:lnT w="6350">
+                      <a:solidFill>
+                        <a:srgbClr val="E4E0D8"/>
+                      </a:solidFill>
+                    </a:lnT>
+                    <a:lnB w="6350">
+                      <a:solidFill>
+                        <a:srgbClr val="E4E0D8"/>
+                      </a:solidFill>
+                    </a:lnB>
+                  </a:tcPr>
+                </a:tc>
+                <a:tc>
+                  <a:txBody>
+                    <a:bodyPr/>
+                    <a:lstStyle/>
+                    <a:p>
+                      <a:pPr algn="ctr">
+                        <a:defRPr sz="1200">
+                          <a:solidFill>
+                            <a:srgbClr val="6B6860"/>
+                          </a:solidFill>
+                          <a:latin typeface="Calibri"/>
+                        </a:defRPr>
+                      </a:pPr>
+                      <a:r>
+                        <a:t>~$5/mo</a:t>
+                      </a:r>
+                    </a:p>
+                  </a:txBody>
+                  <a:tcPr>
+                    <a:solidFill>
+                      <a:srgbClr val="FFFFFF"/>
+                    </a:solidFill>
+                    <a:lnL w="6350">
+                      <a:solidFill>
+                        <a:srgbClr val="E4E0D8"/>
+                      </a:solidFill>
+                    </a:lnL>
+                    <a:lnR w="6350">
+                      <a:solidFill>
+                        <a:srgbClr val="E4E0D8"/>
+                      </a:solidFill>
+                    </a:lnR>
+                    <a:lnT w="6350">
+                      <a:solidFill>
+                        <a:srgbClr val="E4E0D8"/>
+                      </a:solidFill>
+                    </a:lnT>
+                    <a:lnB w="6350">
+                      <a:solidFill>
+                        <a:srgbClr val="E4E0D8"/>
+                      </a:solidFill>
+                    </a:lnB>
+                  </a:tcPr>
+                </a:tc>
+              </a:tr>
+              <a:tr h="342900">
+                <a:tc>
+                  <a:txBody>
+                    <a:bodyPr/>
+                    <a:lstStyle/>
+                    <a:p>
+                      <a:pPr algn="l">
+                        <a:defRPr sz="1100" b="1">
+                          <a:solidFill>
+                            <a:srgbClr val="2C2A26"/>
+                          </a:solidFill>
+                          <a:latin typeface="Calibri"/>
+                        </a:defRPr>
+                      </a:pPr>
+                      <a:r>
+                        <a:t>ARR</a:t>
+                      </a:r>
+                    </a:p>
+                  </a:txBody>
+                  <a:tcPr>
+                    <a:solidFill>
+                      <a:srgbClr val="F0F8F2"/>
+                    </a:solidFill>
+                    <a:lnL w="6350">
+                      <a:solidFill>
+                        <a:srgbClr val="E4E0D8"/>
+                      </a:solidFill>
+                    </a:lnL>
+                    <a:lnR w="6350">
+                      <a:solidFill>
+                        <a:srgbClr val="E4E0D8"/>
+                      </a:solidFill>
+                    </a:lnR>
+                    <a:lnT w="6350">
+                      <a:solidFill>
+                        <a:srgbClr val="E4E0D8"/>
+                      </a:solidFill>
+                    </a:lnT>
+                    <a:lnB w="6350">
+                      <a:solidFill>
+                        <a:srgbClr val="E4E0D8"/>
+                      </a:solidFill>
+                    </a:lnB>
+                  </a:tcPr>
+                </a:tc>
+                <a:tc>
+                  <a:txBody>
+                    <a:bodyPr/>
+                    <a:lstStyle/>
+                    <a:p>
+                      <a:pPr algn="ctr">
+                        <a:defRPr sz="1200" b="1">
+                          <a:solidFill>
+                            <a:srgbClr val="4A7C59"/>
+                          </a:solidFill>
+                          <a:latin typeface="Calibri"/>
+                        </a:defRPr>
+                      </a:pPr>
+                      <a:r>
+                        <a:t>~$30K</a:t>
+                      </a:r>
+                    </a:p>
+                  </a:txBody>
+                  <a:tcPr>
+                    <a:solidFill>
+                      <a:srgbClr val="F0F8F2"/>
+                    </a:solidFill>
+                    <a:lnL w="6350">
+                      <a:solidFill>
+                        <a:srgbClr val="E4E0D8"/>
+                      </a:solidFill>
+                    </a:lnL>
+                    <a:lnR w="6350">
+                      <a:solidFill>
+                        <a:srgbClr val="E4E0D8"/>
+                      </a:solidFill>
+                    </a:lnR>
+                    <a:lnT w="6350">
+                      <a:solidFill>
+                        <a:srgbClr val="E4E0D8"/>
+                      </a:solidFill>
+                    </a:lnT>
+                    <a:lnB w="6350">
+                      <a:solidFill>
+                        <a:srgbClr val="E4E0D8"/>
+                      </a:solidFill>
+                    </a:lnB>
+                  </a:tcPr>
+                </a:tc>
+                <a:tc>
+                  <a:txBody>
+                    <a:bodyPr/>
+                    <a:lstStyle/>
+                    <a:p>
+                      <a:pPr algn="ctr">
+                        <a:defRPr sz="1200" b="1">
+                          <a:solidFill>
+                            <a:srgbClr val="4A7C59"/>
+                          </a:solidFill>
+                          <a:latin typeface="Calibri"/>
+                        </a:defRPr>
+                      </a:pPr>
+                      <a:r>
+                        <a:t>~$480K</a:t>
+                      </a:r>
+                    </a:p>
+                  </a:txBody>
+                  <a:tcPr>
+                    <a:solidFill>
+                      <a:srgbClr val="F0F8F2"/>
+                    </a:solidFill>
+                    <a:lnL w="6350">
+                      <a:solidFill>
+                        <a:srgbClr val="E4E0D8"/>
+                      </a:solidFill>
+                    </a:lnL>
+                    <a:lnR w="6350">
+                      <a:solidFill>
+                        <a:srgbClr val="E4E0D8"/>
+                      </a:solidFill>
+                    </a:lnR>
+                    <a:lnT w="6350">
+                      <a:solidFill>
+                        <a:srgbClr val="E4E0D8"/>
+                      </a:solidFill>
+                    </a:lnT>
+                    <a:lnB w="6350">
+                      <a:solidFill>
+                        <a:srgbClr val="E4E0D8"/>
+                      </a:solidFill>
+                    </a:lnB>
+                  </a:tcPr>
+                </a:tc>
+                <a:tc>
+                  <a:txBody>
+                    <a:bodyPr/>
+                    <a:lstStyle/>
+                    <a:p>
+                      <a:pPr algn="ctr">
+                        <a:defRPr sz="1200" b="1">
+                          <a:solidFill>
+                            <a:srgbClr val="4A7C59"/>
+                          </a:solidFill>
+                          <a:latin typeface="Calibri"/>
+                        </a:defRPr>
+                      </a:pPr>
+                      <a:r>
+                        <a:t>~$3M</a:t>
+                      </a:r>
+                    </a:p>
+                  </a:txBody>
+                  <a:tcPr>
+                    <a:solidFill>
+                      <a:srgbClr val="F0F8F2"/>
+                    </a:solidFill>
+                    <a:lnL w="6350">
+                      <a:solidFill>
+                        <a:srgbClr val="E4E0D8"/>
+                      </a:solidFill>
+                    </a:lnL>
+                    <a:lnR w="6350">
+                      <a:solidFill>
+                        <a:srgbClr val="E4E0D8"/>
+                      </a:solidFill>
+                    </a:lnR>
+                    <a:lnT w="6350">
+                      <a:solidFill>
+                        <a:srgbClr val="E4E0D8"/>
+                      </a:solidFill>
+                    </a:lnT>
+                    <a:lnB w="6350">
+                      <a:solidFill>
+                        <a:srgbClr val="E4E0D8"/>
+                      </a:solidFill>
+                    </a:lnB>
+                  </a:tcPr>
+                </a:tc>
+              </a:tr>
+              <a:tr h="342900">
+                <a:tc>
+                  <a:txBody>
+                    <a:bodyPr/>
+                    <a:lstStyle/>
+                    <a:p>
+                      <a:pPr algn="l">
+                        <a:defRPr sz="1100" b="1">
+                          <a:solidFill>
+                            <a:srgbClr val="2C2A26"/>
+                          </a:solidFill>
+                          <a:latin typeface="Calibri"/>
+                        </a:defRPr>
+                      </a:pPr>
+                      <a:r>
+                        <a:t>Team costs</a:t>
+                      </a:r>
+                    </a:p>
+                  </a:txBody>
+                  <a:tcPr>
+                    <a:solidFill>
+                      <a:srgbClr val="FFFFFF"/>
+                    </a:solidFill>
+                    <a:lnL w="6350">
+                      <a:solidFill>
+                        <a:srgbClr val="E4E0D8"/>
+                      </a:solidFill>
+                    </a:lnL>
+                    <a:lnR w="6350">
+                      <a:solidFill>
+                        <a:srgbClr val="E4E0D8"/>
+                      </a:solidFill>
+                    </a:lnR>
+                    <a:lnT w="6350">
+                      <a:solidFill>
+                        <a:srgbClr val="E4E0D8"/>
+                      </a:solidFill>
+                    </a:lnT>
+                    <a:lnB w="6350">
+                      <a:solidFill>
+                        <a:srgbClr val="E4E0D8"/>
+                      </a:solidFill>
+                    </a:lnB>
+                  </a:tcPr>
+                </a:tc>
+                <a:tc>
+                  <a:txBody>
+                    <a:bodyPr/>
+                    <a:lstStyle/>
+                    <a:p>
+                      <a:pPr algn="ctr">
+                        <a:defRPr sz="1200">
+                          <a:solidFill>
+                            <a:srgbClr val="6B6860"/>
+                          </a:solidFill>
+                          <a:latin typeface="Calibri"/>
+                        </a:defRPr>
+                      </a:pPr>
+                      <a:r>
+                        <a:t>~$150K</a:t>
+                      </a:r>
+                    </a:p>
+                  </a:txBody>
+                  <a:tcPr>
+                    <a:solidFill>
+                      <a:srgbClr val="FFFFFF"/>
+                    </a:solidFill>
+                    <a:lnL w="6350">
+                      <a:solidFill>
+                        <a:srgbClr val="E4E0D8"/>
+                      </a:solidFill>
+                    </a:lnL>
+                    <a:lnR w="6350">
+                      <a:solidFill>
+                        <a:srgbClr val="E4E0D8"/>
+                      </a:solidFill>
+                    </a:lnR>
+                    <a:lnT w="6350">
+                      <a:solidFill>
+                        <a:srgbClr val="E4E0D8"/>
+                      </a:solidFill>
+                    </a:lnT>
+                    <a:lnB w="6350">
+                      <a:solidFill>
+                        <a:srgbClr val="E4E0D8"/>
+                      </a:solidFill>
+                    </a:lnB>
+                  </a:tcPr>
+                </a:tc>
+                <a:tc>
+                  <a:txBody>
+                    <a:bodyPr/>
+                    <a:lstStyle/>
+                    <a:p>
+                      <a:pPr algn="ctr">
+                        <a:defRPr sz="1200">
+                          <a:solidFill>
+                            <a:srgbClr val="6B6860"/>
+                          </a:solidFill>
+                          <a:latin typeface="Calibri"/>
+                        </a:defRPr>
+                      </a:pPr>
+                      <a:r>
+                        <a:t>~$400K</a:t>
+                      </a:r>
+                    </a:p>
+                  </a:txBody>
+                  <a:tcPr>
+                    <a:solidFill>
+                      <a:srgbClr val="FFFFFF"/>
+                    </a:solidFill>
+                    <a:lnL w="6350">
+                      <a:solidFill>
+                        <a:srgbClr val="E4E0D8"/>
+                      </a:solidFill>
+                    </a:lnL>
+                    <a:lnR w="6350">
+                      <a:solidFill>
+                        <a:srgbClr val="E4E0D8"/>
+                      </a:solidFill>
+                    </a:lnR>
+                    <a:lnT w="6350">
+                      <a:solidFill>
+                        <a:srgbClr val="E4E0D8"/>
+                      </a:solidFill>
+                    </a:lnT>
+                    <a:lnB w="6350">
+                      <a:solidFill>
+                        <a:srgbClr val="E4E0D8"/>
+                      </a:solidFill>
+                    </a:lnB>
+                  </a:tcPr>
+                </a:tc>
+                <a:tc>
+                  <a:txBody>
+                    <a:bodyPr/>
+                    <a:lstStyle/>
+                    <a:p>
+                      <a:pPr algn="ctr">
+                        <a:defRPr sz="1200">
+                          <a:solidFill>
+                            <a:srgbClr val="6B6860"/>
+                          </a:solidFill>
+                          <a:latin typeface="Calibri"/>
+                        </a:defRPr>
+                      </a:pPr>
+                      <a:r>
+                        <a:t>~$800K</a:t>
+                      </a:r>
+                    </a:p>
+                  </a:txBody>
+                  <a:tcPr>
+                    <a:solidFill>
+                      <a:srgbClr val="FFFFFF"/>
+                    </a:solidFill>
+                    <a:lnL w="6350">
+                      <a:solidFill>
+                        <a:srgbClr val="E4E0D8"/>
+                      </a:solidFill>
+                    </a:lnL>
+                    <a:lnR w="6350">
+                      <a:solidFill>
+                        <a:srgbClr val="E4E0D8"/>
+                      </a:solidFill>
+                    </a:lnR>
+                    <a:lnT w="6350">
+                      <a:solidFill>
+                        <a:srgbClr val="E4E0D8"/>
+                      </a:solidFill>
+                    </a:lnT>
+                    <a:lnB w="6350">
+                      <a:solidFill>
+                        <a:srgbClr val="E4E0D8"/>
+                      </a:solidFill>
+                    </a:lnB>
+                  </a:tcPr>
+                </a:tc>
+              </a:tr>
+              <a:tr h="342900">
+                <a:tc>
+                  <a:txBody>
+                    <a:bodyPr/>
+                    <a:lstStyle/>
+                    <a:p>
+                      <a:pPr algn="l">
+                        <a:defRPr sz="1100" b="1">
+                          <a:solidFill>
+                            <a:srgbClr val="2C2A26"/>
+                          </a:solidFill>
+                          <a:latin typeface="Calibri"/>
+                        </a:defRPr>
+                      </a:pPr>
+                      <a:r>
+                        <a:t>Infra + COGS</a:t>
+                      </a:r>
+                    </a:p>
+                  </a:txBody>
+                  <a:tcPr>
+                    <a:solidFill>
+                      <a:srgbClr val="FAF8F4"/>
+                    </a:solidFill>
+                    <a:lnL w="6350">
+                      <a:solidFill>
+                        <a:srgbClr val="E4E0D8"/>
+                      </a:solidFill>
+                    </a:lnL>
+                    <a:lnR w="6350">
+                      <a:solidFill>
+                        <a:srgbClr val="E4E0D8"/>
+                      </a:solidFill>
+                    </a:lnR>
+                    <a:lnT w="6350">
+                      <a:solidFill>
+                        <a:srgbClr val="E4E0D8"/>
+                      </a:solidFill>
+                    </a:lnT>
+                    <a:lnB w="6350">
+                      <a:solidFill>
+                        <a:srgbClr val="E4E0D8"/>
+                      </a:solidFill>
+                    </a:lnB>
+                  </a:tcPr>
+                </a:tc>
+                <a:tc>
+                  <a:txBody>
+                    <a:bodyPr/>
+                    <a:lstStyle/>
+                    <a:p>
+                      <a:pPr algn="ctr">
+                        <a:defRPr sz="1200">
+                          <a:solidFill>
+                            <a:srgbClr val="6B6860"/>
+                          </a:solidFill>
+                          <a:latin typeface="Calibri"/>
+                        </a:defRPr>
+                      </a:pPr>
+                      <a:r>
+                        <a:t>~$10K</a:t>
+                      </a:r>
+                    </a:p>
+                  </a:txBody>
+                  <a:tcPr>
+                    <a:solidFill>
+                      <a:srgbClr val="FAF8F4"/>
+                    </a:solidFill>
+                    <a:lnL w="6350">
+                      <a:solidFill>
+                        <a:srgbClr val="E4E0D8"/>
+                      </a:solidFill>
+                    </a:lnL>
+                    <a:lnR w="6350">
+                      <a:solidFill>
+                        <a:srgbClr val="E4E0D8"/>
+                      </a:solidFill>
+                    </a:lnR>
+                    <a:lnT w="6350">
+                      <a:solidFill>
+                        <a:srgbClr val="E4E0D8"/>
+                      </a:solidFill>
+                    </a:lnT>
+                    <a:lnB w="6350">
+                      <a:solidFill>
+                        <a:srgbClr val="E4E0D8"/>
+                      </a:solidFill>
+                    </a:lnB>
+                  </a:tcPr>
+                </a:tc>
+                <a:tc>
+                  <a:txBody>
+                    <a:bodyPr/>
+                    <a:lstStyle/>
+                    <a:p>
+                      <a:pPr algn="ctr">
+                        <a:defRPr sz="1200">
+                          <a:solidFill>
+                            <a:srgbClr val="6B6860"/>
+                          </a:solidFill>
+                          <a:latin typeface="Calibri"/>
+                        </a:defRPr>
+                      </a:pPr>
+                      <a:r>
+                        <a:t>~$100K</a:t>
+                      </a:r>
+                    </a:p>
+                  </a:txBody>
+                  <a:tcPr>
+                    <a:solidFill>
+                      <a:srgbClr val="FAF8F4"/>
+                    </a:solidFill>
+                    <a:lnL w="6350">
+                      <a:solidFill>
+                        <a:srgbClr val="E4E0D8"/>
+                      </a:solidFill>
+                    </a:lnL>
+                    <a:lnR w="6350">
+                      <a:solidFill>
+                        <a:srgbClr val="E4E0D8"/>
+                      </a:solidFill>
+                    </a:lnR>
+                    <a:lnT w="6350">
+                      <a:solidFill>
+                        <a:srgbClr val="E4E0D8"/>
+                      </a:solidFill>
+                    </a:lnT>
+                    <a:lnB w="6350">
+                      <a:solidFill>
+                        <a:srgbClr val="E4E0D8"/>
+                      </a:solidFill>
+                    </a:lnB>
+                  </a:tcPr>
+                </a:tc>
+                <a:tc>
+                  <a:txBody>
+                    <a:bodyPr/>
+                    <a:lstStyle/>
+                    <a:p>
+                      <a:pPr algn="ctr">
+                        <a:defRPr sz="1200">
+                          <a:solidFill>
+                            <a:srgbClr val="6B6860"/>
+                          </a:solidFill>
+                          <a:latin typeface="Calibri"/>
+                        </a:defRPr>
+                      </a:pPr>
+                      <a:r>
+                        <a:t>~$400K</a:t>
+                      </a:r>
+                    </a:p>
+                  </a:txBody>
+                  <a:tcPr>
+                    <a:solidFill>
+                      <a:srgbClr val="FAF8F4"/>
+                    </a:solidFill>
+                    <a:lnL w="6350">
+                      <a:solidFill>
+                        <a:srgbClr val="E4E0D8"/>
+                      </a:solidFill>
+                    </a:lnL>
+                    <a:lnR w="6350">
+                      <a:solidFill>
+                        <a:srgbClr val="E4E0D8"/>
+                      </a:solidFill>
+                    </a:lnR>
+                    <a:lnT w="6350">
+                      <a:solidFill>
+                        <a:srgbClr val="E4E0D8"/>
+                      </a:solidFill>
+                    </a:lnT>
+                    <a:lnB w="6350">
+                      <a:solidFill>
+                        <a:srgbClr val="E4E0D8"/>
+                      </a:solidFill>
+                    </a:lnB>
+                  </a:tcPr>
+                </a:tc>
+              </a:tr>
+              <a:tr h="342900">
+                <a:tc>
+                  <a:txBody>
+                    <a:bodyPr/>
+                    <a:lstStyle/>
+                    <a:p>
+                      <a:pPr algn="l">
+                        <a:defRPr sz="1100" b="1">
+                          <a:solidFill>
+                            <a:srgbClr val="2C2A26"/>
+                          </a:solidFill>
+                          <a:latin typeface="Calibri"/>
+                        </a:defRPr>
+                      </a:pPr>
+                      <a:r>
+                        <a:t>Total opex</a:t>
+                      </a:r>
+                    </a:p>
+                  </a:txBody>
+                  <a:tcPr>
+                    <a:solidFill>
+                      <a:srgbClr val="FFFFFF"/>
+                    </a:solidFill>
+                    <a:lnL w="6350">
+                      <a:solidFill>
+                        <a:srgbClr val="E4E0D8"/>
+                      </a:solidFill>
+                    </a:lnL>
+                    <a:lnR w="6350">
+                      <a:solidFill>
+                        <a:srgbClr val="E4E0D8"/>
+                      </a:solidFill>
+                    </a:lnR>
+                    <a:lnT w="6350">
+                      <a:solidFill>
+                        <a:srgbClr val="E4E0D8"/>
+                      </a:solidFill>
+                    </a:lnT>
+                    <a:lnB w="6350">
+                      <a:solidFill>
+                        <a:srgbClr val="E4E0D8"/>
+                      </a:solidFill>
+                    </a:lnB>
+                  </a:tcPr>
+                </a:tc>
+                <a:tc>
+                  <a:txBody>
+                    <a:bodyPr/>
+                    <a:lstStyle/>
+                    <a:p>
+                      <a:pPr algn="ctr">
+                        <a:defRPr sz="1200">
+                          <a:solidFill>
+                            <a:srgbClr val="6B6860"/>
+                          </a:solidFill>
+                          <a:latin typeface="Calibri"/>
+                        </a:defRPr>
+                      </a:pPr>
+                      <a:r>
+                        <a:t>~$160K</a:t>
+                      </a:r>
+                    </a:p>
+                  </a:txBody>
+                  <a:tcPr>
+                    <a:solidFill>
+                      <a:srgbClr val="FFFFFF"/>
+                    </a:solidFill>
+                    <a:lnL w="6350">
+                      <a:solidFill>
+                        <a:srgbClr val="E4E0D8"/>
+                      </a:solidFill>
+                    </a:lnL>
+                    <a:lnR w="6350">
+                      <a:solidFill>
+                        <a:srgbClr val="E4E0D8"/>
+                      </a:solidFill>
+                    </a:lnR>
+                    <a:lnT w="6350">
+                      <a:solidFill>
+                        <a:srgbClr val="E4E0D8"/>
+                      </a:solidFill>
+                    </a:lnT>
+                    <a:lnB w="6350">
+                      <a:solidFill>
+                        <a:srgbClr val="E4E0D8"/>
+                      </a:solidFill>
+                    </a:lnB>
+                  </a:tcPr>
+                </a:tc>
+                <a:tc>
+                  <a:txBody>
+                    <a:bodyPr/>
+                    <a:lstStyle/>
+                    <a:p>
+                      <a:pPr algn="ctr">
+                        <a:defRPr sz="1200">
+                          <a:solidFill>
+                            <a:srgbClr val="6B6860"/>
+                          </a:solidFill>
+                          <a:latin typeface="Calibri"/>
+                        </a:defRPr>
+                      </a:pPr>
+                      <a:r>
+                        <a:t>~$500K</a:t>
+                      </a:r>
+                    </a:p>
+                  </a:txBody>
+                  <a:tcPr>
+                    <a:solidFill>
+                      <a:srgbClr val="FFFFFF"/>
+                    </a:solidFill>
+                    <a:lnL w="6350">
+                      <a:solidFill>
+                        <a:srgbClr val="E4E0D8"/>
+                      </a:solidFill>
+                    </a:lnL>
+                    <a:lnR w="6350">
+                      <a:solidFill>
+                        <a:srgbClr val="E4E0D8"/>
+                      </a:solidFill>
+                    </a:lnR>
+                    <a:lnT w="6350">
+                      <a:solidFill>
+                        <a:srgbClr val="E4E0D8"/>
+                      </a:solidFill>
+                    </a:lnT>
+                    <a:lnB w="6350">
+                      <a:solidFill>
+                        <a:srgbClr val="E4E0D8"/>
+                      </a:solidFill>
+                    </a:lnB>
+                  </a:tcPr>
+                </a:tc>
+                <a:tc>
+                  <a:txBody>
+                    <a:bodyPr/>
+                    <a:lstStyle/>
+                    <a:p>
+                      <a:pPr algn="ctr">
+                        <a:defRPr sz="1200">
+                          <a:solidFill>
+                            <a:srgbClr val="6B6860"/>
+                          </a:solidFill>
+                          <a:latin typeface="Calibri"/>
+                        </a:defRPr>
+                      </a:pPr>
+                      <a:r>
+                        <a:t>~$1.2M</a:t>
+                      </a:r>
+                    </a:p>
+                  </a:txBody>
+                  <a:tcPr>
+                    <a:solidFill>
+                      <a:srgbClr val="FFFFFF"/>
+                    </a:solidFill>
+                    <a:lnL w="6350">
+                      <a:solidFill>
+                        <a:srgbClr val="E4E0D8"/>
+                      </a:solidFill>
+                    </a:lnL>
+                    <a:lnR w="6350">
+                      <a:solidFill>
+                        <a:srgbClr val="E4E0D8"/>
+                      </a:solidFill>
+                    </a:lnR>
+                    <a:lnT w="6350">
+                      <a:solidFill>
+                        <a:srgbClr val="E4E0D8"/>
+                      </a:solidFill>
+                    </a:lnT>
+                    <a:lnB w="6350">
+                      <a:solidFill>
+                        <a:srgbClr val="E4E0D8"/>
+                      </a:solidFill>
+                    </a:lnB>
+                  </a:tcPr>
+                </a:tc>
+              </a:tr>
+            </a:tbl>
+          </a:graphicData>
+        </a:graphic>
+      </p:graphicFrame>
+      <p:sp>
+        <p:nvSpPr>
+          <p:cNvPr id="7" name="TextBox 6"/>
           <p:cNvSpPr txBox="1"/>
           <p:nvPr/>
         </p:nvSpPr>
         <p:spPr>
           <a:xfrm>
-            <a:off x="1097280" y="3200400"/>
-            <a:ext cx="3200400" cy="320040"/>
+            <a:off x="1371600" y="5943600"/>
+            <a:ext cx="8229600" cy="365760"/>
           </a:xfrm>
           <a:prstGeom prst="rect">
             <a:avLst/>
@@ -6844,420 +8118,15 @@
               <a:spcAft>
                 <a:spcPts val="0"/>
               </a:spcAft>
-              <a:defRPr sz="1800" b="1">
-                <a:solidFill>
-                  <a:srgbClr val="2C2A26"/>
+              <a:defRPr sz="1300" b="0">
+                <a:solidFill>
+                  <a:srgbClr val="9A9690"/>
                 </a:solidFill>
                 <a:latin typeface="Calibri"/>
               </a:defRPr>
             </a:pPr>
             <a:r>
-              <a:t>AGPL-3.0 licensed</a:t>
-            </a:r>
-          </a:p>
-        </p:txBody>
-      </p:sp>
-      <p:sp>
-        <p:nvSpPr>
-          <p:cNvPr id="5" name="TextBox 4"/>
-          <p:cNvSpPr txBox="1"/>
-          <p:nvPr/>
-        </p:nvSpPr>
-        <p:spPr>
-          <a:xfrm>
-            <a:off x="4572000" y="3200400"/>
-            <a:ext cx="6400800" cy="320040"/>
-          </a:xfrm>
-          <a:prstGeom prst="rect">
-            <a:avLst/>
-          </a:prstGeom>
-          <a:noFill/>
-        </p:spPr>
-        <p:txBody>
-          <a:bodyPr wrap="square">
-            <a:spAutoFit/>
-          </a:bodyPr>
-          <a:lstStyle/>
-          <a:p>
-            <a:pPr algn="l">
-              <a:lnSpc>
-                <a:spcPct val="120000"/>
-              </a:lnSpc>
-              <a:spcBef>
-                <a:spcPts val="0"/>
-              </a:spcBef>
-              <a:spcAft>
-                <a:spcPts val="0"/>
-              </a:spcAft>
-              <a:defRPr sz="1600" b="0">
-                <a:solidFill>
-                  <a:srgbClr val="6B6860"/>
-                </a:solidFill>
-                <a:latin typeface="Calibri"/>
-              </a:defRPr>
-            </a:pPr>
-            <a:r>
-              <a:t>Fully transparent. Proprietary forks must share changes.</a:t>
-            </a:r>
-          </a:p>
-        </p:txBody>
-      </p:sp>
-      <p:sp>
-        <p:nvSpPr>
-          <p:cNvPr id="6" name="TextBox 5"/>
-          <p:cNvSpPr txBox="1"/>
-          <p:nvPr/>
-        </p:nvSpPr>
-        <p:spPr>
-          <a:xfrm>
-            <a:off x="1097280" y="3794760"/>
-            <a:ext cx="3200400" cy="320040"/>
-          </a:xfrm>
-          <a:prstGeom prst="rect">
-            <a:avLst/>
-          </a:prstGeom>
-          <a:noFill/>
-        </p:spPr>
-        <p:txBody>
-          <a:bodyPr wrap="square">
-            <a:spAutoFit/>
-          </a:bodyPr>
-          <a:lstStyle/>
-          <a:p>
-            <a:pPr algn="l">
-              <a:lnSpc>
-                <a:spcPct val="120000"/>
-              </a:lnSpc>
-              <a:spcBef>
-                <a:spcPts val="0"/>
-              </a:spcBef>
-              <a:spcAft>
-                <a:spcPts val="0"/>
-              </a:spcAft>
-              <a:defRPr sz="1800" b="1">
-                <a:solidFill>
-                  <a:srgbClr val="2C2A26"/>
-                </a:solidFill>
-                <a:latin typeface="Calibri"/>
-              </a:defRPr>
-            </a:pPr>
-            <a:r>
-              <a:t>Local-first</a:t>
-            </a:r>
-          </a:p>
-        </p:txBody>
-      </p:sp>
-      <p:sp>
-        <p:nvSpPr>
-          <p:cNvPr id="7" name="TextBox 6"/>
-          <p:cNvSpPr txBox="1"/>
-          <p:nvPr/>
-        </p:nvSpPr>
-        <p:spPr>
-          <a:xfrm>
-            <a:off x="4572000" y="3794760"/>
-            <a:ext cx="6400800" cy="320040"/>
-          </a:xfrm>
-          <a:prstGeom prst="rect">
-            <a:avLst/>
-          </a:prstGeom>
-          <a:noFill/>
-        </p:spPr>
-        <p:txBody>
-          <a:bodyPr wrap="square">
-            <a:spAutoFit/>
-          </a:bodyPr>
-          <a:lstStyle/>
-          <a:p>
-            <a:pPr algn="l">
-              <a:lnSpc>
-                <a:spcPct val="120000"/>
-              </a:lnSpc>
-              <a:spcBef>
-                <a:spcPts val="0"/>
-              </a:spcBef>
-              <a:spcAft>
-                <a:spcPts val="0"/>
-              </a:spcAft>
-              <a:defRPr sz="1600" b="0">
-                <a:solidFill>
-                  <a:srgbClr val="6B6860"/>
-                </a:solidFill>
-                <a:latin typeface="Calibri"/>
-              </a:defRPr>
-            </a:pPr>
-            <a:r>
-              <a:t>Your data on your device. Portable. Exportable. Yours.</a:t>
-            </a:r>
-          </a:p>
-        </p:txBody>
-      </p:sp>
-      <p:sp>
-        <p:nvSpPr>
-          <p:cNvPr id="8" name="TextBox 7"/>
-          <p:cNvSpPr txBox="1"/>
-          <p:nvPr/>
-        </p:nvSpPr>
-        <p:spPr>
-          <a:xfrm>
-            <a:off x="1097280" y="4389120"/>
-            <a:ext cx="3200400" cy="320040"/>
-          </a:xfrm>
-          <a:prstGeom prst="rect">
-            <a:avLst/>
-          </a:prstGeom>
-          <a:noFill/>
-        </p:spPr>
-        <p:txBody>
-          <a:bodyPr wrap="square">
-            <a:spAutoFit/>
-          </a:bodyPr>
-          <a:lstStyle/>
-          <a:p>
-            <a:pPr algn="l">
-              <a:lnSpc>
-                <a:spcPct val="120000"/>
-              </a:lnSpc>
-              <a:spcBef>
-                <a:spcPts val="0"/>
-              </a:spcBef>
-              <a:spcAft>
-                <a:spcPts val="0"/>
-              </a:spcAft>
-              <a:defRPr sz="1800" b="1">
-                <a:solidFill>
-                  <a:srgbClr val="2C2A26"/>
-                </a:solidFill>
-                <a:latin typeface="Calibri"/>
-              </a:defRPr>
-            </a:pPr>
-            <a:r>
-              <a:t>Public Benefit Corporation</a:t>
-            </a:r>
-          </a:p>
-        </p:txBody>
-      </p:sp>
-      <p:sp>
-        <p:nvSpPr>
-          <p:cNvPr id="9" name="TextBox 8"/>
-          <p:cNvSpPr txBox="1"/>
-          <p:nvPr/>
-        </p:nvSpPr>
-        <p:spPr>
-          <a:xfrm>
-            <a:off x="4572000" y="4389120"/>
-            <a:ext cx="6400800" cy="320040"/>
-          </a:xfrm>
-          <a:prstGeom prst="rect">
-            <a:avLst/>
-          </a:prstGeom>
-          <a:noFill/>
-        </p:spPr>
-        <p:txBody>
-          <a:bodyPr wrap="square">
-            <a:spAutoFit/>
-          </a:bodyPr>
-          <a:lstStyle/>
-          <a:p>
-            <a:pPr algn="l">
-              <a:lnSpc>
-                <a:spcPct val="120000"/>
-              </a:lnSpc>
-              <a:spcBef>
-                <a:spcPts val="0"/>
-              </a:spcBef>
-              <a:spcAft>
-                <a:spcPts val="0"/>
-              </a:spcAft>
-              <a:defRPr sz="1600" b="0">
-                <a:solidFill>
-                  <a:srgbClr val="6B6860"/>
-                </a:solidFill>
-                <a:latin typeface="Calibri"/>
-              </a:defRPr>
-            </a:pPr>
-            <a:r>
-              <a:t>Legal mandate to serve users, not just shareholders.</a:t>
-            </a:r>
-          </a:p>
-        </p:txBody>
-      </p:sp>
-      <p:sp>
-        <p:nvSpPr>
-          <p:cNvPr id="10" name="TextBox 9"/>
-          <p:cNvSpPr txBox="1"/>
-          <p:nvPr/>
-        </p:nvSpPr>
-        <p:spPr>
-          <a:xfrm>
-            <a:off x="1097280" y="4983480"/>
-            <a:ext cx="3200400" cy="320040"/>
-          </a:xfrm>
-          <a:prstGeom prst="rect">
-            <a:avLst/>
-          </a:prstGeom>
-          <a:noFill/>
-        </p:spPr>
-        <p:txBody>
-          <a:bodyPr wrap="square">
-            <a:spAutoFit/>
-          </a:bodyPr>
-          <a:lstStyle/>
-          <a:p>
-            <a:pPr algn="l">
-              <a:lnSpc>
-                <a:spcPct val="120000"/>
-              </a:lnSpc>
-              <a:spcBef>
-                <a:spcPts val="0"/>
-              </a:spcBef>
-              <a:spcAft>
-                <a:spcPts val="0"/>
-              </a:spcAft>
-              <a:defRPr sz="1800" b="1">
-                <a:solidFill>
-                  <a:srgbClr val="2C2A26"/>
-                </a:solidFill>
-                <a:latin typeface="Calibri"/>
-              </a:defRPr>
-            </a:pPr>
-            <a:r>
-              <a:t>Software is no longer a moat</a:t>
-            </a:r>
-          </a:p>
-        </p:txBody>
-      </p:sp>
-      <p:sp>
-        <p:nvSpPr>
-          <p:cNvPr id="11" name="TextBox 10"/>
-          <p:cNvSpPr txBox="1"/>
-          <p:nvPr/>
-        </p:nvSpPr>
-        <p:spPr>
-          <a:xfrm>
-            <a:off x="4572000" y="4983480"/>
-            <a:ext cx="6400800" cy="320040"/>
-          </a:xfrm>
-          <a:prstGeom prst="rect">
-            <a:avLst/>
-          </a:prstGeom>
-          <a:noFill/>
-        </p:spPr>
-        <p:txBody>
-          <a:bodyPr wrap="square">
-            <a:spAutoFit/>
-          </a:bodyPr>
-          <a:lstStyle/>
-          <a:p>
-            <a:pPr algn="l">
-              <a:lnSpc>
-                <a:spcPct val="120000"/>
-              </a:lnSpc>
-              <a:spcBef>
-                <a:spcPts val="0"/>
-              </a:spcBef>
-              <a:spcAft>
-                <a:spcPts val="0"/>
-              </a:spcAft>
-              <a:defRPr sz="1600" b="0">
-                <a:solidFill>
-                  <a:srgbClr val="6B6860"/>
-                </a:solidFill>
-                <a:latin typeface="Calibri"/>
-              </a:defRPr>
-            </a:pPr>
-            <a:r>
-              <a:t>Ideas get cloned in a day. Trust and context cannot.</a:t>
-            </a:r>
-          </a:p>
-        </p:txBody>
-      </p:sp>
-      <p:sp>
-        <p:nvSpPr>
-          <p:cNvPr id="12" name="TextBox 11"/>
-          <p:cNvSpPr txBox="1"/>
-          <p:nvPr/>
-        </p:nvSpPr>
-        <p:spPr>
-          <a:xfrm>
-            <a:off x="1097280" y="5577840"/>
-            <a:ext cx="3200400" cy="320040"/>
-          </a:xfrm>
-          <a:prstGeom prst="rect">
-            <a:avLst/>
-          </a:prstGeom>
-          <a:noFill/>
-        </p:spPr>
-        <p:txBody>
-          <a:bodyPr wrap="square">
-            <a:spAutoFit/>
-          </a:bodyPr>
-          <a:lstStyle/>
-          <a:p>
-            <a:pPr algn="l">
-              <a:lnSpc>
-                <a:spcPct val="120000"/>
-              </a:lnSpc>
-              <a:spcBef>
-                <a:spcPts val="0"/>
-              </a:spcBef>
-              <a:spcAft>
-                <a:spcPts val="0"/>
-              </a:spcAft>
-              <a:defRPr sz="1800" b="1">
-                <a:solidFill>
-                  <a:srgbClr val="2C2A26"/>
-                </a:solidFill>
-                <a:latin typeface="Calibri"/>
-              </a:defRPr>
-            </a:pPr>
-            <a:r>
-              <a:t>Community as growth engine</a:t>
-            </a:r>
-          </a:p>
-        </p:txBody>
-      </p:sp>
-      <p:sp>
-        <p:nvSpPr>
-          <p:cNvPr id="13" name="TextBox 12"/>
-          <p:cNvSpPr txBox="1"/>
-          <p:nvPr/>
-        </p:nvSpPr>
-        <p:spPr>
-          <a:xfrm>
-            <a:off x="4572000" y="5577840"/>
-            <a:ext cx="6400800" cy="320040"/>
-          </a:xfrm>
-          <a:prstGeom prst="rect">
-            <a:avLst/>
-          </a:prstGeom>
-          <a:noFill/>
-        </p:spPr>
-        <p:txBody>
-          <a:bodyPr wrap="square">
-            <a:spAutoFit/>
-          </a:bodyPr>
-          <a:lstStyle/>
-          <a:p>
-            <a:pPr algn="l">
-              <a:lnSpc>
-                <a:spcPct val="120000"/>
-              </a:lnSpc>
-              <a:spcBef>
-                <a:spcPts val="0"/>
-              </a:spcBef>
-              <a:spcAft>
-                <a:spcPts val="0"/>
-              </a:spcAft>
-              <a:defRPr sz="1600" b="0">
-                <a:solidFill>
-                  <a:srgbClr val="6B6860"/>
-                </a:solidFill>
-                <a:latin typeface="Calibri"/>
-              </a:defRPr>
-            </a:pPr>
-            <a:r>
-              <a:t>We're building a learning community around AI tools — users who learn together become power users who build for others.</a:t>
+              <a:t>100M+ AI users are all potential customers. Conservative given the scale of the opportunity.</a:t>
             </a:r>
           </a:p>
         </p:txBody>
@@ -7290,294 +8159,20 @@
       <p:grpSpPr/>
       <p:sp>
         <p:nvSpPr>
-          <p:cNvPr id="2" name="TextBox 1"/>
-          <p:cNvSpPr txBox="1"/>
-          <p:nvPr/>
-        </p:nvSpPr>
-        <p:spPr>
-          <a:xfrm>
-            <a:off x="1097280" y="1097280"/>
-            <a:ext cx="3657600" cy="365760"/>
-          </a:xfrm>
-          <a:prstGeom prst="rect">
-            <a:avLst/>
-          </a:prstGeom>
-          <a:noFill/>
-        </p:spPr>
-        <p:txBody>
-          <a:bodyPr wrap="square">
-            <a:spAutoFit/>
-          </a:bodyPr>
-          <a:lstStyle/>
-          <a:p>
-            <a:pPr algn="l">
-              <a:lnSpc>
-                <a:spcPct val="120000"/>
-              </a:lnSpc>
-              <a:spcBef>
-                <a:spcPts val="0"/>
-              </a:spcBef>
-              <a:spcAft>
-                <a:spcPts val="0"/>
-              </a:spcAft>
-              <a:defRPr sz="1100" b="1">
-                <a:solidFill>
-                  <a:srgbClr val="4A7C59"/>
-                </a:solidFill>
-                <a:latin typeface="Calibri"/>
-              </a:defRPr>
-            </a:pPr>
-            <a:r>
-              <a:t>BUSINESS MODEL</a:t>
-            </a:r>
-          </a:p>
-        </p:txBody>
-      </p:sp>
-      <p:sp>
-        <p:nvSpPr>
-          <p:cNvPr id="3" name="TextBox 2"/>
-          <p:cNvSpPr txBox="1"/>
-          <p:nvPr/>
-        </p:nvSpPr>
-        <p:spPr>
-          <a:xfrm>
-            <a:off x="1097280" y="1554480"/>
-            <a:ext cx="9144000" cy="1371600"/>
-          </a:xfrm>
-          <a:prstGeom prst="rect">
-            <a:avLst/>
-          </a:prstGeom>
-          <a:noFill/>
-        </p:spPr>
-        <p:txBody>
-          <a:bodyPr wrap="square">
-            <a:spAutoFit/>
-          </a:bodyPr>
-          <a:lstStyle/>
-          <a:p>
-            <a:pPr algn="l">
-              <a:lnSpc>
-                <a:spcPct val="105000"/>
-              </a:lnSpc>
-              <a:spcBef>
-                <a:spcPts val="0"/>
-              </a:spcBef>
-              <a:spcAft>
-                <a:spcPts val="0"/>
-              </a:spcAft>
-              <a:defRPr sz="4000" b="0">
-                <a:solidFill>
-                  <a:srgbClr val="2C2A26"/>
-                </a:solidFill>
-                <a:latin typeface="Georgia"/>
-              </a:defRPr>
-            </a:pPr>
-            <a:r>
-              <a:t>Start free.</a:t>
-            </a:r>
-            <a:br/>
-            <a:r>
-              <a:t>Grow with every user.</a:t>
-            </a:r>
-          </a:p>
-        </p:txBody>
-      </p:sp>
-      <p:sp>
-        <p:nvSpPr>
-          <p:cNvPr id="4" name="TextBox 3"/>
-          <p:cNvSpPr txBox="1"/>
-          <p:nvPr/>
-        </p:nvSpPr>
-        <p:spPr>
-          <a:xfrm>
-            <a:off x="1097280" y="3200400"/>
-            <a:ext cx="1645920" cy="365760"/>
-          </a:xfrm>
-          <a:prstGeom prst="rect">
-            <a:avLst/>
-          </a:prstGeom>
-          <a:noFill/>
-        </p:spPr>
-        <p:txBody>
-          <a:bodyPr wrap="square">
-            <a:spAutoFit/>
-          </a:bodyPr>
-          <a:lstStyle/>
-          <a:p>
-            <a:pPr algn="l">
-              <a:lnSpc>
-                <a:spcPct val="120000"/>
-              </a:lnSpc>
-              <a:spcBef>
-                <a:spcPts val="0"/>
-              </a:spcBef>
-              <a:spcAft>
-                <a:spcPts val="0"/>
-              </a:spcAft>
-              <a:defRPr sz="2400" b="0">
-                <a:solidFill>
-                  <a:srgbClr val="9A9690"/>
-                </a:solidFill>
-                <a:latin typeface="Georgia"/>
-              </a:defRPr>
-            </a:pPr>
-            <a:r>
-              <a:t>Free</a:t>
-            </a:r>
-          </a:p>
-        </p:txBody>
-      </p:sp>
-      <p:sp>
-        <p:nvSpPr>
-          <p:cNvPr id="5" name="TextBox 4"/>
-          <p:cNvSpPr txBox="1"/>
-          <p:nvPr/>
-        </p:nvSpPr>
-        <p:spPr>
-          <a:xfrm>
-            <a:off x="2926080" y="3246120"/>
-            <a:ext cx="7315200" cy="365760"/>
-          </a:xfrm>
-          <a:prstGeom prst="rect">
-            <a:avLst/>
-          </a:prstGeom>
-          <a:noFill/>
-        </p:spPr>
-        <p:txBody>
-          <a:bodyPr wrap="square">
-            <a:spAutoFit/>
-          </a:bodyPr>
-          <a:lstStyle/>
-          <a:p>
-            <a:pPr algn="l">
-              <a:lnSpc>
-                <a:spcPct val="120000"/>
-              </a:lnSpc>
-              <a:spcBef>
-                <a:spcPts val="0"/>
-              </a:spcBef>
-              <a:spcAft>
-                <a:spcPts val="0"/>
-              </a:spcAft>
-              <a:defRPr sz="1600" b="0">
-                <a:solidFill>
-                  <a:srgbClr val="6B6860"/>
-                </a:solidFill>
-                <a:latin typeface="Calibri"/>
-              </a:defRPr>
-            </a:pPr>
-            <a:r>
-              <a:t>Offline journal + on-device transcription. Zero hosting cost.</a:t>
-            </a:r>
-          </a:p>
-        </p:txBody>
-      </p:sp>
-      <p:sp>
-        <p:nvSpPr>
-          <p:cNvPr id="6" name="TextBox 5"/>
-          <p:cNvSpPr txBox="1"/>
-          <p:nvPr/>
-        </p:nvSpPr>
-        <p:spPr>
-          <a:xfrm>
-            <a:off x="1097280" y="3840480"/>
-            <a:ext cx="1645920" cy="365760"/>
-          </a:xfrm>
-          <a:prstGeom prst="rect">
-            <a:avLst/>
-          </a:prstGeom>
-          <a:noFill/>
-        </p:spPr>
-        <p:txBody>
-          <a:bodyPr wrap="square">
-            <a:spAutoFit/>
-          </a:bodyPr>
-          <a:lstStyle/>
-          <a:p>
-            <a:pPr algn="l">
-              <a:lnSpc>
-                <a:spcPct val="120000"/>
-              </a:lnSpc>
-              <a:spcBef>
-                <a:spcPts val="0"/>
-              </a:spcBef>
-              <a:spcAft>
-                <a:spcPts val="0"/>
-              </a:spcAft>
-              <a:defRPr sz="2400" b="0">
-                <a:solidFill>
-                  <a:srgbClr val="6B6860"/>
-                </a:solidFill>
-                <a:latin typeface="Georgia"/>
-              </a:defRPr>
-            </a:pPr>
-            <a:r>
-              <a:t>$1-2/mo</a:t>
-            </a:r>
-          </a:p>
-        </p:txBody>
-      </p:sp>
-      <p:sp>
-        <p:nvSpPr>
-          <p:cNvPr id="7" name="TextBox 6"/>
-          <p:cNvSpPr txBox="1"/>
-          <p:nvPr/>
-        </p:nvSpPr>
-        <p:spPr>
-          <a:xfrm>
-            <a:off x="2926080" y="3886200"/>
-            <a:ext cx="7315200" cy="365760"/>
-          </a:xfrm>
-          <a:prstGeom prst="rect">
-            <a:avLst/>
-          </a:prstGeom>
-          <a:noFill/>
-        </p:spPr>
-        <p:txBody>
-          <a:bodyPr wrap="square">
-            <a:spAutoFit/>
-          </a:bodyPr>
-          <a:lstStyle/>
-          <a:p>
-            <a:pPr algn="l">
-              <a:lnSpc>
-                <a:spcPct val="120000"/>
-              </a:lnSpc>
-              <a:spcBef>
-                <a:spcPts val="0"/>
-              </a:spcBef>
-              <a:spcAft>
-                <a:spcPts val="0"/>
-              </a:spcAft>
-              <a:defRPr sz="1600" b="0">
-                <a:solidFill>
-                  <a:srgbClr val="6B6860"/>
-                </a:solidFill>
-                <a:latin typeface="Calibri"/>
-              </a:defRPr>
-            </a:pPr>
-            <a:r>
-              <a:t>Cloud sync across devices. Your notes everywhere.</a:t>
-            </a:r>
-          </a:p>
-        </p:txBody>
-      </p:sp>
-      <p:sp>
-        <p:nvSpPr>
-          <p:cNvPr id="8" name="Rounded Rectangle 7"/>
+          <p:cNvPr id="2" name="Rectangle 1"/>
           <p:cNvSpPr/>
           <p:nvPr/>
         </p:nvSpPr>
         <p:spPr>
           <a:xfrm>
-            <a:off x="914400" y="4343400"/>
-            <a:ext cx="9601200" cy="594360"/>
-          </a:xfrm>
-          <a:prstGeom prst="roundRect">
+            <a:off x="0" y="0"/>
+            <a:ext cx="12191695" cy="54864"/>
+          </a:xfrm>
+          <a:prstGeom prst="rect">
             <a:avLst/>
           </a:prstGeom>
           <a:solidFill>
-            <a:srgbClr val="E8F5EC"/>
+            <a:srgbClr val="4A7C59"/>
           </a:solidFill>
           <a:ln>
             <a:noFill/>
@@ -7607,14 +8202,50 @@
       </p:sp>
       <p:sp>
         <p:nvSpPr>
-          <p:cNvPr id="9" name="TextBox 8"/>
+          <p:cNvPr id="3" name="TextBox 2"/>
           <p:cNvSpPr txBox="1"/>
           <p:nvPr/>
         </p:nvSpPr>
         <p:spPr>
           <a:xfrm>
-            <a:off x="1097280" y="4480560"/>
-            <a:ext cx="1645920" cy="365760"/>
+            <a:off x="1097280" y="6400800"/>
+            <a:ext cx="3657600" cy="274320"/>
+          </a:xfrm>
+          <a:prstGeom prst="rect">
+            <a:avLst/>
+          </a:prstGeom>
+          <a:noFill/>
+        </p:spPr>
+        <p:txBody>
+          <a:bodyPr wrap="none">
+            <a:spAutoFit/>
+          </a:bodyPr>
+          <a:lstStyle/>
+          <a:p>
+            <a:pPr>
+              <a:defRPr sz="900">
+                <a:solidFill>
+                  <a:srgbClr val="9A9690"/>
+                </a:solidFill>
+                <a:latin typeface="Calibri"/>
+              </a:defRPr>
+            </a:pPr>
+            <a:r>
+              <a:t>parachute.computer</a:t>
+            </a:r>
+          </a:p>
+        </p:txBody>
+      </p:sp>
+      <p:sp>
+        <p:nvSpPr>
+          <p:cNvPr id="4" name="TextBox 3"/>
+          <p:cNvSpPr txBox="1"/>
+          <p:nvPr/>
+        </p:nvSpPr>
+        <p:spPr>
+          <a:xfrm>
+            <a:off x="1097280" y="1097280"/>
+            <a:ext cx="3657600" cy="365760"/>
           </a:xfrm>
           <a:prstGeom prst="rect">
             <a:avLst/>
@@ -7637,29 +8268,78 @@
               <a:spcAft>
                 <a:spcPts val="0"/>
               </a:spcAft>
-              <a:defRPr sz="2400" b="0">
+              <a:defRPr sz="1100" b="1">
                 <a:solidFill>
                   <a:srgbClr val="4A7C59"/>
                 </a:solidFill>
+                <a:latin typeface="Calibri"/>
+              </a:defRPr>
+            </a:pPr>
+            <a:r>
+              <a:t>TEAM &amp; TRACTION</a:t>
+            </a:r>
+          </a:p>
+        </p:txBody>
+      </p:sp>
+      <p:sp>
+        <p:nvSpPr>
+          <p:cNvPr id="5" name="TextBox 4"/>
+          <p:cNvSpPr txBox="1"/>
+          <p:nvPr/>
+        </p:nvSpPr>
+        <p:spPr>
+          <a:xfrm>
+            <a:off x="1097280" y="1554480"/>
+            <a:ext cx="9144000" cy="1371600"/>
+          </a:xfrm>
+          <a:prstGeom prst="rect">
+            <a:avLst/>
+          </a:prstGeom>
+          <a:noFill/>
+        </p:spPr>
+        <p:txBody>
+          <a:bodyPr wrap="square">
+            <a:spAutoFit/>
+          </a:bodyPr>
+          <a:lstStyle/>
+          <a:p>
+            <a:pPr algn="l">
+              <a:lnSpc>
+                <a:spcPct val="105000"/>
+              </a:lnSpc>
+              <a:spcBef>
+                <a:spcPts val="0"/>
+              </a:spcBef>
+              <a:spcAft>
+                <a:spcPts val="0"/>
+              </a:spcAft>
+              <a:defRPr sz="4000" b="0">
+                <a:solidFill>
+                  <a:srgbClr val="2C2A26"/>
+                </a:solidFill>
                 <a:latin typeface="Georgia"/>
               </a:defRPr>
             </a:pPr>
             <a:r>
-              <a:t>$5/mo</a:t>
-            </a:r>
-          </a:p>
-        </p:txBody>
-      </p:sp>
-      <p:sp>
-        <p:nvSpPr>
-          <p:cNvPr id="10" name="TextBox 9"/>
+              <a:t>Self-funded.</a:t>
+            </a:r>
+            <a:br/>
+            <a:r>
+              <a:t>Built from scratch.</a:t>
+            </a:r>
+          </a:p>
+        </p:txBody>
+      </p:sp>
+      <p:sp>
+        <p:nvSpPr>
+          <p:cNvPr id="6" name="TextBox 5"/>
           <p:cNvSpPr txBox="1"/>
           <p:nvPr/>
         </p:nvSpPr>
         <p:spPr>
           <a:xfrm>
-            <a:off x="2926080" y="4526280"/>
-            <a:ext cx="7315200" cy="365760"/>
+            <a:off x="1188720" y="3310128"/>
+            <a:ext cx="274320" cy="274320"/>
           </a:xfrm>
           <a:prstGeom prst="rect">
             <a:avLst/>
@@ -7682,7 +8362,52 @@
               <a:spcAft>
                 <a:spcPts val="0"/>
               </a:spcAft>
-              <a:defRPr sz="1600" b="0">
+              <a:defRPr sz="1400" b="0">
+                <a:solidFill>
+                  <a:srgbClr val="4A7C59"/>
+                </a:solidFill>
+                <a:latin typeface="Calibri"/>
+              </a:defRPr>
+            </a:pPr>
+            <a:r>
+              <a:t>•</a:t>
+            </a:r>
+          </a:p>
+        </p:txBody>
+      </p:sp>
+      <p:sp>
+        <p:nvSpPr>
+          <p:cNvPr id="7" name="TextBox 6"/>
+          <p:cNvSpPr txBox="1"/>
+          <p:nvPr/>
+        </p:nvSpPr>
+        <p:spPr>
+          <a:xfrm>
+            <a:off x="1554480" y="3291840"/>
+            <a:ext cx="4572000" cy="365760"/>
+          </a:xfrm>
+          <a:prstGeom prst="rect">
+            <a:avLst/>
+          </a:prstGeom>
+          <a:noFill/>
+        </p:spPr>
+        <p:txBody>
+          <a:bodyPr wrap="square">
+            <a:spAutoFit/>
+          </a:bodyPr>
+          <a:lstStyle/>
+          <a:p>
+            <a:pPr algn="l">
+              <a:lnSpc>
+                <a:spcPct val="130000"/>
+              </a:lnSpc>
+              <a:spcBef>
+                <a:spcPts val="0"/>
+              </a:spcBef>
+              <a:spcAft>
+                <a:spcPts val="0"/>
+              </a:spcAft>
+              <a:defRPr sz="1500" b="0">
                 <a:solidFill>
                   <a:srgbClr val="6B6860"/>
                 </a:solidFill>
@@ -7690,21 +8415,21 @@
               </a:defRPr>
             </a:pPr>
             <a:r>
-              <a:t>Cloud transcription + AI reflections, synthesis, pattern surfacing</a:t>
-            </a:r>
-          </a:p>
-        </p:txBody>
-      </p:sp>
-      <p:sp>
-        <p:nvSpPr>
-          <p:cNvPr id="11" name="TextBox 10"/>
+              <a:t>Working app with local voice transcription + graph-native storage</a:t>
+            </a:r>
+          </a:p>
+        </p:txBody>
+      </p:sp>
+      <p:sp>
+        <p:nvSpPr>
+          <p:cNvPr id="8" name="TextBox 7"/>
           <p:cNvSpPr txBox="1"/>
           <p:nvPr/>
         </p:nvSpPr>
         <p:spPr>
           <a:xfrm>
-            <a:off x="1097280" y="5120640"/>
-            <a:ext cx="1645920" cy="365760"/>
+            <a:off x="1188720" y="3767328"/>
+            <a:ext cx="274320" cy="274320"/>
           </a:xfrm>
           <a:prstGeom prst="rect">
             <a:avLst/>
@@ -7727,29 +8452,74 @@
               <a:spcAft>
                 <a:spcPts val="0"/>
               </a:spcAft>
-              <a:defRPr sz="2400" b="0">
-                <a:solidFill>
-                  <a:srgbClr val="2C2A26"/>
-                </a:solidFill>
-                <a:latin typeface="Georgia"/>
+              <a:defRPr sz="1400" b="0">
+                <a:solidFill>
+                  <a:srgbClr val="4A7C59"/>
+                </a:solidFill>
+                <a:latin typeface="Calibri"/>
               </a:defRPr>
             </a:pPr>
             <a:r>
-              <a:t>$20/mo</a:t>
-            </a:r>
-          </a:p>
-        </p:txBody>
-      </p:sp>
-      <p:sp>
-        <p:nvSpPr>
-          <p:cNvPr id="12" name="TextBox 11"/>
+              <a:t>•</a:t>
+            </a:r>
+          </a:p>
+        </p:txBody>
+      </p:sp>
+      <p:sp>
+        <p:nvSpPr>
+          <p:cNvPr id="9" name="TextBox 8"/>
           <p:cNvSpPr txBox="1"/>
           <p:nvPr/>
         </p:nvSpPr>
         <p:spPr>
           <a:xfrm>
-            <a:off x="2926080" y="5166360"/>
-            <a:ext cx="7315200" cy="365760"/>
+            <a:off x="1554480" y="3749040"/>
+            <a:ext cx="4572000" cy="365760"/>
+          </a:xfrm>
+          <a:prstGeom prst="rect">
+            <a:avLst/>
+          </a:prstGeom>
+          <a:noFill/>
+        </p:spPr>
+        <p:txBody>
+          <a:bodyPr wrap="square">
+            <a:spAutoFit/>
+          </a:bodyPr>
+          <a:lstStyle/>
+          <a:p>
+            <a:pPr algn="l">
+              <a:lnSpc>
+                <a:spcPct val="130000"/>
+              </a:lnSpc>
+              <a:spcBef>
+                <a:spcPts val="0"/>
+              </a:spcBef>
+              <a:spcAft>
+                <a:spcPts val="0"/>
+              </a:spcAft>
+              <a:defRPr sz="1500" b="0">
+                <a:solidFill>
+                  <a:srgbClr val="6B6860"/>
+                </a:solidFill>
+                <a:latin typeface="Calibri"/>
+              </a:defRPr>
+            </a:pPr>
+            <a:r>
+              <a:t>MCP server with Things, Tags, Tools architecture</a:t>
+            </a:r>
+          </a:p>
+        </p:txBody>
+      </p:sp>
+      <p:sp>
+        <p:nvSpPr>
+          <p:cNvPr id="10" name="TextBox 9"/>
+          <p:cNvSpPr txBox="1"/>
+          <p:nvPr/>
+        </p:nvSpPr>
+        <p:spPr>
+          <a:xfrm>
+            <a:off x="1188720" y="4224528"/>
+            <a:ext cx="274320" cy="274320"/>
           </a:xfrm>
           <a:prstGeom prst="rect">
             <a:avLst/>
@@ -7772,29 +8542,29 @@
               <a:spcAft>
                 <a:spcPts val="0"/>
               </a:spcAft>
-              <a:defRPr sz="1600" b="0">
-                <a:solidFill>
-                  <a:srgbClr val="6B6860"/>
+              <a:defRPr sz="1400" b="0">
+                <a:solidFill>
+                  <a:srgbClr val="4A7C59"/>
                 </a:solidFill>
                 <a:latin typeface="Calibri"/>
               </a:defRPr>
             </a:pPr>
             <a:r>
-              <a:t>Hosted Parachute Computer — full agentic platform</a:t>
-            </a:r>
-          </a:p>
-        </p:txBody>
-      </p:sp>
-      <p:sp>
-        <p:nvSpPr>
-          <p:cNvPr id="13" name="TextBox 12"/>
+              <a:t>•</a:t>
+            </a:r>
+          </a:p>
+        </p:txBody>
+      </p:sp>
+      <p:sp>
+        <p:nvSpPr>
+          <p:cNvPr id="11" name="TextBox 10"/>
           <p:cNvSpPr txBox="1"/>
           <p:nvPr/>
         </p:nvSpPr>
         <p:spPr>
           <a:xfrm>
-            <a:off x="1097280" y="5760720"/>
-            <a:ext cx="9144000" cy="731520"/>
+            <a:off x="1554480" y="4206240"/>
+            <a:ext cx="4572000" cy="365760"/>
           </a:xfrm>
           <a:prstGeom prst="rect">
             <a:avLst/>
@@ -7809,7 +8579,7 @@
           <a:p>
             <a:pPr algn="l">
               <a:lnSpc>
-                <a:spcPct val="150000"/>
+                <a:spcPct val="130000"/>
               </a:lnSpc>
               <a:spcBef>
                 <a:spcPts val="0"/>
@@ -7819,17 +8589,688 @@
               </a:spcAft>
               <a:defRPr sz="1500" b="0">
                 <a:solidFill>
+                  <a:srgbClr val="6B6860"/>
+                </a:solidFill>
+                <a:latin typeface="Calibri"/>
+              </a:defRPr>
+            </a:pPr>
+            <a:r>
+              <a:t>Functional pendant prototype (on stage today)</a:t>
+            </a:r>
+          </a:p>
+        </p:txBody>
+      </p:sp>
+      <p:sp>
+        <p:nvSpPr>
+          <p:cNvPr id="12" name="TextBox 11"/>
+          <p:cNvSpPr txBox="1"/>
+          <p:nvPr/>
+        </p:nvSpPr>
+        <p:spPr>
+          <a:xfrm>
+            <a:off x="1188720" y="4681728"/>
+            <a:ext cx="274320" cy="274320"/>
+          </a:xfrm>
+          <a:prstGeom prst="rect">
+            <a:avLst/>
+          </a:prstGeom>
+          <a:noFill/>
+        </p:spPr>
+        <p:txBody>
+          <a:bodyPr wrap="square">
+            <a:spAutoFit/>
+          </a:bodyPr>
+          <a:lstStyle/>
+          <a:p>
+            <a:pPr algn="l">
+              <a:lnSpc>
+                <a:spcPct val="120000"/>
+              </a:lnSpc>
+              <a:spcBef>
+                <a:spcPts val="0"/>
+              </a:spcBef>
+              <a:spcAft>
+                <a:spcPts val="0"/>
+              </a:spcAft>
+              <a:defRPr sz="1400" b="0">
+                <a:solidFill>
+                  <a:srgbClr val="4A7C59"/>
+                </a:solidFill>
+                <a:latin typeface="Calibri"/>
+              </a:defRPr>
+            </a:pPr>
+            <a:r>
+              <a:t>•</a:t>
+            </a:r>
+          </a:p>
+        </p:txBody>
+      </p:sp>
+      <p:sp>
+        <p:nvSpPr>
+          <p:cNvPr id="13" name="TextBox 12"/>
+          <p:cNvSpPr txBox="1"/>
+          <p:nvPr/>
+        </p:nvSpPr>
+        <p:spPr>
+          <a:xfrm>
+            <a:off x="1554480" y="4663440"/>
+            <a:ext cx="4572000" cy="365760"/>
+          </a:xfrm>
+          <a:prstGeom prst="rect">
+            <a:avLst/>
+          </a:prstGeom>
+          <a:noFill/>
+        </p:spPr>
+        <p:txBody>
+          <a:bodyPr wrap="square">
+            <a:spAutoFit/>
+          </a:bodyPr>
+          <a:lstStyle/>
+          <a:p>
+            <a:pPr algn="l">
+              <a:lnSpc>
+                <a:spcPct val="130000"/>
+              </a:lnSpc>
+              <a:spcBef>
+                <a:spcPts val="0"/>
+              </a:spcBef>
+              <a:spcAft>
+                <a:spcPts val="0"/>
+              </a:spcAft>
+              <a:defRPr sz="1500" b="0">
+                <a:solidFill>
+                  <a:srgbClr val="6B6860"/>
+                </a:solidFill>
+                <a:latin typeface="Calibri"/>
+              </a:defRPr>
+            </a:pPr>
+            <a:r>
+              <a:t>Daily beta launching this month · PBC incorporated in Colorado</a:t>
+            </a:r>
+          </a:p>
+        </p:txBody>
+      </p:sp>
+      <p:sp>
+        <p:nvSpPr>
+          <p:cNvPr id="14" name="Rounded Rectangle 13"/>
+          <p:cNvSpPr/>
+          <p:nvPr/>
+        </p:nvSpPr>
+        <p:spPr>
+          <a:xfrm>
+            <a:off x="6858000" y="3017520"/>
+            <a:ext cx="4572000" cy="2926080"/>
+          </a:xfrm>
+          <a:prstGeom prst="roundRect">
+            <a:avLst/>
+          </a:prstGeom>
+          <a:solidFill>
+            <a:srgbClr val="F3F0EA"/>
+          </a:solidFill>
+          <a:ln w="12700">
+            <a:solidFill>
+              <a:srgbClr val="E4E0D8"/>
+            </a:solidFill>
+          </a:ln>
+        </p:spPr>
+        <p:style>
+          <a:lnRef idx="1">
+            <a:schemeClr val="accent1"/>
+          </a:lnRef>
+          <a:fillRef idx="3">
+            <a:schemeClr val="accent1"/>
+          </a:fillRef>
+          <a:effectRef idx="2">
+            <a:schemeClr val="accent1"/>
+          </a:effectRef>
+          <a:fontRef idx="minor">
+            <a:schemeClr val="lt1"/>
+          </a:fontRef>
+        </p:style>
+        <p:txBody>
+          <a:bodyPr rtlCol="0" anchor="ctr"/>
+          <a:lstStyle/>
+          <a:p>
+            <a:pPr algn="ctr"/>
+          </a:p>
+        </p:txBody>
+      </p:sp>
+      <p:sp>
+        <p:nvSpPr>
+          <p:cNvPr id="15" name="TextBox 14"/>
+          <p:cNvSpPr txBox="1"/>
+          <p:nvPr/>
+        </p:nvSpPr>
+        <p:spPr>
+          <a:xfrm>
+            <a:off x="7223760" y="3200400"/>
+            <a:ext cx="3657600" cy="320040"/>
+          </a:xfrm>
+          <a:prstGeom prst="rect">
+            <a:avLst/>
+          </a:prstGeom>
+          <a:noFill/>
+        </p:spPr>
+        <p:txBody>
+          <a:bodyPr wrap="square">
+            <a:spAutoFit/>
+          </a:bodyPr>
+          <a:lstStyle/>
+          <a:p>
+            <a:pPr algn="l">
+              <a:lnSpc>
+                <a:spcPct val="120000"/>
+              </a:lnSpc>
+              <a:spcBef>
+                <a:spcPts val="0"/>
+              </a:spcBef>
+              <a:spcAft>
+                <a:spcPts val="0"/>
+              </a:spcAft>
+              <a:defRPr sz="1100" b="1">
+                <a:solidFill>
+                  <a:srgbClr val="4A7C59"/>
+                </a:solidFill>
+                <a:latin typeface="Calibri"/>
+              </a:defRPr>
+            </a:pPr>
+            <a:r>
+              <a:t>THE TEAM</a:t>
+            </a:r>
+          </a:p>
+        </p:txBody>
+      </p:sp>
+      <p:sp>
+        <p:nvSpPr>
+          <p:cNvPr id="16" name="TextBox 15"/>
+          <p:cNvSpPr txBox="1"/>
+          <p:nvPr/>
+        </p:nvSpPr>
+        <p:spPr>
+          <a:xfrm>
+            <a:off x="7223760" y="3657600"/>
+            <a:ext cx="4114800" cy="256032"/>
+          </a:xfrm>
+          <a:prstGeom prst="rect">
+            <a:avLst/>
+          </a:prstGeom>
+          <a:noFill/>
+        </p:spPr>
+        <p:txBody>
+          <a:bodyPr wrap="square">
+            <a:spAutoFit/>
+          </a:bodyPr>
+          <a:lstStyle/>
+          <a:p>
+            <a:pPr algn="l">
+              <a:lnSpc>
+                <a:spcPct val="120000"/>
+              </a:lnSpc>
+              <a:spcBef>
+                <a:spcPts val="0"/>
+              </a:spcBef>
+              <a:spcAft>
+                <a:spcPts val="0"/>
+              </a:spcAft>
+              <a:defRPr sz="1300" b="1">
+                <a:solidFill>
+                  <a:srgbClr val="2C2A26"/>
+                </a:solidFill>
+                <a:latin typeface="Calibri"/>
+              </a:defRPr>
+            </a:pPr>
+            <a:r>
+              <a:t>Aaron Gabriel Neyer</a:t>
+            </a:r>
+          </a:p>
+        </p:txBody>
+      </p:sp>
+      <p:sp>
+        <p:nvSpPr>
+          <p:cNvPr id="17" name="TextBox 16"/>
+          <p:cNvSpPr txBox="1"/>
+          <p:nvPr/>
+        </p:nvSpPr>
+        <p:spPr>
+          <a:xfrm>
+            <a:off x="7223760" y="3886200"/>
+            <a:ext cx="4114800" cy="256032"/>
+          </a:xfrm>
+          <a:prstGeom prst="rect">
+            <a:avLst/>
+          </a:prstGeom>
+          <a:noFill/>
+        </p:spPr>
+        <p:txBody>
+          <a:bodyPr wrap="square">
+            <a:spAutoFit/>
+          </a:bodyPr>
+          <a:lstStyle/>
+          <a:p>
+            <a:pPr algn="l">
+              <a:lnSpc>
+                <a:spcPct val="120000"/>
+              </a:lnSpc>
+              <a:spcBef>
+                <a:spcPts val="0"/>
+              </a:spcBef>
+              <a:spcAft>
+                <a:spcPts val="0"/>
+              </a:spcAft>
+              <a:defRPr sz="1100" b="0">
+                <a:solidFill>
+                  <a:srgbClr val="6B6860"/>
+                </a:solidFill>
+                <a:latin typeface="Calibri"/>
+              </a:defRPr>
+            </a:pPr>
+            <a:r>
+              <a:t>Founder · Product &amp; architecture</a:t>
+            </a:r>
+          </a:p>
+        </p:txBody>
+      </p:sp>
+      <p:sp>
+        <p:nvSpPr>
+          <p:cNvPr id="18" name="TextBox 17"/>
+          <p:cNvSpPr txBox="1"/>
+          <p:nvPr/>
+        </p:nvSpPr>
+        <p:spPr>
+          <a:xfrm>
+            <a:off x="7223760" y="4114800"/>
+            <a:ext cx="4114800" cy="256032"/>
+          </a:xfrm>
+          <a:prstGeom prst="rect">
+            <a:avLst/>
+          </a:prstGeom>
+          <a:noFill/>
+        </p:spPr>
+        <p:txBody>
+          <a:bodyPr wrap="square">
+            <a:spAutoFit/>
+          </a:bodyPr>
+          <a:lstStyle/>
+          <a:p>
+            <a:pPr algn="l">
+              <a:lnSpc>
+                <a:spcPct val="120000"/>
+              </a:lnSpc>
+              <a:spcBef>
+                <a:spcPts val="0"/>
+              </a:spcBef>
+              <a:spcAft>
+                <a:spcPts val="0"/>
+              </a:spcAft>
+              <a:defRPr sz="1300" b="1">
+                <a:solidFill>
+                  <a:srgbClr val="2C2A26"/>
+                </a:solidFill>
+                <a:latin typeface="Calibri"/>
+              </a:defRPr>
+            </a:pPr>
+            <a:r>
+              <a:t>Jon Bo</a:t>
+            </a:r>
+          </a:p>
+        </p:txBody>
+      </p:sp>
+      <p:sp>
+        <p:nvSpPr>
+          <p:cNvPr id="19" name="TextBox 18"/>
+          <p:cNvSpPr txBox="1"/>
+          <p:nvPr/>
+        </p:nvSpPr>
+        <p:spPr>
+          <a:xfrm>
+            <a:off x="7223760" y="4343400"/>
+            <a:ext cx="4114800" cy="256032"/>
+          </a:xfrm>
+          <a:prstGeom prst="rect">
+            <a:avLst/>
+          </a:prstGeom>
+          <a:noFill/>
+        </p:spPr>
+        <p:txBody>
+          <a:bodyPr wrap="square">
+            <a:spAutoFit/>
+          </a:bodyPr>
+          <a:lstStyle/>
+          <a:p>
+            <a:pPr algn="l">
+              <a:lnSpc>
+                <a:spcPct val="120000"/>
+              </a:lnSpc>
+              <a:spcBef>
+                <a:spcPts val="0"/>
+              </a:spcBef>
+              <a:spcAft>
+                <a:spcPts val="0"/>
+              </a:spcAft>
+              <a:defRPr sz="1100" b="0">
+                <a:solidFill>
+                  <a:srgbClr val="6B6860"/>
+                </a:solidFill>
+                <a:latin typeface="Calibri"/>
+              </a:defRPr>
+            </a:pPr>
+            <a:r>
+              <a:t>Daily co-lead · Founding engineer</a:t>
+            </a:r>
+          </a:p>
+        </p:txBody>
+      </p:sp>
+      <p:sp>
+        <p:nvSpPr>
+          <p:cNvPr id="20" name="TextBox 19"/>
+          <p:cNvSpPr txBox="1"/>
+          <p:nvPr/>
+        </p:nvSpPr>
+        <p:spPr>
+          <a:xfrm>
+            <a:off x="7223760" y="4572000"/>
+            <a:ext cx="4114800" cy="256032"/>
+          </a:xfrm>
+          <a:prstGeom prst="rect">
+            <a:avLst/>
+          </a:prstGeom>
+          <a:noFill/>
+        </p:spPr>
+        <p:txBody>
+          <a:bodyPr wrap="square">
+            <a:spAutoFit/>
+          </a:bodyPr>
+          <a:lstStyle/>
+          <a:p>
+            <a:pPr algn="l">
+              <a:lnSpc>
+                <a:spcPct val="120000"/>
+              </a:lnSpc>
+              <a:spcBef>
+                <a:spcPts val="0"/>
+              </a:spcBef>
+              <a:spcAft>
+                <a:spcPts val="0"/>
+              </a:spcAft>
+              <a:defRPr sz="1300" b="1">
+                <a:solidFill>
+                  <a:srgbClr val="2C2A26"/>
+                </a:solidFill>
+                <a:latin typeface="Calibri"/>
+              </a:defRPr>
+            </a:pPr>
+            <a:r>
+              <a:t>Lucian Hymer</a:t>
+            </a:r>
+          </a:p>
+        </p:txBody>
+      </p:sp>
+      <p:sp>
+        <p:nvSpPr>
+          <p:cNvPr id="21" name="TextBox 20"/>
+          <p:cNvSpPr txBox="1"/>
+          <p:nvPr/>
+        </p:nvSpPr>
+        <p:spPr>
+          <a:xfrm>
+            <a:off x="7223760" y="4800600"/>
+            <a:ext cx="4114800" cy="256032"/>
+          </a:xfrm>
+          <a:prstGeom prst="rect">
+            <a:avLst/>
+          </a:prstGeom>
+          <a:noFill/>
+        </p:spPr>
+        <p:txBody>
+          <a:bodyPr wrap="square">
+            <a:spAutoFit/>
+          </a:bodyPr>
+          <a:lstStyle/>
+          <a:p>
+            <a:pPr algn="l">
+              <a:lnSpc>
+                <a:spcPct val="120000"/>
+              </a:lnSpc>
+              <a:spcBef>
+                <a:spcPts val="0"/>
+              </a:spcBef>
+              <a:spcAft>
+                <a:spcPts val="0"/>
+              </a:spcAft>
+              <a:defRPr sz="1100" b="0">
+                <a:solidFill>
+                  <a:srgbClr val="6B6860"/>
+                </a:solidFill>
+                <a:latin typeface="Calibri"/>
+              </a:defRPr>
+            </a:pPr>
+            <a:r>
+              <a:t>Server co-lead · Founding engineer</a:t>
+            </a:r>
+          </a:p>
+        </p:txBody>
+      </p:sp>
+      <p:sp>
+        <p:nvSpPr>
+          <p:cNvPr id="22" name="TextBox 21"/>
+          <p:cNvSpPr txBox="1"/>
+          <p:nvPr/>
+        </p:nvSpPr>
+        <p:spPr>
+          <a:xfrm>
+            <a:off x="7223760" y="5029200"/>
+            <a:ext cx="4114800" cy="256032"/>
+          </a:xfrm>
+          <a:prstGeom prst="rect">
+            <a:avLst/>
+          </a:prstGeom>
+          <a:noFill/>
+        </p:spPr>
+        <p:txBody>
+          <a:bodyPr wrap="square">
+            <a:spAutoFit/>
+          </a:bodyPr>
+          <a:lstStyle/>
+          <a:p>
+            <a:pPr algn="l">
+              <a:lnSpc>
+                <a:spcPct val="120000"/>
+              </a:lnSpc>
+              <a:spcBef>
+                <a:spcPts val="0"/>
+              </a:spcBef>
+              <a:spcAft>
+                <a:spcPts val="0"/>
+              </a:spcAft>
+              <a:defRPr sz="1300" b="1">
+                <a:solidFill>
+                  <a:srgbClr val="2C2A26"/>
+                </a:solidFill>
+                <a:latin typeface="Calibri"/>
+              </a:defRPr>
+            </a:pPr>
+            <a:r>
+              <a:t>Marvin Melzer</a:t>
+            </a:r>
+          </a:p>
+        </p:txBody>
+      </p:sp>
+      <p:sp>
+        <p:nvSpPr>
+          <p:cNvPr id="23" name="TextBox 22"/>
+          <p:cNvSpPr txBox="1"/>
+          <p:nvPr/>
+        </p:nvSpPr>
+        <p:spPr>
+          <a:xfrm>
+            <a:off x="7223760" y="5257800"/>
+            <a:ext cx="4114800" cy="256032"/>
+          </a:xfrm>
+          <a:prstGeom prst="rect">
+            <a:avLst/>
+          </a:prstGeom>
+          <a:noFill/>
+        </p:spPr>
+        <p:txBody>
+          <a:bodyPr wrap="square">
+            <a:spAutoFit/>
+          </a:bodyPr>
+          <a:lstStyle/>
+          <a:p>
+            <a:pPr algn="l">
+              <a:lnSpc>
+                <a:spcPct val="120000"/>
+              </a:lnSpc>
+              <a:spcBef>
+                <a:spcPts val="0"/>
+              </a:spcBef>
+              <a:spcAft>
+                <a:spcPts val="0"/>
+              </a:spcAft>
+              <a:defRPr sz="1100" b="0">
+                <a:solidFill>
+                  <a:srgbClr val="6B6860"/>
+                </a:solidFill>
+                <a:latin typeface="Calibri"/>
+              </a:defRPr>
+            </a:pPr>
+            <a:r>
+              <a:t>Hardware · Pendant prototype</a:t>
+            </a:r>
+          </a:p>
+        </p:txBody>
+      </p:sp>
+      <p:sp>
+        <p:nvSpPr>
+          <p:cNvPr id="24" name="TextBox 23"/>
+          <p:cNvSpPr txBox="1"/>
+          <p:nvPr/>
+        </p:nvSpPr>
+        <p:spPr>
+          <a:xfrm>
+            <a:off x="7223760" y="5486400"/>
+            <a:ext cx="4114800" cy="256032"/>
+          </a:xfrm>
+          <a:prstGeom prst="rect">
+            <a:avLst/>
+          </a:prstGeom>
+          <a:noFill/>
+        </p:spPr>
+        <p:txBody>
+          <a:bodyPr wrap="square">
+            <a:spAutoFit/>
+          </a:bodyPr>
+          <a:lstStyle/>
+          <a:p>
+            <a:pPr algn="l">
+              <a:lnSpc>
+                <a:spcPct val="120000"/>
+              </a:lnSpc>
+              <a:spcBef>
+                <a:spcPts val="0"/>
+              </a:spcBef>
+              <a:spcAft>
+                <a:spcPts val="0"/>
+              </a:spcAft>
+              <a:defRPr sz="1300" b="1">
+                <a:solidFill>
+                  <a:srgbClr val="2C2A26"/>
+                </a:solidFill>
+                <a:latin typeface="Calibri"/>
+              </a:defRPr>
+            </a:pPr>
+            <a:r>
+              <a:t>Neil Yarnal</a:t>
+            </a:r>
+          </a:p>
+        </p:txBody>
+      </p:sp>
+      <p:sp>
+        <p:nvSpPr>
+          <p:cNvPr id="25" name="TextBox 24"/>
+          <p:cNvSpPr txBox="1"/>
+          <p:nvPr/>
+        </p:nvSpPr>
+        <p:spPr>
+          <a:xfrm>
+            <a:off x="7223760" y="5715000"/>
+            <a:ext cx="4114800" cy="256032"/>
+          </a:xfrm>
+          <a:prstGeom prst="rect">
+            <a:avLst/>
+          </a:prstGeom>
+          <a:noFill/>
+        </p:spPr>
+        <p:txBody>
+          <a:bodyPr wrap="square">
+            <a:spAutoFit/>
+          </a:bodyPr>
+          <a:lstStyle/>
+          <a:p>
+            <a:pPr algn="l">
+              <a:lnSpc>
+                <a:spcPct val="120000"/>
+              </a:lnSpc>
+              <a:spcBef>
+                <a:spcPts val="0"/>
+              </a:spcBef>
+              <a:spcAft>
+                <a:spcPts val="0"/>
+              </a:spcAft>
+              <a:defRPr sz="1100" b="0">
+                <a:solidFill>
+                  <a:srgbClr val="6B6860"/>
+                </a:solidFill>
+                <a:latin typeface="Calibri"/>
+              </a:defRPr>
+            </a:pPr>
+            <a:r>
+              <a:t>Brand &amp; design</a:t>
+            </a:r>
+          </a:p>
+        </p:txBody>
+      </p:sp>
+      <p:sp>
+        <p:nvSpPr>
+          <p:cNvPr id="26" name="TextBox 25"/>
+          <p:cNvSpPr txBox="1"/>
+          <p:nvPr/>
+        </p:nvSpPr>
+        <p:spPr>
+          <a:xfrm>
+            <a:off x="1097280" y="5943600"/>
+            <a:ext cx="9144000" cy="457200"/>
+          </a:xfrm>
+          <a:prstGeom prst="rect">
+            <a:avLst/>
+          </a:prstGeom>
+          <a:noFill/>
+        </p:spPr>
+        <p:txBody>
+          <a:bodyPr wrap="square">
+            <a:spAutoFit/>
+          </a:bodyPr>
+          <a:lstStyle/>
+          <a:p>
+            <a:pPr algn="l">
+              <a:lnSpc>
+                <a:spcPct val="120000"/>
+              </a:lnSpc>
+              <a:spcBef>
+                <a:spcPts val="0"/>
+              </a:spcBef>
+              <a:spcAft>
+                <a:spcPts val="0"/>
+              </a:spcAft>
+              <a:defRPr sz="1200" b="0">
+                <a:solidFill>
                   <a:srgbClr val="9A9690"/>
                 </a:solidFill>
                 <a:latin typeface="Calibri"/>
               </a:defRPr>
             </a:pPr>
             <a:r>
-              <a:t>Free tier has zero hosting cost — no subsidizing free users.</a:t>
-            </a:r>
-            <a:br/>
-            <a:r>
-              <a:t>AI at $5/mo uses cost-efficient models. Margins are real and improve as model costs drop.</a:t>
+              <a:t>MA Ecopsychology · MS Creative Technology &amp; Design (CU ATLAS) · Founding engineer ×2 · Ex-Google · 10+ years full stack</a:t>
             </a:r>
           </a:p>
         </p:txBody>
@@ -7862,7 +9303,86 @@
       <p:grpSpPr/>
       <p:sp>
         <p:nvSpPr>
-          <p:cNvPr id="2" name="TextBox 1"/>
+          <p:cNvPr id="2" name="Rectangle 1"/>
+          <p:cNvSpPr/>
+          <p:nvPr/>
+        </p:nvSpPr>
+        <p:spPr>
+          <a:xfrm>
+            <a:off x="0" y="0"/>
+            <a:ext cx="12191695" cy="54864"/>
+          </a:xfrm>
+          <a:prstGeom prst="rect">
+            <a:avLst/>
+          </a:prstGeom>
+          <a:solidFill>
+            <a:srgbClr val="4A7C59"/>
+          </a:solidFill>
+          <a:ln>
+            <a:noFill/>
+          </a:ln>
+        </p:spPr>
+        <p:style>
+          <a:lnRef idx="1">
+            <a:schemeClr val="accent1"/>
+          </a:lnRef>
+          <a:fillRef idx="3">
+            <a:schemeClr val="accent1"/>
+          </a:fillRef>
+          <a:effectRef idx="2">
+            <a:schemeClr val="accent1"/>
+          </a:effectRef>
+          <a:fontRef idx="minor">
+            <a:schemeClr val="lt1"/>
+          </a:fontRef>
+        </p:style>
+        <p:txBody>
+          <a:bodyPr rtlCol="0" anchor="ctr"/>
+          <a:lstStyle/>
+          <a:p>
+            <a:pPr algn="ctr"/>
+          </a:p>
+        </p:txBody>
+      </p:sp>
+      <p:sp>
+        <p:nvSpPr>
+          <p:cNvPr id="3" name="TextBox 2"/>
+          <p:cNvSpPr txBox="1"/>
+          <p:nvPr/>
+        </p:nvSpPr>
+        <p:spPr>
+          <a:xfrm>
+            <a:off x="1097280" y="6400800"/>
+            <a:ext cx="3657600" cy="274320"/>
+          </a:xfrm>
+          <a:prstGeom prst="rect">
+            <a:avLst/>
+          </a:prstGeom>
+          <a:noFill/>
+        </p:spPr>
+        <p:txBody>
+          <a:bodyPr wrap="none">
+            <a:spAutoFit/>
+          </a:bodyPr>
+          <a:lstStyle/>
+          <a:p>
+            <a:pPr>
+              <a:defRPr sz="900">
+                <a:solidFill>
+                  <a:srgbClr val="9A9690"/>
+                </a:solidFill>
+                <a:latin typeface="Calibri"/>
+              </a:defRPr>
+            </a:pPr>
+            <a:r>
+              <a:t>parachute.computer</a:t>
+            </a:r>
+          </a:p>
+        </p:txBody>
+      </p:sp>
+      <p:sp>
+        <p:nvSpPr>
+          <p:cNvPr id="4" name="TextBox 3"/>
           <p:cNvSpPr txBox="1"/>
           <p:nvPr/>
         </p:nvSpPr>
@@ -7900,14 +9420,14 @@
               </a:defRPr>
             </a:pPr>
             <a:r>
-              <a:t>TEAM &amp; TRACTION</a:t>
-            </a:r>
-          </a:p>
-        </p:txBody>
-      </p:sp>
-      <p:sp>
-        <p:nvSpPr>
-          <p:cNvPr id="3" name="TextBox 2"/>
+              <a:t>THE ASK</a:t>
+            </a:r>
+          </a:p>
+        </p:txBody>
+      </p:sp>
+      <p:sp>
+        <p:nvSpPr>
+          <p:cNvPr id="5" name="TextBox 4"/>
           <p:cNvSpPr txBox="1"/>
           <p:nvPr/>
         </p:nvSpPr>
@@ -7945,99 +9465,70 @@
               </a:defRPr>
             </a:pPr>
             <a:r>
-              <a:t>Built from zero.</a:t>
+              <a:t>Raising $300K to launch</a:t>
             </a:r>
             <a:br/>
             <a:r>
-              <a:t>Solo. No funding.</a:t>
-            </a:r>
-          </a:p>
-        </p:txBody>
-      </p:sp>
-      <p:sp>
-        <p:nvSpPr>
-          <p:cNvPr id="4" name="TextBox 3"/>
+              <a:t>the personal data layer.</a:t>
+            </a:r>
+          </a:p>
+        </p:txBody>
+      </p:sp>
+      <p:sp>
+        <p:nvSpPr>
+          <p:cNvPr id="6" name="Rounded Rectangle 5"/>
+          <p:cNvSpPr/>
+          <p:nvPr/>
+        </p:nvSpPr>
+        <p:spPr>
+          <a:xfrm>
+            <a:off x="914400" y="3017520"/>
+            <a:ext cx="5486400" cy="2011680"/>
+          </a:xfrm>
+          <a:prstGeom prst="roundRect">
+            <a:avLst/>
+          </a:prstGeom>
+          <a:solidFill>
+            <a:srgbClr val="FFFFFF"/>
+          </a:solidFill>
+          <a:ln w="12700">
+            <a:solidFill>
+              <a:srgbClr val="E4E0D8"/>
+            </a:solidFill>
+          </a:ln>
+        </p:spPr>
+        <p:style>
+          <a:lnRef idx="1">
+            <a:schemeClr val="accent1"/>
+          </a:lnRef>
+          <a:fillRef idx="3">
+            <a:schemeClr val="accent1"/>
+          </a:fillRef>
+          <a:effectRef idx="2">
+            <a:schemeClr val="accent1"/>
+          </a:effectRef>
+          <a:fontRef idx="minor">
+            <a:schemeClr val="lt1"/>
+          </a:fontRef>
+        </p:style>
+        <p:txBody>
+          <a:bodyPr rtlCol="0" anchor="ctr"/>
+          <a:lstStyle/>
+          <a:p>
+            <a:pPr algn="ctr"/>
+          </a:p>
+        </p:txBody>
+      </p:sp>
+      <p:sp>
+        <p:nvSpPr>
+          <p:cNvPr id="7" name="TextBox 6"/>
           <p:cNvSpPr txBox="1"/>
           <p:nvPr/>
         </p:nvSpPr>
         <p:spPr>
           <a:xfrm>
-            <a:off x="1097280" y="3200400"/>
-            <a:ext cx="5029200" cy="2743200"/>
-          </a:xfrm>
-          <a:prstGeom prst="rect">
-            <a:avLst/>
-          </a:prstGeom>
-          <a:noFill/>
-        </p:spPr>
-        <p:txBody>
-          <a:bodyPr wrap="square">
-            <a:spAutoFit/>
-          </a:bodyPr>
-          <a:lstStyle/>
-          <a:p>
-            <a:pPr algn="l">
-              <a:lnSpc>
-                <a:spcPct val="155000"/>
-              </a:lnSpc>
-              <a:spcBef>
-                <a:spcPts val="0"/>
-              </a:spcBef>
-              <a:spcAft>
-                <a:spcPts val="0"/>
-              </a:spcAft>
-              <a:defRPr sz="1600" b="0">
-                <a:solidFill>
-                  <a:srgbClr val="6B6860"/>
-                </a:solidFill>
-                <a:latin typeface="Calibri"/>
-              </a:defRPr>
-            </a:pPr>
-            <a:r>
-              <a:t>What exists today:</a:t>
-            </a:r>
-            <a:br/>
-            <a:br/>
-            <a:r>
-              <a:t>  ·  Working server, app, and graph-native memory</a:t>
-            </a:r>
-            <a:br/>
-            <a:r>
-              <a:t>  ·  Local voice transcription (fully offline)</a:t>
-            </a:r>
-            <a:br/>
-            <a:r>
-              <a:t>  ·  Multi-agent system with trust tiers</a:t>
-            </a:r>
-            <a:br/>
-            <a:r>
-              <a:t>  ·  Telegram, Discord, Matrix connectors</a:t>
-            </a:r>
-            <a:br/>
-            <a:r>
-              <a:t>  ·  Functional pendant prototype</a:t>
-            </a:r>
-            <a:br/>
-            <a:r>
-              <a:t>  ·  Beta launching next month</a:t>
-            </a:r>
-            <a:br/>
-            <a:r>
-              <a:t>  ·  PBC incorporated in Colorado</a:t>
-            </a:r>
-          </a:p>
-        </p:txBody>
-      </p:sp>
-      <p:sp>
-        <p:nvSpPr>
-          <p:cNvPr id="5" name="TextBox 4"/>
-          <p:cNvSpPr txBox="1"/>
-          <p:nvPr/>
-        </p:nvSpPr>
-        <p:spPr>
-          <a:xfrm>
-            <a:off x="7132320" y="3017520"/>
-            <a:ext cx="3657600" cy="320040"/>
+            <a:off x="1280160" y="3246120"/>
+            <a:ext cx="2011680" cy="365760"/>
           </a:xfrm>
           <a:prstGeom prst="rect">
             <a:avLst/>
@@ -8060,29 +9551,29 @@
               <a:spcAft>
                 <a:spcPts val="0"/>
               </a:spcAft>
-              <a:defRPr sz="1100" b="1">
-                <a:solidFill>
-                  <a:srgbClr val="4A7C59"/>
+              <a:defRPr sz="1300" b="0">
+                <a:solidFill>
+                  <a:srgbClr val="9A9690"/>
                 </a:solidFill>
                 <a:latin typeface="Calibri"/>
               </a:defRPr>
             </a:pPr>
             <a:r>
-              <a:t>THE TEAM</a:t>
-            </a:r>
-          </a:p>
-        </p:txBody>
-      </p:sp>
-      <p:sp>
-        <p:nvSpPr>
-          <p:cNvPr id="6" name="TextBox 5"/>
+              <a:t>Instrument</a:t>
+            </a:r>
+          </a:p>
+        </p:txBody>
+      </p:sp>
+      <p:sp>
+        <p:nvSpPr>
+          <p:cNvPr id="8" name="TextBox 7"/>
           <p:cNvSpPr txBox="1"/>
           <p:nvPr/>
         </p:nvSpPr>
         <p:spPr>
           <a:xfrm>
-            <a:off x="7132320" y="3566160"/>
-            <a:ext cx="4114800" cy="274320"/>
+            <a:off x="3291840" y="3246120"/>
+            <a:ext cx="2926080" cy="365760"/>
           </a:xfrm>
           <a:prstGeom prst="rect">
             <a:avLst/>
@@ -8105,29 +9596,29 @@
               <a:spcAft>
                 <a:spcPts val="0"/>
               </a:spcAft>
-              <a:defRPr sz="1400" b="1">
+              <a:defRPr sz="1600" b="0">
                 <a:solidFill>
                   <a:srgbClr val="2C2A26"/>
                 </a:solidFill>
-                <a:latin typeface="Calibri"/>
+                <a:latin typeface="Georgia"/>
               </a:defRPr>
             </a:pPr>
             <a:r>
-              <a:t>Aaron Gabriel Neyer</a:t>
-            </a:r>
-          </a:p>
-        </p:txBody>
-      </p:sp>
-      <p:sp>
-        <p:nvSpPr>
-          <p:cNvPr id="7" name="TextBox 6"/>
+              <a:t>SAFE (YC standard)</a:t>
+            </a:r>
+          </a:p>
+        </p:txBody>
+      </p:sp>
+      <p:sp>
+        <p:nvSpPr>
+          <p:cNvPr id="9" name="TextBox 8"/>
           <p:cNvSpPr txBox="1"/>
           <p:nvPr/>
         </p:nvSpPr>
         <p:spPr>
           <a:xfrm>
-            <a:off x="7132320" y="3822192"/>
-            <a:ext cx="4114800" cy="274320"/>
+            <a:off x="1280160" y="3749040"/>
+            <a:ext cx="2011680" cy="365760"/>
           </a:xfrm>
           <a:prstGeom prst="rect">
             <a:avLst/>
@@ -8150,29 +9641,29 @@
               <a:spcAft>
                 <a:spcPts val="0"/>
               </a:spcAft>
-              <a:defRPr sz="1200" b="0">
-                <a:solidFill>
-                  <a:srgbClr val="6B6860"/>
+              <a:defRPr sz="1300" b="0">
+                <a:solidFill>
+                  <a:srgbClr val="9A9690"/>
                 </a:solidFill>
                 <a:latin typeface="Calibri"/>
               </a:defRPr>
             </a:pPr>
             <a:r>
-              <a:t>Founder · Product &amp; architecture</a:t>
-            </a:r>
-          </a:p>
-        </p:txBody>
-      </p:sp>
-      <p:sp>
-        <p:nvSpPr>
-          <p:cNvPr id="8" name="TextBox 7"/>
+              <a:t>Use of funds</a:t>
+            </a:r>
+          </a:p>
+        </p:txBody>
+      </p:sp>
+      <p:sp>
+        <p:nvSpPr>
+          <p:cNvPr id="10" name="TextBox 9"/>
           <p:cNvSpPr txBox="1"/>
           <p:nvPr/>
         </p:nvSpPr>
         <p:spPr>
           <a:xfrm>
-            <a:off x="7132320" y="4114800"/>
-            <a:ext cx="4114800" cy="274320"/>
+            <a:off x="3291840" y="3749040"/>
+            <a:ext cx="2926080" cy="365760"/>
           </a:xfrm>
           <a:prstGeom prst="rect">
             <a:avLst/>
@@ -8195,29 +9686,29 @@
               <a:spcAft>
                 <a:spcPts val="0"/>
               </a:spcAft>
-              <a:defRPr sz="1400" b="1">
+              <a:defRPr sz="1600" b="0">
                 <a:solidFill>
                   <a:srgbClr val="2C2A26"/>
                 </a:solidFill>
-                <a:latin typeface="Calibri"/>
+                <a:latin typeface="Georgia"/>
               </a:defRPr>
             </a:pPr>
             <a:r>
-              <a:t>Jon Bo</a:t>
-            </a:r>
-          </a:p>
-        </p:txBody>
-      </p:sp>
-      <p:sp>
-        <p:nvSpPr>
-          <p:cNvPr id="9" name="TextBox 8"/>
+              <a:t>Core team full-time through 2026</a:t>
+            </a:r>
+          </a:p>
+        </p:txBody>
+      </p:sp>
+      <p:sp>
+        <p:nvSpPr>
+          <p:cNvPr id="11" name="TextBox 10"/>
           <p:cNvSpPr txBox="1"/>
           <p:nvPr/>
         </p:nvSpPr>
         <p:spPr>
           <a:xfrm>
-            <a:off x="7132320" y="4370832"/>
-            <a:ext cx="4114800" cy="274320"/>
+            <a:off x="1280160" y="4251960"/>
+            <a:ext cx="2011680" cy="365760"/>
           </a:xfrm>
           <a:prstGeom prst="rect">
             <a:avLst/>
@@ -8240,29 +9731,29 @@
               <a:spcAft>
                 <a:spcPts val="0"/>
               </a:spcAft>
-              <a:defRPr sz="1200" b="0">
-                <a:solidFill>
-                  <a:srgbClr val="6B6860"/>
+              <a:defRPr sz="1300" b="0">
+                <a:solidFill>
+                  <a:srgbClr val="9A9690"/>
                 </a:solidFill>
                 <a:latin typeface="Calibri"/>
               </a:defRPr>
             </a:pPr>
             <a:r>
-              <a:t>Daily co-lead · Founding engineer</a:t>
-            </a:r>
-          </a:p>
-        </p:txBody>
-      </p:sp>
-      <p:sp>
-        <p:nvSpPr>
-          <p:cNvPr id="10" name="TextBox 9"/>
+              <a:t>Goal</a:t>
+            </a:r>
+          </a:p>
+        </p:txBody>
+      </p:sp>
+      <p:sp>
+        <p:nvSpPr>
+          <p:cNvPr id="12" name="TextBox 11"/>
           <p:cNvSpPr txBox="1"/>
           <p:nvPr/>
         </p:nvSpPr>
         <p:spPr>
           <a:xfrm>
-            <a:off x="7132320" y="4663440"/>
-            <a:ext cx="4114800" cy="274320"/>
+            <a:off x="3291840" y="4251960"/>
+            <a:ext cx="2926080" cy="365760"/>
           </a:xfrm>
           <a:prstGeom prst="rect">
             <a:avLst/>
@@ -8285,29 +9776,78 @@
               <a:spcAft>
                 <a:spcPts val="0"/>
               </a:spcAft>
-              <a:defRPr sz="1400" b="1">
+              <a:defRPr sz="1600" b="0">
                 <a:solidFill>
                   <a:srgbClr val="2C2A26"/>
                 </a:solidFill>
-                <a:latin typeface="Calibri"/>
+                <a:latin typeface="Georgia"/>
               </a:defRPr>
             </a:pPr>
             <a:r>
-              <a:t>Lucian Hymer</a:t>
-            </a:r>
-          </a:p>
-        </p:txBody>
-      </p:sp>
-      <p:sp>
-        <p:nvSpPr>
-          <p:cNvPr id="11" name="TextBox 10"/>
+              <a:t>Production launch by June · revenue immediately</a:t>
+            </a:r>
+          </a:p>
+        </p:txBody>
+      </p:sp>
+      <p:sp>
+        <p:nvSpPr>
+          <p:cNvPr id="13" name="TextBox 12"/>
           <p:cNvSpPr txBox="1"/>
           <p:nvPr/>
         </p:nvSpPr>
         <p:spPr>
           <a:xfrm>
-            <a:off x="7132320" y="4919472"/>
-            <a:ext cx="4114800" cy="274320"/>
+            <a:off x="1097280" y="5303520"/>
+            <a:ext cx="9144000" cy="914400"/>
+          </a:xfrm>
+          <a:prstGeom prst="rect">
+            <a:avLst/>
+          </a:prstGeom>
+          <a:noFill/>
+        </p:spPr>
+        <p:txBody>
+          <a:bodyPr wrap="square">
+            <a:spAutoFit/>
+          </a:bodyPr>
+          <a:lstStyle/>
+          <a:p>
+            <a:pPr algn="l">
+              <a:lnSpc>
+                <a:spcPct val="130000"/>
+              </a:lnSpc>
+              <a:spcBef>
+                <a:spcPts val="0"/>
+              </a:spcBef>
+              <a:spcAft>
+                <a:spcPts val="0"/>
+              </a:spcAft>
+              <a:defRPr sz="2800" b="0">
+                <a:solidFill>
+                  <a:srgbClr val="2C2A26"/>
+                </a:solidFill>
+                <a:latin typeface="Georgia"/>
+              </a:defRPr>
+            </a:pPr>
+            <a:r>
+              <a:t>Don’t compete with agents.</a:t>
+            </a:r>
+            <a:br/>
+            <a:r>
+              <a:t>Build what they all need.</a:t>
+            </a:r>
+          </a:p>
+        </p:txBody>
+      </p:sp>
+      <p:sp>
+        <p:nvSpPr>
+          <p:cNvPr id="14" name="TextBox 13"/>
+          <p:cNvSpPr txBox="1"/>
+          <p:nvPr/>
+        </p:nvSpPr>
+        <p:spPr>
+          <a:xfrm>
+            <a:off x="1097280" y="6126480"/>
+            <a:ext cx="9144000" cy="365760"/>
           </a:xfrm>
           <a:prstGeom prst="rect">
             <a:avLst/>
@@ -8332,193 +9872,13 @@
               </a:spcAft>
               <a:defRPr sz="1200" b="0">
                 <a:solidFill>
-                  <a:srgbClr val="6B6860"/>
+                  <a:srgbClr val="9A9690"/>
                 </a:solidFill>
                 <a:latin typeface="Calibri"/>
               </a:defRPr>
             </a:pPr>
             <a:r>
-              <a:t>Computer co-lead · Founding engineer</a:t>
-            </a:r>
-          </a:p>
-        </p:txBody>
-      </p:sp>
-      <p:sp>
-        <p:nvSpPr>
-          <p:cNvPr id="12" name="TextBox 11"/>
-          <p:cNvSpPr txBox="1"/>
-          <p:nvPr/>
-        </p:nvSpPr>
-        <p:spPr>
-          <a:xfrm>
-            <a:off x="7132320" y="5212080"/>
-            <a:ext cx="4114800" cy="274320"/>
-          </a:xfrm>
-          <a:prstGeom prst="rect">
-            <a:avLst/>
-          </a:prstGeom>
-          <a:noFill/>
-        </p:spPr>
-        <p:txBody>
-          <a:bodyPr wrap="square">
-            <a:spAutoFit/>
-          </a:bodyPr>
-          <a:lstStyle/>
-          <a:p>
-            <a:pPr algn="l">
-              <a:lnSpc>
-                <a:spcPct val="120000"/>
-              </a:lnSpc>
-              <a:spcBef>
-                <a:spcPts val="0"/>
-              </a:spcBef>
-              <a:spcAft>
-                <a:spcPts val="0"/>
-              </a:spcAft>
-              <a:defRPr sz="1400" b="1">
-                <a:solidFill>
-                  <a:srgbClr val="2C2A26"/>
-                </a:solidFill>
-                <a:latin typeface="Calibri"/>
-              </a:defRPr>
-            </a:pPr>
-            <a:r>
-              <a:t>Marvin Melzer</a:t>
-            </a:r>
-          </a:p>
-        </p:txBody>
-      </p:sp>
-      <p:sp>
-        <p:nvSpPr>
-          <p:cNvPr id="13" name="TextBox 12"/>
-          <p:cNvSpPr txBox="1"/>
-          <p:nvPr/>
-        </p:nvSpPr>
-        <p:spPr>
-          <a:xfrm>
-            <a:off x="7132320" y="5468112"/>
-            <a:ext cx="4114800" cy="274320"/>
-          </a:xfrm>
-          <a:prstGeom prst="rect">
-            <a:avLst/>
-          </a:prstGeom>
-          <a:noFill/>
-        </p:spPr>
-        <p:txBody>
-          <a:bodyPr wrap="square">
-            <a:spAutoFit/>
-          </a:bodyPr>
-          <a:lstStyle/>
-          <a:p>
-            <a:pPr algn="l">
-              <a:lnSpc>
-                <a:spcPct val="120000"/>
-              </a:lnSpc>
-              <a:spcBef>
-                <a:spcPts val="0"/>
-              </a:spcBef>
-              <a:spcAft>
-                <a:spcPts val="0"/>
-              </a:spcAft>
-              <a:defRPr sz="1200" b="0">
-                <a:solidFill>
-                  <a:srgbClr val="6B6860"/>
-                </a:solidFill>
-                <a:latin typeface="Calibri"/>
-              </a:defRPr>
-            </a:pPr>
-            <a:r>
-              <a:t>Hardware · Pendant prototype</a:t>
-            </a:r>
-          </a:p>
-        </p:txBody>
-      </p:sp>
-      <p:sp>
-        <p:nvSpPr>
-          <p:cNvPr id="14" name="TextBox 13"/>
-          <p:cNvSpPr txBox="1"/>
-          <p:nvPr/>
-        </p:nvSpPr>
-        <p:spPr>
-          <a:xfrm>
-            <a:off x="7132320" y="5760720"/>
-            <a:ext cx="4114800" cy="274320"/>
-          </a:xfrm>
-          <a:prstGeom prst="rect">
-            <a:avLst/>
-          </a:prstGeom>
-          <a:noFill/>
-        </p:spPr>
-        <p:txBody>
-          <a:bodyPr wrap="square">
-            <a:spAutoFit/>
-          </a:bodyPr>
-          <a:lstStyle/>
-          <a:p>
-            <a:pPr algn="l">
-              <a:lnSpc>
-                <a:spcPct val="120000"/>
-              </a:lnSpc>
-              <a:spcBef>
-                <a:spcPts val="0"/>
-              </a:spcBef>
-              <a:spcAft>
-                <a:spcPts val="0"/>
-              </a:spcAft>
-              <a:defRPr sz="1400" b="1">
-                <a:solidFill>
-                  <a:srgbClr val="2C2A26"/>
-                </a:solidFill>
-                <a:latin typeface="Calibri"/>
-              </a:defRPr>
-            </a:pPr>
-            <a:r>
-              <a:t>Neil Yarnal</a:t>
-            </a:r>
-          </a:p>
-        </p:txBody>
-      </p:sp>
-      <p:sp>
-        <p:nvSpPr>
-          <p:cNvPr id="15" name="TextBox 14"/>
-          <p:cNvSpPr txBox="1"/>
-          <p:nvPr/>
-        </p:nvSpPr>
-        <p:spPr>
-          <a:xfrm>
-            <a:off x="7132320" y="6016752"/>
-            <a:ext cx="4114800" cy="274320"/>
-          </a:xfrm>
-          <a:prstGeom prst="rect">
-            <a:avLst/>
-          </a:prstGeom>
-          <a:noFill/>
-        </p:spPr>
-        <p:txBody>
-          <a:bodyPr wrap="square">
-            <a:spAutoFit/>
-          </a:bodyPr>
-          <a:lstStyle/>
-          <a:p>
-            <a:pPr algn="l">
-              <a:lnSpc>
-                <a:spcPct val="120000"/>
-              </a:lnSpc>
-              <a:spcBef>
-                <a:spcPts val="0"/>
-              </a:spcBef>
-              <a:spcAft>
-                <a:spcPts val="0"/>
-              </a:spcAft>
-              <a:defRPr sz="1200" b="0">
-                <a:solidFill>
-                  <a:srgbClr val="6B6860"/>
-                </a:solidFill>
-                <a:latin typeface="Calibri"/>
-              </a:defRPr>
-            </a:pPr>
-            <a:r>
-              <a:t>Brand &amp; design</a:t>
+              <a:t>Aaron Gabriel Neyer  ·  aaron@parachute.computer  ·  Boulder, CO</a:t>
             </a:r>
           </a:p>
         </p:txBody>

--- a/nvc-pitch-deck.pptx
+++ b/nvc-pitch-deck.pptx
@@ -8692,7 +8692,97 @@
       </p:sp>
       <p:sp>
         <p:nvSpPr>
-          <p:cNvPr id="14" name="Rounded Rectangle 13"/>
+          <p:cNvPr id="14" name="TextBox 13"/>
+          <p:cNvSpPr txBox="1"/>
+          <p:nvPr/>
+        </p:nvSpPr>
+        <p:spPr>
+          <a:xfrm>
+            <a:off x="1188720" y="5138928"/>
+            <a:ext cx="274320" cy="274320"/>
+          </a:xfrm>
+          <a:prstGeom prst="rect">
+            <a:avLst/>
+          </a:prstGeom>
+          <a:noFill/>
+        </p:spPr>
+        <p:txBody>
+          <a:bodyPr wrap="square">
+            <a:spAutoFit/>
+          </a:bodyPr>
+          <a:lstStyle/>
+          <a:p>
+            <a:pPr algn="l">
+              <a:lnSpc>
+                <a:spcPct val="120000"/>
+              </a:lnSpc>
+              <a:spcBef>
+                <a:spcPts val="0"/>
+              </a:spcBef>
+              <a:spcAft>
+                <a:spcPts val="0"/>
+              </a:spcAft>
+              <a:defRPr sz="1400" b="0">
+                <a:solidFill>
+                  <a:srgbClr val="4A7C59"/>
+                </a:solidFill>
+                <a:latin typeface="Calibri"/>
+              </a:defRPr>
+            </a:pPr>
+            <a:r>
+              <a:t>•</a:t>
+            </a:r>
+          </a:p>
+        </p:txBody>
+      </p:sp>
+      <p:sp>
+        <p:nvSpPr>
+          <p:cNvPr id="15" name="TextBox 14"/>
+          <p:cNvSpPr txBox="1"/>
+          <p:nvPr/>
+        </p:nvSpPr>
+        <p:spPr>
+          <a:xfrm>
+            <a:off x="1554480" y="5120640"/>
+            <a:ext cx="4572000" cy="365760"/>
+          </a:xfrm>
+          <a:prstGeom prst="rect">
+            <a:avLst/>
+          </a:prstGeom>
+          <a:noFill/>
+        </p:spPr>
+        <p:txBody>
+          <a:bodyPr wrap="square">
+            <a:spAutoFit/>
+          </a:bodyPr>
+          <a:lstStyle/>
+          <a:p>
+            <a:pPr algn="l">
+              <a:lnSpc>
+                <a:spcPct val="130000"/>
+              </a:lnSpc>
+              <a:spcBef>
+                <a:spcPts val="0"/>
+              </a:spcBef>
+              <a:spcAft>
+                <a:spcPts val="0"/>
+              </a:spcAft>
+              <a:defRPr sz="1500" b="0">
+                <a:solidFill>
+                  <a:srgbClr val="6B6860"/>
+                </a:solidFill>
+                <a:latin typeface="Calibri"/>
+              </a:defRPr>
+            </a:pPr>
+            <a:r>
+              <a:t>Learn Vibe Build AI school (Cohort 0 complete, Cohort 1 launching) — organic growth channel</a:t>
+            </a:r>
+          </a:p>
+        </p:txBody>
+      </p:sp>
+      <p:sp>
+        <p:nvSpPr>
+          <p:cNvPr id="16" name="Rounded Rectangle 15"/>
           <p:cNvSpPr/>
           <p:nvPr/>
         </p:nvSpPr>
@@ -8737,7 +8827,7 @@
       </p:sp>
       <p:sp>
         <p:nvSpPr>
-          <p:cNvPr id="15" name="TextBox 14"/>
+          <p:cNvPr id="17" name="TextBox 16"/>
           <p:cNvSpPr txBox="1"/>
           <p:nvPr/>
         </p:nvSpPr>
@@ -8782,7 +8872,7 @@
       </p:sp>
       <p:sp>
         <p:nvSpPr>
-          <p:cNvPr id="16" name="TextBox 15"/>
+          <p:cNvPr id="18" name="TextBox 17"/>
           <p:cNvSpPr txBox="1"/>
           <p:nvPr/>
         </p:nvSpPr>
@@ -8827,7 +8917,7 @@
       </p:sp>
       <p:sp>
         <p:nvSpPr>
-          <p:cNvPr id="17" name="TextBox 16"/>
+          <p:cNvPr id="19" name="TextBox 18"/>
           <p:cNvSpPr txBox="1"/>
           <p:nvPr/>
         </p:nvSpPr>
@@ -8872,7 +8962,7 @@
       </p:sp>
       <p:sp>
         <p:nvSpPr>
-          <p:cNvPr id="18" name="TextBox 17"/>
+          <p:cNvPr id="20" name="TextBox 19"/>
           <p:cNvSpPr txBox="1"/>
           <p:nvPr/>
         </p:nvSpPr>
@@ -8917,7 +9007,7 @@
       </p:sp>
       <p:sp>
         <p:nvSpPr>
-          <p:cNvPr id="19" name="TextBox 18"/>
+          <p:cNvPr id="21" name="TextBox 20"/>
           <p:cNvSpPr txBox="1"/>
           <p:nvPr/>
         </p:nvSpPr>
@@ -8962,7 +9052,7 @@
       </p:sp>
       <p:sp>
         <p:nvSpPr>
-          <p:cNvPr id="20" name="TextBox 19"/>
+          <p:cNvPr id="22" name="TextBox 21"/>
           <p:cNvSpPr txBox="1"/>
           <p:nvPr/>
         </p:nvSpPr>
@@ -9007,7 +9097,7 @@
       </p:sp>
       <p:sp>
         <p:nvSpPr>
-          <p:cNvPr id="21" name="TextBox 20"/>
+          <p:cNvPr id="23" name="TextBox 22"/>
           <p:cNvSpPr txBox="1"/>
           <p:nvPr/>
         </p:nvSpPr>
@@ -9052,7 +9142,7 @@
       </p:sp>
       <p:sp>
         <p:nvSpPr>
-          <p:cNvPr id="22" name="TextBox 21"/>
+          <p:cNvPr id="24" name="TextBox 23"/>
           <p:cNvSpPr txBox="1"/>
           <p:nvPr/>
         </p:nvSpPr>
@@ -9097,7 +9187,7 @@
       </p:sp>
       <p:sp>
         <p:nvSpPr>
-          <p:cNvPr id="23" name="TextBox 22"/>
+          <p:cNvPr id="25" name="TextBox 24"/>
           <p:cNvSpPr txBox="1"/>
           <p:nvPr/>
         </p:nvSpPr>
@@ -9142,7 +9232,7 @@
       </p:sp>
       <p:sp>
         <p:nvSpPr>
-          <p:cNvPr id="24" name="TextBox 23"/>
+          <p:cNvPr id="26" name="TextBox 25"/>
           <p:cNvSpPr txBox="1"/>
           <p:nvPr/>
         </p:nvSpPr>
@@ -9187,7 +9277,7 @@
       </p:sp>
       <p:sp>
         <p:nvSpPr>
-          <p:cNvPr id="25" name="TextBox 24"/>
+          <p:cNvPr id="27" name="TextBox 26"/>
           <p:cNvSpPr txBox="1"/>
           <p:nvPr/>
         </p:nvSpPr>
@@ -9232,7 +9322,7 @@
       </p:sp>
       <p:sp>
         <p:nvSpPr>
-          <p:cNvPr id="26" name="TextBox 25"/>
+          <p:cNvPr id="28" name="TextBox 27"/>
           <p:cNvSpPr txBox="1"/>
           <p:nvPr/>
         </p:nvSpPr>
@@ -9270,7 +9360,7 @@
               </a:defRPr>
             </a:pPr>
             <a:r>
-              <a:t>MA Ecopsychology · MS Creative Technology &amp; Design (CU ATLAS) · Founding engineer ×2 · Ex-Google · 10+ years full stack</a:t>
+              <a:t>MA Ecopsychology · MS Creative Technology &amp; Design (CU ATLAS, graduating May 2026) · Founding engineer ×2 · Ex-Google · 10+ years full stack</a:t>
             </a:r>
           </a:p>
         </p:txBody>
@@ -9469,7 +9559,7 @@
             </a:r>
             <a:br/>
             <a:r>
-              <a:t>the personal data layer.</a:t>
+              <a:t>the memory layer.</a:t>
             </a:r>
           </a:p>
         </p:txBody>
@@ -9829,11 +9919,11 @@
               </a:defRPr>
             </a:pPr>
             <a:r>
-              <a:t>Don’t compete with agents.</a:t>
+              <a:t>A memory layer for humans and AI</a:t>
             </a:r>
             <a:br/>
             <a:r>
-              <a:t>Build what they all need.</a:t>
+              <a:t>to think and remember together.</a:t>
             </a:r>
           </a:p>
         </p:txBody>
@@ -9878,7 +9968,7 @@
               </a:defRPr>
             </a:pPr>
             <a:r>
-              <a:t>Aaron Gabriel Neyer  ·  aaron@parachute.computer  ·  Boulder, CO</a:t>
+              <a:t>Aaron Gabriel Neyer  ·  aaron@parachute.computer  ·  (513) 593-1721  ·  Boulder, CO</a:t>
             </a:r>
           </a:p>
         </p:txBody>

--- a/nvc-pitch-deck.pptx
+++ b/nvc-pitch-deck.pptx
@@ -4438,7 +4438,7 @@
         <p:spPr>
           <a:xfrm>
             <a:off x="1097280" y="3200400"/>
-            <a:ext cx="5029200" cy="1371600"/>
+            <a:ext cx="4754880" cy="1097280"/>
           </a:xfrm>
           <a:prstGeom prst="rect">
             <a:avLst/>
@@ -4453,7 +4453,7 @@
           <a:p>
             <a:pPr algn="l">
               <a:lnSpc>
-                <a:spcPct val="150000"/>
+                <a:spcPct val="145000"/>
               </a:lnSpc>
               <a:spcBef>
                 <a:spcPts val="0"/>
@@ -4461,7 +4461,7 @@
               <a:spcAft>
                 <a:spcPts val="0"/>
               </a:spcAft>
-              <a:defRPr sz="1800" b="0">
+              <a:defRPr sz="1600" b="0">
                 <a:solidFill>
                   <a:srgbClr val="6B6860"/>
                 </a:solidFill>
@@ -4469,20 +4469,19 @@
               </a:defRPr>
             </a:pPr>
             <a:r>
-              <a:t>Your data lives in a graph database organized around</a:t>
+              <a:t>Your data lives in a graph database organized</a:t>
             </a:r>
             <a:br/>
             <a:r>
-              <a:t>three primitives: Things, Tags, and Tools.</a:t>
+              <a:t>around three primitives: Things, Tags, and Tools.</a:t>
             </a:r>
             <a:br/>
+            <a:r>
+              <a:t>The system speaks MCP — the open standard for</a:t>
+            </a:r>
             <a:br/>
             <a:r>
-              <a:t>The whole system speaks MCP — the open standard</a:t>
-            </a:r>
-            <a:br/>
-            <a:r>
-              <a:t>for connecting AI to tools.</a:t>
+              <a:t>connecting AI to tools.</a:t>
             </a:r>
           </a:p>
         </p:txBody>
@@ -4495,8 +4494,8 @@
         </p:nvSpPr>
         <p:spPr>
           <a:xfrm>
-            <a:off x="1097280" y="4846320"/>
-            <a:ext cx="5029200" cy="914400"/>
+            <a:off x="1097280" y="4480560"/>
+            <a:ext cx="4754880" cy="822960"/>
           </a:xfrm>
           <a:prstGeom prst="rect">
             <a:avLst/>
@@ -4511,7 +4510,7 @@
           <a:p>
             <a:pPr algn="l">
               <a:lnSpc>
-                <a:spcPct val="150000"/>
+                <a:spcPct val="145000"/>
               </a:lnSpc>
               <a:spcBef>
                 <a:spcPts val="0"/>
@@ -4519,7 +4518,7 @@
               <a:spcAft>
                 <a:spcPts val="0"/>
               </a:spcAft>
-              <a:defRPr sz="1600" b="0">
+              <a:defRPr sz="1500" b="0">
                 <a:solidFill>
                   <a:srgbClr val="6B6860"/>
                 </a:solidFill>
@@ -4531,7 +4530,11 @@
             </a:r>
             <a:br/>
             <a:r>
-              <a:t>People nodes. Project nodes. A living knowledge graph.</a:t>
+              <a:t>People nodes. Project nodes.</a:t>
+            </a:r>
+            <a:br/>
+            <a:r>
+              <a:t>A living knowledge graph.</a:t>
             </a:r>
           </a:p>
         </p:txBody>
@@ -4544,8 +4547,8 @@
         </p:nvSpPr>
         <p:spPr>
           <a:xfrm>
-            <a:off x="6858000" y="2743200"/>
-            <a:ext cx="4572000" cy="3657600"/>
+            <a:off x="6400800" y="2743200"/>
+            <a:ext cx="5029200" cy="3474720"/>
           </a:xfrm>
           <a:prstGeom prst="roundRect">
             <a:avLst/>
@@ -4589,8 +4592,8 @@
         </p:nvSpPr>
         <p:spPr>
           <a:xfrm>
-            <a:off x="7223760" y="2926080"/>
-            <a:ext cx="3657600" cy="274320"/>
+            <a:off x="6766560" y="2926080"/>
+            <a:ext cx="4114800" cy="274320"/>
           </a:xfrm>
           <a:prstGeom prst="rect">
             <a:avLst/>
@@ -4634,8 +4637,8 @@
         </p:nvSpPr>
         <p:spPr>
           <a:xfrm>
-            <a:off x="7223760" y="3200400"/>
-            <a:ext cx="3657600" cy="365760"/>
+            <a:off x="6766560" y="3200400"/>
+            <a:ext cx="4114800" cy="365760"/>
           </a:xfrm>
           <a:prstGeom prst="rect">
             <a:avLst/>
@@ -4679,7 +4682,7 @@
         </p:nvSpPr>
         <p:spPr>
           <a:xfrm>
-            <a:off x="8686800" y="3611880"/>
+            <a:off x="8412480" y="3566160"/>
             <a:ext cx="914400" cy="274320"/>
           </a:xfrm>
           <a:prstGeom prst="rect">
@@ -4724,8 +4727,8 @@
         </p:nvSpPr>
         <p:spPr>
           <a:xfrm>
-            <a:off x="7223760" y="3931920"/>
-            <a:ext cx="3657600" cy="274320"/>
+            <a:off x="6766560" y="3840480"/>
+            <a:ext cx="4114800" cy="274320"/>
           </a:xfrm>
           <a:prstGeom prst="rect">
             <a:avLst/>
@@ -4769,8 +4772,8 @@
         </p:nvSpPr>
         <p:spPr>
           <a:xfrm>
-            <a:off x="7132320" y="4160520"/>
-            <a:ext cx="4023360" cy="502920"/>
+            <a:off x="6675120" y="4069080"/>
+            <a:ext cx="4389120" cy="457200"/>
           </a:xfrm>
           <a:prstGeom prst="roundRect">
             <a:avLst/>
@@ -4814,8 +4817,8 @@
         </p:nvSpPr>
         <p:spPr>
           <a:xfrm>
-            <a:off x="7315200" y="4206240"/>
-            <a:ext cx="3657600" cy="365760"/>
+            <a:off x="6858000" y="4114800"/>
+            <a:ext cx="4114800" cy="365760"/>
           </a:xfrm>
           <a:prstGeom prst="rect">
             <a:avLst/>
@@ -4859,7 +4862,7 @@
         </p:nvSpPr>
         <p:spPr>
           <a:xfrm>
-            <a:off x="8412480" y="4709160"/>
+            <a:off x="8229600" y="4572000"/>
             <a:ext cx="1371600" cy="274320"/>
           </a:xfrm>
           <a:prstGeom prst="rect">
@@ -4904,8 +4907,8 @@
         </p:nvSpPr>
         <p:spPr>
           <a:xfrm>
-            <a:off x="7223760" y="5029200"/>
-            <a:ext cx="3657600" cy="274320"/>
+            <a:off x="6766560" y="4846320"/>
+            <a:ext cx="4114800" cy="274320"/>
           </a:xfrm>
           <a:prstGeom prst="rect">
             <a:avLst/>
@@ -4949,8 +4952,8 @@
         </p:nvSpPr>
         <p:spPr>
           <a:xfrm>
-            <a:off x="7223760" y="5303520"/>
-            <a:ext cx="3657600" cy="365760"/>
+            <a:off x="6766560" y="5120640"/>
+            <a:ext cx="4114800" cy="365760"/>
           </a:xfrm>
           <a:prstGeom prst="rect">
             <a:avLst/>
@@ -4995,7 +4998,7 @@
         <p:spPr>
           <a:xfrm>
             <a:off x="1097280" y="5760720"/>
-            <a:ext cx="9144000" cy="548640"/>
+            <a:ext cx="10058400" cy="548640"/>
           </a:xfrm>
           <a:prstGeom prst="rect">
             <a:avLst/>
@@ -5010,7 +5013,7 @@
           <a:p>
             <a:pPr algn="l">
               <a:lnSpc>
-                <a:spcPct val="130000"/>
+                <a:spcPct val="120000"/>
               </a:lnSpc>
               <a:spcBef>
                 <a:spcPts val="0"/>
@@ -5018,7 +5021,7 @@
               <a:spcAft>
                 <a:spcPts val="0"/>
               </a:spcAft>
-              <a:defRPr sz="2000" b="0">
+              <a:defRPr sz="1800" b="0">
                 <a:solidFill>
                   <a:srgbClr val="2C2A26"/>
                 </a:solidFill>
@@ -5026,11 +5029,7 @@
               </a:defRPr>
             </a:pPr>
             <a:r>
-              <a:t>We’re not trying to build the most intelligent tool.</a:t>
-            </a:r>
-            <a:br/>
-            <a:r>
-              <a:t>We’re building the most important tool for intelligent systems to use.</a:t>
+              <a:t>We’re not trying to build the most intelligent tool. We’re building the most important tool for intelligent systems to use.</a:t>
             </a:r>
           </a:p>
         </p:txBody>
@@ -8362,7 +8361,7 @@
               <a:spcAft>
                 <a:spcPts val="0"/>
               </a:spcAft>
-              <a:defRPr sz="1400" b="0">
+              <a:defRPr sz="1200" b="0">
                 <a:solidFill>
                   <a:srgbClr val="4A7C59"/>
                 </a:solidFill>
@@ -8384,52 +8383,7 @@
         <p:spPr>
           <a:xfrm>
             <a:off x="1554480" y="3291840"/>
-            <a:ext cx="4572000" cy="365760"/>
-          </a:xfrm>
-          <a:prstGeom prst="rect">
-            <a:avLst/>
-          </a:prstGeom>
-          <a:noFill/>
-        </p:spPr>
-        <p:txBody>
-          <a:bodyPr wrap="square">
-            <a:spAutoFit/>
-          </a:bodyPr>
-          <a:lstStyle/>
-          <a:p>
-            <a:pPr algn="l">
-              <a:lnSpc>
-                <a:spcPct val="130000"/>
-              </a:lnSpc>
-              <a:spcBef>
-                <a:spcPts val="0"/>
-              </a:spcBef>
-              <a:spcAft>
-                <a:spcPts val="0"/>
-              </a:spcAft>
-              <a:defRPr sz="1500" b="0">
-                <a:solidFill>
-                  <a:srgbClr val="6B6860"/>
-                </a:solidFill>
-                <a:latin typeface="Calibri"/>
-              </a:defRPr>
-            </a:pPr>
-            <a:r>
-              <a:t>Working app with local voice transcription + graph-native storage</a:t>
-            </a:r>
-          </a:p>
-        </p:txBody>
-      </p:sp>
-      <p:sp>
-        <p:nvSpPr>
-          <p:cNvPr id="8" name="TextBox 7"/>
-          <p:cNvSpPr txBox="1"/>
-          <p:nvPr/>
-        </p:nvSpPr>
-        <p:spPr>
-          <a:xfrm>
-            <a:off x="1188720" y="3767328"/>
-            <a:ext cx="274320" cy="274320"/>
+            <a:ext cx="4572000" cy="320040"/>
           </a:xfrm>
           <a:prstGeom prst="rect">
             <a:avLst/>
@@ -8452,73 +8406,28 @@
               <a:spcAft>
                 <a:spcPts val="0"/>
               </a:spcAft>
-              <a:defRPr sz="1400" b="0">
-                <a:solidFill>
-                  <a:srgbClr val="4A7C59"/>
+              <a:defRPr sz="1300" b="0">
+                <a:solidFill>
+                  <a:srgbClr val="6B6860"/>
                 </a:solidFill>
                 <a:latin typeface="Calibri"/>
               </a:defRPr>
             </a:pPr>
             <a:r>
-              <a:t>•</a:t>
-            </a:r>
-          </a:p>
-        </p:txBody>
-      </p:sp>
-      <p:sp>
-        <p:nvSpPr>
-          <p:cNvPr id="9" name="TextBox 8"/>
+              <a:t>Working app with local voice transcription + graph-native storage</a:t>
+            </a:r>
+          </a:p>
+        </p:txBody>
+      </p:sp>
+      <p:sp>
+        <p:nvSpPr>
+          <p:cNvPr id="8" name="TextBox 7"/>
           <p:cNvSpPr txBox="1"/>
           <p:nvPr/>
         </p:nvSpPr>
         <p:spPr>
           <a:xfrm>
-            <a:off x="1554480" y="3749040"/>
-            <a:ext cx="4572000" cy="365760"/>
-          </a:xfrm>
-          <a:prstGeom prst="rect">
-            <a:avLst/>
-          </a:prstGeom>
-          <a:noFill/>
-        </p:spPr>
-        <p:txBody>
-          <a:bodyPr wrap="square">
-            <a:spAutoFit/>
-          </a:bodyPr>
-          <a:lstStyle/>
-          <a:p>
-            <a:pPr algn="l">
-              <a:lnSpc>
-                <a:spcPct val="130000"/>
-              </a:lnSpc>
-              <a:spcBef>
-                <a:spcPts val="0"/>
-              </a:spcBef>
-              <a:spcAft>
-                <a:spcPts val="0"/>
-              </a:spcAft>
-              <a:defRPr sz="1500" b="0">
-                <a:solidFill>
-                  <a:srgbClr val="6B6860"/>
-                </a:solidFill>
-                <a:latin typeface="Calibri"/>
-              </a:defRPr>
-            </a:pPr>
-            <a:r>
-              <a:t>MCP server with Things, Tags, Tools architecture</a:t>
-            </a:r>
-          </a:p>
-        </p:txBody>
-      </p:sp>
-      <p:sp>
-        <p:nvSpPr>
-          <p:cNvPr id="10" name="TextBox 9"/>
-          <p:cNvSpPr txBox="1"/>
-          <p:nvPr/>
-        </p:nvSpPr>
-        <p:spPr>
-          <a:xfrm>
-            <a:off x="1188720" y="4224528"/>
+            <a:off x="1188720" y="3694176"/>
             <a:ext cx="274320" cy="274320"/>
           </a:xfrm>
           <a:prstGeom prst="rect">
@@ -8542,7 +8451,7 @@
               <a:spcAft>
                 <a:spcPts val="0"/>
               </a:spcAft>
-              <a:defRPr sz="1400" b="0">
+              <a:defRPr sz="1200" b="0">
                 <a:solidFill>
                   <a:srgbClr val="4A7C59"/>
                 </a:solidFill>
@@ -8557,59 +8466,14 @@
       </p:sp>
       <p:sp>
         <p:nvSpPr>
-          <p:cNvPr id="11" name="TextBox 10"/>
+          <p:cNvPr id="9" name="TextBox 8"/>
           <p:cNvSpPr txBox="1"/>
           <p:nvPr/>
         </p:nvSpPr>
         <p:spPr>
           <a:xfrm>
-            <a:off x="1554480" y="4206240"/>
-            <a:ext cx="4572000" cy="365760"/>
-          </a:xfrm>
-          <a:prstGeom prst="rect">
-            <a:avLst/>
-          </a:prstGeom>
-          <a:noFill/>
-        </p:spPr>
-        <p:txBody>
-          <a:bodyPr wrap="square">
-            <a:spAutoFit/>
-          </a:bodyPr>
-          <a:lstStyle/>
-          <a:p>
-            <a:pPr algn="l">
-              <a:lnSpc>
-                <a:spcPct val="130000"/>
-              </a:lnSpc>
-              <a:spcBef>
-                <a:spcPts val="0"/>
-              </a:spcBef>
-              <a:spcAft>
-                <a:spcPts val="0"/>
-              </a:spcAft>
-              <a:defRPr sz="1500" b="0">
-                <a:solidFill>
-                  <a:srgbClr val="6B6860"/>
-                </a:solidFill>
-                <a:latin typeface="Calibri"/>
-              </a:defRPr>
-            </a:pPr>
-            <a:r>
-              <a:t>Functional pendant prototype (on stage today)</a:t>
-            </a:r>
-          </a:p>
-        </p:txBody>
-      </p:sp>
-      <p:sp>
-        <p:nvSpPr>
-          <p:cNvPr id="12" name="TextBox 11"/>
-          <p:cNvSpPr txBox="1"/>
-          <p:nvPr/>
-        </p:nvSpPr>
-        <p:spPr>
-          <a:xfrm>
-            <a:off x="1188720" y="4681728"/>
-            <a:ext cx="274320" cy="274320"/>
+            <a:off x="1554480" y="3675888"/>
+            <a:ext cx="4572000" cy="320040"/>
           </a:xfrm>
           <a:prstGeom prst="rect">
             <a:avLst/>
@@ -8632,73 +8496,28 @@
               <a:spcAft>
                 <a:spcPts val="0"/>
               </a:spcAft>
-              <a:defRPr sz="1400" b="0">
-                <a:solidFill>
-                  <a:srgbClr val="4A7C59"/>
+              <a:defRPr sz="1300" b="0">
+                <a:solidFill>
+                  <a:srgbClr val="6B6860"/>
                 </a:solidFill>
                 <a:latin typeface="Calibri"/>
               </a:defRPr>
             </a:pPr>
             <a:r>
-              <a:t>•</a:t>
-            </a:r>
-          </a:p>
-        </p:txBody>
-      </p:sp>
-      <p:sp>
-        <p:nvSpPr>
-          <p:cNvPr id="13" name="TextBox 12"/>
+              <a:t>MCP server with Things, Tags, Tools architecture</a:t>
+            </a:r>
+          </a:p>
+        </p:txBody>
+      </p:sp>
+      <p:sp>
+        <p:nvSpPr>
+          <p:cNvPr id="10" name="TextBox 9"/>
           <p:cNvSpPr txBox="1"/>
           <p:nvPr/>
         </p:nvSpPr>
         <p:spPr>
           <a:xfrm>
-            <a:off x="1554480" y="4663440"/>
-            <a:ext cx="4572000" cy="365760"/>
-          </a:xfrm>
-          <a:prstGeom prst="rect">
-            <a:avLst/>
-          </a:prstGeom>
-          <a:noFill/>
-        </p:spPr>
-        <p:txBody>
-          <a:bodyPr wrap="square">
-            <a:spAutoFit/>
-          </a:bodyPr>
-          <a:lstStyle/>
-          <a:p>
-            <a:pPr algn="l">
-              <a:lnSpc>
-                <a:spcPct val="130000"/>
-              </a:lnSpc>
-              <a:spcBef>
-                <a:spcPts val="0"/>
-              </a:spcBef>
-              <a:spcAft>
-                <a:spcPts val="0"/>
-              </a:spcAft>
-              <a:defRPr sz="1500" b="0">
-                <a:solidFill>
-                  <a:srgbClr val="6B6860"/>
-                </a:solidFill>
-                <a:latin typeface="Calibri"/>
-              </a:defRPr>
-            </a:pPr>
-            <a:r>
-              <a:t>Daily beta launching this month · PBC incorporated in Colorado</a:t>
-            </a:r>
-          </a:p>
-        </p:txBody>
-      </p:sp>
-      <p:sp>
-        <p:nvSpPr>
-          <p:cNvPr id="14" name="TextBox 13"/>
-          <p:cNvSpPr txBox="1"/>
-          <p:nvPr/>
-        </p:nvSpPr>
-        <p:spPr>
-          <a:xfrm>
-            <a:off x="1188720" y="5138928"/>
+            <a:off x="1188720" y="4078224"/>
             <a:ext cx="274320" cy="274320"/>
           </a:xfrm>
           <a:prstGeom prst="rect">
@@ -8722,7 +8541,7 @@
               <a:spcAft>
                 <a:spcPts val="0"/>
               </a:spcAft>
-              <a:defRPr sz="1400" b="0">
+              <a:defRPr sz="1200" b="0">
                 <a:solidFill>
                   <a:srgbClr val="4A7C59"/>
                 </a:solidFill>
@@ -8737,14 +8556,14 @@
       </p:sp>
       <p:sp>
         <p:nvSpPr>
-          <p:cNvPr id="15" name="TextBox 14"/>
+          <p:cNvPr id="11" name="TextBox 10"/>
           <p:cNvSpPr txBox="1"/>
           <p:nvPr/>
         </p:nvSpPr>
         <p:spPr>
           <a:xfrm>
-            <a:off x="1554480" y="5120640"/>
-            <a:ext cx="4572000" cy="365760"/>
+            <a:off x="1554480" y="4059936"/>
+            <a:ext cx="4572000" cy="320040"/>
           </a:xfrm>
           <a:prstGeom prst="rect">
             <a:avLst/>
@@ -8759,7 +8578,7 @@
           <a:p>
             <a:pPr algn="l">
               <a:lnSpc>
-                <a:spcPct val="130000"/>
+                <a:spcPct val="120000"/>
               </a:lnSpc>
               <a:spcBef>
                 <a:spcPts val="0"/>
@@ -8767,7 +8586,187 @@
               <a:spcAft>
                 <a:spcPts val="0"/>
               </a:spcAft>
-              <a:defRPr sz="1500" b="0">
+              <a:defRPr sz="1300" b="0">
+                <a:solidFill>
+                  <a:srgbClr val="6B6860"/>
+                </a:solidFill>
+                <a:latin typeface="Calibri"/>
+              </a:defRPr>
+            </a:pPr>
+            <a:r>
+              <a:t>Functional pendant prototype (on stage today)</a:t>
+            </a:r>
+          </a:p>
+        </p:txBody>
+      </p:sp>
+      <p:sp>
+        <p:nvSpPr>
+          <p:cNvPr id="12" name="TextBox 11"/>
+          <p:cNvSpPr txBox="1"/>
+          <p:nvPr/>
+        </p:nvSpPr>
+        <p:spPr>
+          <a:xfrm>
+            <a:off x="1188720" y="4462272"/>
+            <a:ext cx="274320" cy="274320"/>
+          </a:xfrm>
+          <a:prstGeom prst="rect">
+            <a:avLst/>
+          </a:prstGeom>
+          <a:noFill/>
+        </p:spPr>
+        <p:txBody>
+          <a:bodyPr wrap="square">
+            <a:spAutoFit/>
+          </a:bodyPr>
+          <a:lstStyle/>
+          <a:p>
+            <a:pPr algn="l">
+              <a:lnSpc>
+                <a:spcPct val="120000"/>
+              </a:lnSpc>
+              <a:spcBef>
+                <a:spcPts val="0"/>
+              </a:spcBef>
+              <a:spcAft>
+                <a:spcPts val="0"/>
+              </a:spcAft>
+              <a:defRPr sz="1200" b="0">
+                <a:solidFill>
+                  <a:srgbClr val="4A7C59"/>
+                </a:solidFill>
+                <a:latin typeface="Calibri"/>
+              </a:defRPr>
+            </a:pPr>
+            <a:r>
+              <a:t>•</a:t>
+            </a:r>
+          </a:p>
+        </p:txBody>
+      </p:sp>
+      <p:sp>
+        <p:nvSpPr>
+          <p:cNvPr id="13" name="TextBox 12"/>
+          <p:cNvSpPr txBox="1"/>
+          <p:nvPr/>
+        </p:nvSpPr>
+        <p:spPr>
+          <a:xfrm>
+            <a:off x="1554480" y="4443984"/>
+            <a:ext cx="4572000" cy="320040"/>
+          </a:xfrm>
+          <a:prstGeom prst="rect">
+            <a:avLst/>
+          </a:prstGeom>
+          <a:noFill/>
+        </p:spPr>
+        <p:txBody>
+          <a:bodyPr wrap="square">
+            <a:spAutoFit/>
+          </a:bodyPr>
+          <a:lstStyle/>
+          <a:p>
+            <a:pPr algn="l">
+              <a:lnSpc>
+                <a:spcPct val="120000"/>
+              </a:lnSpc>
+              <a:spcBef>
+                <a:spcPts val="0"/>
+              </a:spcBef>
+              <a:spcAft>
+                <a:spcPts val="0"/>
+              </a:spcAft>
+              <a:defRPr sz="1300" b="0">
+                <a:solidFill>
+                  <a:srgbClr val="6B6860"/>
+                </a:solidFill>
+                <a:latin typeface="Calibri"/>
+              </a:defRPr>
+            </a:pPr>
+            <a:r>
+              <a:t>Daily beta launching this month · PBC incorporated in Colorado</a:t>
+            </a:r>
+          </a:p>
+        </p:txBody>
+      </p:sp>
+      <p:sp>
+        <p:nvSpPr>
+          <p:cNvPr id="14" name="TextBox 13"/>
+          <p:cNvSpPr txBox="1"/>
+          <p:nvPr/>
+        </p:nvSpPr>
+        <p:spPr>
+          <a:xfrm>
+            <a:off x="1188720" y="4846320"/>
+            <a:ext cx="274320" cy="274320"/>
+          </a:xfrm>
+          <a:prstGeom prst="rect">
+            <a:avLst/>
+          </a:prstGeom>
+          <a:noFill/>
+        </p:spPr>
+        <p:txBody>
+          <a:bodyPr wrap="square">
+            <a:spAutoFit/>
+          </a:bodyPr>
+          <a:lstStyle/>
+          <a:p>
+            <a:pPr algn="l">
+              <a:lnSpc>
+                <a:spcPct val="120000"/>
+              </a:lnSpc>
+              <a:spcBef>
+                <a:spcPts val="0"/>
+              </a:spcBef>
+              <a:spcAft>
+                <a:spcPts val="0"/>
+              </a:spcAft>
+              <a:defRPr sz="1200" b="0">
+                <a:solidFill>
+                  <a:srgbClr val="4A7C59"/>
+                </a:solidFill>
+                <a:latin typeface="Calibri"/>
+              </a:defRPr>
+            </a:pPr>
+            <a:r>
+              <a:t>•</a:t>
+            </a:r>
+          </a:p>
+        </p:txBody>
+      </p:sp>
+      <p:sp>
+        <p:nvSpPr>
+          <p:cNvPr id="15" name="TextBox 14"/>
+          <p:cNvSpPr txBox="1"/>
+          <p:nvPr/>
+        </p:nvSpPr>
+        <p:spPr>
+          <a:xfrm>
+            <a:off x="1554480" y="4828032"/>
+            <a:ext cx="4572000" cy="320040"/>
+          </a:xfrm>
+          <a:prstGeom prst="rect">
+            <a:avLst/>
+          </a:prstGeom>
+          <a:noFill/>
+        </p:spPr>
+        <p:txBody>
+          <a:bodyPr wrap="square">
+            <a:spAutoFit/>
+          </a:bodyPr>
+          <a:lstStyle/>
+          <a:p>
+            <a:pPr algn="l">
+              <a:lnSpc>
+                <a:spcPct val="120000"/>
+              </a:lnSpc>
+              <a:spcBef>
+                <a:spcPts val="0"/>
+              </a:spcBef>
+              <a:spcAft>
+                <a:spcPts val="0"/>
+              </a:spcAft>
+              <a:defRPr sz="1300" b="0">
                 <a:solidFill>
                   <a:srgbClr val="6B6860"/>
                 </a:solidFill>
